--- a/webanalytics/Solidigm_Analytics_Report_JanFeb_FY26.pptx
+++ b/webanalytics/Solidigm_Analytics_Report_JanFeb_FY26.pptx
@@ -16421,7 +16421,7 @@
         <p:spPr>
           <a:xfrm>
             <a:off x="4434840" y="2971800"/>
-            <a:ext cx="7589520" cy="411480"/>
+            <a:ext cx="1143000" cy="411480"/>
           </a:xfrm>
           <a:prstGeom prst="rect">
             <a:avLst/>
@@ -16442,7 +16442,7 @@
                 </a:solidFill>
                 <a:latin typeface="Calibri"/>
               </a:rPr>
-              <a:t>1,430 of 2,446 visitors continued browsing</a:t>
+              <a:t>1,430 / 2,446 continued</a:t>
             </a:r>
           </a:p>
         </p:txBody>
@@ -16526,7 +16526,7 @@
         <p:spPr>
           <a:xfrm>
             <a:off x="4434840" y="3685032"/>
-            <a:ext cx="7589520" cy="411480"/>
+            <a:ext cx="1143000" cy="411480"/>
           </a:xfrm>
           <a:prstGeom prst="rect">
             <a:avLst/>
@@ -16547,7 +16547,7 @@
                 </a:solidFill>
                 <a:latin typeface="Calibri"/>
               </a:rPr>
-              <a:t>7,504 of 18,572 visitors continued browsing</a:t>
+              <a:t>7,504 / 18,572 continued</a:t>
             </a:r>
           </a:p>
         </p:txBody>
@@ -16631,7 +16631,7 @@
         <p:spPr>
           <a:xfrm>
             <a:off x="4434840" y="4398264"/>
-            <a:ext cx="7589520" cy="411480"/>
+            <a:ext cx="1143000" cy="411480"/>
           </a:xfrm>
           <a:prstGeom prst="rect">
             <a:avLst/>
@@ -16652,7 +16652,7 @@
                 </a:solidFill>
                 <a:latin typeface="Calibri"/>
               </a:rPr>
-              <a:t>Our-story BEATS site avg in Jan</a:t>
+              <a:t>Beats site-wide avg</a:t>
             </a:r>
           </a:p>
         </p:txBody>
@@ -16736,7 +16736,7 @@
         <p:spPr>
           <a:xfrm>
             <a:off x="4434840" y="5111496"/>
-            <a:ext cx="7589520" cy="411480"/>
+            <a:ext cx="1143000" cy="411480"/>
           </a:xfrm>
           <a:prstGeom prst="rect">
             <a:avLst/>
@@ -16757,7 +16757,7 @@
                 </a:solidFill>
                 <a:latin typeface="Calibri"/>
               </a:rPr>
-              <a:t>Our-story struggles to retain Feb surge visitors</a:t>
+              <a:t>Surge retention risk</a:t>
             </a:r>
           </a:p>
         </p:txBody>

--- a/webanalytics/Solidigm_Analytics_Report_JanFeb_FY26.pptx
+++ b/webanalytics/Solidigm_Analytics_Report_JanFeb_FY26.pptx
@@ -3327,7 +3327,7 @@
                 </a:solidFill>
                 <a:latin typeface="Calibri"/>
               </a:rPr>
-              <a:t>1.1M+</a:t>
+              <a:t>818K+</a:t>
             </a:r>
           </a:p>
         </p:txBody>
@@ -3397,7 +3397,7 @@
                 </a:solidFill>
                 <a:latin typeface="Calibri"/>
               </a:rPr>
-              <a:t>~442K</a:t>
+              <a:t>~388K</a:t>
             </a:r>
           </a:p>
         </p:txBody>
@@ -3467,7 +3467,7 @@
                 </a:solidFill>
                 <a:latin typeface="Calibri"/>
               </a:rPr>
-              <a:t>13%</a:t>
+              <a:t>11%</a:t>
             </a:r>
           </a:p>
         </p:txBody>
@@ -3867,7 +3867,7 @@
                 </a:solidFill>
                 <a:latin typeface="Calibri"/>
               </a:rPr>
-              <a:t>Amazon Ads has 99.3% bounce. DoubleClick: 73-77%. Stop spend or rebuild landing pages to match ad intent.</a:t>
+              <a:t>Paid-Display BR is 70.6% in Feb. Stop or rebuild landing pages to match ad intent — high spend, low return.</a:t>
             </a:r>
           </a:p>
         </p:txBody>
@@ -4093,7 +4093,7 @@
                 </a:solidFill>
                 <a:latin typeface="Calibri"/>
               </a:rPr>
-              <a:t>Google bounce rate is only 46-48% — best traffic quality. Create more AI/Edge storage content clusters.</a:t>
+              <a:t>Organic Search has the lowest BR at 48.5-49.5% — best traffic quality. Create more AI/Edge storage content clusters.</a:t>
             </a:r>
           </a:p>
         </p:txBody>
@@ -4319,7 +4319,7 @@
                 </a:solidFill>
                 <a:latin typeface="Calibri"/>
               </a:rPr>
-              <a:t>Mobile is now 46% of traffic (up from 36%) but lags desktop in PPV (1.81 vs 2.17). Speed test + CTA audit.</a:t>
+              <a:t>Mobile is now 52.6% of traffic (majority!) but lags desktop in PPV (1.79 vs 2.17). Speed test + CTA audit.</a:t>
             </a:r>
           </a:p>
         </p:txBody>
@@ -4545,7 +4545,7 @@
                 </a:solidFill>
                 <a:latin typeface="Calibri"/>
               </a:rPr>
-              <a:t>Feb surged +343% in PVs — but engagement rate dropped to 40.4%. Add video, social proof, and explicit CTAs.</a:t>
+              <a:t>Feb surged +414% on solidigm.com — but engagement rate dropped to 39.5%. Add video, social proof, and CTAs.</a:t>
             </a:r>
           </a:p>
         </p:txBody>
@@ -4736,7 +4736,7 @@
                 </a:solidFill>
                 <a:latin typeface="Calibri"/>
               </a:rPr>
-              <a:t>Expand APAC / Chinese Content</a:t>
+              <a:t>Investigate EMEA Traffic Collapse</a:t>
             </a:r>
           </a:p>
         </p:txBody>
@@ -4771,7 +4771,7 @@
                 </a:solidFill>
                 <a:latin typeface="Calibri"/>
               </a:rPr>
-              <a:t>CN pages grew +76% MoM. Chinese-locale visitors show PPV matching English despite smaller content library.</a:t>
+              <a:t>UK dropped from 9.2% to 2.4%, Germany 3.7% to 1.9% — combined -8.5pp in one month. Audit campaigns &amp; referrals.</a:t>
             </a:r>
           </a:p>
         </p:txBody>
@@ -4806,7 +4806,7 @@
                 </a:solidFill>
                 <a:latin typeface="Calibri"/>
               </a:rPr>
-              <a:t>&gt;&gt; Unlock high-quality APAC traffic</a:t>
+              <a:t>&gt;&gt; Recover 8pp+ of lost EMEA reach</a:t>
             </a:r>
           </a:p>
         </p:txBody>
@@ -4962,7 +4962,7 @@
                 </a:solidFill>
                 <a:latin typeface="Calibri"/>
               </a:rPr>
-              <a:t>Investigate UK Traffic Drop</a:t>
+              <a:t>Fix Direct Traffic Attribution</a:t>
             </a:r>
           </a:p>
         </p:txBody>
@@ -4997,7 +4997,7 @@
                 </a:solidFill>
                 <a:latin typeface="Calibri"/>
               </a:rPr>
-              <a:t>UK dropped from 8.3% to 2.1% of traffic in one month. Check if a campaign ended or referral source was removed.</a:t>
+              <a:t>Direct dropped -13.3pp in Feb (60.8% → 47.5%). Add UTM tags to all campaigns to reduce dark social blindspots.</a:t>
             </a:r>
           </a:p>
         </p:txBody>
@@ -5032,7 +5032,7 @@
                 </a:solidFill>
                 <a:latin typeface="Calibri"/>
               </a:rPr>
-              <a:t>&gt;&gt; Recover 6pp of lost reach</a:t>
+              <a:t>&gt;&gt; Improve attribution accuracy</a:t>
             </a:r>
           </a:p>
         </p:txBody>
@@ -5374,7 +5374,7 @@
                 </a:solidFill>
                 <a:latin typeface="Calibri"/>
               </a:rPr>
-              <a:t>→  Stop Amazon Ads — 99.3% bounce, zero ROI</a:t>
+              <a:t>→  Add UTM tags to ALL paid &amp; campaign links</a:t>
             </a:r>
           </a:p>
         </p:txBody>
@@ -5409,7 +5409,7 @@
                 </a:solidFill>
                 <a:latin typeface="Calibri"/>
               </a:rPr>
-              <a:t>→  Add UTM tags to all campaign links</a:t>
+              <a:t>→  Audit EMEA campaigns — UK dropped -6.8pp in Feb</a:t>
             </a:r>
           </a:p>
         </p:txBody>
@@ -5744,7 +5744,7 @@
                 </a:solidFill>
                 <a:latin typeface="Calibri"/>
               </a:rPr>
-              <a:t>→  Launch Chinese content expansion plan</a:t>
+              <a:t>→  Reactivate or replace EMEA referral/campaign sources</a:t>
             </a:r>
           </a:p>
         </p:txBody>
@@ -6522,7 +6522,7 @@
                 </a:solidFill>
                 <a:latin typeface="Calibri"/>
               </a:rPr>
-              <a:t>500,168</a:t>
+              <a:t>423,020</a:t>
             </a:r>
           </a:p>
         </p:txBody>
@@ -6557,7 +6557,7 @@
                 </a:solidFill>
                 <a:latin typeface="Calibri"/>
               </a:rPr>
-              <a:t>463,197</a:t>
+              <a:t>395,182</a:t>
             </a:r>
           </a:p>
         </p:txBody>
@@ -6592,7 +6592,7 @@
                 </a:solidFill>
                 <a:latin typeface="Calibri"/>
               </a:rPr>
-              <a:t>-7.4%</a:t>
+              <a:t>-6.6%</a:t>
             </a:r>
           </a:p>
         </p:txBody>
@@ -6748,7 +6748,7 @@
                 </a:solidFill>
                 <a:latin typeface="Calibri"/>
               </a:rPr>
-              <a:t>222,103</a:t>
+              <a:t>193,070</a:t>
             </a:r>
           </a:p>
         </p:txBody>
@@ -6783,7 +6783,7 @@
                 </a:solidFill>
                 <a:latin typeface="Calibri"/>
               </a:rPr>
-              <a:t>220,099</a:t>
+              <a:t>194,667</a:t>
             </a:r>
           </a:p>
         </p:txBody>
@@ -6814,11 +6814,11 @@
             <a:r>
               <a:rPr sz="2000" b="1" i="0">
                 <a:solidFill>
-                  <a:srgbClr val="D97706"/>
-                </a:solidFill>
-                <a:latin typeface="Calibri"/>
-              </a:rPr>
-              <a:t>-0.9%</a:t>
+                  <a:srgbClr val="059669"/>
+                </a:solidFill>
+                <a:latin typeface="Calibri"/>
+              </a:rPr>
+              <a:t>+0.8%</a:t>
             </a:r>
           </a:p>
         </p:txBody>
@@ -6974,7 +6974,7 @@
                 </a:solidFill>
                 <a:latin typeface="Calibri"/>
               </a:rPr>
-              <a:t>2.25</a:t>
+              <a:t>2.19</a:t>
             </a:r>
           </a:p>
         </p:txBody>
@@ -7009,7 +7009,7 @@
                 </a:solidFill>
                 <a:latin typeface="Calibri"/>
               </a:rPr>
-              <a:t>2.10</a:t>
+              <a:t>2.03</a:t>
             </a:r>
           </a:p>
         </p:txBody>
@@ -7044,7 +7044,7 @@
                 </a:solidFill>
                 <a:latin typeface="Calibri"/>
               </a:rPr>
-              <a:t>-0.15</a:t>
+              <a:t>-0.16</a:t>
             </a:r>
           </a:p>
         </p:txBody>
@@ -7200,7 +7200,7 @@
                 </a:solidFill>
                 <a:latin typeface="Calibri"/>
               </a:rPr>
-              <a:t>5.2%</a:t>
+              <a:t>5.3%</a:t>
             </a:r>
           </a:p>
         </p:txBody>
@@ -7235,7 +7235,7 @@
                 </a:solidFill>
                 <a:latin typeface="Calibri"/>
               </a:rPr>
-              <a:t>2.9%</a:t>
+              <a:t>2.5%</a:t>
             </a:r>
           </a:p>
         </p:txBody>
@@ -7270,7 +7270,7 @@
                 </a:solidFill>
                 <a:latin typeface="Calibri"/>
               </a:rPr>
-              <a:t>-2.3pp</a:t>
+              <a:t>-2.8pp</a:t>
             </a:r>
           </a:p>
         </p:txBody>
@@ -7426,7 +7426,7 @@
                 </a:solidFill>
                 <a:latin typeface="Calibri"/>
               </a:rPr>
-              <a:t>94.8%</a:t>
+              <a:t>94.7%</a:t>
             </a:r>
           </a:p>
         </p:txBody>
@@ -7461,7 +7461,7 @@
                 </a:solidFill>
                 <a:latin typeface="Calibri"/>
               </a:rPr>
-              <a:t>97.1%</a:t>
+              <a:t>97.5%</a:t>
             </a:r>
           </a:p>
         </p:txBody>
@@ -7496,7 +7496,7 @@
                 </a:solidFill>
                 <a:latin typeface="Calibri"/>
               </a:rPr>
-              <a:t>+2.3pp</a:t>
+              <a:t>+2.8pp</a:t>
             </a:r>
           </a:p>
         </p:txBody>
@@ -7652,7 +7652,7 @@
                 </a:solidFill>
                 <a:latin typeface="Calibri"/>
               </a:rPr>
-              <a:t>63.3%</a:t>
+              <a:t>61.0%</a:t>
             </a:r>
           </a:p>
         </p:txBody>
@@ -7687,7 +7687,7 @@
                 </a:solidFill>
                 <a:latin typeface="Calibri"/>
               </a:rPr>
-              <a:t>66.3%</a:t>
+              <a:t>64.3%</a:t>
             </a:r>
           </a:p>
         </p:txBody>
@@ -7722,7 +7722,7 @@
                 </a:solidFill>
                 <a:latin typeface="Calibri"/>
               </a:rPr>
-              <a:t>+3.0pp</a:t>
+              <a:t>+3.3pp</a:t>
             </a:r>
           </a:p>
         </p:txBody>
@@ -7878,7 +7878,7 @@
                 </a:solidFill>
                 <a:latin typeface="Calibri"/>
               </a:rPr>
-              <a:t>17,048</a:t>
+              <a:t>14,666</a:t>
             </a:r>
           </a:p>
         </p:txBody>
@@ -7913,7 +7913,7 @@
                 </a:solidFill>
                 <a:latin typeface="Calibri"/>
               </a:rPr>
-              <a:t>14,487</a:t>
+              <a:t>13,222</a:t>
             </a:r>
           </a:p>
         </p:txBody>
@@ -7948,7 +7948,7 @@
                 </a:solidFill>
                 <a:latin typeface="Calibri"/>
               </a:rPr>
-              <a:t>-15.1%</a:t>
+              <a:t>-9.8%</a:t>
             </a:r>
           </a:p>
         </p:txBody>
@@ -8104,7 +8104,7 @@
                 </a:solidFill>
                 <a:latin typeface="Calibri"/>
               </a:rPr>
-              <a:t>7.7%</a:t>
+              <a:t>7.6%</a:t>
             </a:r>
           </a:p>
         </p:txBody>
@@ -8139,7 +8139,7 @@
                 </a:solidFill>
                 <a:latin typeface="Calibri"/>
               </a:rPr>
-              <a:t>6.6%</a:t>
+              <a:t>6.8%</a:t>
             </a:r>
           </a:p>
         </p:txBody>
@@ -8174,7 +8174,7 @@
                 </a:solidFill>
                 <a:latin typeface="Calibri"/>
               </a:rPr>
-              <a:t>-1.1pp</a:t>
+              <a:t>-0.8pp</a:t>
             </a:r>
           </a:p>
         </p:txBody>
@@ -8209,7 +8209,7 @@
                 </a:solidFill>
                 <a:latin typeface="Calibri"/>
               </a:rPr>
-              <a:t>★ Avg daily PVs: Jan 16,134  |  Feb 16,543  (+2.5% day-over-day normalized)</a:t>
+              <a:t>★ Avg daily PVs: Jan 13,646  |  Feb 14,114  (+3.4% day-over-day normalized)  |  solidigm.com domain only</a:t>
             </a:r>
           </a:p>
         </p:txBody>
@@ -8348,7 +8348,7 @@
                 </a:solidFill>
                 <a:latin typeface="Calibri"/>
               </a:rPr>
-              <a:t>Normalized daily averages show +2.5% growth despite Feb having 3 fewer calendar days</a:t>
+              <a:t>Normalized daily averages show +3.4% growth despite Feb having 3 fewer calendar days</a:t>
             </a:r>
           </a:p>
         </p:txBody>
@@ -8679,7 +8679,7 @@
                 </a:solidFill>
                 <a:latin typeface="Calibri"/>
               </a:rPr>
-              <a:t>62.0%</a:t>
+              <a:t>60.8%</a:t>
             </a:r>
           </a:p>
         </p:txBody>
@@ -8714,7 +8714,7 @@
                 </a:solidFill>
                 <a:latin typeface="Calibri"/>
               </a:rPr>
-              <a:t>52.1%</a:t>
+              <a:t>47.5%</a:t>
             </a:r>
           </a:p>
         </p:txBody>
@@ -8749,7 +8749,7 @@
                 </a:solidFill>
                 <a:latin typeface="Calibri"/>
               </a:rPr>
-              <a:t>-9.9</a:t>
+              <a:t>-13.3</a:t>
             </a:r>
           </a:p>
         </p:txBody>
@@ -8862,7 +8862,7 @@
                 </a:solidFill>
                 <a:latin typeface="Calibri"/>
               </a:rPr>
-              <a:t>22.9%</a:t>
+              <a:t>13.9%</a:t>
             </a:r>
           </a:p>
         </p:txBody>
@@ -8897,7 +8897,7 @@
                 </a:solidFill>
                 <a:latin typeface="Calibri"/>
               </a:rPr>
-              <a:t>24.2%</a:t>
+              <a:t>13.1%</a:t>
             </a:r>
           </a:p>
         </p:txBody>
@@ -8928,11 +8928,11 @@
             <a:r>
               <a:rPr sz="1300" b="1" i="0">
                 <a:solidFill>
-                  <a:srgbClr val="059669"/>
-                </a:solidFill>
-                <a:latin typeface="Calibri"/>
-              </a:rPr>
-              <a:t>+1.3</a:t>
+                  <a:srgbClr val="D97706"/>
+                </a:solidFill>
+                <a:latin typeface="Calibri"/>
+              </a:rPr>
+              <a:t>-0.8</a:t>
             </a:r>
           </a:p>
         </p:txBody>
@@ -9045,7 +9045,7 @@
                 </a:solidFill>
                 <a:latin typeface="Calibri"/>
               </a:rPr>
-              <a:t> 8.3%</a:t>
+              <a:t>11.7%</a:t>
             </a:r>
           </a:p>
         </p:txBody>
@@ -9080,7 +9080,7 @@
                 </a:solidFill>
                 <a:latin typeface="Calibri"/>
               </a:rPr>
-              <a:t>15.7%</a:t>
+              <a:t>21.3%</a:t>
             </a:r>
           </a:p>
         </p:txBody>
@@ -9115,7 +9115,7 @@
                 </a:solidFill>
                 <a:latin typeface="Calibri"/>
               </a:rPr>
-              <a:t>+7.4</a:t>
+              <a:t>+9.6</a:t>
             </a:r>
           </a:p>
         </p:txBody>
@@ -9228,7 +9228,7 @@
                 </a:solidFill>
                 <a:latin typeface="Calibri"/>
               </a:rPr>
-              <a:t> 3.6%</a:t>
+              <a:t> 9.9%</a:t>
             </a:r>
           </a:p>
         </p:txBody>
@@ -9263,7 +9263,7 @@
                 </a:solidFill>
                 <a:latin typeface="Calibri"/>
               </a:rPr>
-              <a:t> 6.0%</a:t>
+              <a:t>15.8%</a:t>
             </a:r>
           </a:p>
         </p:txBody>
@@ -9298,7 +9298,7 @@
                 </a:solidFill>
                 <a:latin typeface="Calibri"/>
               </a:rPr>
-              <a:t>+2.4</a:t>
+              <a:t>+5.9</a:t>
             </a:r>
           </a:p>
         </p:txBody>
@@ -9411,7 +9411,7 @@
                 </a:solidFill>
                 <a:latin typeface="Calibri"/>
               </a:rPr>
-              <a:t> 3.1%</a:t>
+              <a:t> 3.7%</a:t>
             </a:r>
           </a:p>
         </p:txBody>
@@ -9446,7 +9446,7 @@
                 </a:solidFill>
                 <a:latin typeface="Calibri"/>
               </a:rPr>
-              <a:t> 2.0%</a:t>
+              <a:t> 2.3%</a:t>
             </a:r>
           </a:p>
         </p:txBody>
@@ -9481,7 +9481,7 @@
                 </a:solidFill>
                 <a:latin typeface="Calibri"/>
               </a:rPr>
-              <a:t>-1.1</a:t>
+              <a:t>-1.4</a:t>
             </a:r>
           </a:p>
         </p:txBody>
@@ -9602,7 +9602,7 @@
                 </a:solidFill>
                 <a:latin typeface="Calibri"/>
               </a:rPr>
-              <a:t>+2.5%</a:t>
+              <a:t>+3.4%</a:t>
             </a:r>
           </a:p>
         </p:txBody>
@@ -9762,7 +9762,7 @@
                 </a:solidFill>
                 <a:latin typeface="Calibri"/>
               </a:rPr>
-              <a:t>-9.9pp</a:t>
+              <a:t>-13.3pp</a:t>
             </a:r>
           </a:p>
         </p:txBody>
@@ -9922,7 +9922,7 @@
                 </a:solidFill>
                 <a:latin typeface="Calibri"/>
               </a:rPr>
-              <a:t>+7.4pp</a:t>
+              <a:t>+9.6pp</a:t>
             </a:r>
           </a:p>
         </p:txBody>
@@ -10082,7 +10082,7 @@
                 </a:solidFill>
                 <a:latin typeface="Calibri"/>
               </a:rPr>
-              <a:t>+2.4pp</a:t>
+              <a:t>+5.9pp</a:t>
             </a:r>
           </a:p>
         </p:txBody>
@@ -10156,7 +10156,7 @@
                 </a:solidFill>
                 <a:latin typeface="Calibri"/>
               </a:rPr>
-              <a:t>Day-of-week peak: JAN → Fri (85,836 PVs)  |  FEB → Tue (75,535 PVs)</a:t>
+              <a:t>Day-of-week peak: JAN → Fri (76,611 PVs)  |  FEB → Tue (63,165 PVs)</a:t>
             </a:r>
           </a:p>
         </p:txBody>
@@ -10774,7 +10774,7 @@
                 </a:solidFill>
                 <a:latin typeface="Calibri"/>
               </a:rPr>
-              <a:t>180,811</a:t>
+              <a:t>179,592</a:t>
             </a:r>
           </a:p>
         </p:txBody>
@@ -10809,7 +10809,7 @@
                 </a:solidFill>
                 <a:latin typeface="Calibri"/>
               </a:rPr>
-              <a:t>151,016</a:t>
+              <a:t>148,592</a:t>
             </a:r>
           </a:p>
         </p:txBody>
@@ -10844,7 +10844,7 @@
                 </a:solidFill>
                 <a:latin typeface="Calibri"/>
               </a:rPr>
-              <a:t>-16.5%</a:t>
+              <a:t>-17.3%</a:t>
             </a:r>
           </a:p>
         </p:txBody>
@@ -10879,7 +10879,7 @@
                 </a:solidFill>
                 <a:latin typeface="Calibri"/>
               </a:rPr>
-              <a:t>79,392</a:t>
+              <a:t>78,499</a:t>
             </a:r>
           </a:p>
         </p:txBody>
@@ -11105,7 +11105,7 @@
                 </a:solidFill>
                 <a:latin typeface="Calibri"/>
               </a:rPr>
-              <a:t> 81,376</a:t>
+              <a:t> 86,742</a:t>
             </a:r>
           </a:p>
         </p:txBody>
@@ -11140,7 +11140,7 @@
                 </a:solidFill>
                 <a:latin typeface="Calibri"/>
               </a:rPr>
-              <a:t> 74,967</a:t>
+              <a:t> 84,155</a:t>
             </a:r>
           </a:p>
         </p:txBody>
@@ -11175,7 +11175,7 @@
                 </a:solidFill>
                 <a:latin typeface="Calibri"/>
               </a:rPr>
-              <a:t> -7.9%</a:t>
+              <a:t> -3.0%</a:t>
             </a:r>
           </a:p>
         </p:txBody>
@@ -11210,7 +11210,7 @@
                 </a:solidFill>
                 <a:latin typeface="Calibri"/>
               </a:rPr>
-              <a:t>43,213</a:t>
+              <a:t>46,288</a:t>
             </a:r>
           </a:p>
         </p:txBody>
@@ -11436,7 +11436,7 @@
                 </a:solidFill>
                 <a:latin typeface="Calibri"/>
               </a:rPr>
-              <a:t> 49,221</a:t>
+              <a:t> 49,393</a:t>
             </a:r>
           </a:p>
         </p:txBody>
@@ -11471,7 +11471,7 @@
                 </a:solidFill>
                 <a:latin typeface="Calibri"/>
               </a:rPr>
-              <a:t> 49,348</a:t>
+              <a:t> 49,363</a:t>
             </a:r>
           </a:p>
         </p:txBody>
@@ -11502,11 +11502,11 @@
             <a:r>
               <a:rPr sz="1000" b="1" i="0">
                 <a:solidFill>
-                  <a:srgbClr val="059669"/>
-                </a:solidFill>
-                <a:latin typeface="Calibri"/>
-              </a:rPr>
-              <a:t> +0.3%</a:t>
+                  <a:srgbClr val="DC2626"/>
+                </a:solidFill>
+                <a:latin typeface="Calibri"/>
+              </a:rPr>
+              <a:t> -0.1%</a:t>
             </a:r>
           </a:p>
         </p:txBody>
@@ -11541,7 +11541,7 @@
                 </a:solidFill>
                 <a:latin typeface="Calibri"/>
               </a:rPr>
-              <a:t>27,390</a:t>
+              <a:t>27,396</a:t>
             </a:r>
           </a:p>
         </p:txBody>
@@ -11767,7 +11767,7 @@
                 </a:solidFill>
                 <a:latin typeface="Calibri"/>
               </a:rPr>
-              <a:t>  7,906</a:t>
+              <a:t>    514</a:t>
             </a:r>
           </a:p>
         </p:txBody>
@@ -11802,7 +11802,7 @@
                 </a:solidFill>
                 <a:latin typeface="Calibri"/>
               </a:rPr>
-              <a:t> 29,207</a:t>
+              <a:t> 29,214</a:t>
             </a:r>
           </a:p>
         </p:txBody>
@@ -11837,7 +11837,7 @@
                 </a:solidFill>
                 <a:latin typeface="Calibri"/>
               </a:rPr>
-              <a:t>+269%</a:t>
+              <a:t>+5584%</a:t>
             </a:r>
           </a:p>
         </p:txBody>
@@ -11872,7 +11872,7 @@
                 </a:solidFill>
                 <a:latin typeface="Calibri"/>
               </a:rPr>
-              <a:t>16,418</a:t>
+              <a:t>16,420</a:t>
             </a:r>
           </a:p>
         </p:txBody>
@@ -12063,7 +12063,7 @@
                 </a:solidFill>
                 <a:latin typeface="Calibri"/>
               </a:rPr>
-              <a:t>数据中心 (Data Center – CN)</a:t>
+              <a:t>D5-P5336 (Product)</a:t>
             </a:r>
           </a:p>
         </p:txBody>
@@ -12098,7 +12098,7 @@
                 </a:solidFill>
                 <a:latin typeface="Calibri"/>
               </a:rPr>
-              <a:t> 23,350</a:t>
+              <a:t> 13,887</a:t>
             </a:r>
           </a:p>
         </p:txBody>
@@ -12133,7 +12133,7 @@
                 </a:solidFill>
                 <a:latin typeface="Calibri"/>
               </a:rPr>
-              <a:t> 22,210</a:t>
+              <a:t> 10,725</a:t>
             </a:r>
           </a:p>
         </p:txBody>
@@ -12168,7 +12168,7 @@
                 </a:solidFill>
                 <a:latin typeface="Calibri"/>
               </a:rPr>
-              <a:t> -4.9%</a:t>
+              <a:t>-22.8%</a:t>
             </a:r>
           </a:p>
         </p:txBody>
@@ -12203,7 +12203,7 @@
                 </a:solidFill>
                 <a:latin typeface="Calibri"/>
               </a:rPr>
-              <a:t>19,869</a:t>
+              <a:t> 5,162</a:t>
             </a:r>
           </a:p>
         </p:txBody>
@@ -12238,7 +12238,7 @@
                 </a:solidFill>
                 <a:latin typeface="Calibri"/>
               </a:rPr>
-              <a:t>Strong APAC engagement</a:t>
+              <a:t>Product detail — intent</a:t>
             </a:r>
           </a:p>
         </p:txBody>
@@ -12394,7 +12394,7 @@
                 </a:solidFill>
                 <a:latin typeface="Calibri"/>
               </a:rPr>
-              <a:t>D5-P5336 (Product)</a:t>
+              <a:t>Air-to-Liquid Cooling Article</a:t>
             </a:r>
           </a:p>
         </p:txBody>
@@ -12429,7 +12429,7 @@
                 </a:solidFill>
                 <a:latin typeface="Calibri"/>
               </a:rPr>
-              <a:t> 14,991</a:t>
+              <a:t>  7,159</a:t>
             </a:r>
           </a:p>
         </p:txBody>
@@ -12464,7 +12464,7 @@
                 </a:solidFill>
                 <a:latin typeface="Calibri"/>
               </a:rPr>
-              <a:t> 11,370</a:t>
+              <a:t>  6,495</a:t>
             </a:r>
           </a:p>
         </p:txBody>
@@ -12499,7 +12499,7 @@
                 </a:solidFill>
                 <a:latin typeface="Calibri"/>
               </a:rPr>
-              <a:t>-24.2%</a:t>
+              <a:t> -9.3%</a:t>
             </a:r>
           </a:p>
         </p:txBody>
@@ -12534,7 +12534,7 @@
                 </a:solidFill>
                 <a:latin typeface="Calibri"/>
               </a:rPr>
-              <a:t> 5,307</a:t>
+              <a:t> 2,719</a:t>
             </a:r>
           </a:p>
         </p:txBody>
@@ -12569,7 +12569,7 @@
                 </a:solidFill>
                 <a:latin typeface="Calibri"/>
               </a:rPr>
-              <a:t>Product detail — intent</a:t>
+              <a:t>Thought leadership</a:t>
             </a:r>
           </a:p>
         </p:txBody>
@@ -12725,7 +12725,7 @@
                 </a:solidFill>
                 <a:latin typeface="Calibri"/>
               </a:rPr>
-              <a:t>Solidigm 数据存储解决方案 (CN)</a:t>
+              <a:t>Solidigm Storage Tool™</a:t>
             </a:r>
           </a:p>
         </p:txBody>
@@ -12760,7 +12760,7 @@
                 </a:solidFill>
                 <a:latin typeface="Calibri"/>
               </a:rPr>
-              <a:t>  5,726</a:t>
+              <a:t>  4,517</a:t>
             </a:r>
           </a:p>
         </p:txBody>
@@ -12795,7 +12795,7 @@
                 </a:solidFill>
                 <a:latin typeface="Calibri"/>
               </a:rPr>
-              <a:t> 10,075</a:t>
+              <a:t>  3,947</a:t>
             </a:r>
           </a:p>
         </p:txBody>
@@ -12826,11 +12826,11 @@
             <a:r>
               <a:rPr sz="1000" b="1" i="0">
                 <a:solidFill>
-                  <a:srgbClr val="059669"/>
-                </a:solidFill>
-                <a:latin typeface="Calibri"/>
-              </a:rPr>
-              <a:t>+76.0%</a:t>
+                  <a:srgbClr val="DC2626"/>
+                </a:solidFill>
+                <a:latin typeface="Calibri"/>
+              </a:rPr>
+              <a:t>-12.6%</a:t>
             </a:r>
           </a:p>
         </p:txBody>
@@ -12865,7 +12865,7 @@
                 </a:solidFill>
                 <a:latin typeface="Calibri"/>
               </a:rPr>
-              <a:t> 3,617</a:t>
+              <a:t> 1,363</a:t>
             </a:r>
           </a:p>
         </p:txBody>
@@ -12900,7 +12900,7 @@
                 </a:solidFill>
                 <a:latin typeface="Calibri"/>
               </a:rPr>
-              <a:t>Growing CN localization</a:t>
+              <a:t>Support tool</a:t>
             </a:r>
           </a:p>
         </p:txBody>
@@ -13056,7 +13056,7 @@
                 </a:solidFill>
                 <a:latin typeface="Calibri"/>
               </a:rPr>
-              <a:t>Air-to-Liquid Cooling Article</a:t>
+              <a:t>Homepage (direct)</a:t>
             </a:r>
           </a:p>
         </p:txBody>
@@ -13091,7 +13091,7 @@
                 </a:solidFill>
                 <a:latin typeface="Calibri"/>
               </a:rPr>
-              <a:t>  7,160</a:t>
+              <a:t> 10,803</a:t>
             </a:r>
           </a:p>
         </p:txBody>
@@ -13126,7 +13126,7 @@
                 </a:solidFill>
                 <a:latin typeface="Calibri"/>
               </a:rPr>
-              <a:t>  6,495</a:t>
+              <a:t>  3,696</a:t>
             </a:r>
           </a:p>
         </p:txBody>
@@ -13161,7 +13161,7 @@
                 </a:solidFill>
                 <a:latin typeface="Calibri"/>
               </a:rPr>
-              <a:t> -9.3%</a:t>
+              <a:t>-65.8%</a:t>
             </a:r>
           </a:p>
         </p:txBody>
@@ -13196,7 +13196,7 @@
                 </a:solidFill>
                 <a:latin typeface="Calibri"/>
               </a:rPr>
-              <a:t> 2,719</a:t>
+              <a:t>   544</a:t>
             </a:r>
           </a:p>
         </p:txBody>
@@ -13231,7 +13231,7 @@
                 </a:solidFill>
                 <a:latin typeface="Calibri"/>
               </a:rPr>
-              <a:t>Thought leadership</a:t>
+              <a:t>Brand landing variant</a:t>
             </a:r>
           </a:p>
         </p:txBody>
@@ -13387,7 +13387,7 @@
                 </a:solidFill>
                 <a:latin typeface="Calibri"/>
               </a:rPr>
-              <a:t>Solidigm Storage Tool™</a:t>
+              <a:t>Unlocking AI Scale (SSD)</a:t>
             </a:r>
           </a:p>
         </p:txBody>
@@ -13422,7 +13422,7 @@
                 </a:solidFill>
                 <a:latin typeface="Calibri"/>
               </a:rPr>
-              <a:t>  4,551</a:t>
+              <a:t>      6</a:t>
             </a:r>
           </a:p>
         </p:txBody>
@@ -13457,7 +13457,7 @@
                 </a:solidFill>
                 <a:latin typeface="Calibri"/>
               </a:rPr>
-              <a:t>  3,960</a:t>
+              <a:t>  3,464</a:t>
             </a:r>
           </a:p>
         </p:txBody>
@@ -13492,7 +13492,7 @@
                 </a:solidFill>
                 <a:latin typeface="Calibri"/>
               </a:rPr>
-              <a:t>-13.0%</a:t>
+              <a:t> new</a:t>
             </a:r>
           </a:p>
         </p:txBody>
@@ -13527,7 +13527,7 @@
                 </a:solidFill>
                 <a:latin typeface="Calibri"/>
               </a:rPr>
-              <a:t> 1,368</a:t>
+              <a:t>2,342</a:t>
             </a:r>
           </a:p>
         </p:txBody>
@@ -13562,7 +13562,7 @@
                 </a:solidFill>
                 <a:latin typeface="Calibri"/>
               </a:rPr>
-              <a:t>Support tool</a:t>
+              <a:t>New content breakout</a:t>
             </a:r>
           </a:p>
         </p:txBody>
@@ -13718,7 +13718,7 @@
                 </a:solidFill>
                 <a:latin typeface="Calibri"/>
               </a:rPr>
-              <a:t>D7-PS1010 (Product)</a:t>
+              <a:t>Incredible Power Article</a:t>
             </a:r>
           </a:p>
         </p:txBody>
@@ -13753,7 +13753,7 @@
                 </a:solidFill>
                 <a:latin typeface="Calibri"/>
               </a:rPr>
-              <a:t>  4,191</a:t>
+              <a:t>  2,353</a:t>
             </a:r>
           </a:p>
         </p:txBody>
@@ -13788,7 +13788,7 @@
                 </a:solidFill>
                 <a:latin typeface="Calibri"/>
               </a:rPr>
-              <a:t>  2,825</a:t>
+              <a:t>  3,117</a:t>
             </a:r>
           </a:p>
         </p:txBody>
@@ -13819,11 +13819,11 @@
             <a:r>
               <a:rPr sz="1000" b="1" i="0">
                 <a:solidFill>
-                  <a:srgbClr val="DC2626"/>
-                </a:solidFill>
-                <a:latin typeface="Calibri"/>
-              </a:rPr>
-              <a:t>-32.6%</a:t>
+                  <a:srgbClr val="059669"/>
+                </a:solidFill>
+                <a:latin typeface="Calibri"/>
+              </a:rPr>
+              <a:t>+32.5%</a:t>
             </a:r>
           </a:p>
         </p:txBody>
@@ -13858,7 +13858,7 @@
                 </a:solidFill>
                 <a:latin typeface="Calibri"/>
               </a:rPr>
-              <a:t>   753</a:t>
+              <a:t>1,833</a:t>
             </a:r>
           </a:p>
         </p:txBody>
@@ -13893,7 +13893,7 @@
                 </a:solidFill>
                 <a:latin typeface="Calibri"/>
               </a:rPr>
-              <a:t>Product detail</a:t>
+              <a:t>Thought leadership</a:t>
             </a:r>
           </a:p>
         </p:txBody>
@@ -13928,7 +13928,7 @@
                 </a:solidFill>
                 <a:latin typeface="Calibri"/>
               </a:rPr>
-              <a:t>&gt;&gt; Our Story page surged 269% MoM — a strategic content opportunity worth amplifying.</a:t>
+              <a:t>&gt;&gt; Our Story page surged +5,584% MoM on solidigm.com — from near-zero to top-4 — the breakout opportunity of FY26.</a:t>
             </a:r>
           </a:p>
         </p:txBody>
@@ -14067,7 +14067,7 @@
                 </a:solidFill>
                 <a:latin typeface="Calibri"/>
               </a:rPr>
-              <a:t>Overall: Jan 63.3%  →  Feb 66.3%  (+3.0 pp)  |  A bounce = visitor who viewed only 1 page</a:t>
+              <a:t>Overall: Jan 61.0%  →  Feb 64.3%  (+3.3 pp)  |  A bounce = visitor who viewed only 1 page</a:t>
             </a:r>
           </a:p>
         </p:txBody>
@@ -14258,7 +14258,7 @@
                 </a:solidFill>
                 <a:latin typeface="Calibri"/>
               </a:rPr>
-              <a:t>57.5%</a:t>
+              <a:t>48.5%</a:t>
             </a:r>
           </a:p>
         </p:txBody>
@@ -14293,7 +14293,7 @@
                 </a:solidFill>
                 <a:latin typeface="Calibri"/>
               </a:rPr>
-              <a:t>62.7%</a:t>
+              <a:t>49.5%</a:t>
             </a:r>
           </a:p>
         </p:txBody>
@@ -14406,7 +14406,7 @@
                 </a:solidFill>
                 <a:latin typeface="Calibri"/>
               </a:rPr>
-              <a:t>67.4%</a:t>
+              <a:t>63.6%</a:t>
             </a:r>
           </a:p>
         </p:txBody>
@@ -14441,7 +14441,7 @@
                 </a:solidFill>
                 <a:latin typeface="Calibri"/>
               </a:rPr>
-              <a:t>72.2%</a:t>
+              <a:t>69.4%</a:t>
             </a:r>
           </a:p>
         </p:txBody>
@@ -14554,7 +14554,7 @@
                 </a:solidFill>
                 <a:latin typeface="Calibri"/>
               </a:rPr>
-              <a:t>65.9%</a:t>
+              <a:t>65.5%</a:t>
             </a:r>
           </a:p>
         </p:txBody>
@@ -14585,11 +14585,11 @@
             <a:r>
               <a:rPr sz="1600" b="1" i="0">
                 <a:solidFill>
-                  <a:srgbClr val="D97706"/>
-                </a:solidFill>
-                <a:latin typeface="Calibri"/>
-              </a:rPr>
-              <a:t>66.2%</a:t>
+                  <a:srgbClr val="059669"/>
+                </a:solidFill>
+                <a:latin typeface="Calibri"/>
+              </a:rPr>
+              <a:t>65.4%</a:t>
             </a:r>
           </a:p>
         </p:txBody>
@@ -14702,7 +14702,7 @@
                 </a:solidFill>
                 <a:latin typeface="Calibri"/>
               </a:rPr>
-              <a:t>73.5%</a:t>
+              <a:t>70.0%</a:t>
             </a:r>
           </a:p>
         </p:txBody>
@@ -14733,11 +14733,11 @@
             <a:r>
               <a:rPr sz="1600" b="1" i="0">
                 <a:solidFill>
-                  <a:srgbClr val="059669"/>
-                </a:solidFill>
-                <a:latin typeface="Calibri"/>
-              </a:rPr>
-              <a:t>68.2%</a:t>
+                  <a:srgbClr val="DC2626"/>
+                </a:solidFill>
+                <a:latin typeface="Calibri"/>
+              </a:rPr>
+              <a:t>70.6%</a:t>
             </a:r>
           </a:p>
         </p:txBody>
@@ -14885,7 +14885,7 @@
                 </a:solidFill>
                 <a:latin typeface="Calibri"/>
               </a:rPr>
-              <a:t>75.0%</a:t>
+              <a:t>75.1%</a:t>
             </a:r>
           </a:p>
         </p:txBody>
@@ -15033,7 +15033,7 @@
                 </a:solidFill>
                 <a:latin typeface="Calibri"/>
               </a:rPr>
-              <a:t>Desktop    63.0% → 67.3%</a:t>
+              <a:t>Desktop    58.1% → 61.8%</a:t>
             </a:r>
           </a:p>
         </p:txBody>
@@ -15068,7 +15068,7 @@
                 </a:solidFill>
                 <a:latin typeface="Calibri"/>
               </a:rPr>
-              <a:t>Mobile     67.7% → 69.2%</a:t>
+              <a:t>Mobile     67.5% → 69.6%</a:t>
             </a:r>
           </a:p>
         </p:txBody>
@@ -15103,7 +15103,7 @@
                 </a:solidFill>
                 <a:latin typeface="Calibri"/>
               </a:rPr>
-              <a:t>Tablet     35.3% → 14.8%</a:t>
+              <a:t>Tablet     74.3% → 70.1%</a:t>
             </a:r>
           </a:p>
         </p:txBody>
@@ -15259,7 +15259,7 @@
                 </a:solidFill>
                 <a:latin typeface="Calibri"/>
               </a:rPr>
-              <a:t>→  Google/Bing bounce &lt;50% → invest in SEO content (highest-quality source)</a:t>
+              <a:t>→  Organic Search BR ~49% → best quality source; invest in SEO content clusters</a:t>
             </a:r>
           </a:p>
         </p:txBody>
@@ -15294,7 +15294,7 @@
                 </a:solidFill>
                 <a:latin typeface="Calibri"/>
               </a:rPr>
-              <a:t>→  Amazon Ads BR 99.3% → stop or rebuild landing page immediately</a:t>
+              <a:t>→  Direct BR jumped to 69.4% in Feb → investigate dark social &amp; missing UTMs</a:t>
             </a:r>
           </a:p>
         </p:txBody>
@@ -15329,7 +15329,7 @@
                 </a:solidFill>
                 <a:latin typeface="Calibri"/>
               </a:rPr>
-              <a:t>→  Paid display BR 73% → narrow audience targeting; align ad to page</a:t>
+              <a:t>→  Paid-Display BR 70.6% → narrow audience targeting; align ad to landing page</a:t>
             </a:r>
           </a:p>
         </p:txBody>
@@ -15364,7 +15364,7 @@
                 </a:solidFill>
                 <a:latin typeface="Calibri"/>
               </a:rPr>
-              <a:t>→  Mobile BR worsening (+1.5pp) → test page speed &amp; mobile CTA clarity</a:t>
+              <a:t>→  Mobile BR worsening (+2.1pp) → test page speed &amp; mobile CTA clarity</a:t>
             </a:r>
           </a:p>
         </p:txBody>
@@ -15399,7 +15399,7 @@
                 </a:solidFill>
                 <a:latin typeface="Calibri"/>
               </a:rPr>
-              <a:t>→  Tablet BR improving dramatically → study what's working there</a:t>
+              <a:t>→  Tablet BR improving (-4.2pp) → study what UX changes are working there</a:t>
             </a:r>
           </a:p>
         </p:txBody>
@@ -15538,7 +15538,7 @@
                 </a:solidFill>
                 <a:latin typeface="Calibri"/>
               </a:rPr>
-              <a:t>Covers who-we-are.html · our-story.html · careers-page.html (EN + CN variants)</a:t>
+              <a:t>Covers who-we-are.html · our-story.html · careers-page.html (EN variants, solidigm.com only)</a:t>
             </a:r>
           </a:p>
         </p:txBody>
@@ -15616,7 +15616,7 @@
                 </a:solidFill>
                 <a:latin typeface="Calibri"/>
               </a:rPr>
-              <a:t>7,906</a:t>
+              <a:t>6,616</a:t>
             </a:r>
           </a:p>
         </p:txBody>
@@ -15729,7 +15729,7 @@
                 </a:solidFill>
                 <a:latin typeface="Calibri"/>
               </a:rPr>
-              <a:t>35,040</a:t>
+              <a:t>33,992</a:t>
             </a:r>
           </a:p>
         </p:txBody>
@@ -15842,7 +15842,7 @@
                 </a:solidFill>
                 <a:latin typeface="Calibri"/>
               </a:rPr>
-              <a:t>+343%</a:t>
+              <a:t>+414%</a:t>
             </a:r>
           </a:p>
         </p:txBody>
@@ -15955,7 +15955,7 @@
                 </a:solidFill>
                 <a:latin typeface="Calibri"/>
               </a:rPr>
-              <a:t>2,446</a:t>
+              <a:t>2,177</a:t>
             </a:r>
           </a:p>
         </p:txBody>
@@ -16068,7 +16068,7 @@
                 </a:solidFill>
                 <a:latin typeface="Calibri"/>
               </a:rPr>
-              <a:t>18,572</a:t>
+              <a:t>18,301</a:t>
             </a:r>
           </a:p>
         </p:txBody>
@@ -16181,7 +16181,7 @@
                 </a:solidFill>
                 <a:latin typeface="Calibri"/>
               </a:rPr>
-              <a:t>+659%</a:t>
+              <a:t>+740%</a:t>
             </a:r>
           </a:p>
         </p:txBody>
@@ -16407,7 +16407,7 @@
                 </a:solidFill>
                 <a:latin typeface="Calibri"/>
               </a:rPr>
-              <a:t>58.5%</a:t>
+              <a:t>57.6%</a:t>
             </a:r>
           </a:p>
         </p:txBody>
@@ -16442,7 +16442,7 @@
                 </a:solidFill>
                 <a:latin typeface="Calibri"/>
               </a:rPr>
-              <a:t>1,430 / 2,446 continued</a:t>
+              <a:t>1,254 / 2,177 continued</a:t>
             </a:r>
           </a:p>
         </p:txBody>
@@ -16512,7 +16512,7 @@
                 </a:solidFill>
                 <a:latin typeface="Calibri"/>
               </a:rPr>
-              <a:t>40.4%</a:t>
+              <a:t>39.5%</a:t>
             </a:r>
           </a:p>
         </p:txBody>
@@ -16547,7 +16547,7 @@
                 </a:solidFill>
                 <a:latin typeface="Calibri"/>
               </a:rPr>
-              <a:t>7,504 / 18,572 continued</a:t>
+              <a:t>7,236 / 18,301 continued</a:t>
             </a:r>
           </a:p>
         </p:txBody>
@@ -16617,7 +16617,7 @@
                 </a:solidFill>
                 <a:latin typeface="Calibri"/>
               </a:rPr>
-              <a:t>63.3%</a:t>
+              <a:t>61.0%</a:t>
             </a:r>
           </a:p>
         </p:txBody>
@@ -16722,7 +16722,7 @@
                 </a:solidFill>
                 <a:latin typeface="Calibri"/>
               </a:rPr>
-              <a:t>66.3%</a:t>
+              <a:t>64.3%</a:t>
             </a:r>
           </a:p>
         </p:txBody>
@@ -16948,7 +16948,7 @@
                 </a:solidFill>
                 <a:latin typeface="Calibri"/>
               </a:rPr>
-              <a:t>1,212</a:t>
+              <a:t>1,173</a:t>
             </a:r>
           </a:p>
         </p:txBody>
@@ -17018,7 +17018,7 @@
                 </a:solidFill>
                 <a:latin typeface="Calibri"/>
               </a:rPr>
-              <a:t>  660</a:t>
+              <a:t>  750</a:t>
             </a:r>
           </a:p>
         </p:txBody>
@@ -17123,7 +17123,7 @@
                 </a:solidFill>
                 <a:latin typeface="Calibri"/>
               </a:rPr>
-              <a:t>数据中心 (Data Center – CN)</a:t>
+              <a:t>D5-P5336 (Product)</a:t>
             </a:r>
           </a:p>
         </p:txBody>
@@ -17158,7 +17158,7 @@
                 </a:solidFill>
                 <a:latin typeface="Calibri"/>
               </a:rPr>
-              <a:t>  142</a:t>
+              <a:t>   90</a:t>
             </a:r>
           </a:p>
         </p:txBody>
@@ -17193,7 +17193,7 @@
                 </a:solidFill>
                 <a:latin typeface="Calibri"/>
               </a:rPr>
-              <a:t>D5-P5336 (Product)</a:t>
+              <a:t>Incredible Power Article</a:t>
             </a:r>
           </a:p>
         </p:txBody>
@@ -17228,7 +17228,7 @@
                 </a:solidFill>
                 <a:latin typeface="Calibri"/>
               </a:rPr>
-              <a:t>   90</a:t>
+              <a:t>   34</a:t>
             </a:r>
           </a:p>
         </p:txBody>
@@ -17263,7 +17263,7 @@
                 </a:solidFill>
                 <a:latin typeface="Calibri"/>
               </a:rPr>
-              <a:t>Incredible Power Article</a:t>
+              <a:t>D3-S4520 / Data Center</a:t>
             </a:r>
           </a:p>
         </p:txBody>
@@ -17298,7 +17298,7 @@
                 </a:solidFill>
                 <a:latin typeface="Calibri"/>
               </a:rPr>
-              <a:t>   34</a:t>
+              <a:t>   31</a:t>
             </a:r>
           </a:p>
         </p:txBody>
@@ -17472,7 +17472,7 @@
                 </a:solidFill>
                 <a:latin typeface="Calibri"/>
               </a:rPr>
-              <a:t>Mobile traffic share grew from 36.3% → 46.1% MoM — a 10pp shift in one month</a:t>
+              <a:t>Mobile traffic share grew from 48.7% → 52.6% MoM — now the majority device on solidigm.com</a:t>
             </a:r>
           </a:p>
         </p:txBody>
@@ -17663,7 +17663,7 @@
                 </a:solidFill>
                 <a:latin typeface="Calibri"/>
               </a:rPr>
-              <a:t>61.8%</a:t>
+              <a:t>50.3%</a:t>
             </a:r>
           </a:p>
         </p:txBody>
@@ -17698,7 +17698,7 @@
                 </a:solidFill>
                 <a:latin typeface="Calibri"/>
               </a:rPr>
-              <a:t>122,762 UVs  |  BR 63.0%  |  PPV 2.52</a:t>
+              <a:t> 97,048 UVs  |  BR 58.1%  |  PPV 2.55</a:t>
             </a:r>
           </a:p>
         </p:txBody>
@@ -17811,7 +17811,7 @@
                 </a:solidFill>
                 <a:latin typeface="Calibri"/>
               </a:rPr>
-              <a:t>36.3%</a:t>
+              <a:t>48.7%</a:t>
             </a:r>
           </a:p>
         </p:txBody>
@@ -17846,7 +17846,7 @@
                 </a:solidFill>
                 <a:latin typeface="Calibri"/>
               </a:rPr>
-              <a:t>104,781 UVs  |  BR 67.7%  |  PPV 1.73</a:t>
+              <a:t> 93,959 UVs  |  BR 67.5%  |  PPV 1.73</a:t>
             </a:r>
           </a:p>
         </p:txBody>
@@ -17959,7 +17959,7 @@
                 </a:solidFill>
                 <a:latin typeface="Calibri"/>
               </a:rPr>
-              <a:t> 0.3%</a:t>
+              <a:t> 4.3%</a:t>
             </a:r>
           </a:p>
         </p:txBody>
@@ -17994,7 +17994,7 @@
                 </a:solidFill>
                 <a:latin typeface="Calibri"/>
               </a:rPr>
-              <a:t>    549 UVs  |  BR 35.3%  |  PPV 2.87</a:t>
+              <a:t>  8,388 UVs  |  BR 74.3%  |  PPV 1.54</a:t>
             </a:r>
           </a:p>
         </p:txBody>
@@ -18185,7 +18185,7 @@
                 </a:solidFill>
                 <a:latin typeface="Calibri"/>
               </a:rPr>
-              <a:t>50.4%</a:t>
+              <a:t>43.4%</a:t>
             </a:r>
           </a:p>
         </p:txBody>
@@ -18220,7 +18220,7 @@
                 </a:solidFill>
                 <a:latin typeface="Calibri"/>
               </a:rPr>
-              <a:t>107,435 UVs  |  BR 67.3%  |  PPV 2.17</a:t>
+              <a:t> 84,572 UVs  |  BR 61.8%  |  PPV 2.17</a:t>
             </a:r>
           </a:p>
         </p:txBody>
@@ -18333,7 +18333,7 @@
                 </a:solidFill>
                 <a:latin typeface="Calibri"/>
               </a:rPr>
-              <a:t>46.1%</a:t>
+              <a:t>52.6%</a:t>
             </a:r>
           </a:p>
         </p:txBody>
@@ -18368,7 +18368,7 @@
                 </a:solidFill>
                 <a:latin typeface="Calibri"/>
               </a:rPr>
-              <a:t>117,678 UVs  |  BR 69.2%  |  PPV 1.81</a:t>
+              <a:t>102,321 UVs  |  BR 69.6%  |  PPV 1.79</a:t>
             </a:r>
           </a:p>
         </p:txBody>
@@ -18481,7 +18481,7 @@
                 </a:solidFill>
                 <a:latin typeface="Calibri"/>
               </a:rPr>
-              <a:t> 0.7%</a:t>
+              <a:t> 7.0%</a:t>
             </a:r>
           </a:p>
         </p:txBody>
@@ -18516,7 +18516,7 @@
                 </a:solidFill>
                 <a:latin typeface="Calibri"/>
               </a:rPr>
-              <a:t>    643 UVs  |  BR 14.8%  |  PPV 5.25</a:t>
+              <a:t> 13,657 UVs  |  BR 70.1%  |  PPV 2.04</a:t>
             </a:r>
           </a:p>
         </p:txBody>
@@ -18551,7 +18551,7 @@
                 </a:solidFill>
                 <a:latin typeface="Calibri"/>
               </a:rPr>
-              <a:t>&gt;&gt; Mobile surged from 36% → 46% in one month. Yet mobile PPV (1.81) still lags desktop (2.17) — a UX optimization gap.</a:t>
+              <a:t>&gt;&gt; Mobile grew from 48.7% → 52.6% — now the majority device. Yet mobile PPV (1.79) still lags desktop (2.17) — a UX optimization gap.</a:t>
             </a:r>
           </a:p>
         </p:txBody>
@@ -18655,7 +18655,7 @@
                 </a:solidFill>
                 <a:latin typeface="Calibri"/>
               </a:rPr>
-              <a:t>Geographic &amp; Language Analysis</a:t>
+              <a:t>Geographic Analysis — solidigm.com</a:t>
             </a:r>
           </a:p>
         </p:txBody>
@@ -18690,7 +18690,7 @@
                 </a:solidFill>
                 <a:latin typeface="Calibri"/>
               </a:rPr>
-              <a:t>USA dominates — but APAC engagement quality far exceeds traffic share</a:t>
+              <a:t>USA dominates at 84% — but UK traffic collapsed -6.8pp and warrants immediate investigation</a:t>
             </a:r>
           </a:p>
         </p:txBody>
@@ -19064,7 +19064,7 @@
                 </a:solidFill>
                 <a:latin typeface="Calibri"/>
               </a:rPr>
-              <a:t>70.2%</a:t>
+              <a:t>73.4%</a:t>
             </a:r>
           </a:p>
         </p:txBody>
@@ -19099,7 +19099,7 @@
                 </a:solidFill>
                 <a:latin typeface="Calibri"/>
               </a:rPr>
-              <a:t>80.3%</a:t>
+              <a:t>84.4%</a:t>
             </a:r>
           </a:p>
         </p:txBody>
@@ -19134,7 +19134,7 @@
                 </a:solidFill>
                 <a:latin typeface="Calibri"/>
               </a:rPr>
-              <a:t>+10.1pp</a:t>
+              <a:t>+11.0pp</a:t>
             </a:r>
           </a:p>
         </p:txBody>
@@ -19247,7 +19247,7 @@
                 </a:solidFill>
                 <a:latin typeface="Calibri"/>
               </a:rPr>
-              <a:t> 8.3%</a:t>
+              <a:t> 9.2%</a:t>
             </a:r>
           </a:p>
         </p:txBody>
@@ -19282,7 +19282,7 @@
                 </a:solidFill>
                 <a:latin typeface="Calibri"/>
               </a:rPr>
-              <a:t> 2.1%</a:t>
+              <a:t> 2.4%</a:t>
             </a:r>
           </a:p>
         </p:txBody>
@@ -19317,7 +19317,7 @@
                 </a:solidFill>
                 <a:latin typeface="Calibri"/>
               </a:rPr>
-              <a:t> -6.2pp</a:t>
+              <a:t> -6.8pp</a:t>
             </a:r>
           </a:p>
         </p:txBody>
@@ -19395,7 +19395,7 @@
                 </a:solidFill>
                 <a:latin typeface="Calibri"/>
               </a:rPr>
-              <a:t>China</a:t>
+              <a:t>Germany</a:t>
             </a:r>
           </a:p>
         </p:txBody>
@@ -19430,7 +19430,7 @@
                 </a:solidFill>
                 <a:latin typeface="Calibri"/>
               </a:rPr>
-              <a:t> 8.0%</a:t>
+              <a:t> 3.7%</a:t>
             </a:r>
           </a:p>
         </p:txBody>
@@ -19465,7 +19465,7 @@
                 </a:solidFill>
                 <a:latin typeface="Calibri"/>
               </a:rPr>
-              <a:t> 6.1%</a:t>
+              <a:t> 1.9%</a:t>
             </a:r>
           </a:p>
         </p:txBody>
@@ -19496,11 +19496,11 @@
             <a:r>
               <a:rPr sz="1200" b="1" i="0">
                 <a:solidFill>
-                  <a:srgbClr val="D97706"/>
-                </a:solidFill>
-                <a:latin typeface="Calibri"/>
-              </a:rPr>
-              <a:t> -1.9pp</a:t>
+                  <a:srgbClr val="DC2626"/>
+                </a:solidFill>
+                <a:latin typeface="Calibri"/>
+              </a:rPr>
+              <a:t> -1.8pp</a:t>
             </a:r>
           </a:p>
         </p:txBody>
@@ -19578,7 +19578,7 @@
                 </a:solidFill>
                 <a:latin typeface="Calibri"/>
               </a:rPr>
-              <a:t>Germany</a:t>
+              <a:t>India</a:t>
             </a:r>
           </a:p>
         </p:txBody>
@@ -19613,7 +19613,7 @@
                 </a:solidFill>
                 <a:latin typeface="Calibri"/>
               </a:rPr>
-              <a:t> 3.4%</a:t>
+              <a:t> 1.3%</a:t>
             </a:r>
           </a:p>
         </p:txBody>
@@ -19648,7 +19648,7 @@
                 </a:solidFill>
                 <a:latin typeface="Calibri"/>
               </a:rPr>
-              <a:t> 1.7%</a:t>
+              <a:t> 1.5%</a:t>
             </a:r>
           </a:p>
         </p:txBody>
@@ -19679,11 +19679,11 @@
             <a:r>
               <a:rPr sz="1200" b="1" i="0">
                 <a:solidFill>
-                  <a:srgbClr val="DC2626"/>
-                </a:solidFill>
-                <a:latin typeface="Calibri"/>
-              </a:rPr>
-              <a:t> -1.7pp</a:t>
+                  <a:srgbClr val="059669"/>
+                </a:solidFill>
+                <a:latin typeface="Calibri"/>
+              </a:rPr>
+              <a:t> +0.2pp</a:t>
             </a:r>
           </a:p>
         </p:txBody>
@@ -19761,7 +19761,7 @@
                 </a:solidFill>
                 <a:latin typeface="Calibri"/>
               </a:rPr>
-              <a:t>Ireland</a:t>
+              <a:t>Canada</a:t>
             </a:r>
           </a:p>
         </p:txBody>
@@ -19796,7 +19796,7 @@
                 </a:solidFill>
                 <a:latin typeface="Calibri"/>
               </a:rPr>
-              <a:t> 2.4%</a:t>
+              <a:t> 1.2%</a:t>
             </a:r>
           </a:p>
         </p:txBody>
@@ -19831,7 +19831,7 @@
                 </a:solidFill>
                 <a:latin typeface="Calibri"/>
               </a:rPr>
-              <a:t> 2.3%</a:t>
+              <a:t> 1.4%</a:t>
             </a:r>
           </a:p>
         </p:txBody>
@@ -19862,11 +19862,11 @@
             <a:r>
               <a:rPr sz="1200" b="1" i="0">
                 <a:solidFill>
-                  <a:srgbClr val="64748B"/>
-                </a:solidFill>
-                <a:latin typeface="Calibri"/>
-              </a:rPr>
-              <a:t> -0.1pp</a:t>
+                  <a:srgbClr val="059669"/>
+                </a:solidFill>
+                <a:latin typeface="Calibri"/>
+              </a:rPr>
+              <a:t> +0.2pp</a:t>
             </a:r>
           </a:p>
         </p:txBody>
@@ -19944,7 +19944,7 @@
                 </a:solidFill>
                 <a:latin typeface="Calibri"/>
               </a:rPr>
-              <a:t>Japan</a:t>
+              <a:t>China</a:t>
             </a:r>
           </a:p>
         </p:txBody>
@@ -19979,7 +19979,7 @@
                 </a:solidFill>
                 <a:latin typeface="Calibri"/>
               </a:rPr>
-              <a:t> 1.4%</a:t>
+              <a:t> 1.1%</a:t>
             </a:r>
           </a:p>
         </p:txBody>
@@ -20014,7 +20014,7 @@
                 </a:solidFill>
                 <a:latin typeface="Calibri"/>
               </a:rPr>
-              <a:t> 1.3%</a:t>
+              <a:t> 0.7%</a:t>
             </a:r>
           </a:p>
         </p:txBody>
@@ -20045,11 +20045,11 @@
             <a:r>
               <a:rPr sz="1200" b="1" i="0">
                 <a:solidFill>
-                  <a:srgbClr val="64748B"/>
-                </a:solidFill>
-                <a:latin typeface="Calibri"/>
-              </a:rPr>
-              <a:t> -0.1pp</a:t>
+                  <a:srgbClr val="D97706"/>
+                </a:solidFill>
+                <a:latin typeface="Calibri"/>
+              </a:rPr>
+              <a:t> -0.4pp</a:t>
             </a:r>
           </a:p>
         </p:txBody>
@@ -20127,7 +20127,7 @@
                 </a:solidFill>
                 <a:latin typeface="Calibri"/>
               </a:rPr>
-              <a:t>India</a:t>
+              <a:t>Taiwan</a:t>
             </a:r>
           </a:p>
         </p:txBody>
@@ -20162,7 +20162,7 @@
                 </a:solidFill>
                 <a:latin typeface="Calibri"/>
               </a:rPr>
-              <a:t> 1.3%</a:t>
+              <a:t> 0.9%</a:t>
             </a:r>
           </a:p>
         </p:txBody>
@@ -20197,7 +20197,7 @@
                 </a:solidFill>
                 <a:latin typeface="Calibri"/>
               </a:rPr>
-              <a:t> 1.7%</a:t>
+              <a:t> 0.7%</a:t>
             </a:r>
           </a:p>
         </p:txBody>
@@ -20228,11 +20228,11 @@
             <a:r>
               <a:rPr sz="1200" b="1" i="0">
                 <a:solidFill>
-                  <a:srgbClr val="059669"/>
-                </a:solidFill>
-                <a:latin typeface="Calibri"/>
-              </a:rPr>
-              <a:t> +0.4pp</a:t>
+                  <a:srgbClr val="64748B"/>
+                </a:solidFill>
+                <a:latin typeface="Calibri"/>
+              </a:rPr>
+              <a:t> -0.2pp</a:t>
             </a:r>
           </a:p>
         </p:txBody>
@@ -20310,7 +20310,7 @@
                 </a:solidFill>
                 <a:latin typeface="Calibri"/>
               </a:rPr>
-              <a:t>Korea</a:t>
+              <a:t>Mexico</a:t>
             </a:r>
           </a:p>
         </p:txBody>
@@ -20345,7 +20345,7 @@
                 </a:solidFill>
                 <a:latin typeface="Calibri"/>
               </a:rPr>
-              <a:t> 1.2%</a:t>
+              <a:t> 0.6%</a:t>
             </a:r>
           </a:p>
         </p:txBody>
@@ -20380,7 +20380,7 @@
                 </a:solidFill>
                 <a:latin typeface="Calibri"/>
               </a:rPr>
-              <a:t> 1.2%</a:t>
+              <a:t> 0.7%</a:t>
             </a:r>
           </a:p>
         </p:txBody>
@@ -20415,7 +20415,7 @@
                 </a:solidFill>
                 <a:latin typeface="Calibri"/>
               </a:rPr>
-              <a:t>  stable</a:t>
+              <a:t> +0.1pp</a:t>
             </a:r>
           </a:p>
         </p:txBody>
@@ -20536,7 +20536,7 @@
                 </a:solidFill>
                 <a:latin typeface="Calibri"/>
               </a:rPr>
-              <a:t>Content Language Split</a:t>
+              <a:t>US Market Concentration</a:t>
             </a:r>
           </a:p>
         </p:txBody>
@@ -20550,7 +20550,7 @@
         <p:spPr>
           <a:xfrm>
             <a:off x="6492240" y="1417320"/>
-            <a:ext cx="5120640" cy="365760"/>
+            <a:ext cx="2011680" cy="347472"/>
           </a:xfrm>
           <a:prstGeom prst="rect">
             <a:avLst/>
@@ -20565,13 +20565,13 @@
           <a:p>
             <a:pPr algn="l"/>
             <a:r>
-              <a:rPr sz="1200" b="1" i="0">
+              <a:rPr sz="1100" b="1" i="0">
                 <a:solidFill>
                   <a:srgbClr val="1E293B"/>
                 </a:solidFill>
                 <a:latin typeface="Calibri"/>
               </a:rPr>
-              <a:t>English</a:t>
+              <a:t>Jan US share</a:t>
             </a:r>
           </a:p>
         </p:txBody>
@@ -20584,8 +20584,43 @@
         </p:nvSpPr>
         <p:spPr>
           <a:xfrm>
-            <a:off x="6492240" y="1764792"/>
-            <a:ext cx="5120640" cy="347472"/>
+            <a:off x="8549640" y="1417320"/>
+            <a:ext cx="1005840" cy="347472"/>
+          </a:xfrm>
+          <a:prstGeom prst="rect">
+            <a:avLst/>
+          </a:prstGeom>
+          <a:noFill/>
+        </p:spPr>
+        <p:txBody>
+          <a:bodyPr wrap="square" lIns="0" rIns="0" tIns="0" bIns="0">
+            <a:spAutoFit/>
+          </a:bodyPr>
+          <a:lstStyle/>
+          <a:p>
+            <a:pPr algn="ctr"/>
+            <a:r>
+              <a:rPr sz="1400" b="1" i="0">
+                <a:solidFill>
+                  <a:srgbClr val="065A82"/>
+                </a:solidFill>
+                <a:latin typeface="Calibri"/>
+              </a:rPr>
+              <a:t>73.4%</a:t>
+            </a:r>
+          </a:p>
+        </p:txBody>
+      </p:sp>
+      <p:sp>
+        <p:nvSpPr>
+          <p:cNvPr id="57" name="TextBox 56"/>
+          <p:cNvSpPr txBox="1"/>
+          <p:nvPr/>
+        </p:nvSpPr>
+        <p:spPr>
+          <a:xfrm>
+            <a:off x="6492240" y="1737360"/>
+            <a:ext cx="5120640" cy="292608"/>
           </a:xfrm>
           <a:prstGeom prst="rect">
             <a:avLst/>
@@ -20600,27 +20635,27 @@
           <a:p>
             <a:pPr algn="l"/>
             <a:r>
-              <a:rPr sz="1100" b="0" i="0">
+              <a:rPr sz="900" b="0" i="0">
                 <a:solidFill>
                   <a:srgbClr val="64748B"/>
                 </a:solidFill>
                 <a:latin typeface="Calibri"/>
               </a:rPr>
-              <a:t>Jan: 86.8%  |  Feb: 87.8%</a:t>
-            </a:r>
-          </a:p>
-        </p:txBody>
-      </p:sp>
-      <p:sp>
-        <p:nvSpPr>
-          <p:cNvPr id="57" name="TextBox 56"/>
-          <p:cNvSpPr txBox="1"/>
-          <p:nvPr/>
-        </p:nvSpPr>
-        <p:spPr>
-          <a:xfrm>
-            <a:off x="6492240" y="2011680"/>
-            <a:ext cx="5120640" cy="320040"/>
+              <a:t>Consistent home-market baseline</a:t>
+            </a:r>
+          </a:p>
+        </p:txBody>
+      </p:sp>
+      <p:sp>
+        <p:nvSpPr>
+          <p:cNvPr id="58" name="TextBox 57"/>
+          <p:cNvSpPr txBox="1"/>
+          <p:nvPr/>
+        </p:nvSpPr>
+        <p:spPr>
+          <a:xfrm>
+            <a:off x="6492240" y="2075688"/>
+            <a:ext cx="2011680" cy="347472"/>
           </a:xfrm>
           <a:prstGeom prst="rect">
             <a:avLst/>
@@ -20635,27 +20670,62 @@
           <a:p>
             <a:pPr algn="l"/>
             <a:r>
-              <a:rPr sz="1000" b="0" i="0">
-                <a:solidFill>
-                  <a:srgbClr val="1C7293"/>
-                </a:solidFill>
-                <a:latin typeface="Calibri"/>
-              </a:rPr>
-              <a:t>PPV: 2.25 → 2.09</a:t>
-            </a:r>
-          </a:p>
-        </p:txBody>
-      </p:sp>
-      <p:sp>
-        <p:nvSpPr>
-          <p:cNvPr id="58" name="TextBox 57"/>
-          <p:cNvSpPr txBox="1"/>
-          <p:nvPr/>
-        </p:nvSpPr>
-        <p:spPr>
-          <a:xfrm>
-            <a:off x="6492240" y="2286000"/>
-            <a:ext cx="5120640" cy="365760"/>
+              <a:rPr sz="1100" b="1" i="0">
+                <a:solidFill>
+                  <a:srgbClr val="1E293B"/>
+                </a:solidFill>
+                <a:latin typeface="Calibri"/>
+              </a:rPr>
+              <a:t>Feb US share</a:t>
+            </a:r>
+          </a:p>
+        </p:txBody>
+      </p:sp>
+      <p:sp>
+        <p:nvSpPr>
+          <p:cNvPr id="59" name="TextBox 58"/>
+          <p:cNvSpPr txBox="1"/>
+          <p:nvPr/>
+        </p:nvSpPr>
+        <p:spPr>
+          <a:xfrm>
+            <a:off x="8549640" y="2075688"/>
+            <a:ext cx="1005840" cy="347472"/>
+          </a:xfrm>
+          <a:prstGeom prst="rect">
+            <a:avLst/>
+          </a:prstGeom>
+          <a:noFill/>
+        </p:spPr>
+        <p:txBody>
+          <a:bodyPr wrap="square" lIns="0" rIns="0" tIns="0" bIns="0">
+            <a:spAutoFit/>
+          </a:bodyPr>
+          <a:lstStyle/>
+          <a:p>
+            <a:pPr algn="ctr"/>
+            <a:r>
+              <a:rPr sz="1400" b="1" i="0">
+                <a:solidFill>
+                  <a:srgbClr val="065A82"/>
+                </a:solidFill>
+                <a:latin typeface="Calibri"/>
+              </a:rPr>
+              <a:t>84.4%</a:t>
+            </a:r>
+          </a:p>
+        </p:txBody>
+      </p:sp>
+      <p:sp>
+        <p:nvSpPr>
+          <p:cNvPr id="60" name="TextBox 59"/>
+          <p:cNvSpPr txBox="1"/>
+          <p:nvPr/>
+        </p:nvSpPr>
+        <p:spPr>
+          <a:xfrm>
+            <a:off x="6492240" y="2395728"/>
+            <a:ext cx="5120640" cy="292608"/>
           </a:xfrm>
           <a:prstGeom prst="rect">
             <a:avLst/>
@@ -20670,27 +20740,97 @@
           <a:p>
             <a:pPr algn="l"/>
             <a:r>
-              <a:rPr sz="1200" b="1" i="0">
+              <a:rPr sz="900" b="0" i="0">
+                <a:solidFill>
+                  <a:srgbClr val="64748B"/>
+                </a:solidFill>
+                <a:latin typeface="Calibri"/>
+              </a:rPr>
+              <a:t>+11pp jump — other markets shrank</a:t>
+            </a:r>
+          </a:p>
+        </p:txBody>
+      </p:sp>
+      <p:sp>
+        <p:nvSpPr>
+          <p:cNvPr id="61" name="TextBox 60"/>
+          <p:cNvSpPr txBox="1"/>
+          <p:nvPr/>
+        </p:nvSpPr>
+        <p:spPr>
+          <a:xfrm>
+            <a:off x="6492240" y="2734056"/>
+            <a:ext cx="2011680" cy="347472"/>
+          </a:xfrm>
+          <a:prstGeom prst="rect">
+            <a:avLst/>
+          </a:prstGeom>
+          <a:noFill/>
+        </p:spPr>
+        <p:txBody>
+          <a:bodyPr wrap="square" lIns="0" rIns="0" tIns="0" bIns="0">
+            <a:spAutoFit/>
+          </a:bodyPr>
+          <a:lstStyle/>
+          <a:p>
+            <a:pPr algn="l"/>
+            <a:r>
+              <a:rPr sz="1100" b="1" i="0">
                 <a:solidFill>
                   <a:srgbClr val="1E293B"/>
                 </a:solidFill>
                 <a:latin typeface="Calibri"/>
               </a:rPr>
-              <a:t>CJK (CN/JP/KR)</a:t>
-            </a:r>
-          </a:p>
-        </p:txBody>
-      </p:sp>
-      <p:sp>
-        <p:nvSpPr>
-          <p:cNvPr id="59" name="TextBox 58"/>
-          <p:cNvSpPr txBox="1"/>
-          <p:nvPr/>
-        </p:nvSpPr>
-        <p:spPr>
-          <a:xfrm>
-            <a:off x="6492240" y="2633472"/>
-            <a:ext cx="5120640" cy="347472"/>
+              <a:t>US PPV</a:t>
+            </a:r>
+          </a:p>
+        </p:txBody>
+      </p:sp>
+      <p:sp>
+        <p:nvSpPr>
+          <p:cNvPr id="62" name="TextBox 61"/>
+          <p:cNvSpPr txBox="1"/>
+          <p:nvPr/>
+        </p:nvSpPr>
+        <p:spPr>
+          <a:xfrm>
+            <a:off x="8549640" y="2734056"/>
+            <a:ext cx="1005840" cy="347472"/>
+          </a:xfrm>
+          <a:prstGeom prst="rect">
+            <a:avLst/>
+          </a:prstGeom>
+          <a:noFill/>
+        </p:spPr>
+        <p:txBody>
+          <a:bodyPr wrap="square" lIns="0" rIns="0" tIns="0" bIns="0">
+            <a:spAutoFit/>
+          </a:bodyPr>
+          <a:lstStyle/>
+          <a:p>
+            <a:pPr algn="ctr"/>
+            <a:r>
+              <a:rPr sz="1400" b="1" i="0">
+                <a:solidFill>
+                  <a:srgbClr val="065A82"/>
+                </a:solidFill>
+                <a:latin typeface="Calibri"/>
+              </a:rPr>
+              <a:t>2.15</a:t>
+            </a:r>
+          </a:p>
+        </p:txBody>
+      </p:sp>
+      <p:sp>
+        <p:nvSpPr>
+          <p:cNvPr id="63" name="TextBox 62"/>
+          <p:cNvSpPr txBox="1"/>
+          <p:nvPr/>
+        </p:nvSpPr>
+        <p:spPr>
+          <a:xfrm>
+            <a:off x="6492240" y="3054096"/>
+            <a:ext cx="5120640" cy="292608"/>
           </a:xfrm>
           <a:prstGeom prst="rect">
             <a:avLst/>
@@ -20705,55 +20845,20 @@
           <a:p>
             <a:pPr algn="l"/>
             <a:r>
-              <a:rPr sz="1100" b="0" i="0">
+              <a:rPr sz="900" b="0" i="0">
                 <a:solidFill>
                   <a:srgbClr val="64748B"/>
                 </a:solidFill>
                 <a:latin typeface="Calibri"/>
               </a:rPr>
-              <a:t>Jan: 12.7%  |  Feb: 11.2%</a:t>
-            </a:r>
-          </a:p>
-        </p:txBody>
-      </p:sp>
-      <p:sp>
-        <p:nvSpPr>
-          <p:cNvPr id="60" name="TextBox 59"/>
-          <p:cNvSpPr txBox="1"/>
-          <p:nvPr/>
-        </p:nvSpPr>
-        <p:spPr>
-          <a:xfrm>
-            <a:off x="6492240" y="2880360"/>
-            <a:ext cx="5120640" cy="320040"/>
-          </a:xfrm>
-          <a:prstGeom prst="rect">
-            <a:avLst/>
-          </a:prstGeom>
-          <a:noFill/>
-        </p:spPr>
-        <p:txBody>
-          <a:bodyPr wrap="square" lIns="0" rIns="0" tIns="0" bIns="0">
-            <a:spAutoFit/>
-          </a:bodyPr>
-          <a:lstStyle/>
-          <a:p>
-            <a:pPr algn="l"/>
-            <a:r>
-              <a:rPr sz="1000" b="0" i="0">
-                <a:solidFill>
-                  <a:srgbClr val="1C7293"/>
-                </a:solidFill>
-                <a:latin typeface="Calibri"/>
-              </a:rPr>
-              <a:t>PPV: 2.07 → 1.88</a:t>
-            </a:r>
-          </a:p>
-        </p:txBody>
-      </p:sp>
-      <p:sp>
-        <p:nvSpPr>
-          <p:cNvPr id="61" name="Rectangle 60"/>
+              <a:t>Slightly below site average (2.03)</a:t>
+            </a:r>
+          </a:p>
+        </p:txBody>
+      </p:sp>
+      <p:sp>
+        <p:nvSpPr>
+          <p:cNvPr id="64" name="Rectangle 63"/>
           <p:cNvSpPr/>
           <p:nvPr/>
         </p:nvSpPr>
@@ -20796,7 +20901,7 @@
       </p:sp>
       <p:sp>
         <p:nvSpPr>
-          <p:cNvPr id="62" name="Rectangle 61"/>
+          <p:cNvPr id="65" name="Rectangle 64"/>
           <p:cNvSpPr/>
           <p:nvPr/>
         </p:nvSpPr>
@@ -20809,7 +20914,7 @@
             <a:avLst/>
           </a:prstGeom>
           <a:solidFill>
-            <a:srgbClr val="F5A623"/>
+            <a:srgbClr val="DC2626"/>
           </a:solidFill>
           <a:ln>
             <a:noFill/>
@@ -20839,7 +20944,7 @@
       </p:sp>
       <p:sp>
         <p:nvSpPr>
-          <p:cNvPr id="63" name="TextBox 62"/>
+          <p:cNvPr id="66" name="TextBox 65"/>
           <p:cNvSpPr txBox="1"/>
           <p:nvPr/>
         </p:nvSpPr>
@@ -20863,18 +20968,18 @@
             <a:r>
               <a:rPr sz="1300" b="1" i="0">
                 <a:solidFill>
-                  <a:srgbClr val="F5A623"/>
-                </a:solidFill>
-                <a:latin typeface="Calibri"/>
-              </a:rPr>
-              <a:t>APAC Opportunity</a:t>
-            </a:r>
-          </a:p>
-        </p:txBody>
-      </p:sp>
-      <p:sp>
-        <p:nvSpPr>
-          <p:cNvPr id="64" name="TextBox 63"/>
+                  <a:srgbClr val="DC2626"/>
+                </a:solidFill>
+                <a:latin typeface="Calibri"/>
+              </a:rPr>
+              <a:t>UK / EMEA Alert</a:t>
+            </a:r>
+          </a:p>
+        </p:txBody>
+      </p:sp>
+      <p:sp>
+        <p:nvSpPr>
+          <p:cNvPr id="67" name="TextBox 66"/>
           <p:cNvSpPr txBox="1"/>
           <p:nvPr/>
         </p:nvSpPr>
@@ -20902,14 +21007,14 @@
                 </a:solidFill>
                 <a:latin typeface="Calibri"/>
               </a:rPr>
-              <a:t>•  China has 2nd highest PVs but shrinking share (-1.9pp)</a:t>
-            </a:r>
-          </a:p>
-        </p:txBody>
-      </p:sp>
-      <p:sp>
-        <p:nvSpPr>
-          <p:cNvPr id="65" name="TextBox 64"/>
+              <a:t>•  UK: 9.2% → 2.4% traffic share (-6.8pp) in one month</a:t>
+            </a:r>
+          </a:p>
+        </p:txBody>
+      </p:sp>
+      <p:sp>
+        <p:nvSpPr>
+          <p:cNvPr id="68" name="TextBox 67"/>
           <p:cNvSpPr txBox="1"/>
           <p:nvPr/>
         </p:nvSpPr>
@@ -20937,14 +21042,14 @@
                 </a:solidFill>
                 <a:latin typeface="Calibri"/>
               </a:rPr>
-              <a:t>•  Chinese homepage (主页) shows high repeat visits</a:t>
-            </a:r>
-          </a:p>
-        </p:txBody>
-      </p:sp>
-      <p:sp>
-        <p:nvSpPr>
-          <p:cNvPr id="66" name="TextBox 65"/>
+              <a:t>•  Germany: 3.7% → 1.9% (-1.8pp) — similar pattern</a:t>
+            </a:r>
+          </a:p>
+        </p:txBody>
+      </p:sp>
+      <p:sp>
+        <p:nvSpPr>
+          <p:cNvPr id="69" name="TextBox 68"/>
           <p:cNvSpPr txBox="1"/>
           <p:nvPr/>
         </p:nvSpPr>
@@ -20972,14 +21077,14 @@
                 </a:solidFill>
                 <a:latin typeface="Calibri"/>
               </a:rPr>
-              <a:t>•  CJK content PPV (2.07) ≈ English (2.25) — high quality</a:t>
-            </a:r>
-          </a:p>
-        </p:txBody>
-      </p:sp>
-      <p:sp>
-        <p:nvSpPr>
-          <p:cNvPr id="67" name="TextBox 66"/>
+              <a:t>•  Combined EMEA drop: ~10pp of total site traffic</a:t>
+            </a:r>
+          </a:p>
+        </p:txBody>
+      </p:sp>
+      <p:sp>
+        <p:nvSpPr>
+          <p:cNvPr id="70" name="TextBox 69"/>
           <p:cNvSpPr txBox="1"/>
           <p:nvPr/>
         </p:nvSpPr>
@@ -21007,14 +21112,14 @@
                 </a:solidFill>
                 <a:latin typeface="Calibri"/>
               </a:rPr>
-              <a:t>•  Solidigm CN localized pages grew +76% MoM</a:t>
-            </a:r>
-          </a:p>
-        </p:txBody>
-      </p:sp>
-      <p:sp>
-        <p:nvSpPr>
-          <p:cNvPr id="68" name="TextBox 67"/>
+              <a:t>•  Possible causes: campaign ended, referral removed</a:t>
+            </a:r>
+          </a:p>
+        </p:txBody>
+      </p:sp>
+      <p:sp>
+        <p:nvSpPr>
+          <p:cNvPr id="71" name="TextBox 70"/>
           <p:cNvSpPr txBox="1"/>
           <p:nvPr/>
         </p:nvSpPr>
@@ -21042,14 +21147,14 @@
                 </a:solidFill>
                 <a:latin typeface="Calibri"/>
               </a:rPr>
-              <a:t>•  → Invest in APAC content expansion NOW</a:t>
-            </a:r>
-          </a:p>
-        </p:txBody>
-      </p:sp>
-      <p:sp>
-        <p:nvSpPr>
-          <p:cNvPr id="69" name="TextBox 68"/>
+              <a:t>•  → Audit EMEA campaign activity &amp; referral links NOW</a:t>
+            </a:r>
+          </a:p>
+        </p:txBody>
+      </p:sp>
+      <p:sp>
+        <p:nvSpPr>
+          <p:cNvPr id="72" name="TextBox 71"/>
           <p:cNvSpPr txBox="1"/>
           <p:nvPr/>
         </p:nvSpPr>
@@ -21077,7 +21182,7 @@
                 </a:solidFill>
                 <a:latin typeface="Calibri"/>
               </a:rPr>
-              <a:t>UK dropped from 8.3% → 2.1% — investigate traffic source change or campaign pause in EMEA.</a:t>
+              <a:t>UK + Germany combined dropped ~8.5pp in one month — EMEA traffic investigation is a top priority.</a:t>
             </a:r>
           </a:p>
         </p:txBody>
@@ -21372,7 +21477,7 @@
                 </a:solidFill>
                 <a:latin typeface="Calibri"/>
               </a:rPr>
-              <a:t>64-66%  bounce on 1st page</a:t>
+              <a:t>64.3%   bounce on 1st page</a:t>
             </a:r>
           </a:p>
         </p:txBody>
@@ -21407,7 +21512,7 @@
                 </a:solidFill>
                 <a:latin typeface="Calibri"/>
               </a:rPr>
-              <a:t>17.5%   read 2 pages</a:t>
+              <a:t>18.5%   read 2 pages</a:t>
             </a:r>
           </a:p>
         </p:txBody>
@@ -21442,7 +21547,7 @@
                 </a:solidFill>
                 <a:latin typeface="Calibri"/>
               </a:rPr>
-              <a:t> 6.4%   read 3 pages</a:t>
+              <a:t> 6.9%   read 3 pages</a:t>
             </a:r>
           </a:p>
         </p:txBody>
@@ -21477,7 +21582,7 @@
                 </a:solidFill>
                 <a:latin typeface="Calibri"/>
               </a:rPr>
-              <a:t> 8.1%   read 4-5 pages</a:t>
+              <a:t> 5.4%   read 4-5 pages</a:t>
             </a:r>
           </a:p>
         </p:txBody>
@@ -21512,7 +21617,7 @@
                 </a:solidFill>
                 <a:latin typeface="Calibri"/>
               </a:rPr>
-              <a:t> 3.1%   read 6-10 pages</a:t>
+              <a:t> 3.3%   read 6-10 pages</a:t>
             </a:r>
           </a:p>
         </p:txBody>
@@ -21547,7 +21652,7 @@
                 </a:solidFill>
                 <a:latin typeface="Calibri"/>
               </a:rPr>
-              <a:t> 1.6%   read 11+ pages</a:t>
+              <a:t> 1.5%   read 11+ pages</a:t>
             </a:r>
           </a:p>
         </p:txBody>
@@ -21582,7 +21687,7 @@
                 </a:solidFill>
                 <a:latin typeface="Calibri"/>
               </a:rPr>
-              <a:t>→ 35% of visitors are genuinely engaged</a:t>
+              <a:t>→ 35.7% of visitors genuinely engaged</a:t>
             </a:r>
           </a:p>
         </p:txBody>
@@ -21738,7 +21843,7 @@
                 </a:solidFill>
                 <a:latin typeface="Calibri"/>
               </a:rPr>
-              <a:t>2.6%   First visit (new)</a:t>
+              <a:t> 2.5%   First visit (new)</a:t>
             </a:r>
           </a:p>
         </p:txBody>
@@ -21773,7 +21878,7 @@
                 </a:solidFill>
                 <a:latin typeface="Calibri"/>
               </a:rPr>
-              <a:t>42.1%  2nd visit</a:t>
+              <a:t>46.1%   2nd visit</a:t>
             </a:r>
           </a:p>
         </p:txBody>
@@ -21808,7 +21913,7 @@
                 </a:solidFill>
                 <a:latin typeface="Calibri"/>
               </a:rPr>
-              <a:t>52.7%  6th+ visit (loyal)</a:t>
+              <a:t>51.3%   6th+ visit (loyal)</a:t>
             </a:r>
           </a:p>
         </p:txBody>
@@ -21843,7 +21948,7 @@
                 </a:solidFill>
                 <a:latin typeface="Calibri"/>
               </a:rPr>
-              <a:t>2.5%   9th visit</a:t>
+              <a:t> 2.7%   9th visit</a:t>
             </a:r>
           </a:p>
         </p:txBody>
@@ -21878,7 +21983,7 @@
                 </a:solidFill>
                 <a:latin typeface="Calibri"/>
               </a:rPr>
-              <a:t>→ 95% are returning visitors</a:t>
+              <a:t>→ 97.5% are returning visitors</a:t>
             </a:r>
           </a:p>
         </p:txBody>
@@ -22435,7 +22540,7 @@
                 </a:solidFill>
                 <a:latin typeface="Calibri"/>
               </a:rPr>
-              <a:t>JAN peak: midnight UTC (APAC traffic)</a:t>
+              <a:t>JAN peak: 05:00 UTC (US overnight / APAC)</a:t>
             </a:r>
           </a:p>
         </p:txBody>
@@ -22505,7 +22610,7 @@
                 </a:solidFill>
                 <a:latin typeface="Calibri"/>
               </a:rPr>
-              <a:t>JAN top day: Friday (85,836 PVs)</a:t>
+              <a:t>JAN top day: Friday (76,611 PVs)</a:t>
             </a:r>
           </a:p>
         </p:txBody>
@@ -22540,7 +22645,7 @@
                 </a:solidFill>
                 <a:latin typeface="Calibri"/>
               </a:rPr>
-              <a:t>FEB top day: Tuesday (75,535 PVs)</a:t>
+              <a:t>FEB top day: Tuesday (63,165 PVs)</a:t>
             </a:r>
           </a:p>
         </p:txBody>

--- a/webanalytics/Solidigm_Analytics_Report_JanFeb_FY26.pptx
+++ b/webanalytics/Solidigm_Analytics_Report_JanFeb_FY26.pptx
@@ -6197,7 +6197,7 @@
         <p:spPr>
           <a:xfrm>
             <a:off x="274320" y="868680"/>
-            <a:ext cx="11704320" cy="384048"/>
+            <a:ext cx="5577840" cy="502920"/>
           </a:xfrm>
           <a:prstGeom prst="rect">
             <a:avLst/>
@@ -6233,14 +6233,57 @@
       </p:sp>
       <p:sp>
         <p:nvSpPr>
-          <p:cNvPr id="6" name="TextBox 5"/>
-          <p:cNvSpPr txBox="1"/>
-          <p:nvPr/>
-        </p:nvSpPr>
-        <p:spPr>
-          <a:xfrm>
-            <a:off x="274320" y="886968"/>
-            <a:ext cx="2560320" cy="347472"/>
+          <p:cNvPr id="6" name="Rectangle 5"/>
+          <p:cNvSpPr/>
+          <p:nvPr/>
+        </p:nvSpPr>
+        <p:spPr>
+          <a:xfrm>
+            <a:off x="5989320" y="868680"/>
+            <a:ext cx="5989320" cy="502920"/>
+          </a:xfrm>
+          <a:prstGeom prst="rect">
+            <a:avLst/>
+          </a:prstGeom>
+          <a:solidFill>
+            <a:srgbClr val="1C7293"/>
+          </a:solidFill>
+          <a:ln>
+            <a:noFill/>
+          </a:ln>
+        </p:spPr>
+        <p:style>
+          <a:lnRef idx="1">
+            <a:schemeClr val="accent1"/>
+          </a:lnRef>
+          <a:fillRef idx="3">
+            <a:schemeClr val="accent1"/>
+          </a:fillRef>
+          <a:effectRef idx="2">
+            <a:schemeClr val="accent1"/>
+          </a:effectRef>
+          <a:fontRef idx="minor">
+            <a:schemeClr val="lt1"/>
+          </a:fontRef>
+        </p:style>
+        <p:txBody>
+          <a:bodyPr rtlCol="0" anchor="ctr"/>
+          <a:lstStyle/>
+          <a:p>
+            <a:pPr algn="ctr"/>
+          </a:p>
+        </p:txBody>
+      </p:sp>
+      <p:sp>
+        <p:nvSpPr>
+          <p:cNvPr id="7" name="TextBox 6"/>
+          <p:cNvSpPr txBox="1"/>
+          <p:nvPr/>
+        </p:nvSpPr>
+        <p:spPr>
+          <a:xfrm>
+            <a:off x="457200" y="886968"/>
+            <a:ext cx="5212080" cy="438912"/>
           </a:xfrm>
           <a:prstGeom prst="rect">
             <a:avLst/>
@@ -6255,27 +6298,27 @@
           <a:p>
             <a:pPr algn="l"/>
             <a:r>
-              <a:rPr sz="1100" b="1" i="0">
+              <a:rPr sz="1200" b="1" i="0">
                 <a:solidFill>
                   <a:srgbClr val="FFFFFF"/>
                 </a:solidFill>
                 <a:latin typeface="Calibri"/>
               </a:rPr>
-              <a:t>Metric</a:t>
-            </a:r>
-          </a:p>
-        </p:txBody>
-      </p:sp>
-      <p:sp>
-        <p:nvSpPr>
-          <p:cNvPr id="7" name="TextBox 6"/>
-          <p:cNvSpPr txBox="1"/>
-          <p:nvPr/>
-        </p:nvSpPr>
-        <p:spPr>
-          <a:xfrm>
-            <a:off x="3657600" y="886968"/>
-            <a:ext cx="2560320" cy="347472"/>
+              <a:t>PAID TRAFFIC  (Paid-Display)</a:t>
+            </a:r>
+          </a:p>
+        </p:txBody>
+      </p:sp>
+      <p:sp>
+        <p:nvSpPr>
+          <p:cNvPr id="8" name="TextBox 7"/>
+          <p:cNvSpPr txBox="1"/>
+          <p:nvPr/>
+        </p:nvSpPr>
+        <p:spPr>
+          <a:xfrm>
+            <a:off x="6126480" y="886968"/>
+            <a:ext cx="5623560" cy="438912"/>
           </a:xfrm>
           <a:prstGeom prst="rect">
             <a:avLst/>
@@ -6290,84 +6333,57 @@
           <a:p>
             <a:pPr algn="l"/>
             <a:r>
-              <a:rPr sz="1100" b="1" i="0">
+              <a:rPr sz="1200" b="1" i="0">
                 <a:solidFill>
                   <a:srgbClr val="FFFFFF"/>
                 </a:solidFill>
                 <a:latin typeface="Calibri"/>
               </a:rPr>
-              <a:t>January</a:t>
-            </a:r>
-          </a:p>
-        </p:txBody>
-      </p:sp>
-      <p:sp>
-        <p:nvSpPr>
-          <p:cNvPr id="8" name="TextBox 7"/>
-          <p:cNvSpPr txBox="1"/>
-          <p:nvPr/>
-        </p:nvSpPr>
-        <p:spPr>
-          <a:xfrm>
-            <a:off x="6126480" y="886968"/>
-            <a:ext cx="2560320" cy="347472"/>
-          </a:xfrm>
-          <a:prstGeom prst="rect">
-            <a:avLst/>
-          </a:prstGeom>
-          <a:noFill/>
-        </p:spPr>
-        <p:txBody>
-          <a:bodyPr wrap="square" lIns="0" rIns="0" tIns="0" bIns="0">
-            <a:spAutoFit/>
-          </a:bodyPr>
-          <a:lstStyle/>
-          <a:p>
-            <a:pPr algn="l"/>
-            <a:r>
-              <a:rPr sz="1100" b="1" i="0">
-                <a:solidFill>
-                  <a:srgbClr val="FFFFFF"/>
-                </a:solidFill>
-                <a:latin typeface="Calibri"/>
-              </a:rPr>
-              <a:t>February</a:t>
-            </a:r>
-          </a:p>
-        </p:txBody>
-      </p:sp>
-      <p:sp>
-        <p:nvSpPr>
-          <p:cNvPr id="9" name="TextBox 8"/>
-          <p:cNvSpPr txBox="1"/>
-          <p:nvPr/>
-        </p:nvSpPr>
-        <p:spPr>
-          <a:xfrm>
-            <a:off x="8595360" y="886968"/>
-            <a:ext cx="2560320" cy="347472"/>
-          </a:xfrm>
-          <a:prstGeom prst="rect">
-            <a:avLst/>
-          </a:prstGeom>
-          <a:noFill/>
-        </p:spPr>
-        <p:txBody>
-          <a:bodyPr wrap="square" lIns="0" rIns="0" tIns="0" bIns="0">
-            <a:spAutoFit/>
-          </a:bodyPr>
-          <a:lstStyle/>
-          <a:p>
-            <a:pPr algn="l"/>
-            <a:r>
-              <a:rPr sz="1100" b="1" i="0">
-                <a:solidFill>
-                  <a:srgbClr val="FFFFFF"/>
-                </a:solidFill>
-                <a:latin typeface="Calibri"/>
-              </a:rPr>
-              <a:t>MoM Δ</a:t>
-            </a:r>
+              <a:t>NON-PAID TRAFFIC  (Organic / Direct / Referral / Social)</a:t>
+            </a:r>
+          </a:p>
+        </p:txBody>
+      </p:sp>
+      <p:sp>
+        <p:nvSpPr>
+          <p:cNvPr id="9" name="Rectangle 8"/>
+          <p:cNvSpPr/>
+          <p:nvPr/>
+        </p:nvSpPr>
+        <p:spPr>
+          <a:xfrm>
+            <a:off x="274320" y="1444752"/>
+            <a:ext cx="5577840" cy="457200"/>
+          </a:xfrm>
+          <a:prstGeom prst="rect">
+            <a:avLst/>
+          </a:prstGeom>
+          <a:solidFill>
+            <a:srgbClr val="E8F4FF"/>
+          </a:solidFill>
+          <a:ln>
+            <a:noFill/>
+          </a:ln>
+        </p:spPr>
+        <p:style>
+          <a:lnRef idx="1">
+            <a:schemeClr val="accent1"/>
+          </a:lnRef>
+          <a:fillRef idx="3">
+            <a:schemeClr val="accent1"/>
+          </a:fillRef>
+          <a:effectRef idx="2">
+            <a:schemeClr val="accent1"/>
+          </a:effectRef>
+          <a:fontRef idx="minor">
+            <a:schemeClr val="lt1"/>
+          </a:fontRef>
+        </p:style>
+        <p:txBody>
+          <a:bodyPr rtlCol="0" anchor="ctr"/>
+          <a:lstStyle/>
+          <a:p>
+            <a:pPr algn="ctr"/>
           </a:p>
         </p:txBody>
       </p:sp>
@@ -6379,8 +6395,2349 @@
         </p:nvSpPr>
         <p:spPr>
           <a:xfrm>
-            <a:off x="274320" y="1252728"/>
-            <a:ext cx="11704320" cy="548640"/>
+            <a:off x="274320" y="1444752"/>
+            <a:ext cx="54864" cy="457200"/>
+          </a:xfrm>
+          <a:prstGeom prst="rect">
+            <a:avLst/>
+          </a:prstGeom>
+          <a:solidFill>
+            <a:srgbClr val="065A82"/>
+          </a:solidFill>
+          <a:ln>
+            <a:noFill/>
+          </a:ln>
+        </p:spPr>
+        <p:style>
+          <a:lnRef idx="1">
+            <a:schemeClr val="accent1"/>
+          </a:lnRef>
+          <a:fillRef idx="3">
+            <a:schemeClr val="accent1"/>
+          </a:fillRef>
+          <a:effectRef idx="2">
+            <a:schemeClr val="accent1"/>
+          </a:effectRef>
+          <a:fontRef idx="minor">
+            <a:schemeClr val="lt1"/>
+          </a:fontRef>
+        </p:style>
+        <p:txBody>
+          <a:bodyPr rtlCol="0" anchor="ctr"/>
+          <a:lstStyle/>
+          <a:p>
+            <a:pPr algn="ctr"/>
+          </a:p>
+        </p:txBody>
+      </p:sp>
+      <p:sp>
+        <p:nvSpPr>
+          <p:cNvPr id="11" name="TextBox 10"/>
+          <p:cNvSpPr txBox="1"/>
+          <p:nvPr/>
+        </p:nvSpPr>
+        <p:spPr>
+          <a:xfrm>
+            <a:off x="502920" y="1499616"/>
+            <a:ext cx="2103120" cy="384048"/>
+          </a:xfrm>
+          <a:prstGeom prst="rect">
+            <a:avLst/>
+          </a:prstGeom>
+          <a:noFill/>
+        </p:spPr>
+        <p:txBody>
+          <a:bodyPr wrap="square" lIns="0" rIns="0" tIns="0" bIns="0">
+            <a:spAutoFit/>
+          </a:bodyPr>
+          <a:lstStyle/>
+          <a:p>
+            <a:pPr algn="l"/>
+            <a:r>
+              <a:rPr sz="1000" b="1" i="0">
+                <a:solidFill>
+                  <a:srgbClr val="1E293B"/>
+                </a:solidFill>
+                <a:latin typeface="Calibri"/>
+              </a:rPr>
+              <a:t>PV Share</a:t>
+            </a:r>
+          </a:p>
+        </p:txBody>
+      </p:sp>
+      <p:sp>
+        <p:nvSpPr>
+          <p:cNvPr id="12" name="TextBox 11"/>
+          <p:cNvSpPr txBox="1"/>
+          <p:nvPr/>
+        </p:nvSpPr>
+        <p:spPr>
+          <a:xfrm>
+            <a:off x="2606039" y="1499616"/>
+            <a:ext cx="1005840" cy="384048"/>
+          </a:xfrm>
+          <a:prstGeom prst="rect">
+            <a:avLst/>
+          </a:prstGeom>
+          <a:noFill/>
+        </p:spPr>
+        <p:txBody>
+          <a:bodyPr wrap="square" lIns="0" rIns="0" tIns="0" bIns="0">
+            <a:spAutoFit/>
+          </a:bodyPr>
+          <a:lstStyle/>
+          <a:p>
+            <a:pPr algn="ctr"/>
+            <a:r>
+              <a:rPr sz="1300" b="1" i="0">
+                <a:solidFill>
+                  <a:srgbClr val="065A82"/>
+                </a:solidFill>
+                <a:latin typeface="Calibri"/>
+              </a:rPr>
+              <a:t> 9.9%</a:t>
+            </a:r>
+          </a:p>
+        </p:txBody>
+      </p:sp>
+      <p:sp>
+        <p:nvSpPr>
+          <p:cNvPr id="13" name="TextBox 12"/>
+          <p:cNvSpPr txBox="1"/>
+          <p:nvPr/>
+        </p:nvSpPr>
+        <p:spPr>
+          <a:xfrm>
+            <a:off x="3657600" y="1499616"/>
+            <a:ext cx="1005840" cy="384048"/>
+          </a:xfrm>
+          <a:prstGeom prst="rect">
+            <a:avLst/>
+          </a:prstGeom>
+          <a:noFill/>
+        </p:spPr>
+        <p:txBody>
+          <a:bodyPr wrap="square" lIns="0" rIns="0" tIns="0" bIns="0">
+            <a:spAutoFit/>
+          </a:bodyPr>
+          <a:lstStyle/>
+          <a:p>
+            <a:pPr algn="ctr"/>
+            <a:r>
+              <a:rPr sz="1300" b="1" i="0">
+                <a:solidFill>
+                  <a:srgbClr val="065A82"/>
+                </a:solidFill>
+                <a:latin typeface="Calibri"/>
+              </a:rPr>
+              <a:t>15.8%</a:t>
+            </a:r>
+          </a:p>
+        </p:txBody>
+      </p:sp>
+      <p:sp>
+        <p:nvSpPr>
+          <p:cNvPr id="14" name="TextBox 13"/>
+          <p:cNvSpPr txBox="1"/>
+          <p:nvPr/>
+        </p:nvSpPr>
+        <p:spPr>
+          <a:xfrm>
+            <a:off x="4709159" y="1499616"/>
+            <a:ext cx="1097280" cy="384048"/>
+          </a:xfrm>
+          <a:prstGeom prst="rect">
+            <a:avLst/>
+          </a:prstGeom>
+          <a:noFill/>
+        </p:spPr>
+        <p:txBody>
+          <a:bodyPr wrap="square" lIns="0" rIns="0" tIns="0" bIns="0">
+            <a:spAutoFit/>
+          </a:bodyPr>
+          <a:lstStyle/>
+          <a:p>
+            <a:pPr algn="ctr"/>
+            <a:r>
+              <a:rPr sz="1300" b="1" i="0">
+                <a:solidFill>
+                  <a:srgbClr val="DC2626"/>
+                </a:solidFill>
+                <a:latin typeface="Calibri"/>
+              </a:rPr>
+              <a:t>+5.9pp</a:t>
+            </a:r>
+          </a:p>
+        </p:txBody>
+      </p:sp>
+      <p:sp>
+        <p:nvSpPr>
+          <p:cNvPr id="15" name="Rectangle 14"/>
+          <p:cNvSpPr/>
+          <p:nvPr/>
+        </p:nvSpPr>
+        <p:spPr>
+          <a:xfrm>
+            <a:off x="274320" y="1920240"/>
+            <a:ext cx="5577840" cy="457200"/>
+          </a:xfrm>
+          <a:prstGeom prst="rect">
+            <a:avLst/>
+          </a:prstGeom>
+          <a:solidFill>
+            <a:srgbClr val="D4EDFF"/>
+          </a:solidFill>
+          <a:ln>
+            <a:noFill/>
+          </a:ln>
+        </p:spPr>
+        <p:style>
+          <a:lnRef idx="1">
+            <a:schemeClr val="accent1"/>
+          </a:lnRef>
+          <a:fillRef idx="3">
+            <a:schemeClr val="accent1"/>
+          </a:fillRef>
+          <a:effectRef idx="2">
+            <a:schemeClr val="accent1"/>
+          </a:effectRef>
+          <a:fontRef idx="minor">
+            <a:schemeClr val="lt1"/>
+          </a:fontRef>
+        </p:style>
+        <p:txBody>
+          <a:bodyPr rtlCol="0" anchor="ctr"/>
+          <a:lstStyle/>
+          <a:p>
+            <a:pPr algn="ctr"/>
+          </a:p>
+        </p:txBody>
+      </p:sp>
+      <p:sp>
+        <p:nvSpPr>
+          <p:cNvPr id="16" name="Rectangle 15"/>
+          <p:cNvSpPr/>
+          <p:nvPr/>
+        </p:nvSpPr>
+        <p:spPr>
+          <a:xfrm>
+            <a:off x="274320" y="1920240"/>
+            <a:ext cx="54864" cy="457200"/>
+          </a:xfrm>
+          <a:prstGeom prst="rect">
+            <a:avLst/>
+          </a:prstGeom>
+          <a:solidFill>
+            <a:srgbClr val="065A82"/>
+          </a:solidFill>
+          <a:ln>
+            <a:noFill/>
+          </a:ln>
+        </p:spPr>
+        <p:style>
+          <a:lnRef idx="1">
+            <a:schemeClr val="accent1"/>
+          </a:lnRef>
+          <a:fillRef idx="3">
+            <a:schemeClr val="accent1"/>
+          </a:fillRef>
+          <a:effectRef idx="2">
+            <a:schemeClr val="accent1"/>
+          </a:effectRef>
+          <a:fontRef idx="minor">
+            <a:schemeClr val="lt1"/>
+          </a:fontRef>
+        </p:style>
+        <p:txBody>
+          <a:bodyPr rtlCol="0" anchor="ctr"/>
+          <a:lstStyle/>
+          <a:p>
+            <a:pPr algn="ctr"/>
+          </a:p>
+        </p:txBody>
+      </p:sp>
+      <p:sp>
+        <p:nvSpPr>
+          <p:cNvPr id="17" name="TextBox 16"/>
+          <p:cNvSpPr txBox="1"/>
+          <p:nvPr/>
+        </p:nvSpPr>
+        <p:spPr>
+          <a:xfrm>
+            <a:off x="502920" y="1975104"/>
+            <a:ext cx="2103120" cy="384048"/>
+          </a:xfrm>
+          <a:prstGeom prst="rect">
+            <a:avLst/>
+          </a:prstGeom>
+          <a:noFill/>
+        </p:spPr>
+        <p:txBody>
+          <a:bodyPr wrap="square" lIns="0" rIns="0" tIns="0" bIns="0">
+            <a:spAutoFit/>
+          </a:bodyPr>
+          <a:lstStyle/>
+          <a:p>
+            <a:pPr algn="l"/>
+            <a:r>
+              <a:rPr sz="1000" b="1" i="0">
+                <a:solidFill>
+                  <a:srgbClr val="1E293B"/>
+                </a:solidFill>
+                <a:latin typeface="Calibri"/>
+              </a:rPr>
+              <a:t>Unique Visitors</a:t>
+            </a:r>
+          </a:p>
+        </p:txBody>
+      </p:sp>
+      <p:sp>
+        <p:nvSpPr>
+          <p:cNvPr id="18" name="TextBox 17"/>
+          <p:cNvSpPr txBox="1"/>
+          <p:nvPr/>
+        </p:nvSpPr>
+        <p:spPr>
+          <a:xfrm>
+            <a:off x="2606039" y="1975104"/>
+            <a:ext cx="1005840" cy="384048"/>
+          </a:xfrm>
+          <a:prstGeom prst="rect">
+            <a:avLst/>
+          </a:prstGeom>
+          <a:noFill/>
+        </p:spPr>
+        <p:txBody>
+          <a:bodyPr wrap="square" lIns="0" rIns="0" tIns="0" bIns="0">
+            <a:spAutoFit/>
+          </a:bodyPr>
+          <a:lstStyle/>
+          <a:p>
+            <a:pPr algn="ctr"/>
+            <a:r>
+              <a:rPr sz="1300" b="1" i="0">
+                <a:solidFill>
+                  <a:srgbClr val="065A82"/>
+                </a:solidFill>
+                <a:latin typeface="Calibri"/>
+              </a:rPr>
+              <a:t>23,439</a:t>
+            </a:r>
+          </a:p>
+        </p:txBody>
+      </p:sp>
+      <p:sp>
+        <p:nvSpPr>
+          <p:cNvPr id="19" name="TextBox 18"/>
+          <p:cNvSpPr txBox="1"/>
+          <p:nvPr/>
+        </p:nvSpPr>
+        <p:spPr>
+          <a:xfrm>
+            <a:off x="3657600" y="1975104"/>
+            <a:ext cx="1005840" cy="384048"/>
+          </a:xfrm>
+          <a:prstGeom prst="rect">
+            <a:avLst/>
+          </a:prstGeom>
+          <a:noFill/>
+        </p:spPr>
+        <p:txBody>
+          <a:bodyPr wrap="square" lIns="0" rIns="0" tIns="0" bIns="0">
+            <a:spAutoFit/>
+          </a:bodyPr>
+          <a:lstStyle/>
+          <a:p>
+            <a:pPr algn="ctr"/>
+            <a:r>
+              <a:rPr sz="1300" b="1" i="0">
+                <a:solidFill>
+                  <a:srgbClr val="065A82"/>
+                </a:solidFill>
+                <a:latin typeface="Calibri"/>
+              </a:rPr>
+              <a:t>33,759</a:t>
+            </a:r>
+          </a:p>
+        </p:txBody>
+      </p:sp>
+      <p:sp>
+        <p:nvSpPr>
+          <p:cNvPr id="20" name="TextBox 19"/>
+          <p:cNvSpPr txBox="1"/>
+          <p:nvPr/>
+        </p:nvSpPr>
+        <p:spPr>
+          <a:xfrm>
+            <a:off x="4709159" y="1975104"/>
+            <a:ext cx="1097280" cy="384048"/>
+          </a:xfrm>
+          <a:prstGeom prst="rect">
+            <a:avLst/>
+          </a:prstGeom>
+          <a:noFill/>
+        </p:spPr>
+        <p:txBody>
+          <a:bodyPr wrap="square" lIns="0" rIns="0" tIns="0" bIns="0">
+            <a:spAutoFit/>
+          </a:bodyPr>
+          <a:lstStyle/>
+          <a:p>
+            <a:pPr algn="ctr"/>
+            <a:r>
+              <a:rPr sz="1300" b="1" i="0">
+                <a:solidFill>
+                  <a:srgbClr val="DC2626"/>
+                </a:solidFill>
+                <a:latin typeface="Calibri"/>
+              </a:rPr>
+              <a:t>+44.0%</a:t>
+            </a:r>
+          </a:p>
+        </p:txBody>
+      </p:sp>
+      <p:sp>
+        <p:nvSpPr>
+          <p:cNvPr id="21" name="Rectangle 20"/>
+          <p:cNvSpPr/>
+          <p:nvPr/>
+        </p:nvSpPr>
+        <p:spPr>
+          <a:xfrm>
+            <a:off x="274320" y="2395728"/>
+            <a:ext cx="5577840" cy="457200"/>
+          </a:xfrm>
+          <a:prstGeom prst="rect">
+            <a:avLst/>
+          </a:prstGeom>
+          <a:solidFill>
+            <a:srgbClr val="E8F4FF"/>
+          </a:solidFill>
+          <a:ln>
+            <a:noFill/>
+          </a:ln>
+        </p:spPr>
+        <p:style>
+          <a:lnRef idx="1">
+            <a:schemeClr val="accent1"/>
+          </a:lnRef>
+          <a:fillRef idx="3">
+            <a:schemeClr val="accent1"/>
+          </a:fillRef>
+          <a:effectRef idx="2">
+            <a:schemeClr val="accent1"/>
+          </a:effectRef>
+          <a:fontRef idx="minor">
+            <a:schemeClr val="lt1"/>
+          </a:fontRef>
+        </p:style>
+        <p:txBody>
+          <a:bodyPr rtlCol="0" anchor="ctr"/>
+          <a:lstStyle/>
+          <a:p>
+            <a:pPr algn="ctr"/>
+          </a:p>
+        </p:txBody>
+      </p:sp>
+      <p:sp>
+        <p:nvSpPr>
+          <p:cNvPr id="22" name="Rectangle 21"/>
+          <p:cNvSpPr/>
+          <p:nvPr/>
+        </p:nvSpPr>
+        <p:spPr>
+          <a:xfrm>
+            <a:off x="274320" y="2395728"/>
+            <a:ext cx="54864" cy="457200"/>
+          </a:xfrm>
+          <a:prstGeom prst="rect">
+            <a:avLst/>
+          </a:prstGeom>
+          <a:solidFill>
+            <a:srgbClr val="065A82"/>
+          </a:solidFill>
+          <a:ln>
+            <a:noFill/>
+          </a:ln>
+        </p:spPr>
+        <p:style>
+          <a:lnRef idx="1">
+            <a:schemeClr val="accent1"/>
+          </a:lnRef>
+          <a:fillRef idx="3">
+            <a:schemeClr val="accent1"/>
+          </a:fillRef>
+          <a:effectRef idx="2">
+            <a:schemeClr val="accent1"/>
+          </a:effectRef>
+          <a:fontRef idx="minor">
+            <a:schemeClr val="lt1"/>
+          </a:fontRef>
+        </p:style>
+        <p:txBody>
+          <a:bodyPr rtlCol="0" anchor="ctr"/>
+          <a:lstStyle/>
+          <a:p>
+            <a:pPr algn="ctr"/>
+          </a:p>
+        </p:txBody>
+      </p:sp>
+      <p:sp>
+        <p:nvSpPr>
+          <p:cNvPr id="23" name="TextBox 22"/>
+          <p:cNvSpPr txBox="1"/>
+          <p:nvPr/>
+        </p:nvSpPr>
+        <p:spPr>
+          <a:xfrm>
+            <a:off x="502920" y="2450592"/>
+            <a:ext cx="2103120" cy="384048"/>
+          </a:xfrm>
+          <a:prstGeom prst="rect">
+            <a:avLst/>
+          </a:prstGeom>
+          <a:noFill/>
+        </p:spPr>
+        <p:txBody>
+          <a:bodyPr wrap="square" lIns="0" rIns="0" tIns="0" bIns="0">
+            <a:spAutoFit/>
+          </a:bodyPr>
+          <a:lstStyle/>
+          <a:p>
+            <a:pPr algn="l"/>
+            <a:r>
+              <a:rPr sz="1000" b="1" i="0">
+                <a:solidFill>
+                  <a:srgbClr val="1E293B"/>
+                </a:solidFill>
+                <a:latin typeface="Calibri"/>
+              </a:rPr>
+              <a:t>Bounce Rate</a:t>
+            </a:r>
+          </a:p>
+        </p:txBody>
+      </p:sp>
+      <p:sp>
+        <p:nvSpPr>
+          <p:cNvPr id="24" name="TextBox 23"/>
+          <p:cNvSpPr txBox="1"/>
+          <p:nvPr/>
+        </p:nvSpPr>
+        <p:spPr>
+          <a:xfrm>
+            <a:off x="2606039" y="2450592"/>
+            <a:ext cx="1005840" cy="384048"/>
+          </a:xfrm>
+          <a:prstGeom prst="rect">
+            <a:avLst/>
+          </a:prstGeom>
+          <a:noFill/>
+        </p:spPr>
+        <p:txBody>
+          <a:bodyPr wrap="square" lIns="0" rIns="0" tIns="0" bIns="0">
+            <a:spAutoFit/>
+          </a:bodyPr>
+          <a:lstStyle/>
+          <a:p>
+            <a:pPr algn="ctr"/>
+            <a:r>
+              <a:rPr sz="1300" b="1" i="0">
+                <a:solidFill>
+                  <a:srgbClr val="065A82"/>
+                </a:solidFill>
+                <a:latin typeface="Calibri"/>
+              </a:rPr>
+              <a:t>70.0%</a:t>
+            </a:r>
+          </a:p>
+        </p:txBody>
+      </p:sp>
+      <p:sp>
+        <p:nvSpPr>
+          <p:cNvPr id="25" name="TextBox 24"/>
+          <p:cNvSpPr txBox="1"/>
+          <p:nvPr/>
+        </p:nvSpPr>
+        <p:spPr>
+          <a:xfrm>
+            <a:off x="3657600" y="2450592"/>
+            <a:ext cx="1005840" cy="384048"/>
+          </a:xfrm>
+          <a:prstGeom prst="rect">
+            <a:avLst/>
+          </a:prstGeom>
+          <a:noFill/>
+        </p:spPr>
+        <p:txBody>
+          <a:bodyPr wrap="square" lIns="0" rIns="0" tIns="0" bIns="0">
+            <a:spAutoFit/>
+          </a:bodyPr>
+          <a:lstStyle/>
+          <a:p>
+            <a:pPr algn="ctr"/>
+            <a:r>
+              <a:rPr sz="1300" b="1" i="0">
+                <a:solidFill>
+                  <a:srgbClr val="065A82"/>
+                </a:solidFill>
+                <a:latin typeface="Calibri"/>
+              </a:rPr>
+              <a:t>70.6%</a:t>
+            </a:r>
+          </a:p>
+        </p:txBody>
+      </p:sp>
+      <p:sp>
+        <p:nvSpPr>
+          <p:cNvPr id="26" name="TextBox 25"/>
+          <p:cNvSpPr txBox="1"/>
+          <p:nvPr/>
+        </p:nvSpPr>
+        <p:spPr>
+          <a:xfrm>
+            <a:off x="4709159" y="2450592"/>
+            <a:ext cx="1097280" cy="384048"/>
+          </a:xfrm>
+          <a:prstGeom prst="rect">
+            <a:avLst/>
+          </a:prstGeom>
+          <a:noFill/>
+        </p:spPr>
+        <p:txBody>
+          <a:bodyPr wrap="square" lIns="0" rIns="0" tIns="0" bIns="0">
+            <a:spAutoFit/>
+          </a:bodyPr>
+          <a:lstStyle/>
+          <a:p>
+            <a:pPr algn="ctr"/>
+            <a:r>
+              <a:rPr sz="1300" b="1" i="0">
+                <a:solidFill>
+                  <a:srgbClr val="DC2626"/>
+                </a:solidFill>
+                <a:latin typeface="Calibri"/>
+              </a:rPr>
+              <a:t>+0.6pp</a:t>
+            </a:r>
+          </a:p>
+        </p:txBody>
+      </p:sp>
+      <p:sp>
+        <p:nvSpPr>
+          <p:cNvPr id="27" name="Rectangle 26"/>
+          <p:cNvSpPr/>
+          <p:nvPr/>
+        </p:nvSpPr>
+        <p:spPr>
+          <a:xfrm>
+            <a:off x="274320" y="2871216"/>
+            <a:ext cx="5577840" cy="457200"/>
+          </a:xfrm>
+          <a:prstGeom prst="rect">
+            <a:avLst/>
+          </a:prstGeom>
+          <a:solidFill>
+            <a:srgbClr val="D4EDFF"/>
+          </a:solidFill>
+          <a:ln>
+            <a:noFill/>
+          </a:ln>
+        </p:spPr>
+        <p:style>
+          <a:lnRef idx="1">
+            <a:schemeClr val="accent1"/>
+          </a:lnRef>
+          <a:fillRef idx="3">
+            <a:schemeClr val="accent1"/>
+          </a:fillRef>
+          <a:effectRef idx="2">
+            <a:schemeClr val="accent1"/>
+          </a:effectRef>
+          <a:fontRef idx="minor">
+            <a:schemeClr val="lt1"/>
+          </a:fontRef>
+        </p:style>
+        <p:txBody>
+          <a:bodyPr rtlCol="0" anchor="ctr"/>
+          <a:lstStyle/>
+          <a:p>
+            <a:pPr algn="ctr"/>
+          </a:p>
+        </p:txBody>
+      </p:sp>
+      <p:sp>
+        <p:nvSpPr>
+          <p:cNvPr id="28" name="Rectangle 27"/>
+          <p:cNvSpPr/>
+          <p:nvPr/>
+        </p:nvSpPr>
+        <p:spPr>
+          <a:xfrm>
+            <a:off x="274320" y="2871216"/>
+            <a:ext cx="54864" cy="457200"/>
+          </a:xfrm>
+          <a:prstGeom prst="rect">
+            <a:avLst/>
+          </a:prstGeom>
+          <a:solidFill>
+            <a:srgbClr val="065A82"/>
+          </a:solidFill>
+          <a:ln>
+            <a:noFill/>
+          </a:ln>
+        </p:spPr>
+        <p:style>
+          <a:lnRef idx="1">
+            <a:schemeClr val="accent1"/>
+          </a:lnRef>
+          <a:fillRef idx="3">
+            <a:schemeClr val="accent1"/>
+          </a:fillRef>
+          <a:effectRef idx="2">
+            <a:schemeClr val="accent1"/>
+          </a:effectRef>
+          <a:fontRef idx="minor">
+            <a:schemeClr val="lt1"/>
+          </a:fontRef>
+        </p:style>
+        <p:txBody>
+          <a:bodyPr rtlCol="0" anchor="ctr"/>
+          <a:lstStyle/>
+          <a:p>
+            <a:pPr algn="ctr"/>
+          </a:p>
+        </p:txBody>
+      </p:sp>
+      <p:sp>
+        <p:nvSpPr>
+          <p:cNvPr id="29" name="TextBox 28"/>
+          <p:cNvSpPr txBox="1"/>
+          <p:nvPr/>
+        </p:nvSpPr>
+        <p:spPr>
+          <a:xfrm>
+            <a:off x="502920" y="2926080"/>
+            <a:ext cx="2103120" cy="384048"/>
+          </a:xfrm>
+          <a:prstGeom prst="rect">
+            <a:avLst/>
+          </a:prstGeom>
+          <a:noFill/>
+        </p:spPr>
+        <p:txBody>
+          <a:bodyPr wrap="square" lIns="0" rIns="0" tIns="0" bIns="0">
+            <a:spAutoFit/>
+          </a:bodyPr>
+          <a:lstStyle/>
+          <a:p>
+            <a:pPr algn="l"/>
+            <a:r>
+              <a:rPr sz="1000" b="1" i="0">
+                <a:solidFill>
+                  <a:srgbClr val="1E293B"/>
+                </a:solidFill>
+                <a:latin typeface="Calibri"/>
+              </a:rPr>
+              <a:t>Pages/Visit</a:t>
+            </a:r>
+          </a:p>
+        </p:txBody>
+      </p:sp>
+      <p:sp>
+        <p:nvSpPr>
+          <p:cNvPr id="30" name="TextBox 29"/>
+          <p:cNvSpPr txBox="1"/>
+          <p:nvPr/>
+        </p:nvSpPr>
+        <p:spPr>
+          <a:xfrm>
+            <a:off x="2606039" y="2926080"/>
+            <a:ext cx="1005840" cy="384048"/>
+          </a:xfrm>
+          <a:prstGeom prst="rect">
+            <a:avLst/>
+          </a:prstGeom>
+          <a:noFill/>
+        </p:spPr>
+        <p:txBody>
+          <a:bodyPr wrap="square" lIns="0" rIns="0" tIns="0" bIns="0">
+            <a:spAutoFit/>
+          </a:bodyPr>
+          <a:lstStyle/>
+          <a:p>
+            <a:pPr algn="ctr"/>
+            <a:r>
+              <a:rPr sz="1300" b="1" i="0">
+                <a:solidFill>
+                  <a:srgbClr val="065A82"/>
+                </a:solidFill>
+                <a:latin typeface="Calibri"/>
+              </a:rPr>
+              <a:t>1.79</a:t>
+            </a:r>
+          </a:p>
+        </p:txBody>
+      </p:sp>
+      <p:sp>
+        <p:nvSpPr>
+          <p:cNvPr id="31" name="TextBox 30"/>
+          <p:cNvSpPr txBox="1"/>
+          <p:nvPr/>
+        </p:nvSpPr>
+        <p:spPr>
+          <a:xfrm>
+            <a:off x="3657600" y="2926080"/>
+            <a:ext cx="1005840" cy="384048"/>
+          </a:xfrm>
+          <a:prstGeom prst="rect">
+            <a:avLst/>
+          </a:prstGeom>
+          <a:noFill/>
+        </p:spPr>
+        <p:txBody>
+          <a:bodyPr wrap="square" lIns="0" rIns="0" tIns="0" bIns="0">
+            <a:spAutoFit/>
+          </a:bodyPr>
+          <a:lstStyle/>
+          <a:p>
+            <a:pPr algn="ctr"/>
+            <a:r>
+              <a:rPr sz="1300" b="1" i="0">
+                <a:solidFill>
+                  <a:srgbClr val="065A82"/>
+                </a:solidFill>
+                <a:latin typeface="Calibri"/>
+              </a:rPr>
+              <a:t>1.85</a:t>
+            </a:r>
+          </a:p>
+        </p:txBody>
+      </p:sp>
+      <p:sp>
+        <p:nvSpPr>
+          <p:cNvPr id="32" name="TextBox 31"/>
+          <p:cNvSpPr txBox="1"/>
+          <p:nvPr/>
+        </p:nvSpPr>
+        <p:spPr>
+          <a:xfrm>
+            <a:off x="4709159" y="2926080"/>
+            <a:ext cx="1097280" cy="384048"/>
+          </a:xfrm>
+          <a:prstGeom prst="rect">
+            <a:avLst/>
+          </a:prstGeom>
+          <a:noFill/>
+        </p:spPr>
+        <p:txBody>
+          <a:bodyPr wrap="square" lIns="0" rIns="0" tIns="0" bIns="0">
+            <a:spAutoFit/>
+          </a:bodyPr>
+          <a:lstStyle/>
+          <a:p>
+            <a:pPr algn="ctr"/>
+            <a:r>
+              <a:rPr sz="1300" b="1" i="0">
+                <a:solidFill>
+                  <a:srgbClr val="059669"/>
+                </a:solidFill>
+                <a:latin typeface="Calibri"/>
+              </a:rPr>
+              <a:t>+0.06</a:t>
+            </a:r>
+          </a:p>
+        </p:txBody>
+      </p:sp>
+      <p:sp>
+        <p:nvSpPr>
+          <p:cNvPr id="33" name="Rectangle 32"/>
+          <p:cNvSpPr/>
+          <p:nvPr/>
+        </p:nvSpPr>
+        <p:spPr>
+          <a:xfrm>
+            <a:off x="5989320" y="1444752"/>
+            <a:ext cx="5989320" cy="457200"/>
+          </a:xfrm>
+          <a:prstGeom prst="rect">
+            <a:avLst/>
+          </a:prstGeom>
+          <a:solidFill>
+            <a:srgbClr val="EEF8F0"/>
+          </a:solidFill>
+          <a:ln>
+            <a:noFill/>
+          </a:ln>
+        </p:spPr>
+        <p:style>
+          <a:lnRef idx="1">
+            <a:schemeClr val="accent1"/>
+          </a:lnRef>
+          <a:fillRef idx="3">
+            <a:schemeClr val="accent1"/>
+          </a:fillRef>
+          <a:effectRef idx="2">
+            <a:schemeClr val="accent1"/>
+          </a:effectRef>
+          <a:fontRef idx="minor">
+            <a:schemeClr val="lt1"/>
+          </a:fontRef>
+        </p:style>
+        <p:txBody>
+          <a:bodyPr rtlCol="0" anchor="ctr"/>
+          <a:lstStyle/>
+          <a:p>
+            <a:pPr algn="ctr"/>
+          </a:p>
+        </p:txBody>
+      </p:sp>
+      <p:sp>
+        <p:nvSpPr>
+          <p:cNvPr id="34" name="Rectangle 33"/>
+          <p:cNvSpPr/>
+          <p:nvPr/>
+        </p:nvSpPr>
+        <p:spPr>
+          <a:xfrm>
+            <a:off x="5989320" y="1444752"/>
+            <a:ext cx="54864" cy="457200"/>
+          </a:xfrm>
+          <a:prstGeom prst="rect">
+            <a:avLst/>
+          </a:prstGeom>
+          <a:solidFill>
+            <a:srgbClr val="1C7293"/>
+          </a:solidFill>
+          <a:ln>
+            <a:noFill/>
+          </a:ln>
+        </p:spPr>
+        <p:style>
+          <a:lnRef idx="1">
+            <a:schemeClr val="accent1"/>
+          </a:lnRef>
+          <a:fillRef idx="3">
+            <a:schemeClr val="accent1"/>
+          </a:fillRef>
+          <a:effectRef idx="2">
+            <a:schemeClr val="accent1"/>
+          </a:effectRef>
+          <a:fontRef idx="minor">
+            <a:schemeClr val="lt1"/>
+          </a:fontRef>
+        </p:style>
+        <p:txBody>
+          <a:bodyPr rtlCol="0" anchor="ctr"/>
+          <a:lstStyle/>
+          <a:p>
+            <a:pPr algn="ctr"/>
+          </a:p>
+        </p:txBody>
+      </p:sp>
+      <p:sp>
+        <p:nvSpPr>
+          <p:cNvPr id="35" name="TextBox 34"/>
+          <p:cNvSpPr txBox="1"/>
+          <p:nvPr/>
+        </p:nvSpPr>
+        <p:spPr>
+          <a:xfrm>
+            <a:off x="6217920" y="1499616"/>
+            <a:ext cx="2103120" cy="384048"/>
+          </a:xfrm>
+          <a:prstGeom prst="rect">
+            <a:avLst/>
+          </a:prstGeom>
+          <a:noFill/>
+        </p:spPr>
+        <p:txBody>
+          <a:bodyPr wrap="square" lIns="0" rIns="0" tIns="0" bIns="0">
+            <a:spAutoFit/>
+          </a:bodyPr>
+          <a:lstStyle/>
+          <a:p>
+            <a:pPr algn="l"/>
+            <a:r>
+              <a:rPr sz="1000" b="1" i="0">
+                <a:solidFill>
+                  <a:srgbClr val="1E293B"/>
+                </a:solidFill>
+                <a:latin typeface="Calibri"/>
+              </a:rPr>
+              <a:t>PV Share</a:t>
+            </a:r>
+          </a:p>
+        </p:txBody>
+      </p:sp>
+      <p:sp>
+        <p:nvSpPr>
+          <p:cNvPr id="36" name="TextBox 35"/>
+          <p:cNvSpPr txBox="1"/>
+          <p:nvPr/>
+        </p:nvSpPr>
+        <p:spPr>
+          <a:xfrm>
+            <a:off x="8321040" y="1499616"/>
+            <a:ext cx="1005840" cy="384048"/>
+          </a:xfrm>
+          <a:prstGeom prst="rect">
+            <a:avLst/>
+          </a:prstGeom>
+          <a:noFill/>
+        </p:spPr>
+        <p:txBody>
+          <a:bodyPr wrap="square" lIns="0" rIns="0" tIns="0" bIns="0">
+            <a:spAutoFit/>
+          </a:bodyPr>
+          <a:lstStyle/>
+          <a:p>
+            <a:pPr algn="ctr"/>
+            <a:r>
+              <a:rPr sz="1300" b="1" i="0">
+                <a:solidFill>
+                  <a:srgbClr val="1C7293"/>
+                </a:solidFill>
+                <a:latin typeface="Calibri"/>
+              </a:rPr>
+              <a:t>90.1%</a:t>
+            </a:r>
+          </a:p>
+        </p:txBody>
+      </p:sp>
+      <p:sp>
+        <p:nvSpPr>
+          <p:cNvPr id="37" name="TextBox 36"/>
+          <p:cNvSpPr txBox="1"/>
+          <p:nvPr/>
+        </p:nvSpPr>
+        <p:spPr>
+          <a:xfrm>
+            <a:off x="9372600" y="1499616"/>
+            <a:ext cx="1005840" cy="384048"/>
+          </a:xfrm>
+          <a:prstGeom prst="rect">
+            <a:avLst/>
+          </a:prstGeom>
+          <a:noFill/>
+        </p:spPr>
+        <p:txBody>
+          <a:bodyPr wrap="square" lIns="0" rIns="0" tIns="0" bIns="0">
+            <a:spAutoFit/>
+          </a:bodyPr>
+          <a:lstStyle/>
+          <a:p>
+            <a:pPr algn="ctr"/>
+            <a:r>
+              <a:rPr sz="1300" b="1" i="0">
+                <a:solidFill>
+                  <a:srgbClr val="1C7293"/>
+                </a:solidFill>
+                <a:latin typeface="Calibri"/>
+              </a:rPr>
+              <a:t>84.2%</a:t>
+            </a:r>
+          </a:p>
+        </p:txBody>
+      </p:sp>
+      <p:sp>
+        <p:nvSpPr>
+          <p:cNvPr id="38" name="TextBox 37"/>
+          <p:cNvSpPr txBox="1"/>
+          <p:nvPr/>
+        </p:nvSpPr>
+        <p:spPr>
+          <a:xfrm>
+            <a:off x="10424159" y="1499616"/>
+            <a:ext cx="1097280" cy="384048"/>
+          </a:xfrm>
+          <a:prstGeom prst="rect">
+            <a:avLst/>
+          </a:prstGeom>
+          <a:noFill/>
+        </p:spPr>
+        <p:txBody>
+          <a:bodyPr wrap="square" lIns="0" rIns="0" tIns="0" bIns="0">
+            <a:spAutoFit/>
+          </a:bodyPr>
+          <a:lstStyle/>
+          <a:p>
+            <a:pPr algn="ctr"/>
+            <a:r>
+              <a:rPr sz="1300" b="1" i="0">
+                <a:solidFill>
+                  <a:srgbClr val="D97706"/>
+                </a:solidFill>
+                <a:latin typeface="Calibri"/>
+              </a:rPr>
+              <a:t>-5.9pp</a:t>
+            </a:r>
+          </a:p>
+        </p:txBody>
+      </p:sp>
+      <p:sp>
+        <p:nvSpPr>
+          <p:cNvPr id="39" name="Rectangle 38"/>
+          <p:cNvSpPr/>
+          <p:nvPr/>
+        </p:nvSpPr>
+        <p:spPr>
+          <a:xfrm>
+            <a:off x="5989320" y="1920240"/>
+            <a:ext cx="5989320" cy="457200"/>
+          </a:xfrm>
+          <a:prstGeom prst="rect">
+            <a:avLst/>
+          </a:prstGeom>
+          <a:solidFill>
+            <a:srgbClr val="DCF0E4"/>
+          </a:solidFill>
+          <a:ln>
+            <a:noFill/>
+          </a:ln>
+        </p:spPr>
+        <p:style>
+          <a:lnRef idx="1">
+            <a:schemeClr val="accent1"/>
+          </a:lnRef>
+          <a:fillRef idx="3">
+            <a:schemeClr val="accent1"/>
+          </a:fillRef>
+          <a:effectRef idx="2">
+            <a:schemeClr val="accent1"/>
+          </a:effectRef>
+          <a:fontRef idx="minor">
+            <a:schemeClr val="lt1"/>
+          </a:fontRef>
+        </p:style>
+        <p:txBody>
+          <a:bodyPr rtlCol="0" anchor="ctr"/>
+          <a:lstStyle/>
+          <a:p>
+            <a:pPr algn="ctr"/>
+          </a:p>
+        </p:txBody>
+      </p:sp>
+      <p:sp>
+        <p:nvSpPr>
+          <p:cNvPr id="40" name="Rectangle 39"/>
+          <p:cNvSpPr/>
+          <p:nvPr/>
+        </p:nvSpPr>
+        <p:spPr>
+          <a:xfrm>
+            <a:off x="5989320" y="1920240"/>
+            <a:ext cx="54864" cy="457200"/>
+          </a:xfrm>
+          <a:prstGeom prst="rect">
+            <a:avLst/>
+          </a:prstGeom>
+          <a:solidFill>
+            <a:srgbClr val="1C7293"/>
+          </a:solidFill>
+          <a:ln>
+            <a:noFill/>
+          </a:ln>
+        </p:spPr>
+        <p:style>
+          <a:lnRef idx="1">
+            <a:schemeClr val="accent1"/>
+          </a:lnRef>
+          <a:fillRef idx="3">
+            <a:schemeClr val="accent1"/>
+          </a:fillRef>
+          <a:effectRef idx="2">
+            <a:schemeClr val="accent1"/>
+          </a:effectRef>
+          <a:fontRef idx="minor">
+            <a:schemeClr val="lt1"/>
+          </a:fontRef>
+        </p:style>
+        <p:txBody>
+          <a:bodyPr rtlCol="0" anchor="ctr"/>
+          <a:lstStyle/>
+          <a:p>
+            <a:pPr algn="ctr"/>
+          </a:p>
+        </p:txBody>
+      </p:sp>
+      <p:sp>
+        <p:nvSpPr>
+          <p:cNvPr id="41" name="TextBox 40"/>
+          <p:cNvSpPr txBox="1"/>
+          <p:nvPr/>
+        </p:nvSpPr>
+        <p:spPr>
+          <a:xfrm>
+            <a:off x="6217920" y="1975104"/>
+            <a:ext cx="2103120" cy="384048"/>
+          </a:xfrm>
+          <a:prstGeom prst="rect">
+            <a:avLst/>
+          </a:prstGeom>
+          <a:noFill/>
+        </p:spPr>
+        <p:txBody>
+          <a:bodyPr wrap="square" lIns="0" rIns="0" tIns="0" bIns="0">
+            <a:spAutoFit/>
+          </a:bodyPr>
+          <a:lstStyle/>
+          <a:p>
+            <a:pPr algn="l"/>
+            <a:r>
+              <a:rPr sz="1000" b="1" i="0">
+                <a:solidFill>
+                  <a:srgbClr val="1E293B"/>
+                </a:solidFill>
+                <a:latin typeface="Calibri"/>
+              </a:rPr>
+              <a:t>Unique Visitors</a:t>
+            </a:r>
+          </a:p>
+        </p:txBody>
+      </p:sp>
+      <p:sp>
+        <p:nvSpPr>
+          <p:cNvPr id="42" name="TextBox 41"/>
+          <p:cNvSpPr txBox="1"/>
+          <p:nvPr/>
+        </p:nvSpPr>
+        <p:spPr>
+          <a:xfrm>
+            <a:off x="8321040" y="1975104"/>
+            <a:ext cx="1005840" cy="384048"/>
+          </a:xfrm>
+          <a:prstGeom prst="rect">
+            <a:avLst/>
+          </a:prstGeom>
+          <a:noFill/>
+        </p:spPr>
+        <p:txBody>
+          <a:bodyPr wrap="square" lIns="0" rIns="0" tIns="0" bIns="0">
+            <a:spAutoFit/>
+          </a:bodyPr>
+          <a:lstStyle/>
+          <a:p>
+            <a:pPr algn="ctr"/>
+            <a:r>
+              <a:rPr sz="1300" b="1" i="0">
+                <a:solidFill>
+                  <a:srgbClr val="1C7293"/>
+                </a:solidFill>
+                <a:latin typeface="Calibri"/>
+              </a:rPr>
+              <a:t>172,118</a:t>
+            </a:r>
+          </a:p>
+        </p:txBody>
+      </p:sp>
+      <p:sp>
+        <p:nvSpPr>
+          <p:cNvPr id="43" name="TextBox 42"/>
+          <p:cNvSpPr txBox="1"/>
+          <p:nvPr/>
+        </p:nvSpPr>
+        <p:spPr>
+          <a:xfrm>
+            <a:off x="9372600" y="1975104"/>
+            <a:ext cx="1005840" cy="384048"/>
+          </a:xfrm>
+          <a:prstGeom prst="rect">
+            <a:avLst/>
+          </a:prstGeom>
+          <a:noFill/>
+        </p:spPr>
+        <p:txBody>
+          <a:bodyPr wrap="square" lIns="0" rIns="0" tIns="0" bIns="0">
+            <a:spAutoFit/>
+          </a:bodyPr>
+          <a:lstStyle/>
+          <a:p>
+            <a:pPr algn="ctr"/>
+            <a:r>
+              <a:rPr sz="1300" b="1" i="0">
+                <a:solidFill>
+                  <a:srgbClr val="1C7293"/>
+                </a:solidFill>
+                <a:latin typeface="Calibri"/>
+              </a:rPr>
+              <a:t>164,380</a:t>
+            </a:r>
+          </a:p>
+        </p:txBody>
+      </p:sp>
+      <p:sp>
+        <p:nvSpPr>
+          <p:cNvPr id="44" name="TextBox 43"/>
+          <p:cNvSpPr txBox="1"/>
+          <p:nvPr/>
+        </p:nvSpPr>
+        <p:spPr>
+          <a:xfrm>
+            <a:off x="10424159" y="1975104"/>
+            <a:ext cx="1097280" cy="384048"/>
+          </a:xfrm>
+          <a:prstGeom prst="rect">
+            <a:avLst/>
+          </a:prstGeom>
+          <a:noFill/>
+        </p:spPr>
+        <p:txBody>
+          <a:bodyPr wrap="square" lIns="0" rIns="0" tIns="0" bIns="0">
+            <a:spAutoFit/>
+          </a:bodyPr>
+          <a:lstStyle/>
+          <a:p>
+            <a:pPr algn="ctr"/>
+            <a:r>
+              <a:rPr sz="1300" b="1" i="0">
+                <a:solidFill>
+                  <a:srgbClr val="DC2626"/>
+                </a:solidFill>
+                <a:latin typeface="Calibri"/>
+              </a:rPr>
+              <a:t>-4.5%</a:t>
+            </a:r>
+          </a:p>
+        </p:txBody>
+      </p:sp>
+      <p:sp>
+        <p:nvSpPr>
+          <p:cNvPr id="45" name="Rectangle 44"/>
+          <p:cNvSpPr/>
+          <p:nvPr/>
+        </p:nvSpPr>
+        <p:spPr>
+          <a:xfrm>
+            <a:off x="5989320" y="2395728"/>
+            <a:ext cx="5989320" cy="457200"/>
+          </a:xfrm>
+          <a:prstGeom prst="rect">
+            <a:avLst/>
+          </a:prstGeom>
+          <a:solidFill>
+            <a:srgbClr val="EEF8F0"/>
+          </a:solidFill>
+          <a:ln>
+            <a:noFill/>
+          </a:ln>
+        </p:spPr>
+        <p:style>
+          <a:lnRef idx="1">
+            <a:schemeClr val="accent1"/>
+          </a:lnRef>
+          <a:fillRef idx="3">
+            <a:schemeClr val="accent1"/>
+          </a:fillRef>
+          <a:effectRef idx="2">
+            <a:schemeClr val="accent1"/>
+          </a:effectRef>
+          <a:fontRef idx="minor">
+            <a:schemeClr val="lt1"/>
+          </a:fontRef>
+        </p:style>
+        <p:txBody>
+          <a:bodyPr rtlCol="0" anchor="ctr"/>
+          <a:lstStyle/>
+          <a:p>
+            <a:pPr algn="ctr"/>
+          </a:p>
+        </p:txBody>
+      </p:sp>
+      <p:sp>
+        <p:nvSpPr>
+          <p:cNvPr id="46" name="Rectangle 45"/>
+          <p:cNvSpPr/>
+          <p:nvPr/>
+        </p:nvSpPr>
+        <p:spPr>
+          <a:xfrm>
+            <a:off x="5989320" y="2395728"/>
+            <a:ext cx="54864" cy="457200"/>
+          </a:xfrm>
+          <a:prstGeom prst="rect">
+            <a:avLst/>
+          </a:prstGeom>
+          <a:solidFill>
+            <a:srgbClr val="1C7293"/>
+          </a:solidFill>
+          <a:ln>
+            <a:noFill/>
+          </a:ln>
+        </p:spPr>
+        <p:style>
+          <a:lnRef idx="1">
+            <a:schemeClr val="accent1"/>
+          </a:lnRef>
+          <a:fillRef idx="3">
+            <a:schemeClr val="accent1"/>
+          </a:fillRef>
+          <a:effectRef idx="2">
+            <a:schemeClr val="accent1"/>
+          </a:effectRef>
+          <a:fontRef idx="minor">
+            <a:schemeClr val="lt1"/>
+          </a:fontRef>
+        </p:style>
+        <p:txBody>
+          <a:bodyPr rtlCol="0" anchor="ctr"/>
+          <a:lstStyle/>
+          <a:p>
+            <a:pPr algn="ctr"/>
+          </a:p>
+        </p:txBody>
+      </p:sp>
+      <p:sp>
+        <p:nvSpPr>
+          <p:cNvPr id="47" name="TextBox 46"/>
+          <p:cNvSpPr txBox="1"/>
+          <p:nvPr/>
+        </p:nvSpPr>
+        <p:spPr>
+          <a:xfrm>
+            <a:off x="6217920" y="2450592"/>
+            <a:ext cx="2103120" cy="384048"/>
+          </a:xfrm>
+          <a:prstGeom prst="rect">
+            <a:avLst/>
+          </a:prstGeom>
+          <a:noFill/>
+        </p:spPr>
+        <p:txBody>
+          <a:bodyPr wrap="square" lIns="0" rIns="0" tIns="0" bIns="0">
+            <a:spAutoFit/>
+          </a:bodyPr>
+          <a:lstStyle/>
+          <a:p>
+            <a:pPr algn="l"/>
+            <a:r>
+              <a:rPr sz="1000" b="1" i="0">
+                <a:solidFill>
+                  <a:srgbClr val="1E293B"/>
+                </a:solidFill>
+                <a:latin typeface="Calibri"/>
+              </a:rPr>
+              <a:t>Bounce Rate</a:t>
+            </a:r>
+          </a:p>
+        </p:txBody>
+      </p:sp>
+      <p:sp>
+        <p:nvSpPr>
+          <p:cNvPr id="48" name="TextBox 47"/>
+          <p:cNvSpPr txBox="1"/>
+          <p:nvPr/>
+        </p:nvSpPr>
+        <p:spPr>
+          <a:xfrm>
+            <a:off x="8321040" y="2450592"/>
+            <a:ext cx="1005840" cy="384048"/>
+          </a:xfrm>
+          <a:prstGeom prst="rect">
+            <a:avLst/>
+          </a:prstGeom>
+          <a:noFill/>
+        </p:spPr>
+        <p:txBody>
+          <a:bodyPr wrap="square" lIns="0" rIns="0" tIns="0" bIns="0">
+            <a:spAutoFit/>
+          </a:bodyPr>
+          <a:lstStyle/>
+          <a:p>
+            <a:pPr algn="ctr"/>
+            <a:r>
+              <a:rPr sz="1300" b="1" i="0">
+                <a:solidFill>
+                  <a:srgbClr val="1C7293"/>
+                </a:solidFill>
+                <a:latin typeface="Calibri"/>
+              </a:rPr>
+              <a:t>60.8%</a:t>
+            </a:r>
+          </a:p>
+        </p:txBody>
+      </p:sp>
+      <p:sp>
+        <p:nvSpPr>
+          <p:cNvPr id="49" name="TextBox 48"/>
+          <p:cNvSpPr txBox="1"/>
+          <p:nvPr/>
+        </p:nvSpPr>
+        <p:spPr>
+          <a:xfrm>
+            <a:off x="9372600" y="2450592"/>
+            <a:ext cx="1005840" cy="384048"/>
+          </a:xfrm>
+          <a:prstGeom prst="rect">
+            <a:avLst/>
+          </a:prstGeom>
+          <a:noFill/>
+        </p:spPr>
+        <p:txBody>
+          <a:bodyPr wrap="square" lIns="0" rIns="0" tIns="0" bIns="0">
+            <a:spAutoFit/>
+          </a:bodyPr>
+          <a:lstStyle/>
+          <a:p>
+            <a:pPr algn="ctr"/>
+            <a:r>
+              <a:rPr sz="1300" b="1" i="0">
+                <a:solidFill>
+                  <a:srgbClr val="1C7293"/>
+                </a:solidFill>
+                <a:latin typeface="Calibri"/>
+              </a:rPr>
+              <a:t>64.6%</a:t>
+            </a:r>
+          </a:p>
+        </p:txBody>
+      </p:sp>
+      <p:sp>
+        <p:nvSpPr>
+          <p:cNvPr id="50" name="TextBox 49"/>
+          <p:cNvSpPr txBox="1"/>
+          <p:nvPr/>
+        </p:nvSpPr>
+        <p:spPr>
+          <a:xfrm>
+            <a:off x="10424159" y="2450592"/>
+            <a:ext cx="1097280" cy="384048"/>
+          </a:xfrm>
+          <a:prstGeom prst="rect">
+            <a:avLst/>
+          </a:prstGeom>
+          <a:noFill/>
+        </p:spPr>
+        <p:txBody>
+          <a:bodyPr wrap="square" lIns="0" rIns="0" tIns="0" bIns="0">
+            <a:spAutoFit/>
+          </a:bodyPr>
+          <a:lstStyle/>
+          <a:p>
+            <a:pPr algn="ctr"/>
+            <a:r>
+              <a:rPr sz="1300" b="1" i="0">
+                <a:solidFill>
+                  <a:srgbClr val="DC2626"/>
+                </a:solidFill>
+                <a:latin typeface="Calibri"/>
+              </a:rPr>
+              <a:t>+3.8pp</a:t>
+            </a:r>
+          </a:p>
+        </p:txBody>
+      </p:sp>
+      <p:sp>
+        <p:nvSpPr>
+          <p:cNvPr id="51" name="Rectangle 50"/>
+          <p:cNvSpPr/>
+          <p:nvPr/>
+        </p:nvSpPr>
+        <p:spPr>
+          <a:xfrm>
+            <a:off x="5989320" y="2871216"/>
+            <a:ext cx="5989320" cy="457200"/>
+          </a:xfrm>
+          <a:prstGeom prst="rect">
+            <a:avLst/>
+          </a:prstGeom>
+          <a:solidFill>
+            <a:srgbClr val="DCF0E4"/>
+          </a:solidFill>
+          <a:ln>
+            <a:noFill/>
+          </a:ln>
+        </p:spPr>
+        <p:style>
+          <a:lnRef idx="1">
+            <a:schemeClr val="accent1"/>
+          </a:lnRef>
+          <a:fillRef idx="3">
+            <a:schemeClr val="accent1"/>
+          </a:fillRef>
+          <a:effectRef idx="2">
+            <a:schemeClr val="accent1"/>
+          </a:effectRef>
+          <a:fontRef idx="minor">
+            <a:schemeClr val="lt1"/>
+          </a:fontRef>
+        </p:style>
+        <p:txBody>
+          <a:bodyPr rtlCol="0" anchor="ctr"/>
+          <a:lstStyle/>
+          <a:p>
+            <a:pPr algn="ctr"/>
+          </a:p>
+        </p:txBody>
+      </p:sp>
+      <p:sp>
+        <p:nvSpPr>
+          <p:cNvPr id="52" name="Rectangle 51"/>
+          <p:cNvSpPr/>
+          <p:nvPr/>
+        </p:nvSpPr>
+        <p:spPr>
+          <a:xfrm>
+            <a:off x="5989320" y="2871216"/>
+            <a:ext cx="54864" cy="457200"/>
+          </a:xfrm>
+          <a:prstGeom prst="rect">
+            <a:avLst/>
+          </a:prstGeom>
+          <a:solidFill>
+            <a:srgbClr val="1C7293"/>
+          </a:solidFill>
+          <a:ln>
+            <a:noFill/>
+          </a:ln>
+        </p:spPr>
+        <p:style>
+          <a:lnRef idx="1">
+            <a:schemeClr val="accent1"/>
+          </a:lnRef>
+          <a:fillRef idx="3">
+            <a:schemeClr val="accent1"/>
+          </a:fillRef>
+          <a:effectRef idx="2">
+            <a:schemeClr val="accent1"/>
+          </a:effectRef>
+          <a:fontRef idx="minor">
+            <a:schemeClr val="lt1"/>
+          </a:fontRef>
+        </p:style>
+        <p:txBody>
+          <a:bodyPr rtlCol="0" anchor="ctr"/>
+          <a:lstStyle/>
+          <a:p>
+            <a:pPr algn="ctr"/>
+          </a:p>
+        </p:txBody>
+      </p:sp>
+      <p:sp>
+        <p:nvSpPr>
+          <p:cNvPr id="53" name="TextBox 52"/>
+          <p:cNvSpPr txBox="1"/>
+          <p:nvPr/>
+        </p:nvSpPr>
+        <p:spPr>
+          <a:xfrm>
+            <a:off x="6217920" y="2926080"/>
+            <a:ext cx="2103120" cy="384048"/>
+          </a:xfrm>
+          <a:prstGeom prst="rect">
+            <a:avLst/>
+          </a:prstGeom>
+          <a:noFill/>
+        </p:spPr>
+        <p:txBody>
+          <a:bodyPr wrap="square" lIns="0" rIns="0" tIns="0" bIns="0">
+            <a:spAutoFit/>
+          </a:bodyPr>
+          <a:lstStyle/>
+          <a:p>
+            <a:pPr algn="l"/>
+            <a:r>
+              <a:rPr sz="1000" b="1" i="0">
+                <a:solidFill>
+                  <a:srgbClr val="1E293B"/>
+                </a:solidFill>
+                <a:latin typeface="Calibri"/>
+              </a:rPr>
+              <a:t>Pages/Visit</a:t>
+            </a:r>
+          </a:p>
+        </p:txBody>
+      </p:sp>
+      <p:sp>
+        <p:nvSpPr>
+          <p:cNvPr id="54" name="TextBox 53"/>
+          <p:cNvSpPr txBox="1"/>
+          <p:nvPr/>
+        </p:nvSpPr>
+        <p:spPr>
+          <a:xfrm>
+            <a:off x="8321040" y="2926080"/>
+            <a:ext cx="1005840" cy="384048"/>
+          </a:xfrm>
+          <a:prstGeom prst="rect">
+            <a:avLst/>
+          </a:prstGeom>
+          <a:noFill/>
+        </p:spPr>
+        <p:txBody>
+          <a:bodyPr wrap="square" lIns="0" rIns="0" tIns="0" bIns="0">
+            <a:spAutoFit/>
+          </a:bodyPr>
+          <a:lstStyle/>
+          <a:p>
+            <a:pPr algn="ctr"/>
+            <a:r>
+              <a:rPr sz="1300" b="1" i="0">
+                <a:solidFill>
+                  <a:srgbClr val="1C7293"/>
+                </a:solidFill>
+                <a:latin typeface="Calibri"/>
+              </a:rPr>
+              <a:t>2.21</a:t>
+            </a:r>
+          </a:p>
+        </p:txBody>
+      </p:sp>
+      <p:sp>
+        <p:nvSpPr>
+          <p:cNvPr id="55" name="TextBox 54"/>
+          <p:cNvSpPr txBox="1"/>
+          <p:nvPr/>
+        </p:nvSpPr>
+        <p:spPr>
+          <a:xfrm>
+            <a:off x="9372600" y="2926080"/>
+            <a:ext cx="1005840" cy="384048"/>
+          </a:xfrm>
+          <a:prstGeom prst="rect">
+            <a:avLst/>
+          </a:prstGeom>
+          <a:noFill/>
+        </p:spPr>
+        <p:txBody>
+          <a:bodyPr wrap="square" lIns="0" rIns="0" tIns="0" bIns="0">
+            <a:spAutoFit/>
+          </a:bodyPr>
+          <a:lstStyle/>
+          <a:p>
+            <a:pPr algn="ctr"/>
+            <a:r>
+              <a:rPr sz="1300" b="1" i="0">
+                <a:solidFill>
+                  <a:srgbClr val="1C7293"/>
+                </a:solidFill>
+                <a:latin typeface="Calibri"/>
+              </a:rPr>
+              <a:t>2.02</a:t>
+            </a:r>
+          </a:p>
+        </p:txBody>
+      </p:sp>
+      <p:sp>
+        <p:nvSpPr>
+          <p:cNvPr id="56" name="TextBox 55"/>
+          <p:cNvSpPr txBox="1"/>
+          <p:nvPr/>
+        </p:nvSpPr>
+        <p:spPr>
+          <a:xfrm>
+            <a:off x="10424159" y="2926080"/>
+            <a:ext cx="1097280" cy="384048"/>
+          </a:xfrm>
+          <a:prstGeom prst="rect">
+            <a:avLst/>
+          </a:prstGeom>
+          <a:noFill/>
+        </p:spPr>
+        <p:txBody>
+          <a:bodyPr wrap="square" lIns="0" rIns="0" tIns="0" bIns="0">
+            <a:spAutoFit/>
+          </a:bodyPr>
+          <a:lstStyle/>
+          <a:p>
+            <a:pPr algn="ctr"/>
+            <a:r>
+              <a:rPr sz="1300" b="1" i="0">
+                <a:solidFill>
+                  <a:srgbClr val="DC2626"/>
+                </a:solidFill>
+                <a:latin typeface="Calibri"/>
+              </a:rPr>
+              <a:t>-0.19</a:t>
+            </a:r>
+          </a:p>
+        </p:txBody>
+      </p:sp>
+      <p:sp>
+        <p:nvSpPr>
+          <p:cNvPr id="57" name="TextBox 56"/>
+          <p:cNvSpPr txBox="1"/>
+          <p:nvPr/>
+        </p:nvSpPr>
+        <p:spPr>
+          <a:xfrm>
+            <a:off x="502920" y="1325880"/>
+            <a:ext cx="2103120" cy="274320"/>
+          </a:xfrm>
+          <a:prstGeom prst="rect">
+            <a:avLst/>
+          </a:prstGeom>
+          <a:noFill/>
+        </p:spPr>
+        <p:txBody>
+          <a:bodyPr wrap="square" lIns="0" rIns="0" tIns="0" bIns="0">
+            <a:spAutoFit/>
+          </a:bodyPr>
+          <a:lstStyle/>
+          <a:p>
+            <a:pPr algn="l"/>
+            <a:r>
+              <a:rPr sz="900" b="1" i="0">
+                <a:solidFill>
+                  <a:srgbClr val="64748B"/>
+                </a:solidFill>
+                <a:latin typeface="Calibri"/>
+              </a:rPr>
+              <a:t>Metric</a:t>
+            </a:r>
+          </a:p>
+        </p:txBody>
+      </p:sp>
+      <p:sp>
+        <p:nvSpPr>
+          <p:cNvPr id="58" name="TextBox 57"/>
+          <p:cNvSpPr txBox="1"/>
+          <p:nvPr/>
+        </p:nvSpPr>
+        <p:spPr>
+          <a:xfrm>
+            <a:off x="2606039" y="1325880"/>
+            <a:ext cx="1005840" cy="274320"/>
+          </a:xfrm>
+          <a:prstGeom prst="rect">
+            <a:avLst/>
+          </a:prstGeom>
+          <a:noFill/>
+        </p:spPr>
+        <p:txBody>
+          <a:bodyPr wrap="square" lIns="0" rIns="0" tIns="0" bIns="0">
+            <a:spAutoFit/>
+          </a:bodyPr>
+          <a:lstStyle/>
+          <a:p>
+            <a:pPr algn="ctr"/>
+            <a:r>
+              <a:rPr sz="900" b="1" i="0">
+                <a:solidFill>
+                  <a:srgbClr val="64748B"/>
+                </a:solidFill>
+                <a:latin typeface="Calibri"/>
+              </a:rPr>
+              <a:t>Jan</a:t>
+            </a:r>
+          </a:p>
+        </p:txBody>
+      </p:sp>
+      <p:sp>
+        <p:nvSpPr>
+          <p:cNvPr id="59" name="TextBox 58"/>
+          <p:cNvSpPr txBox="1"/>
+          <p:nvPr/>
+        </p:nvSpPr>
+        <p:spPr>
+          <a:xfrm>
+            <a:off x="3657600" y="1325880"/>
+            <a:ext cx="1005840" cy="274320"/>
+          </a:xfrm>
+          <a:prstGeom prst="rect">
+            <a:avLst/>
+          </a:prstGeom>
+          <a:noFill/>
+        </p:spPr>
+        <p:txBody>
+          <a:bodyPr wrap="square" lIns="0" rIns="0" tIns="0" bIns="0">
+            <a:spAutoFit/>
+          </a:bodyPr>
+          <a:lstStyle/>
+          <a:p>
+            <a:pPr algn="ctr"/>
+            <a:r>
+              <a:rPr sz="900" b="1" i="0">
+                <a:solidFill>
+                  <a:srgbClr val="64748B"/>
+                </a:solidFill>
+                <a:latin typeface="Calibri"/>
+              </a:rPr>
+              <a:t>Feb</a:t>
+            </a:r>
+          </a:p>
+        </p:txBody>
+      </p:sp>
+      <p:sp>
+        <p:nvSpPr>
+          <p:cNvPr id="60" name="TextBox 59"/>
+          <p:cNvSpPr txBox="1"/>
+          <p:nvPr/>
+        </p:nvSpPr>
+        <p:spPr>
+          <a:xfrm>
+            <a:off x="4709159" y="1325880"/>
+            <a:ext cx="1097280" cy="274320"/>
+          </a:xfrm>
+          <a:prstGeom prst="rect">
+            <a:avLst/>
+          </a:prstGeom>
+          <a:noFill/>
+        </p:spPr>
+        <p:txBody>
+          <a:bodyPr wrap="square" lIns="0" rIns="0" tIns="0" bIns="0">
+            <a:spAutoFit/>
+          </a:bodyPr>
+          <a:lstStyle/>
+          <a:p>
+            <a:pPr algn="ctr"/>
+            <a:r>
+              <a:rPr sz="900" b="1" i="0">
+                <a:solidFill>
+                  <a:srgbClr val="64748B"/>
+                </a:solidFill>
+                <a:latin typeface="Calibri"/>
+              </a:rPr>
+              <a:t>MoM</a:t>
+            </a:r>
+          </a:p>
+        </p:txBody>
+      </p:sp>
+      <p:sp>
+        <p:nvSpPr>
+          <p:cNvPr id="61" name="TextBox 60"/>
+          <p:cNvSpPr txBox="1"/>
+          <p:nvPr/>
+        </p:nvSpPr>
+        <p:spPr>
+          <a:xfrm>
+            <a:off x="6217920" y="1325880"/>
+            <a:ext cx="2103120" cy="274320"/>
+          </a:xfrm>
+          <a:prstGeom prst="rect">
+            <a:avLst/>
+          </a:prstGeom>
+          <a:noFill/>
+        </p:spPr>
+        <p:txBody>
+          <a:bodyPr wrap="square" lIns="0" rIns="0" tIns="0" bIns="0">
+            <a:spAutoFit/>
+          </a:bodyPr>
+          <a:lstStyle/>
+          <a:p>
+            <a:pPr algn="l"/>
+            <a:r>
+              <a:rPr sz="900" b="1" i="0">
+                <a:solidFill>
+                  <a:srgbClr val="64748B"/>
+                </a:solidFill>
+                <a:latin typeface="Calibri"/>
+              </a:rPr>
+              <a:t>Metric</a:t>
+            </a:r>
+          </a:p>
+        </p:txBody>
+      </p:sp>
+      <p:sp>
+        <p:nvSpPr>
+          <p:cNvPr id="62" name="TextBox 61"/>
+          <p:cNvSpPr txBox="1"/>
+          <p:nvPr/>
+        </p:nvSpPr>
+        <p:spPr>
+          <a:xfrm>
+            <a:off x="8321040" y="1325880"/>
+            <a:ext cx="1005840" cy="274320"/>
+          </a:xfrm>
+          <a:prstGeom prst="rect">
+            <a:avLst/>
+          </a:prstGeom>
+          <a:noFill/>
+        </p:spPr>
+        <p:txBody>
+          <a:bodyPr wrap="square" lIns="0" rIns="0" tIns="0" bIns="0">
+            <a:spAutoFit/>
+          </a:bodyPr>
+          <a:lstStyle/>
+          <a:p>
+            <a:pPr algn="ctr"/>
+            <a:r>
+              <a:rPr sz="900" b="1" i="0">
+                <a:solidFill>
+                  <a:srgbClr val="64748B"/>
+                </a:solidFill>
+                <a:latin typeface="Calibri"/>
+              </a:rPr>
+              <a:t>Jan</a:t>
+            </a:r>
+          </a:p>
+        </p:txBody>
+      </p:sp>
+      <p:sp>
+        <p:nvSpPr>
+          <p:cNvPr id="63" name="TextBox 62"/>
+          <p:cNvSpPr txBox="1"/>
+          <p:nvPr/>
+        </p:nvSpPr>
+        <p:spPr>
+          <a:xfrm>
+            <a:off x="9372600" y="1325880"/>
+            <a:ext cx="1005840" cy="274320"/>
+          </a:xfrm>
+          <a:prstGeom prst="rect">
+            <a:avLst/>
+          </a:prstGeom>
+          <a:noFill/>
+        </p:spPr>
+        <p:txBody>
+          <a:bodyPr wrap="square" lIns="0" rIns="0" tIns="0" bIns="0">
+            <a:spAutoFit/>
+          </a:bodyPr>
+          <a:lstStyle/>
+          <a:p>
+            <a:pPr algn="ctr"/>
+            <a:r>
+              <a:rPr sz="900" b="1" i="0">
+                <a:solidFill>
+                  <a:srgbClr val="64748B"/>
+                </a:solidFill>
+                <a:latin typeface="Calibri"/>
+              </a:rPr>
+              <a:t>Feb</a:t>
+            </a:r>
+          </a:p>
+        </p:txBody>
+      </p:sp>
+      <p:sp>
+        <p:nvSpPr>
+          <p:cNvPr id="64" name="TextBox 63"/>
+          <p:cNvSpPr txBox="1"/>
+          <p:nvPr/>
+        </p:nvSpPr>
+        <p:spPr>
+          <a:xfrm>
+            <a:off x="10424159" y="1325880"/>
+            <a:ext cx="1097280" cy="274320"/>
+          </a:xfrm>
+          <a:prstGeom prst="rect">
+            <a:avLst/>
+          </a:prstGeom>
+          <a:noFill/>
+        </p:spPr>
+        <p:txBody>
+          <a:bodyPr wrap="square" lIns="0" rIns="0" tIns="0" bIns="0">
+            <a:spAutoFit/>
+          </a:bodyPr>
+          <a:lstStyle/>
+          <a:p>
+            <a:pPr algn="ctr"/>
+            <a:r>
+              <a:rPr sz="900" b="1" i="0">
+                <a:solidFill>
+                  <a:srgbClr val="64748B"/>
+                </a:solidFill>
+                <a:latin typeface="Calibri"/>
+              </a:rPr>
+              <a:t>MoM</a:t>
+            </a:r>
+          </a:p>
+        </p:txBody>
+      </p:sp>
+      <p:sp>
+        <p:nvSpPr>
+          <p:cNvPr id="65" name="TextBox 64"/>
+          <p:cNvSpPr txBox="1"/>
+          <p:nvPr/>
+        </p:nvSpPr>
+        <p:spPr>
+          <a:xfrm>
+            <a:off x="274320" y="3364992"/>
+            <a:ext cx="11704320" cy="320040"/>
+          </a:xfrm>
+          <a:prstGeom prst="rect">
+            <a:avLst/>
+          </a:prstGeom>
+          <a:noFill/>
+        </p:spPr>
+        <p:txBody>
+          <a:bodyPr wrap="square" lIns="0" rIns="0" tIns="0" bIns="0">
+            <a:spAutoFit/>
+          </a:bodyPr>
+          <a:lstStyle/>
+          <a:p>
+            <a:pPr algn="l"/>
+            <a:r>
+              <a:rPr sz="1000" b="0" i="1">
+                <a:solidFill>
+                  <a:srgbClr val="64748B"/>
+                </a:solidFill>
+                <a:latin typeface="Calibri"/>
+              </a:rPr>
+              <a:t>★ Avg daily PVs: Paid Jan 1,353 → Feb 2,230 (+64.8%) |  Non-Paid Jan 12,293 → Feb 11,884 (-3.3%)  |  solidigm.com only</a:t>
+            </a:r>
+          </a:p>
+        </p:txBody>
+      </p:sp>
+      <p:sp>
+        <p:nvSpPr>
+          <p:cNvPr id="66" name="Rectangle 65"/>
+          <p:cNvSpPr/>
+          <p:nvPr/>
+        </p:nvSpPr>
+        <p:spPr>
+          <a:xfrm>
+            <a:off x="274320" y="3749039"/>
+            <a:ext cx="11704320" cy="36576"/>
+          </a:xfrm>
+          <a:prstGeom prst="rect">
+            <a:avLst/>
+          </a:prstGeom>
+          <a:solidFill>
+            <a:srgbClr val="E2E8F0"/>
+          </a:solidFill>
+          <a:ln>
+            <a:noFill/>
+          </a:ln>
+        </p:spPr>
+        <p:style>
+          <a:lnRef idx="1">
+            <a:schemeClr val="accent1"/>
+          </a:lnRef>
+          <a:fillRef idx="3">
+            <a:schemeClr val="accent1"/>
+          </a:fillRef>
+          <a:effectRef idx="2">
+            <a:schemeClr val="accent1"/>
+          </a:effectRef>
+          <a:fontRef idx="minor">
+            <a:schemeClr val="lt1"/>
+          </a:fontRef>
+        </p:style>
+        <p:txBody>
+          <a:bodyPr rtlCol="0" anchor="ctr"/>
+          <a:lstStyle/>
+          <a:p>
+            <a:pPr algn="ctr"/>
+          </a:p>
+        </p:txBody>
+      </p:sp>
+      <p:sp>
+        <p:nvSpPr>
+          <p:cNvPr id="67" name="TextBox 66"/>
+          <p:cNvSpPr txBox="1"/>
+          <p:nvPr/>
+        </p:nvSpPr>
+        <p:spPr>
+          <a:xfrm>
+            <a:off x="274320" y="3803904"/>
+            <a:ext cx="3657600" cy="292608"/>
+          </a:xfrm>
+          <a:prstGeom prst="rect">
+            <a:avLst/>
+          </a:prstGeom>
+          <a:noFill/>
+        </p:spPr>
+        <p:txBody>
+          <a:bodyPr wrap="square" lIns="0" rIns="0" tIns="0" bIns="0">
+            <a:spAutoFit/>
+          </a:bodyPr>
+          <a:lstStyle/>
+          <a:p>
+            <a:pPr algn="l"/>
+            <a:r>
+              <a:rPr sz="900" b="1" i="0">
+                <a:solidFill>
+                  <a:srgbClr val="64748B"/>
+                </a:solidFill>
+                <a:latin typeface="Calibri"/>
+              </a:rPr>
+              <a:t>OVERALL SITE SUMMARY</a:t>
+            </a:r>
+          </a:p>
+        </p:txBody>
+      </p:sp>
+      <p:sp>
+        <p:nvSpPr>
+          <p:cNvPr id="68" name="Rectangle 67"/>
+          <p:cNvSpPr/>
+          <p:nvPr/>
+        </p:nvSpPr>
+        <p:spPr>
+          <a:xfrm>
+            <a:off x="274320" y="4114800"/>
+            <a:ext cx="11704320" cy="292608"/>
+          </a:xfrm>
+          <a:prstGeom prst="rect">
+            <a:avLst/>
+          </a:prstGeom>
+          <a:solidFill>
+            <a:srgbClr val="065A82"/>
+          </a:solidFill>
+          <a:ln>
+            <a:noFill/>
+          </a:ln>
+        </p:spPr>
+        <p:style>
+          <a:lnRef idx="1">
+            <a:schemeClr val="accent1"/>
+          </a:lnRef>
+          <a:fillRef idx="3">
+            <a:schemeClr val="accent1"/>
+          </a:fillRef>
+          <a:effectRef idx="2">
+            <a:schemeClr val="accent1"/>
+          </a:effectRef>
+          <a:fontRef idx="minor">
+            <a:schemeClr val="lt1"/>
+          </a:fontRef>
+        </p:style>
+        <p:txBody>
+          <a:bodyPr rtlCol="0" anchor="ctr"/>
+          <a:lstStyle/>
+          <a:p>
+            <a:pPr algn="ctr"/>
+          </a:p>
+        </p:txBody>
+      </p:sp>
+      <p:sp>
+        <p:nvSpPr>
+          <p:cNvPr id="69" name="TextBox 68"/>
+          <p:cNvSpPr txBox="1"/>
+          <p:nvPr/>
+        </p:nvSpPr>
+        <p:spPr>
+          <a:xfrm>
+            <a:off x="274320" y="4133087"/>
+            <a:ext cx="2286000" cy="256032"/>
+          </a:xfrm>
+          <a:prstGeom prst="rect">
+            <a:avLst/>
+          </a:prstGeom>
+          <a:noFill/>
+        </p:spPr>
+        <p:txBody>
+          <a:bodyPr wrap="square" lIns="0" rIns="0" tIns="0" bIns="0">
+            <a:spAutoFit/>
+          </a:bodyPr>
+          <a:lstStyle/>
+          <a:p>
+            <a:pPr algn="l"/>
+            <a:r>
+              <a:rPr sz="900" b="1" i="0">
+                <a:solidFill>
+                  <a:srgbClr val="FFFFFF"/>
+                </a:solidFill>
+                <a:latin typeface="Calibri"/>
+              </a:rPr>
+              <a:t>Metric</a:t>
+            </a:r>
+          </a:p>
+        </p:txBody>
+      </p:sp>
+      <p:sp>
+        <p:nvSpPr>
+          <p:cNvPr id="70" name="TextBox 69"/>
+          <p:cNvSpPr txBox="1"/>
+          <p:nvPr/>
+        </p:nvSpPr>
+        <p:spPr>
+          <a:xfrm>
+            <a:off x="4572000" y="4133087"/>
+            <a:ext cx="2286000" cy="256032"/>
+          </a:xfrm>
+          <a:prstGeom prst="rect">
+            <a:avLst/>
+          </a:prstGeom>
+          <a:noFill/>
+        </p:spPr>
+        <p:txBody>
+          <a:bodyPr wrap="square" lIns="0" rIns="0" tIns="0" bIns="0">
+            <a:spAutoFit/>
+          </a:bodyPr>
+          <a:lstStyle/>
+          <a:p>
+            <a:pPr algn="l"/>
+            <a:r>
+              <a:rPr sz="900" b="1" i="0">
+                <a:solidFill>
+                  <a:srgbClr val="FFFFFF"/>
+                </a:solidFill>
+                <a:latin typeface="Calibri"/>
+              </a:rPr>
+              <a:t>January</a:t>
+            </a:r>
+          </a:p>
+        </p:txBody>
+      </p:sp>
+      <p:sp>
+        <p:nvSpPr>
+          <p:cNvPr id="71" name="TextBox 70"/>
+          <p:cNvSpPr txBox="1"/>
+          <p:nvPr/>
+        </p:nvSpPr>
+        <p:spPr>
+          <a:xfrm>
+            <a:off x="6858000" y="4133087"/>
+            <a:ext cx="2286000" cy="256032"/>
+          </a:xfrm>
+          <a:prstGeom prst="rect">
+            <a:avLst/>
+          </a:prstGeom>
+          <a:noFill/>
+        </p:spPr>
+        <p:txBody>
+          <a:bodyPr wrap="square" lIns="0" rIns="0" tIns="0" bIns="0">
+            <a:spAutoFit/>
+          </a:bodyPr>
+          <a:lstStyle/>
+          <a:p>
+            <a:pPr algn="l"/>
+            <a:r>
+              <a:rPr sz="900" b="1" i="0">
+                <a:solidFill>
+                  <a:srgbClr val="FFFFFF"/>
+                </a:solidFill>
+                <a:latin typeface="Calibri"/>
+              </a:rPr>
+              <a:t>February</a:t>
+            </a:r>
+          </a:p>
+        </p:txBody>
+      </p:sp>
+      <p:sp>
+        <p:nvSpPr>
+          <p:cNvPr id="72" name="TextBox 71"/>
+          <p:cNvSpPr txBox="1"/>
+          <p:nvPr/>
+        </p:nvSpPr>
+        <p:spPr>
+          <a:xfrm>
+            <a:off x="9326880" y="4133087"/>
+            <a:ext cx="2286000" cy="256032"/>
+          </a:xfrm>
+          <a:prstGeom prst="rect">
+            <a:avLst/>
+          </a:prstGeom>
+          <a:noFill/>
+        </p:spPr>
+        <p:txBody>
+          <a:bodyPr wrap="square" lIns="0" rIns="0" tIns="0" bIns="0">
+            <a:spAutoFit/>
+          </a:bodyPr>
+          <a:lstStyle/>
+          <a:p>
+            <a:pPr algn="l"/>
+            <a:r>
+              <a:rPr sz="900" b="1" i="0">
+                <a:solidFill>
+                  <a:srgbClr val="FFFFFF"/>
+                </a:solidFill>
+                <a:latin typeface="Calibri"/>
+              </a:rPr>
+              <a:t>MoM Δ</a:t>
+            </a:r>
+          </a:p>
+        </p:txBody>
+      </p:sp>
+      <p:sp>
+        <p:nvSpPr>
+          <p:cNvPr id="73" name="Rectangle 72"/>
+          <p:cNvSpPr/>
+          <p:nvPr/>
+        </p:nvSpPr>
+        <p:spPr>
+          <a:xfrm>
+            <a:off x="274320" y="4425696"/>
+            <a:ext cx="11704320" cy="338328"/>
           </a:xfrm>
           <a:prstGeom prst="rect">
             <a:avLst/>
@@ -6416,14 +8773,14 @@
       </p:sp>
       <p:sp>
         <p:nvSpPr>
-          <p:cNvPr id="11" name="Rectangle 10"/>
+          <p:cNvPr id="74" name="Rectangle 73"/>
           <p:cNvSpPr/>
           <p:nvPr/>
         </p:nvSpPr>
         <p:spPr>
           <a:xfrm>
-            <a:off x="274320" y="1252728"/>
-            <a:ext cx="54864" cy="548640"/>
+            <a:off x="274320" y="4425696"/>
+            <a:ext cx="54864" cy="338328"/>
           </a:xfrm>
           <a:prstGeom prst="rect">
             <a:avLst/>
@@ -6459,14 +8816,14 @@
       </p:sp>
       <p:sp>
         <p:nvSpPr>
-          <p:cNvPr id="12" name="TextBox 11"/>
-          <p:cNvSpPr txBox="1"/>
-          <p:nvPr/>
-        </p:nvSpPr>
-        <p:spPr>
-          <a:xfrm>
-            <a:off x="502920" y="1280160"/>
-            <a:ext cx="3017520" cy="502920"/>
+          <p:cNvPr id="75" name="TextBox 74"/>
+          <p:cNvSpPr txBox="1"/>
+          <p:nvPr/>
+        </p:nvSpPr>
+        <p:spPr>
+          <a:xfrm>
+            <a:off x="502920" y="4453128"/>
+            <a:ext cx="3931920" cy="292608"/>
           </a:xfrm>
           <a:prstGeom prst="rect">
             <a:avLst/>
@@ -6481,42 +8838,42 @@
           <a:p>
             <a:pPr algn="l"/>
             <a:r>
-              <a:rPr sz="1200" b="1" i="0">
+              <a:rPr sz="1000" b="1" i="0">
                 <a:solidFill>
                   <a:srgbClr val="1E293B"/>
                 </a:solidFill>
                 <a:latin typeface="Calibri"/>
               </a:rPr>
-              <a:t>Page Views</a:t>
-            </a:r>
-          </a:p>
-        </p:txBody>
-      </p:sp>
-      <p:sp>
-        <p:nvSpPr>
-          <p:cNvPr id="13" name="TextBox 12"/>
-          <p:cNvSpPr txBox="1"/>
-          <p:nvPr/>
-        </p:nvSpPr>
-        <p:spPr>
-          <a:xfrm>
-            <a:off x="3657600" y="1280160"/>
-            <a:ext cx="2286000" cy="502920"/>
-          </a:xfrm>
-          <a:prstGeom prst="rect">
-            <a:avLst/>
-          </a:prstGeom>
-          <a:noFill/>
-        </p:spPr>
-        <p:txBody>
-          <a:bodyPr wrap="square" lIns="0" rIns="0" tIns="0" bIns="0">
-            <a:spAutoFit/>
-          </a:bodyPr>
-          <a:lstStyle/>
-          <a:p>
-            <a:pPr algn="ctr"/>
-            <a:r>
-              <a:rPr sz="2000" b="1" i="0">
+              <a:t>Total Page Views</a:t>
+            </a:r>
+          </a:p>
+        </p:txBody>
+      </p:sp>
+      <p:sp>
+        <p:nvSpPr>
+          <p:cNvPr id="76" name="TextBox 75"/>
+          <p:cNvSpPr txBox="1"/>
+          <p:nvPr/>
+        </p:nvSpPr>
+        <p:spPr>
+          <a:xfrm>
+            <a:off x="4572000" y="4453128"/>
+            <a:ext cx="2103120" cy="292608"/>
+          </a:xfrm>
+          <a:prstGeom prst="rect">
+            <a:avLst/>
+          </a:prstGeom>
+          <a:noFill/>
+        </p:spPr>
+        <p:txBody>
+          <a:bodyPr wrap="square" lIns="0" rIns="0" tIns="0" bIns="0">
+            <a:spAutoFit/>
+          </a:bodyPr>
+          <a:lstStyle/>
+          <a:p>
+            <a:pPr algn="ctr"/>
+            <a:r>
+              <a:rPr sz="1400" b="1" i="0">
                 <a:solidFill>
                   <a:srgbClr val="065A82"/>
                 </a:solidFill>
@@ -6529,29 +8886,29 @@
       </p:sp>
       <p:sp>
         <p:nvSpPr>
-          <p:cNvPr id="14" name="TextBox 13"/>
-          <p:cNvSpPr txBox="1"/>
-          <p:nvPr/>
-        </p:nvSpPr>
-        <p:spPr>
-          <a:xfrm>
-            <a:off x="6126480" y="1280160"/>
-            <a:ext cx="2286000" cy="502920"/>
-          </a:xfrm>
-          <a:prstGeom prst="rect">
-            <a:avLst/>
-          </a:prstGeom>
-          <a:noFill/>
-        </p:spPr>
-        <p:txBody>
-          <a:bodyPr wrap="square" lIns="0" rIns="0" tIns="0" bIns="0">
-            <a:spAutoFit/>
-          </a:bodyPr>
-          <a:lstStyle/>
-          <a:p>
-            <a:pPr algn="ctr"/>
-            <a:r>
-              <a:rPr sz="2000" b="1" i="0">
+          <p:cNvPr id="77" name="TextBox 76"/>
+          <p:cNvSpPr txBox="1"/>
+          <p:nvPr/>
+        </p:nvSpPr>
+        <p:spPr>
+          <a:xfrm>
+            <a:off x="6858000" y="4453128"/>
+            <a:ext cx="2103120" cy="292608"/>
+          </a:xfrm>
+          <a:prstGeom prst="rect">
+            <a:avLst/>
+          </a:prstGeom>
+          <a:noFill/>
+        </p:spPr>
+        <p:txBody>
+          <a:bodyPr wrap="square" lIns="0" rIns="0" tIns="0" bIns="0">
+            <a:spAutoFit/>
+          </a:bodyPr>
+          <a:lstStyle/>
+          <a:p>
+            <a:pPr algn="ctr"/>
+            <a:r>
+              <a:rPr sz="1400" b="1" i="0">
                 <a:solidFill>
                   <a:srgbClr val="1C7293"/>
                 </a:solidFill>
@@ -6564,29 +8921,29 @@
       </p:sp>
       <p:sp>
         <p:nvSpPr>
-          <p:cNvPr id="15" name="TextBox 14"/>
-          <p:cNvSpPr txBox="1"/>
-          <p:nvPr/>
-        </p:nvSpPr>
-        <p:spPr>
-          <a:xfrm>
-            <a:off x="8595360" y="1280160"/>
-            <a:ext cx="2651760" cy="502920"/>
-          </a:xfrm>
-          <a:prstGeom prst="rect">
-            <a:avLst/>
-          </a:prstGeom>
-          <a:noFill/>
-        </p:spPr>
-        <p:txBody>
-          <a:bodyPr wrap="square" lIns="0" rIns="0" tIns="0" bIns="0">
-            <a:spAutoFit/>
-          </a:bodyPr>
-          <a:lstStyle/>
-          <a:p>
-            <a:pPr algn="ctr"/>
-            <a:r>
-              <a:rPr sz="2000" b="1" i="0">
+          <p:cNvPr id="78" name="TextBox 77"/>
+          <p:cNvSpPr txBox="1"/>
+          <p:nvPr/>
+        </p:nvSpPr>
+        <p:spPr>
+          <a:xfrm>
+            <a:off x="9326880" y="4453128"/>
+            <a:ext cx="2468880" cy="292608"/>
+          </a:xfrm>
+          <a:prstGeom prst="rect">
+            <a:avLst/>
+          </a:prstGeom>
+          <a:noFill/>
+        </p:spPr>
+        <p:txBody>
+          <a:bodyPr wrap="square" lIns="0" rIns="0" tIns="0" bIns="0">
+            <a:spAutoFit/>
+          </a:bodyPr>
+          <a:lstStyle/>
+          <a:p>
+            <a:pPr algn="ctr"/>
+            <a:r>
+              <a:rPr sz="1400" b="1" i="0">
                 <a:solidFill>
                   <a:srgbClr val="DC2626"/>
                 </a:solidFill>
@@ -6599,14 +8956,14 @@
       </p:sp>
       <p:sp>
         <p:nvSpPr>
-          <p:cNvPr id="16" name="Rectangle 15"/>
+          <p:cNvPr id="79" name="Rectangle 78"/>
           <p:cNvSpPr/>
           <p:nvPr/>
         </p:nvSpPr>
         <p:spPr>
           <a:xfrm>
-            <a:off x="274320" y="1819656"/>
-            <a:ext cx="11704320" cy="548640"/>
+            <a:off x="274320" y="4782312"/>
+            <a:ext cx="11704320" cy="338328"/>
           </a:xfrm>
           <a:prstGeom prst="rect">
             <a:avLst/>
@@ -6642,14 +8999,14 @@
       </p:sp>
       <p:sp>
         <p:nvSpPr>
-          <p:cNvPr id="17" name="Rectangle 16"/>
+          <p:cNvPr id="80" name="Rectangle 79"/>
           <p:cNvSpPr/>
           <p:nvPr/>
         </p:nvSpPr>
         <p:spPr>
           <a:xfrm>
-            <a:off x="274320" y="1819656"/>
-            <a:ext cx="54864" cy="548640"/>
+            <a:off x="274320" y="4782312"/>
+            <a:ext cx="54864" cy="338328"/>
           </a:xfrm>
           <a:prstGeom prst="rect">
             <a:avLst/>
@@ -6685,14 +9042,14 @@
       </p:sp>
       <p:sp>
         <p:nvSpPr>
-          <p:cNvPr id="18" name="TextBox 17"/>
-          <p:cNvSpPr txBox="1"/>
-          <p:nvPr/>
-        </p:nvSpPr>
-        <p:spPr>
-          <a:xfrm>
-            <a:off x="502920" y="1847088"/>
-            <a:ext cx="3017520" cy="502920"/>
+          <p:cNvPr id="81" name="TextBox 80"/>
+          <p:cNvSpPr txBox="1"/>
+          <p:nvPr/>
+        </p:nvSpPr>
+        <p:spPr>
+          <a:xfrm>
+            <a:off x="502920" y="4809744"/>
+            <a:ext cx="3931920" cy="292608"/>
           </a:xfrm>
           <a:prstGeom prst="rect">
             <a:avLst/>
@@ -6707,7 +9064,7 @@
           <a:p>
             <a:pPr algn="l"/>
             <a:r>
-              <a:rPr sz="1200" b="1" i="0">
+              <a:rPr sz="1000" b="1" i="0">
                 <a:solidFill>
                   <a:srgbClr val="1E293B"/>
                 </a:solidFill>
@@ -6720,29 +9077,29 @@
       </p:sp>
       <p:sp>
         <p:nvSpPr>
-          <p:cNvPr id="19" name="TextBox 18"/>
-          <p:cNvSpPr txBox="1"/>
-          <p:nvPr/>
-        </p:nvSpPr>
-        <p:spPr>
-          <a:xfrm>
-            <a:off x="3657600" y="1847088"/>
-            <a:ext cx="2286000" cy="502920"/>
-          </a:xfrm>
-          <a:prstGeom prst="rect">
-            <a:avLst/>
-          </a:prstGeom>
-          <a:noFill/>
-        </p:spPr>
-        <p:txBody>
-          <a:bodyPr wrap="square" lIns="0" rIns="0" tIns="0" bIns="0">
-            <a:spAutoFit/>
-          </a:bodyPr>
-          <a:lstStyle/>
-          <a:p>
-            <a:pPr algn="ctr"/>
-            <a:r>
-              <a:rPr sz="2000" b="1" i="0">
+          <p:cNvPr id="82" name="TextBox 81"/>
+          <p:cNvSpPr txBox="1"/>
+          <p:nvPr/>
+        </p:nvSpPr>
+        <p:spPr>
+          <a:xfrm>
+            <a:off x="4572000" y="4809744"/>
+            <a:ext cx="2103120" cy="292608"/>
+          </a:xfrm>
+          <a:prstGeom prst="rect">
+            <a:avLst/>
+          </a:prstGeom>
+          <a:noFill/>
+        </p:spPr>
+        <p:txBody>
+          <a:bodyPr wrap="square" lIns="0" rIns="0" tIns="0" bIns="0">
+            <a:spAutoFit/>
+          </a:bodyPr>
+          <a:lstStyle/>
+          <a:p>
+            <a:pPr algn="ctr"/>
+            <a:r>
+              <a:rPr sz="1400" b="1" i="0">
                 <a:solidFill>
                   <a:srgbClr val="065A82"/>
                 </a:solidFill>
@@ -6755,29 +9112,29 @@
       </p:sp>
       <p:sp>
         <p:nvSpPr>
-          <p:cNvPr id="20" name="TextBox 19"/>
-          <p:cNvSpPr txBox="1"/>
-          <p:nvPr/>
-        </p:nvSpPr>
-        <p:spPr>
-          <a:xfrm>
-            <a:off x="6126480" y="1847088"/>
-            <a:ext cx="2286000" cy="502920"/>
-          </a:xfrm>
-          <a:prstGeom prst="rect">
-            <a:avLst/>
-          </a:prstGeom>
-          <a:noFill/>
-        </p:spPr>
-        <p:txBody>
-          <a:bodyPr wrap="square" lIns="0" rIns="0" tIns="0" bIns="0">
-            <a:spAutoFit/>
-          </a:bodyPr>
-          <a:lstStyle/>
-          <a:p>
-            <a:pPr algn="ctr"/>
-            <a:r>
-              <a:rPr sz="2000" b="1" i="0">
+          <p:cNvPr id="83" name="TextBox 82"/>
+          <p:cNvSpPr txBox="1"/>
+          <p:nvPr/>
+        </p:nvSpPr>
+        <p:spPr>
+          <a:xfrm>
+            <a:off x="6858000" y="4809744"/>
+            <a:ext cx="2103120" cy="292608"/>
+          </a:xfrm>
+          <a:prstGeom prst="rect">
+            <a:avLst/>
+          </a:prstGeom>
+          <a:noFill/>
+        </p:spPr>
+        <p:txBody>
+          <a:bodyPr wrap="square" lIns="0" rIns="0" tIns="0" bIns="0">
+            <a:spAutoFit/>
+          </a:bodyPr>
+          <a:lstStyle/>
+          <a:p>
+            <a:pPr algn="ctr"/>
+            <a:r>
+              <a:rPr sz="1400" b="1" i="0">
                 <a:solidFill>
                   <a:srgbClr val="1C7293"/>
                 </a:solidFill>
@@ -6790,29 +9147,29 @@
       </p:sp>
       <p:sp>
         <p:nvSpPr>
-          <p:cNvPr id="21" name="TextBox 20"/>
-          <p:cNvSpPr txBox="1"/>
-          <p:nvPr/>
-        </p:nvSpPr>
-        <p:spPr>
-          <a:xfrm>
-            <a:off x="8595360" y="1847088"/>
-            <a:ext cx="2651760" cy="502920"/>
-          </a:xfrm>
-          <a:prstGeom prst="rect">
-            <a:avLst/>
-          </a:prstGeom>
-          <a:noFill/>
-        </p:spPr>
-        <p:txBody>
-          <a:bodyPr wrap="square" lIns="0" rIns="0" tIns="0" bIns="0">
-            <a:spAutoFit/>
-          </a:bodyPr>
-          <a:lstStyle/>
-          <a:p>
-            <a:pPr algn="ctr"/>
-            <a:r>
-              <a:rPr sz="2000" b="1" i="0">
+          <p:cNvPr id="84" name="TextBox 83"/>
+          <p:cNvSpPr txBox="1"/>
+          <p:nvPr/>
+        </p:nvSpPr>
+        <p:spPr>
+          <a:xfrm>
+            <a:off x="9326880" y="4809744"/>
+            <a:ext cx="2468880" cy="292608"/>
+          </a:xfrm>
+          <a:prstGeom prst="rect">
+            <a:avLst/>
+          </a:prstGeom>
+          <a:noFill/>
+        </p:spPr>
+        <p:txBody>
+          <a:bodyPr wrap="square" lIns="0" rIns="0" tIns="0" bIns="0">
+            <a:spAutoFit/>
+          </a:bodyPr>
+          <a:lstStyle/>
+          <a:p>
+            <a:pPr algn="ctr"/>
+            <a:r>
+              <a:rPr sz="1400" b="1" i="0">
                 <a:solidFill>
                   <a:srgbClr val="059669"/>
                 </a:solidFill>
@@ -6825,14 +9182,14 @@
       </p:sp>
       <p:sp>
         <p:nvSpPr>
-          <p:cNvPr id="22" name="Rectangle 21"/>
+          <p:cNvPr id="85" name="Rectangle 84"/>
           <p:cNvSpPr/>
           <p:nvPr/>
         </p:nvSpPr>
         <p:spPr>
           <a:xfrm>
-            <a:off x="274320" y="2386584"/>
-            <a:ext cx="11704320" cy="548640"/>
+            <a:off x="274320" y="5138928"/>
+            <a:ext cx="11704320" cy="338328"/>
           </a:xfrm>
           <a:prstGeom prst="rect">
             <a:avLst/>
@@ -6868,14 +9225,14 @@
       </p:sp>
       <p:sp>
         <p:nvSpPr>
-          <p:cNvPr id="23" name="Rectangle 22"/>
+          <p:cNvPr id="86" name="Rectangle 85"/>
           <p:cNvSpPr/>
           <p:nvPr/>
         </p:nvSpPr>
         <p:spPr>
           <a:xfrm>
-            <a:off x="274320" y="2386584"/>
-            <a:ext cx="54864" cy="548640"/>
+            <a:off x="274320" y="5138928"/>
+            <a:ext cx="54864" cy="338328"/>
           </a:xfrm>
           <a:prstGeom prst="rect">
             <a:avLst/>
@@ -6911,14 +9268,14 @@
       </p:sp>
       <p:sp>
         <p:nvSpPr>
-          <p:cNvPr id="24" name="TextBox 23"/>
-          <p:cNvSpPr txBox="1"/>
-          <p:nvPr/>
-        </p:nvSpPr>
-        <p:spPr>
-          <a:xfrm>
-            <a:off x="502920" y="2414015"/>
-            <a:ext cx="3017520" cy="502920"/>
+          <p:cNvPr id="87" name="TextBox 86"/>
+          <p:cNvSpPr txBox="1"/>
+          <p:nvPr/>
+        </p:nvSpPr>
+        <p:spPr>
+          <a:xfrm>
+            <a:off x="502920" y="5166360"/>
+            <a:ext cx="3931920" cy="292608"/>
           </a:xfrm>
           <a:prstGeom prst="rect">
             <a:avLst/>
@@ -6933,7 +9290,7 @@
           <a:p>
             <a:pPr algn="l"/>
             <a:r>
-              <a:rPr sz="1200" b="1" i="0">
+              <a:rPr sz="1000" b="1" i="0">
                 <a:solidFill>
                   <a:srgbClr val="1E293B"/>
                 </a:solidFill>
@@ -6946,29 +9303,29 @@
       </p:sp>
       <p:sp>
         <p:nvSpPr>
-          <p:cNvPr id="25" name="TextBox 24"/>
-          <p:cNvSpPr txBox="1"/>
-          <p:nvPr/>
-        </p:nvSpPr>
-        <p:spPr>
-          <a:xfrm>
-            <a:off x="3657600" y="2414015"/>
-            <a:ext cx="2286000" cy="502920"/>
-          </a:xfrm>
-          <a:prstGeom prst="rect">
-            <a:avLst/>
-          </a:prstGeom>
-          <a:noFill/>
-        </p:spPr>
-        <p:txBody>
-          <a:bodyPr wrap="square" lIns="0" rIns="0" tIns="0" bIns="0">
-            <a:spAutoFit/>
-          </a:bodyPr>
-          <a:lstStyle/>
-          <a:p>
-            <a:pPr algn="ctr"/>
-            <a:r>
-              <a:rPr sz="2000" b="1" i="0">
+          <p:cNvPr id="88" name="TextBox 87"/>
+          <p:cNvSpPr txBox="1"/>
+          <p:nvPr/>
+        </p:nvSpPr>
+        <p:spPr>
+          <a:xfrm>
+            <a:off x="4572000" y="5166360"/>
+            <a:ext cx="2103120" cy="292608"/>
+          </a:xfrm>
+          <a:prstGeom prst="rect">
+            <a:avLst/>
+          </a:prstGeom>
+          <a:noFill/>
+        </p:spPr>
+        <p:txBody>
+          <a:bodyPr wrap="square" lIns="0" rIns="0" tIns="0" bIns="0">
+            <a:spAutoFit/>
+          </a:bodyPr>
+          <a:lstStyle/>
+          <a:p>
+            <a:pPr algn="ctr"/>
+            <a:r>
+              <a:rPr sz="1400" b="1" i="0">
                 <a:solidFill>
                   <a:srgbClr val="065A82"/>
                 </a:solidFill>
@@ -6981,29 +9338,29 @@
       </p:sp>
       <p:sp>
         <p:nvSpPr>
-          <p:cNvPr id="26" name="TextBox 25"/>
-          <p:cNvSpPr txBox="1"/>
-          <p:nvPr/>
-        </p:nvSpPr>
-        <p:spPr>
-          <a:xfrm>
-            <a:off x="6126480" y="2414015"/>
-            <a:ext cx="2286000" cy="502920"/>
-          </a:xfrm>
-          <a:prstGeom prst="rect">
-            <a:avLst/>
-          </a:prstGeom>
-          <a:noFill/>
-        </p:spPr>
-        <p:txBody>
-          <a:bodyPr wrap="square" lIns="0" rIns="0" tIns="0" bIns="0">
-            <a:spAutoFit/>
-          </a:bodyPr>
-          <a:lstStyle/>
-          <a:p>
-            <a:pPr algn="ctr"/>
-            <a:r>
-              <a:rPr sz="2000" b="1" i="0">
+          <p:cNvPr id="89" name="TextBox 88"/>
+          <p:cNvSpPr txBox="1"/>
+          <p:nvPr/>
+        </p:nvSpPr>
+        <p:spPr>
+          <a:xfrm>
+            <a:off x="6858000" y="5166360"/>
+            <a:ext cx="2103120" cy="292608"/>
+          </a:xfrm>
+          <a:prstGeom prst="rect">
+            <a:avLst/>
+          </a:prstGeom>
+          <a:noFill/>
+        </p:spPr>
+        <p:txBody>
+          <a:bodyPr wrap="square" lIns="0" rIns="0" tIns="0" bIns="0">
+            <a:spAutoFit/>
+          </a:bodyPr>
+          <a:lstStyle/>
+          <a:p>
+            <a:pPr algn="ctr"/>
+            <a:r>
+              <a:rPr sz="1400" b="1" i="0">
                 <a:solidFill>
                   <a:srgbClr val="1C7293"/>
                 </a:solidFill>
@@ -7016,29 +9373,29 @@
       </p:sp>
       <p:sp>
         <p:nvSpPr>
-          <p:cNvPr id="27" name="TextBox 26"/>
-          <p:cNvSpPr txBox="1"/>
-          <p:nvPr/>
-        </p:nvSpPr>
-        <p:spPr>
-          <a:xfrm>
-            <a:off x="8595360" y="2414015"/>
-            <a:ext cx="2651760" cy="502920"/>
-          </a:xfrm>
-          <a:prstGeom prst="rect">
-            <a:avLst/>
-          </a:prstGeom>
-          <a:noFill/>
-        </p:spPr>
-        <p:txBody>
-          <a:bodyPr wrap="square" lIns="0" rIns="0" tIns="0" bIns="0">
-            <a:spAutoFit/>
-          </a:bodyPr>
-          <a:lstStyle/>
-          <a:p>
-            <a:pPr algn="ctr"/>
-            <a:r>
-              <a:rPr sz="2000" b="1" i="0">
+          <p:cNvPr id="90" name="TextBox 89"/>
+          <p:cNvSpPr txBox="1"/>
+          <p:nvPr/>
+        </p:nvSpPr>
+        <p:spPr>
+          <a:xfrm>
+            <a:off x="9326880" y="5166360"/>
+            <a:ext cx="2468880" cy="292608"/>
+          </a:xfrm>
+          <a:prstGeom prst="rect">
+            <a:avLst/>
+          </a:prstGeom>
+          <a:noFill/>
+        </p:spPr>
+        <p:txBody>
+          <a:bodyPr wrap="square" lIns="0" rIns="0" tIns="0" bIns="0">
+            <a:spAutoFit/>
+          </a:bodyPr>
+          <a:lstStyle/>
+          <a:p>
+            <a:pPr algn="ctr"/>
+            <a:r>
+              <a:rPr sz="1400" b="1" i="0">
                 <a:solidFill>
                   <a:srgbClr val="D97706"/>
                 </a:solidFill>
@@ -7051,14 +9408,14 @@
       </p:sp>
       <p:sp>
         <p:nvSpPr>
-          <p:cNvPr id="28" name="Rectangle 27"/>
+          <p:cNvPr id="91" name="Rectangle 90"/>
           <p:cNvSpPr/>
           <p:nvPr/>
         </p:nvSpPr>
         <p:spPr>
           <a:xfrm>
-            <a:off x="274320" y="2953512"/>
-            <a:ext cx="11704320" cy="548640"/>
+            <a:off x="274320" y="5495544"/>
+            <a:ext cx="11704320" cy="338328"/>
           </a:xfrm>
           <a:prstGeom prst="rect">
             <a:avLst/>
@@ -7094,14 +9451,14 @@
       </p:sp>
       <p:sp>
         <p:nvSpPr>
-          <p:cNvPr id="29" name="Rectangle 28"/>
+          <p:cNvPr id="92" name="Rectangle 91"/>
           <p:cNvSpPr/>
           <p:nvPr/>
         </p:nvSpPr>
         <p:spPr>
           <a:xfrm>
-            <a:off x="274320" y="2953512"/>
-            <a:ext cx="54864" cy="548640"/>
+            <a:off x="274320" y="5495544"/>
+            <a:ext cx="54864" cy="338328"/>
           </a:xfrm>
           <a:prstGeom prst="rect">
             <a:avLst/>
@@ -7137,14 +9494,14 @@
       </p:sp>
       <p:sp>
         <p:nvSpPr>
-          <p:cNvPr id="30" name="TextBox 29"/>
-          <p:cNvSpPr txBox="1"/>
-          <p:nvPr/>
-        </p:nvSpPr>
-        <p:spPr>
-          <a:xfrm>
-            <a:off x="502920" y="2980944"/>
-            <a:ext cx="3017520" cy="502920"/>
+          <p:cNvPr id="93" name="TextBox 92"/>
+          <p:cNvSpPr txBox="1"/>
+          <p:nvPr/>
+        </p:nvSpPr>
+        <p:spPr>
+          <a:xfrm>
+            <a:off x="502920" y="5522976"/>
+            <a:ext cx="3931920" cy="292608"/>
           </a:xfrm>
           <a:prstGeom prst="rect">
             <a:avLst/>
@@ -7159,132 +9516,132 @@
           <a:p>
             <a:pPr algn="l"/>
             <a:r>
-              <a:rPr sz="1200" b="1" i="0">
+              <a:rPr sz="1000" b="1" i="0">
                 <a:solidFill>
                   <a:srgbClr val="1E293B"/>
                 </a:solidFill>
                 <a:latin typeface="Calibri"/>
               </a:rPr>
-              <a:t>New Visitor %</a:t>
-            </a:r>
-          </a:p>
-        </p:txBody>
-      </p:sp>
-      <p:sp>
-        <p:nvSpPr>
-          <p:cNvPr id="31" name="TextBox 30"/>
-          <p:cNvSpPr txBox="1"/>
-          <p:nvPr/>
-        </p:nvSpPr>
-        <p:spPr>
-          <a:xfrm>
-            <a:off x="3657600" y="2980944"/>
-            <a:ext cx="2286000" cy="502920"/>
-          </a:xfrm>
-          <a:prstGeom prst="rect">
-            <a:avLst/>
-          </a:prstGeom>
-          <a:noFill/>
-        </p:spPr>
-        <p:txBody>
-          <a:bodyPr wrap="square" lIns="0" rIns="0" tIns="0" bIns="0">
-            <a:spAutoFit/>
-          </a:bodyPr>
-          <a:lstStyle/>
-          <a:p>
-            <a:pPr algn="ctr"/>
-            <a:r>
-              <a:rPr sz="2000" b="1" i="0">
+              <a:t>Bounce Rate (total)</a:t>
+            </a:r>
+          </a:p>
+        </p:txBody>
+      </p:sp>
+      <p:sp>
+        <p:nvSpPr>
+          <p:cNvPr id="94" name="TextBox 93"/>
+          <p:cNvSpPr txBox="1"/>
+          <p:nvPr/>
+        </p:nvSpPr>
+        <p:spPr>
+          <a:xfrm>
+            <a:off x="4572000" y="5522976"/>
+            <a:ext cx="2103120" cy="292608"/>
+          </a:xfrm>
+          <a:prstGeom prst="rect">
+            <a:avLst/>
+          </a:prstGeom>
+          <a:noFill/>
+        </p:spPr>
+        <p:txBody>
+          <a:bodyPr wrap="square" lIns="0" rIns="0" tIns="0" bIns="0">
+            <a:spAutoFit/>
+          </a:bodyPr>
+          <a:lstStyle/>
+          <a:p>
+            <a:pPr algn="ctr"/>
+            <a:r>
+              <a:rPr sz="1400" b="1" i="0">
                 <a:solidFill>
                   <a:srgbClr val="065A82"/>
                 </a:solidFill>
                 <a:latin typeface="Calibri"/>
               </a:rPr>
-              <a:t>5.3%</a:t>
-            </a:r>
-          </a:p>
-        </p:txBody>
-      </p:sp>
-      <p:sp>
-        <p:nvSpPr>
-          <p:cNvPr id="32" name="TextBox 31"/>
-          <p:cNvSpPr txBox="1"/>
-          <p:nvPr/>
-        </p:nvSpPr>
-        <p:spPr>
-          <a:xfrm>
-            <a:off x="6126480" y="2980944"/>
-            <a:ext cx="2286000" cy="502920"/>
-          </a:xfrm>
-          <a:prstGeom prst="rect">
-            <a:avLst/>
-          </a:prstGeom>
-          <a:noFill/>
-        </p:spPr>
-        <p:txBody>
-          <a:bodyPr wrap="square" lIns="0" rIns="0" tIns="0" bIns="0">
-            <a:spAutoFit/>
-          </a:bodyPr>
-          <a:lstStyle/>
-          <a:p>
-            <a:pPr algn="ctr"/>
-            <a:r>
-              <a:rPr sz="2000" b="1" i="0">
+              <a:t>61.0%</a:t>
+            </a:r>
+          </a:p>
+        </p:txBody>
+      </p:sp>
+      <p:sp>
+        <p:nvSpPr>
+          <p:cNvPr id="95" name="TextBox 94"/>
+          <p:cNvSpPr txBox="1"/>
+          <p:nvPr/>
+        </p:nvSpPr>
+        <p:spPr>
+          <a:xfrm>
+            <a:off x="6858000" y="5522976"/>
+            <a:ext cx="2103120" cy="292608"/>
+          </a:xfrm>
+          <a:prstGeom prst="rect">
+            <a:avLst/>
+          </a:prstGeom>
+          <a:noFill/>
+        </p:spPr>
+        <p:txBody>
+          <a:bodyPr wrap="square" lIns="0" rIns="0" tIns="0" bIns="0">
+            <a:spAutoFit/>
+          </a:bodyPr>
+          <a:lstStyle/>
+          <a:p>
+            <a:pPr algn="ctr"/>
+            <a:r>
+              <a:rPr sz="1400" b="1" i="0">
                 <a:solidFill>
                   <a:srgbClr val="1C7293"/>
                 </a:solidFill>
                 <a:latin typeface="Calibri"/>
               </a:rPr>
-              <a:t>2.5%</a:t>
-            </a:r>
-          </a:p>
-        </p:txBody>
-      </p:sp>
-      <p:sp>
-        <p:nvSpPr>
-          <p:cNvPr id="33" name="TextBox 32"/>
-          <p:cNvSpPr txBox="1"/>
-          <p:nvPr/>
-        </p:nvSpPr>
-        <p:spPr>
-          <a:xfrm>
-            <a:off x="8595360" y="2980944"/>
-            <a:ext cx="2651760" cy="502920"/>
-          </a:xfrm>
-          <a:prstGeom prst="rect">
-            <a:avLst/>
-          </a:prstGeom>
-          <a:noFill/>
-        </p:spPr>
-        <p:txBody>
-          <a:bodyPr wrap="square" lIns="0" rIns="0" tIns="0" bIns="0">
-            <a:spAutoFit/>
-          </a:bodyPr>
-          <a:lstStyle/>
-          <a:p>
-            <a:pPr algn="ctr"/>
-            <a:r>
-              <a:rPr sz="2000" b="1" i="0">
+              <a:t>64.3%</a:t>
+            </a:r>
+          </a:p>
+        </p:txBody>
+      </p:sp>
+      <p:sp>
+        <p:nvSpPr>
+          <p:cNvPr id="96" name="TextBox 95"/>
+          <p:cNvSpPr txBox="1"/>
+          <p:nvPr/>
+        </p:nvSpPr>
+        <p:spPr>
+          <a:xfrm>
+            <a:off x="9326880" y="5522976"/>
+            <a:ext cx="2468880" cy="292608"/>
+          </a:xfrm>
+          <a:prstGeom prst="rect">
+            <a:avLst/>
+          </a:prstGeom>
+          <a:noFill/>
+        </p:spPr>
+        <p:txBody>
+          <a:bodyPr wrap="square" lIns="0" rIns="0" tIns="0" bIns="0">
+            <a:spAutoFit/>
+          </a:bodyPr>
+          <a:lstStyle/>
+          <a:p>
+            <a:pPr algn="ctr"/>
+            <a:r>
+              <a:rPr sz="1400" b="1" i="0">
                 <a:solidFill>
                   <a:srgbClr val="DC2626"/>
                 </a:solidFill>
                 <a:latin typeface="Calibri"/>
               </a:rPr>
-              <a:t>-2.8pp</a:t>
-            </a:r>
-          </a:p>
-        </p:txBody>
-      </p:sp>
-      <p:sp>
-        <p:nvSpPr>
-          <p:cNvPr id="34" name="Rectangle 33"/>
+              <a:t>+3.3pp</a:t>
+            </a:r>
+          </a:p>
+        </p:txBody>
+      </p:sp>
+      <p:sp>
+        <p:nvSpPr>
+          <p:cNvPr id="97" name="Rectangle 96"/>
           <p:cNvSpPr/>
           <p:nvPr/>
         </p:nvSpPr>
         <p:spPr>
           <a:xfrm>
-            <a:off x="274320" y="3520440"/>
-            <a:ext cx="11704320" cy="548640"/>
+            <a:off x="274320" y="5852160"/>
+            <a:ext cx="11704320" cy="338328"/>
           </a:xfrm>
           <a:prstGeom prst="rect">
             <a:avLst/>
@@ -7320,14 +9677,14 @@
       </p:sp>
       <p:sp>
         <p:nvSpPr>
-          <p:cNvPr id="35" name="Rectangle 34"/>
+          <p:cNvPr id="98" name="Rectangle 97"/>
           <p:cNvSpPr/>
           <p:nvPr/>
         </p:nvSpPr>
         <p:spPr>
           <a:xfrm>
-            <a:off x="274320" y="3520440"/>
-            <a:ext cx="54864" cy="548640"/>
+            <a:off x="274320" y="5852160"/>
+            <a:ext cx="54864" cy="338328"/>
           </a:xfrm>
           <a:prstGeom prst="rect">
             <a:avLst/>
@@ -7363,14 +9720,14 @@
       </p:sp>
       <p:sp>
         <p:nvSpPr>
-          <p:cNvPr id="36" name="TextBox 35"/>
-          <p:cNvSpPr txBox="1"/>
-          <p:nvPr/>
-        </p:nvSpPr>
-        <p:spPr>
-          <a:xfrm>
-            <a:off x="502920" y="3547872"/>
-            <a:ext cx="3017520" cy="502920"/>
+          <p:cNvPr id="99" name="TextBox 98"/>
+          <p:cNvSpPr txBox="1"/>
+          <p:nvPr/>
+        </p:nvSpPr>
+        <p:spPr>
+          <a:xfrm>
+            <a:off x="502920" y="5879592"/>
+            <a:ext cx="3931920" cy="292608"/>
           </a:xfrm>
           <a:prstGeom prst="rect">
             <a:avLst/>
@@ -7385,132 +9742,132 @@
           <a:p>
             <a:pPr algn="l"/>
             <a:r>
-              <a:rPr sz="1200" b="1" i="0">
+              <a:rPr sz="1000" b="1" i="0">
                 <a:solidFill>
                   <a:srgbClr val="1E293B"/>
                 </a:solidFill>
                 <a:latin typeface="Calibri"/>
               </a:rPr>
-              <a:t>Returning Visitor %</a:t>
-            </a:r>
-          </a:p>
-        </p:txBody>
-      </p:sp>
-      <p:sp>
-        <p:nvSpPr>
-          <p:cNvPr id="37" name="TextBox 36"/>
-          <p:cNvSpPr txBox="1"/>
-          <p:nvPr/>
-        </p:nvSpPr>
-        <p:spPr>
-          <a:xfrm>
-            <a:off x="3657600" y="3547872"/>
-            <a:ext cx="2286000" cy="502920"/>
-          </a:xfrm>
-          <a:prstGeom prst="rect">
-            <a:avLst/>
-          </a:prstGeom>
-          <a:noFill/>
-        </p:spPr>
-        <p:txBody>
-          <a:bodyPr wrap="square" lIns="0" rIns="0" tIns="0" bIns="0">
-            <a:spAutoFit/>
-          </a:bodyPr>
-          <a:lstStyle/>
-          <a:p>
-            <a:pPr algn="ctr"/>
-            <a:r>
-              <a:rPr sz="2000" b="1" i="0">
+              <a:t>Hi-Engage (5+ pgs)</a:t>
+            </a:r>
+          </a:p>
+        </p:txBody>
+      </p:sp>
+      <p:sp>
+        <p:nvSpPr>
+          <p:cNvPr id="100" name="TextBox 99"/>
+          <p:cNvSpPr txBox="1"/>
+          <p:nvPr/>
+        </p:nvSpPr>
+        <p:spPr>
+          <a:xfrm>
+            <a:off x="4572000" y="5879592"/>
+            <a:ext cx="2103120" cy="292608"/>
+          </a:xfrm>
+          <a:prstGeom prst="rect">
+            <a:avLst/>
+          </a:prstGeom>
+          <a:noFill/>
+        </p:spPr>
+        <p:txBody>
+          <a:bodyPr wrap="square" lIns="0" rIns="0" tIns="0" bIns="0">
+            <a:spAutoFit/>
+          </a:bodyPr>
+          <a:lstStyle/>
+          <a:p>
+            <a:pPr algn="ctr"/>
+            <a:r>
+              <a:rPr sz="1400" b="1" i="0">
                 <a:solidFill>
                   <a:srgbClr val="065A82"/>
                 </a:solidFill>
                 <a:latin typeface="Calibri"/>
               </a:rPr>
-              <a:t>94.7%</a:t>
-            </a:r>
-          </a:p>
-        </p:txBody>
-      </p:sp>
-      <p:sp>
-        <p:nvSpPr>
-          <p:cNvPr id="38" name="TextBox 37"/>
-          <p:cNvSpPr txBox="1"/>
-          <p:nvPr/>
-        </p:nvSpPr>
-        <p:spPr>
-          <a:xfrm>
-            <a:off x="6126480" y="3547872"/>
-            <a:ext cx="2286000" cy="502920"/>
-          </a:xfrm>
-          <a:prstGeom prst="rect">
-            <a:avLst/>
-          </a:prstGeom>
-          <a:noFill/>
-        </p:spPr>
-        <p:txBody>
-          <a:bodyPr wrap="square" lIns="0" rIns="0" tIns="0" bIns="0">
-            <a:spAutoFit/>
-          </a:bodyPr>
-          <a:lstStyle/>
-          <a:p>
-            <a:pPr algn="ctr"/>
-            <a:r>
-              <a:rPr sz="2000" b="1" i="0">
+              <a:t>14,666</a:t>
+            </a:r>
+          </a:p>
+        </p:txBody>
+      </p:sp>
+      <p:sp>
+        <p:nvSpPr>
+          <p:cNvPr id="101" name="TextBox 100"/>
+          <p:cNvSpPr txBox="1"/>
+          <p:nvPr/>
+        </p:nvSpPr>
+        <p:spPr>
+          <a:xfrm>
+            <a:off x="6858000" y="5879592"/>
+            <a:ext cx="2103120" cy="292608"/>
+          </a:xfrm>
+          <a:prstGeom prst="rect">
+            <a:avLst/>
+          </a:prstGeom>
+          <a:noFill/>
+        </p:spPr>
+        <p:txBody>
+          <a:bodyPr wrap="square" lIns="0" rIns="0" tIns="0" bIns="0">
+            <a:spAutoFit/>
+          </a:bodyPr>
+          <a:lstStyle/>
+          <a:p>
+            <a:pPr algn="ctr"/>
+            <a:r>
+              <a:rPr sz="1400" b="1" i="0">
                 <a:solidFill>
                   <a:srgbClr val="1C7293"/>
                 </a:solidFill>
                 <a:latin typeface="Calibri"/>
               </a:rPr>
-              <a:t>97.5%</a:t>
-            </a:r>
-          </a:p>
-        </p:txBody>
-      </p:sp>
-      <p:sp>
-        <p:nvSpPr>
-          <p:cNvPr id="39" name="TextBox 38"/>
-          <p:cNvSpPr txBox="1"/>
-          <p:nvPr/>
-        </p:nvSpPr>
-        <p:spPr>
-          <a:xfrm>
-            <a:off x="8595360" y="3547872"/>
-            <a:ext cx="2651760" cy="502920"/>
-          </a:xfrm>
-          <a:prstGeom prst="rect">
-            <a:avLst/>
-          </a:prstGeom>
-          <a:noFill/>
-        </p:spPr>
-        <p:txBody>
-          <a:bodyPr wrap="square" lIns="0" rIns="0" tIns="0" bIns="0">
-            <a:spAutoFit/>
-          </a:bodyPr>
-          <a:lstStyle/>
-          <a:p>
-            <a:pPr algn="ctr"/>
-            <a:r>
-              <a:rPr sz="2000" b="1" i="0">
-                <a:solidFill>
-                  <a:srgbClr val="059669"/>
-                </a:solidFill>
-                <a:latin typeface="Calibri"/>
-              </a:rPr>
-              <a:t>+2.8pp</a:t>
-            </a:r>
-          </a:p>
-        </p:txBody>
-      </p:sp>
-      <p:sp>
-        <p:nvSpPr>
-          <p:cNvPr id="40" name="Rectangle 39"/>
+              <a:t>13,222</a:t>
+            </a:r>
+          </a:p>
+        </p:txBody>
+      </p:sp>
+      <p:sp>
+        <p:nvSpPr>
+          <p:cNvPr id="102" name="TextBox 101"/>
+          <p:cNvSpPr txBox="1"/>
+          <p:nvPr/>
+        </p:nvSpPr>
+        <p:spPr>
+          <a:xfrm>
+            <a:off x="9326880" y="5879592"/>
+            <a:ext cx="2468880" cy="292608"/>
+          </a:xfrm>
+          <a:prstGeom prst="rect">
+            <a:avLst/>
+          </a:prstGeom>
+          <a:noFill/>
+        </p:spPr>
+        <p:txBody>
+          <a:bodyPr wrap="square" lIns="0" rIns="0" tIns="0" bIns="0">
+            <a:spAutoFit/>
+          </a:bodyPr>
+          <a:lstStyle/>
+          <a:p>
+            <a:pPr algn="ctr"/>
+            <a:r>
+              <a:rPr sz="1400" b="1" i="0">
+                <a:solidFill>
+                  <a:srgbClr val="DC2626"/>
+                </a:solidFill>
+                <a:latin typeface="Calibri"/>
+              </a:rPr>
+              <a:t>-9.8%</a:t>
+            </a:r>
+          </a:p>
+        </p:txBody>
+      </p:sp>
+      <p:sp>
+        <p:nvSpPr>
+          <p:cNvPr id="103" name="Rectangle 102"/>
           <p:cNvSpPr/>
           <p:nvPr/>
         </p:nvSpPr>
         <p:spPr>
           <a:xfrm>
-            <a:off x="274320" y="4087368"/>
-            <a:ext cx="11704320" cy="548640"/>
+            <a:off x="274320" y="6208776"/>
+            <a:ext cx="11704320" cy="338328"/>
           </a:xfrm>
           <a:prstGeom prst="rect">
             <a:avLst/>
@@ -7546,14 +9903,14 @@
       </p:sp>
       <p:sp>
         <p:nvSpPr>
-          <p:cNvPr id="41" name="Rectangle 40"/>
+          <p:cNvPr id="104" name="Rectangle 103"/>
           <p:cNvSpPr/>
           <p:nvPr/>
         </p:nvSpPr>
         <p:spPr>
           <a:xfrm>
-            <a:off x="274320" y="4087368"/>
-            <a:ext cx="54864" cy="548640"/>
+            <a:off x="274320" y="6208776"/>
+            <a:ext cx="54864" cy="338328"/>
           </a:xfrm>
           <a:prstGeom prst="rect">
             <a:avLst/>
@@ -7589,14 +9946,14 @@
       </p:sp>
       <p:sp>
         <p:nvSpPr>
-          <p:cNvPr id="42" name="TextBox 41"/>
-          <p:cNvSpPr txBox="1"/>
-          <p:nvPr/>
-        </p:nvSpPr>
-        <p:spPr>
-          <a:xfrm>
-            <a:off x="502920" y="4114800"/>
-            <a:ext cx="3017520" cy="502920"/>
+          <p:cNvPr id="105" name="TextBox 104"/>
+          <p:cNvSpPr txBox="1"/>
+          <p:nvPr/>
+        </p:nvSpPr>
+        <p:spPr>
+          <a:xfrm>
+            <a:off x="502920" y="6236208"/>
+            <a:ext cx="3931920" cy="292608"/>
           </a:xfrm>
           <a:prstGeom prst="rect">
             <a:avLst/>
@@ -7611,534 +9968,82 @@
           <a:p>
             <a:pPr algn="l"/>
             <a:r>
-              <a:rPr sz="1200" b="1" i="0">
+              <a:rPr sz="1000" b="1" i="0">
                 <a:solidFill>
                   <a:srgbClr val="1E293B"/>
                 </a:solidFill>
                 <a:latin typeface="Calibri"/>
               </a:rPr>
-              <a:t>Bounce Rate</a:t>
-            </a:r>
-          </a:p>
-        </p:txBody>
-      </p:sp>
-      <p:sp>
-        <p:nvSpPr>
-          <p:cNvPr id="43" name="TextBox 42"/>
-          <p:cNvSpPr txBox="1"/>
-          <p:nvPr/>
-        </p:nvSpPr>
-        <p:spPr>
-          <a:xfrm>
-            <a:off x="3657600" y="4114800"/>
-            <a:ext cx="2286000" cy="502920"/>
-          </a:xfrm>
-          <a:prstGeom prst="rect">
-            <a:avLst/>
-          </a:prstGeom>
-          <a:noFill/>
-        </p:spPr>
-        <p:txBody>
-          <a:bodyPr wrap="square" lIns="0" rIns="0" tIns="0" bIns="0">
-            <a:spAutoFit/>
-          </a:bodyPr>
-          <a:lstStyle/>
-          <a:p>
-            <a:pPr algn="ctr"/>
-            <a:r>
-              <a:rPr sz="2000" b="1" i="0">
+              <a:t>Hi-Engage %</a:t>
+            </a:r>
+          </a:p>
+        </p:txBody>
+      </p:sp>
+      <p:sp>
+        <p:nvSpPr>
+          <p:cNvPr id="106" name="TextBox 105"/>
+          <p:cNvSpPr txBox="1"/>
+          <p:nvPr/>
+        </p:nvSpPr>
+        <p:spPr>
+          <a:xfrm>
+            <a:off x="4572000" y="6236208"/>
+            <a:ext cx="2103120" cy="292608"/>
+          </a:xfrm>
+          <a:prstGeom prst="rect">
+            <a:avLst/>
+          </a:prstGeom>
+          <a:noFill/>
+        </p:spPr>
+        <p:txBody>
+          <a:bodyPr wrap="square" lIns="0" rIns="0" tIns="0" bIns="0">
+            <a:spAutoFit/>
+          </a:bodyPr>
+          <a:lstStyle/>
+          <a:p>
+            <a:pPr algn="ctr"/>
+            <a:r>
+              <a:rPr sz="1400" b="1" i="0">
                 <a:solidFill>
                   <a:srgbClr val="065A82"/>
                 </a:solidFill>
                 <a:latin typeface="Calibri"/>
               </a:rPr>
-              <a:t>61.0%</a:t>
-            </a:r>
-          </a:p>
-        </p:txBody>
-      </p:sp>
-      <p:sp>
-        <p:nvSpPr>
-          <p:cNvPr id="44" name="TextBox 43"/>
-          <p:cNvSpPr txBox="1"/>
-          <p:nvPr/>
-        </p:nvSpPr>
-        <p:spPr>
-          <a:xfrm>
-            <a:off x="6126480" y="4114800"/>
-            <a:ext cx="2286000" cy="502920"/>
-          </a:xfrm>
-          <a:prstGeom prst="rect">
-            <a:avLst/>
-          </a:prstGeom>
-          <a:noFill/>
-        </p:spPr>
-        <p:txBody>
-          <a:bodyPr wrap="square" lIns="0" rIns="0" tIns="0" bIns="0">
-            <a:spAutoFit/>
-          </a:bodyPr>
-          <a:lstStyle/>
-          <a:p>
-            <a:pPr algn="ctr"/>
-            <a:r>
-              <a:rPr sz="2000" b="1" i="0">
+              <a:t>7.6%</a:t>
+            </a:r>
+          </a:p>
+        </p:txBody>
+      </p:sp>
+      <p:sp>
+        <p:nvSpPr>
+          <p:cNvPr id="107" name="TextBox 106"/>
+          <p:cNvSpPr txBox="1"/>
+          <p:nvPr/>
+        </p:nvSpPr>
+        <p:spPr>
+          <a:xfrm>
+            <a:off x="6858000" y="6236208"/>
+            <a:ext cx="2103120" cy="292608"/>
+          </a:xfrm>
+          <a:prstGeom prst="rect">
+            <a:avLst/>
+          </a:prstGeom>
+          <a:noFill/>
+        </p:spPr>
+        <p:txBody>
+          <a:bodyPr wrap="square" lIns="0" rIns="0" tIns="0" bIns="0">
+            <a:spAutoFit/>
+          </a:bodyPr>
+          <a:lstStyle/>
+          <a:p>
+            <a:pPr algn="ctr"/>
+            <a:r>
+              <a:rPr sz="1400" b="1" i="0">
                 <a:solidFill>
                   <a:srgbClr val="1C7293"/>
                 </a:solidFill>
                 <a:latin typeface="Calibri"/>
               </a:rPr>
-              <a:t>64.3%</a:t>
-            </a:r>
-          </a:p>
-        </p:txBody>
-      </p:sp>
-      <p:sp>
-        <p:nvSpPr>
-          <p:cNvPr id="45" name="TextBox 44"/>
-          <p:cNvSpPr txBox="1"/>
-          <p:nvPr/>
-        </p:nvSpPr>
-        <p:spPr>
-          <a:xfrm>
-            <a:off x="8595360" y="4114800"/>
-            <a:ext cx="2651760" cy="502920"/>
-          </a:xfrm>
-          <a:prstGeom prst="rect">
-            <a:avLst/>
-          </a:prstGeom>
-          <a:noFill/>
-        </p:spPr>
-        <p:txBody>
-          <a:bodyPr wrap="square" lIns="0" rIns="0" tIns="0" bIns="0">
-            <a:spAutoFit/>
-          </a:bodyPr>
-          <a:lstStyle/>
-          <a:p>
-            <a:pPr algn="ctr"/>
-            <a:r>
-              <a:rPr sz="2000" b="1" i="0">
-                <a:solidFill>
-                  <a:srgbClr val="DC2626"/>
-                </a:solidFill>
-                <a:latin typeface="Calibri"/>
-              </a:rPr>
-              <a:t>+3.3pp</a:t>
-            </a:r>
-          </a:p>
-        </p:txBody>
-      </p:sp>
-      <p:sp>
-        <p:nvSpPr>
-          <p:cNvPr id="46" name="Rectangle 45"/>
-          <p:cNvSpPr/>
-          <p:nvPr/>
-        </p:nvSpPr>
-        <p:spPr>
-          <a:xfrm>
-            <a:off x="274320" y="4654296"/>
-            <a:ext cx="11704320" cy="548640"/>
-          </a:xfrm>
-          <a:prstGeom prst="rect">
-            <a:avLst/>
-          </a:prstGeom>
-          <a:solidFill>
-            <a:srgbClr val="FFFFFF"/>
-          </a:solidFill>
-          <a:ln>
-            <a:noFill/>
-          </a:ln>
-        </p:spPr>
-        <p:style>
-          <a:lnRef idx="1">
-            <a:schemeClr val="accent1"/>
-          </a:lnRef>
-          <a:fillRef idx="3">
-            <a:schemeClr val="accent1"/>
-          </a:fillRef>
-          <a:effectRef idx="2">
-            <a:schemeClr val="accent1"/>
-          </a:effectRef>
-          <a:fontRef idx="minor">
-            <a:schemeClr val="lt1"/>
-          </a:fontRef>
-        </p:style>
-        <p:txBody>
-          <a:bodyPr rtlCol="0" anchor="ctr"/>
-          <a:lstStyle/>
-          <a:p>
-            <a:pPr algn="ctr"/>
-          </a:p>
-        </p:txBody>
-      </p:sp>
-      <p:sp>
-        <p:nvSpPr>
-          <p:cNvPr id="47" name="Rectangle 46"/>
-          <p:cNvSpPr/>
-          <p:nvPr/>
-        </p:nvSpPr>
-        <p:spPr>
-          <a:xfrm>
-            <a:off x="274320" y="4654296"/>
-            <a:ext cx="54864" cy="548640"/>
-          </a:xfrm>
-          <a:prstGeom prst="rect">
-            <a:avLst/>
-          </a:prstGeom>
-          <a:solidFill>
-            <a:srgbClr val="1C7293"/>
-          </a:solidFill>
-          <a:ln>
-            <a:noFill/>
-          </a:ln>
-        </p:spPr>
-        <p:style>
-          <a:lnRef idx="1">
-            <a:schemeClr val="accent1"/>
-          </a:lnRef>
-          <a:fillRef idx="3">
-            <a:schemeClr val="accent1"/>
-          </a:fillRef>
-          <a:effectRef idx="2">
-            <a:schemeClr val="accent1"/>
-          </a:effectRef>
-          <a:fontRef idx="minor">
-            <a:schemeClr val="lt1"/>
-          </a:fontRef>
-        </p:style>
-        <p:txBody>
-          <a:bodyPr rtlCol="0" anchor="ctr"/>
-          <a:lstStyle/>
-          <a:p>
-            <a:pPr algn="ctr"/>
-          </a:p>
-        </p:txBody>
-      </p:sp>
-      <p:sp>
-        <p:nvSpPr>
-          <p:cNvPr id="48" name="TextBox 47"/>
-          <p:cNvSpPr txBox="1"/>
-          <p:nvPr/>
-        </p:nvSpPr>
-        <p:spPr>
-          <a:xfrm>
-            <a:off x="502920" y="4681727"/>
-            <a:ext cx="3017520" cy="502920"/>
-          </a:xfrm>
-          <a:prstGeom prst="rect">
-            <a:avLst/>
-          </a:prstGeom>
-          <a:noFill/>
-        </p:spPr>
-        <p:txBody>
-          <a:bodyPr wrap="square" lIns="0" rIns="0" tIns="0" bIns="0">
-            <a:spAutoFit/>
-          </a:bodyPr>
-          <a:lstStyle/>
-          <a:p>
-            <a:pPr algn="l"/>
-            <a:r>
-              <a:rPr sz="1200" b="1" i="0">
-                <a:solidFill>
-                  <a:srgbClr val="1E293B"/>
-                </a:solidFill>
-                <a:latin typeface="Calibri"/>
-              </a:rPr>
-              <a:t>High-Engage (5+pgs)</a:t>
-            </a:r>
-          </a:p>
-        </p:txBody>
-      </p:sp>
-      <p:sp>
-        <p:nvSpPr>
-          <p:cNvPr id="49" name="TextBox 48"/>
-          <p:cNvSpPr txBox="1"/>
-          <p:nvPr/>
-        </p:nvSpPr>
-        <p:spPr>
-          <a:xfrm>
-            <a:off x="3657600" y="4681727"/>
-            <a:ext cx="2286000" cy="502920"/>
-          </a:xfrm>
-          <a:prstGeom prst="rect">
-            <a:avLst/>
-          </a:prstGeom>
-          <a:noFill/>
-        </p:spPr>
-        <p:txBody>
-          <a:bodyPr wrap="square" lIns="0" rIns="0" tIns="0" bIns="0">
-            <a:spAutoFit/>
-          </a:bodyPr>
-          <a:lstStyle/>
-          <a:p>
-            <a:pPr algn="ctr"/>
-            <a:r>
-              <a:rPr sz="2000" b="1" i="0">
-                <a:solidFill>
-                  <a:srgbClr val="065A82"/>
-                </a:solidFill>
-                <a:latin typeface="Calibri"/>
-              </a:rPr>
-              <a:t>14,666</a:t>
-            </a:r>
-          </a:p>
-        </p:txBody>
-      </p:sp>
-      <p:sp>
-        <p:nvSpPr>
-          <p:cNvPr id="50" name="TextBox 49"/>
-          <p:cNvSpPr txBox="1"/>
-          <p:nvPr/>
-        </p:nvSpPr>
-        <p:spPr>
-          <a:xfrm>
-            <a:off x="6126480" y="4681727"/>
-            <a:ext cx="2286000" cy="502920"/>
-          </a:xfrm>
-          <a:prstGeom prst="rect">
-            <a:avLst/>
-          </a:prstGeom>
-          <a:noFill/>
-        </p:spPr>
-        <p:txBody>
-          <a:bodyPr wrap="square" lIns="0" rIns="0" tIns="0" bIns="0">
-            <a:spAutoFit/>
-          </a:bodyPr>
-          <a:lstStyle/>
-          <a:p>
-            <a:pPr algn="ctr"/>
-            <a:r>
-              <a:rPr sz="2000" b="1" i="0">
-                <a:solidFill>
-                  <a:srgbClr val="1C7293"/>
-                </a:solidFill>
-                <a:latin typeface="Calibri"/>
-              </a:rPr>
-              <a:t>13,222</a:t>
-            </a:r>
-          </a:p>
-        </p:txBody>
-      </p:sp>
-      <p:sp>
-        <p:nvSpPr>
-          <p:cNvPr id="51" name="TextBox 50"/>
-          <p:cNvSpPr txBox="1"/>
-          <p:nvPr/>
-        </p:nvSpPr>
-        <p:spPr>
-          <a:xfrm>
-            <a:off x="8595360" y="4681727"/>
-            <a:ext cx="2651760" cy="502920"/>
-          </a:xfrm>
-          <a:prstGeom prst="rect">
-            <a:avLst/>
-          </a:prstGeom>
-          <a:noFill/>
-        </p:spPr>
-        <p:txBody>
-          <a:bodyPr wrap="square" lIns="0" rIns="0" tIns="0" bIns="0">
-            <a:spAutoFit/>
-          </a:bodyPr>
-          <a:lstStyle/>
-          <a:p>
-            <a:pPr algn="ctr"/>
-            <a:r>
-              <a:rPr sz="2000" b="1" i="0">
-                <a:solidFill>
-                  <a:srgbClr val="DC2626"/>
-                </a:solidFill>
-                <a:latin typeface="Calibri"/>
-              </a:rPr>
-              <a:t>-9.8%</a:t>
-            </a:r>
-          </a:p>
-        </p:txBody>
-      </p:sp>
-      <p:sp>
-        <p:nvSpPr>
-          <p:cNvPr id="52" name="Rectangle 51"/>
-          <p:cNvSpPr/>
-          <p:nvPr/>
-        </p:nvSpPr>
-        <p:spPr>
-          <a:xfrm>
-            <a:off x="274320" y="5221224"/>
-            <a:ext cx="11704320" cy="548640"/>
-          </a:xfrm>
-          <a:prstGeom prst="rect">
-            <a:avLst/>
-          </a:prstGeom>
-          <a:solidFill>
-            <a:srgbClr val="E2E8F0"/>
-          </a:solidFill>
-          <a:ln>
-            <a:noFill/>
-          </a:ln>
-        </p:spPr>
-        <p:style>
-          <a:lnRef idx="1">
-            <a:schemeClr val="accent1"/>
-          </a:lnRef>
-          <a:fillRef idx="3">
-            <a:schemeClr val="accent1"/>
-          </a:fillRef>
-          <a:effectRef idx="2">
-            <a:schemeClr val="accent1"/>
-          </a:effectRef>
-          <a:fontRef idx="minor">
-            <a:schemeClr val="lt1"/>
-          </a:fontRef>
-        </p:style>
-        <p:txBody>
-          <a:bodyPr rtlCol="0" anchor="ctr"/>
-          <a:lstStyle/>
-          <a:p>
-            <a:pPr algn="ctr"/>
-          </a:p>
-        </p:txBody>
-      </p:sp>
-      <p:sp>
-        <p:nvSpPr>
-          <p:cNvPr id="53" name="Rectangle 52"/>
-          <p:cNvSpPr/>
-          <p:nvPr/>
-        </p:nvSpPr>
-        <p:spPr>
-          <a:xfrm>
-            <a:off x="274320" y="5221224"/>
-            <a:ext cx="54864" cy="548640"/>
-          </a:xfrm>
-          <a:prstGeom prst="rect">
-            <a:avLst/>
-          </a:prstGeom>
-          <a:solidFill>
-            <a:srgbClr val="1C7293"/>
-          </a:solidFill>
-          <a:ln>
-            <a:noFill/>
-          </a:ln>
-        </p:spPr>
-        <p:style>
-          <a:lnRef idx="1">
-            <a:schemeClr val="accent1"/>
-          </a:lnRef>
-          <a:fillRef idx="3">
-            <a:schemeClr val="accent1"/>
-          </a:fillRef>
-          <a:effectRef idx="2">
-            <a:schemeClr val="accent1"/>
-          </a:effectRef>
-          <a:fontRef idx="minor">
-            <a:schemeClr val="lt1"/>
-          </a:fontRef>
-        </p:style>
-        <p:txBody>
-          <a:bodyPr rtlCol="0" anchor="ctr"/>
-          <a:lstStyle/>
-          <a:p>
-            <a:pPr algn="ctr"/>
-          </a:p>
-        </p:txBody>
-      </p:sp>
-      <p:sp>
-        <p:nvSpPr>
-          <p:cNvPr id="54" name="TextBox 53"/>
-          <p:cNvSpPr txBox="1"/>
-          <p:nvPr/>
-        </p:nvSpPr>
-        <p:spPr>
-          <a:xfrm>
-            <a:off x="502920" y="5248656"/>
-            <a:ext cx="3017520" cy="502920"/>
-          </a:xfrm>
-          <a:prstGeom prst="rect">
-            <a:avLst/>
-          </a:prstGeom>
-          <a:noFill/>
-        </p:spPr>
-        <p:txBody>
-          <a:bodyPr wrap="square" lIns="0" rIns="0" tIns="0" bIns="0">
-            <a:spAutoFit/>
-          </a:bodyPr>
-          <a:lstStyle/>
-          <a:p>
-            <a:pPr algn="l"/>
-            <a:r>
-              <a:rPr sz="1200" b="1" i="0">
-                <a:solidFill>
-                  <a:srgbClr val="1E293B"/>
-                </a:solidFill>
-                <a:latin typeface="Calibri"/>
-              </a:rPr>
-              <a:t>Hi-Engage %</a:t>
-            </a:r>
-          </a:p>
-        </p:txBody>
-      </p:sp>
-      <p:sp>
-        <p:nvSpPr>
-          <p:cNvPr id="55" name="TextBox 54"/>
-          <p:cNvSpPr txBox="1"/>
-          <p:nvPr/>
-        </p:nvSpPr>
-        <p:spPr>
-          <a:xfrm>
-            <a:off x="3657600" y="5248656"/>
-            <a:ext cx="2286000" cy="502920"/>
-          </a:xfrm>
-          <a:prstGeom prst="rect">
-            <a:avLst/>
-          </a:prstGeom>
-          <a:noFill/>
-        </p:spPr>
-        <p:txBody>
-          <a:bodyPr wrap="square" lIns="0" rIns="0" tIns="0" bIns="0">
-            <a:spAutoFit/>
-          </a:bodyPr>
-          <a:lstStyle/>
-          <a:p>
-            <a:pPr algn="ctr"/>
-            <a:r>
-              <a:rPr sz="2000" b="1" i="0">
-                <a:solidFill>
-                  <a:srgbClr val="065A82"/>
-                </a:solidFill>
-                <a:latin typeface="Calibri"/>
-              </a:rPr>
-              <a:t>7.6%</a:t>
-            </a:r>
-          </a:p>
-        </p:txBody>
-      </p:sp>
-      <p:sp>
-        <p:nvSpPr>
-          <p:cNvPr id="56" name="TextBox 55"/>
-          <p:cNvSpPr txBox="1"/>
-          <p:nvPr/>
-        </p:nvSpPr>
-        <p:spPr>
-          <a:xfrm>
-            <a:off x="6126480" y="5248656"/>
-            <a:ext cx="2286000" cy="502920"/>
-          </a:xfrm>
-          <a:prstGeom prst="rect">
-            <a:avLst/>
-          </a:prstGeom>
-          <a:noFill/>
-        </p:spPr>
-        <p:txBody>
-          <a:bodyPr wrap="square" lIns="0" rIns="0" tIns="0" bIns="0">
-            <a:spAutoFit/>
-          </a:bodyPr>
-          <a:lstStyle/>
-          <a:p>
-            <a:pPr algn="ctr"/>
-            <a:r>
-              <a:rPr sz="2000" b="1" i="0">
-                <a:solidFill>
-                  <a:srgbClr val="1C7293"/>
-                </a:solidFill>
-                <a:latin typeface="Calibri"/>
-              </a:rPr>
               <a:t>6.8%</a:t>
             </a:r>
           </a:p>
@@ -8146,70 +10051,35 @@
       </p:sp>
       <p:sp>
         <p:nvSpPr>
-          <p:cNvPr id="57" name="TextBox 56"/>
-          <p:cNvSpPr txBox="1"/>
-          <p:nvPr/>
-        </p:nvSpPr>
-        <p:spPr>
-          <a:xfrm>
-            <a:off x="8595360" y="5248656"/>
-            <a:ext cx="2651760" cy="502920"/>
-          </a:xfrm>
-          <a:prstGeom prst="rect">
-            <a:avLst/>
-          </a:prstGeom>
-          <a:noFill/>
-        </p:spPr>
-        <p:txBody>
-          <a:bodyPr wrap="square" lIns="0" rIns="0" tIns="0" bIns="0">
-            <a:spAutoFit/>
-          </a:bodyPr>
-          <a:lstStyle/>
-          <a:p>
-            <a:pPr algn="ctr"/>
-            <a:r>
-              <a:rPr sz="2000" b="1" i="0">
+          <p:cNvPr id="108" name="TextBox 107"/>
+          <p:cNvSpPr txBox="1"/>
+          <p:nvPr/>
+        </p:nvSpPr>
+        <p:spPr>
+          <a:xfrm>
+            <a:off x="9326880" y="6236208"/>
+            <a:ext cx="2468880" cy="292608"/>
+          </a:xfrm>
+          <a:prstGeom prst="rect">
+            <a:avLst/>
+          </a:prstGeom>
+          <a:noFill/>
+        </p:spPr>
+        <p:txBody>
+          <a:bodyPr wrap="square" lIns="0" rIns="0" tIns="0" bIns="0">
+            <a:spAutoFit/>
+          </a:bodyPr>
+          <a:lstStyle/>
+          <a:p>
+            <a:pPr algn="ctr"/>
+            <a:r>
+              <a:rPr sz="1400" b="1" i="0">
                 <a:solidFill>
                   <a:srgbClr val="D97706"/>
                 </a:solidFill>
                 <a:latin typeface="Calibri"/>
               </a:rPr>
               <a:t>-0.8pp</a:t>
-            </a:r>
-          </a:p>
-        </p:txBody>
-      </p:sp>
-      <p:sp>
-        <p:nvSpPr>
-          <p:cNvPr id="58" name="TextBox 57"/>
-          <p:cNvSpPr txBox="1"/>
-          <p:nvPr/>
-        </p:nvSpPr>
-        <p:spPr>
-          <a:xfrm>
-            <a:off x="274320" y="6172200"/>
-            <a:ext cx="10972800" cy="411480"/>
-          </a:xfrm>
-          <a:prstGeom prst="rect">
-            <a:avLst/>
-          </a:prstGeom>
-          <a:noFill/>
-        </p:spPr>
-        <p:txBody>
-          <a:bodyPr wrap="square" lIns="0" rIns="0" tIns="0" bIns="0">
-            <a:spAutoFit/>
-          </a:bodyPr>
-          <a:lstStyle/>
-          <a:p>
-            <a:pPr algn="l"/>
-            <a:r>
-              <a:rPr sz="1100" b="0" i="1">
-                <a:solidFill>
-                  <a:srgbClr val="64748B"/>
-                </a:solidFill>
-                <a:latin typeface="Calibri"/>
-              </a:rPr>
-              <a:t>★ Avg daily PVs: Jan 13,646  |  Feb 14,114  (+3.4% day-over-day normalized)  |  solidigm.com domain only</a:t>
             </a:r>
           </a:p>
         </p:txBody>
@@ -8580,7 +10450,190 @@
         <p:spPr>
           <a:xfrm>
             <a:off x="457200" y="1691640"/>
-            <a:ext cx="5120640" cy="594360"/>
+            <a:ext cx="5120640" cy="256032"/>
+          </a:xfrm>
+          <a:prstGeom prst="rect">
+            <a:avLst/>
+          </a:prstGeom>
+          <a:solidFill>
+            <a:srgbClr val="1C7293"/>
+          </a:solidFill>
+          <a:ln>
+            <a:noFill/>
+          </a:ln>
+        </p:spPr>
+        <p:style>
+          <a:lnRef idx="1">
+            <a:schemeClr val="accent1"/>
+          </a:lnRef>
+          <a:fillRef idx="3">
+            <a:schemeClr val="accent1"/>
+          </a:fillRef>
+          <a:effectRef idx="2">
+            <a:schemeClr val="accent1"/>
+          </a:effectRef>
+          <a:fontRef idx="minor">
+            <a:schemeClr val="lt1"/>
+          </a:fontRef>
+        </p:style>
+        <p:txBody>
+          <a:bodyPr rtlCol="0" anchor="ctr"/>
+          <a:lstStyle/>
+          <a:p>
+            <a:pPr algn="ctr"/>
+          </a:p>
+        </p:txBody>
+      </p:sp>
+      <p:sp>
+        <p:nvSpPr>
+          <p:cNvPr id="12" name="TextBox 11"/>
+          <p:cNvSpPr txBox="1"/>
+          <p:nvPr/>
+        </p:nvSpPr>
+        <p:spPr>
+          <a:xfrm>
+            <a:off x="594360" y="1709928"/>
+            <a:ext cx="2560320" cy="219456"/>
+          </a:xfrm>
+          <a:prstGeom prst="rect">
+            <a:avLst/>
+          </a:prstGeom>
+          <a:noFill/>
+        </p:spPr>
+        <p:txBody>
+          <a:bodyPr wrap="square" lIns="0" rIns="0" tIns="0" bIns="0">
+            <a:spAutoFit/>
+          </a:bodyPr>
+          <a:lstStyle/>
+          <a:p>
+            <a:pPr algn="l"/>
+            <a:r>
+              <a:rPr sz="900" b="1" i="0">
+                <a:solidFill>
+                  <a:srgbClr val="FFFFFF"/>
+                </a:solidFill>
+                <a:latin typeface="Calibri"/>
+              </a:rPr>
+              <a:t>NON-PAID</a:t>
+            </a:r>
+          </a:p>
+        </p:txBody>
+      </p:sp>
+      <p:sp>
+        <p:nvSpPr>
+          <p:cNvPr id="13" name="TextBox 12"/>
+          <p:cNvSpPr txBox="1"/>
+          <p:nvPr/>
+        </p:nvSpPr>
+        <p:spPr>
+          <a:xfrm>
+            <a:off x="2468880" y="1709928"/>
+            <a:ext cx="914400" cy="219456"/>
+          </a:xfrm>
+          <a:prstGeom prst="rect">
+            <a:avLst/>
+          </a:prstGeom>
+          <a:noFill/>
+        </p:spPr>
+        <p:txBody>
+          <a:bodyPr wrap="square" lIns="0" rIns="0" tIns="0" bIns="0">
+            <a:spAutoFit/>
+          </a:bodyPr>
+          <a:lstStyle/>
+          <a:p>
+            <a:pPr algn="ctr"/>
+            <a:r>
+              <a:rPr sz="900" b="1" i="0">
+                <a:solidFill>
+                  <a:srgbClr val="FFFFFF"/>
+                </a:solidFill>
+                <a:latin typeface="Calibri"/>
+              </a:rPr>
+              <a:t>90.1%</a:t>
+            </a:r>
+          </a:p>
+        </p:txBody>
+      </p:sp>
+      <p:sp>
+        <p:nvSpPr>
+          <p:cNvPr id="14" name="TextBox 13"/>
+          <p:cNvSpPr txBox="1"/>
+          <p:nvPr/>
+        </p:nvSpPr>
+        <p:spPr>
+          <a:xfrm>
+            <a:off x="3566160" y="1709928"/>
+            <a:ext cx="914400" cy="219456"/>
+          </a:xfrm>
+          <a:prstGeom prst="rect">
+            <a:avLst/>
+          </a:prstGeom>
+          <a:noFill/>
+        </p:spPr>
+        <p:txBody>
+          <a:bodyPr wrap="square" lIns="0" rIns="0" tIns="0" bIns="0">
+            <a:spAutoFit/>
+          </a:bodyPr>
+          <a:lstStyle/>
+          <a:p>
+            <a:pPr algn="ctr"/>
+            <a:r>
+              <a:rPr sz="900" b="1" i="0">
+                <a:solidFill>
+                  <a:srgbClr val="FFFFFF"/>
+                </a:solidFill>
+                <a:latin typeface="Calibri"/>
+              </a:rPr>
+              <a:t>84.2%</a:t>
+            </a:r>
+          </a:p>
+        </p:txBody>
+      </p:sp>
+      <p:sp>
+        <p:nvSpPr>
+          <p:cNvPr id="15" name="TextBox 14"/>
+          <p:cNvSpPr txBox="1"/>
+          <p:nvPr/>
+        </p:nvSpPr>
+        <p:spPr>
+          <a:xfrm>
+            <a:off x="4572000" y="1709928"/>
+            <a:ext cx="822960" cy="219456"/>
+          </a:xfrm>
+          <a:prstGeom prst="rect">
+            <a:avLst/>
+          </a:prstGeom>
+          <a:noFill/>
+        </p:spPr>
+        <p:txBody>
+          <a:bodyPr wrap="square" lIns="0" rIns="0" tIns="0" bIns="0">
+            <a:spAutoFit/>
+          </a:bodyPr>
+          <a:lstStyle/>
+          <a:p>
+            <a:pPr algn="ctr"/>
+            <a:r>
+              <a:rPr sz="900" b="1" i="0">
+                <a:solidFill>
+                  <a:srgbClr val="F5A623"/>
+                </a:solidFill>
+                <a:latin typeface="Calibri"/>
+              </a:rPr>
+              <a:t>-5.9</a:t>
+            </a:r>
+          </a:p>
+        </p:txBody>
+      </p:sp>
+      <p:sp>
+        <p:nvSpPr>
+          <p:cNvPr id="16" name="Rectangle 15"/>
+          <p:cNvSpPr/>
+          <p:nvPr/>
+        </p:nvSpPr>
+        <p:spPr>
+          <a:xfrm>
+            <a:off x="457200" y="1965960"/>
+            <a:ext cx="5120640" cy="502920"/>
           </a:xfrm>
           <a:prstGeom prst="rect">
             <a:avLst/>
@@ -8616,14 +10669,14 @@
       </p:sp>
       <p:sp>
         <p:nvSpPr>
-          <p:cNvPr id="12" name="TextBox 11"/>
-          <p:cNvSpPr txBox="1"/>
-          <p:nvPr/>
-        </p:nvSpPr>
-        <p:spPr>
-          <a:xfrm>
-            <a:off x="594360" y="1783080"/>
-            <a:ext cx="1828800" cy="411480"/>
+          <p:cNvPr id="17" name="TextBox 16"/>
+          <p:cNvSpPr txBox="1"/>
+          <p:nvPr/>
+        </p:nvSpPr>
+        <p:spPr>
+          <a:xfrm>
+            <a:off x="594360" y="2039112"/>
+            <a:ext cx="1828800" cy="365760"/>
           </a:xfrm>
           <a:prstGeom prst="rect">
             <a:avLst/>
@@ -8638,47 +10691,47 @@
           <a:p>
             <a:pPr algn="l"/>
             <a:r>
-              <a:rPr sz="1100" b="0" i="0">
-                <a:solidFill>
-                  <a:srgbClr val="FFFFFF"/>
-                </a:solidFill>
-                <a:latin typeface="Calibri"/>
-              </a:rPr>
-              <a:t>Direct</a:t>
-            </a:r>
-          </a:p>
-        </p:txBody>
-      </p:sp>
-      <p:sp>
-        <p:nvSpPr>
-          <p:cNvPr id="13" name="TextBox 12"/>
-          <p:cNvSpPr txBox="1"/>
-          <p:nvPr/>
-        </p:nvSpPr>
-        <p:spPr>
-          <a:xfrm>
-            <a:off x="2468880" y="1783080"/>
-            <a:ext cx="914400" cy="411480"/>
-          </a:xfrm>
-          <a:prstGeom prst="rect">
-            <a:avLst/>
-          </a:prstGeom>
-          <a:noFill/>
-        </p:spPr>
-        <p:txBody>
-          <a:bodyPr wrap="square" lIns="0" rIns="0" tIns="0" bIns="0">
-            <a:spAutoFit/>
-          </a:bodyPr>
-          <a:lstStyle/>
-          <a:p>
-            <a:pPr algn="ctr"/>
-            <a:r>
-              <a:rPr sz="1300" b="1" i="0">
+              <a:rPr sz="1000" b="0" i="0">
                 <a:solidFill>
                   <a:srgbClr val="CADCFC"/>
                 </a:solidFill>
                 <a:latin typeface="Calibri"/>
               </a:rPr>
+              <a:t>  Direct</a:t>
+            </a:r>
+          </a:p>
+        </p:txBody>
+      </p:sp>
+      <p:sp>
+        <p:nvSpPr>
+          <p:cNvPr id="18" name="TextBox 17"/>
+          <p:cNvSpPr txBox="1"/>
+          <p:nvPr/>
+        </p:nvSpPr>
+        <p:spPr>
+          <a:xfrm>
+            <a:off x="2468880" y="2039112"/>
+            <a:ext cx="914400" cy="365760"/>
+          </a:xfrm>
+          <a:prstGeom prst="rect">
+            <a:avLst/>
+          </a:prstGeom>
+          <a:noFill/>
+        </p:spPr>
+        <p:txBody>
+          <a:bodyPr wrap="square" lIns="0" rIns="0" tIns="0" bIns="0">
+            <a:spAutoFit/>
+          </a:bodyPr>
+          <a:lstStyle/>
+          <a:p>
+            <a:pPr algn="ctr"/>
+            <a:r>
+              <a:rPr sz="1200" b="1" i="0">
+                <a:solidFill>
+                  <a:srgbClr val="CADCFC"/>
+                </a:solidFill>
+                <a:latin typeface="Calibri"/>
+              </a:rPr>
               <a:t>60.8%</a:t>
             </a:r>
           </a:p>
@@ -8686,29 +10739,29 @@
       </p:sp>
       <p:sp>
         <p:nvSpPr>
-          <p:cNvPr id="14" name="TextBox 13"/>
-          <p:cNvSpPr txBox="1"/>
-          <p:nvPr/>
-        </p:nvSpPr>
-        <p:spPr>
-          <a:xfrm>
-            <a:off x="3566160" y="1783080"/>
-            <a:ext cx="914400" cy="411480"/>
-          </a:xfrm>
-          <a:prstGeom prst="rect">
-            <a:avLst/>
-          </a:prstGeom>
-          <a:noFill/>
-        </p:spPr>
-        <p:txBody>
-          <a:bodyPr wrap="square" lIns="0" rIns="0" tIns="0" bIns="0">
-            <a:spAutoFit/>
-          </a:bodyPr>
-          <a:lstStyle/>
-          <a:p>
-            <a:pPr algn="ctr"/>
-            <a:r>
-              <a:rPr sz="1300" b="1" i="0">
+          <p:cNvPr id="19" name="TextBox 18"/>
+          <p:cNvSpPr txBox="1"/>
+          <p:nvPr/>
+        </p:nvSpPr>
+        <p:spPr>
+          <a:xfrm>
+            <a:off x="3566160" y="2039112"/>
+            <a:ext cx="914400" cy="365760"/>
+          </a:xfrm>
+          <a:prstGeom prst="rect">
+            <a:avLst/>
+          </a:prstGeom>
+          <a:noFill/>
+        </p:spPr>
+        <p:txBody>
+          <a:bodyPr wrap="square" lIns="0" rIns="0" tIns="0" bIns="0">
+            <a:spAutoFit/>
+          </a:bodyPr>
+          <a:lstStyle/>
+          <a:p>
+            <a:pPr algn="ctr"/>
+            <a:r>
+              <a:rPr sz="1200" b="1" i="0">
                 <a:solidFill>
                   <a:srgbClr val="CADCFC"/>
                 </a:solidFill>
@@ -8721,29 +10774,29 @@
       </p:sp>
       <p:sp>
         <p:nvSpPr>
-          <p:cNvPr id="15" name="TextBox 14"/>
-          <p:cNvSpPr txBox="1"/>
-          <p:nvPr/>
-        </p:nvSpPr>
-        <p:spPr>
-          <a:xfrm>
-            <a:off x="4572000" y="1783080"/>
-            <a:ext cx="822960" cy="411480"/>
-          </a:xfrm>
-          <a:prstGeom prst="rect">
-            <a:avLst/>
-          </a:prstGeom>
-          <a:noFill/>
-        </p:spPr>
-        <p:txBody>
-          <a:bodyPr wrap="square" lIns="0" rIns="0" tIns="0" bIns="0">
-            <a:spAutoFit/>
-          </a:bodyPr>
-          <a:lstStyle/>
-          <a:p>
-            <a:pPr algn="ctr"/>
-            <a:r>
-              <a:rPr sz="1300" b="1" i="0">
+          <p:cNvPr id="20" name="TextBox 19"/>
+          <p:cNvSpPr txBox="1"/>
+          <p:nvPr/>
+        </p:nvSpPr>
+        <p:spPr>
+          <a:xfrm>
+            <a:off x="4572000" y="2039112"/>
+            <a:ext cx="822960" cy="365760"/>
+          </a:xfrm>
+          <a:prstGeom prst="rect">
+            <a:avLst/>
+          </a:prstGeom>
+          <a:noFill/>
+        </p:spPr>
+        <p:txBody>
+          <a:bodyPr wrap="square" lIns="0" rIns="0" tIns="0" bIns="0">
+            <a:spAutoFit/>
+          </a:bodyPr>
+          <a:lstStyle/>
+          <a:p>
+            <a:pPr algn="ctr"/>
+            <a:r>
+              <a:rPr sz="1200" b="1" i="0">
                 <a:solidFill>
                   <a:srgbClr val="DC2626"/>
                 </a:solidFill>
@@ -8756,14 +10809,14 @@
       </p:sp>
       <p:sp>
         <p:nvSpPr>
-          <p:cNvPr id="16" name="Rectangle 15"/>
+          <p:cNvPr id="21" name="Rectangle 20"/>
           <p:cNvSpPr/>
           <p:nvPr/>
         </p:nvSpPr>
         <p:spPr>
           <a:xfrm>
-            <a:off x="457200" y="2350008"/>
-            <a:ext cx="5120640" cy="594360"/>
+            <a:off x="457200" y="2496312"/>
+            <a:ext cx="5120640" cy="502920"/>
           </a:xfrm>
           <a:prstGeom prst="rect">
             <a:avLst/>
@@ -8799,14 +10852,14 @@
       </p:sp>
       <p:sp>
         <p:nvSpPr>
-          <p:cNvPr id="17" name="TextBox 16"/>
-          <p:cNvSpPr txBox="1"/>
-          <p:nvPr/>
-        </p:nvSpPr>
-        <p:spPr>
-          <a:xfrm>
-            <a:off x="594360" y="2441448"/>
-            <a:ext cx="1828800" cy="411480"/>
+          <p:cNvPr id="22" name="TextBox 21"/>
+          <p:cNvSpPr txBox="1"/>
+          <p:nvPr/>
+        </p:nvSpPr>
+        <p:spPr>
+          <a:xfrm>
+            <a:off x="594360" y="2569464"/>
+            <a:ext cx="1828800" cy="365760"/>
           </a:xfrm>
           <a:prstGeom prst="rect">
             <a:avLst/>
@@ -8821,47 +10874,47 @@
           <a:p>
             <a:pPr algn="l"/>
             <a:r>
-              <a:rPr sz="1100" b="0" i="0">
-                <a:solidFill>
-                  <a:srgbClr val="FFFFFF"/>
-                </a:solidFill>
-                <a:latin typeface="Calibri"/>
-              </a:rPr>
-              <a:t>Organic Search</a:t>
-            </a:r>
-          </a:p>
-        </p:txBody>
-      </p:sp>
-      <p:sp>
-        <p:nvSpPr>
-          <p:cNvPr id="18" name="TextBox 17"/>
-          <p:cNvSpPr txBox="1"/>
-          <p:nvPr/>
-        </p:nvSpPr>
-        <p:spPr>
-          <a:xfrm>
-            <a:off x="2468880" y="2441448"/>
-            <a:ext cx="914400" cy="411480"/>
-          </a:xfrm>
-          <a:prstGeom prst="rect">
-            <a:avLst/>
-          </a:prstGeom>
-          <a:noFill/>
-        </p:spPr>
-        <p:txBody>
-          <a:bodyPr wrap="square" lIns="0" rIns="0" tIns="0" bIns="0">
-            <a:spAutoFit/>
-          </a:bodyPr>
-          <a:lstStyle/>
-          <a:p>
-            <a:pPr algn="ctr"/>
-            <a:r>
-              <a:rPr sz="1300" b="1" i="0">
+              <a:rPr sz="1000" b="0" i="0">
                 <a:solidFill>
                   <a:srgbClr val="CADCFC"/>
                 </a:solidFill>
                 <a:latin typeface="Calibri"/>
               </a:rPr>
+              <a:t>  Organic Search</a:t>
+            </a:r>
+          </a:p>
+        </p:txBody>
+      </p:sp>
+      <p:sp>
+        <p:nvSpPr>
+          <p:cNvPr id="23" name="TextBox 22"/>
+          <p:cNvSpPr txBox="1"/>
+          <p:nvPr/>
+        </p:nvSpPr>
+        <p:spPr>
+          <a:xfrm>
+            <a:off x="2468880" y="2569464"/>
+            <a:ext cx="914400" cy="365760"/>
+          </a:xfrm>
+          <a:prstGeom prst="rect">
+            <a:avLst/>
+          </a:prstGeom>
+          <a:noFill/>
+        </p:spPr>
+        <p:txBody>
+          <a:bodyPr wrap="square" lIns="0" rIns="0" tIns="0" bIns="0">
+            <a:spAutoFit/>
+          </a:bodyPr>
+          <a:lstStyle/>
+          <a:p>
+            <a:pPr algn="ctr"/>
+            <a:r>
+              <a:rPr sz="1200" b="1" i="0">
+                <a:solidFill>
+                  <a:srgbClr val="CADCFC"/>
+                </a:solidFill>
+                <a:latin typeface="Calibri"/>
+              </a:rPr>
               <a:t>13.9%</a:t>
             </a:r>
           </a:p>
@@ -8869,29 +10922,29 @@
       </p:sp>
       <p:sp>
         <p:nvSpPr>
-          <p:cNvPr id="19" name="TextBox 18"/>
-          <p:cNvSpPr txBox="1"/>
-          <p:nvPr/>
-        </p:nvSpPr>
-        <p:spPr>
-          <a:xfrm>
-            <a:off x="3566160" y="2441448"/>
-            <a:ext cx="914400" cy="411480"/>
-          </a:xfrm>
-          <a:prstGeom prst="rect">
-            <a:avLst/>
-          </a:prstGeom>
-          <a:noFill/>
-        </p:spPr>
-        <p:txBody>
-          <a:bodyPr wrap="square" lIns="0" rIns="0" tIns="0" bIns="0">
-            <a:spAutoFit/>
-          </a:bodyPr>
-          <a:lstStyle/>
-          <a:p>
-            <a:pPr algn="ctr"/>
-            <a:r>
-              <a:rPr sz="1300" b="1" i="0">
+          <p:cNvPr id="24" name="TextBox 23"/>
+          <p:cNvSpPr txBox="1"/>
+          <p:nvPr/>
+        </p:nvSpPr>
+        <p:spPr>
+          <a:xfrm>
+            <a:off x="3566160" y="2569464"/>
+            <a:ext cx="914400" cy="365760"/>
+          </a:xfrm>
+          <a:prstGeom prst="rect">
+            <a:avLst/>
+          </a:prstGeom>
+          <a:noFill/>
+        </p:spPr>
+        <p:txBody>
+          <a:bodyPr wrap="square" lIns="0" rIns="0" tIns="0" bIns="0">
+            <a:spAutoFit/>
+          </a:bodyPr>
+          <a:lstStyle/>
+          <a:p>
+            <a:pPr algn="ctr"/>
+            <a:r>
+              <a:rPr sz="1200" b="1" i="0">
                 <a:solidFill>
                   <a:srgbClr val="CADCFC"/>
                 </a:solidFill>
@@ -8904,29 +10957,29 @@
       </p:sp>
       <p:sp>
         <p:nvSpPr>
-          <p:cNvPr id="20" name="TextBox 19"/>
-          <p:cNvSpPr txBox="1"/>
-          <p:nvPr/>
-        </p:nvSpPr>
-        <p:spPr>
-          <a:xfrm>
-            <a:off x="4572000" y="2441448"/>
-            <a:ext cx="822960" cy="411480"/>
-          </a:xfrm>
-          <a:prstGeom prst="rect">
-            <a:avLst/>
-          </a:prstGeom>
-          <a:noFill/>
-        </p:spPr>
-        <p:txBody>
-          <a:bodyPr wrap="square" lIns="0" rIns="0" tIns="0" bIns="0">
-            <a:spAutoFit/>
-          </a:bodyPr>
-          <a:lstStyle/>
-          <a:p>
-            <a:pPr algn="ctr"/>
-            <a:r>
-              <a:rPr sz="1300" b="1" i="0">
+          <p:cNvPr id="25" name="TextBox 24"/>
+          <p:cNvSpPr txBox="1"/>
+          <p:nvPr/>
+        </p:nvSpPr>
+        <p:spPr>
+          <a:xfrm>
+            <a:off x="4572000" y="2569464"/>
+            <a:ext cx="822960" cy="365760"/>
+          </a:xfrm>
+          <a:prstGeom prst="rect">
+            <a:avLst/>
+          </a:prstGeom>
+          <a:noFill/>
+        </p:spPr>
+        <p:txBody>
+          <a:bodyPr wrap="square" lIns="0" rIns="0" tIns="0" bIns="0">
+            <a:spAutoFit/>
+          </a:bodyPr>
+          <a:lstStyle/>
+          <a:p>
+            <a:pPr algn="ctr"/>
+            <a:r>
+              <a:rPr sz="1200" b="1" i="0">
                 <a:solidFill>
                   <a:srgbClr val="D97706"/>
                 </a:solidFill>
@@ -8939,14 +10992,14 @@
       </p:sp>
       <p:sp>
         <p:nvSpPr>
-          <p:cNvPr id="21" name="Rectangle 20"/>
+          <p:cNvPr id="26" name="Rectangle 25"/>
           <p:cNvSpPr/>
           <p:nvPr/>
         </p:nvSpPr>
         <p:spPr>
           <a:xfrm>
-            <a:off x="457200" y="3008376"/>
-            <a:ext cx="5120640" cy="594360"/>
+            <a:off x="457200" y="3026663"/>
+            <a:ext cx="5120640" cy="502920"/>
           </a:xfrm>
           <a:prstGeom prst="rect">
             <a:avLst/>
@@ -8982,14 +11035,14 @@
       </p:sp>
       <p:sp>
         <p:nvSpPr>
-          <p:cNvPr id="22" name="TextBox 21"/>
-          <p:cNvSpPr txBox="1"/>
-          <p:nvPr/>
-        </p:nvSpPr>
-        <p:spPr>
-          <a:xfrm>
-            <a:off x="594360" y="3099816"/>
-            <a:ext cx="1828800" cy="411480"/>
+          <p:cNvPr id="27" name="TextBox 26"/>
+          <p:cNvSpPr txBox="1"/>
+          <p:nvPr/>
+        </p:nvSpPr>
+        <p:spPr>
+          <a:xfrm>
+            <a:off x="594360" y="3099815"/>
+            <a:ext cx="1828800" cy="365760"/>
           </a:xfrm>
           <a:prstGeom prst="rect">
             <a:avLst/>
@@ -9004,47 +11057,47 @@
           <a:p>
             <a:pPr algn="l"/>
             <a:r>
-              <a:rPr sz="1100" b="0" i="0">
-                <a:solidFill>
-                  <a:srgbClr val="FFFFFF"/>
-                </a:solidFill>
-                <a:latin typeface="Calibri"/>
-              </a:rPr>
-              <a:t>Referral</a:t>
-            </a:r>
-          </a:p>
-        </p:txBody>
-      </p:sp>
-      <p:sp>
-        <p:nvSpPr>
-          <p:cNvPr id="23" name="TextBox 22"/>
-          <p:cNvSpPr txBox="1"/>
-          <p:nvPr/>
-        </p:nvSpPr>
-        <p:spPr>
-          <a:xfrm>
-            <a:off x="2468880" y="3099816"/>
-            <a:ext cx="914400" cy="411480"/>
-          </a:xfrm>
-          <a:prstGeom prst="rect">
-            <a:avLst/>
-          </a:prstGeom>
-          <a:noFill/>
-        </p:spPr>
-        <p:txBody>
-          <a:bodyPr wrap="square" lIns="0" rIns="0" tIns="0" bIns="0">
-            <a:spAutoFit/>
-          </a:bodyPr>
-          <a:lstStyle/>
-          <a:p>
-            <a:pPr algn="ctr"/>
-            <a:r>
-              <a:rPr sz="1300" b="1" i="0">
+              <a:rPr sz="1000" b="0" i="0">
                 <a:solidFill>
                   <a:srgbClr val="CADCFC"/>
                 </a:solidFill>
                 <a:latin typeface="Calibri"/>
               </a:rPr>
+              <a:t>  Referral</a:t>
+            </a:r>
+          </a:p>
+        </p:txBody>
+      </p:sp>
+      <p:sp>
+        <p:nvSpPr>
+          <p:cNvPr id="28" name="TextBox 27"/>
+          <p:cNvSpPr txBox="1"/>
+          <p:nvPr/>
+        </p:nvSpPr>
+        <p:spPr>
+          <a:xfrm>
+            <a:off x="2468880" y="3099815"/>
+            <a:ext cx="914400" cy="365760"/>
+          </a:xfrm>
+          <a:prstGeom prst="rect">
+            <a:avLst/>
+          </a:prstGeom>
+          <a:noFill/>
+        </p:spPr>
+        <p:txBody>
+          <a:bodyPr wrap="square" lIns="0" rIns="0" tIns="0" bIns="0">
+            <a:spAutoFit/>
+          </a:bodyPr>
+          <a:lstStyle/>
+          <a:p>
+            <a:pPr algn="ctr"/>
+            <a:r>
+              <a:rPr sz="1200" b="1" i="0">
+                <a:solidFill>
+                  <a:srgbClr val="CADCFC"/>
+                </a:solidFill>
+                <a:latin typeface="Calibri"/>
+              </a:rPr>
               <a:t>11.7%</a:t>
             </a:r>
           </a:p>
@@ -9052,29 +11105,29 @@
       </p:sp>
       <p:sp>
         <p:nvSpPr>
-          <p:cNvPr id="24" name="TextBox 23"/>
-          <p:cNvSpPr txBox="1"/>
-          <p:nvPr/>
-        </p:nvSpPr>
-        <p:spPr>
-          <a:xfrm>
-            <a:off x="3566160" y="3099816"/>
-            <a:ext cx="914400" cy="411480"/>
-          </a:xfrm>
-          <a:prstGeom prst="rect">
-            <a:avLst/>
-          </a:prstGeom>
-          <a:noFill/>
-        </p:spPr>
-        <p:txBody>
-          <a:bodyPr wrap="square" lIns="0" rIns="0" tIns="0" bIns="0">
-            <a:spAutoFit/>
-          </a:bodyPr>
-          <a:lstStyle/>
-          <a:p>
-            <a:pPr algn="ctr"/>
-            <a:r>
-              <a:rPr sz="1300" b="1" i="0">
+          <p:cNvPr id="29" name="TextBox 28"/>
+          <p:cNvSpPr txBox="1"/>
+          <p:nvPr/>
+        </p:nvSpPr>
+        <p:spPr>
+          <a:xfrm>
+            <a:off x="3566160" y="3099815"/>
+            <a:ext cx="914400" cy="365760"/>
+          </a:xfrm>
+          <a:prstGeom prst="rect">
+            <a:avLst/>
+          </a:prstGeom>
+          <a:noFill/>
+        </p:spPr>
+        <p:txBody>
+          <a:bodyPr wrap="square" lIns="0" rIns="0" tIns="0" bIns="0">
+            <a:spAutoFit/>
+          </a:bodyPr>
+          <a:lstStyle/>
+          <a:p>
+            <a:pPr algn="ctr"/>
+            <a:r>
+              <a:rPr sz="1200" b="1" i="0">
                 <a:solidFill>
                   <a:srgbClr val="CADCFC"/>
                 </a:solidFill>
@@ -9087,29 +11140,29 @@
       </p:sp>
       <p:sp>
         <p:nvSpPr>
-          <p:cNvPr id="25" name="TextBox 24"/>
-          <p:cNvSpPr txBox="1"/>
-          <p:nvPr/>
-        </p:nvSpPr>
-        <p:spPr>
-          <a:xfrm>
-            <a:off x="4572000" y="3099816"/>
-            <a:ext cx="822960" cy="411480"/>
-          </a:xfrm>
-          <a:prstGeom prst="rect">
-            <a:avLst/>
-          </a:prstGeom>
-          <a:noFill/>
-        </p:spPr>
-        <p:txBody>
-          <a:bodyPr wrap="square" lIns="0" rIns="0" tIns="0" bIns="0">
-            <a:spAutoFit/>
-          </a:bodyPr>
-          <a:lstStyle/>
-          <a:p>
-            <a:pPr algn="ctr"/>
-            <a:r>
-              <a:rPr sz="1300" b="1" i="0">
+          <p:cNvPr id="30" name="TextBox 29"/>
+          <p:cNvSpPr txBox="1"/>
+          <p:nvPr/>
+        </p:nvSpPr>
+        <p:spPr>
+          <a:xfrm>
+            <a:off x="4572000" y="3099815"/>
+            <a:ext cx="822960" cy="365760"/>
+          </a:xfrm>
+          <a:prstGeom prst="rect">
+            <a:avLst/>
+          </a:prstGeom>
+          <a:noFill/>
+        </p:spPr>
+        <p:txBody>
+          <a:bodyPr wrap="square" lIns="0" rIns="0" tIns="0" bIns="0">
+            <a:spAutoFit/>
+          </a:bodyPr>
+          <a:lstStyle/>
+          <a:p>
+            <a:pPr algn="ctr"/>
+            <a:r>
+              <a:rPr sz="1200" b="1" i="0">
                 <a:solidFill>
                   <a:srgbClr val="059669"/>
                 </a:solidFill>
@@ -9122,14 +11175,14 @@
       </p:sp>
       <p:sp>
         <p:nvSpPr>
-          <p:cNvPr id="26" name="Rectangle 25"/>
+          <p:cNvPr id="31" name="Rectangle 30"/>
           <p:cNvSpPr/>
           <p:nvPr/>
         </p:nvSpPr>
         <p:spPr>
           <a:xfrm>
-            <a:off x="457200" y="3666744"/>
-            <a:ext cx="5120640" cy="594360"/>
+            <a:off x="457200" y="3557015"/>
+            <a:ext cx="5120640" cy="502920"/>
           </a:xfrm>
           <a:prstGeom prst="rect">
             <a:avLst/>
@@ -9165,14 +11218,14 @@
       </p:sp>
       <p:sp>
         <p:nvSpPr>
-          <p:cNvPr id="27" name="TextBox 26"/>
-          <p:cNvSpPr txBox="1"/>
-          <p:nvPr/>
-        </p:nvSpPr>
-        <p:spPr>
-          <a:xfrm>
-            <a:off x="594360" y="3758183"/>
-            <a:ext cx="1828800" cy="411480"/>
+          <p:cNvPr id="32" name="TextBox 31"/>
+          <p:cNvSpPr txBox="1"/>
+          <p:nvPr/>
+        </p:nvSpPr>
+        <p:spPr>
+          <a:xfrm>
+            <a:off x="594360" y="3630168"/>
+            <a:ext cx="1828800" cy="365760"/>
           </a:xfrm>
           <a:prstGeom prst="rect">
             <a:avLst/>
@@ -9187,44 +11240,227 @@
           <a:p>
             <a:pPr algn="l"/>
             <a:r>
-              <a:rPr sz="1100" b="0" i="0">
+              <a:rPr sz="1000" b="0" i="0">
+                <a:solidFill>
+                  <a:srgbClr val="CADCFC"/>
+                </a:solidFill>
+                <a:latin typeface="Calibri"/>
+              </a:rPr>
+              <a:t>  Social</a:t>
+            </a:r>
+          </a:p>
+        </p:txBody>
+      </p:sp>
+      <p:sp>
+        <p:nvSpPr>
+          <p:cNvPr id="33" name="TextBox 32"/>
+          <p:cNvSpPr txBox="1"/>
+          <p:nvPr/>
+        </p:nvSpPr>
+        <p:spPr>
+          <a:xfrm>
+            <a:off x="2468880" y="3630168"/>
+            <a:ext cx="914400" cy="365760"/>
+          </a:xfrm>
+          <a:prstGeom prst="rect">
+            <a:avLst/>
+          </a:prstGeom>
+          <a:noFill/>
+        </p:spPr>
+        <p:txBody>
+          <a:bodyPr wrap="square" lIns="0" rIns="0" tIns="0" bIns="0">
+            <a:spAutoFit/>
+          </a:bodyPr>
+          <a:lstStyle/>
+          <a:p>
+            <a:pPr algn="ctr"/>
+            <a:r>
+              <a:rPr sz="1200" b="1" i="0">
+                <a:solidFill>
+                  <a:srgbClr val="CADCFC"/>
+                </a:solidFill>
+                <a:latin typeface="Calibri"/>
+              </a:rPr>
+              <a:t> 3.7%</a:t>
+            </a:r>
+          </a:p>
+        </p:txBody>
+      </p:sp>
+      <p:sp>
+        <p:nvSpPr>
+          <p:cNvPr id="34" name="TextBox 33"/>
+          <p:cNvSpPr txBox="1"/>
+          <p:nvPr/>
+        </p:nvSpPr>
+        <p:spPr>
+          <a:xfrm>
+            <a:off x="3566160" y="3630168"/>
+            <a:ext cx="914400" cy="365760"/>
+          </a:xfrm>
+          <a:prstGeom prst="rect">
+            <a:avLst/>
+          </a:prstGeom>
+          <a:noFill/>
+        </p:spPr>
+        <p:txBody>
+          <a:bodyPr wrap="square" lIns="0" rIns="0" tIns="0" bIns="0">
+            <a:spAutoFit/>
+          </a:bodyPr>
+          <a:lstStyle/>
+          <a:p>
+            <a:pPr algn="ctr"/>
+            <a:r>
+              <a:rPr sz="1200" b="1" i="0">
+                <a:solidFill>
+                  <a:srgbClr val="CADCFC"/>
+                </a:solidFill>
+                <a:latin typeface="Calibri"/>
+              </a:rPr>
+              <a:t> 2.3%</a:t>
+            </a:r>
+          </a:p>
+        </p:txBody>
+      </p:sp>
+      <p:sp>
+        <p:nvSpPr>
+          <p:cNvPr id="35" name="TextBox 34"/>
+          <p:cNvSpPr txBox="1"/>
+          <p:nvPr/>
+        </p:nvSpPr>
+        <p:spPr>
+          <a:xfrm>
+            <a:off x="4572000" y="3630168"/>
+            <a:ext cx="822960" cy="365760"/>
+          </a:xfrm>
+          <a:prstGeom prst="rect">
+            <a:avLst/>
+          </a:prstGeom>
+          <a:noFill/>
+        </p:spPr>
+        <p:txBody>
+          <a:bodyPr wrap="square" lIns="0" rIns="0" tIns="0" bIns="0">
+            <a:spAutoFit/>
+          </a:bodyPr>
+          <a:lstStyle/>
+          <a:p>
+            <a:pPr algn="ctr"/>
+            <a:r>
+              <a:rPr sz="1200" b="1" i="0">
+                <a:solidFill>
+                  <a:srgbClr val="DC2626"/>
+                </a:solidFill>
+                <a:latin typeface="Calibri"/>
+              </a:rPr>
+              <a:t>-1.4</a:t>
+            </a:r>
+          </a:p>
+        </p:txBody>
+      </p:sp>
+      <p:sp>
+        <p:nvSpPr>
+          <p:cNvPr id="36" name="Rectangle 35"/>
+          <p:cNvSpPr/>
+          <p:nvPr/>
+        </p:nvSpPr>
+        <p:spPr>
+          <a:xfrm>
+            <a:off x="457200" y="4096512"/>
+            <a:ext cx="5120640" cy="256032"/>
+          </a:xfrm>
+          <a:prstGeom prst="rect">
+            <a:avLst/>
+          </a:prstGeom>
+          <a:solidFill>
+            <a:srgbClr val="DC2626"/>
+          </a:solidFill>
+          <a:ln>
+            <a:noFill/>
+          </a:ln>
+        </p:spPr>
+        <p:style>
+          <a:lnRef idx="1">
+            <a:schemeClr val="accent1"/>
+          </a:lnRef>
+          <a:fillRef idx="3">
+            <a:schemeClr val="accent1"/>
+          </a:fillRef>
+          <a:effectRef idx="2">
+            <a:schemeClr val="accent1"/>
+          </a:effectRef>
+          <a:fontRef idx="minor">
+            <a:schemeClr val="lt1"/>
+          </a:fontRef>
+        </p:style>
+        <p:txBody>
+          <a:bodyPr rtlCol="0" anchor="ctr"/>
+          <a:lstStyle/>
+          <a:p>
+            <a:pPr algn="ctr"/>
+          </a:p>
+        </p:txBody>
+      </p:sp>
+      <p:sp>
+        <p:nvSpPr>
+          <p:cNvPr id="37" name="TextBox 36"/>
+          <p:cNvSpPr txBox="1"/>
+          <p:nvPr/>
+        </p:nvSpPr>
+        <p:spPr>
+          <a:xfrm>
+            <a:off x="594360" y="4114800"/>
+            <a:ext cx="2560320" cy="219456"/>
+          </a:xfrm>
+          <a:prstGeom prst="rect">
+            <a:avLst/>
+          </a:prstGeom>
+          <a:noFill/>
+        </p:spPr>
+        <p:txBody>
+          <a:bodyPr wrap="square" lIns="0" rIns="0" tIns="0" bIns="0">
+            <a:spAutoFit/>
+          </a:bodyPr>
+          <a:lstStyle/>
+          <a:p>
+            <a:pPr algn="l"/>
+            <a:r>
+              <a:rPr sz="900" b="1" i="0">
                 <a:solidFill>
                   <a:srgbClr val="FFFFFF"/>
                 </a:solidFill>
                 <a:latin typeface="Calibri"/>
               </a:rPr>
-              <a:t>Paid / Display</a:t>
-            </a:r>
-          </a:p>
-        </p:txBody>
-      </p:sp>
-      <p:sp>
-        <p:nvSpPr>
-          <p:cNvPr id="28" name="TextBox 27"/>
-          <p:cNvSpPr txBox="1"/>
-          <p:nvPr/>
-        </p:nvSpPr>
-        <p:spPr>
-          <a:xfrm>
-            <a:off x="2468880" y="3758183"/>
-            <a:ext cx="914400" cy="411480"/>
-          </a:xfrm>
-          <a:prstGeom prst="rect">
-            <a:avLst/>
-          </a:prstGeom>
-          <a:noFill/>
-        </p:spPr>
-        <p:txBody>
-          <a:bodyPr wrap="square" lIns="0" rIns="0" tIns="0" bIns="0">
-            <a:spAutoFit/>
-          </a:bodyPr>
-          <a:lstStyle/>
-          <a:p>
-            <a:pPr algn="ctr"/>
-            <a:r>
-              <a:rPr sz="1300" b="1" i="0">
-                <a:solidFill>
-                  <a:srgbClr val="CADCFC"/>
+              <a:t>PAID (Paid-Display)</a:t>
+            </a:r>
+          </a:p>
+        </p:txBody>
+      </p:sp>
+      <p:sp>
+        <p:nvSpPr>
+          <p:cNvPr id="38" name="TextBox 37"/>
+          <p:cNvSpPr txBox="1"/>
+          <p:nvPr/>
+        </p:nvSpPr>
+        <p:spPr>
+          <a:xfrm>
+            <a:off x="2468880" y="4114800"/>
+            <a:ext cx="914400" cy="219456"/>
+          </a:xfrm>
+          <a:prstGeom prst="rect">
+            <a:avLst/>
+          </a:prstGeom>
+          <a:noFill/>
+        </p:spPr>
+        <p:txBody>
+          <a:bodyPr wrap="square" lIns="0" rIns="0" tIns="0" bIns="0">
+            <a:spAutoFit/>
+          </a:bodyPr>
+          <a:lstStyle/>
+          <a:p>
+            <a:pPr algn="ctr"/>
+            <a:r>
+              <a:rPr sz="900" b="1" i="0">
+                <a:solidFill>
+                  <a:srgbClr val="FFFFFF"/>
                 </a:solidFill>
                 <a:latin typeface="Calibri"/>
               </a:rPr>
@@ -9235,31 +11471,31 @@
       </p:sp>
       <p:sp>
         <p:nvSpPr>
-          <p:cNvPr id="29" name="TextBox 28"/>
-          <p:cNvSpPr txBox="1"/>
-          <p:nvPr/>
-        </p:nvSpPr>
-        <p:spPr>
-          <a:xfrm>
-            <a:off x="3566160" y="3758183"/>
-            <a:ext cx="914400" cy="411480"/>
-          </a:xfrm>
-          <a:prstGeom prst="rect">
-            <a:avLst/>
-          </a:prstGeom>
-          <a:noFill/>
-        </p:spPr>
-        <p:txBody>
-          <a:bodyPr wrap="square" lIns="0" rIns="0" tIns="0" bIns="0">
-            <a:spAutoFit/>
-          </a:bodyPr>
-          <a:lstStyle/>
-          <a:p>
-            <a:pPr algn="ctr"/>
-            <a:r>
-              <a:rPr sz="1300" b="1" i="0">
-                <a:solidFill>
-                  <a:srgbClr val="CADCFC"/>
+          <p:cNvPr id="39" name="TextBox 38"/>
+          <p:cNvSpPr txBox="1"/>
+          <p:nvPr/>
+        </p:nvSpPr>
+        <p:spPr>
+          <a:xfrm>
+            <a:off x="3566160" y="4114800"/>
+            <a:ext cx="914400" cy="219456"/>
+          </a:xfrm>
+          <a:prstGeom prst="rect">
+            <a:avLst/>
+          </a:prstGeom>
+          <a:noFill/>
+        </p:spPr>
+        <p:txBody>
+          <a:bodyPr wrap="square" lIns="0" rIns="0" tIns="0" bIns="0">
+            <a:spAutoFit/>
+          </a:bodyPr>
+          <a:lstStyle/>
+          <a:p>
+            <a:pPr algn="ctr"/>
+            <a:r>
+              <a:rPr sz="900" b="1" i="0">
+                <a:solidFill>
+                  <a:srgbClr val="FFFFFF"/>
                 </a:solidFill>
                 <a:latin typeface="Calibri"/>
               </a:rPr>
@@ -9270,31 +11506,31 @@
       </p:sp>
       <p:sp>
         <p:nvSpPr>
-          <p:cNvPr id="30" name="TextBox 29"/>
-          <p:cNvSpPr txBox="1"/>
-          <p:nvPr/>
-        </p:nvSpPr>
-        <p:spPr>
-          <a:xfrm>
-            <a:off x="4572000" y="3758183"/>
-            <a:ext cx="822960" cy="411480"/>
-          </a:xfrm>
-          <a:prstGeom prst="rect">
-            <a:avLst/>
-          </a:prstGeom>
-          <a:noFill/>
-        </p:spPr>
-        <p:txBody>
-          <a:bodyPr wrap="square" lIns="0" rIns="0" tIns="0" bIns="0">
-            <a:spAutoFit/>
-          </a:bodyPr>
-          <a:lstStyle/>
-          <a:p>
-            <a:pPr algn="ctr"/>
-            <a:r>
-              <a:rPr sz="1300" b="1" i="0">
-                <a:solidFill>
-                  <a:srgbClr val="D97706"/>
+          <p:cNvPr id="40" name="TextBox 39"/>
+          <p:cNvSpPr txBox="1"/>
+          <p:nvPr/>
+        </p:nvSpPr>
+        <p:spPr>
+          <a:xfrm>
+            <a:off x="4572000" y="4114800"/>
+            <a:ext cx="822960" cy="219456"/>
+          </a:xfrm>
+          <a:prstGeom prst="rect">
+            <a:avLst/>
+          </a:prstGeom>
+          <a:noFill/>
+        </p:spPr>
+        <p:txBody>
+          <a:bodyPr wrap="square" lIns="0" rIns="0" tIns="0" bIns="0">
+            <a:spAutoFit/>
+          </a:bodyPr>
+          <a:lstStyle/>
+          <a:p>
+            <a:pPr algn="ctr"/>
+            <a:r>
+              <a:rPr sz="900" b="1" i="0">
+                <a:solidFill>
+                  <a:srgbClr val="F5A623"/>
                 </a:solidFill>
                 <a:latin typeface="Calibri"/>
               </a:rPr>
@@ -9305,14 +11541,14 @@
       </p:sp>
       <p:sp>
         <p:nvSpPr>
-          <p:cNvPr id="31" name="Rectangle 30"/>
+          <p:cNvPr id="41" name="Rectangle 40"/>
           <p:cNvSpPr/>
           <p:nvPr/>
         </p:nvSpPr>
         <p:spPr>
           <a:xfrm>
-            <a:off x="457200" y="4325112"/>
-            <a:ext cx="5120640" cy="594360"/>
+            <a:off x="457200" y="4370832"/>
+            <a:ext cx="5120640" cy="502920"/>
           </a:xfrm>
           <a:prstGeom prst="rect">
             <a:avLst/>
@@ -9348,14 +11584,14 @@
       </p:sp>
       <p:sp>
         <p:nvSpPr>
-          <p:cNvPr id="32" name="TextBox 31"/>
-          <p:cNvSpPr txBox="1"/>
-          <p:nvPr/>
-        </p:nvSpPr>
-        <p:spPr>
-          <a:xfrm>
-            <a:off x="594360" y="4416552"/>
-            <a:ext cx="1828800" cy="411480"/>
+          <p:cNvPr id="42" name="TextBox 41"/>
+          <p:cNvSpPr txBox="1"/>
+          <p:nvPr/>
+        </p:nvSpPr>
+        <p:spPr>
+          <a:xfrm>
+            <a:off x="594360" y="4443984"/>
+            <a:ext cx="1828800" cy="365760"/>
           </a:xfrm>
           <a:prstGeom prst="rect">
             <a:avLst/>
@@ -9370,125 +11606,125 @@
           <a:p>
             <a:pPr algn="l"/>
             <a:r>
-              <a:rPr sz="1100" b="0" i="0">
-                <a:solidFill>
-                  <a:srgbClr val="FFFFFF"/>
-                </a:solidFill>
-                <a:latin typeface="Calibri"/>
-              </a:rPr>
-              <a:t>Social</a:t>
-            </a:r>
-          </a:p>
-        </p:txBody>
-      </p:sp>
-      <p:sp>
-        <p:nvSpPr>
-          <p:cNvPr id="33" name="TextBox 32"/>
-          <p:cNvSpPr txBox="1"/>
-          <p:nvPr/>
-        </p:nvSpPr>
-        <p:spPr>
-          <a:xfrm>
-            <a:off x="2468880" y="4416552"/>
-            <a:ext cx="914400" cy="411480"/>
-          </a:xfrm>
-          <a:prstGeom prst="rect">
-            <a:avLst/>
-          </a:prstGeom>
-          <a:noFill/>
-        </p:spPr>
-        <p:txBody>
-          <a:bodyPr wrap="square" lIns="0" rIns="0" tIns="0" bIns="0">
-            <a:spAutoFit/>
-          </a:bodyPr>
-          <a:lstStyle/>
-          <a:p>
-            <a:pPr algn="ctr"/>
-            <a:r>
-              <a:rPr sz="1300" b="1" i="0">
+              <a:rPr sz="1000" b="0" i="0">
                 <a:solidFill>
                   <a:srgbClr val="CADCFC"/>
                 </a:solidFill>
                 <a:latin typeface="Calibri"/>
               </a:rPr>
-              <a:t> 3.7%</a:t>
-            </a:r>
-          </a:p>
-        </p:txBody>
-      </p:sp>
-      <p:sp>
-        <p:nvSpPr>
-          <p:cNvPr id="34" name="TextBox 33"/>
-          <p:cNvSpPr txBox="1"/>
-          <p:nvPr/>
-        </p:nvSpPr>
-        <p:spPr>
-          <a:xfrm>
-            <a:off x="3566160" y="4416552"/>
-            <a:ext cx="914400" cy="411480"/>
-          </a:xfrm>
-          <a:prstGeom prst="rect">
-            <a:avLst/>
-          </a:prstGeom>
-          <a:noFill/>
-        </p:spPr>
-        <p:txBody>
-          <a:bodyPr wrap="square" lIns="0" rIns="0" tIns="0" bIns="0">
-            <a:spAutoFit/>
-          </a:bodyPr>
-          <a:lstStyle/>
-          <a:p>
-            <a:pPr algn="ctr"/>
-            <a:r>
-              <a:rPr sz="1300" b="1" i="0">
+              <a:t>  Paid / Display</a:t>
+            </a:r>
+          </a:p>
+        </p:txBody>
+      </p:sp>
+      <p:sp>
+        <p:nvSpPr>
+          <p:cNvPr id="43" name="TextBox 42"/>
+          <p:cNvSpPr txBox="1"/>
+          <p:nvPr/>
+        </p:nvSpPr>
+        <p:spPr>
+          <a:xfrm>
+            <a:off x="2468880" y="4443984"/>
+            <a:ext cx="914400" cy="365760"/>
+          </a:xfrm>
+          <a:prstGeom prst="rect">
+            <a:avLst/>
+          </a:prstGeom>
+          <a:noFill/>
+        </p:spPr>
+        <p:txBody>
+          <a:bodyPr wrap="square" lIns="0" rIns="0" tIns="0" bIns="0">
+            <a:spAutoFit/>
+          </a:bodyPr>
+          <a:lstStyle/>
+          <a:p>
+            <a:pPr algn="ctr"/>
+            <a:r>
+              <a:rPr sz="1200" b="1" i="0">
                 <a:solidFill>
                   <a:srgbClr val="CADCFC"/>
                 </a:solidFill>
                 <a:latin typeface="Calibri"/>
               </a:rPr>
-              <a:t> 2.3%</a:t>
-            </a:r>
-          </a:p>
-        </p:txBody>
-      </p:sp>
-      <p:sp>
-        <p:nvSpPr>
-          <p:cNvPr id="35" name="TextBox 34"/>
-          <p:cNvSpPr txBox="1"/>
-          <p:nvPr/>
-        </p:nvSpPr>
-        <p:spPr>
-          <a:xfrm>
-            <a:off x="4572000" y="4416552"/>
-            <a:ext cx="822960" cy="411480"/>
-          </a:xfrm>
-          <a:prstGeom prst="rect">
-            <a:avLst/>
-          </a:prstGeom>
-          <a:noFill/>
-        </p:spPr>
-        <p:txBody>
-          <a:bodyPr wrap="square" lIns="0" rIns="0" tIns="0" bIns="0">
-            <a:spAutoFit/>
-          </a:bodyPr>
-          <a:lstStyle/>
-          <a:p>
-            <a:pPr algn="ctr"/>
-            <a:r>
-              <a:rPr sz="1300" b="1" i="0">
-                <a:solidFill>
-                  <a:srgbClr val="DC2626"/>
-                </a:solidFill>
-                <a:latin typeface="Calibri"/>
-              </a:rPr>
-              <a:t>-1.4</a:t>
-            </a:r>
-          </a:p>
-        </p:txBody>
-      </p:sp>
-      <p:sp>
-        <p:nvSpPr>
-          <p:cNvPr id="36" name="Rectangle 35"/>
+              <a:t> 9.9%</a:t>
+            </a:r>
+          </a:p>
+        </p:txBody>
+      </p:sp>
+      <p:sp>
+        <p:nvSpPr>
+          <p:cNvPr id="44" name="TextBox 43"/>
+          <p:cNvSpPr txBox="1"/>
+          <p:nvPr/>
+        </p:nvSpPr>
+        <p:spPr>
+          <a:xfrm>
+            <a:off x="3566160" y="4443984"/>
+            <a:ext cx="914400" cy="365760"/>
+          </a:xfrm>
+          <a:prstGeom prst="rect">
+            <a:avLst/>
+          </a:prstGeom>
+          <a:noFill/>
+        </p:spPr>
+        <p:txBody>
+          <a:bodyPr wrap="square" lIns="0" rIns="0" tIns="0" bIns="0">
+            <a:spAutoFit/>
+          </a:bodyPr>
+          <a:lstStyle/>
+          <a:p>
+            <a:pPr algn="ctr"/>
+            <a:r>
+              <a:rPr sz="1200" b="1" i="0">
+                <a:solidFill>
+                  <a:srgbClr val="CADCFC"/>
+                </a:solidFill>
+                <a:latin typeface="Calibri"/>
+              </a:rPr>
+              <a:t>15.8%</a:t>
+            </a:r>
+          </a:p>
+        </p:txBody>
+      </p:sp>
+      <p:sp>
+        <p:nvSpPr>
+          <p:cNvPr id="45" name="TextBox 44"/>
+          <p:cNvSpPr txBox="1"/>
+          <p:nvPr/>
+        </p:nvSpPr>
+        <p:spPr>
+          <a:xfrm>
+            <a:off x="4572000" y="4443984"/>
+            <a:ext cx="822960" cy="365760"/>
+          </a:xfrm>
+          <a:prstGeom prst="rect">
+            <a:avLst/>
+          </a:prstGeom>
+          <a:noFill/>
+        </p:spPr>
+        <p:txBody>
+          <a:bodyPr wrap="square" lIns="0" rIns="0" tIns="0" bIns="0">
+            <a:spAutoFit/>
+          </a:bodyPr>
+          <a:lstStyle/>
+          <a:p>
+            <a:pPr algn="ctr"/>
+            <a:r>
+              <a:rPr sz="1200" b="1" i="0">
+                <a:solidFill>
+                  <a:srgbClr val="D97706"/>
+                </a:solidFill>
+                <a:latin typeface="Calibri"/>
+              </a:rPr>
+              <a:t>+5.9</a:t>
+            </a:r>
+          </a:p>
+        </p:txBody>
+      </p:sp>
+      <p:sp>
+        <p:nvSpPr>
+          <p:cNvPr id="46" name="Rectangle 45"/>
           <p:cNvSpPr/>
           <p:nvPr/>
         </p:nvSpPr>
@@ -9531,13 +11767,333 @@
       </p:sp>
       <p:sp>
         <p:nvSpPr>
-          <p:cNvPr id="37" name="Rectangle 36"/>
+          <p:cNvPr id="47" name="Rectangle 46"/>
           <p:cNvSpPr/>
           <p:nvPr/>
         </p:nvSpPr>
         <p:spPr>
           <a:xfrm>
             <a:off x="5943600" y="914400"/>
+            <a:ext cx="2743200" cy="73152"/>
+          </a:xfrm>
+          <a:prstGeom prst="rect">
+            <a:avLst/>
+          </a:prstGeom>
+          <a:solidFill>
+            <a:srgbClr val="DC2626"/>
+          </a:solidFill>
+          <a:ln>
+            <a:noFill/>
+          </a:ln>
+        </p:spPr>
+        <p:style>
+          <a:lnRef idx="1">
+            <a:schemeClr val="accent1"/>
+          </a:lnRef>
+          <a:fillRef idx="3">
+            <a:schemeClr val="accent1"/>
+          </a:fillRef>
+          <a:effectRef idx="2">
+            <a:schemeClr val="accent1"/>
+          </a:effectRef>
+          <a:fontRef idx="minor">
+            <a:schemeClr val="lt1"/>
+          </a:fontRef>
+        </p:style>
+        <p:txBody>
+          <a:bodyPr rtlCol="0" anchor="ctr"/>
+          <a:lstStyle/>
+          <a:p>
+            <a:pPr algn="ctr"/>
+          </a:p>
+        </p:txBody>
+      </p:sp>
+      <p:sp>
+        <p:nvSpPr>
+          <p:cNvPr id="48" name="TextBox 47"/>
+          <p:cNvSpPr txBox="1"/>
+          <p:nvPr/>
+        </p:nvSpPr>
+        <p:spPr>
+          <a:xfrm>
+            <a:off x="5943600" y="1051560"/>
+            <a:ext cx="2743200" cy="822960"/>
+          </a:xfrm>
+          <a:prstGeom prst="rect">
+            <a:avLst/>
+          </a:prstGeom>
+          <a:noFill/>
+        </p:spPr>
+        <p:txBody>
+          <a:bodyPr wrap="square" lIns="0" rIns="0" tIns="0" bIns="0">
+            <a:spAutoFit/>
+          </a:bodyPr>
+          <a:lstStyle/>
+          <a:p>
+            <a:pPr algn="ctr"/>
+            <a:r>
+              <a:rPr sz="3600" b="1" i="0">
+                <a:solidFill>
+                  <a:srgbClr val="DC2626"/>
+                </a:solidFill>
+                <a:latin typeface="Calibri"/>
+              </a:rPr>
+              <a:t>+64.8%</a:t>
+            </a:r>
+          </a:p>
+        </p:txBody>
+      </p:sp>
+      <p:sp>
+        <p:nvSpPr>
+          <p:cNvPr id="49" name="TextBox 48"/>
+          <p:cNvSpPr txBox="1"/>
+          <p:nvPr/>
+        </p:nvSpPr>
+        <p:spPr>
+          <a:xfrm>
+            <a:off x="5943600" y="1874519"/>
+            <a:ext cx="2743200" cy="822960"/>
+          </a:xfrm>
+          <a:prstGeom prst="rect">
+            <a:avLst/>
+          </a:prstGeom>
+          <a:noFill/>
+        </p:spPr>
+        <p:txBody>
+          <a:bodyPr wrap="square" lIns="0" rIns="0" tIns="0" bIns="0">
+            <a:spAutoFit/>
+          </a:bodyPr>
+          <a:lstStyle/>
+          <a:p>
+            <a:pPr algn="ctr"/>
+            <a:r>
+              <a:rPr sz="1200" b="0" i="0">
+                <a:solidFill>
+                  <a:srgbClr val="CADCFC"/>
+                </a:solidFill>
+                <a:latin typeface="Calibri"/>
+              </a:rPr>
+              <a:t>Paid avg daily PVs</a:t>
+            </a:r>
+            <a:br/>
+            <a:r>
+              <a:t>grew MoM (campaigns ramped)</a:t>
+            </a:r>
+          </a:p>
+        </p:txBody>
+      </p:sp>
+      <p:sp>
+        <p:nvSpPr>
+          <p:cNvPr id="50" name="Rectangle 49"/>
+          <p:cNvSpPr/>
+          <p:nvPr/>
+        </p:nvSpPr>
+        <p:spPr>
+          <a:xfrm>
+            <a:off x="8869680" y="914400"/>
+            <a:ext cx="2743200" cy="2286000"/>
+          </a:xfrm>
+          <a:prstGeom prst="rect">
+            <a:avLst/>
+          </a:prstGeom>
+          <a:solidFill>
+            <a:srgbClr val="1E354A"/>
+          </a:solidFill>
+          <a:ln>
+            <a:noFill/>
+          </a:ln>
+        </p:spPr>
+        <p:style>
+          <a:lnRef idx="1">
+            <a:schemeClr val="accent1"/>
+          </a:lnRef>
+          <a:fillRef idx="3">
+            <a:schemeClr val="accent1"/>
+          </a:fillRef>
+          <a:effectRef idx="2">
+            <a:schemeClr val="accent1"/>
+          </a:effectRef>
+          <a:fontRef idx="minor">
+            <a:schemeClr val="lt1"/>
+          </a:fontRef>
+        </p:style>
+        <p:txBody>
+          <a:bodyPr rtlCol="0" anchor="ctr"/>
+          <a:lstStyle/>
+          <a:p>
+            <a:pPr algn="ctr"/>
+          </a:p>
+        </p:txBody>
+      </p:sp>
+      <p:sp>
+        <p:nvSpPr>
+          <p:cNvPr id="51" name="Rectangle 50"/>
+          <p:cNvSpPr/>
+          <p:nvPr/>
+        </p:nvSpPr>
+        <p:spPr>
+          <a:xfrm>
+            <a:off x="8869680" y="914400"/>
+            <a:ext cx="2743200" cy="73152"/>
+          </a:xfrm>
+          <a:prstGeom prst="rect">
+            <a:avLst/>
+          </a:prstGeom>
+          <a:solidFill>
+            <a:srgbClr val="D97706"/>
+          </a:solidFill>
+          <a:ln>
+            <a:noFill/>
+          </a:ln>
+        </p:spPr>
+        <p:style>
+          <a:lnRef idx="1">
+            <a:schemeClr val="accent1"/>
+          </a:lnRef>
+          <a:fillRef idx="3">
+            <a:schemeClr val="accent1"/>
+          </a:fillRef>
+          <a:effectRef idx="2">
+            <a:schemeClr val="accent1"/>
+          </a:effectRef>
+          <a:fontRef idx="minor">
+            <a:schemeClr val="lt1"/>
+          </a:fontRef>
+        </p:style>
+        <p:txBody>
+          <a:bodyPr rtlCol="0" anchor="ctr"/>
+          <a:lstStyle/>
+          <a:p>
+            <a:pPr algn="ctr"/>
+          </a:p>
+        </p:txBody>
+      </p:sp>
+      <p:sp>
+        <p:nvSpPr>
+          <p:cNvPr id="52" name="TextBox 51"/>
+          <p:cNvSpPr txBox="1"/>
+          <p:nvPr/>
+        </p:nvSpPr>
+        <p:spPr>
+          <a:xfrm>
+            <a:off x="8869680" y="1051560"/>
+            <a:ext cx="2743200" cy="822960"/>
+          </a:xfrm>
+          <a:prstGeom prst="rect">
+            <a:avLst/>
+          </a:prstGeom>
+          <a:noFill/>
+        </p:spPr>
+        <p:txBody>
+          <a:bodyPr wrap="square" lIns="0" rIns="0" tIns="0" bIns="0">
+            <a:spAutoFit/>
+          </a:bodyPr>
+          <a:lstStyle/>
+          <a:p>
+            <a:pPr algn="ctr"/>
+            <a:r>
+              <a:rPr sz="3600" b="1" i="0">
+                <a:solidFill>
+                  <a:srgbClr val="D97706"/>
+                </a:solidFill>
+                <a:latin typeface="Calibri"/>
+              </a:rPr>
+              <a:t>-3.3%</a:t>
+            </a:r>
+          </a:p>
+        </p:txBody>
+      </p:sp>
+      <p:sp>
+        <p:nvSpPr>
+          <p:cNvPr id="53" name="TextBox 52"/>
+          <p:cNvSpPr txBox="1"/>
+          <p:nvPr/>
+        </p:nvSpPr>
+        <p:spPr>
+          <a:xfrm>
+            <a:off x="8869680" y="1874519"/>
+            <a:ext cx="2743200" cy="822960"/>
+          </a:xfrm>
+          <a:prstGeom prst="rect">
+            <a:avLst/>
+          </a:prstGeom>
+          <a:noFill/>
+        </p:spPr>
+        <p:txBody>
+          <a:bodyPr wrap="square" lIns="0" rIns="0" tIns="0" bIns="0">
+            <a:spAutoFit/>
+          </a:bodyPr>
+          <a:lstStyle/>
+          <a:p>
+            <a:pPr algn="ctr"/>
+            <a:r>
+              <a:rPr sz="1200" b="0" i="0">
+                <a:solidFill>
+                  <a:srgbClr val="CADCFC"/>
+                </a:solidFill>
+                <a:latin typeface="Calibri"/>
+              </a:rPr>
+              <a:t>Non-Paid avg daily PVs</a:t>
+            </a:r>
+            <a:br/>
+            <a:r>
+              <a:t>declined MoM</a:t>
+            </a:r>
+          </a:p>
+        </p:txBody>
+      </p:sp>
+      <p:sp>
+        <p:nvSpPr>
+          <p:cNvPr id="54" name="Rectangle 53"/>
+          <p:cNvSpPr/>
+          <p:nvPr/>
+        </p:nvSpPr>
+        <p:spPr>
+          <a:xfrm>
+            <a:off x="5943600" y="3474720"/>
+            <a:ext cx="2743200" cy="2286000"/>
+          </a:xfrm>
+          <a:prstGeom prst="rect">
+            <a:avLst/>
+          </a:prstGeom>
+          <a:solidFill>
+            <a:srgbClr val="1E354A"/>
+          </a:solidFill>
+          <a:ln>
+            <a:noFill/>
+          </a:ln>
+        </p:spPr>
+        <p:style>
+          <a:lnRef idx="1">
+            <a:schemeClr val="accent1"/>
+          </a:lnRef>
+          <a:fillRef idx="3">
+            <a:schemeClr val="accent1"/>
+          </a:fillRef>
+          <a:effectRef idx="2">
+            <a:schemeClr val="accent1"/>
+          </a:effectRef>
+          <a:fontRef idx="minor">
+            <a:schemeClr val="lt1"/>
+          </a:fontRef>
+        </p:style>
+        <p:txBody>
+          <a:bodyPr rtlCol="0" anchor="ctr"/>
+          <a:lstStyle/>
+          <a:p>
+            <a:pPr algn="ctr"/>
+          </a:p>
+        </p:txBody>
+      </p:sp>
+      <p:sp>
+        <p:nvSpPr>
+          <p:cNvPr id="55" name="Rectangle 54"/>
+          <p:cNvSpPr/>
+          <p:nvPr/>
+        </p:nvSpPr>
+        <p:spPr>
+          <a:xfrm>
+            <a:off x="5943600" y="3474720"/>
             <a:ext cx="2743200" cy="73152"/>
           </a:xfrm>
           <a:prstGeom prst="rect">
@@ -9574,13 +12130,13 @@
       </p:sp>
       <p:sp>
         <p:nvSpPr>
-          <p:cNvPr id="38" name="TextBox 37"/>
-          <p:cNvSpPr txBox="1"/>
-          <p:nvPr/>
-        </p:nvSpPr>
-        <p:spPr>
-          <a:xfrm>
-            <a:off x="5943600" y="1051560"/>
+          <p:cNvPr id="56" name="TextBox 55"/>
+          <p:cNvSpPr txBox="1"/>
+          <p:nvPr/>
+        </p:nvSpPr>
+        <p:spPr>
+          <a:xfrm>
+            <a:off x="5943600" y="3611879"/>
             <a:ext cx="2743200" cy="822960"/>
           </a:xfrm>
           <a:prstGeom prst="rect">
@@ -9602,20 +12158,20 @@
                 </a:solidFill>
                 <a:latin typeface="Calibri"/>
               </a:rPr>
-              <a:t>+3.4%</a:t>
-            </a:r>
-          </a:p>
-        </p:txBody>
-      </p:sp>
-      <p:sp>
-        <p:nvSpPr>
-          <p:cNvPr id="39" name="TextBox 38"/>
-          <p:cNvSpPr txBox="1"/>
-          <p:nvPr/>
-        </p:nvSpPr>
-        <p:spPr>
-          <a:xfrm>
-            <a:off x="5943600" y="1874519"/>
+              <a:t>+9.6pp</a:t>
+            </a:r>
+          </a:p>
+        </p:txBody>
+      </p:sp>
+      <p:sp>
+        <p:nvSpPr>
+          <p:cNvPr id="57" name="TextBox 56"/>
+          <p:cNvSpPr txBox="1"/>
+          <p:nvPr/>
+        </p:nvSpPr>
+        <p:spPr>
+          <a:xfrm>
+            <a:off x="5943600" y="4434840"/>
             <a:ext cx="2743200" cy="822960"/>
           </a:xfrm>
           <a:prstGeom prst="rect">
@@ -9637,24 +12193,24 @@
                 </a:solidFill>
                 <a:latin typeface="Calibri"/>
               </a:rPr>
-              <a:t>Avg daily page views</a:t>
+              <a:t>Referral share growth</a:t>
             </a:r>
             <a:br/>
             <a:r>
-              <a:t>grew month-over-month</a:t>
-            </a:r>
-          </a:p>
-        </p:txBody>
-      </p:sp>
-      <p:sp>
-        <p:nvSpPr>
-          <p:cNvPr id="40" name="Rectangle 39"/>
+              <a:t>(non-paid: new partners)</a:t>
+            </a:r>
+          </a:p>
+        </p:txBody>
+      </p:sp>
+      <p:sp>
+        <p:nvSpPr>
+          <p:cNvPr id="58" name="Rectangle 57"/>
           <p:cNvSpPr/>
           <p:nvPr/>
         </p:nvSpPr>
         <p:spPr>
           <a:xfrm>
-            <a:off x="8869680" y="914400"/>
+            <a:off x="8869680" y="3474720"/>
             <a:ext cx="2743200" cy="2286000"/>
           </a:xfrm>
           <a:prstGeom prst="rect">
@@ -9691,173 +12247,13 @@
       </p:sp>
       <p:sp>
         <p:nvSpPr>
-          <p:cNvPr id="41" name="Rectangle 40"/>
+          <p:cNvPr id="59" name="Rectangle 58"/>
           <p:cNvSpPr/>
           <p:nvPr/>
         </p:nvSpPr>
         <p:spPr>
           <a:xfrm>
-            <a:off x="8869680" y="914400"/>
-            <a:ext cx="2743200" cy="73152"/>
-          </a:xfrm>
-          <a:prstGeom prst="rect">
-            <a:avLst/>
-          </a:prstGeom>
-          <a:solidFill>
-            <a:srgbClr val="D97706"/>
-          </a:solidFill>
-          <a:ln>
-            <a:noFill/>
-          </a:ln>
-        </p:spPr>
-        <p:style>
-          <a:lnRef idx="1">
-            <a:schemeClr val="accent1"/>
-          </a:lnRef>
-          <a:fillRef idx="3">
-            <a:schemeClr val="accent1"/>
-          </a:fillRef>
-          <a:effectRef idx="2">
-            <a:schemeClr val="accent1"/>
-          </a:effectRef>
-          <a:fontRef idx="minor">
-            <a:schemeClr val="lt1"/>
-          </a:fontRef>
-        </p:style>
-        <p:txBody>
-          <a:bodyPr rtlCol="0" anchor="ctr"/>
-          <a:lstStyle/>
-          <a:p>
-            <a:pPr algn="ctr"/>
-          </a:p>
-        </p:txBody>
-      </p:sp>
-      <p:sp>
-        <p:nvSpPr>
-          <p:cNvPr id="42" name="TextBox 41"/>
-          <p:cNvSpPr txBox="1"/>
-          <p:nvPr/>
-        </p:nvSpPr>
-        <p:spPr>
-          <a:xfrm>
-            <a:off x="8869680" y="1051560"/>
-            <a:ext cx="2743200" cy="822960"/>
-          </a:xfrm>
-          <a:prstGeom prst="rect">
-            <a:avLst/>
-          </a:prstGeom>
-          <a:noFill/>
-        </p:spPr>
-        <p:txBody>
-          <a:bodyPr wrap="square" lIns="0" rIns="0" tIns="0" bIns="0">
-            <a:spAutoFit/>
-          </a:bodyPr>
-          <a:lstStyle/>
-          <a:p>
-            <a:pPr algn="ctr"/>
-            <a:r>
-              <a:rPr sz="3600" b="1" i="0">
-                <a:solidFill>
-                  <a:srgbClr val="D97706"/>
-                </a:solidFill>
-                <a:latin typeface="Calibri"/>
-              </a:rPr>
-              <a:t>-13.3pp</a:t>
-            </a:r>
-          </a:p>
-        </p:txBody>
-      </p:sp>
-      <p:sp>
-        <p:nvSpPr>
-          <p:cNvPr id="43" name="TextBox 42"/>
-          <p:cNvSpPr txBox="1"/>
-          <p:nvPr/>
-        </p:nvSpPr>
-        <p:spPr>
-          <a:xfrm>
-            <a:off x="8869680" y="1874519"/>
-            <a:ext cx="2743200" cy="822960"/>
-          </a:xfrm>
-          <a:prstGeom prst="rect">
-            <a:avLst/>
-          </a:prstGeom>
-          <a:noFill/>
-        </p:spPr>
-        <p:txBody>
-          <a:bodyPr wrap="square" lIns="0" rIns="0" tIns="0" bIns="0">
-            <a:spAutoFit/>
-          </a:bodyPr>
-          <a:lstStyle/>
-          <a:p>
-            <a:pPr algn="ctr"/>
-            <a:r>
-              <a:rPr sz="1200" b="0" i="0">
-                <a:solidFill>
-                  <a:srgbClr val="CADCFC"/>
-                </a:solidFill>
-                <a:latin typeface="Calibri"/>
-              </a:rPr>
-              <a:t>Drop in Direct share</a:t>
-            </a:r>
-            <a:br/>
-            <a:r>
-              <a:t>(may signal dark social)</a:t>
-            </a:r>
-          </a:p>
-        </p:txBody>
-      </p:sp>
-      <p:sp>
-        <p:nvSpPr>
-          <p:cNvPr id="44" name="Rectangle 43"/>
-          <p:cNvSpPr/>
-          <p:nvPr/>
-        </p:nvSpPr>
-        <p:spPr>
-          <a:xfrm>
-            <a:off x="5943600" y="3474720"/>
-            <a:ext cx="2743200" cy="2286000"/>
-          </a:xfrm>
-          <a:prstGeom prst="rect">
-            <a:avLst/>
-          </a:prstGeom>
-          <a:solidFill>
-            <a:srgbClr val="1E354A"/>
-          </a:solidFill>
-          <a:ln>
-            <a:noFill/>
-          </a:ln>
-        </p:spPr>
-        <p:style>
-          <a:lnRef idx="1">
-            <a:schemeClr val="accent1"/>
-          </a:lnRef>
-          <a:fillRef idx="3">
-            <a:schemeClr val="accent1"/>
-          </a:fillRef>
-          <a:effectRef idx="2">
-            <a:schemeClr val="accent1"/>
-          </a:effectRef>
-          <a:fontRef idx="minor">
-            <a:schemeClr val="lt1"/>
-          </a:fontRef>
-        </p:style>
-        <p:txBody>
-          <a:bodyPr rtlCol="0" anchor="ctr"/>
-          <a:lstStyle/>
-          <a:p>
-            <a:pPr algn="ctr"/>
-          </a:p>
-        </p:txBody>
-      </p:sp>
-      <p:sp>
-        <p:nvSpPr>
-          <p:cNvPr id="45" name="Rectangle 44"/>
-          <p:cNvSpPr/>
-          <p:nvPr/>
-        </p:nvSpPr>
-        <p:spPr>
-          <a:xfrm>
-            <a:off x="5943600" y="3474720"/>
+            <a:off x="8869680" y="3474720"/>
             <a:ext cx="2743200" cy="73152"/>
           </a:xfrm>
           <a:prstGeom prst="rect">
@@ -9894,167 +12290,7 @@
       </p:sp>
       <p:sp>
         <p:nvSpPr>
-          <p:cNvPr id="46" name="TextBox 45"/>
-          <p:cNvSpPr txBox="1"/>
-          <p:nvPr/>
-        </p:nvSpPr>
-        <p:spPr>
-          <a:xfrm>
-            <a:off x="5943600" y="3611879"/>
-            <a:ext cx="2743200" cy="822960"/>
-          </a:xfrm>
-          <a:prstGeom prst="rect">
-            <a:avLst/>
-          </a:prstGeom>
-          <a:noFill/>
-        </p:spPr>
-        <p:txBody>
-          <a:bodyPr wrap="square" lIns="0" rIns="0" tIns="0" bIns="0">
-            <a:spAutoFit/>
-          </a:bodyPr>
-          <a:lstStyle/>
-          <a:p>
-            <a:pPr algn="ctr"/>
-            <a:r>
-              <a:rPr sz="3600" b="1" i="0">
-                <a:solidFill>
-                  <a:srgbClr val="059669"/>
-                </a:solidFill>
-                <a:latin typeface="Calibri"/>
-              </a:rPr>
-              <a:t>+9.6pp</a:t>
-            </a:r>
-          </a:p>
-        </p:txBody>
-      </p:sp>
-      <p:sp>
-        <p:nvSpPr>
-          <p:cNvPr id="47" name="TextBox 46"/>
-          <p:cNvSpPr txBox="1"/>
-          <p:nvPr/>
-        </p:nvSpPr>
-        <p:spPr>
-          <a:xfrm>
-            <a:off x="5943600" y="4434840"/>
-            <a:ext cx="2743200" cy="822960"/>
-          </a:xfrm>
-          <a:prstGeom prst="rect">
-            <a:avLst/>
-          </a:prstGeom>
-          <a:noFill/>
-        </p:spPr>
-        <p:txBody>
-          <a:bodyPr wrap="square" lIns="0" rIns="0" tIns="0" bIns="0">
-            <a:spAutoFit/>
-          </a:bodyPr>
-          <a:lstStyle/>
-          <a:p>
-            <a:pPr algn="ctr"/>
-            <a:r>
-              <a:rPr sz="1200" b="0" i="0">
-                <a:solidFill>
-                  <a:srgbClr val="CADCFC"/>
-                </a:solidFill>
-                <a:latin typeface="Calibri"/>
-              </a:rPr>
-              <a:t>Referral share growth</a:t>
-            </a:r>
-            <a:br/>
-            <a:r>
-              <a:t>(new partnerships)</a:t>
-            </a:r>
-          </a:p>
-        </p:txBody>
-      </p:sp>
-      <p:sp>
-        <p:nvSpPr>
-          <p:cNvPr id="48" name="Rectangle 47"/>
-          <p:cNvSpPr/>
-          <p:nvPr/>
-        </p:nvSpPr>
-        <p:spPr>
-          <a:xfrm>
-            <a:off x="8869680" y="3474720"/>
-            <a:ext cx="2743200" cy="2286000"/>
-          </a:xfrm>
-          <a:prstGeom prst="rect">
-            <a:avLst/>
-          </a:prstGeom>
-          <a:solidFill>
-            <a:srgbClr val="1E354A"/>
-          </a:solidFill>
-          <a:ln>
-            <a:noFill/>
-          </a:ln>
-        </p:spPr>
-        <p:style>
-          <a:lnRef idx="1">
-            <a:schemeClr val="accent1"/>
-          </a:lnRef>
-          <a:fillRef idx="3">
-            <a:schemeClr val="accent1"/>
-          </a:fillRef>
-          <a:effectRef idx="2">
-            <a:schemeClr val="accent1"/>
-          </a:effectRef>
-          <a:fontRef idx="minor">
-            <a:schemeClr val="lt1"/>
-          </a:fontRef>
-        </p:style>
-        <p:txBody>
-          <a:bodyPr rtlCol="0" anchor="ctr"/>
-          <a:lstStyle/>
-          <a:p>
-            <a:pPr algn="ctr"/>
-          </a:p>
-        </p:txBody>
-      </p:sp>
-      <p:sp>
-        <p:nvSpPr>
-          <p:cNvPr id="49" name="Rectangle 48"/>
-          <p:cNvSpPr/>
-          <p:nvPr/>
-        </p:nvSpPr>
-        <p:spPr>
-          <a:xfrm>
-            <a:off x="8869680" y="3474720"/>
-            <a:ext cx="2743200" cy="73152"/>
-          </a:xfrm>
-          <a:prstGeom prst="rect">
-            <a:avLst/>
-          </a:prstGeom>
-          <a:solidFill>
-            <a:srgbClr val="F5A623"/>
-          </a:solidFill>
-          <a:ln>
-            <a:noFill/>
-          </a:ln>
-        </p:spPr>
-        <p:style>
-          <a:lnRef idx="1">
-            <a:schemeClr val="accent1"/>
-          </a:lnRef>
-          <a:fillRef idx="3">
-            <a:schemeClr val="accent1"/>
-          </a:fillRef>
-          <a:effectRef idx="2">
-            <a:schemeClr val="accent1"/>
-          </a:effectRef>
-          <a:fontRef idx="minor">
-            <a:schemeClr val="lt1"/>
-          </a:fontRef>
-        </p:style>
-        <p:txBody>
-          <a:bodyPr rtlCol="0" anchor="ctr"/>
-          <a:lstStyle/>
-          <a:p>
-            <a:pPr algn="ctr"/>
-          </a:p>
-        </p:txBody>
-      </p:sp>
-      <p:sp>
-        <p:nvSpPr>
-          <p:cNvPr id="50" name="TextBox 49"/>
+          <p:cNvPr id="60" name="TextBox 59"/>
           <p:cNvSpPr txBox="1"/>
           <p:nvPr/>
         </p:nvSpPr>
@@ -10078,18 +12314,18 @@
             <a:r>
               <a:rPr sz="3600" b="1" i="0">
                 <a:solidFill>
-                  <a:srgbClr val="F5A623"/>
-                </a:solidFill>
-                <a:latin typeface="Calibri"/>
-              </a:rPr>
-              <a:t>+5.9pp</a:t>
-            </a:r>
-          </a:p>
-        </p:txBody>
-      </p:sp>
-      <p:sp>
-        <p:nvSpPr>
-          <p:cNvPr id="51" name="TextBox 50"/>
+                  <a:srgbClr val="059669"/>
+                </a:solidFill>
+                <a:latin typeface="Calibri"/>
+              </a:rPr>
+              <a:t>+3.4%</a:t>
+            </a:r>
+          </a:p>
+        </p:txBody>
+      </p:sp>
+      <p:sp>
+        <p:nvSpPr>
+          <p:cNvPr id="61" name="TextBox 60"/>
           <p:cNvSpPr txBox="1"/>
           <p:nvPr/>
         </p:nvSpPr>
@@ -10117,18 +12353,18 @@
                 </a:solidFill>
                 <a:latin typeface="Calibri"/>
               </a:rPr>
-              <a:t>Paid/Display growth</a:t>
+              <a:t>Overall avg daily PVs</a:t>
             </a:r>
             <a:br/>
             <a:r>
-              <a:t>(campaign ramp-up)</a:t>
-            </a:r>
-          </a:p>
-        </p:txBody>
-      </p:sp>
-      <p:sp>
-        <p:nvSpPr>
-          <p:cNvPr id="52" name="TextBox 51"/>
+              <a:t>grew MoM (day-normalized)</a:t>
+            </a:r>
+          </a:p>
+        </p:txBody>
+      </p:sp>
+      <p:sp>
+        <p:nvSpPr>
+          <p:cNvPr id="62" name="TextBox 61"/>
           <p:cNvSpPr txBox="1"/>
           <p:nvPr/>
         </p:nvSpPr>
@@ -14145,7 +16381,7 @@
                 </a:solidFill>
                 <a:latin typeface="Calibri"/>
               </a:rPr>
-              <a:t>By Traffic Source</a:t>
+              <a:t>Bounce Rate by Channel</a:t>
             </a:r>
           </a:p>
         </p:txBody>
@@ -14158,8 +16394,573 @@
         </p:nvSpPr>
         <p:spPr>
           <a:xfrm>
-            <a:off x="457200" y="1417320"/>
-            <a:ext cx="4937760" cy="685800"/>
+            <a:off x="457200" y="1353312"/>
+            <a:ext cx="4937760" cy="594360"/>
+          </a:xfrm>
+          <a:prstGeom prst="rect">
+            <a:avLst/>
+          </a:prstGeom>
+          <a:solidFill>
+            <a:srgbClr val="3A1010"/>
+          </a:solidFill>
+          <a:ln>
+            <a:noFill/>
+          </a:ln>
+        </p:spPr>
+        <p:style>
+          <a:lnRef idx="1">
+            <a:schemeClr val="accent1"/>
+          </a:lnRef>
+          <a:fillRef idx="3">
+            <a:schemeClr val="accent1"/>
+          </a:fillRef>
+          <a:effectRef idx="2">
+            <a:schemeClr val="accent1"/>
+          </a:effectRef>
+          <a:fontRef idx="minor">
+            <a:schemeClr val="lt1"/>
+          </a:fontRef>
+        </p:style>
+        <p:txBody>
+          <a:bodyPr rtlCol="0" anchor="ctr"/>
+          <a:lstStyle/>
+          <a:p>
+            <a:pPr algn="ctr"/>
+          </a:p>
+        </p:txBody>
+      </p:sp>
+      <p:sp>
+        <p:nvSpPr>
+          <p:cNvPr id="8" name="Rectangle 7"/>
+          <p:cNvSpPr/>
+          <p:nvPr/>
+        </p:nvSpPr>
+        <p:spPr>
+          <a:xfrm>
+            <a:off x="457200" y="1353312"/>
+            <a:ext cx="73152" cy="594360"/>
+          </a:xfrm>
+          <a:prstGeom prst="rect">
+            <a:avLst/>
+          </a:prstGeom>
+          <a:solidFill>
+            <a:srgbClr val="DC2626"/>
+          </a:solidFill>
+          <a:ln>
+            <a:noFill/>
+          </a:ln>
+        </p:spPr>
+        <p:style>
+          <a:lnRef idx="1">
+            <a:schemeClr val="accent1"/>
+          </a:lnRef>
+          <a:fillRef idx="3">
+            <a:schemeClr val="accent1"/>
+          </a:fillRef>
+          <a:effectRef idx="2">
+            <a:schemeClr val="accent1"/>
+          </a:effectRef>
+          <a:fontRef idx="minor">
+            <a:schemeClr val="lt1"/>
+          </a:fontRef>
+        </p:style>
+        <p:txBody>
+          <a:bodyPr rtlCol="0" anchor="ctr"/>
+          <a:lstStyle/>
+          <a:p>
+            <a:pPr algn="ctr"/>
+          </a:p>
+        </p:txBody>
+      </p:sp>
+      <p:sp>
+        <p:nvSpPr>
+          <p:cNvPr id="9" name="TextBox 8"/>
+          <p:cNvSpPr txBox="1"/>
+          <p:nvPr/>
+        </p:nvSpPr>
+        <p:spPr>
+          <a:xfrm>
+            <a:off x="640080" y="1444752"/>
+            <a:ext cx="1645920" cy="411480"/>
+          </a:xfrm>
+          <a:prstGeom prst="rect">
+            <a:avLst/>
+          </a:prstGeom>
+          <a:noFill/>
+        </p:spPr>
+        <p:txBody>
+          <a:bodyPr wrap="square" lIns="0" rIns="0" tIns="0" bIns="0">
+            <a:spAutoFit/>
+          </a:bodyPr>
+          <a:lstStyle/>
+          <a:p>
+            <a:pPr algn="l"/>
+            <a:r>
+              <a:rPr sz="1200" b="1" i="0">
+                <a:solidFill>
+                  <a:srgbClr val="DC2626"/>
+                </a:solidFill>
+                <a:latin typeface="Calibri"/>
+              </a:rPr>
+              <a:t>PAID</a:t>
+            </a:r>
+          </a:p>
+        </p:txBody>
+      </p:sp>
+      <p:sp>
+        <p:nvSpPr>
+          <p:cNvPr id="10" name="TextBox 9"/>
+          <p:cNvSpPr txBox="1"/>
+          <p:nvPr/>
+        </p:nvSpPr>
+        <p:spPr>
+          <a:xfrm>
+            <a:off x="2331720" y="1444752"/>
+            <a:ext cx="1097280" cy="411480"/>
+          </a:xfrm>
+          <a:prstGeom prst="rect">
+            <a:avLst/>
+          </a:prstGeom>
+          <a:noFill/>
+        </p:spPr>
+        <p:txBody>
+          <a:bodyPr wrap="square" lIns="0" rIns="0" tIns="0" bIns="0">
+            <a:spAutoFit/>
+          </a:bodyPr>
+          <a:lstStyle/>
+          <a:p>
+            <a:pPr algn="ctr"/>
+            <a:r>
+              <a:rPr sz="1800" b="1" i="0">
+                <a:solidFill>
+                  <a:srgbClr val="CADCFC"/>
+                </a:solidFill>
+                <a:latin typeface="Calibri"/>
+              </a:rPr>
+              <a:t>70.0%</a:t>
+            </a:r>
+          </a:p>
+        </p:txBody>
+      </p:sp>
+      <p:sp>
+        <p:nvSpPr>
+          <p:cNvPr id="11" name="TextBox 10"/>
+          <p:cNvSpPr txBox="1"/>
+          <p:nvPr/>
+        </p:nvSpPr>
+        <p:spPr>
+          <a:xfrm>
+            <a:off x="3429000" y="1444752"/>
+            <a:ext cx="320040" cy="411480"/>
+          </a:xfrm>
+          <a:prstGeom prst="rect">
+            <a:avLst/>
+          </a:prstGeom>
+          <a:noFill/>
+        </p:spPr>
+        <p:txBody>
+          <a:bodyPr wrap="square" lIns="0" rIns="0" tIns="0" bIns="0">
+            <a:spAutoFit/>
+          </a:bodyPr>
+          <a:lstStyle/>
+          <a:p>
+            <a:pPr algn="ctr"/>
+            <a:r>
+              <a:rPr sz="1200" b="0" i="0">
+                <a:solidFill>
+                  <a:srgbClr val="64748B"/>
+                </a:solidFill>
+                <a:latin typeface="Calibri"/>
+              </a:rPr>
+              <a:t>→</a:t>
+            </a:r>
+          </a:p>
+        </p:txBody>
+      </p:sp>
+      <p:sp>
+        <p:nvSpPr>
+          <p:cNvPr id="12" name="TextBox 11"/>
+          <p:cNvSpPr txBox="1"/>
+          <p:nvPr/>
+        </p:nvSpPr>
+        <p:spPr>
+          <a:xfrm>
+            <a:off x="3749039" y="1444752"/>
+            <a:ext cx="1097280" cy="411480"/>
+          </a:xfrm>
+          <a:prstGeom prst="rect">
+            <a:avLst/>
+          </a:prstGeom>
+          <a:noFill/>
+        </p:spPr>
+        <p:txBody>
+          <a:bodyPr wrap="square" lIns="0" rIns="0" tIns="0" bIns="0">
+            <a:spAutoFit/>
+          </a:bodyPr>
+          <a:lstStyle/>
+          <a:p>
+            <a:pPr algn="ctr"/>
+            <a:r>
+              <a:rPr sz="1800" b="1" i="0">
+                <a:solidFill>
+                  <a:srgbClr val="DC2626"/>
+                </a:solidFill>
+                <a:latin typeface="Calibri"/>
+              </a:rPr>
+              <a:t>70.6%</a:t>
+            </a:r>
+          </a:p>
+        </p:txBody>
+      </p:sp>
+      <p:sp>
+        <p:nvSpPr>
+          <p:cNvPr id="13" name="Rectangle 12"/>
+          <p:cNvSpPr/>
+          <p:nvPr/>
+        </p:nvSpPr>
+        <p:spPr>
+          <a:xfrm>
+            <a:off x="457200" y="2011680"/>
+            <a:ext cx="4937760" cy="594360"/>
+          </a:xfrm>
+          <a:prstGeom prst="rect">
+            <a:avLst/>
+          </a:prstGeom>
+          <a:solidFill>
+            <a:srgbClr val="0D2D24"/>
+          </a:solidFill>
+          <a:ln>
+            <a:noFill/>
+          </a:ln>
+        </p:spPr>
+        <p:style>
+          <a:lnRef idx="1">
+            <a:schemeClr val="accent1"/>
+          </a:lnRef>
+          <a:fillRef idx="3">
+            <a:schemeClr val="accent1"/>
+          </a:fillRef>
+          <a:effectRef idx="2">
+            <a:schemeClr val="accent1"/>
+          </a:effectRef>
+          <a:fontRef idx="minor">
+            <a:schemeClr val="lt1"/>
+          </a:fontRef>
+        </p:style>
+        <p:txBody>
+          <a:bodyPr rtlCol="0" anchor="ctr"/>
+          <a:lstStyle/>
+          <a:p>
+            <a:pPr algn="ctr"/>
+          </a:p>
+        </p:txBody>
+      </p:sp>
+      <p:sp>
+        <p:nvSpPr>
+          <p:cNvPr id="14" name="Rectangle 13"/>
+          <p:cNvSpPr/>
+          <p:nvPr/>
+        </p:nvSpPr>
+        <p:spPr>
+          <a:xfrm>
+            <a:off x="457200" y="2011680"/>
+            <a:ext cx="73152" cy="594360"/>
+          </a:xfrm>
+          <a:prstGeom prst="rect">
+            <a:avLst/>
+          </a:prstGeom>
+          <a:solidFill>
+            <a:srgbClr val="D97706"/>
+          </a:solidFill>
+          <a:ln>
+            <a:noFill/>
+          </a:ln>
+        </p:spPr>
+        <p:style>
+          <a:lnRef idx="1">
+            <a:schemeClr val="accent1"/>
+          </a:lnRef>
+          <a:fillRef idx="3">
+            <a:schemeClr val="accent1"/>
+          </a:fillRef>
+          <a:effectRef idx="2">
+            <a:schemeClr val="accent1"/>
+          </a:effectRef>
+          <a:fontRef idx="minor">
+            <a:schemeClr val="lt1"/>
+          </a:fontRef>
+        </p:style>
+        <p:txBody>
+          <a:bodyPr rtlCol="0" anchor="ctr"/>
+          <a:lstStyle/>
+          <a:p>
+            <a:pPr algn="ctr"/>
+          </a:p>
+        </p:txBody>
+      </p:sp>
+      <p:sp>
+        <p:nvSpPr>
+          <p:cNvPr id="15" name="TextBox 14"/>
+          <p:cNvSpPr txBox="1"/>
+          <p:nvPr/>
+        </p:nvSpPr>
+        <p:spPr>
+          <a:xfrm>
+            <a:off x="640080" y="2103120"/>
+            <a:ext cx="1645920" cy="411480"/>
+          </a:xfrm>
+          <a:prstGeom prst="rect">
+            <a:avLst/>
+          </a:prstGeom>
+          <a:noFill/>
+        </p:spPr>
+        <p:txBody>
+          <a:bodyPr wrap="square" lIns="0" rIns="0" tIns="0" bIns="0">
+            <a:spAutoFit/>
+          </a:bodyPr>
+          <a:lstStyle/>
+          <a:p>
+            <a:pPr algn="l"/>
+            <a:r>
+              <a:rPr sz="1200" b="1" i="0">
+                <a:solidFill>
+                  <a:srgbClr val="D97706"/>
+                </a:solidFill>
+                <a:latin typeface="Calibri"/>
+              </a:rPr>
+              <a:t>NON-PAID</a:t>
+            </a:r>
+          </a:p>
+        </p:txBody>
+      </p:sp>
+      <p:sp>
+        <p:nvSpPr>
+          <p:cNvPr id="16" name="TextBox 15"/>
+          <p:cNvSpPr txBox="1"/>
+          <p:nvPr/>
+        </p:nvSpPr>
+        <p:spPr>
+          <a:xfrm>
+            <a:off x="2331720" y="2103120"/>
+            <a:ext cx="1097280" cy="411480"/>
+          </a:xfrm>
+          <a:prstGeom prst="rect">
+            <a:avLst/>
+          </a:prstGeom>
+          <a:noFill/>
+        </p:spPr>
+        <p:txBody>
+          <a:bodyPr wrap="square" lIns="0" rIns="0" tIns="0" bIns="0">
+            <a:spAutoFit/>
+          </a:bodyPr>
+          <a:lstStyle/>
+          <a:p>
+            <a:pPr algn="ctr"/>
+            <a:r>
+              <a:rPr sz="1800" b="1" i="0">
+                <a:solidFill>
+                  <a:srgbClr val="CADCFC"/>
+                </a:solidFill>
+                <a:latin typeface="Calibri"/>
+              </a:rPr>
+              <a:t>60.8%</a:t>
+            </a:r>
+          </a:p>
+        </p:txBody>
+      </p:sp>
+      <p:sp>
+        <p:nvSpPr>
+          <p:cNvPr id="17" name="TextBox 16"/>
+          <p:cNvSpPr txBox="1"/>
+          <p:nvPr/>
+        </p:nvSpPr>
+        <p:spPr>
+          <a:xfrm>
+            <a:off x="3429000" y="2103120"/>
+            <a:ext cx="320040" cy="411480"/>
+          </a:xfrm>
+          <a:prstGeom prst="rect">
+            <a:avLst/>
+          </a:prstGeom>
+          <a:noFill/>
+        </p:spPr>
+        <p:txBody>
+          <a:bodyPr wrap="square" lIns="0" rIns="0" tIns="0" bIns="0">
+            <a:spAutoFit/>
+          </a:bodyPr>
+          <a:lstStyle/>
+          <a:p>
+            <a:pPr algn="ctr"/>
+            <a:r>
+              <a:rPr sz="1200" b="0" i="0">
+                <a:solidFill>
+                  <a:srgbClr val="64748B"/>
+                </a:solidFill>
+                <a:latin typeface="Calibri"/>
+              </a:rPr>
+              <a:t>→</a:t>
+            </a:r>
+          </a:p>
+        </p:txBody>
+      </p:sp>
+      <p:sp>
+        <p:nvSpPr>
+          <p:cNvPr id="18" name="TextBox 17"/>
+          <p:cNvSpPr txBox="1"/>
+          <p:nvPr/>
+        </p:nvSpPr>
+        <p:spPr>
+          <a:xfrm>
+            <a:off x="3749039" y="2103120"/>
+            <a:ext cx="1097280" cy="411480"/>
+          </a:xfrm>
+          <a:prstGeom prst="rect">
+            <a:avLst/>
+          </a:prstGeom>
+          <a:noFill/>
+        </p:spPr>
+        <p:txBody>
+          <a:bodyPr wrap="square" lIns="0" rIns="0" tIns="0" bIns="0">
+            <a:spAutoFit/>
+          </a:bodyPr>
+          <a:lstStyle/>
+          <a:p>
+            <a:pPr algn="ctr"/>
+            <a:r>
+              <a:rPr sz="1800" b="1" i="0">
+                <a:solidFill>
+                  <a:srgbClr val="D97706"/>
+                </a:solidFill>
+                <a:latin typeface="Calibri"/>
+              </a:rPr>
+              <a:t>64.6%</a:t>
+            </a:r>
+          </a:p>
+        </p:txBody>
+      </p:sp>
+      <p:sp>
+        <p:nvSpPr>
+          <p:cNvPr id="19" name="TextBox 18"/>
+          <p:cNvSpPr txBox="1"/>
+          <p:nvPr/>
+        </p:nvSpPr>
+        <p:spPr>
+          <a:xfrm>
+            <a:off x="457200" y="1261872"/>
+            <a:ext cx="4572000" cy="256032"/>
+          </a:xfrm>
+          <a:prstGeom prst="rect">
+            <a:avLst/>
+          </a:prstGeom>
+          <a:noFill/>
+        </p:spPr>
+        <p:txBody>
+          <a:bodyPr wrap="square" lIns="0" rIns="0" tIns="0" bIns="0">
+            <a:spAutoFit/>
+          </a:bodyPr>
+          <a:lstStyle/>
+          <a:p>
+            <a:pPr algn="l"/>
+            <a:r>
+              <a:rPr sz="900" b="0" i="0">
+                <a:solidFill>
+                  <a:srgbClr val="CADCFC"/>
+                </a:solidFill>
+                <a:latin typeface="Calibri"/>
+              </a:rPr>
+              <a:t>  Channel           Jan      Feb</a:t>
+            </a:r>
+          </a:p>
+        </p:txBody>
+      </p:sp>
+      <p:sp>
+        <p:nvSpPr>
+          <p:cNvPr id="20" name="Rectangle 19"/>
+          <p:cNvSpPr/>
+          <p:nvPr/>
+        </p:nvSpPr>
+        <p:spPr>
+          <a:xfrm>
+            <a:off x="457200" y="2697480"/>
+            <a:ext cx="4937760" cy="36576"/>
+          </a:xfrm>
+          <a:prstGeom prst="rect">
+            <a:avLst/>
+          </a:prstGeom>
+          <a:solidFill>
+            <a:srgbClr val="1C7293"/>
+          </a:solidFill>
+          <a:ln>
+            <a:noFill/>
+          </a:ln>
+        </p:spPr>
+        <p:style>
+          <a:lnRef idx="1">
+            <a:schemeClr val="accent1"/>
+          </a:lnRef>
+          <a:fillRef idx="3">
+            <a:schemeClr val="accent1"/>
+          </a:fillRef>
+          <a:effectRef idx="2">
+            <a:schemeClr val="accent1"/>
+          </a:effectRef>
+          <a:fontRef idx="minor">
+            <a:schemeClr val="lt1"/>
+          </a:fontRef>
+        </p:style>
+        <p:txBody>
+          <a:bodyPr rtlCol="0" anchor="ctr"/>
+          <a:lstStyle/>
+          <a:p>
+            <a:pPr algn="ctr"/>
+          </a:p>
+        </p:txBody>
+      </p:sp>
+      <p:sp>
+        <p:nvSpPr>
+          <p:cNvPr id="21" name="TextBox 20"/>
+          <p:cNvSpPr txBox="1"/>
+          <p:nvPr/>
+        </p:nvSpPr>
+        <p:spPr>
+          <a:xfrm>
+            <a:off x="548640" y="2761488"/>
+            <a:ext cx="4572000" cy="274320"/>
+          </a:xfrm>
+          <a:prstGeom prst="rect">
+            <a:avLst/>
+          </a:prstGeom>
+          <a:noFill/>
+        </p:spPr>
+        <p:txBody>
+          <a:bodyPr wrap="square" lIns="0" rIns="0" tIns="0" bIns="0">
+            <a:spAutoFit/>
+          </a:bodyPr>
+          <a:lstStyle/>
+          <a:p>
+            <a:pPr algn="l"/>
+            <a:r>
+              <a:rPr sz="900" b="1" i="0">
+                <a:solidFill>
+                  <a:srgbClr val="CADCFC"/>
+                </a:solidFill>
+                <a:latin typeface="Calibri"/>
+              </a:rPr>
+              <a:t>By Source (Non-Paid detail)</a:t>
+            </a:r>
+          </a:p>
+        </p:txBody>
+      </p:sp>
+      <p:sp>
+        <p:nvSpPr>
+          <p:cNvPr id="22" name="Rectangle 21"/>
+          <p:cNvSpPr/>
+          <p:nvPr/>
+        </p:nvSpPr>
+        <p:spPr>
+          <a:xfrm>
+            <a:off x="457200" y="3063240"/>
+            <a:ext cx="4937760" cy="438912"/>
           </a:xfrm>
           <a:prstGeom prst="rect">
             <a:avLst/>
@@ -14195,14 +16996,14 @@
       </p:sp>
       <p:sp>
         <p:nvSpPr>
-          <p:cNvPr id="8" name="TextBox 7"/>
-          <p:cNvSpPr txBox="1"/>
-          <p:nvPr/>
-        </p:nvSpPr>
-        <p:spPr>
-          <a:xfrm>
-            <a:off x="594360" y="1508760"/>
-            <a:ext cx="1920240" cy="502920"/>
+          <p:cNvPr id="23" name="TextBox 22"/>
+          <p:cNvSpPr txBox="1"/>
+          <p:nvPr/>
+        </p:nvSpPr>
+        <p:spPr>
+          <a:xfrm>
+            <a:off x="594360" y="3127248"/>
+            <a:ext cx="1828800" cy="329184"/>
           </a:xfrm>
           <a:prstGeom prst="rect">
             <a:avLst/>
@@ -14217,7 +17018,7 @@
           <a:p>
             <a:pPr algn="l"/>
             <a:r>
-              <a:rPr sz="1100" b="0" i="0">
+              <a:rPr sz="1000" b="0" i="0">
                 <a:solidFill>
                   <a:srgbClr val="FFFFFF"/>
                 </a:solidFill>
@@ -14230,29 +17031,29 @@
       </p:sp>
       <p:sp>
         <p:nvSpPr>
-          <p:cNvPr id="9" name="TextBox 8"/>
-          <p:cNvSpPr txBox="1"/>
-          <p:nvPr/>
-        </p:nvSpPr>
-        <p:spPr>
-          <a:xfrm>
-            <a:off x="2560320" y="1508760"/>
-            <a:ext cx="1097280" cy="502920"/>
-          </a:xfrm>
-          <a:prstGeom prst="rect">
-            <a:avLst/>
-          </a:prstGeom>
-          <a:noFill/>
-        </p:spPr>
-        <p:txBody>
-          <a:bodyPr wrap="square" lIns="0" rIns="0" tIns="0" bIns="0">
-            <a:spAutoFit/>
-          </a:bodyPr>
-          <a:lstStyle/>
-          <a:p>
-            <a:pPr algn="ctr"/>
-            <a:r>
-              <a:rPr sz="1600" b="1" i="0">
+          <p:cNvPr id="24" name="TextBox 23"/>
+          <p:cNvSpPr txBox="1"/>
+          <p:nvPr/>
+        </p:nvSpPr>
+        <p:spPr>
+          <a:xfrm>
+            <a:off x="2423160" y="3127248"/>
+            <a:ext cx="1005840" cy="329184"/>
+          </a:xfrm>
+          <a:prstGeom prst="rect">
+            <a:avLst/>
+          </a:prstGeom>
+          <a:noFill/>
+        </p:spPr>
+        <p:txBody>
+          <a:bodyPr wrap="square" lIns="0" rIns="0" tIns="0" bIns="0">
+            <a:spAutoFit/>
+          </a:bodyPr>
+          <a:lstStyle/>
+          <a:p>
+            <a:pPr algn="ctr"/>
+            <a:r>
+              <a:rPr sz="1300" b="1" i="0">
                 <a:solidFill>
                   <a:srgbClr val="CADCFC"/>
                 </a:solidFill>
@@ -14265,29 +17066,29 @@
       </p:sp>
       <p:sp>
         <p:nvSpPr>
-          <p:cNvPr id="10" name="TextBox 9"/>
-          <p:cNvSpPr txBox="1"/>
-          <p:nvPr/>
-        </p:nvSpPr>
-        <p:spPr>
-          <a:xfrm>
-            <a:off x="3657600" y="1508760"/>
-            <a:ext cx="1097280" cy="502920"/>
-          </a:xfrm>
-          <a:prstGeom prst="rect">
-            <a:avLst/>
-          </a:prstGeom>
-          <a:noFill/>
-        </p:spPr>
-        <p:txBody>
-          <a:bodyPr wrap="square" lIns="0" rIns="0" tIns="0" bIns="0">
-            <a:spAutoFit/>
-          </a:bodyPr>
-          <a:lstStyle/>
-          <a:p>
-            <a:pPr algn="ctr"/>
-            <a:r>
-              <a:rPr sz="1600" b="1" i="0">
+          <p:cNvPr id="25" name="TextBox 24"/>
+          <p:cNvSpPr txBox="1"/>
+          <p:nvPr/>
+        </p:nvSpPr>
+        <p:spPr>
+          <a:xfrm>
+            <a:off x="3474720" y="3127248"/>
+            <a:ext cx="1005840" cy="329184"/>
+          </a:xfrm>
+          <a:prstGeom prst="rect">
+            <a:avLst/>
+          </a:prstGeom>
+          <a:noFill/>
+        </p:spPr>
+        <p:txBody>
+          <a:bodyPr wrap="square" lIns="0" rIns="0" tIns="0" bIns="0">
+            <a:spAutoFit/>
+          </a:bodyPr>
+          <a:lstStyle/>
+          <a:p>
+            <a:pPr algn="ctr"/>
+            <a:r>
+              <a:rPr sz="1300" b="1" i="0">
                 <a:solidFill>
                   <a:srgbClr val="D97706"/>
                 </a:solidFill>
@@ -14300,14 +17101,14 @@
       </p:sp>
       <p:sp>
         <p:nvSpPr>
-          <p:cNvPr id="11" name="Rectangle 10"/>
+          <p:cNvPr id="26" name="Rectangle 25"/>
           <p:cNvSpPr/>
           <p:nvPr/>
         </p:nvSpPr>
         <p:spPr>
           <a:xfrm>
-            <a:off x="457200" y="2167128"/>
-            <a:ext cx="4937760" cy="685800"/>
+            <a:off x="457200" y="3538728"/>
+            <a:ext cx="4937760" cy="438912"/>
           </a:xfrm>
           <a:prstGeom prst="rect">
             <a:avLst/>
@@ -14343,14 +17144,14 @@
       </p:sp>
       <p:sp>
         <p:nvSpPr>
-          <p:cNvPr id="12" name="TextBox 11"/>
-          <p:cNvSpPr txBox="1"/>
-          <p:nvPr/>
-        </p:nvSpPr>
-        <p:spPr>
-          <a:xfrm>
-            <a:off x="594360" y="2258568"/>
-            <a:ext cx="1920240" cy="502920"/>
+          <p:cNvPr id="27" name="TextBox 26"/>
+          <p:cNvSpPr txBox="1"/>
+          <p:nvPr/>
+        </p:nvSpPr>
+        <p:spPr>
+          <a:xfrm>
+            <a:off x="594360" y="3602736"/>
+            <a:ext cx="1828800" cy="329184"/>
           </a:xfrm>
           <a:prstGeom prst="rect">
             <a:avLst/>
@@ -14365,7 +17166,7 @@
           <a:p>
             <a:pPr algn="l"/>
             <a:r>
-              <a:rPr sz="1100" b="0" i="0">
+              <a:rPr sz="1000" b="0" i="0">
                 <a:solidFill>
                   <a:srgbClr val="FFFFFF"/>
                 </a:solidFill>
@@ -14378,29 +17179,29 @@
       </p:sp>
       <p:sp>
         <p:nvSpPr>
-          <p:cNvPr id="13" name="TextBox 12"/>
-          <p:cNvSpPr txBox="1"/>
-          <p:nvPr/>
-        </p:nvSpPr>
-        <p:spPr>
-          <a:xfrm>
-            <a:off x="2560320" y="2258568"/>
-            <a:ext cx="1097280" cy="502920"/>
-          </a:xfrm>
-          <a:prstGeom prst="rect">
-            <a:avLst/>
-          </a:prstGeom>
-          <a:noFill/>
-        </p:spPr>
-        <p:txBody>
-          <a:bodyPr wrap="square" lIns="0" rIns="0" tIns="0" bIns="0">
-            <a:spAutoFit/>
-          </a:bodyPr>
-          <a:lstStyle/>
-          <a:p>
-            <a:pPr algn="ctr"/>
-            <a:r>
-              <a:rPr sz="1600" b="1" i="0">
+          <p:cNvPr id="28" name="TextBox 27"/>
+          <p:cNvSpPr txBox="1"/>
+          <p:nvPr/>
+        </p:nvSpPr>
+        <p:spPr>
+          <a:xfrm>
+            <a:off x="2423160" y="3602736"/>
+            <a:ext cx="1005840" cy="329184"/>
+          </a:xfrm>
+          <a:prstGeom prst="rect">
+            <a:avLst/>
+          </a:prstGeom>
+          <a:noFill/>
+        </p:spPr>
+        <p:txBody>
+          <a:bodyPr wrap="square" lIns="0" rIns="0" tIns="0" bIns="0">
+            <a:spAutoFit/>
+          </a:bodyPr>
+          <a:lstStyle/>
+          <a:p>
+            <a:pPr algn="ctr"/>
+            <a:r>
+              <a:rPr sz="1300" b="1" i="0">
                 <a:solidFill>
                   <a:srgbClr val="CADCFC"/>
                 </a:solidFill>
@@ -14413,29 +17214,29 @@
       </p:sp>
       <p:sp>
         <p:nvSpPr>
-          <p:cNvPr id="14" name="TextBox 13"/>
-          <p:cNvSpPr txBox="1"/>
-          <p:nvPr/>
-        </p:nvSpPr>
-        <p:spPr>
-          <a:xfrm>
-            <a:off x="3657600" y="2258568"/>
-            <a:ext cx="1097280" cy="502920"/>
-          </a:xfrm>
-          <a:prstGeom prst="rect">
-            <a:avLst/>
-          </a:prstGeom>
-          <a:noFill/>
-        </p:spPr>
-        <p:txBody>
-          <a:bodyPr wrap="square" lIns="0" rIns="0" tIns="0" bIns="0">
-            <a:spAutoFit/>
-          </a:bodyPr>
-          <a:lstStyle/>
-          <a:p>
-            <a:pPr algn="ctr"/>
-            <a:r>
-              <a:rPr sz="1600" b="1" i="0">
+          <p:cNvPr id="29" name="TextBox 28"/>
+          <p:cNvSpPr txBox="1"/>
+          <p:nvPr/>
+        </p:nvSpPr>
+        <p:spPr>
+          <a:xfrm>
+            <a:off x="3474720" y="3602736"/>
+            <a:ext cx="1005840" cy="329184"/>
+          </a:xfrm>
+          <a:prstGeom prst="rect">
+            <a:avLst/>
+          </a:prstGeom>
+          <a:noFill/>
+        </p:spPr>
+        <p:txBody>
+          <a:bodyPr wrap="square" lIns="0" rIns="0" tIns="0" bIns="0">
+            <a:spAutoFit/>
+          </a:bodyPr>
+          <a:lstStyle/>
+          <a:p>
+            <a:pPr algn="ctr"/>
+            <a:r>
+              <a:rPr sz="1300" b="1" i="0">
                 <a:solidFill>
                   <a:srgbClr val="DC2626"/>
                 </a:solidFill>
@@ -14448,14 +17249,14 @@
       </p:sp>
       <p:sp>
         <p:nvSpPr>
-          <p:cNvPr id="15" name="Rectangle 14"/>
+          <p:cNvPr id="30" name="Rectangle 29"/>
           <p:cNvSpPr/>
           <p:nvPr/>
         </p:nvSpPr>
         <p:spPr>
           <a:xfrm>
-            <a:off x="457200" y="2916936"/>
-            <a:ext cx="4937760" cy="685800"/>
+            <a:off x="457200" y="4014216"/>
+            <a:ext cx="4937760" cy="438912"/>
           </a:xfrm>
           <a:prstGeom prst="rect">
             <a:avLst/>
@@ -14491,14 +17292,14 @@
       </p:sp>
       <p:sp>
         <p:nvSpPr>
-          <p:cNvPr id="16" name="TextBox 15"/>
-          <p:cNvSpPr txBox="1"/>
-          <p:nvPr/>
-        </p:nvSpPr>
-        <p:spPr>
-          <a:xfrm>
-            <a:off x="594360" y="3008376"/>
-            <a:ext cx="1920240" cy="502920"/>
+          <p:cNvPr id="31" name="TextBox 30"/>
+          <p:cNvSpPr txBox="1"/>
+          <p:nvPr/>
+        </p:nvSpPr>
+        <p:spPr>
+          <a:xfrm>
+            <a:off x="594360" y="4078224"/>
+            <a:ext cx="1828800" cy="329184"/>
           </a:xfrm>
           <a:prstGeom prst="rect">
             <a:avLst/>
@@ -14513,7 +17314,7 @@
           <a:p>
             <a:pPr algn="l"/>
             <a:r>
-              <a:rPr sz="1100" b="0" i="0">
+              <a:rPr sz="1000" b="0" i="0">
                 <a:solidFill>
                   <a:srgbClr val="FFFFFF"/>
                 </a:solidFill>
@@ -14526,29 +17327,29 @@
       </p:sp>
       <p:sp>
         <p:nvSpPr>
-          <p:cNvPr id="17" name="TextBox 16"/>
-          <p:cNvSpPr txBox="1"/>
-          <p:nvPr/>
-        </p:nvSpPr>
-        <p:spPr>
-          <a:xfrm>
-            <a:off x="2560320" y="3008376"/>
-            <a:ext cx="1097280" cy="502920"/>
-          </a:xfrm>
-          <a:prstGeom prst="rect">
-            <a:avLst/>
-          </a:prstGeom>
-          <a:noFill/>
-        </p:spPr>
-        <p:txBody>
-          <a:bodyPr wrap="square" lIns="0" rIns="0" tIns="0" bIns="0">
-            <a:spAutoFit/>
-          </a:bodyPr>
-          <a:lstStyle/>
-          <a:p>
-            <a:pPr algn="ctr"/>
-            <a:r>
-              <a:rPr sz="1600" b="1" i="0">
+          <p:cNvPr id="32" name="TextBox 31"/>
+          <p:cNvSpPr txBox="1"/>
+          <p:nvPr/>
+        </p:nvSpPr>
+        <p:spPr>
+          <a:xfrm>
+            <a:off x="2423160" y="4078224"/>
+            <a:ext cx="1005840" cy="329184"/>
+          </a:xfrm>
+          <a:prstGeom prst="rect">
+            <a:avLst/>
+          </a:prstGeom>
+          <a:noFill/>
+        </p:spPr>
+        <p:txBody>
+          <a:bodyPr wrap="square" lIns="0" rIns="0" tIns="0" bIns="0">
+            <a:spAutoFit/>
+          </a:bodyPr>
+          <a:lstStyle/>
+          <a:p>
+            <a:pPr algn="ctr"/>
+            <a:r>
+              <a:rPr sz="1300" b="1" i="0">
                 <a:solidFill>
                   <a:srgbClr val="CADCFC"/>
                 </a:solidFill>
@@ -14561,29 +17362,29 @@
       </p:sp>
       <p:sp>
         <p:nvSpPr>
-          <p:cNvPr id="18" name="TextBox 17"/>
-          <p:cNvSpPr txBox="1"/>
-          <p:nvPr/>
-        </p:nvSpPr>
-        <p:spPr>
-          <a:xfrm>
-            <a:off x="3657600" y="3008376"/>
-            <a:ext cx="1097280" cy="502920"/>
-          </a:xfrm>
-          <a:prstGeom prst="rect">
-            <a:avLst/>
-          </a:prstGeom>
-          <a:noFill/>
-        </p:spPr>
-        <p:txBody>
-          <a:bodyPr wrap="square" lIns="0" rIns="0" tIns="0" bIns="0">
-            <a:spAutoFit/>
-          </a:bodyPr>
-          <a:lstStyle/>
-          <a:p>
-            <a:pPr algn="ctr"/>
-            <a:r>
-              <a:rPr sz="1600" b="1" i="0">
+          <p:cNvPr id="33" name="TextBox 32"/>
+          <p:cNvSpPr txBox="1"/>
+          <p:nvPr/>
+        </p:nvSpPr>
+        <p:spPr>
+          <a:xfrm>
+            <a:off x="3474720" y="4078224"/>
+            <a:ext cx="1005840" cy="329184"/>
+          </a:xfrm>
+          <a:prstGeom prst="rect">
+            <a:avLst/>
+          </a:prstGeom>
+          <a:noFill/>
+        </p:spPr>
+        <p:txBody>
+          <a:bodyPr wrap="square" lIns="0" rIns="0" tIns="0" bIns="0">
+            <a:spAutoFit/>
+          </a:bodyPr>
+          <a:lstStyle/>
+          <a:p>
+            <a:pPr algn="ctr"/>
+            <a:r>
+              <a:rPr sz="1300" b="1" i="0">
                 <a:solidFill>
                   <a:srgbClr val="059669"/>
                 </a:solidFill>
@@ -14596,14 +17397,14 @@
       </p:sp>
       <p:sp>
         <p:nvSpPr>
-          <p:cNvPr id="19" name="Rectangle 18"/>
+          <p:cNvPr id="34" name="Rectangle 33"/>
           <p:cNvSpPr/>
           <p:nvPr/>
         </p:nvSpPr>
         <p:spPr>
           <a:xfrm>
-            <a:off x="457200" y="3666744"/>
-            <a:ext cx="4937760" cy="685800"/>
+            <a:off x="457200" y="4489704"/>
+            <a:ext cx="4937760" cy="438912"/>
           </a:xfrm>
           <a:prstGeom prst="rect">
             <a:avLst/>
@@ -14639,14 +17440,14 @@
       </p:sp>
       <p:sp>
         <p:nvSpPr>
-          <p:cNvPr id="20" name="TextBox 19"/>
-          <p:cNvSpPr txBox="1"/>
-          <p:nvPr/>
-        </p:nvSpPr>
-        <p:spPr>
-          <a:xfrm>
-            <a:off x="594360" y="3758183"/>
-            <a:ext cx="1920240" cy="502920"/>
+          <p:cNvPr id="35" name="TextBox 34"/>
+          <p:cNvSpPr txBox="1"/>
+          <p:nvPr/>
+        </p:nvSpPr>
+        <p:spPr>
+          <a:xfrm>
+            <a:off x="594360" y="4553712"/>
+            <a:ext cx="1828800" cy="329184"/>
           </a:xfrm>
           <a:prstGeom prst="rect">
             <a:avLst/>
@@ -14661,97 +17462,280 @@
           <a:p>
             <a:pPr algn="l"/>
             <a:r>
-              <a:rPr sz="1100" b="0" i="0">
+              <a:rPr sz="1000" b="0" i="0">
                 <a:solidFill>
                   <a:srgbClr val="FFFFFF"/>
                 </a:solidFill>
                 <a:latin typeface="Calibri"/>
               </a:rPr>
-              <a:t>Paid / Display</a:t>
-            </a:r>
-          </a:p>
-        </p:txBody>
-      </p:sp>
-      <p:sp>
-        <p:nvSpPr>
-          <p:cNvPr id="21" name="TextBox 20"/>
-          <p:cNvSpPr txBox="1"/>
-          <p:nvPr/>
-        </p:nvSpPr>
-        <p:spPr>
-          <a:xfrm>
-            <a:off x="2560320" y="3758183"/>
-            <a:ext cx="1097280" cy="502920"/>
-          </a:xfrm>
-          <a:prstGeom prst="rect">
-            <a:avLst/>
-          </a:prstGeom>
-          <a:noFill/>
-        </p:spPr>
-        <p:txBody>
-          <a:bodyPr wrap="square" lIns="0" rIns="0" tIns="0" bIns="0">
-            <a:spAutoFit/>
-          </a:bodyPr>
-          <a:lstStyle/>
-          <a:p>
-            <a:pPr algn="ctr"/>
-            <a:r>
-              <a:rPr sz="1600" b="1" i="0">
+              <a:t>Social</a:t>
+            </a:r>
+          </a:p>
+        </p:txBody>
+      </p:sp>
+      <p:sp>
+        <p:nvSpPr>
+          <p:cNvPr id="36" name="TextBox 35"/>
+          <p:cNvSpPr txBox="1"/>
+          <p:nvPr/>
+        </p:nvSpPr>
+        <p:spPr>
+          <a:xfrm>
+            <a:off x="2423160" y="4553712"/>
+            <a:ext cx="1005840" cy="329184"/>
+          </a:xfrm>
+          <a:prstGeom prst="rect">
+            <a:avLst/>
+          </a:prstGeom>
+          <a:noFill/>
+        </p:spPr>
+        <p:txBody>
+          <a:bodyPr wrap="square" lIns="0" rIns="0" tIns="0" bIns="0">
+            <a:spAutoFit/>
+          </a:bodyPr>
+          <a:lstStyle/>
+          <a:p>
+            <a:pPr algn="ctr"/>
+            <a:r>
+              <a:rPr sz="1300" b="1" i="0">
                 <a:solidFill>
                   <a:srgbClr val="CADCFC"/>
                 </a:solidFill>
                 <a:latin typeface="Calibri"/>
               </a:rPr>
-              <a:t>70.0%</a:t>
-            </a:r>
-          </a:p>
-        </p:txBody>
-      </p:sp>
-      <p:sp>
-        <p:nvSpPr>
-          <p:cNvPr id="22" name="TextBox 21"/>
-          <p:cNvSpPr txBox="1"/>
-          <p:nvPr/>
-        </p:nvSpPr>
-        <p:spPr>
-          <a:xfrm>
-            <a:off x="3657600" y="3758183"/>
-            <a:ext cx="1097280" cy="502920"/>
-          </a:xfrm>
-          <a:prstGeom prst="rect">
-            <a:avLst/>
-          </a:prstGeom>
-          <a:noFill/>
-        </p:spPr>
-        <p:txBody>
-          <a:bodyPr wrap="square" lIns="0" rIns="0" tIns="0" bIns="0">
-            <a:spAutoFit/>
-          </a:bodyPr>
-          <a:lstStyle/>
-          <a:p>
-            <a:pPr algn="ctr"/>
-            <a:r>
-              <a:rPr sz="1600" b="1" i="0">
+              <a:t>74.8%</a:t>
+            </a:r>
+          </a:p>
+        </p:txBody>
+      </p:sp>
+      <p:sp>
+        <p:nvSpPr>
+          <p:cNvPr id="37" name="TextBox 36"/>
+          <p:cNvSpPr txBox="1"/>
+          <p:nvPr/>
+        </p:nvSpPr>
+        <p:spPr>
+          <a:xfrm>
+            <a:off x="3474720" y="4553712"/>
+            <a:ext cx="1005840" cy="329184"/>
+          </a:xfrm>
+          <a:prstGeom prst="rect">
+            <a:avLst/>
+          </a:prstGeom>
+          <a:noFill/>
+        </p:spPr>
+        <p:txBody>
+          <a:bodyPr wrap="square" lIns="0" rIns="0" tIns="0" bIns="0">
+            <a:spAutoFit/>
+          </a:bodyPr>
+          <a:lstStyle/>
+          <a:p>
+            <a:pPr algn="ctr"/>
+            <a:r>
+              <a:rPr sz="1300" b="1" i="0">
                 <a:solidFill>
                   <a:srgbClr val="DC2626"/>
                 </a:solidFill>
                 <a:latin typeface="Calibri"/>
               </a:rPr>
-              <a:t>70.6%</a:t>
-            </a:r>
-          </a:p>
-        </p:txBody>
-      </p:sp>
-      <p:sp>
-        <p:nvSpPr>
-          <p:cNvPr id="23" name="Rectangle 22"/>
+              <a:t>75.1%</a:t>
+            </a:r>
+          </a:p>
+        </p:txBody>
+      </p:sp>
+      <p:sp>
+        <p:nvSpPr>
+          <p:cNvPr id="38" name="Rectangle 37"/>
           <p:cNvSpPr/>
           <p:nvPr/>
         </p:nvSpPr>
         <p:spPr>
           <a:xfrm>
-            <a:off x="457200" y="4416552"/>
-            <a:ext cx="4937760" cy="685800"/>
+            <a:off x="5760720" y="914400"/>
+            <a:ext cx="6126480" cy="2194560"/>
+          </a:xfrm>
+          <a:prstGeom prst="rect">
+            <a:avLst/>
+          </a:prstGeom>
+          <a:solidFill>
+            <a:srgbClr val="1E354A"/>
+          </a:solidFill>
+          <a:ln>
+            <a:noFill/>
+          </a:ln>
+        </p:spPr>
+        <p:style>
+          <a:lnRef idx="1">
+            <a:schemeClr val="accent1"/>
+          </a:lnRef>
+          <a:fillRef idx="3">
+            <a:schemeClr val="accent1"/>
+          </a:fillRef>
+          <a:effectRef idx="2">
+            <a:schemeClr val="accent1"/>
+          </a:effectRef>
+          <a:fontRef idx="minor">
+            <a:schemeClr val="lt1"/>
+          </a:fontRef>
+        </p:style>
+        <p:txBody>
+          <a:bodyPr rtlCol="0" anchor="ctr"/>
+          <a:lstStyle/>
+          <a:p>
+            <a:pPr algn="ctr"/>
+          </a:p>
+        </p:txBody>
+      </p:sp>
+      <p:sp>
+        <p:nvSpPr>
+          <p:cNvPr id="39" name="TextBox 38"/>
+          <p:cNvSpPr txBox="1"/>
+          <p:nvPr/>
+        </p:nvSpPr>
+        <p:spPr>
+          <a:xfrm>
+            <a:off x="5943600" y="960120"/>
+            <a:ext cx="5760720" cy="384048"/>
+          </a:xfrm>
+          <a:prstGeom prst="rect">
+            <a:avLst/>
+          </a:prstGeom>
+          <a:noFill/>
+        </p:spPr>
+        <p:txBody>
+          <a:bodyPr wrap="square" lIns="0" rIns="0" tIns="0" bIns="0">
+            <a:spAutoFit/>
+          </a:bodyPr>
+          <a:lstStyle/>
+          <a:p>
+            <a:pPr algn="l"/>
+            <a:r>
+              <a:rPr sz="1300" b="1" i="0">
+                <a:solidFill>
+                  <a:srgbClr val="FFFFFF"/>
+                </a:solidFill>
+                <a:latin typeface="Calibri"/>
+              </a:rPr>
+              <a:t>By Device</a:t>
+            </a:r>
+          </a:p>
+        </p:txBody>
+      </p:sp>
+      <p:sp>
+        <p:nvSpPr>
+          <p:cNvPr id="40" name="TextBox 39"/>
+          <p:cNvSpPr txBox="1"/>
+          <p:nvPr/>
+        </p:nvSpPr>
+        <p:spPr>
+          <a:xfrm>
+            <a:off x="5943600" y="1371600"/>
+            <a:ext cx="5760720" cy="457200"/>
+          </a:xfrm>
+          <a:prstGeom prst="rect">
+            <a:avLst/>
+          </a:prstGeom>
+          <a:noFill/>
+        </p:spPr>
+        <p:txBody>
+          <a:bodyPr wrap="square" lIns="0" rIns="0" tIns="0" bIns="0">
+            <a:spAutoFit/>
+          </a:bodyPr>
+          <a:lstStyle/>
+          <a:p>
+            <a:pPr algn="l"/>
+            <a:r>
+              <a:rPr sz="1300" b="0" i="0">
+                <a:solidFill>
+                  <a:srgbClr val="DC2626"/>
+                </a:solidFill>
+                <a:latin typeface="Calibri"/>
+              </a:rPr>
+              <a:t>Desktop    58.1% → 61.8%</a:t>
+            </a:r>
+          </a:p>
+        </p:txBody>
+      </p:sp>
+      <p:sp>
+        <p:nvSpPr>
+          <p:cNvPr id="41" name="TextBox 40"/>
+          <p:cNvSpPr txBox="1"/>
+          <p:nvPr/>
+        </p:nvSpPr>
+        <p:spPr>
+          <a:xfrm>
+            <a:off x="5943600" y="1920240"/>
+            <a:ext cx="5760720" cy="457200"/>
+          </a:xfrm>
+          <a:prstGeom prst="rect">
+            <a:avLst/>
+          </a:prstGeom>
+          <a:noFill/>
+        </p:spPr>
+        <p:txBody>
+          <a:bodyPr wrap="square" lIns="0" rIns="0" tIns="0" bIns="0">
+            <a:spAutoFit/>
+          </a:bodyPr>
+          <a:lstStyle/>
+          <a:p>
+            <a:pPr algn="l"/>
+            <a:r>
+              <a:rPr sz="1300" b="0" i="0">
+                <a:solidFill>
+                  <a:srgbClr val="DC2626"/>
+                </a:solidFill>
+                <a:latin typeface="Calibri"/>
+              </a:rPr>
+              <a:t>Mobile     67.5% → 69.6%</a:t>
+            </a:r>
+          </a:p>
+        </p:txBody>
+      </p:sp>
+      <p:sp>
+        <p:nvSpPr>
+          <p:cNvPr id="42" name="TextBox 41"/>
+          <p:cNvSpPr txBox="1"/>
+          <p:nvPr/>
+        </p:nvSpPr>
+        <p:spPr>
+          <a:xfrm>
+            <a:off x="5943600" y="2468880"/>
+            <a:ext cx="5760720" cy="457200"/>
+          </a:xfrm>
+          <a:prstGeom prst="rect">
+            <a:avLst/>
+          </a:prstGeom>
+          <a:noFill/>
+        </p:spPr>
+        <p:txBody>
+          <a:bodyPr wrap="square" lIns="0" rIns="0" tIns="0" bIns="0">
+            <a:spAutoFit/>
+          </a:bodyPr>
+          <a:lstStyle/>
+          <a:p>
+            <a:pPr algn="l"/>
+            <a:r>
+              <a:rPr sz="1300" b="0" i="0">
+                <a:solidFill>
+                  <a:srgbClr val="059669"/>
+                </a:solidFill>
+                <a:latin typeface="Calibri"/>
+              </a:rPr>
+              <a:t>Tablet     74.3% → 70.1%</a:t>
+            </a:r>
+          </a:p>
+        </p:txBody>
+      </p:sp>
+      <p:sp>
+        <p:nvSpPr>
+          <p:cNvPr id="43" name="Rectangle 42"/>
+          <p:cNvSpPr/>
+          <p:nvPr/>
+        </p:nvSpPr>
+        <p:spPr>
+          <a:xfrm>
+            <a:off x="5760720" y="3291840"/>
+            <a:ext cx="6126480" cy="2743200"/>
           </a:xfrm>
           <a:prstGeom prst="rect">
             <a:avLst/>
@@ -14787,373 +17771,7 @@
       </p:sp>
       <p:sp>
         <p:nvSpPr>
-          <p:cNvPr id="24" name="TextBox 23"/>
-          <p:cNvSpPr txBox="1"/>
-          <p:nvPr/>
-        </p:nvSpPr>
-        <p:spPr>
-          <a:xfrm>
-            <a:off x="594360" y="4507992"/>
-            <a:ext cx="1920240" cy="502920"/>
-          </a:xfrm>
-          <a:prstGeom prst="rect">
-            <a:avLst/>
-          </a:prstGeom>
-          <a:noFill/>
-        </p:spPr>
-        <p:txBody>
-          <a:bodyPr wrap="square" lIns="0" rIns="0" tIns="0" bIns="0">
-            <a:spAutoFit/>
-          </a:bodyPr>
-          <a:lstStyle/>
-          <a:p>
-            <a:pPr algn="l"/>
-            <a:r>
-              <a:rPr sz="1100" b="0" i="0">
-                <a:solidFill>
-                  <a:srgbClr val="FFFFFF"/>
-                </a:solidFill>
-                <a:latin typeface="Calibri"/>
-              </a:rPr>
-              <a:t>Social</a:t>
-            </a:r>
-          </a:p>
-        </p:txBody>
-      </p:sp>
-      <p:sp>
-        <p:nvSpPr>
-          <p:cNvPr id="25" name="TextBox 24"/>
-          <p:cNvSpPr txBox="1"/>
-          <p:nvPr/>
-        </p:nvSpPr>
-        <p:spPr>
-          <a:xfrm>
-            <a:off x="2560320" y="4507992"/>
-            <a:ext cx="1097280" cy="502920"/>
-          </a:xfrm>
-          <a:prstGeom prst="rect">
-            <a:avLst/>
-          </a:prstGeom>
-          <a:noFill/>
-        </p:spPr>
-        <p:txBody>
-          <a:bodyPr wrap="square" lIns="0" rIns="0" tIns="0" bIns="0">
-            <a:spAutoFit/>
-          </a:bodyPr>
-          <a:lstStyle/>
-          <a:p>
-            <a:pPr algn="ctr"/>
-            <a:r>
-              <a:rPr sz="1600" b="1" i="0">
-                <a:solidFill>
-                  <a:srgbClr val="CADCFC"/>
-                </a:solidFill>
-                <a:latin typeface="Calibri"/>
-              </a:rPr>
-              <a:t>74.8%</a:t>
-            </a:r>
-          </a:p>
-        </p:txBody>
-      </p:sp>
-      <p:sp>
-        <p:nvSpPr>
-          <p:cNvPr id="26" name="TextBox 25"/>
-          <p:cNvSpPr txBox="1"/>
-          <p:nvPr/>
-        </p:nvSpPr>
-        <p:spPr>
-          <a:xfrm>
-            <a:off x="3657600" y="4507992"/>
-            <a:ext cx="1097280" cy="502920"/>
-          </a:xfrm>
-          <a:prstGeom prst="rect">
-            <a:avLst/>
-          </a:prstGeom>
-          <a:noFill/>
-        </p:spPr>
-        <p:txBody>
-          <a:bodyPr wrap="square" lIns="0" rIns="0" tIns="0" bIns="0">
-            <a:spAutoFit/>
-          </a:bodyPr>
-          <a:lstStyle/>
-          <a:p>
-            <a:pPr algn="ctr"/>
-            <a:r>
-              <a:rPr sz="1600" b="1" i="0">
-                <a:solidFill>
-                  <a:srgbClr val="DC2626"/>
-                </a:solidFill>
-                <a:latin typeface="Calibri"/>
-              </a:rPr>
-              <a:t>75.1%</a:t>
-            </a:r>
-          </a:p>
-        </p:txBody>
-      </p:sp>
-      <p:sp>
-        <p:nvSpPr>
-          <p:cNvPr id="27" name="TextBox 26"/>
-          <p:cNvSpPr txBox="1"/>
-          <p:nvPr/>
-        </p:nvSpPr>
-        <p:spPr>
-          <a:xfrm>
-            <a:off x="457200" y="1325880"/>
-            <a:ext cx="4572000" cy="320040"/>
-          </a:xfrm>
-          <a:prstGeom prst="rect">
-            <a:avLst/>
-          </a:prstGeom>
-          <a:noFill/>
-        </p:spPr>
-        <p:txBody>
-          <a:bodyPr wrap="square" lIns="0" rIns="0" tIns="0" bIns="0">
-            <a:spAutoFit/>
-          </a:bodyPr>
-          <a:lstStyle/>
-          <a:p>
-            <a:pPr algn="l"/>
-            <a:r>
-              <a:rPr sz="900" b="0" i="0">
-                <a:solidFill>
-                  <a:srgbClr val="CADCFC"/>
-                </a:solidFill>
-                <a:latin typeface="Calibri"/>
-              </a:rPr>
-              <a:t>            Source         Jan     Feb</a:t>
-            </a:r>
-          </a:p>
-        </p:txBody>
-      </p:sp>
-      <p:sp>
-        <p:nvSpPr>
-          <p:cNvPr id="28" name="Rectangle 27"/>
-          <p:cNvSpPr/>
-          <p:nvPr/>
-        </p:nvSpPr>
-        <p:spPr>
-          <a:xfrm>
-            <a:off x="5760720" y="914400"/>
-            <a:ext cx="6126480" cy="2194560"/>
-          </a:xfrm>
-          <a:prstGeom prst="rect">
-            <a:avLst/>
-          </a:prstGeom>
-          <a:solidFill>
-            <a:srgbClr val="1E354A"/>
-          </a:solidFill>
-          <a:ln>
-            <a:noFill/>
-          </a:ln>
-        </p:spPr>
-        <p:style>
-          <a:lnRef idx="1">
-            <a:schemeClr val="accent1"/>
-          </a:lnRef>
-          <a:fillRef idx="3">
-            <a:schemeClr val="accent1"/>
-          </a:fillRef>
-          <a:effectRef idx="2">
-            <a:schemeClr val="accent1"/>
-          </a:effectRef>
-          <a:fontRef idx="minor">
-            <a:schemeClr val="lt1"/>
-          </a:fontRef>
-        </p:style>
-        <p:txBody>
-          <a:bodyPr rtlCol="0" anchor="ctr"/>
-          <a:lstStyle/>
-          <a:p>
-            <a:pPr algn="ctr"/>
-          </a:p>
-        </p:txBody>
-      </p:sp>
-      <p:sp>
-        <p:nvSpPr>
-          <p:cNvPr id="29" name="TextBox 28"/>
-          <p:cNvSpPr txBox="1"/>
-          <p:nvPr/>
-        </p:nvSpPr>
-        <p:spPr>
-          <a:xfrm>
-            <a:off x="5943600" y="960120"/>
-            <a:ext cx="5760720" cy="384048"/>
-          </a:xfrm>
-          <a:prstGeom prst="rect">
-            <a:avLst/>
-          </a:prstGeom>
-          <a:noFill/>
-        </p:spPr>
-        <p:txBody>
-          <a:bodyPr wrap="square" lIns="0" rIns="0" tIns="0" bIns="0">
-            <a:spAutoFit/>
-          </a:bodyPr>
-          <a:lstStyle/>
-          <a:p>
-            <a:pPr algn="l"/>
-            <a:r>
-              <a:rPr sz="1300" b="1" i="0">
-                <a:solidFill>
-                  <a:srgbClr val="FFFFFF"/>
-                </a:solidFill>
-                <a:latin typeface="Calibri"/>
-              </a:rPr>
-              <a:t>By Device</a:t>
-            </a:r>
-          </a:p>
-        </p:txBody>
-      </p:sp>
-      <p:sp>
-        <p:nvSpPr>
-          <p:cNvPr id="30" name="TextBox 29"/>
-          <p:cNvSpPr txBox="1"/>
-          <p:nvPr/>
-        </p:nvSpPr>
-        <p:spPr>
-          <a:xfrm>
-            <a:off x="5943600" y="1371600"/>
-            <a:ext cx="5760720" cy="457200"/>
-          </a:xfrm>
-          <a:prstGeom prst="rect">
-            <a:avLst/>
-          </a:prstGeom>
-          <a:noFill/>
-        </p:spPr>
-        <p:txBody>
-          <a:bodyPr wrap="square" lIns="0" rIns="0" tIns="0" bIns="0">
-            <a:spAutoFit/>
-          </a:bodyPr>
-          <a:lstStyle/>
-          <a:p>
-            <a:pPr algn="l"/>
-            <a:r>
-              <a:rPr sz="1300" b="0" i="0">
-                <a:solidFill>
-                  <a:srgbClr val="DC2626"/>
-                </a:solidFill>
-                <a:latin typeface="Calibri"/>
-              </a:rPr>
-              <a:t>Desktop    58.1% → 61.8%</a:t>
-            </a:r>
-          </a:p>
-        </p:txBody>
-      </p:sp>
-      <p:sp>
-        <p:nvSpPr>
-          <p:cNvPr id="31" name="TextBox 30"/>
-          <p:cNvSpPr txBox="1"/>
-          <p:nvPr/>
-        </p:nvSpPr>
-        <p:spPr>
-          <a:xfrm>
-            <a:off x="5943600" y="1920240"/>
-            <a:ext cx="5760720" cy="457200"/>
-          </a:xfrm>
-          <a:prstGeom prst="rect">
-            <a:avLst/>
-          </a:prstGeom>
-          <a:noFill/>
-        </p:spPr>
-        <p:txBody>
-          <a:bodyPr wrap="square" lIns="0" rIns="0" tIns="0" bIns="0">
-            <a:spAutoFit/>
-          </a:bodyPr>
-          <a:lstStyle/>
-          <a:p>
-            <a:pPr algn="l"/>
-            <a:r>
-              <a:rPr sz="1300" b="0" i="0">
-                <a:solidFill>
-                  <a:srgbClr val="DC2626"/>
-                </a:solidFill>
-                <a:latin typeface="Calibri"/>
-              </a:rPr>
-              <a:t>Mobile     67.5% → 69.6%</a:t>
-            </a:r>
-          </a:p>
-        </p:txBody>
-      </p:sp>
-      <p:sp>
-        <p:nvSpPr>
-          <p:cNvPr id="32" name="TextBox 31"/>
-          <p:cNvSpPr txBox="1"/>
-          <p:nvPr/>
-        </p:nvSpPr>
-        <p:spPr>
-          <a:xfrm>
-            <a:off x="5943600" y="2468880"/>
-            <a:ext cx="5760720" cy="457200"/>
-          </a:xfrm>
-          <a:prstGeom prst="rect">
-            <a:avLst/>
-          </a:prstGeom>
-          <a:noFill/>
-        </p:spPr>
-        <p:txBody>
-          <a:bodyPr wrap="square" lIns="0" rIns="0" tIns="0" bIns="0">
-            <a:spAutoFit/>
-          </a:bodyPr>
-          <a:lstStyle/>
-          <a:p>
-            <a:pPr algn="l"/>
-            <a:r>
-              <a:rPr sz="1300" b="0" i="0">
-                <a:solidFill>
-                  <a:srgbClr val="059669"/>
-                </a:solidFill>
-                <a:latin typeface="Calibri"/>
-              </a:rPr>
-              <a:t>Tablet     74.3% → 70.1%</a:t>
-            </a:r>
-          </a:p>
-        </p:txBody>
-      </p:sp>
-      <p:sp>
-        <p:nvSpPr>
-          <p:cNvPr id="33" name="Rectangle 32"/>
-          <p:cNvSpPr/>
-          <p:nvPr/>
-        </p:nvSpPr>
-        <p:spPr>
-          <a:xfrm>
-            <a:off x="5760720" y="3291840"/>
-            <a:ext cx="6126480" cy="2743200"/>
-          </a:xfrm>
-          <a:prstGeom prst="rect">
-            <a:avLst/>
-          </a:prstGeom>
-          <a:solidFill>
-            <a:srgbClr val="152B3D"/>
-          </a:solidFill>
-          <a:ln>
-            <a:noFill/>
-          </a:ln>
-        </p:spPr>
-        <p:style>
-          <a:lnRef idx="1">
-            <a:schemeClr val="accent1"/>
-          </a:lnRef>
-          <a:fillRef idx="3">
-            <a:schemeClr val="accent1"/>
-          </a:fillRef>
-          <a:effectRef idx="2">
-            <a:schemeClr val="accent1"/>
-          </a:effectRef>
-          <a:fontRef idx="minor">
-            <a:schemeClr val="lt1"/>
-          </a:fontRef>
-        </p:style>
-        <p:txBody>
-          <a:bodyPr rtlCol="0" anchor="ctr"/>
-          <a:lstStyle/>
-          <a:p>
-            <a:pPr algn="ctr"/>
-          </a:p>
-        </p:txBody>
-      </p:sp>
-      <p:sp>
-        <p:nvSpPr>
-          <p:cNvPr id="34" name="Rectangle 33"/>
+          <p:cNvPr id="44" name="Rectangle 43"/>
           <p:cNvSpPr/>
           <p:nvPr/>
         </p:nvSpPr>
@@ -15196,7 +17814,7 @@
       </p:sp>
       <p:sp>
         <p:nvSpPr>
-          <p:cNvPr id="35" name="TextBox 34"/>
+          <p:cNvPr id="45" name="TextBox 44"/>
           <p:cNvSpPr txBox="1"/>
           <p:nvPr/>
         </p:nvSpPr>
@@ -15231,7 +17849,7 @@
       </p:sp>
       <p:sp>
         <p:nvSpPr>
-          <p:cNvPr id="36" name="TextBox 35"/>
+          <p:cNvPr id="46" name="TextBox 45"/>
           <p:cNvSpPr txBox="1"/>
           <p:nvPr/>
         </p:nvSpPr>
@@ -15259,14 +17877,14 @@
                 </a:solidFill>
                 <a:latin typeface="Calibri"/>
               </a:rPr>
-              <a:t>→  Organic Search BR ~49% → best quality source; invest in SEO content clusters</a:t>
-            </a:r>
-          </a:p>
-        </p:txBody>
-      </p:sp>
-      <p:sp>
-        <p:nvSpPr>
-          <p:cNvPr id="37" name="TextBox 36"/>
+              <a:t>→  Paid BR stuck at 70%+ both months → stop Amazon Ads (99%!); rebuild display landing pages</a:t>
+            </a:r>
+          </a:p>
+        </p:txBody>
+      </p:sp>
+      <p:sp>
+        <p:nvSpPr>
+          <p:cNvPr id="47" name="TextBox 46"/>
           <p:cNvSpPr txBox="1"/>
           <p:nvPr/>
         </p:nvSpPr>
@@ -15294,14 +17912,14 @@
                 </a:solidFill>
                 <a:latin typeface="Calibri"/>
               </a:rPr>
-              <a:t>→  Direct BR jumped to 69.4% in Feb → investigate dark social &amp; missing UTMs</a:t>
-            </a:r>
-          </a:p>
-        </p:txBody>
-      </p:sp>
-      <p:sp>
-        <p:nvSpPr>
-          <p:cNvPr id="38" name="TextBox 37"/>
+              <a:t>→  Non-Paid BR rising +3.8pp → audit Direct traffic UTMs &amp; SEO landing page quality</a:t>
+            </a:r>
+          </a:p>
+        </p:txBody>
+      </p:sp>
+      <p:sp>
+        <p:nvSpPr>
+          <p:cNvPr id="48" name="TextBox 47"/>
           <p:cNvSpPr txBox="1"/>
           <p:nvPr/>
         </p:nvSpPr>
@@ -15329,14 +17947,14 @@
                 </a:solidFill>
                 <a:latin typeface="Calibri"/>
               </a:rPr>
-              <a:t>→  Paid-Display BR 70.6% → narrow audience targeting; align ad to landing page</a:t>
-            </a:r>
-          </a:p>
-        </p:txBody>
-      </p:sp>
-      <p:sp>
-        <p:nvSpPr>
-          <p:cNvPr id="39" name="TextBox 38"/>
+              <a:t>→  Organic Search BR ~49% (best quality) → double down: invest in AI/Edge content clusters</a:t>
+            </a:r>
+          </a:p>
+        </p:txBody>
+      </p:sp>
+      <p:sp>
+        <p:nvSpPr>
+          <p:cNvPr id="49" name="TextBox 48"/>
           <p:cNvSpPr txBox="1"/>
           <p:nvPr/>
         </p:nvSpPr>
@@ -15364,14 +17982,14 @@
                 </a:solidFill>
                 <a:latin typeface="Calibri"/>
               </a:rPr>
-              <a:t>→  Mobile BR worsening (+2.1pp) → test page speed &amp; mobile CTA clarity</a:t>
-            </a:r>
-          </a:p>
-        </p:txBody>
-      </p:sp>
-      <p:sp>
-        <p:nvSpPr>
-          <p:cNvPr id="40" name="TextBox 39"/>
+              <a:t>→  Paid Desktop-heavy (55%); Non-Paid Mobile-majority (55%) → tailor ad creatives by device</a:t>
+            </a:r>
+          </a:p>
+        </p:txBody>
+      </p:sp>
+      <p:sp>
+        <p:nvSpPr>
+          <p:cNvPr id="50" name="TextBox 49"/>
           <p:cNvSpPr txBox="1"/>
           <p:nvPr/>
         </p:nvSpPr>
@@ -15399,7 +18017,7 @@
                 </a:solidFill>
                 <a:latin typeface="Calibri"/>
               </a:rPr>
-              <a:t>→  Tablet BR improving (-4.2pp) → study what UX changes are working there</a:t>
+              <a:t>→  Paid visits growing (+64.8%) with poor BR — shift budget from display to SEO</a:t>
             </a:r>
           </a:p>
         </p:txBody>
@@ -18551,7 +21169,7 @@
                 </a:solidFill>
                 <a:latin typeface="Calibri"/>
               </a:rPr>
-              <a:t>&gt;&gt; Mobile grew from 48.7% → 52.6% — now the majority device. Yet mobile PPV (1.79) still lags desktop (2.17) — a UX optimization gap.</a:t>
+              <a:t>&gt;&gt; Paid visitors: 55% Desktop / 39% Mobile.  Non-Paid visitors: 41% Desktop / 55% Mobile — mobile is the non-paid majority. Align ad targeting and UX accordingly.</a:t>
             </a:r>
           </a:p>
         </p:txBody>

--- a/webanalytics/Solidigm_Analytics_Report_JanFeb_FY26.pptx
+++ b/webanalytics/Solidigm_Analytics_Report_JanFeb_FY26.pptx
@@ -12496,7 +12496,7 @@
                 </a:solidFill>
                 <a:latin typeface="Calibri"/>
               </a:rPr>
-              <a:t>Top Traffic Leaders &amp; Engagement</a:t>
+              <a:t>Top Traffic Leaders — Feb Paid vs Non-Paid Breakdown</a:t>
             </a:r>
           </a:p>
         </p:txBody>
@@ -12531,7 +12531,7 @@
                 </a:solidFill>
                 <a:latin typeface="Calibri"/>
               </a:rPr>
-              <a:t>Top 10 pages by page views — Jan vs Feb  |  Engagement = pages/visitor for that page's audience</a:t>
+              <a:t>Top 10 pages by Feb PVs  |  Paid = Paid-Display campaigns  |  Non-Paid = Organic / Direct / Referral / Social</a:t>
             </a:r>
           </a:p>
         </p:txBody>
@@ -12581,7 +12581,93 @@
       </p:sp>
       <p:sp>
         <p:nvSpPr>
-          <p:cNvPr id="6" name="TextBox 5"/>
+          <p:cNvPr id="6" name="Rectangle 5"/>
+          <p:cNvSpPr/>
+          <p:nvPr/>
+        </p:nvSpPr>
+        <p:spPr>
+          <a:xfrm>
+            <a:off x="5166360" y="868680"/>
+            <a:ext cx="1234440" cy="384048"/>
+          </a:xfrm>
+          <a:prstGeom prst="rect">
+            <a:avLst/>
+          </a:prstGeom>
+          <a:solidFill>
+            <a:srgbClr val="155E75"/>
+          </a:solidFill>
+          <a:ln>
+            <a:noFill/>
+          </a:ln>
+        </p:spPr>
+        <p:style>
+          <a:lnRef idx="1">
+            <a:schemeClr val="accent1"/>
+          </a:lnRef>
+          <a:fillRef idx="3">
+            <a:schemeClr val="accent1"/>
+          </a:fillRef>
+          <a:effectRef idx="2">
+            <a:schemeClr val="accent1"/>
+          </a:effectRef>
+          <a:fontRef idx="minor">
+            <a:schemeClr val="lt1"/>
+          </a:fontRef>
+        </p:style>
+        <p:txBody>
+          <a:bodyPr rtlCol="0" anchor="ctr"/>
+          <a:lstStyle/>
+          <a:p>
+            <a:pPr algn="ctr"/>
+          </a:p>
+        </p:txBody>
+      </p:sp>
+      <p:sp>
+        <p:nvSpPr>
+          <p:cNvPr id="7" name="Rectangle 6"/>
+          <p:cNvSpPr/>
+          <p:nvPr/>
+        </p:nvSpPr>
+        <p:spPr>
+          <a:xfrm>
+            <a:off x="6400800" y="868680"/>
+            <a:ext cx="1371600" cy="384048"/>
+          </a:xfrm>
+          <a:prstGeom prst="rect">
+            <a:avLst/>
+          </a:prstGeom>
+          <a:solidFill>
+            <a:srgbClr val="1C7293"/>
+          </a:solidFill>
+          <a:ln>
+            <a:noFill/>
+          </a:ln>
+        </p:spPr>
+        <p:style>
+          <a:lnRef idx="1">
+            <a:schemeClr val="accent1"/>
+          </a:lnRef>
+          <a:fillRef idx="3">
+            <a:schemeClr val="accent1"/>
+          </a:fillRef>
+          <a:effectRef idx="2">
+            <a:schemeClr val="accent1"/>
+          </a:effectRef>
+          <a:fontRef idx="minor">
+            <a:schemeClr val="lt1"/>
+          </a:fontRef>
+        </p:style>
+        <p:txBody>
+          <a:bodyPr rtlCol="0" anchor="ctr"/>
+          <a:lstStyle/>
+          <a:p>
+            <a:pPr algn="ctr"/>
+          </a:p>
+        </p:txBody>
+      </p:sp>
+      <p:sp>
+        <p:nvSpPr>
+          <p:cNvPr id="8" name="TextBox 7"/>
           <p:cNvSpPr txBox="1"/>
           <p:nvPr/>
         </p:nvSpPr>
@@ -12603,7 +12689,7 @@
           <a:p>
             <a:pPr algn="ctr"/>
             <a:r>
-              <a:rPr sz="1000" b="1" i="0">
+              <a:rPr sz="900" b="1" i="0">
                 <a:solidFill>
                   <a:srgbClr val="FFFFFF"/>
                 </a:solidFill>
@@ -12616,29 +12702,29 @@
       </p:sp>
       <p:sp>
         <p:nvSpPr>
-          <p:cNvPr id="7" name="TextBox 6"/>
+          <p:cNvPr id="9" name="TextBox 8"/>
           <p:cNvSpPr txBox="1"/>
           <p:nvPr/>
         </p:nvSpPr>
         <p:spPr>
           <a:xfrm>
             <a:off x="685800" y="886968"/>
-            <a:ext cx="3520440" cy="347472"/>
-          </a:xfrm>
-          <a:prstGeom prst="rect">
-            <a:avLst/>
-          </a:prstGeom>
-          <a:noFill/>
-        </p:spPr>
-        <p:txBody>
-          <a:bodyPr wrap="square" lIns="0" rIns="0" tIns="0" bIns="0">
-            <a:spAutoFit/>
-          </a:bodyPr>
-          <a:lstStyle/>
-          <a:p>
-            <a:pPr algn="ctr"/>
-            <a:r>
-              <a:rPr sz="1000" b="1" i="0">
+            <a:ext cx="3246120" cy="347472"/>
+          </a:xfrm>
+          <a:prstGeom prst="rect">
+            <a:avLst/>
+          </a:prstGeom>
+          <a:noFill/>
+        </p:spPr>
+        <p:txBody>
+          <a:bodyPr wrap="square" lIns="0" rIns="0" tIns="0" bIns="0">
+            <a:spAutoFit/>
+          </a:bodyPr>
+          <a:lstStyle/>
+          <a:p>
+            <a:pPr algn="ctr"/>
+            <a:r>
+              <a:rPr sz="900" b="1" i="0">
                 <a:solidFill>
                   <a:srgbClr val="FFFFFF"/>
                 </a:solidFill>
@@ -12651,13 +12737,13 @@
       </p:sp>
       <p:sp>
         <p:nvSpPr>
-          <p:cNvPr id="8" name="TextBox 7"/>
-          <p:cNvSpPr txBox="1"/>
-          <p:nvPr/>
-        </p:nvSpPr>
-        <p:spPr>
-          <a:xfrm>
-            <a:off x="4251960" y="886968"/>
+          <p:cNvPr id="10" name="TextBox 9"/>
+          <p:cNvSpPr txBox="1"/>
+          <p:nvPr/>
+        </p:nvSpPr>
+        <p:spPr>
+          <a:xfrm>
+            <a:off x="3977639" y="886968"/>
             <a:ext cx="1188720" cy="347472"/>
           </a:xfrm>
           <a:prstGeom prst="rect">
@@ -12673,7 +12759,7 @@
           <a:p>
             <a:pPr algn="ctr"/>
             <a:r>
-              <a:rPr sz="1000" b="1" i="0">
+              <a:rPr sz="900" b="1" i="0">
                 <a:solidFill>
                   <a:srgbClr val="FFFFFF"/>
                 </a:solidFill>
@@ -12686,13 +12772,13 @@
       </p:sp>
       <p:sp>
         <p:nvSpPr>
-          <p:cNvPr id="9" name="TextBox 8"/>
-          <p:cNvSpPr txBox="1"/>
-          <p:nvPr/>
-        </p:nvSpPr>
-        <p:spPr>
-          <a:xfrm>
-            <a:off x="5532120" y="886968"/>
+          <p:cNvPr id="11" name="TextBox 10"/>
+          <p:cNvSpPr txBox="1"/>
+          <p:nvPr/>
+        </p:nvSpPr>
+        <p:spPr>
+          <a:xfrm>
+            <a:off x="5212080" y="886968"/>
             <a:ext cx="1188720" cy="347472"/>
           </a:xfrm>
           <a:prstGeom prst="rect">
@@ -12708,47 +12794,82 @@
           <a:p>
             <a:pPr algn="ctr"/>
             <a:r>
-              <a:rPr sz="1000" b="1" i="0">
+              <a:rPr sz="900" b="1" i="0">
                 <a:solidFill>
                   <a:srgbClr val="FFFFFF"/>
                 </a:solidFill>
                 <a:latin typeface="Calibri"/>
               </a:rPr>
-              <a:t>Feb PVs</a:t>
-            </a:r>
-          </a:p>
-        </p:txBody>
-      </p:sp>
-      <p:sp>
-        <p:nvSpPr>
-          <p:cNvPr id="10" name="TextBox 9"/>
-          <p:cNvSpPr txBox="1"/>
-          <p:nvPr/>
-        </p:nvSpPr>
-        <p:spPr>
-          <a:xfrm>
-            <a:off x="6720840" y="886968"/>
-            <a:ext cx="1097280" cy="347472"/>
-          </a:xfrm>
-          <a:prstGeom prst="rect">
-            <a:avLst/>
-          </a:prstGeom>
-          <a:noFill/>
-        </p:spPr>
-        <p:txBody>
-          <a:bodyPr wrap="square" lIns="0" rIns="0" tIns="0" bIns="0">
-            <a:spAutoFit/>
-          </a:bodyPr>
-          <a:lstStyle/>
-          <a:p>
-            <a:pPr algn="ctr"/>
-            <a:r>
-              <a:rPr sz="1000" b="1" i="0">
+              <a:t>Feb Paid PVs</a:t>
+            </a:r>
+          </a:p>
+        </p:txBody>
+      </p:sp>
+      <p:sp>
+        <p:nvSpPr>
+          <p:cNvPr id="12" name="TextBox 11"/>
+          <p:cNvSpPr txBox="1"/>
+          <p:nvPr/>
+        </p:nvSpPr>
+        <p:spPr>
+          <a:xfrm>
+            <a:off x="6446520" y="886968"/>
+            <a:ext cx="1280160" cy="347472"/>
+          </a:xfrm>
+          <a:prstGeom prst="rect">
+            <a:avLst/>
+          </a:prstGeom>
+          <a:noFill/>
+        </p:spPr>
+        <p:txBody>
+          <a:bodyPr wrap="square" lIns="0" rIns="0" tIns="0" bIns="0">
+            <a:spAutoFit/>
+          </a:bodyPr>
+          <a:lstStyle/>
+          <a:p>
+            <a:pPr algn="ctr"/>
+            <a:r>
+              <a:rPr sz="900" b="1" i="0">
                 <a:solidFill>
                   <a:srgbClr val="FFFFFF"/>
                 </a:solidFill>
                 <a:latin typeface="Calibri"/>
               </a:rPr>
+              <a:t>Feb Non-Paid PVs</a:t>
+            </a:r>
+          </a:p>
+        </p:txBody>
+      </p:sp>
+      <p:sp>
+        <p:nvSpPr>
+          <p:cNvPr id="13" name="TextBox 12"/>
+          <p:cNvSpPr txBox="1"/>
+          <p:nvPr/>
+        </p:nvSpPr>
+        <p:spPr>
+          <a:xfrm>
+            <a:off x="7772400" y="886968"/>
+            <a:ext cx="1005840" cy="347472"/>
+          </a:xfrm>
+          <a:prstGeom prst="rect">
+            <a:avLst/>
+          </a:prstGeom>
+          <a:noFill/>
+        </p:spPr>
+        <p:txBody>
+          <a:bodyPr wrap="square" lIns="0" rIns="0" tIns="0" bIns="0">
+            <a:spAutoFit/>
+          </a:bodyPr>
+          <a:lstStyle/>
+          <a:p>
+            <a:pPr algn="ctr"/>
+            <a:r>
+              <a:rPr sz="900" b="1" i="0">
+                <a:solidFill>
+                  <a:srgbClr val="FFFFFF"/>
+                </a:solidFill>
+                <a:latin typeface="Calibri"/>
+              </a:rPr>
               <a:t>MoM Δ</a:t>
             </a:r>
           </a:p>
@@ -12756,69 +12877,34 @@
       </p:sp>
       <p:sp>
         <p:nvSpPr>
-          <p:cNvPr id="11" name="TextBox 10"/>
-          <p:cNvSpPr txBox="1"/>
-          <p:nvPr/>
-        </p:nvSpPr>
-        <p:spPr>
-          <a:xfrm>
-            <a:off x="7909560" y="886968"/>
-            <a:ext cx="1188720" cy="347472"/>
-          </a:xfrm>
-          <a:prstGeom prst="rect">
-            <a:avLst/>
-          </a:prstGeom>
-          <a:noFill/>
-        </p:spPr>
-        <p:txBody>
-          <a:bodyPr wrap="square" lIns="0" rIns="0" tIns="0" bIns="0">
-            <a:spAutoFit/>
-          </a:bodyPr>
-          <a:lstStyle/>
-          <a:p>
-            <a:pPr algn="ctr"/>
-            <a:r>
-              <a:rPr sz="1000" b="1" i="0">
+          <p:cNvPr id="14" name="TextBox 13"/>
+          <p:cNvSpPr txBox="1"/>
+          <p:nvPr/>
+        </p:nvSpPr>
+        <p:spPr>
+          <a:xfrm>
+            <a:off x="8823960" y="886968"/>
+            <a:ext cx="3017520" cy="347472"/>
+          </a:xfrm>
+          <a:prstGeom prst="rect">
+            <a:avLst/>
+          </a:prstGeom>
+          <a:noFill/>
+        </p:spPr>
+        <p:txBody>
+          <a:bodyPr wrap="square" lIns="0" rIns="0" tIns="0" bIns="0">
+            <a:spAutoFit/>
+          </a:bodyPr>
+          <a:lstStyle/>
+          <a:p>
+            <a:pPr algn="ctr"/>
+            <a:r>
+              <a:rPr sz="900" b="1" i="0">
                 <a:solidFill>
                   <a:srgbClr val="FFFFFF"/>
                 </a:solidFill>
                 <a:latin typeface="Calibri"/>
               </a:rPr>
-              <a:t>Feb Visitors</a:t>
-            </a:r>
-          </a:p>
-        </p:txBody>
-      </p:sp>
-      <p:sp>
-        <p:nvSpPr>
-          <p:cNvPr id="12" name="TextBox 11"/>
-          <p:cNvSpPr txBox="1"/>
-          <p:nvPr/>
-        </p:nvSpPr>
-        <p:spPr>
-          <a:xfrm>
-            <a:off x="9189720" y="886968"/>
-            <a:ext cx="2697480" cy="347472"/>
-          </a:xfrm>
-          <a:prstGeom prst="rect">
-            <a:avLst/>
-          </a:prstGeom>
-          <a:noFill/>
-        </p:spPr>
-        <p:txBody>
-          <a:bodyPr wrap="square" lIns="0" rIns="0" tIns="0" bIns="0">
-            <a:spAutoFit/>
-          </a:bodyPr>
-          <a:lstStyle/>
-          <a:p>
-            <a:pPr algn="ctr"/>
-            <a:r>
-              <a:rPr sz="1000" b="1" i="0">
-                <a:solidFill>
-                  <a:srgbClr val="FFFFFF"/>
-                </a:solidFill>
-                <a:latin typeface="Calibri"/>
-              </a:rPr>
               <a:t>Engagement Signal</a:t>
             </a:r>
           </a:p>
@@ -12826,7 +12912,7 @@
       </p:sp>
       <p:sp>
         <p:nvSpPr>
-          <p:cNvPr id="13" name="Rectangle 12"/>
+          <p:cNvPr id="15" name="Rectangle 14"/>
           <p:cNvSpPr/>
           <p:nvPr/>
         </p:nvSpPr>
@@ -12869,7 +12955,93 @@
       </p:sp>
       <p:sp>
         <p:nvSpPr>
-          <p:cNvPr id="14" name="Rounded Rectangle 13"/>
+          <p:cNvPr id="16" name="Rectangle 15"/>
+          <p:cNvSpPr/>
+          <p:nvPr/>
+        </p:nvSpPr>
+        <p:spPr>
+          <a:xfrm>
+            <a:off x="5166360" y="1298448"/>
+            <a:ext cx="1234440" cy="438912"/>
+          </a:xfrm>
+          <a:prstGeom prst="rect">
+            <a:avLst/>
+          </a:prstGeom>
+          <a:solidFill>
+            <a:srgbClr val="E8F7FF"/>
+          </a:solidFill>
+          <a:ln>
+            <a:noFill/>
+          </a:ln>
+        </p:spPr>
+        <p:style>
+          <a:lnRef idx="1">
+            <a:schemeClr val="accent1"/>
+          </a:lnRef>
+          <a:fillRef idx="3">
+            <a:schemeClr val="accent1"/>
+          </a:fillRef>
+          <a:effectRef idx="2">
+            <a:schemeClr val="accent1"/>
+          </a:effectRef>
+          <a:fontRef idx="minor">
+            <a:schemeClr val="lt1"/>
+          </a:fontRef>
+        </p:style>
+        <p:txBody>
+          <a:bodyPr rtlCol="0" anchor="ctr"/>
+          <a:lstStyle/>
+          <a:p>
+            <a:pPr algn="ctr"/>
+          </a:p>
+        </p:txBody>
+      </p:sp>
+      <p:sp>
+        <p:nvSpPr>
+          <p:cNvPr id="17" name="Rectangle 16"/>
+          <p:cNvSpPr/>
+          <p:nvPr/>
+        </p:nvSpPr>
+        <p:spPr>
+          <a:xfrm>
+            <a:off x="6400800" y="1298448"/>
+            <a:ext cx="1371600" cy="438912"/>
+          </a:xfrm>
+          <a:prstGeom prst="rect">
+            <a:avLst/>
+          </a:prstGeom>
+          <a:solidFill>
+            <a:srgbClr val="E8F5F0"/>
+          </a:solidFill>
+          <a:ln>
+            <a:noFill/>
+          </a:ln>
+        </p:spPr>
+        <p:style>
+          <a:lnRef idx="1">
+            <a:schemeClr val="accent1"/>
+          </a:lnRef>
+          <a:fillRef idx="3">
+            <a:schemeClr val="accent1"/>
+          </a:fillRef>
+          <a:effectRef idx="2">
+            <a:schemeClr val="accent1"/>
+          </a:effectRef>
+          <a:fontRef idx="minor">
+            <a:schemeClr val="lt1"/>
+          </a:fontRef>
+        </p:style>
+        <p:txBody>
+          <a:bodyPr rtlCol="0" anchor="ctr"/>
+          <a:lstStyle/>
+          <a:p>
+            <a:pPr algn="ctr"/>
+          </a:p>
+        </p:txBody>
+      </p:sp>
+      <p:sp>
+        <p:nvSpPr>
+          <p:cNvPr id="18" name="Rounded Rectangle 17"/>
           <p:cNvSpPr/>
           <p:nvPr/>
         </p:nvSpPr>
@@ -12912,7 +13084,7 @@
       </p:sp>
       <p:sp>
         <p:nvSpPr>
-          <p:cNvPr id="15" name="TextBox 14"/>
+          <p:cNvPr id="19" name="TextBox 18"/>
           <p:cNvSpPr txBox="1"/>
           <p:nvPr/>
         </p:nvSpPr>
@@ -12947,14 +13119,14 @@
       </p:sp>
       <p:sp>
         <p:nvSpPr>
-          <p:cNvPr id="16" name="TextBox 15"/>
+          <p:cNvPr id="20" name="TextBox 19"/>
           <p:cNvSpPr txBox="1"/>
           <p:nvPr/>
         </p:nvSpPr>
         <p:spPr>
           <a:xfrm>
             <a:off x="685800" y="1371600"/>
-            <a:ext cx="3520440" cy="347472"/>
+            <a:ext cx="3246120" cy="347472"/>
           </a:xfrm>
           <a:prstGeom prst="rect">
             <a:avLst/>
@@ -12982,13 +13154,13 @@
       </p:sp>
       <p:sp>
         <p:nvSpPr>
-          <p:cNvPr id="17" name="TextBox 16"/>
-          <p:cNvSpPr txBox="1"/>
-          <p:nvPr/>
-        </p:nvSpPr>
-        <p:spPr>
-          <a:xfrm>
-            <a:off x="4251960" y="1371600"/>
+          <p:cNvPr id="21" name="TextBox 20"/>
+          <p:cNvSpPr txBox="1"/>
+          <p:nvPr/>
+        </p:nvSpPr>
+        <p:spPr>
+          <a:xfrm>
+            <a:off x="3977639" y="1371600"/>
             <a:ext cx="1188720" cy="347472"/>
           </a:xfrm>
           <a:prstGeom prst="rect">
@@ -13006,7 +13178,7 @@
             <a:r>
               <a:rPr sz="1000" b="0" i="0">
                 <a:solidFill>
-                  <a:srgbClr val="1E293B"/>
+                  <a:srgbClr val="64748B"/>
                 </a:solidFill>
                 <a:latin typeface="Calibri"/>
               </a:rPr>
@@ -13017,13 +13189,13 @@
       </p:sp>
       <p:sp>
         <p:nvSpPr>
-          <p:cNvPr id="18" name="TextBox 17"/>
-          <p:cNvSpPr txBox="1"/>
-          <p:nvPr/>
-        </p:nvSpPr>
-        <p:spPr>
-          <a:xfrm>
-            <a:off x="5532120" y="1371600"/>
+          <p:cNvPr id="22" name="TextBox 21"/>
+          <p:cNvSpPr txBox="1"/>
+          <p:nvPr/>
+        </p:nvSpPr>
+        <p:spPr>
+          <a:xfrm>
+            <a:off x="5212080" y="1371600"/>
             <a:ext cx="1188720" cy="347472"/>
           </a:xfrm>
           <a:prstGeom prst="rect">
@@ -13041,25 +13213,60 @@
             <a:r>
               <a:rPr sz="1000" b="1" i="0">
                 <a:solidFill>
+                  <a:srgbClr val="1C7293"/>
+                </a:solidFill>
+                <a:latin typeface="Calibri"/>
+              </a:rPr>
+              <a:t> 22,510</a:t>
+            </a:r>
+          </a:p>
+        </p:txBody>
+      </p:sp>
+      <p:sp>
+        <p:nvSpPr>
+          <p:cNvPr id="23" name="TextBox 22"/>
+          <p:cNvSpPr txBox="1"/>
+          <p:nvPr/>
+        </p:nvSpPr>
+        <p:spPr>
+          <a:xfrm>
+            <a:off x="6446520" y="1371600"/>
+            <a:ext cx="1280160" cy="347472"/>
+          </a:xfrm>
+          <a:prstGeom prst="rect">
+            <a:avLst/>
+          </a:prstGeom>
+          <a:noFill/>
+        </p:spPr>
+        <p:txBody>
+          <a:bodyPr wrap="square" lIns="0" rIns="0" tIns="0" bIns="0">
+            <a:spAutoFit/>
+          </a:bodyPr>
+          <a:lstStyle/>
+          <a:p>
+            <a:pPr algn="ctr"/>
+            <a:r>
+              <a:rPr sz="1000" b="1" i="0">
+                <a:solidFill>
                   <a:srgbClr val="065A82"/>
                 </a:solidFill>
                 <a:latin typeface="Calibri"/>
               </a:rPr>
-              <a:t>148,592</a:t>
-            </a:r>
-          </a:p>
-        </p:txBody>
-      </p:sp>
-      <p:sp>
-        <p:nvSpPr>
-          <p:cNvPr id="19" name="TextBox 18"/>
-          <p:cNvSpPr txBox="1"/>
-          <p:nvPr/>
-        </p:nvSpPr>
-        <p:spPr>
-          <a:xfrm>
-            <a:off x="6720840" y="1371600"/>
-            <a:ext cx="1097280" cy="347472"/>
+              <a:t>134,273</a:t>
+            </a:r>
+          </a:p>
+        </p:txBody>
+      </p:sp>
+      <p:sp>
+        <p:nvSpPr>
+          <p:cNvPr id="24" name="TextBox 23"/>
+          <p:cNvSpPr txBox="1"/>
+          <p:nvPr/>
+        </p:nvSpPr>
+        <p:spPr>
+          <a:xfrm>
+            <a:off x="7772400" y="1371600"/>
+            <a:ext cx="1005840" cy="347472"/>
           </a:xfrm>
           <a:prstGeom prst="rect">
             <a:avLst/>
@@ -13080,21 +13287,21 @@
                 </a:solidFill>
                 <a:latin typeface="Calibri"/>
               </a:rPr>
-              <a:t>-17.3%</a:t>
-            </a:r>
-          </a:p>
-        </p:txBody>
-      </p:sp>
-      <p:sp>
-        <p:nvSpPr>
-          <p:cNvPr id="20" name="TextBox 19"/>
-          <p:cNvSpPr txBox="1"/>
-          <p:nvPr/>
-        </p:nvSpPr>
-        <p:spPr>
-          <a:xfrm>
-            <a:off x="7909560" y="1371600"/>
-            <a:ext cx="1188720" cy="347472"/>
+              <a:t>-12.7%</a:t>
+            </a:r>
+          </a:p>
+        </p:txBody>
+      </p:sp>
+      <p:sp>
+        <p:nvSpPr>
+          <p:cNvPr id="25" name="TextBox 24"/>
+          <p:cNvSpPr txBox="1"/>
+          <p:nvPr/>
+        </p:nvSpPr>
+        <p:spPr>
+          <a:xfrm>
+            <a:off x="8823960" y="1371600"/>
+            <a:ext cx="3017520" cy="347472"/>
           </a:xfrm>
           <a:prstGeom prst="rect">
             <a:avLst/>
@@ -13111,41 +13318,6 @@
             <a:r>
               <a:rPr sz="1000" b="0" i="0">
                 <a:solidFill>
-                  <a:srgbClr val="1E293B"/>
-                </a:solidFill>
-                <a:latin typeface="Calibri"/>
-              </a:rPr>
-              <a:t>78,499</a:t>
-            </a:r>
-          </a:p>
-        </p:txBody>
-      </p:sp>
-      <p:sp>
-        <p:nvSpPr>
-          <p:cNvPr id="21" name="TextBox 20"/>
-          <p:cNvSpPr txBox="1"/>
-          <p:nvPr/>
-        </p:nvSpPr>
-        <p:spPr>
-          <a:xfrm>
-            <a:off x="9189720" y="1371600"/>
-            <a:ext cx="2697480" cy="347472"/>
-          </a:xfrm>
-          <a:prstGeom prst="rect">
-            <a:avLst/>
-          </a:prstGeom>
-          <a:noFill/>
-        </p:spPr>
-        <p:txBody>
-          <a:bodyPr wrap="square" lIns="0" rIns="0" tIns="0" bIns="0">
-            <a:spAutoFit/>
-          </a:bodyPr>
-          <a:lstStyle/>
-          <a:p>
-            <a:pPr algn="ctr"/>
-            <a:r>
-              <a:rPr sz="1000" b="0" i="0">
-                <a:solidFill>
                   <a:srgbClr val="64748B"/>
                 </a:solidFill>
                 <a:latin typeface="Calibri"/>
@@ -13157,7 +13329,7 @@
       </p:sp>
       <p:sp>
         <p:nvSpPr>
-          <p:cNvPr id="22" name="Rectangle 21"/>
+          <p:cNvPr id="26" name="Rectangle 25"/>
           <p:cNvSpPr/>
           <p:nvPr/>
         </p:nvSpPr>
@@ -13200,7 +13372,93 @@
       </p:sp>
       <p:sp>
         <p:nvSpPr>
-          <p:cNvPr id="23" name="Rounded Rectangle 22"/>
+          <p:cNvPr id="27" name="Rectangle 26"/>
+          <p:cNvSpPr/>
+          <p:nvPr/>
+        </p:nvSpPr>
+        <p:spPr>
+          <a:xfrm>
+            <a:off x="5166360" y="1755648"/>
+            <a:ext cx="1234440" cy="438912"/>
+          </a:xfrm>
+          <a:prstGeom prst="rect">
+            <a:avLst/>
+          </a:prstGeom>
+          <a:solidFill>
+            <a:srgbClr val="D6EFFF"/>
+          </a:solidFill>
+          <a:ln>
+            <a:noFill/>
+          </a:ln>
+        </p:spPr>
+        <p:style>
+          <a:lnRef idx="1">
+            <a:schemeClr val="accent1"/>
+          </a:lnRef>
+          <a:fillRef idx="3">
+            <a:schemeClr val="accent1"/>
+          </a:fillRef>
+          <a:effectRef idx="2">
+            <a:schemeClr val="accent1"/>
+          </a:effectRef>
+          <a:fontRef idx="minor">
+            <a:schemeClr val="lt1"/>
+          </a:fontRef>
+        </p:style>
+        <p:txBody>
+          <a:bodyPr rtlCol="0" anchor="ctr"/>
+          <a:lstStyle/>
+          <a:p>
+            <a:pPr algn="ctr"/>
+          </a:p>
+        </p:txBody>
+      </p:sp>
+      <p:sp>
+        <p:nvSpPr>
+          <p:cNvPr id="28" name="Rectangle 27"/>
+          <p:cNvSpPr/>
+          <p:nvPr/>
+        </p:nvSpPr>
+        <p:spPr>
+          <a:xfrm>
+            <a:off x="6400800" y="1755648"/>
+            <a:ext cx="1371600" cy="438912"/>
+          </a:xfrm>
+          <a:prstGeom prst="rect">
+            <a:avLst/>
+          </a:prstGeom>
+          <a:solidFill>
+            <a:srgbClr val="D6ECE4"/>
+          </a:solidFill>
+          <a:ln>
+            <a:noFill/>
+          </a:ln>
+        </p:spPr>
+        <p:style>
+          <a:lnRef idx="1">
+            <a:schemeClr val="accent1"/>
+          </a:lnRef>
+          <a:fillRef idx="3">
+            <a:schemeClr val="accent1"/>
+          </a:fillRef>
+          <a:effectRef idx="2">
+            <a:schemeClr val="accent1"/>
+          </a:effectRef>
+          <a:fontRef idx="minor">
+            <a:schemeClr val="lt1"/>
+          </a:fontRef>
+        </p:style>
+        <p:txBody>
+          <a:bodyPr rtlCol="0" anchor="ctr"/>
+          <a:lstStyle/>
+          <a:p>
+            <a:pPr algn="ctr"/>
+          </a:p>
+        </p:txBody>
+      </p:sp>
+      <p:sp>
+        <p:nvSpPr>
+          <p:cNvPr id="29" name="Rounded Rectangle 28"/>
           <p:cNvSpPr/>
           <p:nvPr/>
         </p:nvSpPr>
@@ -13243,7 +13501,7 @@
       </p:sp>
       <p:sp>
         <p:nvSpPr>
-          <p:cNvPr id="24" name="TextBox 23"/>
+          <p:cNvPr id="30" name="TextBox 29"/>
           <p:cNvSpPr txBox="1"/>
           <p:nvPr/>
         </p:nvSpPr>
@@ -13278,14 +13536,14 @@
       </p:sp>
       <p:sp>
         <p:nvSpPr>
-          <p:cNvPr id="25" name="TextBox 24"/>
+          <p:cNvPr id="31" name="TextBox 30"/>
           <p:cNvSpPr txBox="1"/>
           <p:nvPr/>
         </p:nvSpPr>
         <p:spPr>
           <a:xfrm>
             <a:off x="685800" y="1828800"/>
-            <a:ext cx="3520440" cy="347472"/>
+            <a:ext cx="3246120" cy="347472"/>
           </a:xfrm>
           <a:prstGeom prst="rect">
             <a:avLst/>
@@ -13313,13 +13571,13 @@
       </p:sp>
       <p:sp>
         <p:nvSpPr>
-          <p:cNvPr id="26" name="TextBox 25"/>
-          <p:cNvSpPr txBox="1"/>
-          <p:nvPr/>
-        </p:nvSpPr>
-        <p:spPr>
-          <a:xfrm>
-            <a:off x="4251960" y="1828800"/>
+          <p:cNvPr id="32" name="TextBox 31"/>
+          <p:cNvSpPr txBox="1"/>
+          <p:nvPr/>
+        </p:nvSpPr>
+        <p:spPr>
+          <a:xfrm>
+            <a:off x="3977639" y="1828800"/>
             <a:ext cx="1188720" cy="347472"/>
           </a:xfrm>
           <a:prstGeom prst="rect">
@@ -13337,7 +13595,7 @@
             <a:r>
               <a:rPr sz="1000" b="0" i="0">
                 <a:solidFill>
-                  <a:srgbClr val="1E293B"/>
+                  <a:srgbClr val="64748B"/>
                 </a:solidFill>
                 <a:latin typeface="Calibri"/>
               </a:rPr>
@@ -13348,13 +13606,13 @@
       </p:sp>
       <p:sp>
         <p:nvSpPr>
-          <p:cNvPr id="27" name="TextBox 26"/>
-          <p:cNvSpPr txBox="1"/>
-          <p:nvPr/>
-        </p:nvSpPr>
-        <p:spPr>
-          <a:xfrm>
-            <a:off x="5532120" y="1828800"/>
+          <p:cNvPr id="33" name="TextBox 32"/>
+          <p:cNvSpPr txBox="1"/>
+          <p:nvPr/>
+        </p:nvSpPr>
+        <p:spPr>
+          <a:xfrm>
+            <a:off x="5212080" y="1828800"/>
             <a:ext cx="1188720" cy="347472"/>
           </a:xfrm>
           <a:prstGeom prst="rect">
@@ -13372,25 +13630,60 @@
             <a:r>
               <a:rPr sz="1000" b="1" i="0">
                 <a:solidFill>
+                  <a:srgbClr val="1C7293"/>
+                </a:solidFill>
+                <a:latin typeface="Calibri"/>
+              </a:rPr>
+              <a:t> 16,730</a:t>
+            </a:r>
+          </a:p>
+        </p:txBody>
+      </p:sp>
+      <p:sp>
+        <p:nvSpPr>
+          <p:cNvPr id="34" name="TextBox 33"/>
+          <p:cNvSpPr txBox="1"/>
+          <p:nvPr/>
+        </p:nvSpPr>
+        <p:spPr>
+          <a:xfrm>
+            <a:off x="6446520" y="1828800"/>
+            <a:ext cx="1280160" cy="347472"/>
+          </a:xfrm>
+          <a:prstGeom prst="rect">
+            <a:avLst/>
+          </a:prstGeom>
+          <a:noFill/>
+        </p:spPr>
+        <p:txBody>
+          <a:bodyPr wrap="square" lIns="0" rIns="0" tIns="0" bIns="0">
+            <a:spAutoFit/>
+          </a:bodyPr>
+          <a:lstStyle/>
+          <a:p>
+            <a:pPr algn="ctr"/>
+            <a:r>
+              <a:rPr sz="1000" b="1" i="0">
+                <a:solidFill>
                   <a:srgbClr val="065A82"/>
                 </a:solidFill>
                 <a:latin typeface="Calibri"/>
               </a:rPr>
-              <a:t> 84,155</a:t>
-            </a:r>
-          </a:p>
-        </p:txBody>
-      </p:sp>
-      <p:sp>
-        <p:nvSpPr>
-          <p:cNvPr id="28" name="TextBox 27"/>
-          <p:cNvSpPr txBox="1"/>
-          <p:nvPr/>
-        </p:nvSpPr>
-        <p:spPr>
-          <a:xfrm>
-            <a:off x="6720840" y="1828800"/>
-            <a:ext cx="1097280" cy="347472"/>
+              <a:t> 78,252</a:t>
+            </a:r>
+          </a:p>
+        </p:txBody>
+      </p:sp>
+      <p:sp>
+        <p:nvSpPr>
+          <p:cNvPr id="35" name="TextBox 34"/>
+          <p:cNvSpPr txBox="1"/>
+          <p:nvPr/>
+        </p:nvSpPr>
+        <p:spPr>
+          <a:xfrm>
+            <a:off x="7772400" y="1828800"/>
+            <a:ext cx="1005840" cy="347472"/>
           </a:xfrm>
           <a:prstGeom prst="rect">
             <a:avLst/>
@@ -13407,25 +13700,25 @@
             <a:r>
               <a:rPr sz="1000" b="1" i="0">
                 <a:solidFill>
-                  <a:srgbClr val="DC2626"/>
-                </a:solidFill>
-                <a:latin typeface="Calibri"/>
-              </a:rPr>
-              <a:t> -3.0%</a:t>
-            </a:r>
-          </a:p>
-        </p:txBody>
-      </p:sp>
-      <p:sp>
-        <p:nvSpPr>
-          <p:cNvPr id="29" name="TextBox 28"/>
-          <p:cNvSpPr txBox="1"/>
-          <p:nvPr/>
-        </p:nvSpPr>
-        <p:spPr>
-          <a:xfrm>
-            <a:off x="7909560" y="1828800"/>
-            <a:ext cx="1188720" cy="347472"/>
+                  <a:srgbClr val="059669"/>
+                </a:solidFill>
+                <a:latin typeface="Calibri"/>
+              </a:rPr>
+              <a:t> +9.5%</a:t>
+            </a:r>
+          </a:p>
+        </p:txBody>
+      </p:sp>
+      <p:sp>
+        <p:nvSpPr>
+          <p:cNvPr id="36" name="TextBox 35"/>
+          <p:cNvSpPr txBox="1"/>
+          <p:nvPr/>
+        </p:nvSpPr>
+        <p:spPr>
+          <a:xfrm>
+            <a:off x="8823960" y="1828800"/>
+            <a:ext cx="3017520" cy="347472"/>
           </a:xfrm>
           <a:prstGeom prst="rect">
             <a:avLst/>
@@ -13442,41 +13735,6 @@
             <a:r>
               <a:rPr sz="1000" b="0" i="0">
                 <a:solidFill>
-                  <a:srgbClr val="1E293B"/>
-                </a:solidFill>
-                <a:latin typeface="Calibri"/>
-              </a:rPr>
-              <a:t>46,288</a:t>
-            </a:r>
-          </a:p>
-        </p:txBody>
-      </p:sp>
-      <p:sp>
-        <p:nvSpPr>
-          <p:cNvPr id="30" name="TextBox 29"/>
-          <p:cNvSpPr txBox="1"/>
-          <p:nvPr/>
-        </p:nvSpPr>
-        <p:spPr>
-          <a:xfrm>
-            <a:off x="9189720" y="1828800"/>
-            <a:ext cx="2697480" cy="347472"/>
-          </a:xfrm>
-          <a:prstGeom prst="rect">
-            <a:avLst/>
-          </a:prstGeom>
-          <a:noFill/>
-        </p:spPr>
-        <p:txBody>
-          <a:bodyPr wrap="square" lIns="0" rIns="0" tIns="0" bIns="0">
-            <a:spAutoFit/>
-          </a:bodyPr>
-          <a:lstStyle/>
-          <a:p>
-            <a:pPr algn="ctr"/>
-            <a:r>
-              <a:rPr sz="1000" b="0" i="0">
-                <a:solidFill>
                   <a:srgbClr val="64748B"/>
                 </a:solidFill>
                 <a:latin typeface="Calibri"/>
@@ -13488,7 +13746,7 @@
       </p:sp>
       <p:sp>
         <p:nvSpPr>
-          <p:cNvPr id="31" name="Rectangle 30"/>
+          <p:cNvPr id="37" name="Rectangle 36"/>
           <p:cNvSpPr/>
           <p:nvPr/>
         </p:nvSpPr>
@@ -13531,7 +13789,93 @@
       </p:sp>
       <p:sp>
         <p:nvSpPr>
-          <p:cNvPr id="32" name="Rounded Rectangle 31"/>
+          <p:cNvPr id="38" name="Rectangle 37"/>
+          <p:cNvSpPr/>
+          <p:nvPr/>
+        </p:nvSpPr>
+        <p:spPr>
+          <a:xfrm>
+            <a:off x="5166360" y="2212848"/>
+            <a:ext cx="1234440" cy="438912"/>
+          </a:xfrm>
+          <a:prstGeom prst="rect">
+            <a:avLst/>
+          </a:prstGeom>
+          <a:solidFill>
+            <a:srgbClr val="E8F7FF"/>
+          </a:solidFill>
+          <a:ln>
+            <a:noFill/>
+          </a:ln>
+        </p:spPr>
+        <p:style>
+          <a:lnRef idx="1">
+            <a:schemeClr val="accent1"/>
+          </a:lnRef>
+          <a:fillRef idx="3">
+            <a:schemeClr val="accent1"/>
+          </a:fillRef>
+          <a:effectRef idx="2">
+            <a:schemeClr val="accent1"/>
+          </a:effectRef>
+          <a:fontRef idx="minor">
+            <a:schemeClr val="lt1"/>
+          </a:fontRef>
+        </p:style>
+        <p:txBody>
+          <a:bodyPr rtlCol="0" anchor="ctr"/>
+          <a:lstStyle/>
+          <a:p>
+            <a:pPr algn="ctr"/>
+          </a:p>
+        </p:txBody>
+      </p:sp>
+      <p:sp>
+        <p:nvSpPr>
+          <p:cNvPr id="39" name="Rectangle 38"/>
+          <p:cNvSpPr/>
+          <p:nvPr/>
+        </p:nvSpPr>
+        <p:spPr>
+          <a:xfrm>
+            <a:off x="6400800" y="2212848"/>
+            <a:ext cx="1371600" cy="438912"/>
+          </a:xfrm>
+          <a:prstGeom prst="rect">
+            <a:avLst/>
+          </a:prstGeom>
+          <a:solidFill>
+            <a:srgbClr val="E8F5F0"/>
+          </a:solidFill>
+          <a:ln>
+            <a:noFill/>
+          </a:ln>
+        </p:spPr>
+        <p:style>
+          <a:lnRef idx="1">
+            <a:schemeClr val="accent1"/>
+          </a:lnRef>
+          <a:fillRef idx="3">
+            <a:schemeClr val="accent1"/>
+          </a:fillRef>
+          <a:effectRef idx="2">
+            <a:schemeClr val="accent1"/>
+          </a:effectRef>
+          <a:fontRef idx="minor">
+            <a:schemeClr val="lt1"/>
+          </a:fontRef>
+        </p:style>
+        <p:txBody>
+          <a:bodyPr rtlCol="0" anchor="ctr"/>
+          <a:lstStyle/>
+          <a:p>
+            <a:pPr algn="ctr"/>
+          </a:p>
+        </p:txBody>
+      </p:sp>
+      <p:sp>
+        <p:nvSpPr>
+          <p:cNvPr id="40" name="Rounded Rectangle 39"/>
           <p:cNvSpPr/>
           <p:nvPr/>
         </p:nvSpPr>
@@ -13574,7 +13918,7 @@
       </p:sp>
       <p:sp>
         <p:nvSpPr>
-          <p:cNvPr id="33" name="TextBox 32"/>
+          <p:cNvPr id="41" name="TextBox 40"/>
           <p:cNvSpPr txBox="1"/>
           <p:nvPr/>
         </p:nvSpPr>
@@ -13609,14 +13953,14 @@
       </p:sp>
       <p:sp>
         <p:nvSpPr>
-          <p:cNvPr id="34" name="TextBox 33"/>
+          <p:cNvPr id="42" name="TextBox 41"/>
           <p:cNvSpPr txBox="1"/>
           <p:nvPr/>
         </p:nvSpPr>
         <p:spPr>
           <a:xfrm>
             <a:off x="685800" y="2286000"/>
-            <a:ext cx="3520440" cy="347472"/>
+            <a:ext cx="3246120" cy="347472"/>
           </a:xfrm>
           <a:prstGeom prst="rect">
             <a:avLst/>
@@ -13644,13 +13988,13 @@
       </p:sp>
       <p:sp>
         <p:nvSpPr>
-          <p:cNvPr id="35" name="TextBox 34"/>
-          <p:cNvSpPr txBox="1"/>
-          <p:nvPr/>
-        </p:nvSpPr>
-        <p:spPr>
-          <a:xfrm>
-            <a:off x="4251960" y="2286000"/>
+          <p:cNvPr id="43" name="TextBox 42"/>
+          <p:cNvSpPr txBox="1"/>
+          <p:nvPr/>
+        </p:nvSpPr>
+        <p:spPr>
+          <a:xfrm>
+            <a:off x="3977639" y="2286000"/>
             <a:ext cx="1188720" cy="347472"/>
           </a:xfrm>
           <a:prstGeom prst="rect">
@@ -13668,7 +14012,7 @@
             <a:r>
               <a:rPr sz="1000" b="0" i="0">
                 <a:solidFill>
-                  <a:srgbClr val="1E293B"/>
+                  <a:srgbClr val="64748B"/>
                 </a:solidFill>
                 <a:latin typeface="Calibri"/>
               </a:rPr>
@@ -13679,13 +14023,13 @@
       </p:sp>
       <p:sp>
         <p:nvSpPr>
-          <p:cNvPr id="36" name="TextBox 35"/>
-          <p:cNvSpPr txBox="1"/>
-          <p:nvPr/>
-        </p:nvSpPr>
-        <p:spPr>
-          <a:xfrm>
-            <a:off x="5532120" y="2286000"/>
+          <p:cNvPr id="44" name="TextBox 43"/>
+          <p:cNvSpPr txBox="1"/>
+          <p:nvPr/>
+        </p:nvSpPr>
+        <p:spPr>
+          <a:xfrm>
+            <a:off x="5212080" y="2286000"/>
             <a:ext cx="1188720" cy="347472"/>
           </a:xfrm>
           <a:prstGeom prst="rect">
@@ -13703,25 +14047,60 @@
             <a:r>
               <a:rPr sz="1000" b="1" i="0">
                 <a:solidFill>
+                  <a:srgbClr val="1C7293"/>
+                </a:solidFill>
+                <a:latin typeface="Calibri"/>
+              </a:rPr>
+              <a:t> 18,330</a:t>
+            </a:r>
+          </a:p>
+        </p:txBody>
+      </p:sp>
+      <p:sp>
+        <p:nvSpPr>
+          <p:cNvPr id="45" name="TextBox 44"/>
+          <p:cNvSpPr txBox="1"/>
+          <p:nvPr/>
+        </p:nvSpPr>
+        <p:spPr>
+          <a:xfrm>
+            <a:off x="6446520" y="2286000"/>
+            <a:ext cx="1280160" cy="347472"/>
+          </a:xfrm>
+          <a:prstGeom prst="rect">
+            <a:avLst/>
+          </a:prstGeom>
+          <a:noFill/>
+        </p:spPr>
+        <p:txBody>
+          <a:bodyPr wrap="square" lIns="0" rIns="0" tIns="0" bIns="0">
+            <a:spAutoFit/>
+          </a:bodyPr>
+          <a:lstStyle/>
+          <a:p>
+            <a:pPr algn="ctr"/>
+            <a:r>
+              <a:rPr sz="1000" b="1" i="0">
+                <a:solidFill>
                   <a:srgbClr val="065A82"/>
                 </a:solidFill>
                 <a:latin typeface="Calibri"/>
               </a:rPr>
-              <a:t> 49,363</a:t>
-            </a:r>
-          </a:p>
-        </p:txBody>
-      </p:sp>
-      <p:sp>
-        <p:nvSpPr>
-          <p:cNvPr id="37" name="TextBox 36"/>
-          <p:cNvSpPr txBox="1"/>
-          <p:nvPr/>
-        </p:nvSpPr>
-        <p:spPr>
-          <a:xfrm>
-            <a:off x="6720840" y="2286000"/>
-            <a:ext cx="1097280" cy="347472"/>
+              <a:t> 31,046</a:t>
+            </a:r>
+          </a:p>
+        </p:txBody>
+      </p:sp>
+      <p:sp>
+        <p:nvSpPr>
+          <p:cNvPr id="46" name="TextBox 45"/>
+          <p:cNvSpPr txBox="1"/>
+          <p:nvPr/>
+        </p:nvSpPr>
+        <p:spPr>
+          <a:xfrm>
+            <a:off x="7772400" y="2286000"/>
+            <a:ext cx="1005840" cy="347472"/>
           </a:xfrm>
           <a:prstGeom prst="rect">
             <a:avLst/>
@@ -13742,21 +14121,21 @@
                 </a:solidFill>
                 <a:latin typeface="Calibri"/>
               </a:rPr>
-              <a:t> -0.1%</a:t>
-            </a:r>
-          </a:p>
-        </p:txBody>
-      </p:sp>
-      <p:sp>
-        <p:nvSpPr>
-          <p:cNvPr id="38" name="TextBox 37"/>
-          <p:cNvSpPr txBox="1"/>
-          <p:nvPr/>
-        </p:nvSpPr>
-        <p:spPr>
-          <a:xfrm>
-            <a:off x="7909560" y="2286000"/>
-            <a:ext cx="1188720" cy="347472"/>
+              <a:t>  0.0%</a:t>
+            </a:r>
+          </a:p>
+        </p:txBody>
+      </p:sp>
+      <p:sp>
+        <p:nvSpPr>
+          <p:cNvPr id="47" name="TextBox 46"/>
+          <p:cNvSpPr txBox="1"/>
+          <p:nvPr/>
+        </p:nvSpPr>
+        <p:spPr>
+          <a:xfrm>
+            <a:off x="8823960" y="2286000"/>
+            <a:ext cx="3017520" cy="347472"/>
           </a:xfrm>
           <a:prstGeom prst="rect">
             <a:avLst/>
@@ -13773,41 +14152,6 @@
             <a:r>
               <a:rPr sz="1000" b="0" i="0">
                 <a:solidFill>
-                  <a:srgbClr val="1E293B"/>
-                </a:solidFill>
-                <a:latin typeface="Calibri"/>
-              </a:rPr>
-              <a:t>27,396</a:t>
-            </a:r>
-          </a:p>
-        </p:txBody>
-      </p:sp>
-      <p:sp>
-        <p:nvSpPr>
-          <p:cNvPr id="39" name="TextBox 38"/>
-          <p:cNvSpPr txBox="1"/>
-          <p:nvPr/>
-        </p:nvSpPr>
-        <p:spPr>
-          <a:xfrm>
-            <a:off x="9189720" y="2286000"/>
-            <a:ext cx="2697480" cy="347472"/>
-          </a:xfrm>
-          <a:prstGeom prst="rect">
-            <a:avLst/>
-          </a:prstGeom>
-          <a:noFill/>
-        </p:spPr>
-        <p:txBody>
-          <a:bodyPr wrap="square" lIns="0" rIns="0" tIns="0" bIns="0">
-            <a:spAutoFit/>
-          </a:bodyPr>
-          <a:lstStyle/>
-          <a:p>
-            <a:pPr algn="ctr"/>
-            <a:r>
-              <a:rPr sz="1000" b="0" i="0">
-                <a:solidFill>
                   <a:srgbClr val="64748B"/>
                 </a:solidFill>
                 <a:latin typeface="Calibri"/>
@@ -13819,7 +14163,7 @@
       </p:sp>
       <p:sp>
         <p:nvSpPr>
-          <p:cNvPr id="40" name="Rectangle 39"/>
+          <p:cNvPr id="48" name="Rectangle 47"/>
           <p:cNvSpPr/>
           <p:nvPr/>
         </p:nvSpPr>
@@ -13862,7 +14206,93 @@
       </p:sp>
       <p:sp>
         <p:nvSpPr>
-          <p:cNvPr id="41" name="Rounded Rectangle 40"/>
+          <p:cNvPr id="49" name="Rectangle 48"/>
+          <p:cNvSpPr/>
+          <p:nvPr/>
+        </p:nvSpPr>
+        <p:spPr>
+          <a:xfrm>
+            <a:off x="5166360" y="2670048"/>
+            <a:ext cx="1234440" cy="438912"/>
+          </a:xfrm>
+          <a:prstGeom prst="rect">
+            <a:avLst/>
+          </a:prstGeom>
+          <a:solidFill>
+            <a:srgbClr val="D6EFFF"/>
+          </a:solidFill>
+          <a:ln>
+            <a:noFill/>
+          </a:ln>
+        </p:spPr>
+        <p:style>
+          <a:lnRef idx="1">
+            <a:schemeClr val="accent1"/>
+          </a:lnRef>
+          <a:fillRef idx="3">
+            <a:schemeClr val="accent1"/>
+          </a:fillRef>
+          <a:effectRef idx="2">
+            <a:schemeClr val="accent1"/>
+          </a:effectRef>
+          <a:fontRef idx="minor">
+            <a:schemeClr val="lt1"/>
+          </a:fontRef>
+        </p:style>
+        <p:txBody>
+          <a:bodyPr rtlCol="0" anchor="ctr"/>
+          <a:lstStyle/>
+          <a:p>
+            <a:pPr algn="ctr"/>
+          </a:p>
+        </p:txBody>
+      </p:sp>
+      <p:sp>
+        <p:nvSpPr>
+          <p:cNvPr id="50" name="Rectangle 49"/>
+          <p:cNvSpPr/>
+          <p:nvPr/>
+        </p:nvSpPr>
+        <p:spPr>
+          <a:xfrm>
+            <a:off x="6400800" y="2670048"/>
+            <a:ext cx="1371600" cy="438912"/>
+          </a:xfrm>
+          <a:prstGeom prst="rect">
+            <a:avLst/>
+          </a:prstGeom>
+          <a:solidFill>
+            <a:srgbClr val="D6ECE4"/>
+          </a:solidFill>
+          <a:ln>
+            <a:noFill/>
+          </a:ln>
+        </p:spPr>
+        <p:style>
+          <a:lnRef idx="1">
+            <a:schemeClr val="accent1"/>
+          </a:lnRef>
+          <a:fillRef idx="3">
+            <a:schemeClr val="accent1"/>
+          </a:fillRef>
+          <a:effectRef idx="2">
+            <a:schemeClr val="accent1"/>
+          </a:effectRef>
+          <a:fontRef idx="minor">
+            <a:schemeClr val="lt1"/>
+          </a:fontRef>
+        </p:style>
+        <p:txBody>
+          <a:bodyPr rtlCol="0" anchor="ctr"/>
+          <a:lstStyle/>
+          <a:p>
+            <a:pPr algn="ctr"/>
+          </a:p>
+        </p:txBody>
+      </p:sp>
+      <p:sp>
+        <p:nvSpPr>
+          <p:cNvPr id="51" name="Rounded Rectangle 50"/>
           <p:cNvSpPr/>
           <p:nvPr/>
         </p:nvSpPr>
@@ -13905,7 +14335,7 @@
       </p:sp>
       <p:sp>
         <p:nvSpPr>
-          <p:cNvPr id="42" name="TextBox 41"/>
+          <p:cNvPr id="52" name="TextBox 51"/>
           <p:cNvSpPr txBox="1"/>
           <p:nvPr/>
         </p:nvSpPr>
@@ -13940,14 +14370,14 @@
       </p:sp>
       <p:sp>
         <p:nvSpPr>
-          <p:cNvPr id="43" name="TextBox 42"/>
+          <p:cNvPr id="53" name="TextBox 52"/>
           <p:cNvSpPr txBox="1"/>
           <p:nvPr/>
         </p:nvSpPr>
         <p:spPr>
           <a:xfrm>
             <a:off x="685800" y="2743200"/>
-            <a:ext cx="3520440" cy="347472"/>
+            <a:ext cx="3246120" cy="347472"/>
           </a:xfrm>
           <a:prstGeom prst="rect">
             <a:avLst/>
@@ -13975,13 +14405,13 @@
       </p:sp>
       <p:sp>
         <p:nvSpPr>
-          <p:cNvPr id="44" name="TextBox 43"/>
-          <p:cNvSpPr txBox="1"/>
-          <p:nvPr/>
-        </p:nvSpPr>
-        <p:spPr>
-          <a:xfrm>
-            <a:off x="4251960" y="2743200"/>
+          <p:cNvPr id="54" name="TextBox 53"/>
+          <p:cNvSpPr txBox="1"/>
+          <p:nvPr/>
+        </p:nvSpPr>
+        <p:spPr>
+          <a:xfrm>
+            <a:off x="3977639" y="2743200"/>
             <a:ext cx="1188720" cy="347472"/>
           </a:xfrm>
           <a:prstGeom prst="rect">
@@ -13999,7 +14429,7 @@
             <a:r>
               <a:rPr sz="1000" b="0" i="0">
                 <a:solidFill>
-                  <a:srgbClr val="1E293B"/>
+                  <a:srgbClr val="64748B"/>
                 </a:solidFill>
                 <a:latin typeface="Calibri"/>
               </a:rPr>
@@ -14010,13 +14440,13 @@
       </p:sp>
       <p:sp>
         <p:nvSpPr>
-          <p:cNvPr id="45" name="TextBox 44"/>
-          <p:cNvSpPr txBox="1"/>
-          <p:nvPr/>
-        </p:nvSpPr>
-        <p:spPr>
-          <a:xfrm>
-            <a:off x="5532120" y="2743200"/>
+          <p:cNvPr id="55" name="TextBox 54"/>
+          <p:cNvSpPr txBox="1"/>
+          <p:nvPr/>
+        </p:nvSpPr>
+        <p:spPr>
+          <a:xfrm>
+            <a:off x="5212080" y="2743200"/>
             <a:ext cx="1188720" cy="347472"/>
           </a:xfrm>
           <a:prstGeom prst="rect">
@@ -14034,25 +14464,60 @@
             <a:r>
               <a:rPr sz="1000" b="1" i="0">
                 <a:solidFill>
+                  <a:srgbClr val="1C7293"/>
+                </a:solidFill>
+                <a:latin typeface="Calibri"/>
+              </a:rPr>
+              <a:t>  3,380</a:t>
+            </a:r>
+          </a:p>
+        </p:txBody>
+      </p:sp>
+      <p:sp>
+        <p:nvSpPr>
+          <p:cNvPr id="56" name="TextBox 55"/>
+          <p:cNvSpPr txBox="1"/>
+          <p:nvPr/>
+        </p:nvSpPr>
+        <p:spPr>
+          <a:xfrm>
+            <a:off x="6446520" y="2743200"/>
+            <a:ext cx="1280160" cy="347472"/>
+          </a:xfrm>
+          <a:prstGeom prst="rect">
+            <a:avLst/>
+          </a:prstGeom>
+          <a:noFill/>
+        </p:spPr>
+        <p:txBody>
+          <a:bodyPr wrap="square" lIns="0" rIns="0" tIns="0" bIns="0">
+            <a:spAutoFit/>
+          </a:bodyPr>
+          <a:lstStyle/>
+          <a:p>
+            <a:pPr algn="ctr"/>
+            <a:r>
+              <a:rPr sz="1000" b="1" i="0">
+                <a:solidFill>
                   <a:srgbClr val="065A82"/>
                 </a:solidFill>
                 <a:latin typeface="Calibri"/>
               </a:rPr>
-              <a:t> 29,214</a:t>
-            </a:r>
-          </a:p>
-        </p:txBody>
-      </p:sp>
-      <p:sp>
-        <p:nvSpPr>
-          <p:cNvPr id="46" name="TextBox 45"/>
-          <p:cNvSpPr txBox="1"/>
-          <p:nvPr/>
-        </p:nvSpPr>
-        <p:spPr>
-          <a:xfrm>
-            <a:off x="6720840" y="2743200"/>
-            <a:ext cx="1097280" cy="347472"/>
+              <a:t> 28,610</a:t>
+            </a:r>
+          </a:p>
+        </p:txBody>
+      </p:sp>
+      <p:sp>
+        <p:nvSpPr>
+          <p:cNvPr id="57" name="TextBox 56"/>
+          <p:cNvSpPr txBox="1"/>
+          <p:nvPr/>
+        </p:nvSpPr>
+        <p:spPr>
+          <a:xfrm>
+            <a:off x="7772400" y="2743200"/>
+            <a:ext cx="1005840" cy="347472"/>
           </a:xfrm>
           <a:prstGeom prst="rect">
             <a:avLst/>
@@ -14073,21 +14538,21 @@
                 </a:solidFill>
                 <a:latin typeface="Calibri"/>
               </a:rPr>
-              <a:t>+5584%</a:t>
-            </a:r>
-          </a:p>
-        </p:txBody>
-      </p:sp>
-      <p:sp>
-        <p:nvSpPr>
-          <p:cNvPr id="47" name="TextBox 46"/>
-          <p:cNvSpPr txBox="1"/>
-          <p:nvPr/>
-        </p:nvSpPr>
-        <p:spPr>
-          <a:xfrm>
-            <a:off x="7909560" y="2743200"/>
-            <a:ext cx="1188720" cy="347472"/>
+              <a:t>+6,122%</a:t>
+            </a:r>
+          </a:p>
+        </p:txBody>
+      </p:sp>
+      <p:sp>
+        <p:nvSpPr>
+          <p:cNvPr id="58" name="TextBox 57"/>
+          <p:cNvSpPr txBox="1"/>
+          <p:nvPr/>
+        </p:nvSpPr>
+        <p:spPr>
+          <a:xfrm>
+            <a:off x="8823960" y="2743200"/>
+            <a:ext cx="3017520" cy="347472"/>
           </a:xfrm>
           <a:prstGeom prst="rect">
             <a:avLst/>
@@ -14104,53 +14569,18 @@
             <a:r>
               <a:rPr sz="1000" b="0" i="0">
                 <a:solidFill>
-                  <a:srgbClr val="1E293B"/>
-                </a:solidFill>
-                <a:latin typeface="Calibri"/>
-              </a:rPr>
-              <a:t>16,420</a:t>
-            </a:r>
-          </a:p>
-        </p:txBody>
-      </p:sp>
-      <p:sp>
-        <p:nvSpPr>
-          <p:cNvPr id="48" name="TextBox 47"/>
-          <p:cNvSpPr txBox="1"/>
-          <p:nvPr/>
-        </p:nvSpPr>
-        <p:spPr>
-          <a:xfrm>
-            <a:off x="9189720" y="2743200"/>
-            <a:ext cx="2697480" cy="347472"/>
-          </a:xfrm>
-          <a:prstGeom prst="rect">
-            <a:avLst/>
-          </a:prstGeom>
-          <a:noFill/>
-        </p:spPr>
-        <p:txBody>
-          <a:bodyPr wrap="square" lIns="0" rIns="0" tIns="0" bIns="0">
-            <a:spAutoFit/>
-          </a:bodyPr>
-          <a:lstStyle/>
-          <a:p>
-            <a:pPr algn="ctr"/>
-            <a:r>
-              <a:rPr sz="1000" b="0" i="0">
-                <a:solidFill>
                   <a:srgbClr val="64748B"/>
                 </a:solidFill>
                 <a:latin typeface="Calibri"/>
               </a:rPr>
-              <a:t>&gt;&gt; Breakout page in Feb</a:t>
-            </a:r>
-          </a:p>
-        </p:txBody>
-      </p:sp>
-      <p:sp>
-        <p:nvSpPr>
-          <p:cNvPr id="49" name="Rectangle 48"/>
+              <a:t>&gt;&gt; Breakout — mostly Non-Paid</a:t>
+            </a:r>
+          </a:p>
+        </p:txBody>
+      </p:sp>
+      <p:sp>
+        <p:nvSpPr>
+          <p:cNvPr id="59" name="Rectangle 58"/>
           <p:cNvSpPr/>
           <p:nvPr/>
         </p:nvSpPr>
@@ -14193,7 +14623,93 @@
       </p:sp>
       <p:sp>
         <p:nvSpPr>
-          <p:cNvPr id="50" name="Rounded Rectangle 49"/>
+          <p:cNvPr id="60" name="Rectangle 59"/>
+          <p:cNvSpPr/>
+          <p:nvPr/>
+        </p:nvSpPr>
+        <p:spPr>
+          <a:xfrm>
+            <a:off x="5166360" y="3127248"/>
+            <a:ext cx="1234440" cy="438912"/>
+          </a:xfrm>
+          <a:prstGeom prst="rect">
+            <a:avLst/>
+          </a:prstGeom>
+          <a:solidFill>
+            <a:srgbClr val="E8F7FF"/>
+          </a:solidFill>
+          <a:ln>
+            <a:noFill/>
+          </a:ln>
+        </p:spPr>
+        <p:style>
+          <a:lnRef idx="1">
+            <a:schemeClr val="accent1"/>
+          </a:lnRef>
+          <a:fillRef idx="3">
+            <a:schemeClr val="accent1"/>
+          </a:fillRef>
+          <a:effectRef idx="2">
+            <a:schemeClr val="accent1"/>
+          </a:effectRef>
+          <a:fontRef idx="minor">
+            <a:schemeClr val="lt1"/>
+          </a:fontRef>
+        </p:style>
+        <p:txBody>
+          <a:bodyPr rtlCol="0" anchor="ctr"/>
+          <a:lstStyle/>
+          <a:p>
+            <a:pPr algn="ctr"/>
+          </a:p>
+        </p:txBody>
+      </p:sp>
+      <p:sp>
+        <p:nvSpPr>
+          <p:cNvPr id="61" name="Rectangle 60"/>
+          <p:cNvSpPr/>
+          <p:nvPr/>
+        </p:nvSpPr>
+        <p:spPr>
+          <a:xfrm>
+            <a:off x="6400800" y="3127248"/>
+            <a:ext cx="1371600" cy="438912"/>
+          </a:xfrm>
+          <a:prstGeom prst="rect">
+            <a:avLst/>
+          </a:prstGeom>
+          <a:solidFill>
+            <a:srgbClr val="E8F5F0"/>
+          </a:solidFill>
+          <a:ln>
+            <a:noFill/>
+          </a:ln>
+        </p:spPr>
+        <p:style>
+          <a:lnRef idx="1">
+            <a:schemeClr val="accent1"/>
+          </a:lnRef>
+          <a:fillRef idx="3">
+            <a:schemeClr val="accent1"/>
+          </a:fillRef>
+          <a:effectRef idx="2">
+            <a:schemeClr val="accent1"/>
+          </a:effectRef>
+          <a:fontRef idx="minor">
+            <a:schemeClr val="lt1"/>
+          </a:fontRef>
+        </p:style>
+        <p:txBody>
+          <a:bodyPr rtlCol="0" anchor="ctr"/>
+          <a:lstStyle/>
+          <a:p>
+            <a:pPr algn="ctr"/>
+          </a:p>
+        </p:txBody>
+      </p:sp>
+      <p:sp>
+        <p:nvSpPr>
+          <p:cNvPr id="62" name="Rounded Rectangle 61"/>
           <p:cNvSpPr/>
           <p:nvPr/>
         </p:nvSpPr>
@@ -14236,7 +14752,7 @@
       </p:sp>
       <p:sp>
         <p:nvSpPr>
-          <p:cNvPr id="51" name="TextBox 50"/>
+          <p:cNvPr id="63" name="TextBox 62"/>
           <p:cNvSpPr txBox="1"/>
           <p:nvPr/>
         </p:nvSpPr>
@@ -14271,14 +14787,14 @@
       </p:sp>
       <p:sp>
         <p:nvSpPr>
-          <p:cNvPr id="52" name="TextBox 51"/>
+          <p:cNvPr id="64" name="TextBox 63"/>
           <p:cNvSpPr txBox="1"/>
           <p:nvPr/>
         </p:nvSpPr>
         <p:spPr>
           <a:xfrm>
             <a:off x="685800" y="3200400"/>
-            <a:ext cx="3520440" cy="347472"/>
+            <a:ext cx="3246120" cy="347472"/>
           </a:xfrm>
           <a:prstGeom prst="rect">
             <a:avLst/>
@@ -14306,13 +14822,13 @@
       </p:sp>
       <p:sp>
         <p:nvSpPr>
-          <p:cNvPr id="53" name="TextBox 52"/>
-          <p:cNvSpPr txBox="1"/>
-          <p:nvPr/>
-        </p:nvSpPr>
-        <p:spPr>
-          <a:xfrm>
-            <a:off x="4251960" y="3200400"/>
+          <p:cNvPr id="65" name="TextBox 64"/>
+          <p:cNvSpPr txBox="1"/>
+          <p:nvPr/>
+        </p:nvSpPr>
+        <p:spPr>
+          <a:xfrm>
+            <a:off x="3977639" y="3200400"/>
             <a:ext cx="1188720" cy="347472"/>
           </a:xfrm>
           <a:prstGeom prst="rect">
@@ -14330,7 +14846,7 @@
             <a:r>
               <a:rPr sz="1000" b="0" i="0">
                 <a:solidFill>
-                  <a:srgbClr val="1E293B"/>
+                  <a:srgbClr val="64748B"/>
                 </a:solidFill>
                 <a:latin typeface="Calibri"/>
               </a:rPr>
@@ -14341,13 +14857,13 @@
       </p:sp>
       <p:sp>
         <p:nvSpPr>
-          <p:cNvPr id="54" name="TextBox 53"/>
-          <p:cNvSpPr txBox="1"/>
-          <p:nvPr/>
-        </p:nvSpPr>
-        <p:spPr>
-          <a:xfrm>
-            <a:off x="5532120" y="3200400"/>
+          <p:cNvPr id="66" name="TextBox 65"/>
+          <p:cNvSpPr txBox="1"/>
+          <p:nvPr/>
+        </p:nvSpPr>
+        <p:spPr>
+          <a:xfrm>
+            <a:off x="5212080" y="3200400"/>
             <a:ext cx="1188720" cy="347472"/>
           </a:xfrm>
           <a:prstGeom prst="rect">
@@ -14365,6 +14881,41 @@
             <a:r>
               <a:rPr sz="1000" b="1" i="0">
                 <a:solidFill>
+                  <a:srgbClr val="1C7293"/>
+                </a:solidFill>
+                <a:latin typeface="Calibri"/>
+              </a:rPr>
+              <a:t>      0</a:t>
+            </a:r>
+          </a:p>
+        </p:txBody>
+      </p:sp>
+      <p:sp>
+        <p:nvSpPr>
+          <p:cNvPr id="67" name="TextBox 66"/>
+          <p:cNvSpPr txBox="1"/>
+          <p:nvPr/>
+        </p:nvSpPr>
+        <p:spPr>
+          <a:xfrm>
+            <a:off x="6446520" y="3200400"/>
+            <a:ext cx="1280160" cy="347472"/>
+          </a:xfrm>
+          <a:prstGeom prst="rect">
+            <a:avLst/>
+          </a:prstGeom>
+          <a:noFill/>
+        </p:spPr>
+        <p:txBody>
+          <a:bodyPr wrap="square" lIns="0" rIns="0" tIns="0" bIns="0">
+            <a:spAutoFit/>
+          </a:bodyPr>
+          <a:lstStyle/>
+          <a:p>
+            <a:pPr algn="ctr"/>
+            <a:r>
+              <a:rPr sz="1000" b="1" i="0">
+                <a:solidFill>
                   <a:srgbClr val="065A82"/>
                 </a:solidFill>
                 <a:latin typeface="Calibri"/>
@@ -14376,14 +14927,14 @@
       </p:sp>
       <p:sp>
         <p:nvSpPr>
-          <p:cNvPr id="55" name="TextBox 54"/>
-          <p:cNvSpPr txBox="1"/>
-          <p:nvPr/>
-        </p:nvSpPr>
-        <p:spPr>
-          <a:xfrm>
-            <a:off x="6720840" y="3200400"/>
-            <a:ext cx="1097280" cy="347472"/>
+          <p:cNvPr id="68" name="TextBox 67"/>
+          <p:cNvSpPr txBox="1"/>
+          <p:nvPr/>
+        </p:nvSpPr>
+        <p:spPr>
+          <a:xfrm>
+            <a:off x="7772400" y="3200400"/>
+            <a:ext cx="1005840" cy="347472"/>
           </a:xfrm>
           <a:prstGeom prst="rect">
             <a:avLst/>
@@ -14411,14 +14962,14 @@
       </p:sp>
       <p:sp>
         <p:nvSpPr>
-          <p:cNvPr id="56" name="TextBox 55"/>
-          <p:cNvSpPr txBox="1"/>
-          <p:nvPr/>
-        </p:nvSpPr>
-        <p:spPr>
-          <a:xfrm>
-            <a:off x="7909560" y="3200400"/>
-            <a:ext cx="1188720" cy="347472"/>
+          <p:cNvPr id="69" name="TextBox 68"/>
+          <p:cNvSpPr txBox="1"/>
+          <p:nvPr/>
+        </p:nvSpPr>
+        <p:spPr>
+          <a:xfrm>
+            <a:off x="8823960" y="3200400"/>
+            <a:ext cx="3017520" cy="347472"/>
           </a:xfrm>
           <a:prstGeom prst="rect">
             <a:avLst/>
@@ -14435,41 +14986,6 @@
             <a:r>
               <a:rPr sz="1000" b="0" i="0">
                 <a:solidFill>
-                  <a:srgbClr val="1E293B"/>
-                </a:solidFill>
-                <a:latin typeface="Calibri"/>
-              </a:rPr>
-              <a:t> 5,162</a:t>
-            </a:r>
-          </a:p>
-        </p:txBody>
-      </p:sp>
-      <p:sp>
-        <p:nvSpPr>
-          <p:cNvPr id="57" name="TextBox 56"/>
-          <p:cNvSpPr txBox="1"/>
-          <p:nvPr/>
-        </p:nvSpPr>
-        <p:spPr>
-          <a:xfrm>
-            <a:off x="9189720" y="3200400"/>
-            <a:ext cx="2697480" cy="347472"/>
-          </a:xfrm>
-          <a:prstGeom prst="rect">
-            <a:avLst/>
-          </a:prstGeom>
-          <a:noFill/>
-        </p:spPr>
-        <p:txBody>
-          <a:bodyPr wrap="square" lIns="0" rIns="0" tIns="0" bIns="0">
-            <a:spAutoFit/>
-          </a:bodyPr>
-          <a:lstStyle/>
-          <a:p>
-            <a:pPr algn="ctr"/>
-            <a:r>
-              <a:rPr sz="1000" b="0" i="0">
-                <a:solidFill>
                   <a:srgbClr val="64748B"/>
                 </a:solidFill>
                 <a:latin typeface="Calibri"/>
@@ -14481,7 +14997,7 @@
       </p:sp>
       <p:sp>
         <p:nvSpPr>
-          <p:cNvPr id="58" name="Rectangle 57"/>
+          <p:cNvPr id="70" name="Rectangle 69"/>
           <p:cNvSpPr/>
           <p:nvPr/>
         </p:nvSpPr>
@@ -14524,7 +15040,93 @@
       </p:sp>
       <p:sp>
         <p:nvSpPr>
-          <p:cNvPr id="59" name="Rounded Rectangle 58"/>
+          <p:cNvPr id="71" name="Rectangle 70"/>
+          <p:cNvSpPr/>
+          <p:nvPr/>
+        </p:nvSpPr>
+        <p:spPr>
+          <a:xfrm>
+            <a:off x="5166360" y="3584448"/>
+            <a:ext cx="1234440" cy="438912"/>
+          </a:xfrm>
+          <a:prstGeom prst="rect">
+            <a:avLst/>
+          </a:prstGeom>
+          <a:solidFill>
+            <a:srgbClr val="D6EFFF"/>
+          </a:solidFill>
+          <a:ln>
+            <a:noFill/>
+          </a:ln>
+        </p:spPr>
+        <p:style>
+          <a:lnRef idx="1">
+            <a:schemeClr val="accent1"/>
+          </a:lnRef>
+          <a:fillRef idx="3">
+            <a:schemeClr val="accent1"/>
+          </a:fillRef>
+          <a:effectRef idx="2">
+            <a:schemeClr val="accent1"/>
+          </a:effectRef>
+          <a:fontRef idx="minor">
+            <a:schemeClr val="lt1"/>
+          </a:fontRef>
+        </p:style>
+        <p:txBody>
+          <a:bodyPr rtlCol="0" anchor="ctr"/>
+          <a:lstStyle/>
+          <a:p>
+            <a:pPr algn="ctr"/>
+          </a:p>
+        </p:txBody>
+      </p:sp>
+      <p:sp>
+        <p:nvSpPr>
+          <p:cNvPr id="72" name="Rectangle 71"/>
+          <p:cNvSpPr/>
+          <p:nvPr/>
+        </p:nvSpPr>
+        <p:spPr>
+          <a:xfrm>
+            <a:off x="6400800" y="3584448"/>
+            <a:ext cx="1371600" cy="438912"/>
+          </a:xfrm>
+          <a:prstGeom prst="rect">
+            <a:avLst/>
+          </a:prstGeom>
+          <a:solidFill>
+            <a:srgbClr val="D6ECE4"/>
+          </a:solidFill>
+          <a:ln>
+            <a:noFill/>
+          </a:ln>
+        </p:spPr>
+        <p:style>
+          <a:lnRef idx="1">
+            <a:schemeClr val="accent1"/>
+          </a:lnRef>
+          <a:fillRef idx="3">
+            <a:schemeClr val="accent1"/>
+          </a:fillRef>
+          <a:effectRef idx="2">
+            <a:schemeClr val="accent1"/>
+          </a:effectRef>
+          <a:fontRef idx="minor">
+            <a:schemeClr val="lt1"/>
+          </a:fontRef>
+        </p:style>
+        <p:txBody>
+          <a:bodyPr rtlCol="0" anchor="ctr"/>
+          <a:lstStyle/>
+          <a:p>
+            <a:pPr algn="ctr"/>
+          </a:p>
+        </p:txBody>
+      </p:sp>
+      <p:sp>
+        <p:nvSpPr>
+          <p:cNvPr id="73" name="Rounded Rectangle 72"/>
           <p:cNvSpPr/>
           <p:nvPr/>
         </p:nvSpPr>
@@ -14567,7 +15169,7 @@
       </p:sp>
       <p:sp>
         <p:nvSpPr>
-          <p:cNvPr id="60" name="TextBox 59"/>
+          <p:cNvPr id="74" name="TextBox 73"/>
           <p:cNvSpPr txBox="1"/>
           <p:nvPr/>
         </p:nvSpPr>
@@ -14602,14 +15204,14 @@
       </p:sp>
       <p:sp>
         <p:nvSpPr>
-          <p:cNvPr id="61" name="TextBox 60"/>
+          <p:cNvPr id="75" name="TextBox 74"/>
           <p:cNvSpPr txBox="1"/>
           <p:nvPr/>
         </p:nvSpPr>
         <p:spPr>
           <a:xfrm>
             <a:off x="685800" y="3657600"/>
-            <a:ext cx="3520440" cy="347472"/>
+            <a:ext cx="3246120" cy="347472"/>
           </a:xfrm>
           <a:prstGeom prst="rect">
             <a:avLst/>
@@ -14637,13 +15239,13 @@
       </p:sp>
       <p:sp>
         <p:nvSpPr>
-          <p:cNvPr id="62" name="TextBox 61"/>
-          <p:cNvSpPr txBox="1"/>
-          <p:nvPr/>
-        </p:nvSpPr>
-        <p:spPr>
-          <a:xfrm>
-            <a:off x="4251960" y="3657600"/>
+          <p:cNvPr id="76" name="TextBox 75"/>
+          <p:cNvSpPr txBox="1"/>
+          <p:nvPr/>
+        </p:nvSpPr>
+        <p:spPr>
+          <a:xfrm>
+            <a:off x="3977639" y="3657600"/>
             <a:ext cx="1188720" cy="347472"/>
           </a:xfrm>
           <a:prstGeom prst="rect">
@@ -14661,7 +15263,7 @@
             <a:r>
               <a:rPr sz="1000" b="0" i="0">
                 <a:solidFill>
-                  <a:srgbClr val="1E293B"/>
+                  <a:srgbClr val="64748B"/>
                 </a:solidFill>
                 <a:latin typeface="Calibri"/>
               </a:rPr>
@@ -14672,13 +15274,13 @@
       </p:sp>
       <p:sp>
         <p:nvSpPr>
-          <p:cNvPr id="63" name="TextBox 62"/>
-          <p:cNvSpPr txBox="1"/>
-          <p:nvPr/>
-        </p:nvSpPr>
-        <p:spPr>
-          <a:xfrm>
-            <a:off x="5532120" y="3657600"/>
+          <p:cNvPr id="77" name="TextBox 76"/>
+          <p:cNvSpPr txBox="1"/>
+          <p:nvPr/>
+        </p:nvSpPr>
+        <p:spPr>
+          <a:xfrm>
+            <a:off x="5212080" y="3657600"/>
             <a:ext cx="1188720" cy="347472"/>
           </a:xfrm>
           <a:prstGeom prst="rect">
@@ -14696,25 +15298,60 @@
             <a:r>
               <a:rPr sz="1000" b="1" i="0">
                 <a:solidFill>
+                  <a:srgbClr val="1C7293"/>
+                </a:solidFill>
+                <a:latin typeface="Calibri"/>
+              </a:rPr>
+              <a:t>     32</a:t>
+            </a:r>
+          </a:p>
+        </p:txBody>
+      </p:sp>
+      <p:sp>
+        <p:nvSpPr>
+          <p:cNvPr id="78" name="TextBox 77"/>
+          <p:cNvSpPr txBox="1"/>
+          <p:nvPr/>
+        </p:nvSpPr>
+        <p:spPr>
+          <a:xfrm>
+            <a:off x="6446520" y="3657600"/>
+            <a:ext cx="1280160" cy="347472"/>
+          </a:xfrm>
+          <a:prstGeom prst="rect">
+            <a:avLst/>
+          </a:prstGeom>
+          <a:noFill/>
+        </p:spPr>
+        <p:txBody>
+          <a:bodyPr wrap="square" lIns="0" rIns="0" tIns="0" bIns="0">
+            <a:spAutoFit/>
+          </a:bodyPr>
+          <a:lstStyle/>
+          <a:p>
+            <a:pPr algn="ctr"/>
+            <a:r>
+              <a:rPr sz="1000" b="1" i="0">
+                <a:solidFill>
                   <a:srgbClr val="065A82"/>
                 </a:solidFill>
                 <a:latin typeface="Calibri"/>
               </a:rPr>
-              <a:t>  6,495</a:t>
-            </a:r>
-          </a:p>
-        </p:txBody>
-      </p:sp>
-      <p:sp>
-        <p:nvSpPr>
-          <p:cNvPr id="64" name="TextBox 63"/>
-          <p:cNvSpPr txBox="1"/>
-          <p:nvPr/>
-        </p:nvSpPr>
-        <p:spPr>
-          <a:xfrm>
-            <a:off x="6720840" y="3657600"/>
-            <a:ext cx="1097280" cy="347472"/>
+              <a:t>  6,463</a:t>
+            </a:r>
+          </a:p>
+        </p:txBody>
+      </p:sp>
+      <p:sp>
+        <p:nvSpPr>
+          <p:cNvPr id="79" name="TextBox 78"/>
+          <p:cNvSpPr txBox="1"/>
+          <p:nvPr/>
+        </p:nvSpPr>
+        <p:spPr>
+          <a:xfrm>
+            <a:off x="7772400" y="3657600"/>
+            <a:ext cx="1005840" cy="347472"/>
           </a:xfrm>
           <a:prstGeom prst="rect">
             <a:avLst/>
@@ -14742,14 +15379,14 @@
       </p:sp>
       <p:sp>
         <p:nvSpPr>
-          <p:cNvPr id="65" name="TextBox 64"/>
-          <p:cNvSpPr txBox="1"/>
-          <p:nvPr/>
-        </p:nvSpPr>
-        <p:spPr>
-          <a:xfrm>
-            <a:off x="7909560" y="3657600"/>
-            <a:ext cx="1188720" cy="347472"/>
+          <p:cNvPr id="80" name="TextBox 79"/>
+          <p:cNvSpPr txBox="1"/>
+          <p:nvPr/>
+        </p:nvSpPr>
+        <p:spPr>
+          <a:xfrm>
+            <a:off x="8823960" y="3657600"/>
+            <a:ext cx="3017520" cy="347472"/>
           </a:xfrm>
           <a:prstGeom prst="rect">
             <a:avLst/>
@@ -14766,41 +15403,6 @@
             <a:r>
               <a:rPr sz="1000" b="0" i="0">
                 <a:solidFill>
-                  <a:srgbClr val="1E293B"/>
-                </a:solidFill>
-                <a:latin typeface="Calibri"/>
-              </a:rPr>
-              <a:t> 2,719</a:t>
-            </a:r>
-          </a:p>
-        </p:txBody>
-      </p:sp>
-      <p:sp>
-        <p:nvSpPr>
-          <p:cNvPr id="66" name="TextBox 65"/>
-          <p:cNvSpPr txBox="1"/>
-          <p:nvPr/>
-        </p:nvSpPr>
-        <p:spPr>
-          <a:xfrm>
-            <a:off x="9189720" y="3657600"/>
-            <a:ext cx="2697480" cy="347472"/>
-          </a:xfrm>
-          <a:prstGeom prst="rect">
-            <a:avLst/>
-          </a:prstGeom>
-          <a:noFill/>
-        </p:spPr>
-        <p:txBody>
-          <a:bodyPr wrap="square" lIns="0" rIns="0" tIns="0" bIns="0">
-            <a:spAutoFit/>
-          </a:bodyPr>
-          <a:lstStyle/>
-          <a:p>
-            <a:pPr algn="ctr"/>
-            <a:r>
-              <a:rPr sz="1000" b="0" i="0">
-                <a:solidFill>
                   <a:srgbClr val="64748B"/>
                 </a:solidFill>
                 <a:latin typeface="Calibri"/>
@@ -14812,7 +15414,7 @@
       </p:sp>
       <p:sp>
         <p:nvSpPr>
-          <p:cNvPr id="67" name="Rectangle 66"/>
+          <p:cNvPr id="81" name="Rectangle 80"/>
           <p:cNvSpPr/>
           <p:nvPr/>
         </p:nvSpPr>
@@ -14855,7 +15457,93 @@
       </p:sp>
       <p:sp>
         <p:nvSpPr>
-          <p:cNvPr id="68" name="Rounded Rectangle 67"/>
+          <p:cNvPr id="82" name="Rectangle 81"/>
+          <p:cNvSpPr/>
+          <p:nvPr/>
+        </p:nvSpPr>
+        <p:spPr>
+          <a:xfrm>
+            <a:off x="5166360" y="4041648"/>
+            <a:ext cx="1234440" cy="438912"/>
+          </a:xfrm>
+          <a:prstGeom prst="rect">
+            <a:avLst/>
+          </a:prstGeom>
+          <a:solidFill>
+            <a:srgbClr val="E8F7FF"/>
+          </a:solidFill>
+          <a:ln>
+            <a:noFill/>
+          </a:ln>
+        </p:spPr>
+        <p:style>
+          <a:lnRef idx="1">
+            <a:schemeClr val="accent1"/>
+          </a:lnRef>
+          <a:fillRef idx="3">
+            <a:schemeClr val="accent1"/>
+          </a:fillRef>
+          <a:effectRef idx="2">
+            <a:schemeClr val="accent1"/>
+          </a:effectRef>
+          <a:fontRef idx="minor">
+            <a:schemeClr val="lt1"/>
+          </a:fontRef>
+        </p:style>
+        <p:txBody>
+          <a:bodyPr rtlCol="0" anchor="ctr"/>
+          <a:lstStyle/>
+          <a:p>
+            <a:pPr algn="ctr"/>
+          </a:p>
+        </p:txBody>
+      </p:sp>
+      <p:sp>
+        <p:nvSpPr>
+          <p:cNvPr id="83" name="Rectangle 82"/>
+          <p:cNvSpPr/>
+          <p:nvPr/>
+        </p:nvSpPr>
+        <p:spPr>
+          <a:xfrm>
+            <a:off x="6400800" y="4041648"/>
+            <a:ext cx="1371600" cy="438912"/>
+          </a:xfrm>
+          <a:prstGeom prst="rect">
+            <a:avLst/>
+          </a:prstGeom>
+          <a:solidFill>
+            <a:srgbClr val="E8F5F0"/>
+          </a:solidFill>
+          <a:ln>
+            <a:noFill/>
+          </a:ln>
+        </p:spPr>
+        <p:style>
+          <a:lnRef idx="1">
+            <a:schemeClr val="accent1"/>
+          </a:lnRef>
+          <a:fillRef idx="3">
+            <a:schemeClr val="accent1"/>
+          </a:fillRef>
+          <a:effectRef idx="2">
+            <a:schemeClr val="accent1"/>
+          </a:effectRef>
+          <a:fontRef idx="minor">
+            <a:schemeClr val="lt1"/>
+          </a:fontRef>
+        </p:style>
+        <p:txBody>
+          <a:bodyPr rtlCol="0" anchor="ctr"/>
+          <a:lstStyle/>
+          <a:p>
+            <a:pPr algn="ctr"/>
+          </a:p>
+        </p:txBody>
+      </p:sp>
+      <p:sp>
+        <p:nvSpPr>
+          <p:cNvPr id="84" name="Rounded Rectangle 83"/>
           <p:cNvSpPr/>
           <p:nvPr/>
         </p:nvSpPr>
@@ -14898,7 +15586,7 @@
       </p:sp>
       <p:sp>
         <p:nvSpPr>
-          <p:cNvPr id="69" name="TextBox 68"/>
+          <p:cNvPr id="85" name="TextBox 84"/>
           <p:cNvSpPr txBox="1"/>
           <p:nvPr/>
         </p:nvSpPr>
@@ -14933,14 +15621,14 @@
       </p:sp>
       <p:sp>
         <p:nvSpPr>
-          <p:cNvPr id="70" name="TextBox 69"/>
+          <p:cNvPr id="86" name="TextBox 85"/>
           <p:cNvSpPr txBox="1"/>
           <p:nvPr/>
         </p:nvSpPr>
         <p:spPr>
           <a:xfrm>
             <a:off x="685800" y="4114800"/>
-            <a:ext cx="3520440" cy="347472"/>
+            <a:ext cx="3246120" cy="347472"/>
           </a:xfrm>
           <a:prstGeom prst="rect">
             <a:avLst/>
@@ -14968,13 +15656,13 @@
       </p:sp>
       <p:sp>
         <p:nvSpPr>
-          <p:cNvPr id="71" name="TextBox 70"/>
-          <p:cNvSpPr txBox="1"/>
-          <p:nvPr/>
-        </p:nvSpPr>
-        <p:spPr>
-          <a:xfrm>
-            <a:off x="4251960" y="4114800"/>
+          <p:cNvPr id="87" name="TextBox 86"/>
+          <p:cNvSpPr txBox="1"/>
+          <p:nvPr/>
+        </p:nvSpPr>
+        <p:spPr>
+          <a:xfrm>
+            <a:off x="3977639" y="4114800"/>
             <a:ext cx="1188720" cy="347472"/>
           </a:xfrm>
           <a:prstGeom prst="rect">
@@ -14992,7 +15680,7 @@
             <a:r>
               <a:rPr sz="1000" b="0" i="0">
                 <a:solidFill>
-                  <a:srgbClr val="1E293B"/>
+                  <a:srgbClr val="64748B"/>
                 </a:solidFill>
                 <a:latin typeface="Calibri"/>
               </a:rPr>
@@ -15003,13 +15691,13 @@
       </p:sp>
       <p:sp>
         <p:nvSpPr>
-          <p:cNvPr id="72" name="TextBox 71"/>
-          <p:cNvSpPr txBox="1"/>
-          <p:nvPr/>
-        </p:nvSpPr>
-        <p:spPr>
-          <a:xfrm>
-            <a:off x="5532120" y="4114800"/>
+          <p:cNvPr id="88" name="TextBox 87"/>
+          <p:cNvSpPr txBox="1"/>
+          <p:nvPr/>
+        </p:nvSpPr>
+        <p:spPr>
+          <a:xfrm>
+            <a:off x="5212080" y="4114800"/>
             <a:ext cx="1188720" cy="347472"/>
           </a:xfrm>
           <a:prstGeom prst="rect">
@@ -15027,6 +15715,41 @@
             <a:r>
               <a:rPr sz="1000" b="1" i="0">
                 <a:solidFill>
+                  <a:srgbClr val="1C7293"/>
+                </a:solidFill>
+                <a:latin typeface="Calibri"/>
+              </a:rPr>
+              <a:t>      0</a:t>
+            </a:r>
+          </a:p>
+        </p:txBody>
+      </p:sp>
+      <p:sp>
+        <p:nvSpPr>
+          <p:cNvPr id="89" name="TextBox 88"/>
+          <p:cNvSpPr txBox="1"/>
+          <p:nvPr/>
+        </p:nvSpPr>
+        <p:spPr>
+          <a:xfrm>
+            <a:off x="6446520" y="4114800"/>
+            <a:ext cx="1280160" cy="347472"/>
+          </a:xfrm>
+          <a:prstGeom prst="rect">
+            <a:avLst/>
+          </a:prstGeom>
+          <a:noFill/>
+        </p:spPr>
+        <p:txBody>
+          <a:bodyPr wrap="square" lIns="0" rIns="0" tIns="0" bIns="0">
+            <a:spAutoFit/>
+          </a:bodyPr>
+          <a:lstStyle/>
+          <a:p>
+            <a:pPr algn="ctr"/>
+            <a:r>
+              <a:rPr sz="1000" b="1" i="0">
+                <a:solidFill>
                   <a:srgbClr val="065A82"/>
                 </a:solidFill>
                 <a:latin typeface="Calibri"/>
@@ -15038,14 +15761,14 @@
       </p:sp>
       <p:sp>
         <p:nvSpPr>
-          <p:cNvPr id="73" name="TextBox 72"/>
-          <p:cNvSpPr txBox="1"/>
-          <p:nvPr/>
-        </p:nvSpPr>
-        <p:spPr>
-          <a:xfrm>
-            <a:off x="6720840" y="4114800"/>
-            <a:ext cx="1097280" cy="347472"/>
+          <p:cNvPr id="90" name="TextBox 89"/>
+          <p:cNvSpPr txBox="1"/>
+          <p:nvPr/>
+        </p:nvSpPr>
+        <p:spPr>
+          <a:xfrm>
+            <a:off x="7772400" y="4114800"/>
+            <a:ext cx="1005840" cy="347472"/>
           </a:xfrm>
           <a:prstGeom prst="rect">
             <a:avLst/>
@@ -15073,14 +15796,14 @@
       </p:sp>
       <p:sp>
         <p:nvSpPr>
-          <p:cNvPr id="74" name="TextBox 73"/>
-          <p:cNvSpPr txBox="1"/>
-          <p:nvPr/>
-        </p:nvSpPr>
-        <p:spPr>
-          <a:xfrm>
-            <a:off x="7909560" y="4114800"/>
-            <a:ext cx="1188720" cy="347472"/>
+          <p:cNvPr id="91" name="TextBox 90"/>
+          <p:cNvSpPr txBox="1"/>
+          <p:nvPr/>
+        </p:nvSpPr>
+        <p:spPr>
+          <a:xfrm>
+            <a:off x="8823960" y="4114800"/>
+            <a:ext cx="3017520" cy="347472"/>
           </a:xfrm>
           <a:prstGeom prst="rect">
             <a:avLst/>
@@ -15097,41 +15820,6 @@
             <a:r>
               <a:rPr sz="1000" b="0" i="0">
                 <a:solidFill>
-                  <a:srgbClr val="1E293B"/>
-                </a:solidFill>
-                <a:latin typeface="Calibri"/>
-              </a:rPr>
-              <a:t> 1,363</a:t>
-            </a:r>
-          </a:p>
-        </p:txBody>
-      </p:sp>
-      <p:sp>
-        <p:nvSpPr>
-          <p:cNvPr id="75" name="TextBox 74"/>
-          <p:cNvSpPr txBox="1"/>
-          <p:nvPr/>
-        </p:nvSpPr>
-        <p:spPr>
-          <a:xfrm>
-            <a:off x="9189720" y="4114800"/>
-            <a:ext cx="2697480" cy="347472"/>
-          </a:xfrm>
-          <a:prstGeom prst="rect">
-            <a:avLst/>
-          </a:prstGeom>
-          <a:noFill/>
-        </p:spPr>
-        <p:txBody>
-          <a:bodyPr wrap="square" lIns="0" rIns="0" tIns="0" bIns="0">
-            <a:spAutoFit/>
-          </a:bodyPr>
-          <a:lstStyle/>
-          <a:p>
-            <a:pPr algn="ctr"/>
-            <a:r>
-              <a:rPr sz="1000" b="0" i="0">
-                <a:solidFill>
                   <a:srgbClr val="64748B"/>
                 </a:solidFill>
                 <a:latin typeface="Calibri"/>
@@ -15143,7 +15831,7 @@
       </p:sp>
       <p:sp>
         <p:nvSpPr>
-          <p:cNvPr id="76" name="Rectangle 75"/>
+          <p:cNvPr id="92" name="Rectangle 91"/>
           <p:cNvSpPr/>
           <p:nvPr/>
         </p:nvSpPr>
@@ -15186,7 +15874,93 @@
       </p:sp>
       <p:sp>
         <p:nvSpPr>
-          <p:cNvPr id="77" name="Rounded Rectangle 76"/>
+          <p:cNvPr id="93" name="Rectangle 92"/>
+          <p:cNvSpPr/>
+          <p:nvPr/>
+        </p:nvSpPr>
+        <p:spPr>
+          <a:xfrm>
+            <a:off x="5166360" y="4498848"/>
+            <a:ext cx="1234440" cy="438912"/>
+          </a:xfrm>
+          <a:prstGeom prst="rect">
+            <a:avLst/>
+          </a:prstGeom>
+          <a:solidFill>
+            <a:srgbClr val="D6EFFF"/>
+          </a:solidFill>
+          <a:ln>
+            <a:noFill/>
+          </a:ln>
+        </p:spPr>
+        <p:style>
+          <a:lnRef idx="1">
+            <a:schemeClr val="accent1"/>
+          </a:lnRef>
+          <a:fillRef idx="3">
+            <a:schemeClr val="accent1"/>
+          </a:fillRef>
+          <a:effectRef idx="2">
+            <a:schemeClr val="accent1"/>
+          </a:effectRef>
+          <a:fontRef idx="minor">
+            <a:schemeClr val="lt1"/>
+          </a:fontRef>
+        </p:style>
+        <p:txBody>
+          <a:bodyPr rtlCol="0" anchor="ctr"/>
+          <a:lstStyle/>
+          <a:p>
+            <a:pPr algn="ctr"/>
+          </a:p>
+        </p:txBody>
+      </p:sp>
+      <p:sp>
+        <p:nvSpPr>
+          <p:cNvPr id="94" name="Rectangle 93"/>
+          <p:cNvSpPr/>
+          <p:nvPr/>
+        </p:nvSpPr>
+        <p:spPr>
+          <a:xfrm>
+            <a:off x="6400800" y="4498848"/>
+            <a:ext cx="1371600" cy="438912"/>
+          </a:xfrm>
+          <a:prstGeom prst="rect">
+            <a:avLst/>
+          </a:prstGeom>
+          <a:solidFill>
+            <a:srgbClr val="D6ECE4"/>
+          </a:solidFill>
+          <a:ln>
+            <a:noFill/>
+          </a:ln>
+        </p:spPr>
+        <p:style>
+          <a:lnRef idx="1">
+            <a:schemeClr val="accent1"/>
+          </a:lnRef>
+          <a:fillRef idx="3">
+            <a:schemeClr val="accent1"/>
+          </a:fillRef>
+          <a:effectRef idx="2">
+            <a:schemeClr val="accent1"/>
+          </a:effectRef>
+          <a:fontRef idx="minor">
+            <a:schemeClr val="lt1"/>
+          </a:fontRef>
+        </p:style>
+        <p:txBody>
+          <a:bodyPr rtlCol="0" anchor="ctr"/>
+          <a:lstStyle/>
+          <a:p>
+            <a:pPr algn="ctr"/>
+          </a:p>
+        </p:txBody>
+      </p:sp>
+      <p:sp>
+        <p:nvSpPr>
+          <p:cNvPr id="95" name="Rounded Rectangle 94"/>
           <p:cNvSpPr/>
           <p:nvPr/>
         </p:nvSpPr>
@@ -15229,7 +16003,7 @@
       </p:sp>
       <p:sp>
         <p:nvSpPr>
-          <p:cNvPr id="78" name="TextBox 77"/>
+          <p:cNvPr id="96" name="TextBox 95"/>
           <p:cNvSpPr txBox="1"/>
           <p:nvPr/>
         </p:nvSpPr>
@@ -15264,14 +16038,14 @@
       </p:sp>
       <p:sp>
         <p:nvSpPr>
-          <p:cNvPr id="79" name="TextBox 78"/>
+          <p:cNvPr id="97" name="TextBox 96"/>
           <p:cNvSpPr txBox="1"/>
           <p:nvPr/>
         </p:nvSpPr>
         <p:spPr>
           <a:xfrm>
             <a:off x="685800" y="4572000"/>
-            <a:ext cx="3520440" cy="347472"/>
+            <a:ext cx="3246120" cy="347472"/>
           </a:xfrm>
           <a:prstGeom prst="rect">
             <a:avLst/>
@@ -15299,13 +16073,13 @@
       </p:sp>
       <p:sp>
         <p:nvSpPr>
-          <p:cNvPr id="80" name="TextBox 79"/>
-          <p:cNvSpPr txBox="1"/>
-          <p:nvPr/>
-        </p:nvSpPr>
-        <p:spPr>
-          <a:xfrm>
-            <a:off x="4251960" y="4572000"/>
+          <p:cNvPr id="98" name="TextBox 97"/>
+          <p:cNvSpPr txBox="1"/>
+          <p:nvPr/>
+        </p:nvSpPr>
+        <p:spPr>
+          <a:xfrm>
+            <a:off x="3977639" y="4572000"/>
             <a:ext cx="1188720" cy="347472"/>
           </a:xfrm>
           <a:prstGeom prst="rect">
@@ -15323,7 +16097,7 @@
             <a:r>
               <a:rPr sz="1000" b="0" i="0">
                 <a:solidFill>
-                  <a:srgbClr val="1E293B"/>
+                  <a:srgbClr val="64748B"/>
                 </a:solidFill>
                 <a:latin typeface="Calibri"/>
               </a:rPr>
@@ -15334,13 +16108,13 @@
       </p:sp>
       <p:sp>
         <p:nvSpPr>
-          <p:cNvPr id="81" name="TextBox 80"/>
-          <p:cNvSpPr txBox="1"/>
-          <p:nvPr/>
-        </p:nvSpPr>
-        <p:spPr>
-          <a:xfrm>
-            <a:off x="5532120" y="4572000"/>
+          <p:cNvPr id="99" name="TextBox 98"/>
+          <p:cNvSpPr txBox="1"/>
+          <p:nvPr/>
+        </p:nvSpPr>
+        <p:spPr>
+          <a:xfrm>
+            <a:off x="5212080" y="4572000"/>
             <a:ext cx="1188720" cy="347472"/>
           </a:xfrm>
           <a:prstGeom prst="rect">
@@ -15358,25 +16132,60 @@
             <a:r>
               <a:rPr sz="1000" b="1" i="0">
                 <a:solidFill>
+                  <a:srgbClr val="1C7293"/>
+                </a:solidFill>
+                <a:latin typeface="Calibri"/>
+              </a:rPr>
+              <a:t>    577</a:t>
+            </a:r>
+          </a:p>
+        </p:txBody>
+      </p:sp>
+      <p:sp>
+        <p:nvSpPr>
+          <p:cNvPr id="100" name="TextBox 99"/>
+          <p:cNvSpPr txBox="1"/>
+          <p:nvPr/>
+        </p:nvSpPr>
+        <p:spPr>
+          <a:xfrm>
+            <a:off x="6446520" y="4572000"/>
+            <a:ext cx="1280160" cy="347472"/>
+          </a:xfrm>
+          <a:prstGeom prst="rect">
+            <a:avLst/>
+          </a:prstGeom>
+          <a:noFill/>
+        </p:spPr>
+        <p:txBody>
+          <a:bodyPr wrap="square" lIns="0" rIns="0" tIns="0" bIns="0">
+            <a:spAutoFit/>
+          </a:bodyPr>
+          <a:lstStyle/>
+          <a:p>
+            <a:pPr algn="ctr"/>
+            <a:r>
+              <a:rPr sz="1000" b="1" i="0">
+                <a:solidFill>
                   <a:srgbClr val="065A82"/>
                 </a:solidFill>
                 <a:latin typeface="Calibri"/>
               </a:rPr>
-              <a:t>  3,696</a:t>
-            </a:r>
-          </a:p>
-        </p:txBody>
-      </p:sp>
-      <p:sp>
-        <p:nvSpPr>
-          <p:cNvPr id="82" name="TextBox 81"/>
-          <p:cNvSpPr txBox="1"/>
-          <p:nvPr/>
-        </p:nvSpPr>
-        <p:spPr>
-          <a:xfrm>
-            <a:off x="6720840" y="4572000"/>
-            <a:ext cx="1097280" cy="347472"/>
+              <a:t>  3,599</a:t>
+            </a:r>
+          </a:p>
+        </p:txBody>
+      </p:sp>
+      <p:sp>
+        <p:nvSpPr>
+          <p:cNvPr id="101" name="TextBox 100"/>
+          <p:cNvSpPr txBox="1"/>
+          <p:nvPr/>
+        </p:nvSpPr>
+        <p:spPr>
+          <a:xfrm>
+            <a:off x="7772400" y="4572000"/>
+            <a:ext cx="1005840" cy="347472"/>
           </a:xfrm>
           <a:prstGeom prst="rect">
             <a:avLst/>
@@ -15397,21 +16206,21 @@
                 </a:solidFill>
                 <a:latin typeface="Calibri"/>
               </a:rPr>
-              <a:t>-65.8%</a:t>
-            </a:r>
-          </a:p>
-        </p:txBody>
-      </p:sp>
-      <p:sp>
-        <p:nvSpPr>
-          <p:cNvPr id="83" name="TextBox 82"/>
-          <p:cNvSpPr txBox="1"/>
-          <p:nvPr/>
-        </p:nvSpPr>
-        <p:spPr>
-          <a:xfrm>
-            <a:off x="7909560" y="4572000"/>
-            <a:ext cx="1188720" cy="347472"/>
+              <a:t>-61.3%</a:t>
+            </a:r>
+          </a:p>
+        </p:txBody>
+      </p:sp>
+      <p:sp>
+        <p:nvSpPr>
+          <p:cNvPr id="102" name="TextBox 101"/>
+          <p:cNvSpPr txBox="1"/>
+          <p:nvPr/>
+        </p:nvSpPr>
+        <p:spPr>
+          <a:xfrm>
+            <a:off x="8823960" y="4572000"/>
+            <a:ext cx="3017520" cy="347472"/>
           </a:xfrm>
           <a:prstGeom prst="rect">
             <a:avLst/>
@@ -15428,41 +16237,6 @@
             <a:r>
               <a:rPr sz="1000" b="0" i="0">
                 <a:solidFill>
-                  <a:srgbClr val="1E293B"/>
-                </a:solidFill>
-                <a:latin typeface="Calibri"/>
-              </a:rPr>
-              <a:t>   544</a:t>
-            </a:r>
-          </a:p>
-        </p:txBody>
-      </p:sp>
-      <p:sp>
-        <p:nvSpPr>
-          <p:cNvPr id="84" name="TextBox 83"/>
-          <p:cNvSpPr txBox="1"/>
-          <p:nvPr/>
-        </p:nvSpPr>
-        <p:spPr>
-          <a:xfrm>
-            <a:off x="9189720" y="4572000"/>
-            <a:ext cx="2697480" cy="347472"/>
-          </a:xfrm>
-          <a:prstGeom prst="rect">
-            <a:avLst/>
-          </a:prstGeom>
-          <a:noFill/>
-        </p:spPr>
-        <p:txBody>
-          <a:bodyPr wrap="square" lIns="0" rIns="0" tIns="0" bIns="0">
-            <a:spAutoFit/>
-          </a:bodyPr>
-          <a:lstStyle/>
-          <a:p>
-            <a:pPr algn="ctr"/>
-            <a:r>
-              <a:rPr sz="1000" b="0" i="0">
-                <a:solidFill>
                   <a:srgbClr val="64748B"/>
                 </a:solidFill>
                 <a:latin typeface="Calibri"/>
@@ -15474,7 +16248,7 @@
       </p:sp>
       <p:sp>
         <p:nvSpPr>
-          <p:cNvPr id="85" name="Rectangle 84"/>
+          <p:cNvPr id="103" name="Rectangle 102"/>
           <p:cNvSpPr/>
           <p:nvPr/>
         </p:nvSpPr>
@@ -15517,7 +16291,93 @@
       </p:sp>
       <p:sp>
         <p:nvSpPr>
-          <p:cNvPr id="86" name="Rounded Rectangle 85"/>
+          <p:cNvPr id="104" name="Rectangle 103"/>
+          <p:cNvSpPr/>
+          <p:nvPr/>
+        </p:nvSpPr>
+        <p:spPr>
+          <a:xfrm>
+            <a:off x="5166360" y="4956048"/>
+            <a:ext cx="1234440" cy="438912"/>
+          </a:xfrm>
+          <a:prstGeom prst="rect">
+            <a:avLst/>
+          </a:prstGeom>
+          <a:solidFill>
+            <a:srgbClr val="E8F7FF"/>
+          </a:solidFill>
+          <a:ln>
+            <a:noFill/>
+          </a:ln>
+        </p:spPr>
+        <p:style>
+          <a:lnRef idx="1">
+            <a:schemeClr val="accent1"/>
+          </a:lnRef>
+          <a:fillRef idx="3">
+            <a:schemeClr val="accent1"/>
+          </a:fillRef>
+          <a:effectRef idx="2">
+            <a:schemeClr val="accent1"/>
+          </a:effectRef>
+          <a:fontRef idx="minor">
+            <a:schemeClr val="lt1"/>
+          </a:fontRef>
+        </p:style>
+        <p:txBody>
+          <a:bodyPr rtlCol="0" anchor="ctr"/>
+          <a:lstStyle/>
+          <a:p>
+            <a:pPr algn="ctr"/>
+          </a:p>
+        </p:txBody>
+      </p:sp>
+      <p:sp>
+        <p:nvSpPr>
+          <p:cNvPr id="105" name="Rectangle 104"/>
+          <p:cNvSpPr/>
+          <p:nvPr/>
+        </p:nvSpPr>
+        <p:spPr>
+          <a:xfrm>
+            <a:off x="6400800" y="4956048"/>
+            <a:ext cx="1371600" cy="438912"/>
+          </a:xfrm>
+          <a:prstGeom prst="rect">
+            <a:avLst/>
+          </a:prstGeom>
+          <a:solidFill>
+            <a:srgbClr val="E8F5F0"/>
+          </a:solidFill>
+          <a:ln>
+            <a:noFill/>
+          </a:ln>
+        </p:spPr>
+        <p:style>
+          <a:lnRef idx="1">
+            <a:schemeClr val="accent1"/>
+          </a:lnRef>
+          <a:fillRef idx="3">
+            <a:schemeClr val="accent1"/>
+          </a:fillRef>
+          <a:effectRef idx="2">
+            <a:schemeClr val="accent1"/>
+          </a:effectRef>
+          <a:fontRef idx="minor">
+            <a:schemeClr val="lt1"/>
+          </a:fontRef>
+        </p:style>
+        <p:txBody>
+          <a:bodyPr rtlCol="0" anchor="ctr"/>
+          <a:lstStyle/>
+          <a:p>
+            <a:pPr algn="ctr"/>
+          </a:p>
+        </p:txBody>
+      </p:sp>
+      <p:sp>
+        <p:nvSpPr>
+          <p:cNvPr id="106" name="Rounded Rectangle 105"/>
           <p:cNvSpPr/>
           <p:nvPr/>
         </p:nvSpPr>
@@ -15560,7 +16420,7 @@
       </p:sp>
       <p:sp>
         <p:nvSpPr>
-          <p:cNvPr id="87" name="TextBox 86"/>
+          <p:cNvPr id="107" name="TextBox 106"/>
           <p:cNvSpPr txBox="1"/>
           <p:nvPr/>
         </p:nvSpPr>
@@ -15595,14 +16455,14 @@
       </p:sp>
       <p:sp>
         <p:nvSpPr>
-          <p:cNvPr id="88" name="TextBox 87"/>
+          <p:cNvPr id="108" name="TextBox 107"/>
           <p:cNvSpPr txBox="1"/>
           <p:nvPr/>
         </p:nvSpPr>
         <p:spPr>
           <a:xfrm>
             <a:off x="685800" y="5029200"/>
-            <a:ext cx="3520440" cy="347472"/>
+            <a:ext cx="3246120" cy="347472"/>
           </a:xfrm>
           <a:prstGeom prst="rect">
             <a:avLst/>
@@ -15630,13 +16490,13 @@
       </p:sp>
       <p:sp>
         <p:nvSpPr>
-          <p:cNvPr id="89" name="TextBox 88"/>
-          <p:cNvSpPr txBox="1"/>
-          <p:nvPr/>
-        </p:nvSpPr>
-        <p:spPr>
-          <a:xfrm>
-            <a:off x="4251960" y="5029200"/>
+          <p:cNvPr id="109" name="TextBox 108"/>
+          <p:cNvSpPr txBox="1"/>
+          <p:nvPr/>
+        </p:nvSpPr>
+        <p:spPr>
+          <a:xfrm>
+            <a:off x="3977639" y="5029200"/>
             <a:ext cx="1188720" cy="347472"/>
           </a:xfrm>
           <a:prstGeom prst="rect">
@@ -15654,7 +16514,7 @@
             <a:r>
               <a:rPr sz="1000" b="0" i="0">
                 <a:solidFill>
-                  <a:srgbClr val="1E293B"/>
+                  <a:srgbClr val="64748B"/>
                 </a:solidFill>
                 <a:latin typeface="Calibri"/>
               </a:rPr>
@@ -15665,13 +16525,13 @@
       </p:sp>
       <p:sp>
         <p:nvSpPr>
-          <p:cNvPr id="90" name="TextBox 89"/>
-          <p:cNvSpPr txBox="1"/>
-          <p:nvPr/>
-        </p:nvSpPr>
-        <p:spPr>
-          <a:xfrm>
-            <a:off x="5532120" y="5029200"/>
+          <p:cNvPr id="110" name="TextBox 109"/>
+          <p:cNvSpPr txBox="1"/>
+          <p:nvPr/>
+        </p:nvSpPr>
+        <p:spPr>
+          <a:xfrm>
+            <a:off x="5212080" y="5029200"/>
             <a:ext cx="1188720" cy="347472"/>
           </a:xfrm>
           <a:prstGeom prst="rect">
@@ -15689,25 +16549,60 @@
             <a:r>
               <a:rPr sz="1000" b="1" i="0">
                 <a:solidFill>
+                  <a:srgbClr val="1C7293"/>
+                </a:solidFill>
+                <a:latin typeface="Calibri"/>
+              </a:rPr>
+              <a:t>     39</a:t>
+            </a:r>
+          </a:p>
+        </p:txBody>
+      </p:sp>
+      <p:sp>
+        <p:nvSpPr>
+          <p:cNvPr id="111" name="TextBox 110"/>
+          <p:cNvSpPr txBox="1"/>
+          <p:nvPr/>
+        </p:nvSpPr>
+        <p:spPr>
+          <a:xfrm>
+            <a:off x="6446520" y="5029200"/>
+            <a:ext cx="1280160" cy="347472"/>
+          </a:xfrm>
+          <a:prstGeom prst="rect">
+            <a:avLst/>
+          </a:prstGeom>
+          <a:noFill/>
+        </p:spPr>
+        <p:txBody>
+          <a:bodyPr wrap="square" lIns="0" rIns="0" tIns="0" bIns="0">
+            <a:spAutoFit/>
+          </a:bodyPr>
+          <a:lstStyle/>
+          <a:p>
+            <a:pPr algn="ctr"/>
+            <a:r>
+              <a:rPr sz="1000" b="1" i="0">
+                <a:solidFill>
                   <a:srgbClr val="065A82"/>
                 </a:solidFill>
                 <a:latin typeface="Calibri"/>
               </a:rPr>
-              <a:t>  3,464</a:t>
-            </a:r>
-          </a:p>
-        </p:txBody>
-      </p:sp>
-      <p:sp>
-        <p:nvSpPr>
-          <p:cNvPr id="91" name="TextBox 90"/>
-          <p:cNvSpPr txBox="1"/>
-          <p:nvPr/>
-        </p:nvSpPr>
-        <p:spPr>
-          <a:xfrm>
-            <a:off x="6720840" y="5029200"/>
-            <a:ext cx="1097280" cy="347472"/>
+              <a:t>  3,425</a:t>
+            </a:r>
+          </a:p>
+        </p:txBody>
+      </p:sp>
+      <p:sp>
+        <p:nvSpPr>
+          <p:cNvPr id="112" name="TextBox 111"/>
+          <p:cNvSpPr txBox="1"/>
+          <p:nvPr/>
+        </p:nvSpPr>
+        <p:spPr>
+          <a:xfrm>
+            <a:off x="7772400" y="5029200"/>
+            <a:ext cx="1005840" cy="347472"/>
           </a:xfrm>
           <a:prstGeom prst="rect">
             <a:avLst/>
@@ -15724,25 +16619,25 @@
             <a:r>
               <a:rPr sz="1000" b="1" i="0">
                 <a:solidFill>
-                  <a:srgbClr val="DC2626"/>
-                </a:solidFill>
-                <a:latin typeface="Calibri"/>
-              </a:rPr>
-              <a:t> new</a:t>
-            </a:r>
-          </a:p>
-        </p:txBody>
-      </p:sp>
-      <p:sp>
-        <p:nvSpPr>
-          <p:cNvPr id="92" name="TextBox 91"/>
-          <p:cNvSpPr txBox="1"/>
-          <p:nvPr/>
-        </p:nvSpPr>
-        <p:spPr>
-          <a:xfrm>
-            <a:off x="7909560" y="5029200"/>
-            <a:ext cx="1188720" cy="347472"/>
+                  <a:srgbClr val="D97706"/>
+                </a:solidFill>
+                <a:latin typeface="Calibri"/>
+              </a:rPr>
+              <a:t>   new</a:t>
+            </a:r>
+          </a:p>
+        </p:txBody>
+      </p:sp>
+      <p:sp>
+        <p:nvSpPr>
+          <p:cNvPr id="113" name="TextBox 112"/>
+          <p:cNvSpPr txBox="1"/>
+          <p:nvPr/>
+        </p:nvSpPr>
+        <p:spPr>
+          <a:xfrm>
+            <a:off x="8823960" y="5029200"/>
+            <a:ext cx="3017520" cy="347472"/>
           </a:xfrm>
           <a:prstGeom prst="rect">
             <a:avLst/>
@@ -15759,41 +16654,6 @@
             <a:r>
               <a:rPr sz="1000" b="0" i="0">
                 <a:solidFill>
-                  <a:srgbClr val="1E293B"/>
-                </a:solidFill>
-                <a:latin typeface="Calibri"/>
-              </a:rPr>
-              <a:t>2,342</a:t>
-            </a:r>
-          </a:p>
-        </p:txBody>
-      </p:sp>
-      <p:sp>
-        <p:nvSpPr>
-          <p:cNvPr id="93" name="TextBox 92"/>
-          <p:cNvSpPr txBox="1"/>
-          <p:nvPr/>
-        </p:nvSpPr>
-        <p:spPr>
-          <a:xfrm>
-            <a:off x="9189720" y="5029200"/>
-            <a:ext cx="2697480" cy="347472"/>
-          </a:xfrm>
-          <a:prstGeom prst="rect">
-            <a:avLst/>
-          </a:prstGeom>
-          <a:noFill/>
-        </p:spPr>
-        <p:txBody>
-          <a:bodyPr wrap="square" lIns="0" rIns="0" tIns="0" bIns="0">
-            <a:spAutoFit/>
-          </a:bodyPr>
-          <a:lstStyle/>
-          <a:p>
-            <a:pPr algn="ctr"/>
-            <a:r>
-              <a:rPr sz="1000" b="0" i="0">
-                <a:solidFill>
                   <a:srgbClr val="64748B"/>
                 </a:solidFill>
                 <a:latin typeface="Calibri"/>
@@ -15805,7 +16665,7 @@
       </p:sp>
       <p:sp>
         <p:nvSpPr>
-          <p:cNvPr id="94" name="Rectangle 93"/>
+          <p:cNvPr id="114" name="Rectangle 113"/>
           <p:cNvSpPr/>
           <p:nvPr/>
         </p:nvSpPr>
@@ -15848,7 +16708,93 @@
       </p:sp>
       <p:sp>
         <p:nvSpPr>
-          <p:cNvPr id="95" name="Rounded Rectangle 94"/>
+          <p:cNvPr id="115" name="Rectangle 114"/>
+          <p:cNvSpPr/>
+          <p:nvPr/>
+        </p:nvSpPr>
+        <p:spPr>
+          <a:xfrm>
+            <a:off x="5166360" y="5413248"/>
+            <a:ext cx="1234440" cy="438912"/>
+          </a:xfrm>
+          <a:prstGeom prst="rect">
+            <a:avLst/>
+          </a:prstGeom>
+          <a:solidFill>
+            <a:srgbClr val="D6EFFF"/>
+          </a:solidFill>
+          <a:ln>
+            <a:noFill/>
+          </a:ln>
+        </p:spPr>
+        <p:style>
+          <a:lnRef idx="1">
+            <a:schemeClr val="accent1"/>
+          </a:lnRef>
+          <a:fillRef idx="3">
+            <a:schemeClr val="accent1"/>
+          </a:fillRef>
+          <a:effectRef idx="2">
+            <a:schemeClr val="accent1"/>
+          </a:effectRef>
+          <a:fontRef idx="minor">
+            <a:schemeClr val="lt1"/>
+          </a:fontRef>
+        </p:style>
+        <p:txBody>
+          <a:bodyPr rtlCol="0" anchor="ctr"/>
+          <a:lstStyle/>
+          <a:p>
+            <a:pPr algn="ctr"/>
+          </a:p>
+        </p:txBody>
+      </p:sp>
+      <p:sp>
+        <p:nvSpPr>
+          <p:cNvPr id="116" name="Rectangle 115"/>
+          <p:cNvSpPr/>
+          <p:nvPr/>
+        </p:nvSpPr>
+        <p:spPr>
+          <a:xfrm>
+            <a:off x="6400800" y="5413248"/>
+            <a:ext cx="1371600" cy="438912"/>
+          </a:xfrm>
+          <a:prstGeom prst="rect">
+            <a:avLst/>
+          </a:prstGeom>
+          <a:solidFill>
+            <a:srgbClr val="D6ECE4"/>
+          </a:solidFill>
+          <a:ln>
+            <a:noFill/>
+          </a:ln>
+        </p:spPr>
+        <p:style>
+          <a:lnRef idx="1">
+            <a:schemeClr val="accent1"/>
+          </a:lnRef>
+          <a:fillRef idx="3">
+            <a:schemeClr val="accent1"/>
+          </a:fillRef>
+          <a:effectRef idx="2">
+            <a:schemeClr val="accent1"/>
+          </a:effectRef>
+          <a:fontRef idx="minor">
+            <a:schemeClr val="lt1"/>
+          </a:fontRef>
+        </p:style>
+        <p:txBody>
+          <a:bodyPr rtlCol="0" anchor="ctr"/>
+          <a:lstStyle/>
+          <a:p>
+            <a:pPr algn="ctr"/>
+          </a:p>
+        </p:txBody>
+      </p:sp>
+      <p:sp>
+        <p:nvSpPr>
+          <p:cNvPr id="117" name="Rounded Rectangle 116"/>
           <p:cNvSpPr/>
           <p:nvPr/>
         </p:nvSpPr>
@@ -15891,7 +16837,7 @@
       </p:sp>
       <p:sp>
         <p:nvSpPr>
-          <p:cNvPr id="96" name="TextBox 95"/>
+          <p:cNvPr id="118" name="TextBox 117"/>
           <p:cNvSpPr txBox="1"/>
           <p:nvPr/>
         </p:nvSpPr>
@@ -15926,14 +16872,14 @@
       </p:sp>
       <p:sp>
         <p:nvSpPr>
-          <p:cNvPr id="97" name="TextBox 96"/>
+          <p:cNvPr id="119" name="TextBox 118"/>
           <p:cNvSpPr txBox="1"/>
           <p:nvPr/>
         </p:nvSpPr>
         <p:spPr>
           <a:xfrm>
             <a:off x="685800" y="5486400"/>
-            <a:ext cx="3520440" cy="347472"/>
+            <a:ext cx="3246120" cy="347472"/>
           </a:xfrm>
           <a:prstGeom prst="rect">
             <a:avLst/>
@@ -15961,13 +16907,13 @@
       </p:sp>
       <p:sp>
         <p:nvSpPr>
-          <p:cNvPr id="98" name="TextBox 97"/>
-          <p:cNvSpPr txBox="1"/>
-          <p:nvPr/>
-        </p:nvSpPr>
-        <p:spPr>
-          <a:xfrm>
-            <a:off x="4251960" y="5486400"/>
+          <p:cNvPr id="120" name="TextBox 119"/>
+          <p:cNvSpPr txBox="1"/>
+          <p:nvPr/>
+        </p:nvSpPr>
+        <p:spPr>
+          <a:xfrm>
+            <a:off x="3977639" y="5486400"/>
             <a:ext cx="1188720" cy="347472"/>
           </a:xfrm>
           <a:prstGeom prst="rect">
@@ -15985,7 +16931,7 @@
             <a:r>
               <a:rPr sz="1000" b="0" i="0">
                 <a:solidFill>
-                  <a:srgbClr val="1E293B"/>
+                  <a:srgbClr val="64748B"/>
                 </a:solidFill>
                 <a:latin typeface="Calibri"/>
               </a:rPr>
@@ -15996,13 +16942,13 @@
       </p:sp>
       <p:sp>
         <p:nvSpPr>
-          <p:cNvPr id="99" name="TextBox 98"/>
-          <p:cNvSpPr txBox="1"/>
-          <p:nvPr/>
-        </p:nvSpPr>
-        <p:spPr>
-          <a:xfrm>
-            <a:off x="5532120" y="5486400"/>
+          <p:cNvPr id="121" name="TextBox 120"/>
+          <p:cNvSpPr txBox="1"/>
+          <p:nvPr/>
+        </p:nvSpPr>
+        <p:spPr>
+          <a:xfrm>
+            <a:off x="5212080" y="5486400"/>
             <a:ext cx="1188720" cy="347472"/>
           </a:xfrm>
           <a:prstGeom prst="rect">
@@ -16020,6 +16966,41 @@
             <a:r>
               <a:rPr sz="1000" b="1" i="0">
                 <a:solidFill>
+                  <a:srgbClr val="1C7293"/>
+                </a:solidFill>
+                <a:latin typeface="Calibri"/>
+              </a:rPr>
+              <a:t>      0</a:t>
+            </a:r>
+          </a:p>
+        </p:txBody>
+      </p:sp>
+      <p:sp>
+        <p:nvSpPr>
+          <p:cNvPr id="122" name="TextBox 121"/>
+          <p:cNvSpPr txBox="1"/>
+          <p:nvPr/>
+        </p:nvSpPr>
+        <p:spPr>
+          <a:xfrm>
+            <a:off x="6446520" y="5486400"/>
+            <a:ext cx="1280160" cy="347472"/>
+          </a:xfrm>
+          <a:prstGeom prst="rect">
+            <a:avLst/>
+          </a:prstGeom>
+          <a:noFill/>
+        </p:spPr>
+        <p:txBody>
+          <a:bodyPr wrap="square" lIns="0" rIns="0" tIns="0" bIns="0">
+            <a:spAutoFit/>
+          </a:bodyPr>
+          <a:lstStyle/>
+          <a:p>
+            <a:pPr algn="ctr"/>
+            <a:r>
+              <a:rPr sz="1000" b="1" i="0">
+                <a:solidFill>
                   <a:srgbClr val="065A82"/>
                 </a:solidFill>
                 <a:latin typeface="Calibri"/>
@@ -16031,14 +17012,14 @@
       </p:sp>
       <p:sp>
         <p:nvSpPr>
-          <p:cNvPr id="100" name="TextBox 99"/>
-          <p:cNvSpPr txBox="1"/>
-          <p:nvPr/>
-        </p:nvSpPr>
-        <p:spPr>
-          <a:xfrm>
-            <a:off x="6720840" y="5486400"/>
-            <a:ext cx="1097280" cy="347472"/>
+          <p:cNvPr id="123" name="TextBox 122"/>
+          <p:cNvSpPr txBox="1"/>
+          <p:nvPr/>
+        </p:nvSpPr>
+        <p:spPr>
+          <a:xfrm>
+            <a:off x="7772400" y="5486400"/>
+            <a:ext cx="1005840" cy="347472"/>
           </a:xfrm>
           <a:prstGeom prst="rect">
             <a:avLst/>
@@ -16066,14 +17047,14 @@
       </p:sp>
       <p:sp>
         <p:nvSpPr>
-          <p:cNvPr id="101" name="TextBox 100"/>
-          <p:cNvSpPr txBox="1"/>
-          <p:nvPr/>
-        </p:nvSpPr>
-        <p:spPr>
-          <a:xfrm>
-            <a:off x="7909560" y="5486400"/>
-            <a:ext cx="1188720" cy="347472"/>
+          <p:cNvPr id="124" name="TextBox 123"/>
+          <p:cNvSpPr txBox="1"/>
+          <p:nvPr/>
+        </p:nvSpPr>
+        <p:spPr>
+          <a:xfrm>
+            <a:off x="8823960" y="5486400"/>
+            <a:ext cx="3017520" cy="347472"/>
           </a:xfrm>
           <a:prstGeom prst="rect">
             <a:avLst/>
@@ -16090,41 +17071,6 @@
             <a:r>
               <a:rPr sz="1000" b="0" i="0">
                 <a:solidFill>
-                  <a:srgbClr val="1E293B"/>
-                </a:solidFill>
-                <a:latin typeface="Calibri"/>
-              </a:rPr>
-              <a:t>1,833</a:t>
-            </a:r>
-          </a:p>
-        </p:txBody>
-      </p:sp>
-      <p:sp>
-        <p:nvSpPr>
-          <p:cNvPr id="102" name="TextBox 101"/>
-          <p:cNvSpPr txBox="1"/>
-          <p:nvPr/>
-        </p:nvSpPr>
-        <p:spPr>
-          <a:xfrm>
-            <a:off x="9189720" y="5486400"/>
-            <a:ext cx="2697480" cy="347472"/>
-          </a:xfrm>
-          <a:prstGeom prst="rect">
-            <a:avLst/>
-          </a:prstGeom>
-          <a:noFill/>
-        </p:spPr>
-        <p:txBody>
-          <a:bodyPr wrap="square" lIns="0" rIns="0" tIns="0" bIns="0">
-            <a:spAutoFit/>
-          </a:bodyPr>
-          <a:lstStyle/>
-          <a:p>
-            <a:pPr algn="ctr"/>
-            <a:r>
-              <a:rPr sz="1000" b="0" i="0">
-                <a:solidFill>
                   <a:srgbClr val="64748B"/>
                 </a:solidFill>
                 <a:latin typeface="Calibri"/>
@@ -16136,7 +17082,7 @@
       </p:sp>
       <p:sp>
         <p:nvSpPr>
-          <p:cNvPr id="103" name="TextBox 102"/>
+          <p:cNvPr id="125" name="TextBox 124"/>
           <p:cNvSpPr txBox="1"/>
           <p:nvPr/>
         </p:nvSpPr>
@@ -16164,7 +17110,7 @@
                 </a:solidFill>
                 <a:latin typeface="Calibri"/>
               </a:rPr>
-              <a:t>&gt;&gt; Our Story page surged +5,584% MoM on solidigm.com — from near-zero to top-4 — the breakout opportunity of FY26.</a:t>
+              <a:t>&gt;&gt; Our Story surged to #4 — 89% Non-Paid (organic/direct). Edge Storage has the highest Paid share at 37% — review campaign ROI.</a:t>
             </a:r>
           </a:p>
         </p:txBody>
@@ -18156,7 +19102,7 @@
                 </a:solidFill>
                 <a:latin typeface="Calibri"/>
               </a:rPr>
-              <a:t>Covers who-we-are.html · our-story.html · careers-page.html (EN variants, solidigm.com only)</a:t>
+              <a:t>our-story.html only  |  solidigm.com  |  Paid-Display vs Organic/Direct/Referral/Social</a:t>
             </a:r>
           </a:p>
         </p:txBody>
@@ -18234,7 +19180,7 @@
                 </a:solidFill>
                 <a:latin typeface="Calibri"/>
               </a:rPr>
-              <a:t>6,616</a:t>
+              <a:t>514</a:t>
             </a:r>
           </a:p>
         </p:txBody>
@@ -18347,7 +19293,7 @@
                 </a:solidFill>
                 <a:latin typeface="Calibri"/>
               </a:rPr>
-              <a:t>33,992</a:t>
+              <a:t>31,990</a:t>
             </a:r>
           </a:p>
         </p:txBody>
@@ -18460,7 +19406,7 @@
                 </a:solidFill>
                 <a:latin typeface="Calibri"/>
               </a:rPr>
-              <a:t>+414%</a:t>
+              <a:t>+6,122%</a:t>
             </a:r>
           </a:p>
         </p:txBody>
@@ -18573,7 +19519,7 @@
                 </a:solidFill>
                 <a:latin typeface="Calibri"/>
               </a:rPr>
-              <a:t>2,177</a:t>
+              <a:t>104</a:t>
             </a:r>
           </a:p>
         </p:txBody>
@@ -18686,7 +19632,7 @@
                 </a:solidFill>
                 <a:latin typeface="Calibri"/>
               </a:rPr>
-              <a:t>18,301</a:t>
+              <a:t>17,908</a:t>
             </a:r>
           </a:p>
         </p:txBody>
@@ -18795,11 +19741,11 @@
             <a:r>
               <a:rPr sz="3400" b="1" i="0">
                 <a:solidFill>
-                  <a:srgbClr val="059669"/>
-                </a:solidFill>
-                <a:latin typeface="Calibri"/>
-              </a:rPr>
-              <a:t>+740%</a:t>
+                  <a:srgbClr val="1C7293"/>
+                </a:solidFill>
+                <a:latin typeface="Calibri"/>
+              </a:rPr>
+              <a:t>89% NP</a:t>
             </a:r>
           </a:p>
         </p:txBody>
@@ -18834,7 +19780,7 @@
                 </a:solidFill>
                 <a:latin typeface="Calibri"/>
               </a:rPr>
-              <a:t>MoM Visitor Growth</a:t>
+              <a:t>Feb Non-Paid Share</a:t>
             </a:r>
           </a:p>
         </p:txBody>
@@ -18847,8 +19793,129 @@
         </p:nvSpPr>
         <p:spPr>
           <a:xfrm>
-            <a:off x="320040" y="2468880"/>
-            <a:ext cx="5303520" cy="3429000"/>
+            <a:off x="320040" y="2331720"/>
+            <a:ext cx="11612880" cy="256032"/>
+          </a:xfrm>
+          <a:prstGeom prst="rect">
+            <a:avLst/>
+          </a:prstGeom>
+          <a:solidFill>
+            <a:srgbClr val="E8F4FF"/>
+          </a:solidFill>
+          <a:ln>
+            <a:noFill/>
+          </a:ln>
+        </p:spPr>
+        <p:style>
+          <a:lnRef idx="1">
+            <a:schemeClr val="accent1"/>
+          </a:lnRef>
+          <a:fillRef idx="3">
+            <a:schemeClr val="accent1"/>
+          </a:fillRef>
+          <a:effectRef idx="2">
+            <a:schemeClr val="accent1"/>
+          </a:effectRef>
+          <a:fontRef idx="minor">
+            <a:schemeClr val="lt1"/>
+          </a:fontRef>
+        </p:style>
+        <p:txBody>
+          <a:bodyPr rtlCol="0" anchor="ctr"/>
+          <a:lstStyle/>
+          <a:p>
+            <a:pPr algn="ctr"/>
+          </a:p>
+        </p:txBody>
+      </p:sp>
+      <p:sp>
+        <p:nvSpPr>
+          <p:cNvPr id="24" name="Rectangle 23"/>
+          <p:cNvSpPr/>
+          <p:nvPr/>
+        </p:nvSpPr>
+        <p:spPr>
+          <a:xfrm>
+            <a:off x="320040" y="2331720"/>
+            <a:ext cx="54864" cy="256032"/>
+          </a:xfrm>
+          <a:prstGeom prst="rect">
+            <a:avLst/>
+          </a:prstGeom>
+          <a:solidFill>
+            <a:srgbClr val="1C7293"/>
+          </a:solidFill>
+          <a:ln>
+            <a:noFill/>
+          </a:ln>
+        </p:spPr>
+        <p:style>
+          <a:lnRef idx="1">
+            <a:schemeClr val="accent1"/>
+          </a:lnRef>
+          <a:fillRef idx="3">
+            <a:schemeClr val="accent1"/>
+          </a:fillRef>
+          <a:effectRef idx="2">
+            <a:schemeClr val="accent1"/>
+          </a:effectRef>
+          <a:fontRef idx="minor">
+            <a:schemeClr val="lt1"/>
+          </a:fontRef>
+        </p:style>
+        <p:txBody>
+          <a:bodyPr rtlCol="0" anchor="ctr"/>
+          <a:lstStyle/>
+          <a:p>
+            <a:pPr algn="ctr"/>
+          </a:p>
+        </p:txBody>
+      </p:sp>
+      <p:sp>
+        <p:nvSpPr>
+          <p:cNvPr id="25" name="TextBox 24"/>
+          <p:cNvSpPr txBox="1"/>
+          <p:nvPr/>
+        </p:nvSpPr>
+        <p:spPr>
+          <a:xfrm>
+            <a:off x="502920" y="2350008"/>
+            <a:ext cx="11247120" cy="219456"/>
+          </a:xfrm>
+          <a:prstGeom prst="rect">
+            <a:avLst/>
+          </a:prstGeom>
+          <a:noFill/>
+        </p:spPr>
+        <p:txBody>
+          <a:bodyPr wrap="square" lIns="0" rIns="0" tIns="0" bIns="0">
+            <a:spAutoFit/>
+          </a:bodyPr>
+          <a:lstStyle/>
+          <a:p>
+            <a:pPr algn="l"/>
+            <a:r>
+              <a:rPr sz="1000" b="0" i="0">
+                <a:solidFill>
+                  <a:srgbClr val="065A82"/>
+                </a:solidFill>
+                <a:latin typeface="Calibri"/>
+              </a:rPr>
+              <a:t>Feb Paid: 3,380 PVs  (10.6%)   |   Feb Non-Paid: 28,610 PVs  (89.4%)</a:t>
+            </a:r>
+          </a:p>
+        </p:txBody>
+      </p:sp>
+      <p:sp>
+        <p:nvSpPr>
+          <p:cNvPr id="26" name="Rectangle 25"/>
+          <p:cNvSpPr/>
+          <p:nvPr/>
+        </p:nvSpPr>
+        <p:spPr>
+          <a:xfrm>
+            <a:off x="320040" y="2651760"/>
+            <a:ext cx="5303520" cy="3200400"/>
           </a:xfrm>
           <a:prstGeom prst="rect">
             <a:avLst/>
@@ -18884,14 +19951,14 @@
       </p:sp>
       <p:sp>
         <p:nvSpPr>
-          <p:cNvPr id="24" name="Rectangle 23"/>
+          <p:cNvPr id="27" name="Rectangle 26"/>
           <p:cNvSpPr/>
           <p:nvPr/>
         </p:nvSpPr>
         <p:spPr>
           <a:xfrm>
-            <a:off x="320040" y="2468880"/>
-            <a:ext cx="54864" cy="3429000"/>
+            <a:off x="320040" y="2651760"/>
+            <a:ext cx="54864" cy="3200400"/>
           </a:xfrm>
           <a:prstGeom prst="rect">
             <a:avLst/>
@@ -18927,13 +19994,13 @@
       </p:sp>
       <p:sp>
         <p:nvSpPr>
-          <p:cNvPr id="25" name="TextBox 24"/>
-          <p:cNvSpPr txBox="1"/>
-          <p:nvPr/>
-        </p:nvSpPr>
-        <p:spPr>
-          <a:xfrm>
-            <a:off x="548640" y="2514600"/>
+          <p:cNvPr id="28" name="TextBox 27"/>
+          <p:cNvSpPr txBox="1"/>
+          <p:nvPr/>
+        </p:nvSpPr>
+        <p:spPr>
+          <a:xfrm>
+            <a:off x="548640" y="2697480"/>
             <a:ext cx="4846320" cy="384048"/>
           </a:xfrm>
           <a:prstGeom prst="rect">
@@ -18955,21 +20022,21 @@
                 </a:solidFill>
                 <a:latin typeface="Calibri"/>
               </a:rPr>
-              <a:t>Engagement After Our-Story</a:t>
-            </a:r>
-          </a:p>
-        </p:txBody>
-      </p:sp>
-      <p:sp>
-        <p:nvSpPr>
-          <p:cNvPr id="26" name="TextBox 25"/>
-          <p:cNvSpPr txBox="1"/>
-          <p:nvPr/>
-        </p:nvSpPr>
-        <p:spPr>
-          <a:xfrm>
-            <a:off x="548640" y="2971800"/>
-            <a:ext cx="2743200" cy="411480"/>
+              <a:t>Engagement — our-story.html visitors</a:t>
+            </a:r>
+          </a:p>
+        </p:txBody>
+      </p:sp>
+      <p:sp>
+        <p:nvSpPr>
+          <p:cNvPr id="29" name="TextBox 28"/>
+          <p:cNvSpPr txBox="1"/>
+          <p:nvPr/>
+        </p:nvSpPr>
+        <p:spPr>
+          <a:xfrm>
+            <a:off x="548640" y="3154680"/>
+            <a:ext cx="2651760" cy="384048"/>
           </a:xfrm>
           <a:prstGeom prst="rect">
             <a:avLst/>
@@ -18997,14 +20064,14 @@
       </p:sp>
       <p:sp>
         <p:nvSpPr>
-          <p:cNvPr id="27" name="TextBox 26"/>
-          <p:cNvSpPr txBox="1"/>
-          <p:nvPr/>
-        </p:nvSpPr>
-        <p:spPr>
-          <a:xfrm>
-            <a:off x="3337560" y="2971800"/>
-            <a:ext cx="1188720" cy="411480"/>
+          <p:cNvPr id="30" name="TextBox 29"/>
+          <p:cNvSpPr txBox="1"/>
+          <p:nvPr/>
+        </p:nvSpPr>
+        <p:spPr>
+          <a:xfrm>
+            <a:off x="3246120" y="3154680"/>
+            <a:ext cx="1188720" cy="384048"/>
           </a:xfrm>
           <a:prstGeom prst="rect">
             <a:avLst/>
@@ -19025,21 +20092,21 @@
                 </a:solidFill>
                 <a:latin typeface="Calibri"/>
               </a:rPr>
-              <a:t>57.6%</a:t>
-            </a:r>
-          </a:p>
-        </p:txBody>
-      </p:sp>
-      <p:sp>
-        <p:nvSpPr>
-          <p:cNvPr id="28" name="TextBox 27"/>
-          <p:cNvSpPr txBox="1"/>
-          <p:nvPr/>
-        </p:nvSpPr>
-        <p:spPr>
-          <a:xfrm>
-            <a:off x="4434840" y="2971800"/>
-            <a:ext cx="1143000" cy="411480"/>
+              <a:t>47.1%</a:t>
+            </a:r>
+          </a:p>
+        </p:txBody>
+      </p:sp>
+      <p:sp>
+        <p:nvSpPr>
+          <p:cNvPr id="31" name="TextBox 30"/>
+          <p:cNvSpPr txBox="1"/>
+          <p:nvPr/>
+        </p:nvSpPr>
+        <p:spPr>
+          <a:xfrm>
+            <a:off x="4343400" y="3154680"/>
+            <a:ext cx="1188720" cy="384048"/>
           </a:xfrm>
           <a:prstGeom prst="rect">
             <a:avLst/>
@@ -19060,21 +20127,21 @@
                 </a:solidFill>
                 <a:latin typeface="Calibri"/>
               </a:rPr>
-              <a:t>1,254 / 2,177 continued</a:t>
-            </a:r>
-          </a:p>
-        </p:txBody>
-      </p:sp>
-      <p:sp>
-        <p:nvSpPr>
-          <p:cNvPr id="29" name="TextBox 28"/>
-          <p:cNvSpPr txBox="1"/>
-          <p:nvPr/>
-        </p:nvSpPr>
-        <p:spPr>
-          <a:xfrm>
-            <a:off x="548640" y="3685032"/>
-            <a:ext cx="2743200" cy="411480"/>
+              <a:t>49 / 104 continued</a:t>
+            </a:r>
+          </a:p>
+        </p:txBody>
+      </p:sp>
+      <p:sp>
+        <p:nvSpPr>
+          <p:cNvPr id="32" name="TextBox 31"/>
+          <p:cNvSpPr txBox="1"/>
+          <p:nvPr/>
+        </p:nvSpPr>
+        <p:spPr>
+          <a:xfrm>
+            <a:off x="548640" y="3813048"/>
+            <a:ext cx="2651760" cy="384048"/>
           </a:xfrm>
           <a:prstGeom prst="rect">
             <a:avLst/>
@@ -19102,14 +20169,14 @@
       </p:sp>
       <p:sp>
         <p:nvSpPr>
-          <p:cNvPr id="30" name="TextBox 29"/>
-          <p:cNvSpPr txBox="1"/>
-          <p:nvPr/>
-        </p:nvSpPr>
-        <p:spPr>
-          <a:xfrm>
-            <a:off x="3337560" y="3685032"/>
-            <a:ext cx="1188720" cy="411480"/>
+          <p:cNvPr id="33" name="TextBox 32"/>
+          <p:cNvSpPr txBox="1"/>
+          <p:nvPr/>
+        </p:nvSpPr>
+        <p:spPr>
+          <a:xfrm>
+            <a:off x="3246120" y="3813048"/>
+            <a:ext cx="1188720" cy="384048"/>
           </a:xfrm>
           <a:prstGeom prst="rect">
             <a:avLst/>
@@ -19130,21 +20197,21 @@
                 </a:solidFill>
                 <a:latin typeface="Calibri"/>
               </a:rPr>
-              <a:t>39.5%</a:t>
-            </a:r>
-          </a:p>
-        </p:txBody>
-      </p:sp>
-      <p:sp>
-        <p:nvSpPr>
-          <p:cNvPr id="31" name="TextBox 30"/>
-          <p:cNvSpPr txBox="1"/>
-          <p:nvPr/>
-        </p:nvSpPr>
-        <p:spPr>
-          <a:xfrm>
-            <a:off x="4434840" y="3685032"/>
-            <a:ext cx="1143000" cy="411480"/>
+              <a:t>38.3%</a:t>
+            </a:r>
+          </a:p>
+        </p:txBody>
+      </p:sp>
+      <p:sp>
+        <p:nvSpPr>
+          <p:cNvPr id="34" name="TextBox 33"/>
+          <p:cNvSpPr txBox="1"/>
+          <p:nvPr/>
+        </p:nvSpPr>
+        <p:spPr>
+          <a:xfrm>
+            <a:off x="4343400" y="3813048"/>
+            <a:ext cx="1188720" cy="384048"/>
           </a:xfrm>
           <a:prstGeom prst="rect">
             <a:avLst/>
@@ -19165,21 +20232,21 @@
                 </a:solidFill>
                 <a:latin typeface="Calibri"/>
               </a:rPr>
-              <a:t>7,236 / 18,301 continued</a:t>
-            </a:r>
-          </a:p>
-        </p:txBody>
-      </p:sp>
-      <p:sp>
-        <p:nvSpPr>
-          <p:cNvPr id="32" name="TextBox 31"/>
-          <p:cNvSpPr txBox="1"/>
-          <p:nvPr/>
-        </p:nvSpPr>
-        <p:spPr>
-          <a:xfrm>
-            <a:off x="548640" y="4398264"/>
-            <a:ext cx="2743200" cy="411480"/>
+              <a:t>6,853 / 17,908 continued</a:t>
+            </a:r>
+          </a:p>
+        </p:txBody>
+      </p:sp>
+      <p:sp>
+        <p:nvSpPr>
+          <p:cNvPr id="35" name="TextBox 34"/>
+          <p:cNvSpPr txBox="1"/>
+          <p:nvPr/>
+        </p:nvSpPr>
+        <p:spPr>
+          <a:xfrm>
+            <a:off x="548640" y="4471416"/>
+            <a:ext cx="2651760" cy="384048"/>
           </a:xfrm>
           <a:prstGeom prst="rect">
             <a:avLst/>
@@ -19200,21 +20267,21 @@
                 </a:solidFill>
                 <a:latin typeface="Calibri"/>
               </a:rPr>
-              <a:t>Jan avg bounce (site-wide)</a:t>
-            </a:r>
-          </a:p>
-        </p:txBody>
-      </p:sp>
-      <p:sp>
-        <p:nvSpPr>
-          <p:cNvPr id="33" name="TextBox 32"/>
-          <p:cNvSpPr txBox="1"/>
-          <p:nvPr/>
-        </p:nvSpPr>
-        <p:spPr>
-          <a:xfrm>
-            <a:off x="3337560" y="4398264"/>
-            <a:ext cx="1188720" cy="411480"/>
+              <a:t>Jan bounce rate</a:t>
+            </a:r>
+          </a:p>
+        </p:txBody>
+      </p:sp>
+      <p:sp>
+        <p:nvSpPr>
+          <p:cNvPr id="36" name="TextBox 35"/>
+          <p:cNvSpPr txBox="1"/>
+          <p:nvPr/>
+        </p:nvSpPr>
+        <p:spPr>
+          <a:xfrm>
+            <a:off x="3246120" y="4471416"/>
+            <a:ext cx="1188720" cy="384048"/>
           </a:xfrm>
           <a:prstGeom prst="rect">
             <a:avLst/>
@@ -19235,21 +20302,21 @@
                 </a:solidFill>
                 <a:latin typeface="Calibri"/>
               </a:rPr>
-              <a:t>61.0%</a:t>
-            </a:r>
-          </a:p>
-        </p:txBody>
-      </p:sp>
-      <p:sp>
-        <p:nvSpPr>
-          <p:cNvPr id="34" name="TextBox 33"/>
-          <p:cNvSpPr txBox="1"/>
-          <p:nvPr/>
-        </p:nvSpPr>
-        <p:spPr>
-          <a:xfrm>
-            <a:off x="4434840" y="4398264"/>
-            <a:ext cx="1143000" cy="411480"/>
+              <a:t>52.9%</a:t>
+            </a:r>
+          </a:p>
+        </p:txBody>
+      </p:sp>
+      <p:sp>
+        <p:nvSpPr>
+          <p:cNvPr id="37" name="TextBox 36"/>
+          <p:cNvSpPr txBox="1"/>
+          <p:nvPr/>
+        </p:nvSpPr>
+        <p:spPr>
+          <a:xfrm>
+            <a:off x="4343400" y="4471416"/>
+            <a:ext cx="1188720" cy="384048"/>
           </a:xfrm>
           <a:prstGeom prst="rect">
             <a:avLst/>
@@ -19270,21 +20337,21 @@
                 </a:solidFill>
                 <a:latin typeface="Calibri"/>
               </a:rPr>
-              <a:t>Beats site-wide avg</a:t>
-            </a:r>
-          </a:p>
-        </p:txBody>
-      </p:sp>
-      <p:sp>
-        <p:nvSpPr>
-          <p:cNvPr id="35" name="TextBox 34"/>
-          <p:cNvSpPr txBox="1"/>
-          <p:nvPr/>
-        </p:nvSpPr>
-        <p:spPr>
-          <a:xfrm>
-            <a:off x="548640" y="5111496"/>
-            <a:ext cx="2743200" cy="411480"/>
+              <a:t>Beats site-wide 61.0%</a:t>
+            </a:r>
+          </a:p>
+        </p:txBody>
+      </p:sp>
+      <p:sp>
+        <p:nvSpPr>
+          <p:cNvPr id="38" name="TextBox 37"/>
+          <p:cNvSpPr txBox="1"/>
+          <p:nvPr/>
+        </p:nvSpPr>
+        <p:spPr>
+          <a:xfrm>
+            <a:off x="548640" y="5129784"/>
+            <a:ext cx="2651760" cy="384048"/>
           </a:xfrm>
           <a:prstGeom prst="rect">
             <a:avLst/>
@@ -19305,21 +20372,21 @@
                 </a:solidFill>
                 <a:latin typeface="Calibri"/>
               </a:rPr>
-              <a:t>Feb avg bounce (site-wide)</a:t>
-            </a:r>
-          </a:p>
-        </p:txBody>
-      </p:sp>
-      <p:sp>
-        <p:nvSpPr>
-          <p:cNvPr id="36" name="TextBox 35"/>
-          <p:cNvSpPr txBox="1"/>
-          <p:nvPr/>
-        </p:nvSpPr>
-        <p:spPr>
-          <a:xfrm>
-            <a:off x="3337560" y="5111496"/>
-            <a:ext cx="1188720" cy="411480"/>
+              <a:t>Feb bounce rate</a:t>
+            </a:r>
+          </a:p>
+        </p:txBody>
+      </p:sp>
+      <p:sp>
+        <p:nvSpPr>
+          <p:cNvPr id="39" name="TextBox 38"/>
+          <p:cNvSpPr txBox="1"/>
+          <p:nvPr/>
+        </p:nvSpPr>
+        <p:spPr>
+          <a:xfrm>
+            <a:off x="3246120" y="5129784"/>
+            <a:ext cx="1188720" cy="384048"/>
           </a:xfrm>
           <a:prstGeom prst="rect">
             <a:avLst/>
@@ -19336,25 +20403,25 @@
             <a:r>
               <a:rPr sz="1600" b="1" i="0">
                 <a:solidFill>
-                  <a:srgbClr val="DC2626"/>
-                </a:solidFill>
-                <a:latin typeface="Calibri"/>
-              </a:rPr>
-              <a:t>64.3%</a:t>
-            </a:r>
-          </a:p>
-        </p:txBody>
-      </p:sp>
-      <p:sp>
-        <p:nvSpPr>
-          <p:cNvPr id="37" name="TextBox 36"/>
-          <p:cNvSpPr txBox="1"/>
-          <p:nvPr/>
-        </p:nvSpPr>
-        <p:spPr>
-          <a:xfrm>
-            <a:off x="4434840" y="5111496"/>
-            <a:ext cx="1143000" cy="411480"/>
+                  <a:srgbClr val="D97706"/>
+                </a:solidFill>
+                <a:latin typeface="Calibri"/>
+              </a:rPr>
+              <a:t>61.7%</a:t>
+            </a:r>
+          </a:p>
+        </p:txBody>
+      </p:sp>
+      <p:sp>
+        <p:nvSpPr>
+          <p:cNvPr id="40" name="TextBox 39"/>
+          <p:cNvSpPr txBox="1"/>
+          <p:nvPr/>
+        </p:nvSpPr>
+        <p:spPr>
+          <a:xfrm>
+            <a:off x="4343400" y="5129784"/>
+            <a:ext cx="1188720" cy="384048"/>
           </a:xfrm>
           <a:prstGeom prst="rect">
             <a:avLst/>
@@ -19375,21 +20442,21 @@
                 </a:solidFill>
                 <a:latin typeface="Calibri"/>
               </a:rPr>
-              <a:t>Surge retention risk</a:t>
-            </a:r>
-          </a:p>
-        </p:txBody>
-      </p:sp>
-      <p:sp>
-        <p:nvSpPr>
-          <p:cNvPr id="38" name="Rectangle 37"/>
+              <a:t>Matches site-wide 64.3%</a:t>
+            </a:r>
+          </a:p>
+        </p:txBody>
+      </p:sp>
+      <p:sp>
+        <p:nvSpPr>
+          <p:cNvPr id="41" name="Rectangle 40"/>
           <p:cNvSpPr/>
           <p:nvPr/>
         </p:nvSpPr>
         <p:spPr>
           <a:xfrm>
-            <a:off x="5897880" y="2468880"/>
-            <a:ext cx="5989320" cy="3429000"/>
+            <a:off x="5897880" y="2651760"/>
+            <a:ext cx="5989320" cy="3200400"/>
           </a:xfrm>
           <a:prstGeom prst="rect">
             <a:avLst/>
@@ -19425,14 +20492,14 @@
       </p:sp>
       <p:sp>
         <p:nvSpPr>
-          <p:cNvPr id="39" name="Rectangle 38"/>
+          <p:cNvPr id="42" name="Rectangle 41"/>
           <p:cNvSpPr/>
           <p:nvPr/>
         </p:nvSpPr>
         <p:spPr>
           <a:xfrm>
-            <a:off x="5897880" y="2468880"/>
-            <a:ext cx="54864" cy="3429000"/>
+            <a:off x="5897880" y="2651760"/>
+            <a:ext cx="54864" cy="3200400"/>
           </a:xfrm>
           <a:prstGeom prst="rect">
             <a:avLst/>
@@ -19468,13 +20535,13 @@
       </p:sp>
       <p:sp>
         <p:nvSpPr>
-          <p:cNvPr id="40" name="TextBox 39"/>
-          <p:cNvSpPr txBox="1"/>
-          <p:nvPr/>
-        </p:nvSpPr>
-        <p:spPr>
-          <a:xfrm>
-            <a:off x="6126480" y="2514600"/>
+          <p:cNvPr id="43" name="TextBox 42"/>
+          <p:cNvSpPr txBox="1"/>
+          <p:nvPr/>
+        </p:nvSpPr>
+        <p:spPr>
+          <a:xfrm>
+            <a:off x="6126480" y="2697480"/>
             <a:ext cx="5577840" cy="384048"/>
           </a:xfrm>
           <a:prstGeom prst="rect">
@@ -19496,21 +20563,21 @@
                 </a:solidFill>
                 <a:latin typeface="Calibri"/>
               </a:rPr>
-              <a:t>Where Our-Story Visitors Go Next (Feb)</a:t>
-            </a:r>
-          </a:p>
-        </p:txBody>
-      </p:sp>
-      <p:sp>
-        <p:nvSpPr>
-          <p:cNvPr id="41" name="TextBox 40"/>
-          <p:cNvSpPr txBox="1"/>
-          <p:nvPr/>
-        </p:nvSpPr>
-        <p:spPr>
-          <a:xfrm>
-            <a:off x="6126480" y="2971800"/>
-            <a:ext cx="4572000" cy="438912"/>
+              <a:t>Where our-story.html Visitors Go Next (Feb)</a:t>
+            </a:r>
+          </a:p>
+        </p:txBody>
+      </p:sp>
+      <p:sp>
+        <p:nvSpPr>
+          <p:cNvPr id="44" name="TextBox 43"/>
+          <p:cNvSpPr txBox="1"/>
+          <p:nvPr/>
+        </p:nvSpPr>
+        <p:spPr>
+          <a:xfrm>
+            <a:off x="6126480" y="3154680"/>
+            <a:ext cx="4572000" cy="420624"/>
           </a:xfrm>
           <a:prstGeom prst="rect">
             <a:avLst/>
@@ -19538,14 +20605,14 @@
       </p:sp>
       <p:sp>
         <p:nvSpPr>
-          <p:cNvPr id="42" name="TextBox 41"/>
-          <p:cNvSpPr txBox="1"/>
-          <p:nvPr/>
-        </p:nvSpPr>
-        <p:spPr>
-          <a:xfrm>
-            <a:off x="10698480" y="2971800"/>
-            <a:ext cx="822960" cy="438912"/>
+          <p:cNvPr id="45" name="TextBox 44"/>
+          <p:cNvSpPr txBox="1"/>
+          <p:nvPr/>
+        </p:nvSpPr>
+        <p:spPr>
+          <a:xfrm>
+            <a:off x="10698480" y="3154680"/>
+            <a:ext cx="822960" cy="420624"/>
           </a:xfrm>
           <a:prstGeom prst="rect">
             <a:avLst/>
@@ -19566,21 +20633,21 @@
                 </a:solidFill>
                 <a:latin typeface="Calibri"/>
               </a:rPr>
-              <a:t>1,173</a:t>
-            </a:r>
-          </a:p>
-        </p:txBody>
-      </p:sp>
-      <p:sp>
-        <p:nvSpPr>
-          <p:cNvPr id="43" name="TextBox 42"/>
-          <p:cNvSpPr txBox="1"/>
-          <p:nvPr/>
-        </p:nvSpPr>
-        <p:spPr>
-          <a:xfrm>
-            <a:off x="6126480" y="3447288"/>
-            <a:ext cx="4572000" cy="438912"/>
+              <a:t>1,221</a:t>
+            </a:r>
+          </a:p>
+        </p:txBody>
+      </p:sp>
+      <p:sp>
+        <p:nvSpPr>
+          <p:cNvPr id="46" name="TextBox 45"/>
+          <p:cNvSpPr txBox="1"/>
+          <p:nvPr/>
+        </p:nvSpPr>
+        <p:spPr>
+          <a:xfrm>
+            <a:off x="6126480" y="3611880"/>
+            <a:ext cx="4572000" cy="420624"/>
           </a:xfrm>
           <a:prstGeom prst="rect">
             <a:avLst/>
@@ -19608,14 +20675,14 @@
       </p:sp>
       <p:sp>
         <p:nvSpPr>
-          <p:cNvPr id="44" name="TextBox 43"/>
-          <p:cNvSpPr txBox="1"/>
-          <p:nvPr/>
-        </p:nvSpPr>
-        <p:spPr>
-          <a:xfrm>
-            <a:off x="10698480" y="3447288"/>
-            <a:ext cx="822960" cy="438912"/>
+          <p:cNvPr id="47" name="TextBox 46"/>
+          <p:cNvSpPr txBox="1"/>
+          <p:nvPr/>
+        </p:nvSpPr>
+        <p:spPr>
+          <a:xfrm>
+            <a:off x="10698480" y="3611880"/>
+            <a:ext cx="822960" cy="420624"/>
           </a:xfrm>
           <a:prstGeom prst="rect">
             <a:avLst/>
@@ -19636,21 +20703,21 @@
                 </a:solidFill>
                 <a:latin typeface="Calibri"/>
               </a:rPr>
-              <a:t>  750</a:t>
-            </a:r>
-          </a:p>
-        </p:txBody>
-      </p:sp>
-      <p:sp>
-        <p:nvSpPr>
-          <p:cNvPr id="45" name="TextBox 44"/>
-          <p:cNvSpPr txBox="1"/>
-          <p:nvPr/>
-        </p:nvSpPr>
-        <p:spPr>
-          <a:xfrm>
-            <a:off x="6126480" y="3922776"/>
-            <a:ext cx="4572000" cy="438912"/>
+              <a:t>  787</a:t>
+            </a:r>
+          </a:p>
+        </p:txBody>
+      </p:sp>
+      <p:sp>
+        <p:nvSpPr>
+          <p:cNvPr id="48" name="TextBox 47"/>
+          <p:cNvSpPr txBox="1"/>
+          <p:nvPr/>
+        </p:nvSpPr>
+        <p:spPr>
+          <a:xfrm>
+            <a:off x="6126480" y="4069080"/>
+            <a:ext cx="4572000" cy="420624"/>
           </a:xfrm>
           <a:prstGeom prst="rect">
             <a:avLst/>
@@ -19678,14 +20745,14 @@
       </p:sp>
       <p:sp>
         <p:nvSpPr>
-          <p:cNvPr id="46" name="TextBox 45"/>
-          <p:cNvSpPr txBox="1"/>
-          <p:nvPr/>
-        </p:nvSpPr>
-        <p:spPr>
-          <a:xfrm>
-            <a:off x="10698480" y="3922776"/>
-            <a:ext cx="822960" cy="438912"/>
+          <p:cNvPr id="49" name="TextBox 48"/>
+          <p:cNvSpPr txBox="1"/>
+          <p:nvPr/>
+        </p:nvSpPr>
+        <p:spPr>
+          <a:xfrm>
+            <a:off x="10698480" y="4069080"/>
+            <a:ext cx="822960" cy="420624"/>
           </a:xfrm>
           <a:prstGeom prst="rect">
             <a:avLst/>
@@ -19706,21 +20773,21 @@
                 </a:solidFill>
                 <a:latin typeface="Calibri"/>
               </a:rPr>
-              <a:t>  470</a:t>
-            </a:r>
-          </a:p>
-        </p:txBody>
-      </p:sp>
-      <p:sp>
-        <p:nvSpPr>
-          <p:cNvPr id="47" name="TextBox 46"/>
-          <p:cNvSpPr txBox="1"/>
-          <p:nvPr/>
-        </p:nvSpPr>
-        <p:spPr>
-          <a:xfrm>
-            <a:off x="6126480" y="4398264"/>
-            <a:ext cx="4572000" cy="438912"/>
+              <a:t>  456</a:t>
+            </a:r>
+          </a:p>
+        </p:txBody>
+      </p:sp>
+      <p:sp>
+        <p:nvSpPr>
+          <p:cNvPr id="50" name="TextBox 49"/>
+          <p:cNvSpPr txBox="1"/>
+          <p:nvPr/>
+        </p:nvSpPr>
+        <p:spPr>
+          <a:xfrm>
+            <a:off x="6126480" y="4526280"/>
+            <a:ext cx="4572000" cy="420624"/>
           </a:xfrm>
           <a:prstGeom prst="rect">
             <a:avLst/>
@@ -19748,14 +20815,14 @@
       </p:sp>
       <p:sp>
         <p:nvSpPr>
-          <p:cNvPr id="48" name="TextBox 47"/>
-          <p:cNvSpPr txBox="1"/>
-          <p:nvPr/>
-        </p:nvSpPr>
-        <p:spPr>
-          <a:xfrm>
-            <a:off x="10698480" y="4398264"/>
-            <a:ext cx="822960" cy="438912"/>
+          <p:cNvPr id="51" name="TextBox 50"/>
+          <p:cNvSpPr txBox="1"/>
+          <p:nvPr/>
+        </p:nvSpPr>
+        <p:spPr>
+          <a:xfrm>
+            <a:off x="10698480" y="4526280"/>
+            <a:ext cx="822960" cy="420624"/>
           </a:xfrm>
           <a:prstGeom prst="rect">
             <a:avLst/>
@@ -19776,21 +20843,21 @@
                 </a:solidFill>
                 <a:latin typeface="Calibri"/>
               </a:rPr>
-              <a:t>   90</a:t>
-            </a:r>
-          </a:p>
-        </p:txBody>
-      </p:sp>
-      <p:sp>
-        <p:nvSpPr>
-          <p:cNvPr id="49" name="TextBox 48"/>
-          <p:cNvSpPr txBox="1"/>
-          <p:nvPr/>
-        </p:nvSpPr>
-        <p:spPr>
-          <a:xfrm>
-            <a:off x="6126480" y="4873752"/>
-            <a:ext cx="4572000" cy="438912"/>
+              <a:t>   91</a:t>
+            </a:r>
+          </a:p>
+        </p:txBody>
+      </p:sp>
+      <p:sp>
+        <p:nvSpPr>
+          <p:cNvPr id="52" name="TextBox 51"/>
+          <p:cNvSpPr txBox="1"/>
+          <p:nvPr/>
+        </p:nvSpPr>
+        <p:spPr>
+          <a:xfrm>
+            <a:off x="6126480" y="4983480"/>
+            <a:ext cx="4572000" cy="420624"/>
           </a:xfrm>
           <a:prstGeom prst="rect">
             <a:avLst/>
@@ -19811,21 +20878,21 @@
                 </a:solidFill>
                 <a:latin typeface="Calibri"/>
               </a:rPr>
-              <a:t>Incredible Power Article</a:t>
-            </a:r>
-          </a:p>
-        </p:txBody>
-      </p:sp>
-      <p:sp>
-        <p:nvSpPr>
-          <p:cNvPr id="50" name="TextBox 49"/>
-          <p:cNvSpPr txBox="1"/>
-          <p:nvPr/>
-        </p:nvSpPr>
-        <p:spPr>
-          <a:xfrm>
-            <a:off x="10698480" y="4873752"/>
-            <a:ext cx="822960" cy="438912"/>
+              <a:t>Incredible Power / Unlocking AI</a:t>
+            </a:r>
+          </a:p>
+        </p:txBody>
+      </p:sp>
+      <p:sp>
+        <p:nvSpPr>
+          <p:cNvPr id="53" name="TextBox 52"/>
+          <p:cNvSpPr txBox="1"/>
+          <p:nvPr/>
+        </p:nvSpPr>
+        <p:spPr>
+          <a:xfrm>
+            <a:off x="10698480" y="4983480"/>
+            <a:ext cx="822960" cy="420624"/>
           </a:xfrm>
           <a:prstGeom prst="rect">
             <a:avLst/>
@@ -19853,14 +20920,14 @@
       </p:sp>
       <p:sp>
         <p:nvSpPr>
-          <p:cNvPr id="51" name="TextBox 50"/>
-          <p:cNvSpPr txBox="1"/>
-          <p:nvPr/>
-        </p:nvSpPr>
-        <p:spPr>
-          <a:xfrm>
-            <a:off x="6126480" y="5349240"/>
-            <a:ext cx="4572000" cy="438912"/>
+          <p:cNvPr id="54" name="TextBox 53"/>
+          <p:cNvSpPr txBox="1"/>
+          <p:nvPr/>
+        </p:nvSpPr>
+        <p:spPr>
+          <a:xfrm>
+            <a:off x="6126480" y="5440680"/>
+            <a:ext cx="4572000" cy="420624"/>
           </a:xfrm>
           <a:prstGeom prst="rect">
             <a:avLst/>
@@ -19888,14 +20955,14 @@
       </p:sp>
       <p:sp>
         <p:nvSpPr>
-          <p:cNvPr id="52" name="TextBox 51"/>
-          <p:cNvSpPr txBox="1"/>
-          <p:nvPr/>
-        </p:nvSpPr>
-        <p:spPr>
-          <a:xfrm>
-            <a:off x="10698480" y="5349240"/>
-            <a:ext cx="822960" cy="438912"/>
+          <p:cNvPr id="55" name="TextBox 54"/>
+          <p:cNvSpPr txBox="1"/>
+          <p:nvPr/>
+        </p:nvSpPr>
+        <p:spPr>
+          <a:xfrm>
+            <a:off x="10698480" y="5440680"/>
+            <a:ext cx="822960" cy="420624"/>
           </a:xfrm>
           <a:prstGeom prst="rect">
             <a:avLst/>
@@ -19923,14 +20990,14 @@
       </p:sp>
       <p:sp>
         <p:nvSpPr>
-          <p:cNvPr id="53" name="TextBox 52"/>
-          <p:cNvSpPr txBox="1"/>
-          <p:nvPr/>
-        </p:nvSpPr>
-        <p:spPr>
-          <a:xfrm>
-            <a:off x="320040" y="6199632"/>
-            <a:ext cx="11430000" cy="384048"/>
+          <p:cNvPr id="56" name="TextBox 55"/>
+          <p:cNvSpPr txBox="1"/>
+          <p:nvPr/>
+        </p:nvSpPr>
+        <p:spPr>
+          <a:xfrm>
+            <a:off x="320040" y="6144768"/>
+            <a:ext cx="11430000" cy="438912"/>
           </a:xfrm>
           <a:prstGeom prst="rect">
             <a:avLst/>
@@ -19951,7 +21018,7 @@
                 </a:solidFill>
                 <a:latin typeface="Calibri"/>
               </a:rPr>
-              <a:t>&gt;&gt; Our-Story → Product pages flow confirms: brand trust pages are a key step in the B2B consideration funnel.</a:t>
+              <a:t>&gt;&gt; our-story.html surged from 514 to 31,990 PVs (+6,122%) — 89% Non-Paid shows organic brand curiosity driving the visit; paid display brought 10%. Brand trust → product pages funnel confirmed.</a:t>
             </a:r>
           </a:p>
         </p:txBody>

--- a/webanalytics/Solidigm_Analytics_Report_JanFeb_FY26.pptx
+++ b/webanalytics/Solidigm_Analytics_Report_JanFeb_FY26.pptx
@@ -14117,7 +14117,7 @@
             <a:r>
               <a:rPr sz="1000" b="1" i="0">
                 <a:solidFill>
-                  <a:srgbClr val="DC2626"/>
+                  <a:srgbClr val="D97706"/>
                 </a:solidFill>
                 <a:latin typeface="Calibri"/>
               </a:rPr>

--- a/webanalytics/Solidigm_Analytics_Report_JanFeb_FY26.pptx
+++ b/webanalytics/Solidigm_Analytics_Report_JanFeb_FY26.pptx
@@ -16,6 +16,7 @@
     <p:sldId id="264" r:id="rId15"/>
     <p:sldId id="265" r:id="rId16"/>
     <p:sldId id="266" r:id="rId17"/>
+    <p:sldId id="267" r:id="rId18"/>
   </p:sldIdLst>
   <p:sldSz cx="12191695" cy="6858000" type="screen4x3"/>
   <p:notesSz cx="6858000" cy="9144000"/>
@@ -3556,6 +3557,1539 @@
     <p:bg>
       <p:bgPr>
         <a:solidFill>
+          <a:srgbClr val="1E293B"/>
+        </a:solidFill>
+        <a:effectLst/>
+      </p:bgPr>
+    </p:bg>
+    <p:spTree>
+      <p:nvGrpSpPr>
+        <p:cNvPr id="1" name=""/>
+        <p:cNvGrpSpPr/>
+        <p:nvPr/>
+      </p:nvGrpSpPr>
+      <p:grpSpPr/>
+      <p:sp>
+        <p:nvSpPr>
+          <p:cNvPr id="2" name="Rectangle 1"/>
+          <p:cNvSpPr/>
+          <p:nvPr/>
+        </p:nvSpPr>
+        <p:spPr>
+          <a:xfrm>
+            <a:off x="0" y="0"/>
+            <a:ext cx="12191695" cy="777240"/>
+          </a:xfrm>
+          <a:prstGeom prst="rect">
+            <a:avLst/>
+          </a:prstGeom>
+          <a:solidFill>
+            <a:srgbClr val="065A82"/>
+          </a:solidFill>
+          <a:ln>
+            <a:noFill/>
+          </a:ln>
+        </p:spPr>
+        <p:style>
+          <a:lnRef idx="1">
+            <a:schemeClr val="accent1"/>
+          </a:lnRef>
+          <a:fillRef idx="3">
+            <a:schemeClr val="accent1"/>
+          </a:fillRef>
+          <a:effectRef idx="2">
+            <a:schemeClr val="accent1"/>
+          </a:effectRef>
+          <a:fontRef idx="minor">
+            <a:schemeClr val="lt1"/>
+          </a:fontRef>
+        </p:style>
+        <p:txBody>
+          <a:bodyPr rtlCol="0" anchor="ctr"/>
+          <a:lstStyle/>
+          <a:p>
+            <a:pPr algn="ctr"/>
+          </a:p>
+        </p:txBody>
+      </p:sp>
+      <p:sp>
+        <p:nvSpPr>
+          <p:cNvPr id="3" name="TextBox 2"/>
+          <p:cNvSpPr txBox="1"/>
+          <p:nvPr/>
+        </p:nvSpPr>
+        <p:spPr>
+          <a:xfrm>
+            <a:off x="457200" y="91440"/>
+            <a:ext cx="11277295" cy="594360"/>
+          </a:xfrm>
+          <a:prstGeom prst="rect">
+            <a:avLst/>
+          </a:prstGeom>
+          <a:noFill/>
+        </p:spPr>
+        <p:txBody>
+          <a:bodyPr wrap="square" lIns="0" rIns="0" tIns="0" bIns="0">
+            <a:spAutoFit/>
+          </a:bodyPr>
+          <a:lstStyle/>
+          <a:p>
+            <a:pPr algn="l"/>
+            <a:r>
+              <a:rPr sz="2400" b="1" i="0">
+                <a:solidFill>
+                  <a:srgbClr val="FFFFFF"/>
+                </a:solidFill>
+                <a:latin typeface="Calibri"/>
+              </a:rPr>
+              <a:t>Deep-Dive: User Behavior Patterns</a:t>
+            </a:r>
+          </a:p>
+        </p:txBody>
+      </p:sp>
+      <p:sp>
+        <p:nvSpPr>
+          <p:cNvPr id="4" name="TextBox 3"/>
+          <p:cNvSpPr txBox="1"/>
+          <p:nvPr/>
+        </p:nvSpPr>
+        <p:spPr>
+          <a:xfrm>
+            <a:off x="457200" y="502920"/>
+            <a:ext cx="11277295" cy="320040"/>
+          </a:xfrm>
+          <a:prstGeom prst="rect">
+            <a:avLst/>
+          </a:prstGeom>
+          <a:noFill/>
+        </p:spPr>
+        <p:txBody>
+          <a:bodyPr wrap="square" lIns="0" rIns="0" tIns="0" bIns="0">
+            <a:spAutoFit/>
+          </a:bodyPr>
+          <a:lstStyle/>
+          <a:p>
+            <a:pPr algn="l"/>
+            <a:r>
+              <a:rPr sz="1200" b="0" i="0">
+                <a:solidFill>
+                  <a:srgbClr val="CADCFC"/>
+                </a:solidFill>
+                <a:latin typeface="Calibri"/>
+              </a:rPr>
+              <a:t>How visitors engage, where they go, and what it means for your B2B funnel</a:t>
+            </a:r>
+          </a:p>
+        </p:txBody>
+      </p:sp>
+      <p:sp>
+        <p:nvSpPr>
+          <p:cNvPr id="5" name="Rectangle 4"/>
+          <p:cNvSpPr/>
+          <p:nvPr/>
+        </p:nvSpPr>
+        <p:spPr>
+          <a:xfrm>
+            <a:off x="320040" y="914400"/>
+            <a:ext cx="5623560" cy="2724912"/>
+          </a:xfrm>
+          <a:prstGeom prst="rect">
+            <a:avLst/>
+          </a:prstGeom>
+          <a:solidFill>
+            <a:srgbClr val="1E354A"/>
+          </a:solidFill>
+          <a:ln>
+            <a:noFill/>
+          </a:ln>
+        </p:spPr>
+        <p:style>
+          <a:lnRef idx="1">
+            <a:schemeClr val="accent1"/>
+          </a:lnRef>
+          <a:fillRef idx="3">
+            <a:schemeClr val="accent1"/>
+          </a:fillRef>
+          <a:effectRef idx="2">
+            <a:schemeClr val="accent1"/>
+          </a:effectRef>
+          <a:fontRef idx="minor">
+            <a:schemeClr val="lt1"/>
+          </a:fontRef>
+        </p:style>
+        <p:txBody>
+          <a:bodyPr rtlCol="0" anchor="ctr"/>
+          <a:lstStyle/>
+          <a:p>
+            <a:pPr algn="ctr"/>
+          </a:p>
+        </p:txBody>
+      </p:sp>
+      <p:sp>
+        <p:nvSpPr>
+          <p:cNvPr id="6" name="Rectangle 5"/>
+          <p:cNvSpPr/>
+          <p:nvPr/>
+        </p:nvSpPr>
+        <p:spPr>
+          <a:xfrm>
+            <a:off x="320040" y="914400"/>
+            <a:ext cx="5623560" cy="64008"/>
+          </a:xfrm>
+          <a:prstGeom prst="rect">
+            <a:avLst/>
+          </a:prstGeom>
+          <a:solidFill>
+            <a:srgbClr val="1C7293"/>
+          </a:solidFill>
+          <a:ln>
+            <a:noFill/>
+          </a:ln>
+        </p:spPr>
+        <p:style>
+          <a:lnRef idx="1">
+            <a:schemeClr val="accent1"/>
+          </a:lnRef>
+          <a:fillRef idx="3">
+            <a:schemeClr val="accent1"/>
+          </a:fillRef>
+          <a:effectRef idx="2">
+            <a:schemeClr val="accent1"/>
+          </a:effectRef>
+          <a:fontRef idx="minor">
+            <a:schemeClr val="lt1"/>
+          </a:fontRef>
+        </p:style>
+        <p:txBody>
+          <a:bodyPr rtlCol="0" anchor="ctr"/>
+          <a:lstStyle/>
+          <a:p>
+            <a:pPr algn="ctr"/>
+          </a:p>
+        </p:txBody>
+      </p:sp>
+      <p:sp>
+        <p:nvSpPr>
+          <p:cNvPr id="7" name="TextBox 6"/>
+          <p:cNvSpPr txBox="1"/>
+          <p:nvPr/>
+        </p:nvSpPr>
+        <p:spPr>
+          <a:xfrm>
+            <a:off x="502920" y="1005840"/>
+            <a:ext cx="5212080" cy="384048"/>
+          </a:xfrm>
+          <a:prstGeom prst="rect">
+            <a:avLst/>
+          </a:prstGeom>
+          <a:noFill/>
+        </p:spPr>
+        <p:txBody>
+          <a:bodyPr wrap="square" lIns="0" rIns="0" tIns="0" bIns="0">
+            <a:spAutoFit/>
+          </a:bodyPr>
+          <a:lstStyle/>
+          <a:p>
+            <a:pPr algn="l"/>
+            <a:r>
+              <a:rPr sz="1300" b="1" i="0">
+                <a:solidFill>
+                  <a:srgbClr val="1C7293"/>
+                </a:solidFill>
+                <a:latin typeface="Calibri"/>
+              </a:rPr>
+              <a:t>Engagement Funnel (Feb)</a:t>
+            </a:r>
+          </a:p>
+        </p:txBody>
+      </p:sp>
+      <p:sp>
+        <p:nvSpPr>
+          <p:cNvPr id="8" name="TextBox 7"/>
+          <p:cNvSpPr txBox="1"/>
+          <p:nvPr/>
+        </p:nvSpPr>
+        <p:spPr>
+          <a:xfrm>
+            <a:off x="502920" y="1463040"/>
+            <a:ext cx="5212080" cy="320040"/>
+          </a:xfrm>
+          <a:prstGeom prst="rect">
+            <a:avLst/>
+          </a:prstGeom>
+          <a:noFill/>
+        </p:spPr>
+        <p:txBody>
+          <a:bodyPr wrap="square" lIns="0" rIns="0" tIns="0" bIns="0">
+            <a:spAutoFit/>
+          </a:bodyPr>
+          <a:lstStyle/>
+          <a:p>
+            <a:pPr algn="l"/>
+            <a:r>
+              <a:rPr sz="1000" b="0" i="0">
+                <a:solidFill>
+                  <a:srgbClr val="F5A623"/>
+                </a:solidFill>
+                <a:latin typeface="Calibri"/>
+              </a:rPr>
+              <a:t>64.3%   bounce on 1st page</a:t>
+            </a:r>
+          </a:p>
+        </p:txBody>
+      </p:sp>
+      <p:sp>
+        <p:nvSpPr>
+          <p:cNvPr id="9" name="TextBox 8"/>
+          <p:cNvSpPr txBox="1"/>
+          <p:nvPr/>
+        </p:nvSpPr>
+        <p:spPr>
+          <a:xfrm>
+            <a:off x="502920" y="1755648"/>
+            <a:ext cx="5212080" cy="320040"/>
+          </a:xfrm>
+          <a:prstGeom prst="rect">
+            <a:avLst/>
+          </a:prstGeom>
+          <a:noFill/>
+        </p:spPr>
+        <p:txBody>
+          <a:bodyPr wrap="square" lIns="0" rIns="0" tIns="0" bIns="0">
+            <a:spAutoFit/>
+          </a:bodyPr>
+          <a:lstStyle/>
+          <a:p>
+            <a:pPr algn="l"/>
+            <a:r>
+              <a:rPr sz="1000" b="0" i="0">
+                <a:solidFill>
+                  <a:srgbClr val="CADCFC"/>
+                </a:solidFill>
+                <a:latin typeface="Calibri"/>
+              </a:rPr>
+              <a:t>18.5%   read 2 pages</a:t>
+            </a:r>
+          </a:p>
+        </p:txBody>
+      </p:sp>
+      <p:sp>
+        <p:nvSpPr>
+          <p:cNvPr id="10" name="TextBox 9"/>
+          <p:cNvSpPr txBox="1"/>
+          <p:nvPr/>
+        </p:nvSpPr>
+        <p:spPr>
+          <a:xfrm>
+            <a:off x="502920" y="2048256"/>
+            <a:ext cx="5212080" cy="320040"/>
+          </a:xfrm>
+          <a:prstGeom prst="rect">
+            <a:avLst/>
+          </a:prstGeom>
+          <a:noFill/>
+        </p:spPr>
+        <p:txBody>
+          <a:bodyPr wrap="square" lIns="0" rIns="0" tIns="0" bIns="0">
+            <a:spAutoFit/>
+          </a:bodyPr>
+          <a:lstStyle/>
+          <a:p>
+            <a:pPr algn="l"/>
+            <a:r>
+              <a:rPr sz="1000" b="0" i="0">
+                <a:solidFill>
+                  <a:srgbClr val="CADCFC"/>
+                </a:solidFill>
+                <a:latin typeface="Calibri"/>
+              </a:rPr>
+              <a:t> 6.9%   read 3 pages</a:t>
+            </a:r>
+          </a:p>
+        </p:txBody>
+      </p:sp>
+      <p:sp>
+        <p:nvSpPr>
+          <p:cNvPr id="11" name="TextBox 10"/>
+          <p:cNvSpPr txBox="1"/>
+          <p:nvPr/>
+        </p:nvSpPr>
+        <p:spPr>
+          <a:xfrm>
+            <a:off x="502920" y="2340864"/>
+            <a:ext cx="5212080" cy="320040"/>
+          </a:xfrm>
+          <a:prstGeom prst="rect">
+            <a:avLst/>
+          </a:prstGeom>
+          <a:noFill/>
+        </p:spPr>
+        <p:txBody>
+          <a:bodyPr wrap="square" lIns="0" rIns="0" tIns="0" bIns="0">
+            <a:spAutoFit/>
+          </a:bodyPr>
+          <a:lstStyle/>
+          <a:p>
+            <a:pPr algn="l"/>
+            <a:r>
+              <a:rPr sz="1000" b="0" i="0">
+                <a:solidFill>
+                  <a:srgbClr val="CADCFC"/>
+                </a:solidFill>
+                <a:latin typeface="Calibri"/>
+              </a:rPr>
+              <a:t> 5.4%   read 4-5 pages</a:t>
+            </a:r>
+          </a:p>
+        </p:txBody>
+      </p:sp>
+      <p:sp>
+        <p:nvSpPr>
+          <p:cNvPr id="12" name="TextBox 11"/>
+          <p:cNvSpPr txBox="1"/>
+          <p:nvPr/>
+        </p:nvSpPr>
+        <p:spPr>
+          <a:xfrm>
+            <a:off x="502920" y="2633472"/>
+            <a:ext cx="5212080" cy="320040"/>
+          </a:xfrm>
+          <a:prstGeom prst="rect">
+            <a:avLst/>
+          </a:prstGeom>
+          <a:noFill/>
+        </p:spPr>
+        <p:txBody>
+          <a:bodyPr wrap="square" lIns="0" rIns="0" tIns="0" bIns="0">
+            <a:spAutoFit/>
+          </a:bodyPr>
+          <a:lstStyle/>
+          <a:p>
+            <a:pPr algn="l"/>
+            <a:r>
+              <a:rPr sz="1000" b="0" i="0">
+                <a:solidFill>
+                  <a:srgbClr val="CADCFC"/>
+                </a:solidFill>
+                <a:latin typeface="Calibri"/>
+              </a:rPr>
+              <a:t> 3.3%   read 6-10 pages</a:t>
+            </a:r>
+          </a:p>
+        </p:txBody>
+      </p:sp>
+      <p:sp>
+        <p:nvSpPr>
+          <p:cNvPr id="13" name="TextBox 12"/>
+          <p:cNvSpPr txBox="1"/>
+          <p:nvPr/>
+        </p:nvSpPr>
+        <p:spPr>
+          <a:xfrm>
+            <a:off x="502920" y="2926080"/>
+            <a:ext cx="5212080" cy="320040"/>
+          </a:xfrm>
+          <a:prstGeom prst="rect">
+            <a:avLst/>
+          </a:prstGeom>
+          <a:noFill/>
+        </p:spPr>
+        <p:txBody>
+          <a:bodyPr wrap="square" lIns="0" rIns="0" tIns="0" bIns="0">
+            <a:spAutoFit/>
+          </a:bodyPr>
+          <a:lstStyle/>
+          <a:p>
+            <a:pPr algn="l"/>
+            <a:r>
+              <a:rPr sz="1000" b="0" i="0">
+                <a:solidFill>
+                  <a:srgbClr val="059669"/>
+                </a:solidFill>
+                <a:latin typeface="Calibri"/>
+              </a:rPr>
+              <a:t> 1.5%   read 11+ pages</a:t>
+            </a:r>
+          </a:p>
+        </p:txBody>
+      </p:sp>
+      <p:sp>
+        <p:nvSpPr>
+          <p:cNvPr id="14" name="TextBox 13"/>
+          <p:cNvSpPr txBox="1"/>
+          <p:nvPr/>
+        </p:nvSpPr>
+        <p:spPr>
+          <a:xfrm>
+            <a:off x="502920" y="3218688"/>
+            <a:ext cx="5212080" cy="320040"/>
+          </a:xfrm>
+          <a:prstGeom prst="rect">
+            <a:avLst/>
+          </a:prstGeom>
+          <a:noFill/>
+        </p:spPr>
+        <p:txBody>
+          <a:bodyPr wrap="square" lIns="0" rIns="0" tIns="0" bIns="0">
+            <a:spAutoFit/>
+          </a:bodyPr>
+          <a:lstStyle/>
+          <a:p>
+            <a:pPr algn="l"/>
+            <a:r>
+              <a:rPr sz="1000" b="0" i="0">
+                <a:solidFill>
+                  <a:srgbClr val="FFFFFF"/>
+                </a:solidFill>
+                <a:latin typeface="Calibri"/>
+              </a:rPr>
+              <a:t>→ 35.7% of visitors genuinely engaged</a:t>
+            </a:r>
+          </a:p>
+        </p:txBody>
+      </p:sp>
+      <p:sp>
+        <p:nvSpPr>
+          <p:cNvPr id="15" name="Rectangle 14"/>
+          <p:cNvSpPr/>
+          <p:nvPr/>
+        </p:nvSpPr>
+        <p:spPr>
+          <a:xfrm>
+            <a:off x="6080760" y="914400"/>
+            <a:ext cx="5623560" cy="2724912"/>
+          </a:xfrm>
+          <a:prstGeom prst="rect">
+            <a:avLst/>
+          </a:prstGeom>
+          <a:solidFill>
+            <a:srgbClr val="1E354A"/>
+          </a:solidFill>
+          <a:ln>
+            <a:noFill/>
+          </a:ln>
+        </p:spPr>
+        <p:style>
+          <a:lnRef idx="1">
+            <a:schemeClr val="accent1"/>
+          </a:lnRef>
+          <a:fillRef idx="3">
+            <a:schemeClr val="accent1"/>
+          </a:fillRef>
+          <a:effectRef idx="2">
+            <a:schemeClr val="accent1"/>
+          </a:effectRef>
+          <a:fontRef idx="minor">
+            <a:schemeClr val="lt1"/>
+          </a:fontRef>
+        </p:style>
+        <p:txBody>
+          <a:bodyPr rtlCol="0" anchor="ctr"/>
+          <a:lstStyle/>
+          <a:p>
+            <a:pPr algn="ctr"/>
+          </a:p>
+        </p:txBody>
+      </p:sp>
+      <p:sp>
+        <p:nvSpPr>
+          <p:cNvPr id="16" name="Rectangle 15"/>
+          <p:cNvSpPr/>
+          <p:nvPr/>
+        </p:nvSpPr>
+        <p:spPr>
+          <a:xfrm>
+            <a:off x="6080760" y="914400"/>
+            <a:ext cx="5623560" cy="64008"/>
+          </a:xfrm>
+          <a:prstGeom prst="rect">
+            <a:avLst/>
+          </a:prstGeom>
+          <a:solidFill>
+            <a:srgbClr val="065A82"/>
+          </a:solidFill>
+          <a:ln>
+            <a:noFill/>
+          </a:ln>
+        </p:spPr>
+        <p:style>
+          <a:lnRef idx="1">
+            <a:schemeClr val="accent1"/>
+          </a:lnRef>
+          <a:fillRef idx="3">
+            <a:schemeClr val="accent1"/>
+          </a:fillRef>
+          <a:effectRef idx="2">
+            <a:schemeClr val="accent1"/>
+          </a:effectRef>
+          <a:fontRef idx="minor">
+            <a:schemeClr val="lt1"/>
+          </a:fontRef>
+        </p:style>
+        <p:txBody>
+          <a:bodyPr rtlCol="0" anchor="ctr"/>
+          <a:lstStyle/>
+          <a:p>
+            <a:pPr algn="ctr"/>
+          </a:p>
+        </p:txBody>
+      </p:sp>
+      <p:sp>
+        <p:nvSpPr>
+          <p:cNvPr id="17" name="TextBox 16"/>
+          <p:cNvSpPr txBox="1"/>
+          <p:nvPr/>
+        </p:nvSpPr>
+        <p:spPr>
+          <a:xfrm>
+            <a:off x="6263640" y="1005840"/>
+            <a:ext cx="5212080" cy="384048"/>
+          </a:xfrm>
+          <a:prstGeom prst="rect">
+            <a:avLst/>
+          </a:prstGeom>
+          <a:noFill/>
+        </p:spPr>
+        <p:txBody>
+          <a:bodyPr wrap="square" lIns="0" rIns="0" tIns="0" bIns="0">
+            <a:spAutoFit/>
+          </a:bodyPr>
+          <a:lstStyle/>
+          <a:p>
+            <a:pPr algn="l"/>
+            <a:r>
+              <a:rPr sz="1300" b="1" i="0">
+                <a:solidFill>
+                  <a:srgbClr val="065A82"/>
+                </a:solidFill>
+                <a:latin typeface="Calibri"/>
+              </a:rPr>
+              <a:t>Visitor Loyalty (Visit #)</a:t>
+            </a:r>
+          </a:p>
+        </p:txBody>
+      </p:sp>
+      <p:sp>
+        <p:nvSpPr>
+          <p:cNvPr id="18" name="TextBox 17"/>
+          <p:cNvSpPr txBox="1"/>
+          <p:nvPr/>
+        </p:nvSpPr>
+        <p:spPr>
+          <a:xfrm>
+            <a:off x="6263640" y="1463040"/>
+            <a:ext cx="5212080" cy="320040"/>
+          </a:xfrm>
+          <a:prstGeom prst="rect">
+            <a:avLst/>
+          </a:prstGeom>
+          <a:noFill/>
+        </p:spPr>
+        <p:txBody>
+          <a:bodyPr wrap="square" lIns="0" rIns="0" tIns="0" bIns="0">
+            <a:spAutoFit/>
+          </a:bodyPr>
+          <a:lstStyle/>
+          <a:p>
+            <a:pPr algn="l"/>
+            <a:r>
+              <a:rPr sz="1000" b="0" i="0">
+                <a:solidFill>
+                  <a:srgbClr val="F5A623"/>
+                </a:solidFill>
+                <a:latin typeface="Calibri"/>
+              </a:rPr>
+              <a:t> 2.5%   First visit (new)</a:t>
+            </a:r>
+          </a:p>
+        </p:txBody>
+      </p:sp>
+      <p:sp>
+        <p:nvSpPr>
+          <p:cNvPr id="19" name="TextBox 18"/>
+          <p:cNvSpPr txBox="1"/>
+          <p:nvPr/>
+        </p:nvSpPr>
+        <p:spPr>
+          <a:xfrm>
+            <a:off x="6263640" y="1755648"/>
+            <a:ext cx="5212080" cy="320040"/>
+          </a:xfrm>
+          <a:prstGeom prst="rect">
+            <a:avLst/>
+          </a:prstGeom>
+          <a:noFill/>
+        </p:spPr>
+        <p:txBody>
+          <a:bodyPr wrap="square" lIns="0" rIns="0" tIns="0" bIns="0">
+            <a:spAutoFit/>
+          </a:bodyPr>
+          <a:lstStyle/>
+          <a:p>
+            <a:pPr algn="l"/>
+            <a:r>
+              <a:rPr sz="1000" b="0" i="0">
+                <a:solidFill>
+                  <a:srgbClr val="CADCFC"/>
+                </a:solidFill>
+                <a:latin typeface="Calibri"/>
+              </a:rPr>
+              <a:t>46.1%   2nd visit</a:t>
+            </a:r>
+          </a:p>
+        </p:txBody>
+      </p:sp>
+      <p:sp>
+        <p:nvSpPr>
+          <p:cNvPr id="20" name="TextBox 19"/>
+          <p:cNvSpPr txBox="1"/>
+          <p:nvPr/>
+        </p:nvSpPr>
+        <p:spPr>
+          <a:xfrm>
+            <a:off x="6263640" y="2048256"/>
+            <a:ext cx="5212080" cy="320040"/>
+          </a:xfrm>
+          <a:prstGeom prst="rect">
+            <a:avLst/>
+          </a:prstGeom>
+          <a:noFill/>
+        </p:spPr>
+        <p:txBody>
+          <a:bodyPr wrap="square" lIns="0" rIns="0" tIns="0" bIns="0">
+            <a:spAutoFit/>
+          </a:bodyPr>
+          <a:lstStyle/>
+          <a:p>
+            <a:pPr algn="l"/>
+            <a:r>
+              <a:rPr sz="1000" b="0" i="0">
+                <a:solidFill>
+                  <a:srgbClr val="059669"/>
+                </a:solidFill>
+                <a:latin typeface="Calibri"/>
+              </a:rPr>
+              <a:t>51.3%   6th+ visit (loyal)</a:t>
+            </a:r>
+          </a:p>
+        </p:txBody>
+      </p:sp>
+      <p:sp>
+        <p:nvSpPr>
+          <p:cNvPr id="21" name="TextBox 20"/>
+          <p:cNvSpPr txBox="1"/>
+          <p:nvPr/>
+        </p:nvSpPr>
+        <p:spPr>
+          <a:xfrm>
+            <a:off x="6263640" y="2340864"/>
+            <a:ext cx="5212080" cy="320040"/>
+          </a:xfrm>
+          <a:prstGeom prst="rect">
+            <a:avLst/>
+          </a:prstGeom>
+          <a:noFill/>
+        </p:spPr>
+        <p:txBody>
+          <a:bodyPr wrap="square" lIns="0" rIns="0" tIns="0" bIns="0">
+            <a:spAutoFit/>
+          </a:bodyPr>
+          <a:lstStyle/>
+          <a:p>
+            <a:pPr algn="l"/>
+            <a:r>
+              <a:rPr sz="1000" b="0" i="0">
+                <a:solidFill>
+                  <a:srgbClr val="CADCFC"/>
+                </a:solidFill>
+                <a:latin typeface="Calibri"/>
+              </a:rPr>
+              <a:t> 2.7%   9th visit</a:t>
+            </a:r>
+          </a:p>
+        </p:txBody>
+      </p:sp>
+      <p:sp>
+        <p:nvSpPr>
+          <p:cNvPr id="22" name="TextBox 21"/>
+          <p:cNvSpPr txBox="1"/>
+          <p:nvPr/>
+        </p:nvSpPr>
+        <p:spPr>
+          <a:xfrm>
+            <a:off x="6263640" y="2633472"/>
+            <a:ext cx="5212080" cy="320040"/>
+          </a:xfrm>
+          <a:prstGeom prst="rect">
+            <a:avLst/>
+          </a:prstGeom>
+          <a:noFill/>
+        </p:spPr>
+        <p:txBody>
+          <a:bodyPr wrap="square" lIns="0" rIns="0" tIns="0" bIns="0">
+            <a:spAutoFit/>
+          </a:bodyPr>
+          <a:lstStyle/>
+          <a:p>
+            <a:pPr algn="l"/>
+            <a:r>
+              <a:rPr sz="1000" b="0" i="0">
+                <a:solidFill>
+                  <a:srgbClr val="FFFFFF"/>
+                </a:solidFill>
+                <a:latin typeface="Calibri"/>
+              </a:rPr>
+              <a:t>→ 97.5% are returning visitors</a:t>
+            </a:r>
+          </a:p>
+        </p:txBody>
+      </p:sp>
+      <p:sp>
+        <p:nvSpPr>
+          <p:cNvPr id="23" name="TextBox 22"/>
+          <p:cNvSpPr txBox="1"/>
+          <p:nvPr/>
+        </p:nvSpPr>
+        <p:spPr>
+          <a:xfrm>
+            <a:off x="6263640" y="2926080"/>
+            <a:ext cx="5212080" cy="320040"/>
+          </a:xfrm>
+          <a:prstGeom prst="rect">
+            <a:avLst/>
+          </a:prstGeom>
+          <a:noFill/>
+        </p:spPr>
+        <p:txBody>
+          <a:bodyPr wrap="square" lIns="0" rIns="0" tIns="0" bIns="0">
+            <a:spAutoFit/>
+          </a:bodyPr>
+          <a:lstStyle/>
+          <a:p>
+            <a:pPr algn="l"/>
+            <a:r>
+              <a:rPr sz="1000" b="0" i="0">
+                <a:solidFill>
+                  <a:srgbClr val="FFFFFF"/>
+                </a:solidFill>
+                <a:latin typeface="Calibri"/>
+              </a:rPr>
+              <a:t>→ Strong brand stickiness</a:t>
+            </a:r>
+          </a:p>
+        </p:txBody>
+      </p:sp>
+      <p:sp>
+        <p:nvSpPr>
+          <p:cNvPr id="24" name="TextBox 23"/>
+          <p:cNvSpPr txBox="1"/>
+          <p:nvPr/>
+        </p:nvSpPr>
+        <p:spPr>
+          <a:xfrm>
+            <a:off x="6263640" y="3218688"/>
+            <a:ext cx="5212080" cy="320040"/>
+          </a:xfrm>
+          <a:prstGeom prst="rect">
+            <a:avLst/>
+          </a:prstGeom>
+          <a:noFill/>
+        </p:spPr>
+        <p:txBody>
+          <a:bodyPr wrap="square" lIns="0" rIns="0" tIns="0" bIns="0">
+            <a:spAutoFit/>
+          </a:bodyPr>
+          <a:lstStyle/>
+          <a:p>
+            <a:pPr algn="l"/>
+            <a:r>
+              <a:rPr sz="1000" b="0" i="0">
+                <a:solidFill>
+                  <a:srgbClr val="D97706"/>
+                </a:solidFill>
+                <a:latin typeface="Calibri"/>
+              </a:rPr>
+              <a:t>→ Acquisition is the weak link</a:t>
+            </a:r>
+          </a:p>
+        </p:txBody>
+      </p:sp>
+      <p:sp>
+        <p:nvSpPr>
+          <p:cNvPr id="25" name="Rectangle 24"/>
+          <p:cNvSpPr/>
+          <p:nvPr/>
+        </p:nvSpPr>
+        <p:spPr>
+          <a:xfrm>
+            <a:off x="320040" y="3840480"/>
+            <a:ext cx="5623560" cy="2724912"/>
+          </a:xfrm>
+          <a:prstGeom prst="rect">
+            <a:avLst/>
+          </a:prstGeom>
+          <a:solidFill>
+            <a:srgbClr val="1E354A"/>
+          </a:solidFill>
+          <a:ln>
+            <a:noFill/>
+          </a:ln>
+        </p:spPr>
+        <p:style>
+          <a:lnRef idx="1">
+            <a:schemeClr val="accent1"/>
+          </a:lnRef>
+          <a:fillRef idx="3">
+            <a:schemeClr val="accent1"/>
+          </a:fillRef>
+          <a:effectRef idx="2">
+            <a:schemeClr val="accent1"/>
+          </a:effectRef>
+          <a:fontRef idx="minor">
+            <a:schemeClr val="lt1"/>
+          </a:fontRef>
+        </p:style>
+        <p:txBody>
+          <a:bodyPr rtlCol="0" anchor="ctr"/>
+          <a:lstStyle/>
+          <a:p>
+            <a:pPr algn="ctr"/>
+          </a:p>
+        </p:txBody>
+      </p:sp>
+      <p:sp>
+        <p:nvSpPr>
+          <p:cNvPr id="26" name="Rectangle 25"/>
+          <p:cNvSpPr/>
+          <p:nvPr/>
+        </p:nvSpPr>
+        <p:spPr>
+          <a:xfrm>
+            <a:off x="320040" y="3840480"/>
+            <a:ext cx="5623560" cy="64008"/>
+          </a:xfrm>
+          <a:prstGeom prst="rect">
+            <a:avLst/>
+          </a:prstGeom>
+          <a:solidFill>
+            <a:srgbClr val="F5A623"/>
+          </a:solidFill>
+          <a:ln>
+            <a:noFill/>
+          </a:ln>
+        </p:spPr>
+        <p:style>
+          <a:lnRef idx="1">
+            <a:schemeClr val="accent1"/>
+          </a:lnRef>
+          <a:fillRef idx="3">
+            <a:schemeClr val="accent1"/>
+          </a:fillRef>
+          <a:effectRef idx="2">
+            <a:schemeClr val="accent1"/>
+          </a:effectRef>
+          <a:fontRef idx="minor">
+            <a:schemeClr val="lt1"/>
+          </a:fontRef>
+        </p:style>
+        <p:txBody>
+          <a:bodyPr rtlCol="0" anchor="ctr"/>
+          <a:lstStyle/>
+          <a:p>
+            <a:pPr algn="ctr"/>
+          </a:p>
+        </p:txBody>
+      </p:sp>
+      <p:sp>
+        <p:nvSpPr>
+          <p:cNvPr id="27" name="TextBox 26"/>
+          <p:cNvSpPr txBox="1"/>
+          <p:nvPr/>
+        </p:nvSpPr>
+        <p:spPr>
+          <a:xfrm>
+            <a:off x="502920" y="3931920"/>
+            <a:ext cx="5212080" cy="384048"/>
+          </a:xfrm>
+          <a:prstGeom prst="rect">
+            <a:avLst/>
+          </a:prstGeom>
+          <a:noFill/>
+        </p:spPr>
+        <p:txBody>
+          <a:bodyPr wrap="square" lIns="0" rIns="0" tIns="0" bIns="0">
+            <a:spAutoFit/>
+          </a:bodyPr>
+          <a:lstStyle/>
+          <a:p>
+            <a:pPr algn="l"/>
+            <a:r>
+              <a:rPr sz="1300" b="1" i="0">
+                <a:solidFill>
+                  <a:srgbClr val="F5A623"/>
+                </a:solidFill>
+                <a:latin typeface="Calibri"/>
+              </a:rPr>
+              <a:t>High-Engagement Journey (5+pg)</a:t>
+            </a:r>
+          </a:p>
+        </p:txBody>
+      </p:sp>
+      <p:sp>
+        <p:nvSpPr>
+          <p:cNvPr id="28" name="TextBox 27"/>
+          <p:cNvSpPr txBox="1"/>
+          <p:nvPr/>
+        </p:nvSpPr>
+        <p:spPr>
+          <a:xfrm>
+            <a:off x="502920" y="4389120"/>
+            <a:ext cx="5212080" cy="320040"/>
+          </a:xfrm>
+          <a:prstGeom prst="rect">
+            <a:avLst/>
+          </a:prstGeom>
+          <a:noFill/>
+        </p:spPr>
+        <p:txBody>
+          <a:bodyPr wrap="square" lIns="0" rIns="0" tIns="0" bIns="0">
+            <a:spAutoFit/>
+          </a:bodyPr>
+          <a:lstStyle/>
+          <a:p>
+            <a:pPr algn="l"/>
+            <a:r>
+              <a:rPr sz="1000" b="0" i="0">
+                <a:solidFill>
+                  <a:srgbClr val="CADCFC"/>
+                </a:solidFill>
+                <a:latin typeface="Calibri"/>
+              </a:rPr>
+              <a:t>① Solidigm Data Storage Solutions (entry)</a:t>
+            </a:r>
+          </a:p>
+        </p:txBody>
+      </p:sp>
+      <p:sp>
+        <p:nvSpPr>
+          <p:cNvPr id="29" name="TextBox 28"/>
+          <p:cNvSpPr txBox="1"/>
+          <p:nvPr/>
+        </p:nvSpPr>
+        <p:spPr>
+          <a:xfrm>
+            <a:off x="502920" y="4681728"/>
+            <a:ext cx="5212080" cy="320040"/>
+          </a:xfrm>
+          <a:prstGeom prst="rect">
+            <a:avLst/>
+          </a:prstGeom>
+          <a:noFill/>
+        </p:spPr>
+        <p:txBody>
+          <a:bodyPr wrap="square" lIns="0" rIns="0" tIns="0" bIns="0">
+            <a:spAutoFit/>
+          </a:bodyPr>
+          <a:lstStyle/>
+          <a:p>
+            <a:pPr algn="l"/>
+            <a:r>
+              <a:rPr sz="1000" b="0" i="0">
+                <a:solidFill>
+                  <a:srgbClr val="CADCFC"/>
+                </a:solidFill>
+                <a:latin typeface="Calibri"/>
+              </a:rPr>
+              <a:t>② AI Storage (product discovery)</a:t>
+            </a:r>
+          </a:p>
+        </p:txBody>
+      </p:sp>
+      <p:sp>
+        <p:nvSpPr>
+          <p:cNvPr id="30" name="TextBox 29"/>
+          <p:cNvSpPr txBox="1"/>
+          <p:nvPr/>
+        </p:nvSpPr>
+        <p:spPr>
+          <a:xfrm>
+            <a:off x="502920" y="4974336"/>
+            <a:ext cx="5212080" cy="320040"/>
+          </a:xfrm>
+          <a:prstGeom prst="rect">
+            <a:avLst/>
+          </a:prstGeom>
+          <a:noFill/>
+        </p:spPr>
+        <p:txBody>
+          <a:bodyPr wrap="square" lIns="0" rIns="0" tIns="0" bIns="0">
+            <a:spAutoFit/>
+          </a:bodyPr>
+          <a:lstStyle/>
+          <a:p>
+            <a:pPr algn="l"/>
+            <a:r>
+              <a:rPr sz="1000" b="0" i="0">
+                <a:solidFill>
+                  <a:srgbClr val="CADCFC"/>
+                </a:solidFill>
+                <a:latin typeface="Calibri"/>
+              </a:rPr>
+              <a:t>③ Our Story (trust building)</a:t>
+            </a:r>
+          </a:p>
+        </p:txBody>
+      </p:sp>
+      <p:sp>
+        <p:nvSpPr>
+          <p:cNvPr id="31" name="TextBox 30"/>
+          <p:cNvSpPr txBox="1"/>
+          <p:nvPr/>
+        </p:nvSpPr>
+        <p:spPr>
+          <a:xfrm>
+            <a:off x="502920" y="5266944"/>
+            <a:ext cx="5212080" cy="320040"/>
+          </a:xfrm>
+          <a:prstGeom prst="rect">
+            <a:avLst/>
+          </a:prstGeom>
+          <a:noFill/>
+        </p:spPr>
+        <p:txBody>
+          <a:bodyPr wrap="square" lIns="0" rIns="0" tIns="0" bIns="0">
+            <a:spAutoFit/>
+          </a:bodyPr>
+          <a:lstStyle/>
+          <a:p>
+            <a:pPr algn="l"/>
+            <a:r>
+              <a:rPr sz="1000" b="0" i="0">
+                <a:solidFill>
+                  <a:srgbClr val="CADCFC"/>
+                </a:solidFill>
+                <a:latin typeface="Calibri"/>
+              </a:rPr>
+              <a:t>④ Edge Storage / D5-P5336 (evaluation)</a:t>
+            </a:r>
+          </a:p>
+        </p:txBody>
+      </p:sp>
+      <p:sp>
+        <p:nvSpPr>
+          <p:cNvPr id="32" name="TextBox 31"/>
+          <p:cNvSpPr txBox="1"/>
+          <p:nvPr/>
+        </p:nvSpPr>
+        <p:spPr>
+          <a:xfrm>
+            <a:off x="502920" y="5559552"/>
+            <a:ext cx="5212080" cy="320040"/>
+          </a:xfrm>
+          <a:prstGeom prst="rect">
+            <a:avLst/>
+          </a:prstGeom>
+          <a:noFill/>
+        </p:spPr>
+        <p:txBody>
+          <a:bodyPr wrap="square" lIns="0" rIns="0" tIns="0" bIns="0">
+            <a:spAutoFit/>
+          </a:bodyPr>
+          <a:lstStyle/>
+          <a:p>
+            <a:pPr algn="l"/>
+            <a:r>
+              <a:rPr sz="1000" b="0" i="0">
+                <a:solidFill>
+                  <a:srgbClr val="059669"/>
+                </a:solidFill>
+                <a:latin typeface="Calibri"/>
+              </a:rPr>
+              <a:t>⑤ Where to Buy (purchase intent)</a:t>
+            </a:r>
+          </a:p>
+        </p:txBody>
+      </p:sp>
+      <p:sp>
+        <p:nvSpPr>
+          <p:cNvPr id="33" name="TextBox 32"/>
+          <p:cNvSpPr txBox="1"/>
+          <p:nvPr/>
+        </p:nvSpPr>
+        <p:spPr>
+          <a:xfrm>
+            <a:off x="502920" y="5852160"/>
+            <a:ext cx="5212080" cy="320040"/>
+          </a:xfrm>
+          <a:prstGeom prst="rect">
+            <a:avLst/>
+          </a:prstGeom>
+          <a:noFill/>
+        </p:spPr>
+        <p:txBody>
+          <a:bodyPr wrap="square" lIns="0" rIns="0" tIns="0" bIns="0">
+            <a:spAutoFit/>
+          </a:bodyPr>
+          <a:lstStyle/>
+          <a:p>
+            <a:pPr algn="l"/>
+            <a:r>
+              <a:rPr sz="1000" b="0" i="0">
+                <a:solidFill>
+                  <a:srgbClr val="FFFFFF"/>
+                </a:solidFill>
+                <a:latin typeface="Calibri"/>
+              </a:rPr>
+              <a:t>→ 5-step B2B consideration path identified</a:t>
+            </a:r>
+          </a:p>
+        </p:txBody>
+      </p:sp>
+      <p:sp>
+        <p:nvSpPr>
+          <p:cNvPr id="34" name="Rectangle 33"/>
+          <p:cNvSpPr/>
+          <p:nvPr/>
+        </p:nvSpPr>
+        <p:spPr>
+          <a:xfrm>
+            <a:off x="6080760" y="3840480"/>
+            <a:ext cx="5623560" cy="2724912"/>
+          </a:xfrm>
+          <a:prstGeom prst="rect">
+            <a:avLst/>
+          </a:prstGeom>
+          <a:solidFill>
+            <a:srgbClr val="1E354A"/>
+          </a:solidFill>
+          <a:ln>
+            <a:noFill/>
+          </a:ln>
+        </p:spPr>
+        <p:style>
+          <a:lnRef idx="1">
+            <a:schemeClr val="accent1"/>
+          </a:lnRef>
+          <a:fillRef idx="3">
+            <a:schemeClr val="accent1"/>
+          </a:fillRef>
+          <a:effectRef idx="2">
+            <a:schemeClr val="accent1"/>
+          </a:effectRef>
+          <a:fontRef idx="minor">
+            <a:schemeClr val="lt1"/>
+          </a:fontRef>
+        </p:style>
+        <p:txBody>
+          <a:bodyPr rtlCol="0" anchor="ctr"/>
+          <a:lstStyle/>
+          <a:p>
+            <a:pPr algn="ctr"/>
+          </a:p>
+        </p:txBody>
+      </p:sp>
+      <p:sp>
+        <p:nvSpPr>
+          <p:cNvPr id="35" name="Rectangle 34"/>
+          <p:cNvSpPr/>
+          <p:nvPr/>
+        </p:nvSpPr>
+        <p:spPr>
+          <a:xfrm>
+            <a:off x="6080760" y="3840480"/>
+            <a:ext cx="5623560" cy="64008"/>
+          </a:xfrm>
+          <a:prstGeom prst="rect">
+            <a:avLst/>
+          </a:prstGeom>
+          <a:solidFill>
+            <a:srgbClr val="1C7293"/>
+          </a:solidFill>
+          <a:ln>
+            <a:noFill/>
+          </a:ln>
+        </p:spPr>
+        <p:style>
+          <a:lnRef idx="1">
+            <a:schemeClr val="accent1"/>
+          </a:lnRef>
+          <a:fillRef idx="3">
+            <a:schemeClr val="accent1"/>
+          </a:fillRef>
+          <a:effectRef idx="2">
+            <a:schemeClr val="accent1"/>
+          </a:effectRef>
+          <a:fontRef idx="minor">
+            <a:schemeClr val="lt1"/>
+          </a:fontRef>
+        </p:style>
+        <p:txBody>
+          <a:bodyPr rtlCol="0" anchor="ctr"/>
+          <a:lstStyle/>
+          <a:p>
+            <a:pPr algn="ctr"/>
+          </a:p>
+        </p:txBody>
+      </p:sp>
+      <p:sp>
+        <p:nvSpPr>
+          <p:cNvPr id="36" name="TextBox 35"/>
+          <p:cNvSpPr txBox="1"/>
+          <p:nvPr/>
+        </p:nvSpPr>
+        <p:spPr>
+          <a:xfrm>
+            <a:off x="6263640" y="3931920"/>
+            <a:ext cx="5212080" cy="384048"/>
+          </a:xfrm>
+          <a:prstGeom prst="rect">
+            <a:avLst/>
+          </a:prstGeom>
+          <a:noFill/>
+        </p:spPr>
+        <p:txBody>
+          <a:bodyPr wrap="square" lIns="0" rIns="0" tIns="0" bIns="0">
+            <a:spAutoFit/>
+          </a:bodyPr>
+          <a:lstStyle/>
+          <a:p>
+            <a:pPr algn="l"/>
+            <a:r>
+              <a:rPr sz="1300" b="1" i="0">
+                <a:solidFill>
+                  <a:srgbClr val="1C7293"/>
+                </a:solidFill>
+                <a:latin typeface="Calibri"/>
+              </a:rPr>
+              <a:t>Hourly &amp; Weekly Patterns</a:t>
+            </a:r>
+          </a:p>
+        </p:txBody>
+      </p:sp>
+      <p:sp>
+        <p:nvSpPr>
+          <p:cNvPr id="37" name="TextBox 36"/>
+          <p:cNvSpPr txBox="1"/>
+          <p:nvPr/>
+        </p:nvSpPr>
+        <p:spPr>
+          <a:xfrm>
+            <a:off x="6263640" y="4389120"/>
+            <a:ext cx="5212080" cy="320040"/>
+          </a:xfrm>
+          <a:prstGeom prst="rect">
+            <a:avLst/>
+          </a:prstGeom>
+          <a:noFill/>
+        </p:spPr>
+        <p:txBody>
+          <a:bodyPr wrap="square" lIns="0" rIns="0" tIns="0" bIns="0">
+            <a:spAutoFit/>
+          </a:bodyPr>
+          <a:lstStyle/>
+          <a:p>
+            <a:pPr algn="l"/>
+            <a:r>
+              <a:rPr sz="1000" b="0" i="0">
+                <a:solidFill>
+                  <a:srgbClr val="CADCFC"/>
+                </a:solidFill>
+                <a:latin typeface="Calibri"/>
+              </a:rPr>
+              <a:t>JAN peak: 05:00 UTC (US overnight / APAC)</a:t>
+            </a:r>
+          </a:p>
+        </p:txBody>
+      </p:sp>
+      <p:sp>
+        <p:nvSpPr>
+          <p:cNvPr id="38" name="TextBox 37"/>
+          <p:cNvSpPr txBox="1"/>
+          <p:nvPr/>
+        </p:nvSpPr>
+        <p:spPr>
+          <a:xfrm>
+            <a:off x="6263640" y="4681728"/>
+            <a:ext cx="5212080" cy="320040"/>
+          </a:xfrm>
+          <a:prstGeom prst="rect">
+            <a:avLst/>
+          </a:prstGeom>
+          <a:noFill/>
+        </p:spPr>
+        <p:txBody>
+          <a:bodyPr wrap="square" lIns="0" rIns="0" tIns="0" bIns="0">
+            <a:spAutoFit/>
+          </a:bodyPr>
+          <a:lstStyle/>
+          <a:p>
+            <a:pPr algn="l"/>
+            <a:r>
+              <a:rPr sz="1000" b="0" i="0">
+                <a:solidFill>
+                  <a:srgbClr val="CADCFC"/>
+                </a:solidFill>
+                <a:latin typeface="Calibri"/>
+              </a:rPr>
+              <a:t>FEB peak: 07:00 UTC (EU/US morning)</a:t>
+            </a:r>
+          </a:p>
+        </p:txBody>
+      </p:sp>
+      <p:sp>
+        <p:nvSpPr>
+          <p:cNvPr id="39" name="TextBox 38"/>
+          <p:cNvSpPr txBox="1"/>
+          <p:nvPr/>
+        </p:nvSpPr>
+        <p:spPr>
+          <a:xfrm>
+            <a:off x="6263640" y="4974336"/>
+            <a:ext cx="5212080" cy="320040"/>
+          </a:xfrm>
+          <a:prstGeom prst="rect">
+            <a:avLst/>
+          </a:prstGeom>
+          <a:noFill/>
+        </p:spPr>
+        <p:txBody>
+          <a:bodyPr wrap="square" lIns="0" rIns="0" tIns="0" bIns="0">
+            <a:spAutoFit/>
+          </a:bodyPr>
+          <a:lstStyle/>
+          <a:p>
+            <a:pPr algn="l"/>
+            <a:r>
+              <a:rPr sz="1000" b="0" i="0">
+                <a:solidFill>
+                  <a:srgbClr val="CADCFC"/>
+                </a:solidFill>
+                <a:latin typeface="Calibri"/>
+              </a:rPr>
+              <a:t>JAN top day: Friday (76,611 PVs)</a:t>
+            </a:r>
+          </a:p>
+        </p:txBody>
+      </p:sp>
+      <p:sp>
+        <p:nvSpPr>
+          <p:cNvPr id="40" name="TextBox 39"/>
+          <p:cNvSpPr txBox="1"/>
+          <p:nvPr/>
+        </p:nvSpPr>
+        <p:spPr>
+          <a:xfrm>
+            <a:off x="6263640" y="5266944"/>
+            <a:ext cx="5212080" cy="320040"/>
+          </a:xfrm>
+          <a:prstGeom prst="rect">
+            <a:avLst/>
+          </a:prstGeom>
+          <a:noFill/>
+        </p:spPr>
+        <p:txBody>
+          <a:bodyPr wrap="square" lIns="0" rIns="0" tIns="0" bIns="0">
+            <a:spAutoFit/>
+          </a:bodyPr>
+          <a:lstStyle/>
+          <a:p>
+            <a:pPr algn="l"/>
+            <a:r>
+              <a:rPr sz="1000" b="0" i="0">
+                <a:solidFill>
+                  <a:srgbClr val="CADCFC"/>
+                </a:solidFill>
+                <a:latin typeface="Calibri"/>
+              </a:rPr>
+              <a:t>FEB top day: Tuesday (63,165 PVs)</a:t>
+            </a:r>
+          </a:p>
+        </p:txBody>
+      </p:sp>
+      <p:sp>
+        <p:nvSpPr>
+          <p:cNvPr id="41" name="TextBox 40"/>
+          <p:cNvSpPr txBox="1"/>
+          <p:nvPr/>
+        </p:nvSpPr>
+        <p:spPr>
+          <a:xfrm>
+            <a:off x="6263640" y="5559552"/>
+            <a:ext cx="5212080" cy="320040"/>
+          </a:xfrm>
+          <a:prstGeom prst="rect">
+            <a:avLst/>
+          </a:prstGeom>
+          <a:noFill/>
+        </p:spPr>
+        <p:txBody>
+          <a:bodyPr wrap="square" lIns="0" rIns="0" tIns="0" bIns="0">
+            <a:spAutoFit/>
+          </a:bodyPr>
+          <a:lstStyle/>
+          <a:p>
+            <a:pPr algn="l"/>
+            <a:r>
+              <a:rPr sz="1000" b="0" i="0">
+                <a:solidFill>
+                  <a:srgbClr val="CADCFC"/>
+                </a:solidFill>
+                <a:latin typeface="Calibri"/>
+              </a:rPr>
+              <a:t>Weekend traffic: ~18% of weekly PVs</a:t>
+            </a:r>
+          </a:p>
+        </p:txBody>
+      </p:sp>
+      <p:sp>
+        <p:nvSpPr>
+          <p:cNvPr id="42" name="TextBox 41"/>
+          <p:cNvSpPr txBox="1"/>
+          <p:nvPr/>
+        </p:nvSpPr>
+        <p:spPr>
+          <a:xfrm>
+            <a:off x="6263640" y="5852160"/>
+            <a:ext cx="5212080" cy="320040"/>
+          </a:xfrm>
+          <a:prstGeom prst="rect">
+            <a:avLst/>
+          </a:prstGeom>
+          <a:noFill/>
+        </p:spPr>
+        <p:txBody>
+          <a:bodyPr wrap="square" lIns="0" rIns="0" tIns="0" bIns="0">
+            <a:spAutoFit/>
+          </a:bodyPr>
+          <a:lstStyle/>
+          <a:p>
+            <a:pPr algn="l"/>
+            <a:r>
+              <a:rPr sz="1000" b="0" i="0">
+                <a:solidFill>
+                  <a:srgbClr val="059669"/>
+                </a:solidFill>
+                <a:latin typeface="Calibri"/>
+              </a:rPr>
+              <a:t>→ B2B buyers are active Tue-Fri</a:t>
+            </a:r>
+          </a:p>
+        </p:txBody>
+      </p:sp>
+    </p:spTree>
+  </p:cSld>
+  <p:clrMapOvr>
+    <a:masterClrMapping/>
+  </p:clrMapOvr>
+</p:sld>
+</file>
+
+<file path=ppt/slides/slide11.xml><?xml version="1.0" encoding="utf-8"?>
+<p:sld xmlns:a="http://schemas.openxmlformats.org/drawingml/2006/main" xmlns:p="http://schemas.openxmlformats.org/presentationml/2006/main" xmlns:r="http://schemas.openxmlformats.org/officeDocument/2006/relationships">
+  <p:cSld>
+    <p:bg>
+      <p:bgPr>
+        <a:solidFill>
           <a:srgbClr val="F0F4F8"/>
         </a:solidFill>
         <a:effectLst/>
@@ -5045,7 +6579,7 @@
 </p:sld>
 </file>
 
-<file path=ppt/slides/slide11.xml><?xml version="1.0" encoding="utf-8"?>
+<file path=ppt/slides/slide12.xml><?xml version="1.0" encoding="utf-8"?>
 <p:sld xmlns:a="http://schemas.openxmlformats.org/drawingml/2006/main" xmlns:p="http://schemas.openxmlformats.org/presentationml/2006/main" xmlns:r="http://schemas.openxmlformats.org/officeDocument/2006/relationships">
   <p:cSld>
     <p:bg>
@@ -6063,6 +7597,2036 @@
     <p:bg>
       <p:bgPr>
         <a:solidFill>
+          <a:srgbClr val="1E293B"/>
+        </a:solidFill>
+        <a:effectLst/>
+      </p:bgPr>
+    </p:bg>
+    <p:spTree>
+      <p:nvGrpSpPr>
+        <p:cNvPr id="1" name=""/>
+        <p:cNvGrpSpPr/>
+        <p:nvPr/>
+      </p:nvGrpSpPr>
+      <p:grpSpPr/>
+      <p:sp>
+        <p:nvSpPr>
+          <p:cNvPr id="2" name="Rectangle 1"/>
+          <p:cNvSpPr/>
+          <p:nvPr/>
+        </p:nvSpPr>
+        <p:spPr>
+          <a:xfrm>
+            <a:off x="0" y="0"/>
+            <a:ext cx="12191695" cy="804672"/>
+          </a:xfrm>
+          <a:prstGeom prst="rect">
+            <a:avLst/>
+          </a:prstGeom>
+          <a:solidFill>
+            <a:srgbClr val="065A82"/>
+          </a:solidFill>
+          <a:ln>
+            <a:noFill/>
+          </a:ln>
+        </p:spPr>
+        <p:style>
+          <a:lnRef idx="1">
+            <a:schemeClr val="accent1"/>
+          </a:lnRef>
+          <a:fillRef idx="3">
+            <a:schemeClr val="accent1"/>
+          </a:fillRef>
+          <a:effectRef idx="2">
+            <a:schemeClr val="accent1"/>
+          </a:effectRef>
+          <a:fontRef idx="minor">
+            <a:schemeClr val="lt1"/>
+          </a:fontRef>
+        </p:style>
+        <p:txBody>
+          <a:bodyPr rtlCol="0" anchor="ctr"/>
+          <a:lstStyle/>
+          <a:p>
+            <a:pPr algn="ctr"/>
+          </a:p>
+        </p:txBody>
+      </p:sp>
+      <p:sp>
+        <p:nvSpPr>
+          <p:cNvPr id="3" name="TextBox 2"/>
+          <p:cNvSpPr txBox="1"/>
+          <p:nvPr/>
+        </p:nvSpPr>
+        <p:spPr>
+          <a:xfrm>
+            <a:off x="502920" y="73152"/>
+            <a:ext cx="8229600" cy="502920"/>
+          </a:xfrm>
+          <a:prstGeom prst="rect">
+            <a:avLst/>
+          </a:prstGeom>
+          <a:noFill/>
+        </p:spPr>
+        <p:txBody>
+          <a:bodyPr wrap="square" lIns="0" rIns="0" tIns="0" bIns="0">
+            <a:spAutoFit/>
+          </a:bodyPr>
+          <a:lstStyle/>
+          <a:p>
+            <a:pPr algn="l"/>
+            <a:r>
+              <a:rPr sz="2600" b="1" i="0">
+                <a:solidFill>
+                  <a:srgbClr val="FFFFFF"/>
+                </a:solidFill>
+                <a:latin typeface="Calibri"/>
+              </a:rPr>
+              <a:t>Executive Summary</a:t>
+            </a:r>
+          </a:p>
+        </p:txBody>
+      </p:sp>
+      <p:sp>
+        <p:nvSpPr>
+          <p:cNvPr id="4" name="TextBox 3"/>
+          <p:cNvSpPr txBox="1"/>
+          <p:nvPr/>
+        </p:nvSpPr>
+        <p:spPr>
+          <a:xfrm>
+            <a:off x="502920" y="493776"/>
+            <a:ext cx="9144000" cy="292608"/>
+          </a:xfrm>
+          <a:prstGeom prst="rect">
+            <a:avLst/>
+          </a:prstGeom>
+          <a:noFill/>
+        </p:spPr>
+        <p:txBody>
+          <a:bodyPr wrap="square" lIns="0" rIns="0" tIns="0" bIns="0">
+            <a:spAutoFit/>
+          </a:bodyPr>
+          <a:lstStyle/>
+          <a:p>
+            <a:pPr algn="l"/>
+            <a:r>
+              <a:rPr sz="1200" b="0" i="0">
+                <a:solidFill>
+                  <a:srgbClr val="CADCFC"/>
+                </a:solidFill>
+                <a:latin typeface="Calibri"/>
+              </a:rPr>
+              <a:t>Jan vs Feb FY2026  |  solidigm.com  |  B2B Digital Marketing</a:t>
+            </a:r>
+          </a:p>
+        </p:txBody>
+      </p:sp>
+      <p:sp>
+        <p:nvSpPr>
+          <p:cNvPr id="5" name="Rectangle 4"/>
+          <p:cNvSpPr/>
+          <p:nvPr/>
+        </p:nvSpPr>
+        <p:spPr>
+          <a:xfrm>
+            <a:off x="320040" y="914400"/>
+            <a:ext cx="5440680" cy="5166360"/>
+          </a:xfrm>
+          <a:prstGeom prst="rect">
+            <a:avLst/>
+          </a:prstGeom>
+          <a:solidFill>
+            <a:srgbClr val="1E354A"/>
+          </a:solidFill>
+          <a:ln>
+            <a:noFill/>
+          </a:ln>
+        </p:spPr>
+        <p:style>
+          <a:lnRef idx="1">
+            <a:schemeClr val="accent1"/>
+          </a:lnRef>
+          <a:fillRef idx="3">
+            <a:schemeClr val="accent1"/>
+          </a:fillRef>
+          <a:effectRef idx="2">
+            <a:schemeClr val="accent1"/>
+          </a:effectRef>
+          <a:fontRef idx="minor">
+            <a:schemeClr val="lt1"/>
+          </a:fontRef>
+        </p:style>
+        <p:txBody>
+          <a:bodyPr rtlCol="0" anchor="ctr"/>
+          <a:lstStyle/>
+          <a:p>
+            <a:pPr algn="ctr"/>
+          </a:p>
+        </p:txBody>
+      </p:sp>
+      <p:sp>
+        <p:nvSpPr>
+          <p:cNvPr id="6" name="Rectangle 5"/>
+          <p:cNvSpPr/>
+          <p:nvPr/>
+        </p:nvSpPr>
+        <p:spPr>
+          <a:xfrm>
+            <a:off x="320040" y="914400"/>
+            <a:ext cx="5440680" cy="64008"/>
+          </a:xfrm>
+          <a:prstGeom prst="rect">
+            <a:avLst/>
+          </a:prstGeom>
+          <a:solidFill>
+            <a:srgbClr val="1C7293"/>
+          </a:solidFill>
+          <a:ln>
+            <a:noFill/>
+          </a:ln>
+        </p:spPr>
+        <p:style>
+          <a:lnRef idx="1">
+            <a:schemeClr val="accent1"/>
+          </a:lnRef>
+          <a:fillRef idx="3">
+            <a:schemeClr val="accent1"/>
+          </a:fillRef>
+          <a:effectRef idx="2">
+            <a:schemeClr val="accent1"/>
+          </a:effectRef>
+          <a:fontRef idx="minor">
+            <a:schemeClr val="lt1"/>
+          </a:fontRef>
+        </p:style>
+        <p:txBody>
+          <a:bodyPr rtlCol="0" anchor="ctr"/>
+          <a:lstStyle/>
+          <a:p>
+            <a:pPr algn="ctr"/>
+          </a:p>
+        </p:txBody>
+      </p:sp>
+      <p:sp>
+        <p:nvSpPr>
+          <p:cNvPr id="7" name="TextBox 6"/>
+          <p:cNvSpPr txBox="1"/>
+          <p:nvPr/>
+        </p:nvSpPr>
+        <p:spPr>
+          <a:xfrm>
+            <a:off x="502920" y="1005840"/>
+            <a:ext cx="5120640" cy="384048"/>
+          </a:xfrm>
+          <a:prstGeom prst="rect">
+            <a:avLst/>
+          </a:prstGeom>
+          <a:noFill/>
+        </p:spPr>
+        <p:txBody>
+          <a:bodyPr wrap="square" lIns="0" rIns="0" tIns="0" bIns="0">
+            <a:spAutoFit/>
+          </a:bodyPr>
+          <a:lstStyle/>
+          <a:p>
+            <a:pPr algn="l"/>
+            <a:r>
+              <a:rPr sz="1400" b="1" i="0">
+                <a:solidFill>
+                  <a:srgbClr val="1C7293"/>
+                </a:solidFill>
+                <a:latin typeface="Calibri"/>
+              </a:rPr>
+              <a:t>What Happened</a:t>
+            </a:r>
+          </a:p>
+        </p:txBody>
+      </p:sp>
+      <p:sp>
+        <p:nvSpPr>
+          <p:cNvPr id="8" name="Rectangle 7"/>
+          <p:cNvSpPr/>
+          <p:nvPr/>
+        </p:nvSpPr>
+        <p:spPr>
+          <a:xfrm>
+            <a:off x="411480" y="1463040"/>
+            <a:ext cx="5257800" cy="1389888"/>
+          </a:xfrm>
+          <a:prstGeom prst="rect">
+            <a:avLst/>
+          </a:prstGeom>
+          <a:solidFill>
+            <a:srgbClr val="152B3D"/>
+          </a:solidFill>
+          <a:ln>
+            <a:noFill/>
+          </a:ln>
+        </p:spPr>
+        <p:style>
+          <a:lnRef idx="1">
+            <a:schemeClr val="accent1"/>
+          </a:lnRef>
+          <a:fillRef idx="3">
+            <a:schemeClr val="accent1"/>
+          </a:fillRef>
+          <a:effectRef idx="2">
+            <a:schemeClr val="accent1"/>
+          </a:effectRef>
+          <a:fontRef idx="minor">
+            <a:schemeClr val="lt1"/>
+          </a:fontRef>
+        </p:style>
+        <p:txBody>
+          <a:bodyPr rtlCol="0" anchor="ctr"/>
+          <a:lstStyle/>
+          <a:p>
+            <a:pPr algn="ctr"/>
+          </a:p>
+        </p:txBody>
+      </p:sp>
+      <p:sp>
+        <p:nvSpPr>
+          <p:cNvPr id="9" name="Rectangle 8"/>
+          <p:cNvSpPr/>
+          <p:nvPr/>
+        </p:nvSpPr>
+        <p:spPr>
+          <a:xfrm>
+            <a:off x="411480" y="1463040"/>
+            <a:ext cx="64008" cy="1389888"/>
+          </a:xfrm>
+          <a:prstGeom prst="rect">
+            <a:avLst/>
+          </a:prstGeom>
+          <a:solidFill>
+            <a:srgbClr val="1C7293"/>
+          </a:solidFill>
+          <a:ln>
+            <a:noFill/>
+          </a:ln>
+        </p:spPr>
+        <p:style>
+          <a:lnRef idx="1">
+            <a:schemeClr val="accent1"/>
+          </a:lnRef>
+          <a:fillRef idx="3">
+            <a:schemeClr val="accent1"/>
+          </a:fillRef>
+          <a:effectRef idx="2">
+            <a:schemeClr val="accent1"/>
+          </a:effectRef>
+          <a:fontRef idx="minor">
+            <a:schemeClr val="lt1"/>
+          </a:fontRef>
+        </p:style>
+        <p:txBody>
+          <a:bodyPr rtlCol="0" anchor="ctr"/>
+          <a:lstStyle/>
+          <a:p>
+            <a:pPr algn="ctr"/>
+          </a:p>
+        </p:txBody>
+      </p:sp>
+      <p:sp>
+        <p:nvSpPr>
+          <p:cNvPr id="10" name="TextBox 9"/>
+          <p:cNvSpPr txBox="1"/>
+          <p:nvPr/>
+        </p:nvSpPr>
+        <p:spPr>
+          <a:xfrm>
+            <a:off x="594360" y="1536192"/>
+            <a:ext cx="4892040" cy="365760"/>
+          </a:xfrm>
+          <a:prstGeom prst="rect">
+            <a:avLst/>
+          </a:prstGeom>
+          <a:noFill/>
+        </p:spPr>
+        <p:txBody>
+          <a:bodyPr wrap="square" lIns="0" rIns="0" tIns="0" bIns="0">
+            <a:spAutoFit/>
+          </a:bodyPr>
+          <a:lstStyle/>
+          <a:p>
+            <a:pPr algn="l"/>
+            <a:r>
+              <a:rPr sz="1200" b="1" i="0">
+                <a:solidFill>
+                  <a:srgbClr val="1C7293"/>
+                </a:solidFill>
+                <a:latin typeface="Calibri"/>
+              </a:rPr>
+              <a:t>Traffic stayed flat — by design</a:t>
+            </a:r>
+          </a:p>
+        </p:txBody>
+      </p:sp>
+      <p:sp>
+        <p:nvSpPr>
+          <p:cNvPr id="11" name="TextBox 10"/>
+          <p:cNvSpPr txBox="1"/>
+          <p:nvPr/>
+        </p:nvSpPr>
+        <p:spPr>
+          <a:xfrm>
+            <a:off x="594360" y="1938528"/>
+            <a:ext cx="4754880" cy="822960"/>
+          </a:xfrm>
+          <a:prstGeom prst="rect">
+            <a:avLst/>
+          </a:prstGeom>
+          <a:noFill/>
+        </p:spPr>
+        <p:txBody>
+          <a:bodyPr wrap="square" lIns="0" rIns="0" tIns="0" bIns="0">
+            <a:spAutoFit/>
+          </a:bodyPr>
+          <a:lstStyle/>
+          <a:p>
+            <a:pPr algn="l"/>
+            <a:r>
+              <a:rPr sz="1000" b="0" i="0">
+                <a:solidFill>
+                  <a:srgbClr val="CADCFC"/>
+                </a:solidFill>
+                <a:latin typeface="Calibri"/>
+              </a:rPr>
+              <a:t>Total PVs dipped -6.6% (423K→395K) but avg daily PVs actually grew +3.4% after adjusting for Feb's 3 fewer days. Non-Paid traffic held at 84% share; Paid nearly doubled its share 9.9%→15.8%.</a:t>
+            </a:r>
+          </a:p>
+        </p:txBody>
+      </p:sp>
+      <p:sp>
+        <p:nvSpPr>
+          <p:cNvPr id="12" name="Rectangle 11"/>
+          <p:cNvSpPr/>
+          <p:nvPr/>
+        </p:nvSpPr>
+        <p:spPr>
+          <a:xfrm>
+            <a:off x="411480" y="3017520"/>
+            <a:ext cx="5257800" cy="1389888"/>
+          </a:xfrm>
+          <a:prstGeom prst="rect">
+            <a:avLst/>
+          </a:prstGeom>
+          <a:solidFill>
+            <a:srgbClr val="152B3D"/>
+          </a:solidFill>
+          <a:ln>
+            <a:noFill/>
+          </a:ln>
+        </p:spPr>
+        <p:style>
+          <a:lnRef idx="1">
+            <a:schemeClr val="accent1"/>
+          </a:lnRef>
+          <a:fillRef idx="3">
+            <a:schemeClr val="accent1"/>
+          </a:fillRef>
+          <a:effectRef idx="2">
+            <a:schemeClr val="accent1"/>
+          </a:effectRef>
+          <a:fontRef idx="minor">
+            <a:schemeClr val="lt1"/>
+          </a:fontRef>
+        </p:style>
+        <p:txBody>
+          <a:bodyPr rtlCol="0" anchor="ctr"/>
+          <a:lstStyle/>
+          <a:p>
+            <a:pPr algn="ctr"/>
+          </a:p>
+        </p:txBody>
+      </p:sp>
+      <p:sp>
+        <p:nvSpPr>
+          <p:cNvPr id="13" name="Rectangle 12"/>
+          <p:cNvSpPr/>
+          <p:nvPr/>
+        </p:nvSpPr>
+        <p:spPr>
+          <a:xfrm>
+            <a:off x="411480" y="3017520"/>
+            <a:ext cx="64008" cy="1389888"/>
+          </a:xfrm>
+          <a:prstGeom prst="rect">
+            <a:avLst/>
+          </a:prstGeom>
+          <a:solidFill>
+            <a:srgbClr val="F5A623"/>
+          </a:solidFill>
+          <a:ln>
+            <a:noFill/>
+          </a:ln>
+        </p:spPr>
+        <p:style>
+          <a:lnRef idx="1">
+            <a:schemeClr val="accent1"/>
+          </a:lnRef>
+          <a:fillRef idx="3">
+            <a:schemeClr val="accent1"/>
+          </a:fillRef>
+          <a:effectRef idx="2">
+            <a:schemeClr val="accent1"/>
+          </a:effectRef>
+          <a:fontRef idx="minor">
+            <a:schemeClr val="lt1"/>
+          </a:fontRef>
+        </p:style>
+        <p:txBody>
+          <a:bodyPr rtlCol="0" anchor="ctr"/>
+          <a:lstStyle/>
+          <a:p>
+            <a:pPr algn="ctr"/>
+          </a:p>
+        </p:txBody>
+      </p:sp>
+      <p:sp>
+        <p:nvSpPr>
+          <p:cNvPr id="14" name="TextBox 13"/>
+          <p:cNvSpPr txBox="1"/>
+          <p:nvPr/>
+        </p:nvSpPr>
+        <p:spPr>
+          <a:xfrm>
+            <a:off x="594360" y="3090672"/>
+            <a:ext cx="4892040" cy="365760"/>
+          </a:xfrm>
+          <a:prstGeom prst="rect">
+            <a:avLst/>
+          </a:prstGeom>
+          <a:noFill/>
+        </p:spPr>
+        <p:txBody>
+          <a:bodyPr wrap="square" lIns="0" rIns="0" tIns="0" bIns="0">
+            <a:spAutoFit/>
+          </a:bodyPr>
+          <a:lstStyle/>
+          <a:p>
+            <a:pPr algn="l"/>
+            <a:r>
+              <a:rPr sz="1200" b="1" i="0">
+                <a:solidFill>
+                  <a:srgbClr val="F5A623"/>
+                </a:solidFill>
+                <a:latin typeface="Calibri"/>
+              </a:rPr>
+              <a:t>Our Story page broke out — massively</a:t>
+            </a:r>
+          </a:p>
+        </p:txBody>
+      </p:sp>
+      <p:sp>
+        <p:nvSpPr>
+          <p:cNvPr id="15" name="TextBox 14"/>
+          <p:cNvSpPr txBox="1"/>
+          <p:nvPr/>
+        </p:nvSpPr>
+        <p:spPr>
+          <a:xfrm>
+            <a:off x="594360" y="3493008"/>
+            <a:ext cx="4754880" cy="822960"/>
+          </a:xfrm>
+          <a:prstGeom prst="rect">
+            <a:avLst/>
+          </a:prstGeom>
+          <a:noFill/>
+        </p:spPr>
+        <p:txBody>
+          <a:bodyPr wrap="square" lIns="0" rIns="0" tIns="0" bIns="0">
+            <a:spAutoFit/>
+          </a:bodyPr>
+          <a:lstStyle/>
+          <a:p>
+            <a:pPr algn="l"/>
+            <a:r>
+              <a:rPr sz="1000" b="0" i="0">
+                <a:solidFill>
+                  <a:srgbClr val="CADCFC"/>
+                </a:solidFill>
+                <a:latin typeface="Calibri"/>
+              </a:rPr>
+              <a:t>our-story.html surged from 514 to 31,990 PVs (+6,122%) in Feb — now the #4 page on the site. 89% of visits were Non-Paid, confirming organic brand curiosity. Visitors flow directly into product pages.</a:t>
+            </a:r>
+          </a:p>
+        </p:txBody>
+      </p:sp>
+      <p:sp>
+        <p:nvSpPr>
+          <p:cNvPr id="16" name="Rectangle 15"/>
+          <p:cNvSpPr/>
+          <p:nvPr/>
+        </p:nvSpPr>
+        <p:spPr>
+          <a:xfrm>
+            <a:off x="411480" y="4572000"/>
+            <a:ext cx="5257800" cy="1389888"/>
+          </a:xfrm>
+          <a:prstGeom prst="rect">
+            <a:avLst/>
+          </a:prstGeom>
+          <a:solidFill>
+            <a:srgbClr val="152B3D"/>
+          </a:solidFill>
+          <a:ln>
+            <a:noFill/>
+          </a:ln>
+        </p:spPr>
+        <p:style>
+          <a:lnRef idx="1">
+            <a:schemeClr val="accent1"/>
+          </a:lnRef>
+          <a:fillRef idx="3">
+            <a:schemeClr val="accent1"/>
+          </a:fillRef>
+          <a:effectRef idx="2">
+            <a:schemeClr val="accent1"/>
+          </a:effectRef>
+          <a:fontRef idx="minor">
+            <a:schemeClr val="lt1"/>
+          </a:fontRef>
+        </p:style>
+        <p:txBody>
+          <a:bodyPr rtlCol="0" anchor="ctr"/>
+          <a:lstStyle/>
+          <a:p>
+            <a:pPr algn="ctr"/>
+          </a:p>
+        </p:txBody>
+      </p:sp>
+      <p:sp>
+        <p:nvSpPr>
+          <p:cNvPr id="17" name="Rectangle 16"/>
+          <p:cNvSpPr/>
+          <p:nvPr/>
+        </p:nvSpPr>
+        <p:spPr>
+          <a:xfrm>
+            <a:off x="411480" y="4572000"/>
+            <a:ext cx="64008" cy="1389888"/>
+          </a:xfrm>
+          <a:prstGeom prst="rect">
+            <a:avLst/>
+          </a:prstGeom>
+          <a:solidFill>
+            <a:srgbClr val="DC2626"/>
+          </a:solidFill>
+          <a:ln>
+            <a:noFill/>
+          </a:ln>
+        </p:spPr>
+        <p:style>
+          <a:lnRef idx="1">
+            <a:schemeClr val="accent1"/>
+          </a:lnRef>
+          <a:fillRef idx="3">
+            <a:schemeClr val="accent1"/>
+          </a:fillRef>
+          <a:effectRef idx="2">
+            <a:schemeClr val="accent1"/>
+          </a:effectRef>
+          <a:fontRef idx="minor">
+            <a:schemeClr val="lt1"/>
+          </a:fontRef>
+        </p:style>
+        <p:txBody>
+          <a:bodyPr rtlCol="0" anchor="ctr"/>
+          <a:lstStyle/>
+          <a:p>
+            <a:pPr algn="ctr"/>
+          </a:p>
+        </p:txBody>
+      </p:sp>
+      <p:sp>
+        <p:nvSpPr>
+          <p:cNvPr id="18" name="TextBox 17"/>
+          <p:cNvSpPr txBox="1"/>
+          <p:nvPr/>
+        </p:nvSpPr>
+        <p:spPr>
+          <a:xfrm>
+            <a:off x="594360" y="4645152"/>
+            <a:ext cx="4892040" cy="365760"/>
+          </a:xfrm>
+          <a:prstGeom prst="rect">
+            <a:avLst/>
+          </a:prstGeom>
+          <a:noFill/>
+        </p:spPr>
+        <p:txBody>
+          <a:bodyPr wrap="square" lIns="0" rIns="0" tIns="0" bIns="0">
+            <a:spAutoFit/>
+          </a:bodyPr>
+          <a:lstStyle/>
+          <a:p>
+            <a:pPr algn="l"/>
+            <a:r>
+              <a:rPr sz="1200" b="1" i="0">
+                <a:solidFill>
+                  <a:srgbClr val="DC2626"/>
+                </a:solidFill>
+                <a:latin typeface="Calibri"/>
+              </a:rPr>
+              <a:t>Bounce rate pressure is rising</a:t>
+            </a:r>
+          </a:p>
+        </p:txBody>
+      </p:sp>
+      <p:sp>
+        <p:nvSpPr>
+          <p:cNvPr id="19" name="TextBox 18"/>
+          <p:cNvSpPr txBox="1"/>
+          <p:nvPr/>
+        </p:nvSpPr>
+        <p:spPr>
+          <a:xfrm>
+            <a:off x="594360" y="5047488"/>
+            <a:ext cx="4754880" cy="822960"/>
+          </a:xfrm>
+          <a:prstGeom prst="rect">
+            <a:avLst/>
+          </a:prstGeom>
+          <a:noFill/>
+        </p:spPr>
+        <p:txBody>
+          <a:bodyPr wrap="square" lIns="0" rIns="0" tIns="0" bIns="0">
+            <a:spAutoFit/>
+          </a:bodyPr>
+          <a:lstStyle/>
+          <a:p>
+            <a:pPr algn="l"/>
+            <a:r>
+              <a:rPr sz="1000" b="0" i="0">
+                <a:solidFill>
+                  <a:srgbClr val="CADCFC"/>
+                </a:solidFill>
+                <a:latin typeface="Calibri"/>
+              </a:rPr>
+              <a:t>Overall bounce rose +3.3pp to 64.3%. Paid-Display BR is stuck at ~70% with no improvement. Non-Paid BR climbed +3.8pp. UK traffic collapsed from 9.2%→2.4% — an EMEA issue requiring urgent investigation.</a:t>
+            </a:r>
+          </a:p>
+        </p:txBody>
+      </p:sp>
+      <p:sp>
+        <p:nvSpPr>
+          <p:cNvPr id="20" name="Rectangle 19"/>
+          <p:cNvSpPr/>
+          <p:nvPr/>
+        </p:nvSpPr>
+        <p:spPr>
+          <a:xfrm>
+            <a:off x="5989320" y="914400"/>
+            <a:ext cx="5879592" cy="5166360"/>
+          </a:xfrm>
+          <a:prstGeom prst="rect">
+            <a:avLst/>
+          </a:prstGeom>
+          <a:solidFill>
+            <a:srgbClr val="1E354A"/>
+          </a:solidFill>
+          <a:ln>
+            <a:noFill/>
+          </a:ln>
+        </p:spPr>
+        <p:style>
+          <a:lnRef idx="1">
+            <a:schemeClr val="accent1"/>
+          </a:lnRef>
+          <a:fillRef idx="3">
+            <a:schemeClr val="accent1"/>
+          </a:fillRef>
+          <a:effectRef idx="2">
+            <a:schemeClr val="accent1"/>
+          </a:effectRef>
+          <a:fontRef idx="minor">
+            <a:schemeClr val="lt1"/>
+          </a:fontRef>
+        </p:style>
+        <p:txBody>
+          <a:bodyPr rtlCol="0" anchor="ctr"/>
+          <a:lstStyle/>
+          <a:p>
+            <a:pPr algn="ctr"/>
+          </a:p>
+        </p:txBody>
+      </p:sp>
+      <p:sp>
+        <p:nvSpPr>
+          <p:cNvPr id="21" name="Rectangle 20"/>
+          <p:cNvSpPr/>
+          <p:nvPr/>
+        </p:nvSpPr>
+        <p:spPr>
+          <a:xfrm>
+            <a:off x="5989320" y="914400"/>
+            <a:ext cx="5879592" cy="64008"/>
+          </a:xfrm>
+          <a:prstGeom prst="rect">
+            <a:avLst/>
+          </a:prstGeom>
+          <a:solidFill>
+            <a:srgbClr val="F5A623"/>
+          </a:solidFill>
+          <a:ln>
+            <a:noFill/>
+          </a:ln>
+        </p:spPr>
+        <p:style>
+          <a:lnRef idx="1">
+            <a:schemeClr val="accent1"/>
+          </a:lnRef>
+          <a:fillRef idx="3">
+            <a:schemeClr val="accent1"/>
+          </a:fillRef>
+          <a:effectRef idx="2">
+            <a:schemeClr val="accent1"/>
+          </a:effectRef>
+          <a:fontRef idx="minor">
+            <a:schemeClr val="lt1"/>
+          </a:fontRef>
+        </p:style>
+        <p:txBody>
+          <a:bodyPr rtlCol="0" anchor="ctr"/>
+          <a:lstStyle/>
+          <a:p>
+            <a:pPr algn="ctr"/>
+          </a:p>
+        </p:txBody>
+      </p:sp>
+      <p:sp>
+        <p:nvSpPr>
+          <p:cNvPr id="22" name="TextBox 21"/>
+          <p:cNvSpPr txBox="1"/>
+          <p:nvPr/>
+        </p:nvSpPr>
+        <p:spPr>
+          <a:xfrm>
+            <a:off x="6172200" y="1005840"/>
+            <a:ext cx="5486400" cy="384048"/>
+          </a:xfrm>
+          <a:prstGeom prst="rect">
+            <a:avLst/>
+          </a:prstGeom>
+          <a:noFill/>
+        </p:spPr>
+        <p:txBody>
+          <a:bodyPr wrap="square" lIns="0" rIns="0" tIns="0" bIns="0">
+            <a:spAutoFit/>
+          </a:bodyPr>
+          <a:lstStyle/>
+          <a:p>
+            <a:pPr algn="l"/>
+            <a:r>
+              <a:rPr sz="1400" b="1" i="0">
+                <a:solidFill>
+                  <a:srgbClr val="F5A623"/>
+                </a:solidFill>
+                <a:latin typeface="Calibri"/>
+              </a:rPr>
+              <a:t>Top 6 Priorities</a:t>
+            </a:r>
+          </a:p>
+        </p:txBody>
+      </p:sp>
+      <p:sp>
+        <p:nvSpPr>
+          <p:cNvPr id="23" name="Rectangle 22"/>
+          <p:cNvSpPr/>
+          <p:nvPr/>
+        </p:nvSpPr>
+        <p:spPr>
+          <a:xfrm>
+            <a:off x="6080760" y="1481328"/>
+            <a:ext cx="5696712" cy="713232"/>
+          </a:xfrm>
+          <a:prstGeom prst="rect">
+            <a:avLst/>
+          </a:prstGeom>
+          <a:solidFill>
+            <a:srgbClr val="152B3D"/>
+          </a:solidFill>
+          <a:ln>
+            <a:noFill/>
+          </a:ln>
+        </p:spPr>
+        <p:style>
+          <a:lnRef idx="1">
+            <a:schemeClr val="accent1"/>
+          </a:lnRef>
+          <a:fillRef idx="3">
+            <a:schemeClr val="accent1"/>
+          </a:fillRef>
+          <a:effectRef idx="2">
+            <a:schemeClr val="accent1"/>
+          </a:effectRef>
+          <a:fontRef idx="minor">
+            <a:schemeClr val="lt1"/>
+          </a:fontRef>
+        </p:style>
+        <p:txBody>
+          <a:bodyPr rtlCol="0" anchor="ctr"/>
+          <a:lstStyle/>
+          <a:p>
+            <a:pPr algn="ctr"/>
+          </a:p>
+        </p:txBody>
+      </p:sp>
+      <p:sp>
+        <p:nvSpPr>
+          <p:cNvPr id="24" name="Rectangle 23"/>
+          <p:cNvSpPr/>
+          <p:nvPr/>
+        </p:nvSpPr>
+        <p:spPr>
+          <a:xfrm>
+            <a:off x="6080760" y="1481328"/>
+            <a:ext cx="438912" cy="713232"/>
+          </a:xfrm>
+          <a:prstGeom prst="rect">
+            <a:avLst/>
+          </a:prstGeom>
+          <a:solidFill>
+            <a:srgbClr val="DC2626"/>
+          </a:solidFill>
+          <a:ln>
+            <a:noFill/>
+          </a:ln>
+        </p:spPr>
+        <p:style>
+          <a:lnRef idx="1">
+            <a:schemeClr val="accent1"/>
+          </a:lnRef>
+          <a:fillRef idx="3">
+            <a:schemeClr val="accent1"/>
+          </a:fillRef>
+          <a:effectRef idx="2">
+            <a:schemeClr val="accent1"/>
+          </a:effectRef>
+          <a:fontRef idx="minor">
+            <a:schemeClr val="lt1"/>
+          </a:fontRef>
+        </p:style>
+        <p:txBody>
+          <a:bodyPr rtlCol="0" anchor="ctr"/>
+          <a:lstStyle/>
+          <a:p>
+            <a:pPr algn="ctr"/>
+          </a:p>
+        </p:txBody>
+      </p:sp>
+      <p:sp>
+        <p:nvSpPr>
+          <p:cNvPr id="25" name="TextBox 24"/>
+          <p:cNvSpPr txBox="1"/>
+          <p:nvPr/>
+        </p:nvSpPr>
+        <p:spPr>
+          <a:xfrm>
+            <a:off x="6089904" y="1645920"/>
+            <a:ext cx="420624" cy="347472"/>
+          </a:xfrm>
+          <a:prstGeom prst="rect">
+            <a:avLst/>
+          </a:prstGeom>
+          <a:noFill/>
+        </p:spPr>
+        <p:txBody>
+          <a:bodyPr wrap="square" lIns="0" rIns="0" tIns="0" bIns="0">
+            <a:spAutoFit/>
+          </a:bodyPr>
+          <a:lstStyle/>
+          <a:p>
+            <a:pPr algn="ctr"/>
+            <a:r>
+              <a:rPr sz="1100" b="1" i="0">
+                <a:solidFill>
+                  <a:srgbClr val="FFFFFF"/>
+                </a:solidFill>
+                <a:latin typeface="Calibri"/>
+              </a:rPr>
+              <a:t>P1</a:t>
+            </a:r>
+          </a:p>
+        </p:txBody>
+      </p:sp>
+      <p:sp>
+        <p:nvSpPr>
+          <p:cNvPr id="26" name="TextBox 25"/>
+          <p:cNvSpPr txBox="1"/>
+          <p:nvPr/>
+        </p:nvSpPr>
+        <p:spPr>
+          <a:xfrm>
+            <a:off x="6601968" y="1536192"/>
+            <a:ext cx="4846320" cy="292608"/>
+          </a:xfrm>
+          <a:prstGeom prst="rect">
+            <a:avLst/>
+          </a:prstGeom>
+          <a:noFill/>
+        </p:spPr>
+        <p:txBody>
+          <a:bodyPr wrap="square" lIns="0" rIns="0" tIns="0" bIns="0">
+            <a:spAutoFit/>
+          </a:bodyPr>
+          <a:lstStyle/>
+          <a:p>
+            <a:pPr algn="l"/>
+            <a:r>
+              <a:rPr sz="1100" b="1" i="0">
+                <a:solidFill>
+                  <a:srgbClr val="DC2626"/>
+                </a:solidFill>
+                <a:latin typeface="Calibri"/>
+              </a:rPr>
+              <a:t>Fix Paid / Display</a:t>
+            </a:r>
+          </a:p>
+        </p:txBody>
+      </p:sp>
+      <p:sp>
+        <p:nvSpPr>
+          <p:cNvPr id="27" name="TextBox 26"/>
+          <p:cNvSpPr txBox="1"/>
+          <p:nvPr/>
+        </p:nvSpPr>
+        <p:spPr>
+          <a:xfrm>
+            <a:off x="6601968" y="1847088"/>
+            <a:ext cx="4846320" cy="274320"/>
+          </a:xfrm>
+          <a:prstGeom prst="rect">
+            <a:avLst/>
+          </a:prstGeom>
+          <a:noFill/>
+        </p:spPr>
+        <p:txBody>
+          <a:bodyPr wrap="square" lIns="0" rIns="0" tIns="0" bIns="0">
+            <a:spAutoFit/>
+          </a:bodyPr>
+          <a:lstStyle/>
+          <a:p>
+            <a:pPr algn="l"/>
+            <a:r>
+              <a:rPr sz="900" b="0" i="0">
+                <a:solidFill>
+                  <a:srgbClr val="CADCFC"/>
+                </a:solidFill>
+                <a:latin typeface="Calibri"/>
+              </a:rPr>
+              <a:t>BR 70.6% — rebuild landing pages or cut spend</a:t>
+            </a:r>
+          </a:p>
+        </p:txBody>
+      </p:sp>
+      <p:sp>
+        <p:nvSpPr>
+          <p:cNvPr id="28" name="Rectangle 27"/>
+          <p:cNvSpPr/>
+          <p:nvPr/>
+        </p:nvSpPr>
+        <p:spPr>
+          <a:xfrm>
+            <a:off x="6080760" y="2286000"/>
+            <a:ext cx="5696712" cy="713232"/>
+          </a:xfrm>
+          <a:prstGeom prst="rect">
+            <a:avLst/>
+          </a:prstGeom>
+          <a:solidFill>
+            <a:srgbClr val="152B3D"/>
+          </a:solidFill>
+          <a:ln>
+            <a:noFill/>
+          </a:ln>
+        </p:spPr>
+        <p:style>
+          <a:lnRef idx="1">
+            <a:schemeClr val="accent1"/>
+          </a:lnRef>
+          <a:fillRef idx="3">
+            <a:schemeClr val="accent1"/>
+          </a:fillRef>
+          <a:effectRef idx="2">
+            <a:schemeClr val="accent1"/>
+          </a:effectRef>
+          <a:fontRef idx="minor">
+            <a:schemeClr val="lt1"/>
+          </a:fontRef>
+        </p:style>
+        <p:txBody>
+          <a:bodyPr rtlCol="0" anchor="ctr"/>
+          <a:lstStyle/>
+          <a:p>
+            <a:pPr algn="ctr"/>
+          </a:p>
+        </p:txBody>
+      </p:sp>
+      <p:sp>
+        <p:nvSpPr>
+          <p:cNvPr id="29" name="Rectangle 28"/>
+          <p:cNvSpPr/>
+          <p:nvPr/>
+        </p:nvSpPr>
+        <p:spPr>
+          <a:xfrm>
+            <a:off x="6080760" y="2286000"/>
+            <a:ext cx="438912" cy="713232"/>
+          </a:xfrm>
+          <a:prstGeom prst="rect">
+            <a:avLst/>
+          </a:prstGeom>
+          <a:solidFill>
+            <a:srgbClr val="1C7293"/>
+          </a:solidFill>
+          <a:ln>
+            <a:noFill/>
+          </a:ln>
+        </p:spPr>
+        <p:style>
+          <a:lnRef idx="1">
+            <a:schemeClr val="accent1"/>
+          </a:lnRef>
+          <a:fillRef idx="3">
+            <a:schemeClr val="accent1"/>
+          </a:fillRef>
+          <a:effectRef idx="2">
+            <a:schemeClr val="accent1"/>
+          </a:effectRef>
+          <a:fontRef idx="minor">
+            <a:schemeClr val="lt1"/>
+          </a:fontRef>
+        </p:style>
+        <p:txBody>
+          <a:bodyPr rtlCol="0" anchor="ctr"/>
+          <a:lstStyle/>
+          <a:p>
+            <a:pPr algn="ctr"/>
+          </a:p>
+        </p:txBody>
+      </p:sp>
+      <p:sp>
+        <p:nvSpPr>
+          <p:cNvPr id="30" name="TextBox 29"/>
+          <p:cNvSpPr txBox="1"/>
+          <p:nvPr/>
+        </p:nvSpPr>
+        <p:spPr>
+          <a:xfrm>
+            <a:off x="6089904" y="2450592"/>
+            <a:ext cx="420624" cy="347472"/>
+          </a:xfrm>
+          <a:prstGeom prst="rect">
+            <a:avLst/>
+          </a:prstGeom>
+          <a:noFill/>
+        </p:spPr>
+        <p:txBody>
+          <a:bodyPr wrap="square" lIns="0" rIns="0" tIns="0" bIns="0">
+            <a:spAutoFit/>
+          </a:bodyPr>
+          <a:lstStyle/>
+          <a:p>
+            <a:pPr algn="ctr"/>
+            <a:r>
+              <a:rPr sz="1100" b="1" i="0">
+                <a:solidFill>
+                  <a:srgbClr val="FFFFFF"/>
+                </a:solidFill>
+                <a:latin typeface="Calibri"/>
+              </a:rPr>
+              <a:t>P2</a:t>
+            </a:r>
+          </a:p>
+        </p:txBody>
+      </p:sp>
+      <p:sp>
+        <p:nvSpPr>
+          <p:cNvPr id="31" name="TextBox 30"/>
+          <p:cNvSpPr txBox="1"/>
+          <p:nvPr/>
+        </p:nvSpPr>
+        <p:spPr>
+          <a:xfrm>
+            <a:off x="6601968" y="2340864"/>
+            <a:ext cx="4846320" cy="292608"/>
+          </a:xfrm>
+          <a:prstGeom prst="rect">
+            <a:avLst/>
+          </a:prstGeom>
+          <a:noFill/>
+        </p:spPr>
+        <p:txBody>
+          <a:bodyPr wrap="square" lIns="0" rIns="0" tIns="0" bIns="0">
+            <a:spAutoFit/>
+          </a:bodyPr>
+          <a:lstStyle/>
+          <a:p>
+            <a:pPr algn="l"/>
+            <a:r>
+              <a:rPr sz="1100" b="1" i="0">
+                <a:solidFill>
+                  <a:srgbClr val="1C7293"/>
+                </a:solidFill>
+                <a:latin typeface="Calibri"/>
+              </a:rPr>
+              <a:t>Double-down on Organic SEO</a:t>
+            </a:r>
+          </a:p>
+        </p:txBody>
+      </p:sp>
+      <p:sp>
+        <p:nvSpPr>
+          <p:cNvPr id="32" name="TextBox 31"/>
+          <p:cNvSpPr txBox="1"/>
+          <p:nvPr/>
+        </p:nvSpPr>
+        <p:spPr>
+          <a:xfrm>
+            <a:off x="6601968" y="2651760"/>
+            <a:ext cx="4846320" cy="274320"/>
+          </a:xfrm>
+          <a:prstGeom prst="rect">
+            <a:avLst/>
+          </a:prstGeom>
+          <a:noFill/>
+        </p:spPr>
+        <p:txBody>
+          <a:bodyPr wrap="square" lIns="0" rIns="0" tIns="0" bIns="0">
+            <a:spAutoFit/>
+          </a:bodyPr>
+          <a:lstStyle/>
+          <a:p>
+            <a:pPr algn="l"/>
+            <a:r>
+              <a:rPr sz="900" b="0" i="0">
+                <a:solidFill>
+                  <a:srgbClr val="CADCFC"/>
+                </a:solidFill>
+                <a:latin typeface="Calibri"/>
+              </a:rPr>
+              <a:t>BR 48.5% — best quality; invest in AI/Edge content</a:t>
+            </a:r>
+          </a:p>
+        </p:txBody>
+      </p:sp>
+      <p:sp>
+        <p:nvSpPr>
+          <p:cNvPr id="33" name="Rectangle 32"/>
+          <p:cNvSpPr/>
+          <p:nvPr/>
+        </p:nvSpPr>
+        <p:spPr>
+          <a:xfrm>
+            <a:off x="6080760" y="3090672"/>
+            <a:ext cx="5696712" cy="713232"/>
+          </a:xfrm>
+          <a:prstGeom prst="rect">
+            <a:avLst/>
+          </a:prstGeom>
+          <a:solidFill>
+            <a:srgbClr val="152B3D"/>
+          </a:solidFill>
+          <a:ln>
+            <a:noFill/>
+          </a:ln>
+        </p:spPr>
+        <p:style>
+          <a:lnRef idx="1">
+            <a:schemeClr val="accent1"/>
+          </a:lnRef>
+          <a:fillRef idx="3">
+            <a:schemeClr val="accent1"/>
+          </a:fillRef>
+          <a:effectRef idx="2">
+            <a:schemeClr val="accent1"/>
+          </a:effectRef>
+          <a:fontRef idx="minor">
+            <a:schemeClr val="lt1"/>
+          </a:fontRef>
+        </p:style>
+        <p:txBody>
+          <a:bodyPr rtlCol="0" anchor="ctr"/>
+          <a:lstStyle/>
+          <a:p>
+            <a:pPr algn="ctr"/>
+          </a:p>
+        </p:txBody>
+      </p:sp>
+      <p:sp>
+        <p:nvSpPr>
+          <p:cNvPr id="34" name="Rectangle 33"/>
+          <p:cNvSpPr/>
+          <p:nvPr/>
+        </p:nvSpPr>
+        <p:spPr>
+          <a:xfrm>
+            <a:off x="6080760" y="3090672"/>
+            <a:ext cx="438912" cy="713232"/>
+          </a:xfrm>
+          <a:prstGeom prst="rect">
+            <a:avLst/>
+          </a:prstGeom>
+          <a:solidFill>
+            <a:srgbClr val="D97706"/>
+          </a:solidFill>
+          <a:ln>
+            <a:noFill/>
+          </a:ln>
+        </p:spPr>
+        <p:style>
+          <a:lnRef idx="1">
+            <a:schemeClr val="accent1"/>
+          </a:lnRef>
+          <a:fillRef idx="3">
+            <a:schemeClr val="accent1"/>
+          </a:fillRef>
+          <a:effectRef idx="2">
+            <a:schemeClr val="accent1"/>
+          </a:effectRef>
+          <a:fontRef idx="minor">
+            <a:schemeClr val="lt1"/>
+          </a:fontRef>
+        </p:style>
+        <p:txBody>
+          <a:bodyPr rtlCol="0" anchor="ctr"/>
+          <a:lstStyle/>
+          <a:p>
+            <a:pPr algn="ctr"/>
+          </a:p>
+        </p:txBody>
+      </p:sp>
+      <p:sp>
+        <p:nvSpPr>
+          <p:cNvPr id="35" name="TextBox 34"/>
+          <p:cNvSpPr txBox="1"/>
+          <p:nvPr/>
+        </p:nvSpPr>
+        <p:spPr>
+          <a:xfrm>
+            <a:off x="6089904" y="3255264"/>
+            <a:ext cx="420624" cy="347472"/>
+          </a:xfrm>
+          <a:prstGeom prst="rect">
+            <a:avLst/>
+          </a:prstGeom>
+          <a:noFill/>
+        </p:spPr>
+        <p:txBody>
+          <a:bodyPr wrap="square" lIns="0" rIns="0" tIns="0" bIns="0">
+            <a:spAutoFit/>
+          </a:bodyPr>
+          <a:lstStyle/>
+          <a:p>
+            <a:pPr algn="ctr"/>
+            <a:r>
+              <a:rPr sz="1100" b="1" i="0">
+                <a:solidFill>
+                  <a:srgbClr val="FFFFFF"/>
+                </a:solidFill>
+                <a:latin typeface="Calibri"/>
+              </a:rPr>
+              <a:t>P3</a:t>
+            </a:r>
+          </a:p>
+        </p:txBody>
+      </p:sp>
+      <p:sp>
+        <p:nvSpPr>
+          <p:cNvPr id="36" name="TextBox 35"/>
+          <p:cNvSpPr txBox="1"/>
+          <p:nvPr/>
+        </p:nvSpPr>
+        <p:spPr>
+          <a:xfrm>
+            <a:off x="6601968" y="3145536"/>
+            <a:ext cx="4846320" cy="292608"/>
+          </a:xfrm>
+          <a:prstGeom prst="rect">
+            <a:avLst/>
+          </a:prstGeom>
+          <a:noFill/>
+        </p:spPr>
+        <p:txBody>
+          <a:bodyPr wrap="square" lIns="0" rIns="0" tIns="0" bIns="0">
+            <a:spAutoFit/>
+          </a:bodyPr>
+          <a:lstStyle/>
+          <a:p>
+            <a:pPr algn="l"/>
+            <a:r>
+              <a:rPr sz="1100" b="1" i="0">
+                <a:solidFill>
+                  <a:srgbClr val="D97706"/>
+                </a:solidFill>
+                <a:latin typeface="Calibri"/>
+              </a:rPr>
+              <a:t>Mobile UX Audit</a:t>
+            </a:r>
+          </a:p>
+        </p:txBody>
+      </p:sp>
+      <p:sp>
+        <p:nvSpPr>
+          <p:cNvPr id="37" name="TextBox 36"/>
+          <p:cNvSpPr txBox="1"/>
+          <p:nvPr/>
+        </p:nvSpPr>
+        <p:spPr>
+          <a:xfrm>
+            <a:off x="6601968" y="3456432"/>
+            <a:ext cx="4846320" cy="274320"/>
+          </a:xfrm>
+          <a:prstGeom prst="rect">
+            <a:avLst/>
+          </a:prstGeom>
+          <a:noFill/>
+        </p:spPr>
+        <p:txBody>
+          <a:bodyPr wrap="square" lIns="0" rIns="0" tIns="0" bIns="0">
+            <a:spAutoFit/>
+          </a:bodyPr>
+          <a:lstStyle/>
+          <a:p>
+            <a:pPr algn="l"/>
+            <a:r>
+              <a:rPr sz="900" b="0" i="0">
+                <a:solidFill>
+                  <a:srgbClr val="CADCFC"/>
+                </a:solidFill>
+                <a:latin typeface="Calibri"/>
+              </a:rPr>
+              <a:t>52.6% of traffic; PPV lags desktop (1.79 vs 2.17)</a:t>
+            </a:r>
+          </a:p>
+        </p:txBody>
+      </p:sp>
+      <p:sp>
+        <p:nvSpPr>
+          <p:cNvPr id="38" name="Rectangle 37"/>
+          <p:cNvSpPr/>
+          <p:nvPr/>
+        </p:nvSpPr>
+        <p:spPr>
+          <a:xfrm>
+            <a:off x="6080760" y="3895344"/>
+            <a:ext cx="5696712" cy="713232"/>
+          </a:xfrm>
+          <a:prstGeom prst="rect">
+            <a:avLst/>
+          </a:prstGeom>
+          <a:solidFill>
+            <a:srgbClr val="152B3D"/>
+          </a:solidFill>
+          <a:ln>
+            <a:noFill/>
+          </a:ln>
+        </p:spPr>
+        <p:style>
+          <a:lnRef idx="1">
+            <a:schemeClr val="accent1"/>
+          </a:lnRef>
+          <a:fillRef idx="3">
+            <a:schemeClr val="accent1"/>
+          </a:fillRef>
+          <a:effectRef idx="2">
+            <a:schemeClr val="accent1"/>
+          </a:effectRef>
+          <a:fontRef idx="minor">
+            <a:schemeClr val="lt1"/>
+          </a:fontRef>
+        </p:style>
+        <p:txBody>
+          <a:bodyPr rtlCol="0" anchor="ctr"/>
+          <a:lstStyle/>
+          <a:p>
+            <a:pPr algn="ctr"/>
+          </a:p>
+        </p:txBody>
+      </p:sp>
+      <p:sp>
+        <p:nvSpPr>
+          <p:cNvPr id="39" name="Rectangle 38"/>
+          <p:cNvSpPr/>
+          <p:nvPr/>
+        </p:nvSpPr>
+        <p:spPr>
+          <a:xfrm>
+            <a:off x="6080760" y="3895344"/>
+            <a:ext cx="438912" cy="713232"/>
+          </a:xfrm>
+          <a:prstGeom prst="rect">
+            <a:avLst/>
+          </a:prstGeom>
+          <a:solidFill>
+            <a:srgbClr val="065A82"/>
+          </a:solidFill>
+          <a:ln>
+            <a:noFill/>
+          </a:ln>
+        </p:spPr>
+        <p:style>
+          <a:lnRef idx="1">
+            <a:schemeClr val="accent1"/>
+          </a:lnRef>
+          <a:fillRef idx="3">
+            <a:schemeClr val="accent1"/>
+          </a:fillRef>
+          <a:effectRef idx="2">
+            <a:schemeClr val="accent1"/>
+          </a:effectRef>
+          <a:fontRef idx="minor">
+            <a:schemeClr val="lt1"/>
+          </a:fontRef>
+        </p:style>
+        <p:txBody>
+          <a:bodyPr rtlCol="0" anchor="ctr"/>
+          <a:lstStyle/>
+          <a:p>
+            <a:pPr algn="ctr"/>
+          </a:p>
+        </p:txBody>
+      </p:sp>
+      <p:sp>
+        <p:nvSpPr>
+          <p:cNvPr id="40" name="TextBox 39"/>
+          <p:cNvSpPr txBox="1"/>
+          <p:nvPr/>
+        </p:nvSpPr>
+        <p:spPr>
+          <a:xfrm>
+            <a:off x="6089904" y="4059935"/>
+            <a:ext cx="420624" cy="347472"/>
+          </a:xfrm>
+          <a:prstGeom prst="rect">
+            <a:avLst/>
+          </a:prstGeom>
+          <a:noFill/>
+        </p:spPr>
+        <p:txBody>
+          <a:bodyPr wrap="square" lIns="0" rIns="0" tIns="0" bIns="0">
+            <a:spAutoFit/>
+          </a:bodyPr>
+          <a:lstStyle/>
+          <a:p>
+            <a:pPr algn="ctr"/>
+            <a:r>
+              <a:rPr sz="1100" b="1" i="0">
+                <a:solidFill>
+                  <a:srgbClr val="FFFFFF"/>
+                </a:solidFill>
+                <a:latin typeface="Calibri"/>
+              </a:rPr>
+              <a:t>P4</a:t>
+            </a:r>
+          </a:p>
+        </p:txBody>
+      </p:sp>
+      <p:sp>
+        <p:nvSpPr>
+          <p:cNvPr id="41" name="TextBox 40"/>
+          <p:cNvSpPr txBox="1"/>
+          <p:nvPr/>
+        </p:nvSpPr>
+        <p:spPr>
+          <a:xfrm>
+            <a:off x="6601968" y="3950207"/>
+            <a:ext cx="4846320" cy="292608"/>
+          </a:xfrm>
+          <a:prstGeom prst="rect">
+            <a:avLst/>
+          </a:prstGeom>
+          <a:noFill/>
+        </p:spPr>
+        <p:txBody>
+          <a:bodyPr wrap="square" lIns="0" rIns="0" tIns="0" bIns="0">
+            <a:spAutoFit/>
+          </a:bodyPr>
+          <a:lstStyle/>
+          <a:p>
+            <a:pPr algn="l"/>
+            <a:r>
+              <a:rPr sz="1100" b="1" i="0">
+                <a:solidFill>
+                  <a:srgbClr val="065A82"/>
+                </a:solidFill>
+                <a:latin typeface="Calibri"/>
+              </a:rPr>
+              <a:t>Amplify Our Story page</a:t>
+            </a:r>
+          </a:p>
+        </p:txBody>
+      </p:sp>
+      <p:sp>
+        <p:nvSpPr>
+          <p:cNvPr id="42" name="TextBox 41"/>
+          <p:cNvSpPr txBox="1"/>
+          <p:nvPr/>
+        </p:nvSpPr>
+        <p:spPr>
+          <a:xfrm>
+            <a:off x="6601968" y="4261104"/>
+            <a:ext cx="4846320" cy="274320"/>
+          </a:xfrm>
+          <a:prstGeom prst="rect">
+            <a:avLst/>
+          </a:prstGeom>
+          <a:noFill/>
+        </p:spPr>
+        <p:txBody>
+          <a:bodyPr wrap="square" lIns="0" rIns="0" tIns="0" bIns="0">
+            <a:spAutoFit/>
+          </a:bodyPr>
+          <a:lstStyle/>
+          <a:p>
+            <a:pPr algn="l"/>
+            <a:r>
+              <a:rPr sz="900" b="0" i="0">
+                <a:solidFill>
+                  <a:srgbClr val="CADCFC"/>
+                </a:solidFill>
+                <a:latin typeface="Calibri"/>
+              </a:rPr>
+              <a:t>39.5% multi-page rate — add video + CTAs</a:t>
+            </a:r>
+          </a:p>
+        </p:txBody>
+      </p:sp>
+      <p:sp>
+        <p:nvSpPr>
+          <p:cNvPr id="43" name="Rectangle 42"/>
+          <p:cNvSpPr/>
+          <p:nvPr/>
+        </p:nvSpPr>
+        <p:spPr>
+          <a:xfrm>
+            <a:off x="6080760" y="4700016"/>
+            <a:ext cx="5696712" cy="713232"/>
+          </a:xfrm>
+          <a:prstGeom prst="rect">
+            <a:avLst/>
+          </a:prstGeom>
+          <a:solidFill>
+            <a:srgbClr val="152B3D"/>
+          </a:solidFill>
+          <a:ln>
+            <a:noFill/>
+          </a:ln>
+        </p:spPr>
+        <p:style>
+          <a:lnRef idx="1">
+            <a:schemeClr val="accent1"/>
+          </a:lnRef>
+          <a:fillRef idx="3">
+            <a:schemeClr val="accent1"/>
+          </a:fillRef>
+          <a:effectRef idx="2">
+            <a:schemeClr val="accent1"/>
+          </a:effectRef>
+          <a:fontRef idx="minor">
+            <a:schemeClr val="lt1"/>
+          </a:fontRef>
+        </p:style>
+        <p:txBody>
+          <a:bodyPr rtlCol="0" anchor="ctr"/>
+          <a:lstStyle/>
+          <a:p>
+            <a:pPr algn="ctr"/>
+          </a:p>
+        </p:txBody>
+      </p:sp>
+      <p:sp>
+        <p:nvSpPr>
+          <p:cNvPr id="44" name="Rectangle 43"/>
+          <p:cNvSpPr/>
+          <p:nvPr/>
+        </p:nvSpPr>
+        <p:spPr>
+          <a:xfrm>
+            <a:off x="6080760" y="4700016"/>
+            <a:ext cx="438912" cy="713232"/>
+          </a:xfrm>
+          <a:prstGeom prst="rect">
+            <a:avLst/>
+          </a:prstGeom>
+          <a:solidFill>
+            <a:srgbClr val="059669"/>
+          </a:solidFill>
+          <a:ln>
+            <a:noFill/>
+          </a:ln>
+        </p:spPr>
+        <p:style>
+          <a:lnRef idx="1">
+            <a:schemeClr val="accent1"/>
+          </a:lnRef>
+          <a:fillRef idx="3">
+            <a:schemeClr val="accent1"/>
+          </a:fillRef>
+          <a:effectRef idx="2">
+            <a:schemeClr val="accent1"/>
+          </a:effectRef>
+          <a:fontRef idx="minor">
+            <a:schemeClr val="lt1"/>
+          </a:fontRef>
+        </p:style>
+        <p:txBody>
+          <a:bodyPr rtlCol="0" anchor="ctr"/>
+          <a:lstStyle/>
+          <a:p>
+            <a:pPr algn="ctr"/>
+          </a:p>
+        </p:txBody>
+      </p:sp>
+      <p:sp>
+        <p:nvSpPr>
+          <p:cNvPr id="45" name="TextBox 44"/>
+          <p:cNvSpPr txBox="1"/>
+          <p:nvPr/>
+        </p:nvSpPr>
+        <p:spPr>
+          <a:xfrm>
+            <a:off x="6089904" y="4864608"/>
+            <a:ext cx="420624" cy="347472"/>
+          </a:xfrm>
+          <a:prstGeom prst="rect">
+            <a:avLst/>
+          </a:prstGeom>
+          <a:noFill/>
+        </p:spPr>
+        <p:txBody>
+          <a:bodyPr wrap="square" lIns="0" rIns="0" tIns="0" bIns="0">
+            <a:spAutoFit/>
+          </a:bodyPr>
+          <a:lstStyle/>
+          <a:p>
+            <a:pPr algn="ctr"/>
+            <a:r>
+              <a:rPr sz="1100" b="1" i="0">
+                <a:solidFill>
+                  <a:srgbClr val="FFFFFF"/>
+                </a:solidFill>
+                <a:latin typeface="Calibri"/>
+              </a:rPr>
+              <a:t>P5</a:t>
+            </a:r>
+          </a:p>
+        </p:txBody>
+      </p:sp>
+      <p:sp>
+        <p:nvSpPr>
+          <p:cNvPr id="46" name="TextBox 45"/>
+          <p:cNvSpPr txBox="1"/>
+          <p:nvPr/>
+        </p:nvSpPr>
+        <p:spPr>
+          <a:xfrm>
+            <a:off x="6601968" y="4754880"/>
+            <a:ext cx="4846320" cy="292608"/>
+          </a:xfrm>
+          <a:prstGeom prst="rect">
+            <a:avLst/>
+          </a:prstGeom>
+          <a:noFill/>
+        </p:spPr>
+        <p:txBody>
+          <a:bodyPr wrap="square" lIns="0" rIns="0" tIns="0" bIns="0">
+            <a:spAutoFit/>
+          </a:bodyPr>
+          <a:lstStyle/>
+          <a:p>
+            <a:pPr algn="l"/>
+            <a:r>
+              <a:rPr sz="1100" b="1" i="0">
+                <a:solidFill>
+                  <a:srgbClr val="059669"/>
+                </a:solidFill>
+                <a:latin typeface="Calibri"/>
+              </a:rPr>
+              <a:t>Investigate EMEA collapse</a:t>
+            </a:r>
+          </a:p>
+        </p:txBody>
+      </p:sp>
+      <p:sp>
+        <p:nvSpPr>
+          <p:cNvPr id="47" name="TextBox 46"/>
+          <p:cNvSpPr txBox="1"/>
+          <p:nvPr/>
+        </p:nvSpPr>
+        <p:spPr>
+          <a:xfrm>
+            <a:off x="6601968" y="5065776"/>
+            <a:ext cx="4846320" cy="274320"/>
+          </a:xfrm>
+          <a:prstGeom prst="rect">
+            <a:avLst/>
+          </a:prstGeom>
+          <a:noFill/>
+        </p:spPr>
+        <p:txBody>
+          <a:bodyPr wrap="square" lIns="0" rIns="0" tIns="0" bIns="0">
+            <a:spAutoFit/>
+          </a:bodyPr>
+          <a:lstStyle/>
+          <a:p>
+            <a:pPr algn="l"/>
+            <a:r>
+              <a:rPr sz="900" b="0" i="0">
+                <a:solidFill>
+                  <a:srgbClr val="CADCFC"/>
+                </a:solidFill>
+                <a:latin typeface="Calibri"/>
+              </a:rPr>
+              <a:t>UK -6.8pp + Germany -1.8pp in one month</a:t>
+            </a:r>
+          </a:p>
+        </p:txBody>
+      </p:sp>
+      <p:sp>
+        <p:nvSpPr>
+          <p:cNvPr id="48" name="Rectangle 47"/>
+          <p:cNvSpPr/>
+          <p:nvPr/>
+        </p:nvSpPr>
+        <p:spPr>
+          <a:xfrm>
+            <a:off x="6080760" y="5504688"/>
+            <a:ext cx="5696712" cy="713232"/>
+          </a:xfrm>
+          <a:prstGeom prst="rect">
+            <a:avLst/>
+          </a:prstGeom>
+          <a:solidFill>
+            <a:srgbClr val="152B3D"/>
+          </a:solidFill>
+          <a:ln>
+            <a:noFill/>
+          </a:ln>
+        </p:spPr>
+        <p:style>
+          <a:lnRef idx="1">
+            <a:schemeClr val="accent1"/>
+          </a:lnRef>
+          <a:fillRef idx="3">
+            <a:schemeClr val="accent1"/>
+          </a:fillRef>
+          <a:effectRef idx="2">
+            <a:schemeClr val="accent1"/>
+          </a:effectRef>
+          <a:fontRef idx="minor">
+            <a:schemeClr val="lt1"/>
+          </a:fontRef>
+        </p:style>
+        <p:txBody>
+          <a:bodyPr rtlCol="0" anchor="ctr"/>
+          <a:lstStyle/>
+          <a:p>
+            <a:pPr algn="ctr"/>
+          </a:p>
+        </p:txBody>
+      </p:sp>
+      <p:sp>
+        <p:nvSpPr>
+          <p:cNvPr id="49" name="Rectangle 48"/>
+          <p:cNvSpPr/>
+          <p:nvPr/>
+        </p:nvSpPr>
+        <p:spPr>
+          <a:xfrm>
+            <a:off x="6080760" y="5504688"/>
+            <a:ext cx="438912" cy="713232"/>
+          </a:xfrm>
+          <a:prstGeom prst="rect">
+            <a:avLst/>
+          </a:prstGeom>
+          <a:solidFill>
+            <a:srgbClr val="F5A623"/>
+          </a:solidFill>
+          <a:ln>
+            <a:noFill/>
+          </a:ln>
+        </p:spPr>
+        <p:style>
+          <a:lnRef idx="1">
+            <a:schemeClr val="accent1"/>
+          </a:lnRef>
+          <a:fillRef idx="3">
+            <a:schemeClr val="accent1"/>
+          </a:fillRef>
+          <a:effectRef idx="2">
+            <a:schemeClr val="accent1"/>
+          </a:effectRef>
+          <a:fontRef idx="minor">
+            <a:schemeClr val="lt1"/>
+          </a:fontRef>
+        </p:style>
+        <p:txBody>
+          <a:bodyPr rtlCol="0" anchor="ctr"/>
+          <a:lstStyle/>
+          <a:p>
+            <a:pPr algn="ctr"/>
+          </a:p>
+        </p:txBody>
+      </p:sp>
+      <p:sp>
+        <p:nvSpPr>
+          <p:cNvPr id="50" name="TextBox 49"/>
+          <p:cNvSpPr txBox="1"/>
+          <p:nvPr/>
+        </p:nvSpPr>
+        <p:spPr>
+          <a:xfrm>
+            <a:off x="6089904" y="5669280"/>
+            <a:ext cx="420624" cy="347472"/>
+          </a:xfrm>
+          <a:prstGeom prst="rect">
+            <a:avLst/>
+          </a:prstGeom>
+          <a:noFill/>
+        </p:spPr>
+        <p:txBody>
+          <a:bodyPr wrap="square" lIns="0" rIns="0" tIns="0" bIns="0">
+            <a:spAutoFit/>
+          </a:bodyPr>
+          <a:lstStyle/>
+          <a:p>
+            <a:pPr algn="ctr"/>
+            <a:r>
+              <a:rPr sz="1100" b="1" i="0">
+                <a:solidFill>
+                  <a:srgbClr val="FFFFFF"/>
+                </a:solidFill>
+                <a:latin typeface="Calibri"/>
+              </a:rPr>
+              <a:t>P6</a:t>
+            </a:r>
+          </a:p>
+        </p:txBody>
+      </p:sp>
+      <p:sp>
+        <p:nvSpPr>
+          <p:cNvPr id="51" name="TextBox 50"/>
+          <p:cNvSpPr txBox="1"/>
+          <p:nvPr/>
+        </p:nvSpPr>
+        <p:spPr>
+          <a:xfrm>
+            <a:off x="6601968" y="5559552"/>
+            <a:ext cx="4846320" cy="292608"/>
+          </a:xfrm>
+          <a:prstGeom prst="rect">
+            <a:avLst/>
+          </a:prstGeom>
+          <a:noFill/>
+        </p:spPr>
+        <p:txBody>
+          <a:bodyPr wrap="square" lIns="0" rIns="0" tIns="0" bIns="0">
+            <a:spAutoFit/>
+          </a:bodyPr>
+          <a:lstStyle/>
+          <a:p>
+            <a:pPr algn="l"/>
+            <a:r>
+              <a:rPr sz="1100" b="1" i="0">
+                <a:solidFill>
+                  <a:srgbClr val="F5A623"/>
+                </a:solidFill>
+                <a:latin typeface="Calibri"/>
+              </a:rPr>
+              <a:t>Fix attribution / UTMs</a:t>
+            </a:r>
+          </a:p>
+        </p:txBody>
+      </p:sp>
+      <p:sp>
+        <p:nvSpPr>
+          <p:cNvPr id="52" name="TextBox 51"/>
+          <p:cNvSpPr txBox="1"/>
+          <p:nvPr/>
+        </p:nvSpPr>
+        <p:spPr>
+          <a:xfrm>
+            <a:off x="6601968" y="5870448"/>
+            <a:ext cx="4846320" cy="274320"/>
+          </a:xfrm>
+          <a:prstGeom prst="rect">
+            <a:avLst/>
+          </a:prstGeom>
+          <a:noFill/>
+        </p:spPr>
+        <p:txBody>
+          <a:bodyPr wrap="square" lIns="0" rIns="0" tIns="0" bIns="0">
+            <a:spAutoFit/>
+          </a:bodyPr>
+          <a:lstStyle/>
+          <a:p>
+            <a:pPr algn="l"/>
+            <a:r>
+              <a:rPr sz="900" b="0" i="0">
+                <a:solidFill>
+                  <a:srgbClr val="CADCFC"/>
+                </a:solidFill>
+                <a:latin typeface="Calibri"/>
+              </a:rPr>
+              <a:t>Direct dropped -13.3pp — dark social blindspot</a:t>
+            </a:r>
+          </a:p>
+        </p:txBody>
+      </p:sp>
+      <p:sp>
+        <p:nvSpPr>
+          <p:cNvPr id="53" name="TextBox 52"/>
+          <p:cNvSpPr txBox="1"/>
+          <p:nvPr/>
+        </p:nvSpPr>
+        <p:spPr>
+          <a:xfrm>
+            <a:off x="320040" y="6236208"/>
+            <a:ext cx="11521440" cy="320040"/>
+          </a:xfrm>
+          <a:prstGeom prst="rect">
+            <a:avLst/>
+          </a:prstGeom>
+          <a:noFill/>
+        </p:spPr>
+        <p:txBody>
+          <a:bodyPr wrap="square" lIns="0" rIns="0" tIns="0" bIns="0">
+            <a:spAutoFit/>
+          </a:bodyPr>
+          <a:lstStyle/>
+          <a:p>
+            <a:pPr algn="l"/>
+            <a:r>
+              <a:rPr sz="1000" b="0" i="1">
+                <a:solidFill>
+                  <a:srgbClr val="64748B"/>
+                </a:solidFill>
+                <a:latin typeface="Calibri"/>
+              </a:rPr>
+              <a:t>Data filtered to www.solidigm.com only  |  Bots removed  |  Paid = Paid-Display channel</a:t>
+            </a:r>
+          </a:p>
+        </p:txBody>
+      </p:sp>
+    </p:spTree>
+  </p:cSld>
+  <p:clrMapOvr>
+    <a:masterClrMapping/>
+  </p:clrMapOvr>
+</p:sld>
+</file>
+
+<file path=ppt/slides/slide3.xml><?xml version="1.0" encoding="utf-8"?>
+<p:sld xmlns:a="http://schemas.openxmlformats.org/drawingml/2006/main" xmlns:p="http://schemas.openxmlformats.org/presentationml/2006/main" xmlns:r="http://schemas.openxmlformats.org/officeDocument/2006/relationships">
+  <p:cSld>
+    <p:bg>
+      <p:bgPr>
+        <a:solidFill>
           <a:srgbClr val="F0F4F8"/>
         </a:solidFill>
         <a:effectLst/>
@@ -10092,7 +13656,7 @@
 </p:sld>
 </file>
 
-<file path=ppt/slides/slide3.xml><?xml version="1.0" encoding="utf-8"?>
+<file path=ppt/slides/slide4.xml><?xml version="1.0" encoding="utf-8"?>
 <p:sld xmlns:a="http://schemas.openxmlformats.org/drawingml/2006/main" xmlns:p="http://schemas.openxmlformats.org/presentationml/2006/main" xmlns:r="http://schemas.openxmlformats.org/officeDocument/2006/relationships">
   <p:cSld>
     <p:bg>
@@ -12405,7 +15969,7 @@
 </p:sld>
 </file>
 
-<file path=ppt/slides/slide4.xml><?xml version="1.0" encoding="utf-8"?>
+<file path=ppt/slides/slide5.xml><?xml version="1.0" encoding="utf-8"?>
 <p:sld xmlns:a="http://schemas.openxmlformats.org/drawingml/2006/main" xmlns:p="http://schemas.openxmlformats.org/presentationml/2006/main" xmlns:r="http://schemas.openxmlformats.org/officeDocument/2006/relationships">
   <p:cSld>
     <p:bg>
@@ -17123,7 +20687,7 @@
 </p:sld>
 </file>
 
-<file path=ppt/slides/slide5.xml><?xml version="1.0" encoding="utf-8"?>
+<file path=ppt/slides/slide6.xml><?xml version="1.0" encoding="utf-8"?>
 <p:sld xmlns:a="http://schemas.openxmlformats.org/drawingml/2006/main" xmlns:p="http://schemas.openxmlformats.org/presentationml/2006/main" xmlns:r="http://schemas.openxmlformats.org/officeDocument/2006/relationships">
   <p:cSld>
     <p:bg>
@@ -18976,7 +22540,7 @@
 </p:sld>
 </file>
 
-<file path=ppt/slides/slide6.xml><?xml version="1.0" encoding="utf-8"?>
+<file path=ppt/slides/slide7.xml><?xml version="1.0" encoding="utf-8"?>
 <p:sld xmlns:a="http://schemas.openxmlformats.org/drawingml/2006/main" xmlns:p="http://schemas.openxmlformats.org/presentationml/2006/main" xmlns:r="http://schemas.openxmlformats.org/officeDocument/2006/relationships">
   <p:cSld>
     <p:bg>
@@ -21031,7 +24595,7 @@
 </p:sld>
 </file>
 
-<file path=ppt/slides/slide7.xml><?xml version="1.0" encoding="utf-8"?>
+<file path=ppt/slides/slide8.xml><?xml version="1.0" encoding="utf-8"?>
 <p:sld xmlns:a="http://schemas.openxmlformats.org/drawingml/2006/main" xmlns:p="http://schemas.openxmlformats.org/presentationml/2006/main" xmlns:r="http://schemas.openxmlformats.org/officeDocument/2006/relationships">
   <p:cSld>
     <p:bg>
@@ -22249,7 +25813,7 @@
 </p:sld>
 </file>
 
-<file path=ppt/slides/slide8.xml><?xml version="1.0" encoding="utf-8"?>
+<file path=ppt/slides/slide9.xml><?xml version="1.0" encoding="utf-8"?>
 <p:sld xmlns:a="http://schemas.openxmlformats.org/drawingml/2006/main" xmlns:p="http://schemas.openxmlformats.org/presentationml/2006/main" xmlns:r="http://schemas.openxmlformats.org/officeDocument/2006/relationships">
   <p:cSld>
     <p:bg>
@@ -24868,1539 +28432,6 @@
                 <a:latin typeface="Calibri"/>
               </a:rPr>
               <a:t>UK + Germany combined dropped ~8.5pp in one month — EMEA traffic investigation is a top priority.</a:t>
-            </a:r>
-          </a:p>
-        </p:txBody>
-      </p:sp>
-    </p:spTree>
-  </p:cSld>
-  <p:clrMapOvr>
-    <a:masterClrMapping/>
-  </p:clrMapOvr>
-</p:sld>
-</file>
-
-<file path=ppt/slides/slide9.xml><?xml version="1.0" encoding="utf-8"?>
-<p:sld xmlns:a="http://schemas.openxmlformats.org/drawingml/2006/main" xmlns:p="http://schemas.openxmlformats.org/presentationml/2006/main" xmlns:r="http://schemas.openxmlformats.org/officeDocument/2006/relationships">
-  <p:cSld>
-    <p:bg>
-      <p:bgPr>
-        <a:solidFill>
-          <a:srgbClr val="1E293B"/>
-        </a:solidFill>
-        <a:effectLst/>
-      </p:bgPr>
-    </p:bg>
-    <p:spTree>
-      <p:nvGrpSpPr>
-        <p:cNvPr id="1" name=""/>
-        <p:cNvGrpSpPr/>
-        <p:nvPr/>
-      </p:nvGrpSpPr>
-      <p:grpSpPr/>
-      <p:sp>
-        <p:nvSpPr>
-          <p:cNvPr id="2" name="Rectangle 1"/>
-          <p:cNvSpPr/>
-          <p:nvPr/>
-        </p:nvSpPr>
-        <p:spPr>
-          <a:xfrm>
-            <a:off x="0" y="0"/>
-            <a:ext cx="12191695" cy="777240"/>
-          </a:xfrm>
-          <a:prstGeom prst="rect">
-            <a:avLst/>
-          </a:prstGeom>
-          <a:solidFill>
-            <a:srgbClr val="065A82"/>
-          </a:solidFill>
-          <a:ln>
-            <a:noFill/>
-          </a:ln>
-        </p:spPr>
-        <p:style>
-          <a:lnRef idx="1">
-            <a:schemeClr val="accent1"/>
-          </a:lnRef>
-          <a:fillRef idx="3">
-            <a:schemeClr val="accent1"/>
-          </a:fillRef>
-          <a:effectRef idx="2">
-            <a:schemeClr val="accent1"/>
-          </a:effectRef>
-          <a:fontRef idx="minor">
-            <a:schemeClr val="lt1"/>
-          </a:fontRef>
-        </p:style>
-        <p:txBody>
-          <a:bodyPr rtlCol="0" anchor="ctr"/>
-          <a:lstStyle/>
-          <a:p>
-            <a:pPr algn="ctr"/>
-          </a:p>
-        </p:txBody>
-      </p:sp>
-      <p:sp>
-        <p:nvSpPr>
-          <p:cNvPr id="3" name="TextBox 2"/>
-          <p:cNvSpPr txBox="1"/>
-          <p:nvPr/>
-        </p:nvSpPr>
-        <p:spPr>
-          <a:xfrm>
-            <a:off x="457200" y="91440"/>
-            <a:ext cx="11277295" cy="594360"/>
-          </a:xfrm>
-          <a:prstGeom prst="rect">
-            <a:avLst/>
-          </a:prstGeom>
-          <a:noFill/>
-        </p:spPr>
-        <p:txBody>
-          <a:bodyPr wrap="square" lIns="0" rIns="0" tIns="0" bIns="0">
-            <a:spAutoFit/>
-          </a:bodyPr>
-          <a:lstStyle/>
-          <a:p>
-            <a:pPr algn="l"/>
-            <a:r>
-              <a:rPr sz="2400" b="1" i="0">
-                <a:solidFill>
-                  <a:srgbClr val="FFFFFF"/>
-                </a:solidFill>
-                <a:latin typeface="Calibri"/>
-              </a:rPr>
-              <a:t>Deep-Dive: User Behavior Patterns</a:t>
-            </a:r>
-          </a:p>
-        </p:txBody>
-      </p:sp>
-      <p:sp>
-        <p:nvSpPr>
-          <p:cNvPr id="4" name="TextBox 3"/>
-          <p:cNvSpPr txBox="1"/>
-          <p:nvPr/>
-        </p:nvSpPr>
-        <p:spPr>
-          <a:xfrm>
-            <a:off x="457200" y="502920"/>
-            <a:ext cx="11277295" cy="320040"/>
-          </a:xfrm>
-          <a:prstGeom prst="rect">
-            <a:avLst/>
-          </a:prstGeom>
-          <a:noFill/>
-        </p:spPr>
-        <p:txBody>
-          <a:bodyPr wrap="square" lIns="0" rIns="0" tIns="0" bIns="0">
-            <a:spAutoFit/>
-          </a:bodyPr>
-          <a:lstStyle/>
-          <a:p>
-            <a:pPr algn="l"/>
-            <a:r>
-              <a:rPr sz="1200" b="0" i="0">
-                <a:solidFill>
-                  <a:srgbClr val="CADCFC"/>
-                </a:solidFill>
-                <a:latin typeface="Calibri"/>
-              </a:rPr>
-              <a:t>How visitors engage, where they go, and what it means for your B2B funnel</a:t>
-            </a:r>
-          </a:p>
-        </p:txBody>
-      </p:sp>
-      <p:sp>
-        <p:nvSpPr>
-          <p:cNvPr id="5" name="Rectangle 4"/>
-          <p:cNvSpPr/>
-          <p:nvPr/>
-        </p:nvSpPr>
-        <p:spPr>
-          <a:xfrm>
-            <a:off x="320040" y="914400"/>
-            <a:ext cx="5623560" cy="2724912"/>
-          </a:xfrm>
-          <a:prstGeom prst="rect">
-            <a:avLst/>
-          </a:prstGeom>
-          <a:solidFill>
-            <a:srgbClr val="1E354A"/>
-          </a:solidFill>
-          <a:ln>
-            <a:noFill/>
-          </a:ln>
-        </p:spPr>
-        <p:style>
-          <a:lnRef idx="1">
-            <a:schemeClr val="accent1"/>
-          </a:lnRef>
-          <a:fillRef idx="3">
-            <a:schemeClr val="accent1"/>
-          </a:fillRef>
-          <a:effectRef idx="2">
-            <a:schemeClr val="accent1"/>
-          </a:effectRef>
-          <a:fontRef idx="minor">
-            <a:schemeClr val="lt1"/>
-          </a:fontRef>
-        </p:style>
-        <p:txBody>
-          <a:bodyPr rtlCol="0" anchor="ctr"/>
-          <a:lstStyle/>
-          <a:p>
-            <a:pPr algn="ctr"/>
-          </a:p>
-        </p:txBody>
-      </p:sp>
-      <p:sp>
-        <p:nvSpPr>
-          <p:cNvPr id="6" name="Rectangle 5"/>
-          <p:cNvSpPr/>
-          <p:nvPr/>
-        </p:nvSpPr>
-        <p:spPr>
-          <a:xfrm>
-            <a:off x="320040" y="914400"/>
-            <a:ext cx="5623560" cy="64008"/>
-          </a:xfrm>
-          <a:prstGeom prst="rect">
-            <a:avLst/>
-          </a:prstGeom>
-          <a:solidFill>
-            <a:srgbClr val="1C7293"/>
-          </a:solidFill>
-          <a:ln>
-            <a:noFill/>
-          </a:ln>
-        </p:spPr>
-        <p:style>
-          <a:lnRef idx="1">
-            <a:schemeClr val="accent1"/>
-          </a:lnRef>
-          <a:fillRef idx="3">
-            <a:schemeClr val="accent1"/>
-          </a:fillRef>
-          <a:effectRef idx="2">
-            <a:schemeClr val="accent1"/>
-          </a:effectRef>
-          <a:fontRef idx="minor">
-            <a:schemeClr val="lt1"/>
-          </a:fontRef>
-        </p:style>
-        <p:txBody>
-          <a:bodyPr rtlCol="0" anchor="ctr"/>
-          <a:lstStyle/>
-          <a:p>
-            <a:pPr algn="ctr"/>
-          </a:p>
-        </p:txBody>
-      </p:sp>
-      <p:sp>
-        <p:nvSpPr>
-          <p:cNvPr id="7" name="TextBox 6"/>
-          <p:cNvSpPr txBox="1"/>
-          <p:nvPr/>
-        </p:nvSpPr>
-        <p:spPr>
-          <a:xfrm>
-            <a:off x="502920" y="1005840"/>
-            <a:ext cx="5212080" cy="384048"/>
-          </a:xfrm>
-          <a:prstGeom prst="rect">
-            <a:avLst/>
-          </a:prstGeom>
-          <a:noFill/>
-        </p:spPr>
-        <p:txBody>
-          <a:bodyPr wrap="square" lIns="0" rIns="0" tIns="0" bIns="0">
-            <a:spAutoFit/>
-          </a:bodyPr>
-          <a:lstStyle/>
-          <a:p>
-            <a:pPr algn="l"/>
-            <a:r>
-              <a:rPr sz="1300" b="1" i="0">
-                <a:solidFill>
-                  <a:srgbClr val="1C7293"/>
-                </a:solidFill>
-                <a:latin typeface="Calibri"/>
-              </a:rPr>
-              <a:t>Engagement Funnel (Feb)</a:t>
-            </a:r>
-          </a:p>
-        </p:txBody>
-      </p:sp>
-      <p:sp>
-        <p:nvSpPr>
-          <p:cNvPr id="8" name="TextBox 7"/>
-          <p:cNvSpPr txBox="1"/>
-          <p:nvPr/>
-        </p:nvSpPr>
-        <p:spPr>
-          <a:xfrm>
-            <a:off x="502920" y="1463040"/>
-            <a:ext cx="5212080" cy="320040"/>
-          </a:xfrm>
-          <a:prstGeom prst="rect">
-            <a:avLst/>
-          </a:prstGeom>
-          <a:noFill/>
-        </p:spPr>
-        <p:txBody>
-          <a:bodyPr wrap="square" lIns="0" rIns="0" tIns="0" bIns="0">
-            <a:spAutoFit/>
-          </a:bodyPr>
-          <a:lstStyle/>
-          <a:p>
-            <a:pPr algn="l"/>
-            <a:r>
-              <a:rPr sz="1000" b="0" i="0">
-                <a:solidFill>
-                  <a:srgbClr val="F5A623"/>
-                </a:solidFill>
-                <a:latin typeface="Calibri"/>
-              </a:rPr>
-              <a:t>64.3%   bounce on 1st page</a:t>
-            </a:r>
-          </a:p>
-        </p:txBody>
-      </p:sp>
-      <p:sp>
-        <p:nvSpPr>
-          <p:cNvPr id="9" name="TextBox 8"/>
-          <p:cNvSpPr txBox="1"/>
-          <p:nvPr/>
-        </p:nvSpPr>
-        <p:spPr>
-          <a:xfrm>
-            <a:off x="502920" y="1755648"/>
-            <a:ext cx="5212080" cy="320040"/>
-          </a:xfrm>
-          <a:prstGeom prst="rect">
-            <a:avLst/>
-          </a:prstGeom>
-          <a:noFill/>
-        </p:spPr>
-        <p:txBody>
-          <a:bodyPr wrap="square" lIns="0" rIns="0" tIns="0" bIns="0">
-            <a:spAutoFit/>
-          </a:bodyPr>
-          <a:lstStyle/>
-          <a:p>
-            <a:pPr algn="l"/>
-            <a:r>
-              <a:rPr sz="1000" b="0" i="0">
-                <a:solidFill>
-                  <a:srgbClr val="CADCFC"/>
-                </a:solidFill>
-                <a:latin typeface="Calibri"/>
-              </a:rPr>
-              <a:t>18.5%   read 2 pages</a:t>
-            </a:r>
-          </a:p>
-        </p:txBody>
-      </p:sp>
-      <p:sp>
-        <p:nvSpPr>
-          <p:cNvPr id="10" name="TextBox 9"/>
-          <p:cNvSpPr txBox="1"/>
-          <p:nvPr/>
-        </p:nvSpPr>
-        <p:spPr>
-          <a:xfrm>
-            <a:off x="502920" y="2048256"/>
-            <a:ext cx="5212080" cy="320040"/>
-          </a:xfrm>
-          <a:prstGeom prst="rect">
-            <a:avLst/>
-          </a:prstGeom>
-          <a:noFill/>
-        </p:spPr>
-        <p:txBody>
-          <a:bodyPr wrap="square" lIns="0" rIns="0" tIns="0" bIns="0">
-            <a:spAutoFit/>
-          </a:bodyPr>
-          <a:lstStyle/>
-          <a:p>
-            <a:pPr algn="l"/>
-            <a:r>
-              <a:rPr sz="1000" b="0" i="0">
-                <a:solidFill>
-                  <a:srgbClr val="CADCFC"/>
-                </a:solidFill>
-                <a:latin typeface="Calibri"/>
-              </a:rPr>
-              <a:t> 6.9%   read 3 pages</a:t>
-            </a:r>
-          </a:p>
-        </p:txBody>
-      </p:sp>
-      <p:sp>
-        <p:nvSpPr>
-          <p:cNvPr id="11" name="TextBox 10"/>
-          <p:cNvSpPr txBox="1"/>
-          <p:nvPr/>
-        </p:nvSpPr>
-        <p:spPr>
-          <a:xfrm>
-            <a:off x="502920" y="2340864"/>
-            <a:ext cx="5212080" cy="320040"/>
-          </a:xfrm>
-          <a:prstGeom prst="rect">
-            <a:avLst/>
-          </a:prstGeom>
-          <a:noFill/>
-        </p:spPr>
-        <p:txBody>
-          <a:bodyPr wrap="square" lIns="0" rIns="0" tIns="0" bIns="0">
-            <a:spAutoFit/>
-          </a:bodyPr>
-          <a:lstStyle/>
-          <a:p>
-            <a:pPr algn="l"/>
-            <a:r>
-              <a:rPr sz="1000" b="0" i="0">
-                <a:solidFill>
-                  <a:srgbClr val="CADCFC"/>
-                </a:solidFill>
-                <a:latin typeface="Calibri"/>
-              </a:rPr>
-              <a:t> 5.4%   read 4-5 pages</a:t>
-            </a:r>
-          </a:p>
-        </p:txBody>
-      </p:sp>
-      <p:sp>
-        <p:nvSpPr>
-          <p:cNvPr id="12" name="TextBox 11"/>
-          <p:cNvSpPr txBox="1"/>
-          <p:nvPr/>
-        </p:nvSpPr>
-        <p:spPr>
-          <a:xfrm>
-            <a:off x="502920" y="2633472"/>
-            <a:ext cx="5212080" cy="320040"/>
-          </a:xfrm>
-          <a:prstGeom prst="rect">
-            <a:avLst/>
-          </a:prstGeom>
-          <a:noFill/>
-        </p:spPr>
-        <p:txBody>
-          <a:bodyPr wrap="square" lIns="0" rIns="0" tIns="0" bIns="0">
-            <a:spAutoFit/>
-          </a:bodyPr>
-          <a:lstStyle/>
-          <a:p>
-            <a:pPr algn="l"/>
-            <a:r>
-              <a:rPr sz="1000" b="0" i="0">
-                <a:solidFill>
-                  <a:srgbClr val="CADCFC"/>
-                </a:solidFill>
-                <a:latin typeface="Calibri"/>
-              </a:rPr>
-              <a:t> 3.3%   read 6-10 pages</a:t>
-            </a:r>
-          </a:p>
-        </p:txBody>
-      </p:sp>
-      <p:sp>
-        <p:nvSpPr>
-          <p:cNvPr id="13" name="TextBox 12"/>
-          <p:cNvSpPr txBox="1"/>
-          <p:nvPr/>
-        </p:nvSpPr>
-        <p:spPr>
-          <a:xfrm>
-            <a:off x="502920" y="2926080"/>
-            <a:ext cx="5212080" cy="320040"/>
-          </a:xfrm>
-          <a:prstGeom prst="rect">
-            <a:avLst/>
-          </a:prstGeom>
-          <a:noFill/>
-        </p:spPr>
-        <p:txBody>
-          <a:bodyPr wrap="square" lIns="0" rIns="0" tIns="0" bIns="0">
-            <a:spAutoFit/>
-          </a:bodyPr>
-          <a:lstStyle/>
-          <a:p>
-            <a:pPr algn="l"/>
-            <a:r>
-              <a:rPr sz="1000" b="0" i="0">
-                <a:solidFill>
-                  <a:srgbClr val="059669"/>
-                </a:solidFill>
-                <a:latin typeface="Calibri"/>
-              </a:rPr>
-              <a:t> 1.5%   read 11+ pages</a:t>
-            </a:r>
-          </a:p>
-        </p:txBody>
-      </p:sp>
-      <p:sp>
-        <p:nvSpPr>
-          <p:cNvPr id="14" name="TextBox 13"/>
-          <p:cNvSpPr txBox="1"/>
-          <p:nvPr/>
-        </p:nvSpPr>
-        <p:spPr>
-          <a:xfrm>
-            <a:off x="502920" y="3218688"/>
-            <a:ext cx="5212080" cy="320040"/>
-          </a:xfrm>
-          <a:prstGeom prst="rect">
-            <a:avLst/>
-          </a:prstGeom>
-          <a:noFill/>
-        </p:spPr>
-        <p:txBody>
-          <a:bodyPr wrap="square" lIns="0" rIns="0" tIns="0" bIns="0">
-            <a:spAutoFit/>
-          </a:bodyPr>
-          <a:lstStyle/>
-          <a:p>
-            <a:pPr algn="l"/>
-            <a:r>
-              <a:rPr sz="1000" b="0" i="0">
-                <a:solidFill>
-                  <a:srgbClr val="FFFFFF"/>
-                </a:solidFill>
-                <a:latin typeface="Calibri"/>
-              </a:rPr>
-              <a:t>→ 35.7% of visitors genuinely engaged</a:t>
-            </a:r>
-          </a:p>
-        </p:txBody>
-      </p:sp>
-      <p:sp>
-        <p:nvSpPr>
-          <p:cNvPr id="15" name="Rectangle 14"/>
-          <p:cNvSpPr/>
-          <p:nvPr/>
-        </p:nvSpPr>
-        <p:spPr>
-          <a:xfrm>
-            <a:off x="6080760" y="914400"/>
-            <a:ext cx="5623560" cy="2724912"/>
-          </a:xfrm>
-          <a:prstGeom prst="rect">
-            <a:avLst/>
-          </a:prstGeom>
-          <a:solidFill>
-            <a:srgbClr val="1E354A"/>
-          </a:solidFill>
-          <a:ln>
-            <a:noFill/>
-          </a:ln>
-        </p:spPr>
-        <p:style>
-          <a:lnRef idx="1">
-            <a:schemeClr val="accent1"/>
-          </a:lnRef>
-          <a:fillRef idx="3">
-            <a:schemeClr val="accent1"/>
-          </a:fillRef>
-          <a:effectRef idx="2">
-            <a:schemeClr val="accent1"/>
-          </a:effectRef>
-          <a:fontRef idx="minor">
-            <a:schemeClr val="lt1"/>
-          </a:fontRef>
-        </p:style>
-        <p:txBody>
-          <a:bodyPr rtlCol="0" anchor="ctr"/>
-          <a:lstStyle/>
-          <a:p>
-            <a:pPr algn="ctr"/>
-          </a:p>
-        </p:txBody>
-      </p:sp>
-      <p:sp>
-        <p:nvSpPr>
-          <p:cNvPr id="16" name="Rectangle 15"/>
-          <p:cNvSpPr/>
-          <p:nvPr/>
-        </p:nvSpPr>
-        <p:spPr>
-          <a:xfrm>
-            <a:off x="6080760" y="914400"/>
-            <a:ext cx="5623560" cy="64008"/>
-          </a:xfrm>
-          <a:prstGeom prst="rect">
-            <a:avLst/>
-          </a:prstGeom>
-          <a:solidFill>
-            <a:srgbClr val="065A82"/>
-          </a:solidFill>
-          <a:ln>
-            <a:noFill/>
-          </a:ln>
-        </p:spPr>
-        <p:style>
-          <a:lnRef idx="1">
-            <a:schemeClr val="accent1"/>
-          </a:lnRef>
-          <a:fillRef idx="3">
-            <a:schemeClr val="accent1"/>
-          </a:fillRef>
-          <a:effectRef idx="2">
-            <a:schemeClr val="accent1"/>
-          </a:effectRef>
-          <a:fontRef idx="minor">
-            <a:schemeClr val="lt1"/>
-          </a:fontRef>
-        </p:style>
-        <p:txBody>
-          <a:bodyPr rtlCol="0" anchor="ctr"/>
-          <a:lstStyle/>
-          <a:p>
-            <a:pPr algn="ctr"/>
-          </a:p>
-        </p:txBody>
-      </p:sp>
-      <p:sp>
-        <p:nvSpPr>
-          <p:cNvPr id="17" name="TextBox 16"/>
-          <p:cNvSpPr txBox="1"/>
-          <p:nvPr/>
-        </p:nvSpPr>
-        <p:spPr>
-          <a:xfrm>
-            <a:off x="6263640" y="1005840"/>
-            <a:ext cx="5212080" cy="384048"/>
-          </a:xfrm>
-          <a:prstGeom prst="rect">
-            <a:avLst/>
-          </a:prstGeom>
-          <a:noFill/>
-        </p:spPr>
-        <p:txBody>
-          <a:bodyPr wrap="square" lIns="0" rIns="0" tIns="0" bIns="0">
-            <a:spAutoFit/>
-          </a:bodyPr>
-          <a:lstStyle/>
-          <a:p>
-            <a:pPr algn="l"/>
-            <a:r>
-              <a:rPr sz="1300" b="1" i="0">
-                <a:solidFill>
-                  <a:srgbClr val="065A82"/>
-                </a:solidFill>
-                <a:latin typeface="Calibri"/>
-              </a:rPr>
-              <a:t>Visitor Loyalty (Visit #)</a:t>
-            </a:r>
-          </a:p>
-        </p:txBody>
-      </p:sp>
-      <p:sp>
-        <p:nvSpPr>
-          <p:cNvPr id="18" name="TextBox 17"/>
-          <p:cNvSpPr txBox="1"/>
-          <p:nvPr/>
-        </p:nvSpPr>
-        <p:spPr>
-          <a:xfrm>
-            <a:off x="6263640" y="1463040"/>
-            <a:ext cx="5212080" cy="320040"/>
-          </a:xfrm>
-          <a:prstGeom prst="rect">
-            <a:avLst/>
-          </a:prstGeom>
-          <a:noFill/>
-        </p:spPr>
-        <p:txBody>
-          <a:bodyPr wrap="square" lIns="0" rIns="0" tIns="0" bIns="0">
-            <a:spAutoFit/>
-          </a:bodyPr>
-          <a:lstStyle/>
-          <a:p>
-            <a:pPr algn="l"/>
-            <a:r>
-              <a:rPr sz="1000" b="0" i="0">
-                <a:solidFill>
-                  <a:srgbClr val="F5A623"/>
-                </a:solidFill>
-                <a:latin typeface="Calibri"/>
-              </a:rPr>
-              <a:t> 2.5%   First visit (new)</a:t>
-            </a:r>
-          </a:p>
-        </p:txBody>
-      </p:sp>
-      <p:sp>
-        <p:nvSpPr>
-          <p:cNvPr id="19" name="TextBox 18"/>
-          <p:cNvSpPr txBox="1"/>
-          <p:nvPr/>
-        </p:nvSpPr>
-        <p:spPr>
-          <a:xfrm>
-            <a:off x="6263640" y="1755648"/>
-            <a:ext cx="5212080" cy="320040"/>
-          </a:xfrm>
-          <a:prstGeom prst="rect">
-            <a:avLst/>
-          </a:prstGeom>
-          <a:noFill/>
-        </p:spPr>
-        <p:txBody>
-          <a:bodyPr wrap="square" lIns="0" rIns="0" tIns="0" bIns="0">
-            <a:spAutoFit/>
-          </a:bodyPr>
-          <a:lstStyle/>
-          <a:p>
-            <a:pPr algn="l"/>
-            <a:r>
-              <a:rPr sz="1000" b="0" i="0">
-                <a:solidFill>
-                  <a:srgbClr val="CADCFC"/>
-                </a:solidFill>
-                <a:latin typeface="Calibri"/>
-              </a:rPr>
-              <a:t>46.1%   2nd visit</a:t>
-            </a:r>
-          </a:p>
-        </p:txBody>
-      </p:sp>
-      <p:sp>
-        <p:nvSpPr>
-          <p:cNvPr id="20" name="TextBox 19"/>
-          <p:cNvSpPr txBox="1"/>
-          <p:nvPr/>
-        </p:nvSpPr>
-        <p:spPr>
-          <a:xfrm>
-            <a:off x="6263640" y="2048256"/>
-            <a:ext cx="5212080" cy="320040"/>
-          </a:xfrm>
-          <a:prstGeom prst="rect">
-            <a:avLst/>
-          </a:prstGeom>
-          <a:noFill/>
-        </p:spPr>
-        <p:txBody>
-          <a:bodyPr wrap="square" lIns="0" rIns="0" tIns="0" bIns="0">
-            <a:spAutoFit/>
-          </a:bodyPr>
-          <a:lstStyle/>
-          <a:p>
-            <a:pPr algn="l"/>
-            <a:r>
-              <a:rPr sz="1000" b="0" i="0">
-                <a:solidFill>
-                  <a:srgbClr val="059669"/>
-                </a:solidFill>
-                <a:latin typeface="Calibri"/>
-              </a:rPr>
-              <a:t>51.3%   6th+ visit (loyal)</a:t>
-            </a:r>
-          </a:p>
-        </p:txBody>
-      </p:sp>
-      <p:sp>
-        <p:nvSpPr>
-          <p:cNvPr id="21" name="TextBox 20"/>
-          <p:cNvSpPr txBox="1"/>
-          <p:nvPr/>
-        </p:nvSpPr>
-        <p:spPr>
-          <a:xfrm>
-            <a:off x="6263640" y="2340864"/>
-            <a:ext cx="5212080" cy="320040"/>
-          </a:xfrm>
-          <a:prstGeom prst="rect">
-            <a:avLst/>
-          </a:prstGeom>
-          <a:noFill/>
-        </p:spPr>
-        <p:txBody>
-          <a:bodyPr wrap="square" lIns="0" rIns="0" tIns="0" bIns="0">
-            <a:spAutoFit/>
-          </a:bodyPr>
-          <a:lstStyle/>
-          <a:p>
-            <a:pPr algn="l"/>
-            <a:r>
-              <a:rPr sz="1000" b="0" i="0">
-                <a:solidFill>
-                  <a:srgbClr val="CADCFC"/>
-                </a:solidFill>
-                <a:latin typeface="Calibri"/>
-              </a:rPr>
-              <a:t> 2.7%   9th visit</a:t>
-            </a:r>
-          </a:p>
-        </p:txBody>
-      </p:sp>
-      <p:sp>
-        <p:nvSpPr>
-          <p:cNvPr id="22" name="TextBox 21"/>
-          <p:cNvSpPr txBox="1"/>
-          <p:nvPr/>
-        </p:nvSpPr>
-        <p:spPr>
-          <a:xfrm>
-            <a:off x="6263640" y="2633472"/>
-            <a:ext cx="5212080" cy="320040"/>
-          </a:xfrm>
-          <a:prstGeom prst="rect">
-            <a:avLst/>
-          </a:prstGeom>
-          <a:noFill/>
-        </p:spPr>
-        <p:txBody>
-          <a:bodyPr wrap="square" lIns="0" rIns="0" tIns="0" bIns="0">
-            <a:spAutoFit/>
-          </a:bodyPr>
-          <a:lstStyle/>
-          <a:p>
-            <a:pPr algn="l"/>
-            <a:r>
-              <a:rPr sz="1000" b="0" i="0">
-                <a:solidFill>
-                  <a:srgbClr val="FFFFFF"/>
-                </a:solidFill>
-                <a:latin typeface="Calibri"/>
-              </a:rPr>
-              <a:t>→ 97.5% are returning visitors</a:t>
-            </a:r>
-          </a:p>
-        </p:txBody>
-      </p:sp>
-      <p:sp>
-        <p:nvSpPr>
-          <p:cNvPr id="23" name="TextBox 22"/>
-          <p:cNvSpPr txBox="1"/>
-          <p:nvPr/>
-        </p:nvSpPr>
-        <p:spPr>
-          <a:xfrm>
-            <a:off x="6263640" y="2926080"/>
-            <a:ext cx="5212080" cy="320040"/>
-          </a:xfrm>
-          <a:prstGeom prst="rect">
-            <a:avLst/>
-          </a:prstGeom>
-          <a:noFill/>
-        </p:spPr>
-        <p:txBody>
-          <a:bodyPr wrap="square" lIns="0" rIns="0" tIns="0" bIns="0">
-            <a:spAutoFit/>
-          </a:bodyPr>
-          <a:lstStyle/>
-          <a:p>
-            <a:pPr algn="l"/>
-            <a:r>
-              <a:rPr sz="1000" b="0" i="0">
-                <a:solidFill>
-                  <a:srgbClr val="FFFFFF"/>
-                </a:solidFill>
-                <a:latin typeface="Calibri"/>
-              </a:rPr>
-              <a:t>→ Strong brand stickiness</a:t>
-            </a:r>
-          </a:p>
-        </p:txBody>
-      </p:sp>
-      <p:sp>
-        <p:nvSpPr>
-          <p:cNvPr id="24" name="TextBox 23"/>
-          <p:cNvSpPr txBox="1"/>
-          <p:nvPr/>
-        </p:nvSpPr>
-        <p:spPr>
-          <a:xfrm>
-            <a:off x="6263640" y="3218688"/>
-            <a:ext cx="5212080" cy="320040"/>
-          </a:xfrm>
-          <a:prstGeom prst="rect">
-            <a:avLst/>
-          </a:prstGeom>
-          <a:noFill/>
-        </p:spPr>
-        <p:txBody>
-          <a:bodyPr wrap="square" lIns="0" rIns="0" tIns="0" bIns="0">
-            <a:spAutoFit/>
-          </a:bodyPr>
-          <a:lstStyle/>
-          <a:p>
-            <a:pPr algn="l"/>
-            <a:r>
-              <a:rPr sz="1000" b="0" i="0">
-                <a:solidFill>
-                  <a:srgbClr val="D97706"/>
-                </a:solidFill>
-                <a:latin typeface="Calibri"/>
-              </a:rPr>
-              <a:t>→ Acquisition is the weak link</a:t>
-            </a:r>
-          </a:p>
-        </p:txBody>
-      </p:sp>
-      <p:sp>
-        <p:nvSpPr>
-          <p:cNvPr id="25" name="Rectangle 24"/>
-          <p:cNvSpPr/>
-          <p:nvPr/>
-        </p:nvSpPr>
-        <p:spPr>
-          <a:xfrm>
-            <a:off x="320040" y="3840480"/>
-            <a:ext cx="5623560" cy="2724912"/>
-          </a:xfrm>
-          <a:prstGeom prst="rect">
-            <a:avLst/>
-          </a:prstGeom>
-          <a:solidFill>
-            <a:srgbClr val="1E354A"/>
-          </a:solidFill>
-          <a:ln>
-            <a:noFill/>
-          </a:ln>
-        </p:spPr>
-        <p:style>
-          <a:lnRef idx="1">
-            <a:schemeClr val="accent1"/>
-          </a:lnRef>
-          <a:fillRef idx="3">
-            <a:schemeClr val="accent1"/>
-          </a:fillRef>
-          <a:effectRef idx="2">
-            <a:schemeClr val="accent1"/>
-          </a:effectRef>
-          <a:fontRef idx="minor">
-            <a:schemeClr val="lt1"/>
-          </a:fontRef>
-        </p:style>
-        <p:txBody>
-          <a:bodyPr rtlCol="0" anchor="ctr"/>
-          <a:lstStyle/>
-          <a:p>
-            <a:pPr algn="ctr"/>
-          </a:p>
-        </p:txBody>
-      </p:sp>
-      <p:sp>
-        <p:nvSpPr>
-          <p:cNvPr id="26" name="Rectangle 25"/>
-          <p:cNvSpPr/>
-          <p:nvPr/>
-        </p:nvSpPr>
-        <p:spPr>
-          <a:xfrm>
-            <a:off x="320040" y="3840480"/>
-            <a:ext cx="5623560" cy="64008"/>
-          </a:xfrm>
-          <a:prstGeom prst="rect">
-            <a:avLst/>
-          </a:prstGeom>
-          <a:solidFill>
-            <a:srgbClr val="F5A623"/>
-          </a:solidFill>
-          <a:ln>
-            <a:noFill/>
-          </a:ln>
-        </p:spPr>
-        <p:style>
-          <a:lnRef idx="1">
-            <a:schemeClr val="accent1"/>
-          </a:lnRef>
-          <a:fillRef idx="3">
-            <a:schemeClr val="accent1"/>
-          </a:fillRef>
-          <a:effectRef idx="2">
-            <a:schemeClr val="accent1"/>
-          </a:effectRef>
-          <a:fontRef idx="minor">
-            <a:schemeClr val="lt1"/>
-          </a:fontRef>
-        </p:style>
-        <p:txBody>
-          <a:bodyPr rtlCol="0" anchor="ctr"/>
-          <a:lstStyle/>
-          <a:p>
-            <a:pPr algn="ctr"/>
-          </a:p>
-        </p:txBody>
-      </p:sp>
-      <p:sp>
-        <p:nvSpPr>
-          <p:cNvPr id="27" name="TextBox 26"/>
-          <p:cNvSpPr txBox="1"/>
-          <p:nvPr/>
-        </p:nvSpPr>
-        <p:spPr>
-          <a:xfrm>
-            <a:off x="502920" y="3931920"/>
-            <a:ext cx="5212080" cy="384048"/>
-          </a:xfrm>
-          <a:prstGeom prst="rect">
-            <a:avLst/>
-          </a:prstGeom>
-          <a:noFill/>
-        </p:spPr>
-        <p:txBody>
-          <a:bodyPr wrap="square" lIns="0" rIns="0" tIns="0" bIns="0">
-            <a:spAutoFit/>
-          </a:bodyPr>
-          <a:lstStyle/>
-          <a:p>
-            <a:pPr algn="l"/>
-            <a:r>
-              <a:rPr sz="1300" b="1" i="0">
-                <a:solidFill>
-                  <a:srgbClr val="F5A623"/>
-                </a:solidFill>
-                <a:latin typeface="Calibri"/>
-              </a:rPr>
-              <a:t>High-Engagement Journey (5+pg)</a:t>
-            </a:r>
-          </a:p>
-        </p:txBody>
-      </p:sp>
-      <p:sp>
-        <p:nvSpPr>
-          <p:cNvPr id="28" name="TextBox 27"/>
-          <p:cNvSpPr txBox="1"/>
-          <p:nvPr/>
-        </p:nvSpPr>
-        <p:spPr>
-          <a:xfrm>
-            <a:off x="502920" y="4389120"/>
-            <a:ext cx="5212080" cy="320040"/>
-          </a:xfrm>
-          <a:prstGeom prst="rect">
-            <a:avLst/>
-          </a:prstGeom>
-          <a:noFill/>
-        </p:spPr>
-        <p:txBody>
-          <a:bodyPr wrap="square" lIns="0" rIns="0" tIns="0" bIns="0">
-            <a:spAutoFit/>
-          </a:bodyPr>
-          <a:lstStyle/>
-          <a:p>
-            <a:pPr algn="l"/>
-            <a:r>
-              <a:rPr sz="1000" b="0" i="0">
-                <a:solidFill>
-                  <a:srgbClr val="CADCFC"/>
-                </a:solidFill>
-                <a:latin typeface="Calibri"/>
-              </a:rPr>
-              <a:t>① Solidigm Data Storage Solutions (entry)</a:t>
-            </a:r>
-          </a:p>
-        </p:txBody>
-      </p:sp>
-      <p:sp>
-        <p:nvSpPr>
-          <p:cNvPr id="29" name="TextBox 28"/>
-          <p:cNvSpPr txBox="1"/>
-          <p:nvPr/>
-        </p:nvSpPr>
-        <p:spPr>
-          <a:xfrm>
-            <a:off x="502920" y="4681728"/>
-            <a:ext cx="5212080" cy="320040"/>
-          </a:xfrm>
-          <a:prstGeom prst="rect">
-            <a:avLst/>
-          </a:prstGeom>
-          <a:noFill/>
-        </p:spPr>
-        <p:txBody>
-          <a:bodyPr wrap="square" lIns="0" rIns="0" tIns="0" bIns="0">
-            <a:spAutoFit/>
-          </a:bodyPr>
-          <a:lstStyle/>
-          <a:p>
-            <a:pPr algn="l"/>
-            <a:r>
-              <a:rPr sz="1000" b="0" i="0">
-                <a:solidFill>
-                  <a:srgbClr val="CADCFC"/>
-                </a:solidFill>
-                <a:latin typeface="Calibri"/>
-              </a:rPr>
-              <a:t>② AI Storage (product discovery)</a:t>
-            </a:r>
-          </a:p>
-        </p:txBody>
-      </p:sp>
-      <p:sp>
-        <p:nvSpPr>
-          <p:cNvPr id="30" name="TextBox 29"/>
-          <p:cNvSpPr txBox="1"/>
-          <p:nvPr/>
-        </p:nvSpPr>
-        <p:spPr>
-          <a:xfrm>
-            <a:off x="502920" y="4974336"/>
-            <a:ext cx="5212080" cy="320040"/>
-          </a:xfrm>
-          <a:prstGeom prst="rect">
-            <a:avLst/>
-          </a:prstGeom>
-          <a:noFill/>
-        </p:spPr>
-        <p:txBody>
-          <a:bodyPr wrap="square" lIns="0" rIns="0" tIns="0" bIns="0">
-            <a:spAutoFit/>
-          </a:bodyPr>
-          <a:lstStyle/>
-          <a:p>
-            <a:pPr algn="l"/>
-            <a:r>
-              <a:rPr sz="1000" b="0" i="0">
-                <a:solidFill>
-                  <a:srgbClr val="CADCFC"/>
-                </a:solidFill>
-                <a:latin typeface="Calibri"/>
-              </a:rPr>
-              <a:t>③ Our Story (trust building)</a:t>
-            </a:r>
-          </a:p>
-        </p:txBody>
-      </p:sp>
-      <p:sp>
-        <p:nvSpPr>
-          <p:cNvPr id="31" name="TextBox 30"/>
-          <p:cNvSpPr txBox="1"/>
-          <p:nvPr/>
-        </p:nvSpPr>
-        <p:spPr>
-          <a:xfrm>
-            <a:off x="502920" y="5266944"/>
-            <a:ext cx="5212080" cy="320040"/>
-          </a:xfrm>
-          <a:prstGeom prst="rect">
-            <a:avLst/>
-          </a:prstGeom>
-          <a:noFill/>
-        </p:spPr>
-        <p:txBody>
-          <a:bodyPr wrap="square" lIns="0" rIns="0" tIns="0" bIns="0">
-            <a:spAutoFit/>
-          </a:bodyPr>
-          <a:lstStyle/>
-          <a:p>
-            <a:pPr algn="l"/>
-            <a:r>
-              <a:rPr sz="1000" b="0" i="0">
-                <a:solidFill>
-                  <a:srgbClr val="CADCFC"/>
-                </a:solidFill>
-                <a:latin typeface="Calibri"/>
-              </a:rPr>
-              <a:t>④ Edge Storage / D5-P5336 (evaluation)</a:t>
-            </a:r>
-          </a:p>
-        </p:txBody>
-      </p:sp>
-      <p:sp>
-        <p:nvSpPr>
-          <p:cNvPr id="32" name="TextBox 31"/>
-          <p:cNvSpPr txBox="1"/>
-          <p:nvPr/>
-        </p:nvSpPr>
-        <p:spPr>
-          <a:xfrm>
-            <a:off x="502920" y="5559552"/>
-            <a:ext cx="5212080" cy="320040"/>
-          </a:xfrm>
-          <a:prstGeom prst="rect">
-            <a:avLst/>
-          </a:prstGeom>
-          <a:noFill/>
-        </p:spPr>
-        <p:txBody>
-          <a:bodyPr wrap="square" lIns="0" rIns="0" tIns="0" bIns="0">
-            <a:spAutoFit/>
-          </a:bodyPr>
-          <a:lstStyle/>
-          <a:p>
-            <a:pPr algn="l"/>
-            <a:r>
-              <a:rPr sz="1000" b="0" i="0">
-                <a:solidFill>
-                  <a:srgbClr val="059669"/>
-                </a:solidFill>
-                <a:latin typeface="Calibri"/>
-              </a:rPr>
-              <a:t>⑤ Where to Buy (purchase intent)</a:t>
-            </a:r>
-          </a:p>
-        </p:txBody>
-      </p:sp>
-      <p:sp>
-        <p:nvSpPr>
-          <p:cNvPr id="33" name="TextBox 32"/>
-          <p:cNvSpPr txBox="1"/>
-          <p:nvPr/>
-        </p:nvSpPr>
-        <p:spPr>
-          <a:xfrm>
-            <a:off x="502920" y="5852160"/>
-            <a:ext cx="5212080" cy="320040"/>
-          </a:xfrm>
-          <a:prstGeom prst="rect">
-            <a:avLst/>
-          </a:prstGeom>
-          <a:noFill/>
-        </p:spPr>
-        <p:txBody>
-          <a:bodyPr wrap="square" lIns="0" rIns="0" tIns="0" bIns="0">
-            <a:spAutoFit/>
-          </a:bodyPr>
-          <a:lstStyle/>
-          <a:p>
-            <a:pPr algn="l"/>
-            <a:r>
-              <a:rPr sz="1000" b="0" i="0">
-                <a:solidFill>
-                  <a:srgbClr val="FFFFFF"/>
-                </a:solidFill>
-                <a:latin typeface="Calibri"/>
-              </a:rPr>
-              <a:t>→ 5-step B2B consideration path identified</a:t>
-            </a:r>
-          </a:p>
-        </p:txBody>
-      </p:sp>
-      <p:sp>
-        <p:nvSpPr>
-          <p:cNvPr id="34" name="Rectangle 33"/>
-          <p:cNvSpPr/>
-          <p:nvPr/>
-        </p:nvSpPr>
-        <p:spPr>
-          <a:xfrm>
-            <a:off x="6080760" y="3840480"/>
-            <a:ext cx="5623560" cy="2724912"/>
-          </a:xfrm>
-          <a:prstGeom prst="rect">
-            <a:avLst/>
-          </a:prstGeom>
-          <a:solidFill>
-            <a:srgbClr val="1E354A"/>
-          </a:solidFill>
-          <a:ln>
-            <a:noFill/>
-          </a:ln>
-        </p:spPr>
-        <p:style>
-          <a:lnRef idx="1">
-            <a:schemeClr val="accent1"/>
-          </a:lnRef>
-          <a:fillRef idx="3">
-            <a:schemeClr val="accent1"/>
-          </a:fillRef>
-          <a:effectRef idx="2">
-            <a:schemeClr val="accent1"/>
-          </a:effectRef>
-          <a:fontRef idx="minor">
-            <a:schemeClr val="lt1"/>
-          </a:fontRef>
-        </p:style>
-        <p:txBody>
-          <a:bodyPr rtlCol="0" anchor="ctr"/>
-          <a:lstStyle/>
-          <a:p>
-            <a:pPr algn="ctr"/>
-          </a:p>
-        </p:txBody>
-      </p:sp>
-      <p:sp>
-        <p:nvSpPr>
-          <p:cNvPr id="35" name="Rectangle 34"/>
-          <p:cNvSpPr/>
-          <p:nvPr/>
-        </p:nvSpPr>
-        <p:spPr>
-          <a:xfrm>
-            <a:off x="6080760" y="3840480"/>
-            <a:ext cx="5623560" cy="64008"/>
-          </a:xfrm>
-          <a:prstGeom prst="rect">
-            <a:avLst/>
-          </a:prstGeom>
-          <a:solidFill>
-            <a:srgbClr val="1C7293"/>
-          </a:solidFill>
-          <a:ln>
-            <a:noFill/>
-          </a:ln>
-        </p:spPr>
-        <p:style>
-          <a:lnRef idx="1">
-            <a:schemeClr val="accent1"/>
-          </a:lnRef>
-          <a:fillRef idx="3">
-            <a:schemeClr val="accent1"/>
-          </a:fillRef>
-          <a:effectRef idx="2">
-            <a:schemeClr val="accent1"/>
-          </a:effectRef>
-          <a:fontRef idx="minor">
-            <a:schemeClr val="lt1"/>
-          </a:fontRef>
-        </p:style>
-        <p:txBody>
-          <a:bodyPr rtlCol="0" anchor="ctr"/>
-          <a:lstStyle/>
-          <a:p>
-            <a:pPr algn="ctr"/>
-          </a:p>
-        </p:txBody>
-      </p:sp>
-      <p:sp>
-        <p:nvSpPr>
-          <p:cNvPr id="36" name="TextBox 35"/>
-          <p:cNvSpPr txBox="1"/>
-          <p:nvPr/>
-        </p:nvSpPr>
-        <p:spPr>
-          <a:xfrm>
-            <a:off x="6263640" y="3931920"/>
-            <a:ext cx="5212080" cy="384048"/>
-          </a:xfrm>
-          <a:prstGeom prst="rect">
-            <a:avLst/>
-          </a:prstGeom>
-          <a:noFill/>
-        </p:spPr>
-        <p:txBody>
-          <a:bodyPr wrap="square" lIns="0" rIns="0" tIns="0" bIns="0">
-            <a:spAutoFit/>
-          </a:bodyPr>
-          <a:lstStyle/>
-          <a:p>
-            <a:pPr algn="l"/>
-            <a:r>
-              <a:rPr sz="1300" b="1" i="0">
-                <a:solidFill>
-                  <a:srgbClr val="1C7293"/>
-                </a:solidFill>
-                <a:latin typeface="Calibri"/>
-              </a:rPr>
-              <a:t>Hourly &amp; Weekly Patterns</a:t>
-            </a:r>
-          </a:p>
-        </p:txBody>
-      </p:sp>
-      <p:sp>
-        <p:nvSpPr>
-          <p:cNvPr id="37" name="TextBox 36"/>
-          <p:cNvSpPr txBox="1"/>
-          <p:nvPr/>
-        </p:nvSpPr>
-        <p:spPr>
-          <a:xfrm>
-            <a:off x="6263640" y="4389120"/>
-            <a:ext cx="5212080" cy="320040"/>
-          </a:xfrm>
-          <a:prstGeom prst="rect">
-            <a:avLst/>
-          </a:prstGeom>
-          <a:noFill/>
-        </p:spPr>
-        <p:txBody>
-          <a:bodyPr wrap="square" lIns="0" rIns="0" tIns="0" bIns="0">
-            <a:spAutoFit/>
-          </a:bodyPr>
-          <a:lstStyle/>
-          <a:p>
-            <a:pPr algn="l"/>
-            <a:r>
-              <a:rPr sz="1000" b="0" i="0">
-                <a:solidFill>
-                  <a:srgbClr val="CADCFC"/>
-                </a:solidFill>
-                <a:latin typeface="Calibri"/>
-              </a:rPr>
-              <a:t>JAN peak: 05:00 UTC (US overnight / APAC)</a:t>
-            </a:r>
-          </a:p>
-        </p:txBody>
-      </p:sp>
-      <p:sp>
-        <p:nvSpPr>
-          <p:cNvPr id="38" name="TextBox 37"/>
-          <p:cNvSpPr txBox="1"/>
-          <p:nvPr/>
-        </p:nvSpPr>
-        <p:spPr>
-          <a:xfrm>
-            <a:off x="6263640" y="4681728"/>
-            <a:ext cx="5212080" cy="320040"/>
-          </a:xfrm>
-          <a:prstGeom prst="rect">
-            <a:avLst/>
-          </a:prstGeom>
-          <a:noFill/>
-        </p:spPr>
-        <p:txBody>
-          <a:bodyPr wrap="square" lIns="0" rIns="0" tIns="0" bIns="0">
-            <a:spAutoFit/>
-          </a:bodyPr>
-          <a:lstStyle/>
-          <a:p>
-            <a:pPr algn="l"/>
-            <a:r>
-              <a:rPr sz="1000" b="0" i="0">
-                <a:solidFill>
-                  <a:srgbClr val="CADCFC"/>
-                </a:solidFill>
-                <a:latin typeface="Calibri"/>
-              </a:rPr>
-              <a:t>FEB peak: 07:00 UTC (EU/US morning)</a:t>
-            </a:r>
-          </a:p>
-        </p:txBody>
-      </p:sp>
-      <p:sp>
-        <p:nvSpPr>
-          <p:cNvPr id="39" name="TextBox 38"/>
-          <p:cNvSpPr txBox="1"/>
-          <p:nvPr/>
-        </p:nvSpPr>
-        <p:spPr>
-          <a:xfrm>
-            <a:off x="6263640" y="4974336"/>
-            <a:ext cx="5212080" cy="320040"/>
-          </a:xfrm>
-          <a:prstGeom prst="rect">
-            <a:avLst/>
-          </a:prstGeom>
-          <a:noFill/>
-        </p:spPr>
-        <p:txBody>
-          <a:bodyPr wrap="square" lIns="0" rIns="0" tIns="0" bIns="0">
-            <a:spAutoFit/>
-          </a:bodyPr>
-          <a:lstStyle/>
-          <a:p>
-            <a:pPr algn="l"/>
-            <a:r>
-              <a:rPr sz="1000" b="0" i="0">
-                <a:solidFill>
-                  <a:srgbClr val="CADCFC"/>
-                </a:solidFill>
-                <a:latin typeface="Calibri"/>
-              </a:rPr>
-              <a:t>JAN top day: Friday (76,611 PVs)</a:t>
-            </a:r>
-          </a:p>
-        </p:txBody>
-      </p:sp>
-      <p:sp>
-        <p:nvSpPr>
-          <p:cNvPr id="40" name="TextBox 39"/>
-          <p:cNvSpPr txBox="1"/>
-          <p:nvPr/>
-        </p:nvSpPr>
-        <p:spPr>
-          <a:xfrm>
-            <a:off x="6263640" y="5266944"/>
-            <a:ext cx="5212080" cy="320040"/>
-          </a:xfrm>
-          <a:prstGeom prst="rect">
-            <a:avLst/>
-          </a:prstGeom>
-          <a:noFill/>
-        </p:spPr>
-        <p:txBody>
-          <a:bodyPr wrap="square" lIns="0" rIns="0" tIns="0" bIns="0">
-            <a:spAutoFit/>
-          </a:bodyPr>
-          <a:lstStyle/>
-          <a:p>
-            <a:pPr algn="l"/>
-            <a:r>
-              <a:rPr sz="1000" b="0" i="0">
-                <a:solidFill>
-                  <a:srgbClr val="CADCFC"/>
-                </a:solidFill>
-                <a:latin typeface="Calibri"/>
-              </a:rPr>
-              <a:t>FEB top day: Tuesday (63,165 PVs)</a:t>
-            </a:r>
-          </a:p>
-        </p:txBody>
-      </p:sp>
-      <p:sp>
-        <p:nvSpPr>
-          <p:cNvPr id="41" name="TextBox 40"/>
-          <p:cNvSpPr txBox="1"/>
-          <p:nvPr/>
-        </p:nvSpPr>
-        <p:spPr>
-          <a:xfrm>
-            <a:off x="6263640" y="5559552"/>
-            <a:ext cx="5212080" cy="320040"/>
-          </a:xfrm>
-          <a:prstGeom prst="rect">
-            <a:avLst/>
-          </a:prstGeom>
-          <a:noFill/>
-        </p:spPr>
-        <p:txBody>
-          <a:bodyPr wrap="square" lIns="0" rIns="0" tIns="0" bIns="0">
-            <a:spAutoFit/>
-          </a:bodyPr>
-          <a:lstStyle/>
-          <a:p>
-            <a:pPr algn="l"/>
-            <a:r>
-              <a:rPr sz="1000" b="0" i="0">
-                <a:solidFill>
-                  <a:srgbClr val="CADCFC"/>
-                </a:solidFill>
-                <a:latin typeface="Calibri"/>
-              </a:rPr>
-              <a:t>Weekend traffic: ~18% of weekly PVs</a:t>
-            </a:r>
-          </a:p>
-        </p:txBody>
-      </p:sp>
-      <p:sp>
-        <p:nvSpPr>
-          <p:cNvPr id="42" name="TextBox 41"/>
-          <p:cNvSpPr txBox="1"/>
-          <p:nvPr/>
-        </p:nvSpPr>
-        <p:spPr>
-          <a:xfrm>
-            <a:off x="6263640" y="5852160"/>
-            <a:ext cx="5212080" cy="320040"/>
-          </a:xfrm>
-          <a:prstGeom prst="rect">
-            <a:avLst/>
-          </a:prstGeom>
-          <a:noFill/>
-        </p:spPr>
-        <p:txBody>
-          <a:bodyPr wrap="square" lIns="0" rIns="0" tIns="0" bIns="0">
-            <a:spAutoFit/>
-          </a:bodyPr>
-          <a:lstStyle/>
-          <a:p>
-            <a:pPr algn="l"/>
-            <a:r>
-              <a:rPr sz="1000" b="0" i="0">
-                <a:solidFill>
-                  <a:srgbClr val="059669"/>
-                </a:solidFill>
-                <a:latin typeface="Calibri"/>
-              </a:rPr>
-              <a:t>→ B2B buyers are active Tue-Fri</a:t>
             </a:r>
           </a:p>
         </p:txBody>

--- a/webanalytics/Solidigm_Analytics_Report_JanFeb_FY26.pptx
+++ b/webanalytics/Solidigm_Analytics_Report_JanFeb_FY26.pptx
@@ -17,6 +17,7 @@
     <p:sldId id="265" r:id="rId16"/>
     <p:sldId id="266" r:id="rId17"/>
     <p:sldId id="267" r:id="rId18"/>
+    <p:sldId id="268" r:id="rId19"/>
   </p:sldIdLst>
   <p:sldSz cx="12191695" cy="6858000" type="screen4x3"/>
   <p:notesSz cx="6858000" cy="9144000"/>
@@ -3557,6 +3558,2637 @@
     <p:bg>
       <p:bgPr>
         <a:solidFill>
+          <a:srgbClr val="F0F4F8"/>
+        </a:solidFill>
+        <a:effectLst/>
+      </p:bgPr>
+    </p:bg>
+    <p:spTree>
+      <p:nvGrpSpPr>
+        <p:cNvPr id="1" name=""/>
+        <p:cNvGrpSpPr/>
+        <p:nvPr/>
+      </p:nvGrpSpPr>
+      <p:grpSpPr/>
+      <p:sp>
+        <p:nvSpPr>
+          <p:cNvPr id="2" name="Rectangle 1"/>
+          <p:cNvSpPr/>
+          <p:nvPr/>
+        </p:nvSpPr>
+        <p:spPr>
+          <a:xfrm>
+            <a:off x="0" y="0"/>
+            <a:ext cx="12191695" cy="777240"/>
+          </a:xfrm>
+          <a:prstGeom prst="rect">
+            <a:avLst/>
+          </a:prstGeom>
+          <a:solidFill>
+            <a:srgbClr val="065A82"/>
+          </a:solidFill>
+          <a:ln>
+            <a:noFill/>
+          </a:ln>
+        </p:spPr>
+        <p:style>
+          <a:lnRef idx="1">
+            <a:schemeClr val="accent1"/>
+          </a:lnRef>
+          <a:fillRef idx="3">
+            <a:schemeClr val="accent1"/>
+          </a:fillRef>
+          <a:effectRef idx="2">
+            <a:schemeClr val="accent1"/>
+          </a:effectRef>
+          <a:fontRef idx="minor">
+            <a:schemeClr val="lt1"/>
+          </a:fontRef>
+        </p:style>
+        <p:txBody>
+          <a:bodyPr rtlCol="0" anchor="ctr"/>
+          <a:lstStyle/>
+          <a:p>
+            <a:pPr algn="ctr"/>
+          </a:p>
+        </p:txBody>
+      </p:sp>
+      <p:sp>
+        <p:nvSpPr>
+          <p:cNvPr id="3" name="TextBox 2"/>
+          <p:cNvSpPr txBox="1"/>
+          <p:nvPr/>
+        </p:nvSpPr>
+        <p:spPr>
+          <a:xfrm>
+            <a:off x="457200" y="91440"/>
+            <a:ext cx="11277295" cy="594360"/>
+          </a:xfrm>
+          <a:prstGeom prst="rect">
+            <a:avLst/>
+          </a:prstGeom>
+          <a:noFill/>
+        </p:spPr>
+        <p:txBody>
+          <a:bodyPr wrap="square" lIns="0" rIns="0" tIns="0" bIns="0">
+            <a:spAutoFit/>
+          </a:bodyPr>
+          <a:lstStyle/>
+          <a:p>
+            <a:pPr algn="l"/>
+            <a:r>
+              <a:rPr sz="2400" b="1" i="0">
+                <a:solidFill>
+                  <a:srgbClr val="FFFFFF"/>
+                </a:solidFill>
+                <a:latin typeface="Calibri"/>
+              </a:rPr>
+              <a:t>Geographic Analysis — solidigm.com</a:t>
+            </a:r>
+          </a:p>
+        </p:txBody>
+      </p:sp>
+      <p:sp>
+        <p:nvSpPr>
+          <p:cNvPr id="4" name="TextBox 3"/>
+          <p:cNvSpPr txBox="1"/>
+          <p:nvPr/>
+        </p:nvSpPr>
+        <p:spPr>
+          <a:xfrm>
+            <a:off x="457200" y="502920"/>
+            <a:ext cx="11277295" cy="320040"/>
+          </a:xfrm>
+          <a:prstGeom prst="rect">
+            <a:avLst/>
+          </a:prstGeom>
+          <a:noFill/>
+        </p:spPr>
+        <p:txBody>
+          <a:bodyPr wrap="square" lIns="0" rIns="0" tIns="0" bIns="0">
+            <a:spAutoFit/>
+          </a:bodyPr>
+          <a:lstStyle/>
+          <a:p>
+            <a:pPr algn="l"/>
+            <a:r>
+              <a:rPr sz="1200" b="0" i="0">
+                <a:solidFill>
+                  <a:srgbClr val="CADCFC"/>
+                </a:solidFill>
+                <a:latin typeface="Calibri"/>
+              </a:rPr>
+              <a:t>USA dominates at 84% — but UK traffic collapsed -6.8pp and warrants immediate investigation</a:t>
+            </a:r>
+          </a:p>
+        </p:txBody>
+      </p:sp>
+      <p:sp>
+        <p:nvSpPr>
+          <p:cNvPr id="5" name="Rectangle 4"/>
+          <p:cNvSpPr/>
+          <p:nvPr/>
+        </p:nvSpPr>
+        <p:spPr>
+          <a:xfrm>
+            <a:off x="320040" y="914400"/>
+            <a:ext cx="5669280" cy="5074920"/>
+          </a:xfrm>
+          <a:prstGeom prst="rect">
+            <a:avLst/>
+          </a:prstGeom>
+          <a:solidFill>
+            <a:srgbClr val="FFFFFF"/>
+          </a:solidFill>
+          <a:ln>
+            <a:noFill/>
+          </a:ln>
+        </p:spPr>
+        <p:style>
+          <a:lnRef idx="1">
+            <a:schemeClr val="accent1"/>
+          </a:lnRef>
+          <a:fillRef idx="3">
+            <a:schemeClr val="accent1"/>
+          </a:fillRef>
+          <a:effectRef idx="2">
+            <a:schemeClr val="accent1"/>
+          </a:effectRef>
+          <a:fontRef idx="minor">
+            <a:schemeClr val="lt1"/>
+          </a:fontRef>
+        </p:style>
+        <p:txBody>
+          <a:bodyPr rtlCol="0" anchor="ctr"/>
+          <a:lstStyle/>
+          <a:p>
+            <a:pPr algn="ctr"/>
+          </a:p>
+        </p:txBody>
+      </p:sp>
+      <p:sp>
+        <p:nvSpPr>
+          <p:cNvPr id="6" name="Rectangle 5"/>
+          <p:cNvSpPr/>
+          <p:nvPr/>
+        </p:nvSpPr>
+        <p:spPr>
+          <a:xfrm>
+            <a:off x="320040" y="914400"/>
+            <a:ext cx="54864" cy="5074920"/>
+          </a:xfrm>
+          <a:prstGeom prst="rect">
+            <a:avLst/>
+          </a:prstGeom>
+          <a:solidFill>
+            <a:srgbClr val="1C7293"/>
+          </a:solidFill>
+          <a:ln>
+            <a:noFill/>
+          </a:ln>
+        </p:spPr>
+        <p:style>
+          <a:lnRef idx="1">
+            <a:schemeClr val="accent1"/>
+          </a:lnRef>
+          <a:fillRef idx="3">
+            <a:schemeClr val="accent1"/>
+          </a:fillRef>
+          <a:effectRef idx="2">
+            <a:schemeClr val="accent1"/>
+          </a:effectRef>
+          <a:fontRef idx="minor">
+            <a:schemeClr val="lt1"/>
+          </a:fontRef>
+        </p:style>
+        <p:txBody>
+          <a:bodyPr rtlCol="0" anchor="ctr"/>
+          <a:lstStyle/>
+          <a:p>
+            <a:pPr algn="ctr"/>
+          </a:p>
+        </p:txBody>
+      </p:sp>
+      <p:sp>
+        <p:nvSpPr>
+          <p:cNvPr id="7" name="TextBox 6"/>
+          <p:cNvSpPr txBox="1"/>
+          <p:nvPr/>
+        </p:nvSpPr>
+        <p:spPr>
+          <a:xfrm>
+            <a:off x="548640" y="960120"/>
+            <a:ext cx="5303520" cy="384048"/>
+          </a:xfrm>
+          <a:prstGeom prst="rect">
+            <a:avLst/>
+          </a:prstGeom>
+          <a:noFill/>
+        </p:spPr>
+        <p:txBody>
+          <a:bodyPr wrap="square" lIns="0" rIns="0" tIns="0" bIns="0">
+            <a:spAutoFit/>
+          </a:bodyPr>
+          <a:lstStyle/>
+          <a:p>
+            <a:pPr algn="l"/>
+            <a:r>
+              <a:rPr sz="1300" b="1" i="0">
+                <a:solidFill>
+                  <a:srgbClr val="065A82"/>
+                </a:solidFill>
+                <a:latin typeface="Calibri"/>
+              </a:rPr>
+              <a:t>Top Countries</a:t>
+            </a:r>
+          </a:p>
+        </p:txBody>
+      </p:sp>
+      <p:sp>
+        <p:nvSpPr>
+          <p:cNvPr id="8" name="TextBox 7"/>
+          <p:cNvSpPr txBox="1"/>
+          <p:nvPr/>
+        </p:nvSpPr>
+        <p:spPr>
+          <a:xfrm>
+            <a:off x="594360" y="1417320"/>
+            <a:ext cx="1097280" cy="274320"/>
+          </a:xfrm>
+          <a:prstGeom prst="rect">
+            <a:avLst/>
+          </a:prstGeom>
+          <a:noFill/>
+        </p:spPr>
+        <p:txBody>
+          <a:bodyPr wrap="square" lIns="0" rIns="0" tIns="0" bIns="0">
+            <a:spAutoFit/>
+          </a:bodyPr>
+          <a:lstStyle/>
+          <a:p>
+            <a:pPr algn="l"/>
+            <a:r>
+              <a:rPr sz="1000" b="1" i="0">
+                <a:solidFill>
+                  <a:srgbClr val="64748B"/>
+                </a:solidFill>
+                <a:latin typeface="Calibri"/>
+              </a:rPr>
+              <a:t>Country</a:t>
+            </a:r>
+          </a:p>
+        </p:txBody>
+      </p:sp>
+      <p:sp>
+        <p:nvSpPr>
+          <p:cNvPr id="9" name="TextBox 8"/>
+          <p:cNvSpPr txBox="1"/>
+          <p:nvPr/>
+        </p:nvSpPr>
+        <p:spPr>
+          <a:xfrm>
+            <a:off x="2423160" y="1417320"/>
+            <a:ext cx="1097280" cy="274320"/>
+          </a:xfrm>
+          <a:prstGeom prst="rect">
+            <a:avLst/>
+          </a:prstGeom>
+          <a:noFill/>
+        </p:spPr>
+        <p:txBody>
+          <a:bodyPr wrap="square" lIns="0" rIns="0" tIns="0" bIns="0">
+            <a:spAutoFit/>
+          </a:bodyPr>
+          <a:lstStyle/>
+          <a:p>
+            <a:pPr algn="l"/>
+            <a:r>
+              <a:rPr sz="1000" b="1" i="0">
+                <a:solidFill>
+                  <a:srgbClr val="64748B"/>
+                </a:solidFill>
+                <a:latin typeface="Calibri"/>
+              </a:rPr>
+              <a:t>Jan %</a:t>
+            </a:r>
+          </a:p>
+        </p:txBody>
+      </p:sp>
+      <p:sp>
+        <p:nvSpPr>
+          <p:cNvPr id="10" name="TextBox 9"/>
+          <p:cNvSpPr txBox="1"/>
+          <p:nvPr/>
+        </p:nvSpPr>
+        <p:spPr>
+          <a:xfrm>
+            <a:off x="3520440" y="1417320"/>
+            <a:ext cx="1097280" cy="274320"/>
+          </a:xfrm>
+          <a:prstGeom prst="rect">
+            <a:avLst/>
+          </a:prstGeom>
+          <a:noFill/>
+        </p:spPr>
+        <p:txBody>
+          <a:bodyPr wrap="square" lIns="0" rIns="0" tIns="0" bIns="0">
+            <a:spAutoFit/>
+          </a:bodyPr>
+          <a:lstStyle/>
+          <a:p>
+            <a:pPr algn="l"/>
+            <a:r>
+              <a:rPr sz="1000" b="1" i="0">
+                <a:solidFill>
+                  <a:srgbClr val="64748B"/>
+                </a:solidFill>
+                <a:latin typeface="Calibri"/>
+              </a:rPr>
+              <a:t>Feb %</a:t>
+            </a:r>
+          </a:p>
+        </p:txBody>
+      </p:sp>
+      <p:sp>
+        <p:nvSpPr>
+          <p:cNvPr id="11" name="TextBox 10"/>
+          <p:cNvSpPr txBox="1"/>
+          <p:nvPr/>
+        </p:nvSpPr>
+        <p:spPr>
+          <a:xfrm>
+            <a:off x="4572000" y="1417320"/>
+            <a:ext cx="1097280" cy="274320"/>
+          </a:xfrm>
+          <a:prstGeom prst="rect">
+            <a:avLst/>
+          </a:prstGeom>
+          <a:noFill/>
+        </p:spPr>
+        <p:txBody>
+          <a:bodyPr wrap="square" lIns="0" rIns="0" tIns="0" bIns="0">
+            <a:spAutoFit/>
+          </a:bodyPr>
+          <a:lstStyle/>
+          <a:p>
+            <a:pPr algn="l"/>
+            <a:r>
+              <a:rPr sz="1000" b="1" i="0">
+                <a:solidFill>
+                  <a:srgbClr val="64748B"/>
+                </a:solidFill>
+                <a:latin typeface="Calibri"/>
+              </a:rPr>
+              <a:t>MoM Δ</a:t>
+            </a:r>
+          </a:p>
+        </p:txBody>
+      </p:sp>
+      <p:sp>
+        <p:nvSpPr>
+          <p:cNvPr id="12" name="Rectangle 11"/>
+          <p:cNvSpPr/>
+          <p:nvPr/>
+        </p:nvSpPr>
+        <p:spPr>
+          <a:xfrm>
+            <a:off x="411480" y="1737360"/>
+            <a:ext cx="5486400" cy="475488"/>
+          </a:xfrm>
+          <a:prstGeom prst="rect">
+            <a:avLst/>
+          </a:prstGeom>
+          <a:solidFill>
+            <a:srgbClr val="FFFFFF"/>
+          </a:solidFill>
+          <a:ln>
+            <a:noFill/>
+          </a:ln>
+        </p:spPr>
+        <p:style>
+          <a:lnRef idx="1">
+            <a:schemeClr val="accent1"/>
+          </a:lnRef>
+          <a:fillRef idx="3">
+            <a:schemeClr val="accent1"/>
+          </a:fillRef>
+          <a:effectRef idx="2">
+            <a:schemeClr val="accent1"/>
+          </a:effectRef>
+          <a:fontRef idx="minor">
+            <a:schemeClr val="lt1"/>
+          </a:fontRef>
+        </p:style>
+        <p:txBody>
+          <a:bodyPr rtlCol="0" anchor="ctr"/>
+          <a:lstStyle/>
+          <a:p>
+            <a:pPr algn="ctr"/>
+          </a:p>
+        </p:txBody>
+      </p:sp>
+      <p:sp>
+        <p:nvSpPr>
+          <p:cNvPr id="13" name="TextBox 12"/>
+          <p:cNvSpPr txBox="1"/>
+          <p:nvPr/>
+        </p:nvSpPr>
+        <p:spPr>
+          <a:xfrm>
+            <a:off x="594360" y="1810512"/>
+            <a:ext cx="1691640" cy="347472"/>
+          </a:xfrm>
+          <a:prstGeom prst="rect">
+            <a:avLst/>
+          </a:prstGeom>
+          <a:noFill/>
+        </p:spPr>
+        <p:txBody>
+          <a:bodyPr wrap="square" lIns="0" rIns="0" tIns="0" bIns="0">
+            <a:spAutoFit/>
+          </a:bodyPr>
+          <a:lstStyle/>
+          <a:p>
+            <a:pPr algn="l"/>
+            <a:r>
+              <a:rPr sz="1100" b="0" i="0">
+                <a:solidFill>
+                  <a:srgbClr val="1E293B"/>
+                </a:solidFill>
+                <a:latin typeface="Calibri"/>
+              </a:rPr>
+              <a:t>USA</a:t>
+            </a:r>
+          </a:p>
+        </p:txBody>
+      </p:sp>
+      <p:sp>
+        <p:nvSpPr>
+          <p:cNvPr id="14" name="TextBox 13"/>
+          <p:cNvSpPr txBox="1"/>
+          <p:nvPr/>
+        </p:nvSpPr>
+        <p:spPr>
+          <a:xfrm>
+            <a:off x="2423160" y="1810512"/>
+            <a:ext cx="1005840" cy="347472"/>
+          </a:xfrm>
+          <a:prstGeom prst="rect">
+            <a:avLst/>
+          </a:prstGeom>
+          <a:noFill/>
+        </p:spPr>
+        <p:txBody>
+          <a:bodyPr wrap="square" lIns="0" rIns="0" tIns="0" bIns="0">
+            <a:spAutoFit/>
+          </a:bodyPr>
+          <a:lstStyle/>
+          <a:p>
+            <a:pPr algn="ctr"/>
+            <a:r>
+              <a:rPr sz="1200" b="1" i="0">
+                <a:solidFill>
+                  <a:srgbClr val="065A82"/>
+                </a:solidFill>
+                <a:latin typeface="Calibri"/>
+              </a:rPr>
+              <a:t>73.4%</a:t>
+            </a:r>
+          </a:p>
+        </p:txBody>
+      </p:sp>
+      <p:sp>
+        <p:nvSpPr>
+          <p:cNvPr id="15" name="TextBox 14"/>
+          <p:cNvSpPr txBox="1"/>
+          <p:nvPr/>
+        </p:nvSpPr>
+        <p:spPr>
+          <a:xfrm>
+            <a:off x="3520440" y="1810512"/>
+            <a:ext cx="1005840" cy="347472"/>
+          </a:xfrm>
+          <a:prstGeom prst="rect">
+            <a:avLst/>
+          </a:prstGeom>
+          <a:noFill/>
+        </p:spPr>
+        <p:txBody>
+          <a:bodyPr wrap="square" lIns="0" rIns="0" tIns="0" bIns="0">
+            <a:spAutoFit/>
+          </a:bodyPr>
+          <a:lstStyle/>
+          <a:p>
+            <a:pPr algn="ctr"/>
+            <a:r>
+              <a:rPr sz="1200" b="1" i="0">
+                <a:solidFill>
+                  <a:srgbClr val="1C7293"/>
+                </a:solidFill>
+                <a:latin typeface="Calibri"/>
+              </a:rPr>
+              <a:t>84.4%</a:t>
+            </a:r>
+          </a:p>
+        </p:txBody>
+      </p:sp>
+      <p:sp>
+        <p:nvSpPr>
+          <p:cNvPr id="16" name="TextBox 15"/>
+          <p:cNvSpPr txBox="1"/>
+          <p:nvPr/>
+        </p:nvSpPr>
+        <p:spPr>
+          <a:xfrm>
+            <a:off x="4572000" y="1810512"/>
+            <a:ext cx="1188720" cy="347472"/>
+          </a:xfrm>
+          <a:prstGeom prst="rect">
+            <a:avLst/>
+          </a:prstGeom>
+          <a:noFill/>
+        </p:spPr>
+        <p:txBody>
+          <a:bodyPr wrap="square" lIns="0" rIns="0" tIns="0" bIns="0">
+            <a:spAutoFit/>
+          </a:bodyPr>
+          <a:lstStyle/>
+          <a:p>
+            <a:pPr algn="ctr"/>
+            <a:r>
+              <a:rPr sz="1200" b="1" i="0">
+                <a:solidFill>
+                  <a:srgbClr val="059669"/>
+                </a:solidFill>
+                <a:latin typeface="Calibri"/>
+              </a:rPr>
+              <a:t>+11.0pp</a:t>
+            </a:r>
+          </a:p>
+        </p:txBody>
+      </p:sp>
+      <p:sp>
+        <p:nvSpPr>
+          <p:cNvPr id="17" name="Rectangle 16"/>
+          <p:cNvSpPr/>
+          <p:nvPr/>
+        </p:nvSpPr>
+        <p:spPr>
+          <a:xfrm>
+            <a:off x="411480" y="2240280"/>
+            <a:ext cx="5486400" cy="475488"/>
+          </a:xfrm>
+          <a:prstGeom prst="rect">
+            <a:avLst/>
+          </a:prstGeom>
+          <a:solidFill>
+            <a:srgbClr val="E2E8F0"/>
+          </a:solidFill>
+          <a:ln>
+            <a:noFill/>
+          </a:ln>
+        </p:spPr>
+        <p:style>
+          <a:lnRef idx="1">
+            <a:schemeClr val="accent1"/>
+          </a:lnRef>
+          <a:fillRef idx="3">
+            <a:schemeClr val="accent1"/>
+          </a:fillRef>
+          <a:effectRef idx="2">
+            <a:schemeClr val="accent1"/>
+          </a:effectRef>
+          <a:fontRef idx="minor">
+            <a:schemeClr val="lt1"/>
+          </a:fontRef>
+        </p:style>
+        <p:txBody>
+          <a:bodyPr rtlCol="0" anchor="ctr"/>
+          <a:lstStyle/>
+          <a:p>
+            <a:pPr algn="ctr"/>
+          </a:p>
+        </p:txBody>
+      </p:sp>
+      <p:sp>
+        <p:nvSpPr>
+          <p:cNvPr id="18" name="TextBox 17"/>
+          <p:cNvSpPr txBox="1"/>
+          <p:nvPr/>
+        </p:nvSpPr>
+        <p:spPr>
+          <a:xfrm>
+            <a:off x="594360" y="2313432"/>
+            <a:ext cx="1691640" cy="347472"/>
+          </a:xfrm>
+          <a:prstGeom prst="rect">
+            <a:avLst/>
+          </a:prstGeom>
+          <a:noFill/>
+        </p:spPr>
+        <p:txBody>
+          <a:bodyPr wrap="square" lIns="0" rIns="0" tIns="0" bIns="0">
+            <a:spAutoFit/>
+          </a:bodyPr>
+          <a:lstStyle/>
+          <a:p>
+            <a:pPr algn="l"/>
+            <a:r>
+              <a:rPr sz="1100" b="0" i="0">
+                <a:solidFill>
+                  <a:srgbClr val="1E293B"/>
+                </a:solidFill>
+                <a:latin typeface="Calibri"/>
+              </a:rPr>
+              <a:t>UK</a:t>
+            </a:r>
+          </a:p>
+        </p:txBody>
+      </p:sp>
+      <p:sp>
+        <p:nvSpPr>
+          <p:cNvPr id="19" name="TextBox 18"/>
+          <p:cNvSpPr txBox="1"/>
+          <p:nvPr/>
+        </p:nvSpPr>
+        <p:spPr>
+          <a:xfrm>
+            <a:off x="2423160" y="2313432"/>
+            <a:ext cx="1005840" cy="347472"/>
+          </a:xfrm>
+          <a:prstGeom prst="rect">
+            <a:avLst/>
+          </a:prstGeom>
+          <a:noFill/>
+        </p:spPr>
+        <p:txBody>
+          <a:bodyPr wrap="square" lIns="0" rIns="0" tIns="0" bIns="0">
+            <a:spAutoFit/>
+          </a:bodyPr>
+          <a:lstStyle/>
+          <a:p>
+            <a:pPr algn="ctr"/>
+            <a:r>
+              <a:rPr sz="1200" b="1" i="0">
+                <a:solidFill>
+                  <a:srgbClr val="065A82"/>
+                </a:solidFill>
+                <a:latin typeface="Calibri"/>
+              </a:rPr>
+              <a:t> 9.2%</a:t>
+            </a:r>
+          </a:p>
+        </p:txBody>
+      </p:sp>
+      <p:sp>
+        <p:nvSpPr>
+          <p:cNvPr id="20" name="TextBox 19"/>
+          <p:cNvSpPr txBox="1"/>
+          <p:nvPr/>
+        </p:nvSpPr>
+        <p:spPr>
+          <a:xfrm>
+            <a:off x="3520440" y="2313432"/>
+            <a:ext cx="1005840" cy="347472"/>
+          </a:xfrm>
+          <a:prstGeom prst="rect">
+            <a:avLst/>
+          </a:prstGeom>
+          <a:noFill/>
+        </p:spPr>
+        <p:txBody>
+          <a:bodyPr wrap="square" lIns="0" rIns="0" tIns="0" bIns="0">
+            <a:spAutoFit/>
+          </a:bodyPr>
+          <a:lstStyle/>
+          <a:p>
+            <a:pPr algn="ctr"/>
+            <a:r>
+              <a:rPr sz="1200" b="1" i="0">
+                <a:solidFill>
+                  <a:srgbClr val="1C7293"/>
+                </a:solidFill>
+                <a:latin typeface="Calibri"/>
+              </a:rPr>
+              <a:t> 2.4%</a:t>
+            </a:r>
+          </a:p>
+        </p:txBody>
+      </p:sp>
+      <p:sp>
+        <p:nvSpPr>
+          <p:cNvPr id="21" name="TextBox 20"/>
+          <p:cNvSpPr txBox="1"/>
+          <p:nvPr/>
+        </p:nvSpPr>
+        <p:spPr>
+          <a:xfrm>
+            <a:off x="4572000" y="2313432"/>
+            <a:ext cx="1188720" cy="347472"/>
+          </a:xfrm>
+          <a:prstGeom prst="rect">
+            <a:avLst/>
+          </a:prstGeom>
+          <a:noFill/>
+        </p:spPr>
+        <p:txBody>
+          <a:bodyPr wrap="square" lIns="0" rIns="0" tIns="0" bIns="0">
+            <a:spAutoFit/>
+          </a:bodyPr>
+          <a:lstStyle/>
+          <a:p>
+            <a:pPr algn="ctr"/>
+            <a:r>
+              <a:rPr sz="1200" b="1" i="0">
+                <a:solidFill>
+                  <a:srgbClr val="DC2626"/>
+                </a:solidFill>
+                <a:latin typeface="Calibri"/>
+              </a:rPr>
+              <a:t> -6.8pp</a:t>
+            </a:r>
+          </a:p>
+        </p:txBody>
+      </p:sp>
+      <p:sp>
+        <p:nvSpPr>
+          <p:cNvPr id="22" name="Rectangle 21"/>
+          <p:cNvSpPr/>
+          <p:nvPr/>
+        </p:nvSpPr>
+        <p:spPr>
+          <a:xfrm>
+            <a:off x="411480" y="2743200"/>
+            <a:ext cx="5486400" cy="475488"/>
+          </a:xfrm>
+          <a:prstGeom prst="rect">
+            <a:avLst/>
+          </a:prstGeom>
+          <a:solidFill>
+            <a:srgbClr val="FFFFFF"/>
+          </a:solidFill>
+          <a:ln>
+            <a:noFill/>
+          </a:ln>
+        </p:spPr>
+        <p:style>
+          <a:lnRef idx="1">
+            <a:schemeClr val="accent1"/>
+          </a:lnRef>
+          <a:fillRef idx="3">
+            <a:schemeClr val="accent1"/>
+          </a:fillRef>
+          <a:effectRef idx="2">
+            <a:schemeClr val="accent1"/>
+          </a:effectRef>
+          <a:fontRef idx="minor">
+            <a:schemeClr val="lt1"/>
+          </a:fontRef>
+        </p:style>
+        <p:txBody>
+          <a:bodyPr rtlCol="0" anchor="ctr"/>
+          <a:lstStyle/>
+          <a:p>
+            <a:pPr algn="ctr"/>
+          </a:p>
+        </p:txBody>
+      </p:sp>
+      <p:sp>
+        <p:nvSpPr>
+          <p:cNvPr id="23" name="TextBox 22"/>
+          <p:cNvSpPr txBox="1"/>
+          <p:nvPr/>
+        </p:nvSpPr>
+        <p:spPr>
+          <a:xfrm>
+            <a:off x="594360" y="2816352"/>
+            <a:ext cx="1691640" cy="347472"/>
+          </a:xfrm>
+          <a:prstGeom prst="rect">
+            <a:avLst/>
+          </a:prstGeom>
+          <a:noFill/>
+        </p:spPr>
+        <p:txBody>
+          <a:bodyPr wrap="square" lIns="0" rIns="0" tIns="0" bIns="0">
+            <a:spAutoFit/>
+          </a:bodyPr>
+          <a:lstStyle/>
+          <a:p>
+            <a:pPr algn="l"/>
+            <a:r>
+              <a:rPr sz="1100" b="0" i="0">
+                <a:solidFill>
+                  <a:srgbClr val="1E293B"/>
+                </a:solidFill>
+                <a:latin typeface="Calibri"/>
+              </a:rPr>
+              <a:t>Germany</a:t>
+            </a:r>
+          </a:p>
+        </p:txBody>
+      </p:sp>
+      <p:sp>
+        <p:nvSpPr>
+          <p:cNvPr id="24" name="TextBox 23"/>
+          <p:cNvSpPr txBox="1"/>
+          <p:nvPr/>
+        </p:nvSpPr>
+        <p:spPr>
+          <a:xfrm>
+            <a:off x="2423160" y="2816352"/>
+            <a:ext cx="1005840" cy="347472"/>
+          </a:xfrm>
+          <a:prstGeom prst="rect">
+            <a:avLst/>
+          </a:prstGeom>
+          <a:noFill/>
+        </p:spPr>
+        <p:txBody>
+          <a:bodyPr wrap="square" lIns="0" rIns="0" tIns="0" bIns="0">
+            <a:spAutoFit/>
+          </a:bodyPr>
+          <a:lstStyle/>
+          <a:p>
+            <a:pPr algn="ctr"/>
+            <a:r>
+              <a:rPr sz="1200" b="1" i="0">
+                <a:solidFill>
+                  <a:srgbClr val="065A82"/>
+                </a:solidFill>
+                <a:latin typeface="Calibri"/>
+              </a:rPr>
+              <a:t> 3.7%</a:t>
+            </a:r>
+          </a:p>
+        </p:txBody>
+      </p:sp>
+      <p:sp>
+        <p:nvSpPr>
+          <p:cNvPr id="25" name="TextBox 24"/>
+          <p:cNvSpPr txBox="1"/>
+          <p:nvPr/>
+        </p:nvSpPr>
+        <p:spPr>
+          <a:xfrm>
+            <a:off x="3520440" y="2816352"/>
+            <a:ext cx="1005840" cy="347472"/>
+          </a:xfrm>
+          <a:prstGeom prst="rect">
+            <a:avLst/>
+          </a:prstGeom>
+          <a:noFill/>
+        </p:spPr>
+        <p:txBody>
+          <a:bodyPr wrap="square" lIns="0" rIns="0" tIns="0" bIns="0">
+            <a:spAutoFit/>
+          </a:bodyPr>
+          <a:lstStyle/>
+          <a:p>
+            <a:pPr algn="ctr"/>
+            <a:r>
+              <a:rPr sz="1200" b="1" i="0">
+                <a:solidFill>
+                  <a:srgbClr val="1C7293"/>
+                </a:solidFill>
+                <a:latin typeface="Calibri"/>
+              </a:rPr>
+              <a:t> 1.9%</a:t>
+            </a:r>
+          </a:p>
+        </p:txBody>
+      </p:sp>
+      <p:sp>
+        <p:nvSpPr>
+          <p:cNvPr id="26" name="TextBox 25"/>
+          <p:cNvSpPr txBox="1"/>
+          <p:nvPr/>
+        </p:nvSpPr>
+        <p:spPr>
+          <a:xfrm>
+            <a:off x="4572000" y="2816352"/>
+            <a:ext cx="1188720" cy="347472"/>
+          </a:xfrm>
+          <a:prstGeom prst="rect">
+            <a:avLst/>
+          </a:prstGeom>
+          <a:noFill/>
+        </p:spPr>
+        <p:txBody>
+          <a:bodyPr wrap="square" lIns="0" rIns="0" tIns="0" bIns="0">
+            <a:spAutoFit/>
+          </a:bodyPr>
+          <a:lstStyle/>
+          <a:p>
+            <a:pPr algn="ctr"/>
+            <a:r>
+              <a:rPr sz="1200" b="1" i="0">
+                <a:solidFill>
+                  <a:srgbClr val="DC2626"/>
+                </a:solidFill>
+                <a:latin typeface="Calibri"/>
+              </a:rPr>
+              <a:t> -1.8pp</a:t>
+            </a:r>
+          </a:p>
+        </p:txBody>
+      </p:sp>
+      <p:sp>
+        <p:nvSpPr>
+          <p:cNvPr id="27" name="Rectangle 26"/>
+          <p:cNvSpPr/>
+          <p:nvPr/>
+        </p:nvSpPr>
+        <p:spPr>
+          <a:xfrm>
+            <a:off x="411480" y="3246120"/>
+            <a:ext cx="5486400" cy="475488"/>
+          </a:xfrm>
+          <a:prstGeom prst="rect">
+            <a:avLst/>
+          </a:prstGeom>
+          <a:solidFill>
+            <a:srgbClr val="E2E8F0"/>
+          </a:solidFill>
+          <a:ln>
+            <a:noFill/>
+          </a:ln>
+        </p:spPr>
+        <p:style>
+          <a:lnRef idx="1">
+            <a:schemeClr val="accent1"/>
+          </a:lnRef>
+          <a:fillRef idx="3">
+            <a:schemeClr val="accent1"/>
+          </a:fillRef>
+          <a:effectRef idx="2">
+            <a:schemeClr val="accent1"/>
+          </a:effectRef>
+          <a:fontRef idx="minor">
+            <a:schemeClr val="lt1"/>
+          </a:fontRef>
+        </p:style>
+        <p:txBody>
+          <a:bodyPr rtlCol="0" anchor="ctr"/>
+          <a:lstStyle/>
+          <a:p>
+            <a:pPr algn="ctr"/>
+          </a:p>
+        </p:txBody>
+      </p:sp>
+      <p:sp>
+        <p:nvSpPr>
+          <p:cNvPr id="28" name="TextBox 27"/>
+          <p:cNvSpPr txBox="1"/>
+          <p:nvPr/>
+        </p:nvSpPr>
+        <p:spPr>
+          <a:xfrm>
+            <a:off x="594360" y="3319272"/>
+            <a:ext cx="1691640" cy="347472"/>
+          </a:xfrm>
+          <a:prstGeom prst="rect">
+            <a:avLst/>
+          </a:prstGeom>
+          <a:noFill/>
+        </p:spPr>
+        <p:txBody>
+          <a:bodyPr wrap="square" lIns="0" rIns="0" tIns="0" bIns="0">
+            <a:spAutoFit/>
+          </a:bodyPr>
+          <a:lstStyle/>
+          <a:p>
+            <a:pPr algn="l"/>
+            <a:r>
+              <a:rPr sz="1100" b="0" i="0">
+                <a:solidFill>
+                  <a:srgbClr val="1E293B"/>
+                </a:solidFill>
+                <a:latin typeface="Calibri"/>
+              </a:rPr>
+              <a:t>India</a:t>
+            </a:r>
+          </a:p>
+        </p:txBody>
+      </p:sp>
+      <p:sp>
+        <p:nvSpPr>
+          <p:cNvPr id="29" name="TextBox 28"/>
+          <p:cNvSpPr txBox="1"/>
+          <p:nvPr/>
+        </p:nvSpPr>
+        <p:spPr>
+          <a:xfrm>
+            <a:off x="2423160" y="3319272"/>
+            <a:ext cx="1005840" cy="347472"/>
+          </a:xfrm>
+          <a:prstGeom prst="rect">
+            <a:avLst/>
+          </a:prstGeom>
+          <a:noFill/>
+        </p:spPr>
+        <p:txBody>
+          <a:bodyPr wrap="square" lIns="0" rIns="0" tIns="0" bIns="0">
+            <a:spAutoFit/>
+          </a:bodyPr>
+          <a:lstStyle/>
+          <a:p>
+            <a:pPr algn="ctr"/>
+            <a:r>
+              <a:rPr sz="1200" b="1" i="0">
+                <a:solidFill>
+                  <a:srgbClr val="065A82"/>
+                </a:solidFill>
+                <a:latin typeface="Calibri"/>
+              </a:rPr>
+              <a:t> 1.3%</a:t>
+            </a:r>
+          </a:p>
+        </p:txBody>
+      </p:sp>
+      <p:sp>
+        <p:nvSpPr>
+          <p:cNvPr id="30" name="TextBox 29"/>
+          <p:cNvSpPr txBox="1"/>
+          <p:nvPr/>
+        </p:nvSpPr>
+        <p:spPr>
+          <a:xfrm>
+            <a:off x="3520440" y="3319272"/>
+            <a:ext cx="1005840" cy="347472"/>
+          </a:xfrm>
+          <a:prstGeom prst="rect">
+            <a:avLst/>
+          </a:prstGeom>
+          <a:noFill/>
+        </p:spPr>
+        <p:txBody>
+          <a:bodyPr wrap="square" lIns="0" rIns="0" tIns="0" bIns="0">
+            <a:spAutoFit/>
+          </a:bodyPr>
+          <a:lstStyle/>
+          <a:p>
+            <a:pPr algn="ctr"/>
+            <a:r>
+              <a:rPr sz="1200" b="1" i="0">
+                <a:solidFill>
+                  <a:srgbClr val="1C7293"/>
+                </a:solidFill>
+                <a:latin typeface="Calibri"/>
+              </a:rPr>
+              <a:t> 1.5%</a:t>
+            </a:r>
+          </a:p>
+        </p:txBody>
+      </p:sp>
+      <p:sp>
+        <p:nvSpPr>
+          <p:cNvPr id="31" name="TextBox 30"/>
+          <p:cNvSpPr txBox="1"/>
+          <p:nvPr/>
+        </p:nvSpPr>
+        <p:spPr>
+          <a:xfrm>
+            <a:off x="4572000" y="3319272"/>
+            <a:ext cx="1188720" cy="347472"/>
+          </a:xfrm>
+          <a:prstGeom prst="rect">
+            <a:avLst/>
+          </a:prstGeom>
+          <a:noFill/>
+        </p:spPr>
+        <p:txBody>
+          <a:bodyPr wrap="square" lIns="0" rIns="0" tIns="0" bIns="0">
+            <a:spAutoFit/>
+          </a:bodyPr>
+          <a:lstStyle/>
+          <a:p>
+            <a:pPr algn="ctr"/>
+            <a:r>
+              <a:rPr sz="1200" b="1" i="0">
+                <a:solidFill>
+                  <a:srgbClr val="059669"/>
+                </a:solidFill>
+                <a:latin typeface="Calibri"/>
+              </a:rPr>
+              <a:t> +0.2pp</a:t>
+            </a:r>
+          </a:p>
+        </p:txBody>
+      </p:sp>
+      <p:sp>
+        <p:nvSpPr>
+          <p:cNvPr id="32" name="Rectangle 31"/>
+          <p:cNvSpPr/>
+          <p:nvPr/>
+        </p:nvSpPr>
+        <p:spPr>
+          <a:xfrm>
+            <a:off x="411480" y="3749039"/>
+            <a:ext cx="5486400" cy="475488"/>
+          </a:xfrm>
+          <a:prstGeom prst="rect">
+            <a:avLst/>
+          </a:prstGeom>
+          <a:solidFill>
+            <a:srgbClr val="FFFFFF"/>
+          </a:solidFill>
+          <a:ln>
+            <a:noFill/>
+          </a:ln>
+        </p:spPr>
+        <p:style>
+          <a:lnRef idx="1">
+            <a:schemeClr val="accent1"/>
+          </a:lnRef>
+          <a:fillRef idx="3">
+            <a:schemeClr val="accent1"/>
+          </a:fillRef>
+          <a:effectRef idx="2">
+            <a:schemeClr val="accent1"/>
+          </a:effectRef>
+          <a:fontRef idx="minor">
+            <a:schemeClr val="lt1"/>
+          </a:fontRef>
+        </p:style>
+        <p:txBody>
+          <a:bodyPr rtlCol="0" anchor="ctr"/>
+          <a:lstStyle/>
+          <a:p>
+            <a:pPr algn="ctr"/>
+          </a:p>
+        </p:txBody>
+      </p:sp>
+      <p:sp>
+        <p:nvSpPr>
+          <p:cNvPr id="33" name="TextBox 32"/>
+          <p:cNvSpPr txBox="1"/>
+          <p:nvPr/>
+        </p:nvSpPr>
+        <p:spPr>
+          <a:xfrm>
+            <a:off x="594360" y="3822191"/>
+            <a:ext cx="1691640" cy="347472"/>
+          </a:xfrm>
+          <a:prstGeom prst="rect">
+            <a:avLst/>
+          </a:prstGeom>
+          <a:noFill/>
+        </p:spPr>
+        <p:txBody>
+          <a:bodyPr wrap="square" lIns="0" rIns="0" tIns="0" bIns="0">
+            <a:spAutoFit/>
+          </a:bodyPr>
+          <a:lstStyle/>
+          <a:p>
+            <a:pPr algn="l"/>
+            <a:r>
+              <a:rPr sz="1100" b="0" i="0">
+                <a:solidFill>
+                  <a:srgbClr val="1E293B"/>
+                </a:solidFill>
+                <a:latin typeface="Calibri"/>
+              </a:rPr>
+              <a:t>Canada</a:t>
+            </a:r>
+          </a:p>
+        </p:txBody>
+      </p:sp>
+      <p:sp>
+        <p:nvSpPr>
+          <p:cNvPr id="34" name="TextBox 33"/>
+          <p:cNvSpPr txBox="1"/>
+          <p:nvPr/>
+        </p:nvSpPr>
+        <p:spPr>
+          <a:xfrm>
+            <a:off x="2423160" y="3822191"/>
+            <a:ext cx="1005840" cy="347472"/>
+          </a:xfrm>
+          <a:prstGeom prst="rect">
+            <a:avLst/>
+          </a:prstGeom>
+          <a:noFill/>
+        </p:spPr>
+        <p:txBody>
+          <a:bodyPr wrap="square" lIns="0" rIns="0" tIns="0" bIns="0">
+            <a:spAutoFit/>
+          </a:bodyPr>
+          <a:lstStyle/>
+          <a:p>
+            <a:pPr algn="ctr"/>
+            <a:r>
+              <a:rPr sz="1200" b="1" i="0">
+                <a:solidFill>
+                  <a:srgbClr val="065A82"/>
+                </a:solidFill>
+                <a:latin typeface="Calibri"/>
+              </a:rPr>
+              <a:t> 1.2%</a:t>
+            </a:r>
+          </a:p>
+        </p:txBody>
+      </p:sp>
+      <p:sp>
+        <p:nvSpPr>
+          <p:cNvPr id="35" name="TextBox 34"/>
+          <p:cNvSpPr txBox="1"/>
+          <p:nvPr/>
+        </p:nvSpPr>
+        <p:spPr>
+          <a:xfrm>
+            <a:off x="3520440" y="3822191"/>
+            <a:ext cx="1005840" cy="347472"/>
+          </a:xfrm>
+          <a:prstGeom prst="rect">
+            <a:avLst/>
+          </a:prstGeom>
+          <a:noFill/>
+        </p:spPr>
+        <p:txBody>
+          <a:bodyPr wrap="square" lIns="0" rIns="0" tIns="0" bIns="0">
+            <a:spAutoFit/>
+          </a:bodyPr>
+          <a:lstStyle/>
+          <a:p>
+            <a:pPr algn="ctr"/>
+            <a:r>
+              <a:rPr sz="1200" b="1" i="0">
+                <a:solidFill>
+                  <a:srgbClr val="1C7293"/>
+                </a:solidFill>
+                <a:latin typeface="Calibri"/>
+              </a:rPr>
+              <a:t> 1.4%</a:t>
+            </a:r>
+          </a:p>
+        </p:txBody>
+      </p:sp>
+      <p:sp>
+        <p:nvSpPr>
+          <p:cNvPr id="36" name="TextBox 35"/>
+          <p:cNvSpPr txBox="1"/>
+          <p:nvPr/>
+        </p:nvSpPr>
+        <p:spPr>
+          <a:xfrm>
+            <a:off x="4572000" y="3822191"/>
+            <a:ext cx="1188720" cy="347472"/>
+          </a:xfrm>
+          <a:prstGeom prst="rect">
+            <a:avLst/>
+          </a:prstGeom>
+          <a:noFill/>
+        </p:spPr>
+        <p:txBody>
+          <a:bodyPr wrap="square" lIns="0" rIns="0" tIns="0" bIns="0">
+            <a:spAutoFit/>
+          </a:bodyPr>
+          <a:lstStyle/>
+          <a:p>
+            <a:pPr algn="ctr"/>
+            <a:r>
+              <a:rPr sz="1200" b="1" i="0">
+                <a:solidFill>
+                  <a:srgbClr val="059669"/>
+                </a:solidFill>
+                <a:latin typeface="Calibri"/>
+              </a:rPr>
+              <a:t> +0.2pp</a:t>
+            </a:r>
+          </a:p>
+        </p:txBody>
+      </p:sp>
+      <p:sp>
+        <p:nvSpPr>
+          <p:cNvPr id="37" name="Rectangle 36"/>
+          <p:cNvSpPr/>
+          <p:nvPr/>
+        </p:nvSpPr>
+        <p:spPr>
+          <a:xfrm>
+            <a:off x="411480" y="4251960"/>
+            <a:ext cx="5486400" cy="475488"/>
+          </a:xfrm>
+          <a:prstGeom prst="rect">
+            <a:avLst/>
+          </a:prstGeom>
+          <a:solidFill>
+            <a:srgbClr val="E2E8F0"/>
+          </a:solidFill>
+          <a:ln>
+            <a:noFill/>
+          </a:ln>
+        </p:spPr>
+        <p:style>
+          <a:lnRef idx="1">
+            <a:schemeClr val="accent1"/>
+          </a:lnRef>
+          <a:fillRef idx="3">
+            <a:schemeClr val="accent1"/>
+          </a:fillRef>
+          <a:effectRef idx="2">
+            <a:schemeClr val="accent1"/>
+          </a:effectRef>
+          <a:fontRef idx="minor">
+            <a:schemeClr val="lt1"/>
+          </a:fontRef>
+        </p:style>
+        <p:txBody>
+          <a:bodyPr rtlCol="0" anchor="ctr"/>
+          <a:lstStyle/>
+          <a:p>
+            <a:pPr algn="ctr"/>
+          </a:p>
+        </p:txBody>
+      </p:sp>
+      <p:sp>
+        <p:nvSpPr>
+          <p:cNvPr id="38" name="TextBox 37"/>
+          <p:cNvSpPr txBox="1"/>
+          <p:nvPr/>
+        </p:nvSpPr>
+        <p:spPr>
+          <a:xfrm>
+            <a:off x="594360" y="4325112"/>
+            <a:ext cx="1691640" cy="347472"/>
+          </a:xfrm>
+          <a:prstGeom prst="rect">
+            <a:avLst/>
+          </a:prstGeom>
+          <a:noFill/>
+        </p:spPr>
+        <p:txBody>
+          <a:bodyPr wrap="square" lIns="0" rIns="0" tIns="0" bIns="0">
+            <a:spAutoFit/>
+          </a:bodyPr>
+          <a:lstStyle/>
+          <a:p>
+            <a:pPr algn="l"/>
+            <a:r>
+              <a:rPr sz="1100" b="0" i="0">
+                <a:solidFill>
+                  <a:srgbClr val="1E293B"/>
+                </a:solidFill>
+                <a:latin typeface="Calibri"/>
+              </a:rPr>
+              <a:t>China</a:t>
+            </a:r>
+          </a:p>
+        </p:txBody>
+      </p:sp>
+      <p:sp>
+        <p:nvSpPr>
+          <p:cNvPr id="39" name="TextBox 38"/>
+          <p:cNvSpPr txBox="1"/>
+          <p:nvPr/>
+        </p:nvSpPr>
+        <p:spPr>
+          <a:xfrm>
+            <a:off x="2423160" y="4325112"/>
+            <a:ext cx="1005840" cy="347472"/>
+          </a:xfrm>
+          <a:prstGeom prst="rect">
+            <a:avLst/>
+          </a:prstGeom>
+          <a:noFill/>
+        </p:spPr>
+        <p:txBody>
+          <a:bodyPr wrap="square" lIns="0" rIns="0" tIns="0" bIns="0">
+            <a:spAutoFit/>
+          </a:bodyPr>
+          <a:lstStyle/>
+          <a:p>
+            <a:pPr algn="ctr"/>
+            <a:r>
+              <a:rPr sz="1200" b="1" i="0">
+                <a:solidFill>
+                  <a:srgbClr val="065A82"/>
+                </a:solidFill>
+                <a:latin typeface="Calibri"/>
+              </a:rPr>
+              <a:t> 1.1%</a:t>
+            </a:r>
+          </a:p>
+        </p:txBody>
+      </p:sp>
+      <p:sp>
+        <p:nvSpPr>
+          <p:cNvPr id="40" name="TextBox 39"/>
+          <p:cNvSpPr txBox="1"/>
+          <p:nvPr/>
+        </p:nvSpPr>
+        <p:spPr>
+          <a:xfrm>
+            <a:off x="3520440" y="4325112"/>
+            <a:ext cx="1005840" cy="347472"/>
+          </a:xfrm>
+          <a:prstGeom prst="rect">
+            <a:avLst/>
+          </a:prstGeom>
+          <a:noFill/>
+        </p:spPr>
+        <p:txBody>
+          <a:bodyPr wrap="square" lIns="0" rIns="0" tIns="0" bIns="0">
+            <a:spAutoFit/>
+          </a:bodyPr>
+          <a:lstStyle/>
+          <a:p>
+            <a:pPr algn="ctr"/>
+            <a:r>
+              <a:rPr sz="1200" b="1" i="0">
+                <a:solidFill>
+                  <a:srgbClr val="1C7293"/>
+                </a:solidFill>
+                <a:latin typeface="Calibri"/>
+              </a:rPr>
+              <a:t> 0.7%</a:t>
+            </a:r>
+          </a:p>
+        </p:txBody>
+      </p:sp>
+      <p:sp>
+        <p:nvSpPr>
+          <p:cNvPr id="41" name="TextBox 40"/>
+          <p:cNvSpPr txBox="1"/>
+          <p:nvPr/>
+        </p:nvSpPr>
+        <p:spPr>
+          <a:xfrm>
+            <a:off x="4572000" y="4325112"/>
+            <a:ext cx="1188720" cy="347472"/>
+          </a:xfrm>
+          <a:prstGeom prst="rect">
+            <a:avLst/>
+          </a:prstGeom>
+          <a:noFill/>
+        </p:spPr>
+        <p:txBody>
+          <a:bodyPr wrap="square" lIns="0" rIns="0" tIns="0" bIns="0">
+            <a:spAutoFit/>
+          </a:bodyPr>
+          <a:lstStyle/>
+          <a:p>
+            <a:pPr algn="ctr"/>
+            <a:r>
+              <a:rPr sz="1200" b="1" i="0">
+                <a:solidFill>
+                  <a:srgbClr val="D97706"/>
+                </a:solidFill>
+                <a:latin typeface="Calibri"/>
+              </a:rPr>
+              <a:t> -0.4pp</a:t>
+            </a:r>
+          </a:p>
+        </p:txBody>
+      </p:sp>
+      <p:sp>
+        <p:nvSpPr>
+          <p:cNvPr id="42" name="Rectangle 41"/>
+          <p:cNvSpPr/>
+          <p:nvPr/>
+        </p:nvSpPr>
+        <p:spPr>
+          <a:xfrm>
+            <a:off x="411480" y="4754880"/>
+            <a:ext cx="5486400" cy="475488"/>
+          </a:xfrm>
+          <a:prstGeom prst="rect">
+            <a:avLst/>
+          </a:prstGeom>
+          <a:solidFill>
+            <a:srgbClr val="FFFFFF"/>
+          </a:solidFill>
+          <a:ln>
+            <a:noFill/>
+          </a:ln>
+        </p:spPr>
+        <p:style>
+          <a:lnRef idx="1">
+            <a:schemeClr val="accent1"/>
+          </a:lnRef>
+          <a:fillRef idx="3">
+            <a:schemeClr val="accent1"/>
+          </a:fillRef>
+          <a:effectRef idx="2">
+            <a:schemeClr val="accent1"/>
+          </a:effectRef>
+          <a:fontRef idx="minor">
+            <a:schemeClr val="lt1"/>
+          </a:fontRef>
+        </p:style>
+        <p:txBody>
+          <a:bodyPr rtlCol="0" anchor="ctr"/>
+          <a:lstStyle/>
+          <a:p>
+            <a:pPr algn="ctr"/>
+          </a:p>
+        </p:txBody>
+      </p:sp>
+      <p:sp>
+        <p:nvSpPr>
+          <p:cNvPr id="43" name="TextBox 42"/>
+          <p:cNvSpPr txBox="1"/>
+          <p:nvPr/>
+        </p:nvSpPr>
+        <p:spPr>
+          <a:xfrm>
+            <a:off x="594360" y="4828032"/>
+            <a:ext cx="1691640" cy="347472"/>
+          </a:xfrm>
+          <a:prstGeom prst="rect">
+            <a:avLst/>
+          </a:prstGeom>
+          <a:noFill/>
+        </p:spPr>
+        <p:txBody>
+          <a:bodyPr wrap="square" lIns="0" rIns="0" tIns="0" bIns="0">
+            <a:spAutoFit/>
+          </a:bodyPr>
+          <a:lstStyle/>
+          <a:p>
+            <a:pPr algn="l"/>
+            <a:r>
+              <a:rPr sz="1100" b="0" i="0">
+                <a:solidFill>
+                  <a:srgbClr val="1E293B"/>
+                </a:solidFill>
+                <a:latin typeface="Calibri"/>
+              </a:rPr>
+              <a:t>Taiwan</a:t>
+            </a:r>
+          </a:p>
+        </p:txBody>
+      </p:sp>
+      <p:sp>
+        <p:nvSpPr>
+          <p:cNvPr id="44" name="TextBox 43"/>
+          <p:cNvSpPr txBox="1"/>
+          <p:nvPr/>
+        </p:nvSpPr>
+        <p:spPr>
+          <a:xfrm>
+            <a:off x="2423160" y="4828032"/>
+            <a:ext cx="1005840" cy="347472"/>
+          </a:xfrm>
+          <a:prstGeom prst="rect">
+            <a:avLst/>
+          </a:prstGeom>
+          <a:noFill/>
+        </p:spPr>
+        <p:txBody>
+          <a:bodyPr wrap="square" lIns="0" rIns="0" tIns="0" bIns="0">
+            <a:spAutoFit/>
+          </a:bodyPr>
+          <a:lstStyle/>
+          <a:p>
+            <a:pPr algn="ctr"/>
+            <a:r>
+              <a:rPr sz="1200" b="1" i="0">
+                <a:solidFill>
+                  <a:srgbClr val="065A82"/>
+                </a:solidFill>
+                <a:latin typeface="Calibri"/>
+              </a:rPr>
+              <a:t> 0.9%</a:t>
+            </a:r>
+          </a:p>
+        </p:txBody>
+      </p:sp>
+      <p:sp>
+        <p:nvSpPr>
+          <p:cNvPr id="45" name="TextBox 44"/>
+          <p:cNvSpPr txBox="1"/>
+          <p:nvPr/>
+        </p:nvSpPr>
+        <p:spPr>
+          <a:xfrm>
+            <a:off x="3520440" y="4828032"/>
+            <a:ext cx="1005840" cy="347472"/>
+          </a:xfrm>
+          <a:prstGeom prst="rect">
+            <a:avLst/>
+          </a:prstGeom>
+          <a:noFill/>
+        </p:spPr>
+        <p:txBody>
+          <a:bodyPr wrap="square" lIns="0" rIns="0" tIns="0" bIns="0">
+            <a:spAutoFit/>
+          </a:bodyPr>
+          <a:lstStyle/>
+          <a:p>
+            <a:pPr algn="ctr"/>
+            <a:r>
+              <a:rPr sz="1200" b="1" i="0">
+                <a:solidFill>
+                  <a:srgbClr val="1C7293"/>
+                </a:solidFill>
+                <a:latin typeface="Calibri"/>
+              </a:rPr>
+              <a:t> 0.7%</a:t>
+            </a:r>
+          </a:p>
+        </p:txBody>
+      </p:sp>
+      <p:sp>
+        <p:nvSpPr>
+          <p:cNvPr id="46" name="TextBox 45"/>
+          <p:cNvSpPr txBox="1"/>
+          <p:nvPr/>
+        </p:nvSpPr>
+        <p:spPr>
+          <a:xfrm>
+            <a:off x="4572000" y="4828032"/>
+            <a:ext cx="1188720" cy="347472"/>
+          </a:xfrm>
+          <a:prstGeom prst="rect">
+            <a:avLst/>
+          </a:prstGeom>
+          <a:noFill/>
+        </p:spPr>
+        <p:txBody>
+          <a:bodyPr wrap="square" lIns="0" rIns="0" tIns="0" bIns="0">
+            <a:spAutoFit/>
+          </a:bodyPr>
+          <a:lstStyle/>
+          <a:p>
+            <a:pPr algn="ctr"/>
+            <a:r>
+              <a:rPr sz="1200" b="1" i="0">
+                <a:solidFill>
+                  <a:srgbClr val="64748B"/>
+                </a:solidFill>
+                <a:latin typeface="Calibri"/>
+              </a:rPr>
+              <a:t> -0.2pp</a:t>
+            </a:r>
+          </a:p>
+        </p:txBody>
+      </p:sp>
+      <p:sp>
+        <p:nvSpPr>
+          <p:cNvPr id="47" name="Rectangle 46"/>
+          <p:cNvSpPr/>
+          <p:nvPr/>
+        </p:nvSpPr>
+        <p:spPr>
+          <a:xfrm>
+            <a:off x="411480" y="5257800"/>
+            <a:ext cx="5486400" cy="475488"/>
+          </a:xfrm>
+          <a:prstGeom prst="rect">
+            <a:avLst/>
+          </a:prstGeom>
+          <a:solidFill>
+            <a:srgbClr val="E2E8F0"/>
+          </a:solidFill>
+          <a:ln>
+            <a:noFill/>
+          </a:ln>
+        </p:spPr>
+        <p:style>
+          <a:lnRef idx="1">
+            <a:schemeClr val="accent1"/>
+          </a:lnRef>
+          <a:fillRef idx="3">
+            <a:schemeClr val="accent1"/>
+          </a:fillRef>
+          <a:effectRef idx="2">
+            <a:schemeClr val="accent1"/>
+          </a:effectRef>
+          <a:fontRef idx="minor">
+            <a:schemeClr val="lt1"/>
+          </a:fontRef>
+        </p:style>
+        <p:txBody>
+          <a:bodyPr rtlCol="0" anchor="ctr"/>
+          <a:lstStyle/>
+          <a:p>
+            <a:pPr algn="ctr"/>
+          </a:p>
+        </p:txBody>
+      </p:sp>
+      <p:sp>
+        <p:nvSpPr>
+          <p:cNvPr id="48" name="TextBox 47"/>
+          <p:cNvSpPr txBox="1"/>
+          <p:nvPr/>
+        </p:nvSpPr>
+        <p:spPr>
+          <a:xfrm>
+            <a:off x="594360" y="5330952"/>
+            <a:ext cx="1691640" cy="347472"/>
+          </a:xfrm>
+          <a:prstGeom prst="rect">
+            <a:avLst/>
+          </a:prstGeom>
+          <a:noFill/>
+        </p:spPr>
+        <p:txBody>
+          <a:bodyPr wrap="square" lIns="0" rIns="0" tIns="0" bIns="0">
+            <a:spAutoFit/>
+          </a:bodyPr>
+          <a:lstStyle/>
+          <a:p>
+            <a:pPr algn="l"/>
+            <a:r>
+              <a:rPr sz="1100" b="0" i="0">
+                <a:solidFill>
+                  <a:srgbClr val="1E293B"/>
+                </a:solidFill>
+                <a:latin typeface="Calibri"/>
+              </a:rPr>
+              <a:t>Mexico</a:t>
+            </a:r>
+          </a:p>
+        </p:txBody>
+      </p:sp>
+      <p:sp>
+        <p:nvSpPr>
+          <p:cNvPr id="49" name="TextBox 48"/>
+          <p:cNvSpPr txBox="1"/>
+          <p:nvPr/>
+        </p:nvSpPr>
+        <p:spPr>
+          <a:xfrm>
+            <a:off x="2423160" y="5330952"/>
+            <a:ext cx="1005840" cy="347472"/>
+          </a:xfrm>
+          <a:prstGeom prst="rect">
+            <a:avLst/>
+          </a:prstGeom>
+          <a:noFill/>
+        </p:spPr>
+        <p:txBody>
+          <a:bodyPr wrap="square" lIns="0" rIns="0" tIns="0" bIns="0">
+            <a:spAutoFit/>
+          </a:bodyPr>
+          <a:lstStyle/>
+          <a:p>
+            <a:pPr algn="ctr"/>
+            <a:r>
+              <a:rPr sz="1200" b="1" i="0">
+                <a:solidFill>
+                  <a:srgbClr val="065A82"/>
+                </a:solidFill>
+                <a:latin typeface="Calibri"/>
+              </a:rPr>
+              <a:t> 0.6%</a:t>
+            </a:r>
+          </a:p>
+        </p:txBody>
+      </p:sp>
+      <p:sp>
+        <p:nvSpPr>
+          <p:cNvPr id="50" name="TextBox 49"/>
+          <p:cNvSpPr txBox="1"/>
+          <p:nvPr/>
+        </p:nvSpPr>
+        <p:spPr>
+          <a:xfrm>
+            <a:off x="3520440" y="5330952"/>
+            <a:ext cx="1005840" cy="347472"/>
+          </a:xfrm>
+          <a:prstGeom prst="rect">
+            <a:avLst/>
+          </a:prstGeom>
+          <a:noFill/>
+        </p:spPr>
+        <p:txBody>
+          <a:bodyPr wrap="square" lIns="0" rIns="0" tIns="0" bIns="0">
+            <a:spAutoFit/>
+          </a:bodyPr>
+          <a:lstStyle/>
+          <a:p>
+            <a:pPr algn="ctr"/>
+            <a:r>
+              <a:rPr sz="1200" b="1" i="0">
+                <a:solidFill>
+                  <a:srgbClr val="1C7293"/>
+                </a:solidFill>
+                <a:latin typeface="Calibri"/>
+              </a:rPr>
+              <a:t> 0.7%</a:t>
+            </a:r>
+          </a:p>
+        </p:txBody>
+      </p:sp>
+      <p:sp>
+        <p:nvSpPr>
+          <p:cNvPr id="51" name="TextBox 50"/>
+          <p:cNvSpPr txBox="1"/>
+          <p:nvPr/>
+        </p:nvSpPr>
+        <p:spPr>
+          <a:xfrm>
+            <a:off x="4572000" y="5330952"/>
+            <a:ext cx="1188720" cy="347472"/>
+          </a:xfrm>
+          <a:prstGeom prst="rect">
+            <a:avLst/>
+          </a:prstGeom>
+          <a:noFill/>
+        </p:spPr>
+        <p:txBody>
+          <a:bodyPr wrap="square" lIns="0" rIns="0" tIns="0" bIns="0">
+            <a:spAutoFit/>
+          </a:bodyPr>
+          <a:lstStyle/>
+          <a:p>
+            <a:pPr algn="ctr"/>
+            <a:r>
+              <a:rPr sz="1200" b="1" i="0">
+                <a:solidFill>
+                  <a:srgbClr val="64748B"/>
+                </a:solidFill>
+                <a:latin typeface="Calibri"/>
+              </a:rPr>
+              <a:t> +0.1pp</a:t>
+            </a:r>
+          </a:p>
+        </p:txBody>
+      </p:sp>
+      <p:sp>
+        <p:nvSpPr>
+          <p:cNvPr id="52" name="Rectangle 51"/>
+          <p:cNvSpPr/>
+          <p:nvPr/>
+        </p:nvSpPr>
+        <p:spPr>
+          <a:xfrm>
+            <a:off x="6263640" y="914400"/>
+            <a:ext cx="5577840" cy="2377440"/>
+          </a:xfrm>
+          <a:prstGeom prst="rect">
+            <a:avLst/>
+          </a:prstGeom>
+          <a:solidFill>
+            <a:srgbClr val="FFFFFF"/>
+          </a:solidFill>
+          <a:ln>
+            <a:noFill/>
+          </a:ln>
+        </p:spPr>
+        <p:style>
+          <a:lnRef idx="1">
+            <a:schemeClr val="accent1"/>
+          </a:lnRef>
+          <a:fillRef idx="3">
+            <a:schemeClr val="accent1"/>
+          </a:fillRef>
+          <a:effectRef idx="2">
+            <a:schemeClr val="accent1"/>
+          </a:effectRef>
+          <a:fontRef idx="minor">
+            <a:schemeClr val="lt1"/>
+          </a:fontRef>
+        </p:style>
+        <p:txBody>
+          <a:bodyPr rtlCol="0" anchor="ctr"/>
+          <a:lstStyle/>
+          <a:p>
+            <a:pPr algn="ctr"/>
+          </a:p>
+        </p:txBody>
+      </p:sp>
+      <p:sp>
+        <p:nvSpPr>
+          <p:cNvPr id="53" name="Rectangle 52"/>
+          <p:cNvSpPr/>
+          <p:nvPr/>
+        </p:nvSpPr>
+        <p:spPr>
+          <a:xfrm>
+            <a:off x="6263640" y="914400"/>
+            <a:ext cx="54864" cy="2377440"/>
+          </a:xfrm>
+          <a:prstGeom prst="rect">
+            <a:avLst/>
+          </a:prstGeom>
+          <a:solidFill>
+            <a:srgbClr val="065A82"/>
+          </a:solidFill>
+          <a:ln>
+            <a:noFill/>
+          </a:ln>
+        </p:spPr>
+        <p:style>
+          <a:lnRef idx="1">
+            <a:schemeClr val="accent1"/>
+          </a:lnRef>
+          <a:fillRef idx="3">
+            <a:schemeClr val="accent1"/>
+          </a:fillRef>
+          <a:effectRef idx="2">
+            <a:schemeClr val="accent1"/>
+          </a:effectRef>
+          <a:fontRef idx="minor">
+            <a:schemeClr val="lt1"/>
+          </a:fontRef>
+        </p:style>
+        <p:txBody>
+          <a:bodyPr rtlCol="0" anchor="ctr"/>
+          <a:lstStyle/>
+          <a:p>
+            <a:pPr algn="ctr"/>
+          </a:p>
+        </p:txBody>
+      </p:sp>
+      <p:sp>
+        <p:nvSpPr>
+          <p:cNvPr id="54" name="TextBox 53"/>
+          <p:cNvSpPr txBox="1"/>
+          <p:nvPr/>
+        </p:nvSpPr>
+        <p:spPr>
+          <a:xfrm>
+            <a:off x="6492240" y="960120"/>
+            <a:ext cx="5120640" cy="384048"/>
+          </a:xfrm>
+          <a:prstGeom prst="rect">
+            <a:avLst/>
+          </a:prstGeom>
+          <a:noFill/>
+        </p:spPr>
+        <p:txBody>
+          <a:bodyPr wrap="square" lIns="0" rIns="0" tIns="0" bIns="0">
+            <a:spAutoFit/>
+          </a:bodyPr>
+          <a:lstStyle/>
+          <a:p>
+            <a:pPr algn="l"/>
+            <a:r>
+              <a:rPr sz="1300" b="1" i="0">
+                <a:solidFill>
+                  <a:srgbClr val="065A82"/>
+                </a:solidFill>
+                <a:latin typeface="Calibri"/>
+              </a:rPr>
+              <a:t>US Market Concentration</a:t>
+            </a:r>
+          </a:p>
+        </p:txBody>
+      </p:sp>
+      <p:sp>
+        <p:nvSpPr>
+          <p:cNvPr id="55" name="TextBox 54"/>
+          <p:cNvSpPr txBox="1"/>
+          <p:nvPr/>
+        </p:nvSpPr>
+        <p:spPr>
+          <a:xfrm>
+            <a:off x="6492240" y="1417320"/>
+            <a:ext cx="2011680" cy="347472"/>
+          </a:xfrm>
+          <a:prstGeom prst="rect">
+            <a:avLst/>
+          </a:prstGeom>
+          <a:noFill/>
+        </p:spPr>
+        <p:txBody>
+          <a:bodyPr wrap="square" lIns="0" rIns="0" tIns="0" bIns="0">
+            <a:spAutoFit/>
+          </a:bodyPr>
+          <a:lstStyle/>
+          <a:p>
+            <a:pPr algn="l"/>
+            <a:r>
+              <a:rPr sz="1100" b="1" i="0">
+                <a:solidFill>
+                  <a:srgbClr val="1E293B"/>
+                </a:solidFill>
+                <a:latin typeface="Calibri"/>
+              </a:rPr>
+              <a:t>Jan US share</a:t>
+            </a:r>
+          </a:p>
+        </p:txBody>
+      </p:sp>
+      <p:sp>
+        <p:nvSpPr>
+          <p:cNvPr id="56" name="TextBox 55"/>
+          <p:cNvSpPr txBox="1"/>
+          <p:nvPr/>
+        </p:nvSpPr>
+        <p:spPr>
+          <a:xfrm>
+            <a:off x="8549640" y="1417320"/>
+            <a:ext cx="1005840" cy="347472"/>
+          </a:xfrm>
+          <a:prstGeom prst="rect">
+            <a:avLst/>
+          </a:prstGeom>
+          <a:noFill/>
+        </p:spPr>
+        <p:txBody>
+          <a:bodyPr wrap="square" lIns="0" rIns="0" tIns="0" bIns="0">
+            <a:spAutoFit/>
+          </a:bodyPr>
+          <a:lstStyle/>
+          <a:p>
+            <a:pPr algn="ctr"/>
+            <a:r>
+              <a:rPr sz="1400" b="1" i="0">
+                <a:solidFill>
+                  <a:srgbClr val="065A82"/>
+                </a:solidFill>
+                <a:latin typeface="Calibri"/>
+              </a:rPr>
+              <a:t>73.4%</a:t>
+            </a:r>
+          </a:p>
+        </p:txBody>
+      </p:sp>
+      <p:sp>
+        <p:nvSpPr>
+          <p:cNvPr id="57" name="TextBox 56"/>
+          <p:cNvSpPr txBox="1"/>
+          <p:nvPr/>
+        </p:nvSpPr>
+        <p:spPr>
+          <a:xfrm>
+            <a:off x="6492240" y="1737360"/>
+            <a:ext cx="5120640" cy="292608"/>
+          </a:xfrm>
+          <a:prstGeom prst="rect">
+            <a:avLst/>
+          </a:prstGeom>
+          <a:noFill/>
+        </p:spPr>
+        <p:txBody>
+          <a:bodyPr wrap="square" lIns="0" rIns="0" tIns="0" bIns="0">
+            <a:spAutoFit/>
+          </a:bodyPr>
+          <a:lstStyle/>
+          <a:p>
+            <a:pPr algn="l"/>
+            <a:r>
+              <a:rPr sz="900" b="0" i="0">
+                <a:solidFill>
+                  <a:srgbClr val="64748B"/>
+                </a:solidFill>
+                <a:latin typeface="Calibri"/>
+              </a:rPr>
+              <a:t>Consistent home-market baseline</a:t>
+            </a:r>
+          </a:p>
+        </p:txBody>
+      </p:sp>
+      <p:sp>
+        <p:nvSpPr>
+          <p:cNvPr id="58" name="TextBox 57"/>
+          <p:cNvSpPr txBox="1"/>
+          <p:nvPr/>
+        </p:nvSpPr>
+        <p:spPr>
+          <a:xfrm>
+            <a:off x="6492240" y="2075688"/>
+            <a:ext cx="2011680" cy="347472"/>
+          </a:xfrm>
+          <a:prstGeom prst="rect">
+            <a:avLst/>
+          </a:prstGeom>
+          <a:noFill/>
+        </p:spPr>
+        <p:txBody>
+          <a:bodyPr wrap="square" lIns="0" rIns="0" tIns="0" bIns="0">
+            <a:spAutoFit/>
+          </a:bodyPr>
+          <a:lstStyle/>
+          <a:p>
+            <a:pPr algn="l"/>
+            <a:r>
+              <a:rPr sz="1100" b="1" i="0">
+                <a:solidFill>
+                  <a:srgbClr val="1E293B"/>
+                </a:solidFill>
+                <a:latin typeface="Calibri"/>
+              </a:rPr>
+              <a:t>Feb US share</a:t>
+            </a:r>
+          </a:p>
+        </p:txBody>
+      </p:sp>
+      <p:sp>
+        <p:nvSpPr>
+          <p:cNvPr id="59" name="TextBox 58"/>
+          <p:cNvSpPr txBox="1"/>
+          <p:nvPr/>
+        </p:nvSpPr>
+        <p:spPr>
+          <a:xfrm>
+            <a:off x="8549640" y="2075688"/>
+            <a:ext cx="1005840" cy="347472"/>
+          </a:xfrm>
+          <a:prstGeom prst="rect">
+            <a:avLst/>
+          </a:prstGeom>
+          <a:noFill/>
+        </p:spPr>
+        <p:txBody>
+          <a:bodyPr wrap="square" lIns="0" rIns="0" tIns="0" bIns="0">
+            <a:spAutoFit/>
+          </a:bodyPr>
+          <a:lstStyle/>
+          <a:p>
+            <a:pPr algn="ctr"/>
+            <a:r>
+              <a:rPr sz="1400" b="1" i="0">
+                <a:solidFill>
+                  <a:srgbClr val="065A82"/>
+                </a:solidFill>
+                <a:latin typeface="Calibri"/>
+              </a:rPr>
+              <a:t>84.4%</a:t>
+            </a:r>
+          </a:p>
+        </p:txBody>
+      </p:sp>
+      <p:sp>
+        <p:nvSpPr>
+          <p:cNvPr id="60" name="TextBox 59"/>
+          <p:cNvSpPr txBox="1"/>
+          <p:nvPr/>
+        </p:nvSpPr>
+        <p:spPr>
+          <a:xfrm>
+            <a:off x="6492240" y="2395728"/>
+            <a:ext cx="5120640" cy="292608"/>
+          </a:xfrm>
+          <a:prstGeom prst="rect">
+            <a:avLst/>
+          </a:prstGeom>
+          <a:noFill/>
+        </p:spPr>
+        <p:txBody>
+          <a:bodyPr wrap="square" lIns="0" rIns="0" tIns="0" bIns="0">
+            <a:spAutoFit/>
+          </a:bodyPr>
+          <a:lstStyle/>
+          <a:p>
+            <a:pPr algn="l"/>
+            <a:r>
+              <a:rPr sz="900" b="0" i="0">
+                <a:solidFill>
+                  <a:srgbClr val="64748B"/>
+                </a:solidFill>
+                <a:latin typeface="Calibri"/>
+              </a:rPr>
+              <a:t>+11pp jump — other markets shrank</a:t>
+            </a:r>
+          </a:p>
+        </p:txBody>
+      </p:sp>
+      <p:sp>
+        <p:nvSpPr>
+          <p:cNvPr id="61" name="TextBox 60"/>
+          <p:cNvSpPr txBox="1"/>
+          <p:nvPr/>
+        </p:nvSpPr>
+        <p:spPr>
+          <a:xfrm>
+            <a:off x="6492240" y="2734056"/>
+            <a:ext cx="2011680" cy="347472"/>
+          </a:xfrm>
+          <a:prstGeom prst="rect">
+            <a:avLst/>
+          </a:prstGeom>
+          <a:noFill/>
+        </p:spPr>
+        <p:txBody>
+          <a:bodyPr wrap="square" lIns="0" rIns="0" tIns="0" bIns="0">
+            <a:spAutoFit/>
+          </a:bodyPr>
+          <a:lstStyle/>
+          <a:p>
+            <a:pPr algn="l"/>
+            <a:r>
+              <a:rPr sz="1100" b="1" i="0">
+                <a:solidFill>
+                  <a:srgbClr val="1E293B"/>
+                </a:solidFill>
+                <a:latin typeface="Calibri"/>
+              </a:rPr>
+              <a:t>US PPV</a:t>
+            </a:r>
+          </a:p>
+        </p:txBody>
+      </p:sp>
+      <p:sp>
+        <p:nvSpPr>
+          <p:cNvPr id="62" name="TextBox 61"/>
+          <p:cNvSpPr txBox="1"/>
+          <p:nvPr/>
+        </p:nvSpPr>
+        <p:spPr>
+          <a:xfrm>
+            <a:off x="8549640" y="2734056"/>
+            <a:ext cx="1005840" cy="347472"/>
+          </a:xfrm>
+          <a:prstGeom prst="rect">
+            <a:avLst/>
+          </a:prstGeom>
+          <a:noFill/>
+        </p:spPr>
+        <p:txBody>
+          <a:bodyPr wrap="square" lIns="0" rIns="0" tIns="0" bIns="0">
+            <a:spAutoFit/>
+          </a:bodyPr>
+          <a:lstStyle/>
+          <a:p>
+            <a:pPr algn="ctr"/>
+            <a:r>
+              <a:rPr sz="1400" b="1" i="0">
+                <a:solidFill>
+                  <a:srgbClr val="065A82"/>
+                </a:solidFill>
+                <a:latin typeface="Calibri"/>
+              </a:rPr>
+              <a:t>2.15</a:t>
+            </a:r>
+          </a:p>
+        </p:txBody>
+      </p:sp>
+      <p:sp>
+        <p:nvSpPr>
+          <p:cNvPr id="63" name="TextBox 62"/>
+          <p:cNvSpPr txBox="1"/>
+          <p:nvPr/>
+        </p:nvSpPr>
+        <p:spPr>
+          <a:xfrm>
+            <a:off x="6492240" y="3054096"/>
+            <a:ext cx="5120640" cy="292608"/>
+          </a:xfrm>
+          <a:prstGeom prst="rect">
+            <a:avLst/>
+          </a:prstGeom>
+          <a:noFill/>
+        </p:spPr>
+        <p:txBody>
+          <a:bodyPr wrap="square" lIns="0" rIns="0" tIns="0" bIns="0">
+            <a:spAutoFit/>
+          </a:bodyPr>
+          <a:lstStyle/>
+          <a:p>
+            <a:pPr algn="l"/>
+            <a:r>
+              <a:rPr sz="900" b="0" i="0">
+                <a:solidFill>
+                  <a:srgbClr val="64748B"/>
+                </a:solidFill>
+                <a:latin typeface="Calibri"/>
+              </a:rPr>
+              <a:t>Slightly below site average (2.03)</a:t>
+            </a:r>
+          </a:p>
+        </p:txBody>
+      </p:sp>
+      <p:sp>
+        <p:nvSpPr>
+          <p:cNvPr id="64" name="Rectangle 63"/>
+          <p:cNvSpPr/>
+          <p:nvPr/>
+        </p:nvSpPr>
+        <p:spPr>
+          <a:xfrm>
+            <a:off x="6263640" y="3520440"/>
+            <a:ext cx="5577840" cy="2423160"/>
+          </a:xfrm>
+          <a:prstGeom prst="rect">
+            <a:avLst/>
+          </a:prstGeom>
+          <a:solidFill>
+            <a:srgbClr val="065A82"/>
+          </a:solidFill>
+          <a:ln>
+            <a:noFill/>
+          </a:ln>
+        </p:spPr>
+        <p:style>
+          <a:lnRef idx="1">
+            <a:schemeClr val="accent1"/>
+          </a:lnRef>
+          <a:fillRef idx="3">
+            <a:schemeClr val="accent1"/>
+          </a:fillRef>
+          <a:effectRef idx="2">
+            <a:schemeClr val="accent1"/>
+          </a:effectRef>
+          <a:fontRef idx="minor">
+            <a:schemeClr val="lt1"/>
+          </a:fontRef>
+        </p:style>
+        <p:txBody>
+          <a:bodyPr rtlCol="0" anchor="ctr"/>
+          <a:lstStyle/>
+          <a:p>
+            <a:pPr algn="ctr"/>
+          </a:p>
+        </p:txBody>
+      </p:sp>
+      <p:sp>
+        <p:nvSpPr>
+          <p:cNvPr id="65" name="Rectangle 64"/>
+          <p:cNvSpPr/>
+          <p:nvPr/>
+        </p:nvSpPr>
+        <p:spPr>
+          <a:xfrm>
+            <a:off x="6263640" y="3520440"/>
+            <a:ext cx="5577840" cy="64008"/>
+          </a:xfrm>
+          <a:prstGeom prst="rect">
+            <a:avLst/>
+          </a:prstGeom>
+          <a:solidFill>
+            <a:srgbClr val="DC2626"/>
+          </a:solidFill>
+          <a:ln>
+            <a:noFill/>
+          </a:ln>
+        </p:spPr>
+        <p:style>
+          <a:lnRef idx="1">
+            <a:schemeClr val="accent1"/>
+          </a:lnRef>
+          <a:fillRef idx="3">
+            <a:schemeClr val="accent1"/>
+          </a:fillRef>
+          <a:effectRef idx="2">
+            <a:schemeClr val="accent1"/>
+          </a:effectRef>
+          <a:fontRef idx="minor">
+            <a:schemeClr val="lt1"/>
+          </a:fontRef>
+        </p:style>
+        <p:txBody>
+          <a:bodyPr rtlCol="0" anchor="ctr"/>
+          <a:lstStyle/>
+          <a:p>
+            <a:pPr algn="ctr"/>
+          </a:p>
+        </p:txBody>
+      </p:sp>
+      <p:sp>
+        <p:nvSpPr>
+          <p:cNvPr id="66" name="TextBox 65"/>
+          <p:cNvSpPr txBox="1"/>
+          <p:nvPr/>
+        </p:nvSpPr>
+        <p:spPr>
+          <a:xfrm>
+            <a:off x="6446520" y="3611880"/>
+            <a:ext cx="5212080" cy="384048"/>
+          </a:xfrm>
+          <a:prstGeom prst="rect">
+            <a:avLst/>
+          </a:prstGeom>
+          <a:noFill/>
+        </p:spPr>
+        <p:txBody>
+          <a:bodyPr wrap="square" lIns="0" rIns="0" tIns="0" bIns="0">
+            <a:spAutoFit/>
+          </a:bodyPr>
+          <a:lstStyle/>
+          <a:p>
+            <a:pPr algn="l"/>
+            <a:r>
+              <a:rPr sz="1300" b="1" i="0">
+                <a:solidFill>
+                  <a:srgbClr val="DC2626"/>
+                </a:solidFill>
+                <a:latin typeface="Calibri"/>
+              </a:rPr>
+              <a:t>UK / EMEA Alert</a:t>
+            </a:r>
+          </a:p>
+        </p:txBody>
+      </p:sp>
+      <p:sp>
+        <p:nvSpPr>
+          <p:cNvPr id="67" name="TextBox 66"/>
+          <p:cNvSpPr txBox="1"/>
+          <p:nvPr/>
+        </p:nvSpPr>
+        <p:spPr>
+          <a:xfrm>
+            <a:off x="6446520" y="4069080"/>
+            <a:ext cx="5212080" cy="429768"/>
+          </a:xfrm>
+          <a:prstGeom prst="rect">
+            <a:avLst/>
+          </a:prstGeom>
+          <a:noFill/>
+        </p:spPr>
+        <p:txBody>
+          <a:bodyPr wrap="square" lIns="0" rIns="0" tIns="0" bIns="0">
+            <a:spAutoFit/>
+          </a:bodyPr>
+          <a:lstStyle/>
+          <a:p>
+            <a:pPr algn="l"/>
+            <a:r>
+              <a:rPr sz="1100" b="0" i="0">
+                <a:solidFill>
+                  <a:srgbClr val="CADCFC"/>
+                </a:solidFill>
+                <a:latin typeface="Calibri"/>
+              </a:rPr>
+              <a:t>•  UK: 9.2% → 2.4% traffic share (-6.8pp) in one month</a:t>
+            </a:r>
+          </a:p>
+        </p:txBody>
+      </p:sp>
+      <p:sp>
+        <p:nvSpPr>
+          <p:cNvPr id="68" name="TextBox 67"/>
+          <p:cNvSpPr txBox="1"/>
+          <p:nvPr/>
+        </p:nvSpPr>
+        <p:spPr>
+          <a:xfrm>
+            <a:off x="6446520" y="4453128"/>
+            <a:ext cx="5212080" cy="429768"/>
+          </a:xfrm>
+          <a:prstGeom prst="rect">
+            <a:avLst/>
+          </a:prstGeom>
+          <a:noFill/>
+        </p:spPr>
+        <p:txBody>
+          <a:bodyPr wrap="square" lIns="0" rIns="0" tIns="0" bIns="0">
+            <a:spAutoFit/>
+          </a:bodyPr>
+          <a:lstStyle/>
+          <a:p>
+            <a:pPr algn="l"/>
+            <a:r>
+              <a:rPr sz="1100" b="0" i="0">
+                <a:solidFill>
+                  <a:srgbClr val="CADCFC"/>
+                </a:solidFill>
+                <a:latin typeface="Calibri"/>
+              </a:rPr>
+              <a:t>•  Germany: 3.7% → 1.9% (-1.8pp) — similar pattern</a:t>
+            </a:r>
+          </a:p>
+        </p:txBody>
+      </p:sp>
+      <p:sp>
+        <p:nvSpPr>
+          <p:cNvPr id="69" name="TextBox 68"/>
+          <p:cNvSpPr txBox="1"/>
+          <p:nvPr/>
+        </p:nvSpPr>
+        <p:spPr>
+          <a:xfrm>
+            <a:off x="6446520" y="4837176"/>
+            <a:ext cx="5212080" cy="429768"/>
+          </a:xfrm>
+          <a:prstGeom prst="rect">
+            <a:avLst/>
+          </a:prstGeom>
+          <a:noFill/>
+        </p:spPr>
+        <p:txBody>
+          <a:bodyPr wrap="square" lIns="0" rIns="0" tIns="0" bIns="0">
+            <a:spAutoFit/>
+          </a:bodyPr>
+          <a:lstStyle/>
+          <a:p>
+            <a:pPr algn="l"/>
+            <a:r>
+              <a:rPr sz="1100" b="0" i="0">
+                <a:solidFill>
+                  <a:srgbClr val="CADCFC"/>
+                </a:solidFill>
+                <a:latin typeface="Calibri"/>
+              </a:rPr>
+              <a:t>•  Combined EMEA drop: ~10pp of total site traffic</a:t>
+            </a:r>
+          </a:p>
+        </p:txBody>
+      </p:sp>
+      <p:sp>
+        <p:nvSpPr>
+          <p:cNvPr id="70" name="TextBox 69"/>
+          <p:cNvSpPr txBox="1"/>
+          <p:nvPr/>
+        </p:nvSpPr>
+        <p:spPr>
+          <a:xfrm>
+            <a:off x="6446520" y="5221224"/>
+            <a:ext cx="5212080" cy="429768"/>
+          </a:xfrm>
+          <a:prstGeom prst="rect">
+            <a:avLst/>
+          </a:prstGeom>
+          <a:noFill/>
+        </p:spPr>
+        <p:txBody>
+          <a:bodyPr wrap="square" lIns="0" rIns="0" tIns="0" bIns="0">
+            <a:spAutoFit/>
+          </a:bodyPr>
+          <a:lstStyle/>
+          <a:p>
+            <a:pPr algn="l"/>
+            <a:r>
+              <a:rPr sz="1100" b="0" i="0">
+                <a:solidFill>
+                  <a:srgbClr val="CADCFC"/>
+                </a:solidFill>
+                <a:latin typeface="Calibri"/>
+              </a:rPr>
+              <a:t>•  Possible causes: campaign ended, referral removed</a:t>
+            </a:r>
+          </a:p>
+        </p:txBody>
+      </p:sp>
+      <p:sp>
+        <p:nvSpPr>
+          <p:cNvPr id="71" name="TextBox 70"/>
+          <p:cNvSpPr txBox="1"/>
+          <p:nvPr/>
+        </p:nvSpPr>
+        <p:spPr>
+          <a:xfrm>
+            <a:off x="6446520" y="5605272"/>
+            <a:ext cx="5212080" cy="429768"/>
+          </a:xfrm>
+          <a:prstGeom prst="rect">
+            <a:avLst/>
+          </a:prstGeom>
+          <a:noFill/>
+        </p:spPr>
+        <p:txBody>
+          <a:bodyPr wrap="square" lIns="0" rIns="0" tIns="0" bIns="0">
+            <a:spAutoFit/>
+          </a:bodyPr>
+          <a:lstStyle/>
+          <a:p>
+            <a:pPr algn="l"/>
+            <a:r>
+              <a:rPr sz="1100" b="0" i="0">
+                <a:solidFill>
+                  <a:srgbClr val="CADCFC"/>
+                </a:solidFill>
+                <a:latin typeface="Calibri"/>
+              </a:rPr>
+              <a:t>•  → Audit EMEA campaign activity &amp; referral links NOW</a:t>
+            </a:r>
+          </a:p>
+        </p:txBody>
+      </p:sp>
+      <p:sp>
+        <p:nvSpPr>
+          <p:cNvPr id="72" name="TextBox 71"/>
+          <p:cNvSpPr txBox="1"/>
+          <p:nvPr/>
+        </p:nvSpPr>
+        <p:spPr>
+          <a:xfrm>
+            <a:off x="320040" y="6199632"/>
+            <a:ext cx="11430000" cy="384048"/>
+          </a:xfrm>
+          <a:prstGeom prst="rect">
+            <a:avLst/>
+          </a:prstGeom>
+          <a:noFill/>
+        </p:spPr>
+        <p:txBody>
+          <a:bodyPr wrap="square" lIns="0" rIns="0" tIns="0" bIns="0">
+            <a:spAutoFit/>
+          </a:bodyPr>
+          <a:lstStyle/>
+          <a:p>
+            <a:pPr algn="l"/>
+            <a:r>
+              <a:rPr sz="1100" b="0" i="1">
+                <a:solidFill>
+                  <a:srgbClr val="DC2626"/>
+                </a:solidFill>
+                <a:latin typeface="Calibri"/>
+              </a:rPr>
+              <a:t>UK + Germany combined dropped ~8.5pp in one month — EMEA traffic investigation is a top priority.</a:t>
+            </a:r>
+          </a:p>
+        </p:txBody>
+      </p:sp>
+    </p:spTree>
+  </p:cSld>
+  <p:clrMapOvr>
+    <a:masterClrMapping/>
+  </p:clrMapOvr>
+</p:sld>
+</file>
+
+<file path=ppt/slides/slide11.xml><?xml version="1.0" encoding="utf-8"?>
+<p:sld xmlns:a="http://schemas.openxmlformats.org/drawingml/2006/main" xmlns:p="http://schemas.openxmlformats.org/presentationml/2006/main" xmlns:r="http://schemas.openxmlformats.org/officeDocument/2006/relationships">
+  <p:cSld>
+    <p:bg>
+      <p:bgPr>
+        <a:solidFill>
           <a:srgbClr val="1E293B"/>
         </a:solidFill>
         <a:effectLst/>
@@ -5084,7 +7716,7 @@
 </p:sld>
 </file>
 
-<file path=ppt/slides/slide11.xml><?xml version="1.0" encoding="utf-8"?>
+<file path=ppt/slides/slide12.xml><?xml version="1.0" encoding="utf-8"?>
 <p:sld xmlns:a="http://schemas.openxmlformats.org/drawingml/2006/main" xmlns:p="http://schemas.openxmlformats.org/presentationml/2006/main" xmlns:r="http://schemas.openxmlformats.org/officeDocument/2006/relationships">
   <p:cSld>
     <p:bg>
@@ -6579,7 +9211,7 @@
 </p:sld>
 </file>
 
-<file path=ppt/slides/slide12.xml><?xml version="1.0" encoding="utf-8"?>
+<file path=ppt/slides/slide13.xml><?xml version="1.0" encoding="utf-8"?>
 <p:sld xmlns:a="http://schemas.openxmlformats.org/drawingml/2006/main" xmlns:p="http://schemas.openxmlformats.org/presentationml/2006/main" xmlns:r="http://schemas.openxmlformats.org/officeDocument/2006/relationships">
   <p:cSld>
     <p:bg>
@@ -9627,6 +12259,3452 @@
     <p:bg>
       <p:bgPr>
         <a:solidFill>
+          <a:srgbClr val="1E293B"/>
+        </a:solidFill>
+        <a:effectLst/>
+      </p:bgPr>
+    </p:bg>
+    <p:spTree>
+      <p:nvGrpSpPr>
+        <p:cNvPr id="1" name=""/>
+        <p:cNvGrpSpPr/>
+        <p:nvPr/>
+      </p:nvGrpSpPr>
+      <p:grpSpPr/>
+      <p:sp>
+        <p:nvSpPr>
+          <p:cNvPr id="2" name="Rectangle 1"/>
+          <p:cNvSpPr/>
+          <p:nvPr/>
+        </p:nvSpPr>
+        <p:spPr>
+          <a:xfrm>
+            <a:off x="0" y="0"/>
+            <a:ext cx="12191695" cy="804672"/>
+          </a:xfrm>
+          <a:prstGeom prst="rect">
+            <a:avLst/>
+          </a:prstGeom>
+          <a:solidFill>
+            <a:srgbClr val="7F1010"/>
+          </a:solidFill>
+          <a:ln>
+            <a:noFill/>
+          </a:ln>
+        </p:spPr>
+        <p:style>
+          <a:lnRef idx="1">
+            <a:schemeClr val="accent1"/>
+          </a:lnRef>
+          <a:fillRef idx="3">
+            <a:schemeClr val="accent1"/>
+          </a:fillRef>
+          <a:effectRef idx="2">
+            <a:schemeClr val="accent1"/>
+          </a:effectRef>
+          <a:fontRef idx="minor">
+            <a:schemeClr val="lt1"/>
+          </a:fontRef>
+        </p:style>
+        <p:txBody>
+          <a:bodyPr rtlCol="0" anchor="ctr"/>
+          <a:lstStyle/>
+          <a:p>
+            <a:pPr algn="ctr"/>
+          </a:p>
+        </p:txBody>
+      </p:sp>
+      <p:sp>
+        <p:nvSpPr>
+          <p:cNvPr id="3" name="TextBox 2"/>
+          <p:cNvSpPr txBox="1"/>
+          <p:nvPr/>
+        </p:nvSpPr>
+        <p:spPr>
+          <a:xfrm>
+            <a:off x="502920" y="73152"/>
+            <a:ext cx="9144000" cy="475488"/>
+          </a:xfrm>
+          <a:prstGeom prst="rect">
+            <a:avLst/>
+          </a:prstGeom>
+          <a:noFill/>
+        </p:spPr>
+        <p:txBody>
+          <a:bodyPr wrap="square" lIns="0" rIns="0" tIns="0" bIns="0">
+            <a:spAutoFit/>
+          </a:bodyPr>
+          <a:lstStyle/>
+          <a:p>
+            <a:pPr algn="l"/>
+            <a:r>
+              <a:rPr sz="2400" b="1" i="0">
+                <a:solidFill>
+                  <a:srgbClr val="FFFFFF"/>
+                </a:solidFill>
+                <a:latin typeface="Calibri"/>
+              </a:rPr>
+              <a:t>P1 Deep-Dive: Fix Paid / Display</a:t>
+            </a:r>
+          </a:p>
+        </p:txBody>
+      </p:sp>
+      <p:sp>
+        <p:nvSpPr>
+          <p:cNvPr id="4" name="TextBox 3"/>
+          <p:cNvSpPr txBox="1"/>
+          <p:nvPr/>
+        </p:nvSpPr>
+        <p:spPr>
+          <a:xfrm>
+            <a:off x="502920" y="502920"/>
+            <a:ext cx="11247120" cy="274320"/>
+          </a:xfrm>
+          <a:prstGeom prst="rect">
+            <a:avLst/>
+          </a:prstGeom>
+          <a:noFill/>
+        </p:spPr>
+        <p:txBody>
+          <a:bodyPr wrap="square" lIns="0" rIns="0" tIns="0" bIns="0">
+            <a:spAutoFit/>
+          </a:bodyPr>
+          <a:lstStyle/>
+          <a:p>
+            <a:pPr algn="l"/>
+            <a:r>
+              <a:rPr sz="1100" b="0" i="0">
+                <a:solidFill>
+                  <a:srgbClr val="CADCFC"/>
+                </a:solidFill>
+                <a:latin typeface="Calibri"/>
+              </a:rPr>
+              <a:t>Paid-Display spend grew +49% MoM — but Bounce Rate did not improve. Root-cause diagnosis across 4 sub-channels.</a:t>
+            </a:r>
+          </a:p>
+        </p:txBody>
+      </p:sp>
+      <p:sp>
+        <p:nvSpPr>
+          <p:cNvPr id="5" name="Rectangle 4"/>
+          <p:cNvSpPr/>
+          <p:nvPr/>
+        </p:nvSpPr>
+        <p:spPr>
+          <a:xfrm>
+            <a:off x="320040" y="914400"/>
+            <a:ext cx="2834640" cy="2743200"/>
+          </a:xfrm>
+          <a:prstGeom prst="rect">
+            <a:avLst/>
+          </a:prstGeom>
+          <a:solidFill>
+            <a:srgbClr val="1E354A"/>
+          </a:solidFill>
+          <a:ln>
+            <a:noFill/>
+          </a:ln>
+        </p:spPr>
+        <p:style>
+          <a:lnRef idx="1">
+            <a:schemeClr val="accent1"/>
+          </a:lnRef>
+          <a:fillRef idx="3">
+            <a:schemeClr val="accent1"/>
+          </a:fillRef>
+          <a:effectRef idx="2">
+            <a:schemeClr val="accent1"/>
+          </a:effectRef>
+          <a:fontRef idx="minor">
+            <a:schemeClr val="lt1"/>
+          </a:fontRef>
+        </p:style>
+        <p:txBody>
+          <a:bodyPr rtlCol="0" anchor="ctr"/>
+          <a:lstStyle/>
+          <a:p>
+            <a:pPr algn="ctr"/>
+          </a:p>
+        </p:txBody>
+      </p:sp>
+      <p:sp>
+        <p:nvSpPr>
+          <p:cNvPr id="6" name="Rectangle 5"/>
+          <p:cNvSpPr/>
+          <p:nvPr/>
+        </p:nvSpPr>
+        <p:spPr>
+          <a:xfrm>
+            <a:off x="320040" y="914400"/>
+            <a:ext cx="2834640" cy="64008"/>
+          </a:xfrm>
+          <a:prstGeom prst="rect">
+            <a:avLst/>
+          </a:prstGeom>
+          <a:solidFill>
+            <a:srgbClr val="D97706"/>
+          </a:solidFill>
+          <a:ln>
+            <a:noFill/>
+          </a:ln>
+        </p:spPr>
+        <p:style>
+          <a:lnRef idx="1">
+            <a:schemeClr val="accent1"/>
+          </a:lnRef>
+          <a:fillRef idx="3">
+            <a:schemeClr val="accent1"/>
+          </a:fillRef>
+          <a:effectRef idx="2">
+            <a:schemeClr val="accent1"/>
+          </a:effectRef>
+          <a:fontRef idx="minor">
+            <a:schemeClr val="lt1"/>
+          </a:fontRef>
+        </p:style>
+        <p:txBody>
+          <a:bodyPr rtlCol="0" anchor="ctr"/>
+          <a:lstStyle/>
+          <a:p>
+            <a:pPr algn="ctr"/>
+          </a:p>
+        </p:txBody>
+      </p:sp>
+      <p:sp>
+        <p:nvSpPr>
+          <p:cNvPr id="7" name="TextBox 6"/>
+          <p:cNvSpPr txBox="1"/>
+          <p:nvPr/>
+        </p:nvSpPr>
+        <p:spPr>
+          <a:xfrm>
+            <a:off x="457200" y="1005840"/>
+            <a:ext cx="2560320" cy="548640"/>
+          </a:xfrm>
+          <a:prstGeom prst="rect">
+            <a:avLst/>
+          </a:prstGeom>
+          <a:noFill/>
+        </p:spPr>
+        <p:txBody>
+          <a:bodyPr wrap="square" lIns="0" rIns="0" tIns="0" bIns="0">
+            <a:spAutoFit/>
+          </a:bodyPr>
+          <a:lstStyle/>
+          <a:p>
+            <a:pPr algn="l"/>
+            <a:r>
+              <a:rPr sz="1200" b="1" i="0">
+                <a:solidFill>
+                  <a:srgbClr val="FFFFFF"/>
+                </a:solidFill>
+                <a:latin typeface="Calibri"/>
+              </a:rPr>
+              <a:t>Google Display</a:t>
+            </a:r>
+            <a:br/>
+            <a:r>
+              <a:t>Network (GDN)</a:t>
+            </a:r>
+          </a:p>
+        </p:txBody>
+      </p:sp>
+      <p:sp>
+        <p:nvSpPr>
+          <p:cNvPr id="8" name="TextBox 7"/>
+          <p:cNvSpPr txBox="1"/>
+          <p:nvPr/>
+        </p:nvSpPr>
+        <p:spPr>
+          <a:xfrm>
+            <a:off x="457200" y="1572768"/>
+            <a:ext cx="2560320" cy="228600"/>
+          </a:xfrm>
+          <a:prstGeom prst="rect">
+            <a:avLst/>
+          </a:prstGeom>
+          <a:noFill/>
+        </p:spPr>
+        <p:txBody>
+          <a:bodyPr wrap="square" lIns="0" rIns="0" tIns="0" bIns="0">
+            <a:spAutoFit/>
+          </a:bodyPr>
+          <a:lstStyle/>
+          <a:p>
+            <a:pPr algn="l"/>
+            <a:r>
+              <a:rPr sz="800" b="0" i="1">
+                <a:solidFill>
+                  <a:srgbClr val="64748B"/>
+                </a:solidFill>
+                <a:latin typeface="Calibri"/>
+              </a:rPr>
+              <a:t>googlesyndication.com</a:t>
+            </a:r>
+          </a:p>
+        </p:txBody>
+      </p:sp>
+      <p:sp>
+        <p:nvSpPr>
+          <p:cNvPr id="9" name="TextBox 8"/>
+          <p:cNvSpPr txBox="1"/>
+          <p:nvPr/>
+        </p:nvSpPr>
+        <p:spPr>
+          <a:xfrm>
+            <a:off x="457200" y="1828800"/>
+            <a:ext cx="457200" cy="228600"/>
+          </a:xfrm>
+          <a:prstGeom prst="rect">
+            <a:avLst/>
+          </a:prstGeom>
+          <a:noFill/>
+        </p:spPr>
+        <p:txBody>
+          <a:bodyPr wrap="square" lIns="0" rIns="0" tIns="0" bIns="0">
+            <a:spAutoFit/>
+          </a:bodyPr>
+          <a:lstStyle/>
+          <a:p>
+            <a:pPr algn="l"/>
+            <a:r>
+              <a:rPr sz="800" b="1" i="0">
+                <a:solidFill>
+                  <a:srgbClr val="CADCFC"/>
+                </a:solidFill>
+                <a:latin typeface="Calibri"/>
+              </a:rPr>
+              <a:t>PVs</a:t>
+            </a:r>
+          </a:p>
+        </p:txBody>
+      </p:sp>
+      <p:sp>
+        <p:nvSpPr>
+          <p:cNvPr id="10" name="TextBox 9"/>
+          <p:cNvSpPr txBox="1"/>
+          <p:nvPr/>
+        </p:nvSpPr>
+        <p:spPr>
+          <a:xfrm>
+            <a:off x="777240" y="1828800"/>
+            <a:ext cx="2286000" cy="228600"/>
+          </a:xfrm>
+          <a:prstGeom prst="rect">
+            <a:avLst/>
+          </a:prstGeom>
+          <a:noFill/>
+        </p:spPr>
+        <p:txBody>
+          <a:bodyPr wrap="square" lIns="0" rIns="0" tIns="0" bIns="0">
+            <a:spAutoFit/>
+          </a:bodyPr>
+          <a:lstStyle/>
+          <a:p>
+            <a:pPr algn="l"/>
+            <a:r>
+              <a:rPr sz="900" b="0" i="0">
+                <a:solidFill>
+                  <a:srgbClr val="CADCFC"/>
+                </a:solidFill>
+                <a:latin typeface="Calibri"/>
+              </a:rPr>
+              <a:t>Jan 24,116  →  Feb 34,686</a:t>
+            </a:r>
+          </a:p>
+        </p:txBody>
+      </p:sp>
+      <p:sp>
+        <p:nvSpPr>
+          <p:cNvPr id="11" name="TextBox 10"/>
+          <p:cNvSpPr txBox="1"/>
+          <p:nvPr/>
+        </p:nvSpPr>
+        <p:spPr>
+          <a:xfrm>
+            <a:off x="457200" y="2103120"/>
+            <a:ext cx="457200" cy="228600"/>
+          </a:xfrm>
+          <a:prstGeom prst="rect">
+            <a:avLst/>
+          </a:prstGeom>
+          <a:noFill/>
+        </p:spPr>
+        <p:txBody>
+          <a:bodyPr wrap="square" lIns="0" rIns="0" tIns="0" bIns="0">
+            <a:spAutoFit/>
+          </a:bodyPr>
+          <a:lstStyle/>
+          <a:p>
+            <a:pPr algn="l"/>
+            <a:r>
+              <a:rPr sz="800" b="1" i="0">
+                <a:solidFill>
+                  <a:srgbClr val="CADCFC"/>
+                </a:solidFill>
+                <a:latin typeface="Calibri"/>
+              </a:rPr>
+              <a:t>BR</a:t>
+            </a:r>
+          </a:p>
+        </p:txBody>
+      </p:sp>
+      <p:sp>
+        <p:nvSpPr>
+          <p:cNvPr id="12" name="TextBox 11"/>
+          <p:cNvSpPr txBox="1"/>
+          <p:nvPr/>
+        </p:nvSpPr>
+        <p:spPr>
+          <a:xfrm>
+            <a:off x="777240" y="2103120"/>
+            <a:ext cx="2286000" cy="228600"/>
+          </a:xfrm>
+          <a:prstGeom prst="rect">
+            <a:avLst/>
+          </a:prstGeom>
+          <a:noFill/>
+        </p:spPr>
+        <p:txBody>
+          <a:bodyPr wrap="square" lIns="0" rIns="0" tIns="0" bIns="0">
+            <a:spAutoFit/>
+          </a:bodyPr>
+          <a:lstStyle/>
+          <a:p>
+            <a:pPr algn="l"/>
+            <a:r>
+              <a:rPr sz="900" b="0" i="0">
+                <a:solidFill>
+                  <a:srgbClr val="CADCFC"/>
+                </a:solidFill>
+                <a:latin typeface="Calibri"/>
+              </a:rPr>
+              <a:t>Jan 68.4%  →  Feb 72.8%</a:t>
+            </a:r>
+          </a:p>
+        </p:txBody>
+      </p:sp>
+      <p:sp>
+        <p:nvSpPr>
+          <p:cNvPr id="13" name="TextBox 12"/>
+          <p:cNvSpPr txBox="1"/>
+          <p:nvPr/>
+        </p:nvSpPr>
+        <p:spPr>
+          <a:xfrm>
+            <a:off x="457200" y="2359152"/>
+            <a:ext cx="2560320" cy="228600"/>
+          </a:xfrm>
+          <a:prstGeom prst="rect">
+            <a:avLst/>
+          </a:prstGeom>
+          <a:noFill/>
+        </p:spPr>
+        <p:txBody>
+          <a:bodyPr wrap="square" lIns="0" rIns="0" tIns="0" bIns="0">
+            <a:spAutoFit/>
+          </a:bodyPr>
+          <a:lstStyle/>
+          <a:p>
+            <a:pPr algn="l"/>
+            <a:r>
+              <a:rPr sz="900" b="1" i="0">
+                <a:solidFill>
+                  <a:srgbClr val="D97706"/>
+                </a:solidFill>
+                <a:latin typeface="Calibri"/>
+              </a:rPr>
+              <a:t>worse +4.4pp</a:t>
+            </a:r>
+          </a:p>
+        </p:txBody>
+      </p:sp>
+      <p:sp>
+        <p:nvSpPr>
+          <p:cNvPr id="14" name="Rectangle 13"/>
+          <p:cNvSpPr/>
+          <p:nvPr/>
+        </p:nvSpPr>
+        <p:spPr>
+          <a:xfrm>
+            <a:off x="320040" y="2999232"/>
+            <a:ext cx="2834640" cy="594360"/>
+          </a:xfrm>
+          <a:prstGeom prst="rect">
+            <a:avLst/>
+          </a:prstGeom>
+          <a:solidFill>
+            <a:srgbClr val="D97706"/>
+          </a:solidFill>
+          <a:ln>
+            <a:noFill/>
+          </a:ln>
+        </p:spPr>
+        <p:style>
+          <a:lnRef idx="1">
+            <a:schemeClr val="accent1"/>
+          </a:lnRef>
+          <a:fillRef idx="3">
+            <a:schemeClr val="accent1"/>
+          </a:fillRef>
+          <a:effectRef idx="2">
+            <a:schemeClr val="accent1"/>
+          </a:effectRef>
+          <a:fontRef idx="minor">
+            <a:schemeClr val="lt1"/>
+          </a:fontRef>
+        </p:style>
+        <p:txBody>
+          <a:bodyPr rtlCol="0" anchor="ctr"/>
+          <a:lstStyle/>
+          <a:p>
+            <a:pPr algn="ctr"/>
+          </a:p>
+        </p:txBody>
+      </p:sp>
+      <p:sp>
+        <p:nvSpPr>
+          <p:cNvPr id="15" name="TextBox 14"/>
+          <p:cNvSpPr txBox="1"/>
+          <p:nvPr/>
+        </p:nvSpPr>
+        <p:spPr>
+          <a:xfrm>
+            <a:off x="429768" y="3044952"/>
+            <a:ext cx="2651760" cy="502920"/>
+          </a:xfrm>
+          <a:prstGeom prst="rect">
+            <a:avLst/>
+          </a:prstGeom>
+          <a:noFill/>
+        </p:spPr>
+        <p:txBody>
+          <a:bodyPr wrap="square" lIns="0" rIns="0" tIns="0" bIns="0">
+            <a:spAutoFit/>
+          </a:bodyPr>
+          <a:lstStyle/>
+          <a:p>
+            <a:pPr algn="l"/>
+            <a:r>
+              <a:rPr sz="900" b="1" i="0">
+                <a:solidFill>
+                  <a:srgbClr val="FFFFFF"/>
+                </a:solidFill>
+                <a:latin typeface="Calibri"/>
+              </a:rPr>
+              <a:t>Scale cautiously — fix landing pages first</a:t>
+            </a:r>
+          </a:p>
+        </p:txBody>
+      </p:sp>
+      <p:sp>
+        <p:nvSpPr>
+          <p:cNvPr id="16" name="Rectangle 15"/>
+          <p:cNvSpPr/>
+          <p:nvPr/>
+        </p:nvSpPr>
+        <p:spPr>
+          <a:xfrm>
+            <a:off x="3291840" y="914400"/>
+            <a:ext cx="2834640" cy="2743200"/>
+          </a:xfrm>
+          <a:prstGeom prst="rect">
+            <a:avLst/>
+          </a:prstGeom>
+          <a:solidFill>
+            <a:srgbClr val="1E354A"/>
+          </a:solidFill>
+          <a:ln>
+            <a:noFill/>
+          </a:ln>
+        </p:spPr>
+        <p:style>
+          <a:lnRef idx="1">
+            <a:schemeClr val="accent1"/>
+          </a:lnRef>
+          <a:fillRef idx="3">
+            <a:schemeClr val="accent1"/>
+          </a:fillRef>
+          <a:effectRef idx="2">
+            <a:schemeClr val="accent1"/>
+          </a:effectRef>
+          <a:fontRef idx="minor">
+            <a:schemeClr val="lt1"/>
+          </a:fontRef>
+        </p:style>
+        <p:txBody>
+          <a:bodyPr rtlCol="0" anchor="ctr"/>
+          <a:lstStyle/>
+          <a:p>
+            <a:pPr algn="ctr"/>
+          </a:p>
+        </p:txBody>
+      </p:sp>
+      <p:sp>
+        <p:nvSpPr>
+          <p:cNvPr id="17" name="Rectangle 16"/>
+          <p:cNvSpPr/>
+          <p:nvPr/>
+        </p:nvSpPr>
+        <p:spPr>
+          <a:xfrm>
+            <a:off x="3291840" y="914400"/>
+            <a:ext cx="2834640" cy="64008"/>
+          </a:xfrm>
+          <a:prstGeom prst="rect">
+            <a:avLst/>
+          </a:prstGeom>
+          <a:solidFill>
+            <a:srgbClr val="059669"/>
+          </a:solidFill>
+          <a:ln>
+            <a:noFill/>
+          </a:ln>
+        </p:spPr>
+        <p:style>
+          <a:lnRef idx="1">
+            <a:schemeClr val="accent1"/>
+          </a:lnRef>
+          <a:fillRef idx="3">
+            <a:schemeClr val="accent1"/>
+          </a:fillRef>
+          <a:effectRef idx="2">
+            <a:schemeClr val="accent1"/>
+          </a:effectRef>
+          <a:fontRef idx="minor">
+            <a:schemeClr val="lt1"/>
+          </a:fontRef>
+        </p:style>
+        <p:txBody>
+          <a:bodyPr rtlCol="0" anchor="ctr"/>
+          <a:lstStyle/>
+          <a:p>
+            <a:pPr algn="ctr"/>
+          </a:p>
+        </p:txBody>
+      </p:sp>
+      <p:sp>
+        <p:nvSpPr>
+          <p:cNvPr id="18" name="TextBox 17"/>
+          <p:cNvSpPr txBox="1"/>
+          <p:nvPr/>
+        </p:nvSpPr>
+        <p:spPr>
+          <a:xfrm>
+            <a:off x="3429000" y="1005840"/>
+            <a:ext cx="2560320" cy="548640"/>
+          </a:xfrm>
+          <a:prstGeom prst="rect">
+            <a:avLst/>
+          </a:prstGeom>
+          <a:noFill/>
+        </p:spPr>
+        <p:txBody>
+          <a:bodyPr wrap="square" lIns="0" rIns="0" tIns="0" bIns="0">
+            <a:spAutoFit/>
+          </a:bodyPr>
+          <a:lstStyle/>
+          <a:p>
+            <a:pPr algn="l"/>
+            <a:r>
+              <a:rPr sz="1200" b="1" i="0">
+                <a:solidFill>
+                  <a:srgbClr val="FFFFFF"/>
+                </a:solidFill>
+                <a:latin typeface="Calibri"/>
+              </a:rPr>
+              <a:t>DoubleClick /</a:t>
+            </a:r>
+            <a:br/>
+            <a:r>
+              <a:t>DV360</a:t>
+            </a:r>
+          </a:p>
+        </p:txBody>
+      </p:sp>
+      <p:sp>
+        <p:nvSpPr>
+          <p:cNvPr id="19" name="TextBox 18"/>
+          <p:cNvSpPr txBox="1"/>
+          <p:nvPr/>
+        </p:nvSpPr>
+        <p:spPr>
+          <a:xfrm>
+            <a:off x="3429000" y="1572768"/>
+            <a:ext cx="2560320" cy="228600"/>
+          </a:xfrm>
+          <a:prstGeom prst="rect">
+            <a:avLst/>
+          </a:prstGeom>
+          <a:noFill/>
+        </p:spPr>
+        <p:txBody>
+          <a:bodyPr wrap="square" lIns="0" rIns="0" tIns="0" bIns="0">
+            <a:spAutoFit/>
+          </a:bodyPr>
+          <a:lstStyle/>
+          <a:p>
+            <a:pPr algn="l"/>
+            <a:r>
+              <a:rPr sz="800" b="0" i="1">
+                <a:solidFill>
+                  <a:srgbClr val="64748B"/>
+                </a:solidFill>
+                <a:latin typeface="Calibri"/>
+              </a:rPr>
+              <a:t>doubleclick.net</a:t>
+            </a:r>
+          </a:p>
+        </p:txBody>
+      </p:sp>
+      <p:sp>
+        <p:nvSpPr>
+          <p:cNvPr id="20" name="TextBox 19"/>
+          <p:cNvSpPr txBox="1"/>
+          <p:nvPr/>
+        </p:nvSpPr>
+        <p:spPr>
+          <a:xfrm>
+            <a:off x="3429000" y="1828800"/>
+            <a:ext cx="457200" cy="228600"/>
+          </a:xfrm>
+          <a:prstGeom prst="rect">
+            <a:avLst/>
+          </a:prstGeom>
+          <a:noFill/>
+        </p:spPr>
+        <p:txBody>
+          <a:bodyPr wrap="square" lIns="0" rIns="0" tIns="0" bIns="0">
+            <a:spAutoFit/>
+          </a:bodyPr>
+          <a:lstStyle/>
+          <a:p>
+            <a:pPr algn="l"/>
+            <a:r>
+              <a:rPr sz="800" b="1" i="0">
+                <a:solidFill>
+                  <a:srgbClr val="CADCFC"/>
+                </a:solidFill>
+                <a:latin typeface="Calibri"/>
+              </a:rPr>
+              <a:t>PVs</a:t>
+            </a:r>
+          </a:p>
+        </p:txBody>
+      </p:sp>
+      <p:sp>
+        <p:nvSpPr>
+          <p:cNvPr id="21" name="TextBox 20"/>
+          <p:cNvSpPr txBox="1"/>
+          <p:nvPr/>
+        </p:nvSpPr>
+        <p:spPr>
+          <a:xfrm>
+            <a:off x="3749039" y="1828800"/>
+            <a:ext cx="2286000" cy="228600"/>
+          </a:xfrm>
+          <a:prstGeom prst="rect">
+            <a:avLst/>
+          </a:prstGeom>
+          <a:noFill/>
+        </p:spPr>
+        <p:txBody>
+          <a:bodyPr wrap="square" lIns="0" rIns="0" tIns="0" bIns="0">
+            <a:spAutoFit/>
+          </a:bodyPr>
+          <a:lstStyle/>
+          <a:p>
+            <a:pPr algn="l"/>
+            <a:r>
+              <a:rPr sz="900" b="0" i="0">
+                <a:solidFill>
+                  <a:srgbClr val="CADCFC"/>
+                </a:solidFill>
+                <a:latin typeface="Calibri"/>
+              </a:rPr>
+              <a:t>Jan 17,190  →  Feb 27,216</a:t>
+            </a:r>
+          </a:p>
+        </p:txBody>
+      </p:sp>
+      <p:sp>
+        <p:nvSpPr>
+          <p:cNvPr id="22" name="TextBox 21"/>
+          <p:cNvSpPr txBox="1"/>
+          <p:nvPr/>
+        </p:nvSpPr>
+        <p:spPr>
+          <a:xfrm>
+            <a:off x="3429000" y="2103120"/>
+            <a:ext cx="457200" cy="228600"/>
+          </a:xfrm>
+          <a:prstGeom prst="rect">
+            <a:avLst/>
+          </a:prstGeom>
+          <a:noFill/>
+        </p:spPr>
+        <p:txBody>
+          <a:bodyPr wrap="square" lIns="0" rIns="0" tIns="0" bIns="0">
+            <a:spAutoFit/>
+          </a:bodyPr>
+          <a:lstStyle/>
+          <a:p>
+            <a:pPr algn="l"/>
+            <a:r>
+              <a:rPr sz="800" b="1" i="0">
+                <a:solidFill>
+                  <a:srgbClr val="CADCFC"/>
+                </a:solidFill>
+                <a:latin typeface="Calibri"/>
+              </a:rPr>
+              <a:t>BR</a:t>
+            </a:r>
+          </a:p>
+        </p:txBody>
+      </p:sp>
+      <p:sp>
+        <p:nvSpPr>
+          <p:cNvPr id="23" name="TextBox 22"/>
+          <p:cNvSpPr txBox="1"/>
+          <p:nvPr/>
+        </p:nvSpPr>
+        <p:spPr>
+          <a:xfrm>
+            <a:off x="3749039" y="2103120"/>
+            <a:ext cx="2286000" cy="228600"/>
+          </a:xfrm>
+          <a:prstGeom prst="rect">
+            <a:avLst/>
+          </a:prstGeom>
+          <a:noFill/>
+        </p:spPr>
+        <p:txBody>
+          <a:bodyPr wrap="square" lIns="0" rIns="0" tIns="0" bIns="0">
+            <a:spAutoFit/>
+          </a:bodyPr>
+          <a:lstStyle/>
+          <a:p>
+            <a:pPr algn="l"/>
+            <a:r>
+              <a:rPr sz="900" b="0" i="0">
+                <a:solidFill>
+                  <a:srgbClr val="CADCFC"/>
+                </a:solidFill>
+                <a:latin typeface="Calibri"/>
+              </a:rPr>
+              <a:t>Jan 71.3%  →  Feb 66.9%</a:t>
+            </a:r>
+          </a:p>
+        </p:txBody>
+      </p:sp>
+      <p:sp>
+        <p:nvSpPr>
+          <p:cNvPr id="24" name="TextBox 23"/>
+          <p:cNvSpPr txBox="1"/>
+          <p:nvPr/>
+        </p:nvSpPr>
+        <p:spPr>
+          <a:xfrm>
+            <a:off x="3429000" y="2359152"/>
+            <a:ext cx="2560320" cy="228600"/>
+          </a:xfrm>
+          <a:prstGeom prst="rect">
+            <a:avLst/>
+          </a:prstGeom>
+          <a:noFill/>
+        </p:spPr>
+        <p:txBody>
+          <a:bodyPr wrap="square" lIns="0" rIns="0" tIns="0" bIns="0">
+            <a:spAutoFit/>
+          </a:bodyPr>
+          <a:lstStyle/>
+          <a:p>
+            <a:pPr algn="l"/>
+            <a:r>
+              <a:rPr sz="900" b="1" i="0">
+                <a:solidFill>
+                  <a:srgbClr val="059669"/>
+                </a:solidFill>
+                <a:latin typeface="Calibri"/>
+              </a:rPr>
+              <a:t>improving -4.4pp</a:t>
+            </a:r>
+          </a:p>
+        </p:txBody>
+      </p:sp>
+      <p:sp>
+        <p:nvSpPr>
+          <p:cNvPr id="25" name="Rectangle 24"/>
+          <p:cNvSpPr/>
+          <p:nvPr/>
+        </p:nvSpPr>
+        <p:spPr>
+          <a:xfrm>
+            <a:off x="3291840" y="2999232"/>
+            <a:ext cx="2834640" cy="594360"/>
+          </a:xfrm>
+          <a:prstGeom prst="rect">
+            <a:avLst/>
+          </a:prstGeom>
+          <a:solidFill>
+            <a:srgbClr val="059669"/>
+          </a:solidFill>
+          <a:ln>
+            <a:noFill/>
+          </a:ln>
+        </p:spPr>
+        <p:style>
+          <a:lnRef idx="1">
+            <a:schemeClr val="accent1"/>
+          </a:lnRef>
+          <a:fillRef idx="3">
+            <a:schemeClr val="accent1"/>
+          </a:fillRef>
+          <a:effectRef idx="2">
+            <a:schemeClr val="accent1"/>
+          </a:effectRef>
+          <a:fontRef idx="minor">
+            <a:schemeClr val="lt1"/>
+          </a:fontRef>
+        </p:style>
+        <p:txBody>
+          <a:bodyPr rtlCol="0" anchor="ctr"/>
+          <a:lstStyle/>
+          <a:p>
+            <a:pPr algn="ctr"/>
+          </a:p>
+        </p:txBody>
+      </p:sp>
+      <p:sp>
+        <p:nvSpPr>
+          <p:cNvPr id="26" name="TextBox 25"/>
+          <p:cNvSpPr txBox="1"/>
+          <p:nvPr/>
+        </p:nvSpPr>
+        <p:spPr>
+          <a:xfrm>
+            <a:off x="3401568" y="3044952"/>
+            <a:ext cx="2651760" cy="502920"/>
+          </a:xfrm>
+          <a:prstGeom prst="rect">
+            <a:avLst/>
+          </a:prstGeom>
+          <a:noFill/>
+        </p:spPr>
+        <p:txBody>
+          <a:bodyPr wrap="square" lIns="0" rIns="0" tIns="0" bIns="0">
+            <a:spAutoFit/>
+          </a:bodyPr>
+          <a:lstStyle/>
+          <a:p>
+            <a:pPr algn="l"/>
+            <a:r>
+              <a:rPr sz="900" b="1" i="0">
+                <a:solidFill>
+                  <a:srgbClr val="FFFFFF"/>
+                </a:solidFill>
+                <a:latin typeface="Calibri"/>
+              </a:rPr>
+              <a:t>Only bright spot — understand &amp; replicate</a:t>
+            </a:r>
+          </a:p>
+        </p:txBody>
+      </p:sp>
+      <p:sp>
+        <p:nvSpPr>
+          <p:cNvPr id="27" name="Rectangle 26"/>
+          <p:cNvSpPr/>
+          <p:nvPr/>
+        </p:nvSpPr>
+        <p:spPr>
+          <a:xfrm>
+            <a:off x="6263640" y="914400"/>
+            <a:ext cx="2834640" cy="2743200"/>
+          </a:xfrm>
+          <a:prstGeom prst="rect">
+            <a:avLst/>
+          </a:prstGeom>
+          <a:solidFill>
+            <a:srgbClr val="1E354A"/>
+          </a:solidFill>
+          <a:ln>
+            <a:noFill/>
+          </a:ln>
+        </p:spPr>
+        <p:style>
+          <a:lnRef idx="1">
+            <a:schemeClr val="accent1"/>
+          </a:lnRef>
+          <a:fillRef idx="3">
+            <a:schemeClr val="accent1"/>
+          </a:fillRef>
+          <a:effectRef idx="2">
+            <a:schemeClr val="accent1"/>
+          </a:effectRef>
+          <a:fontRef idx="minor">
+            <a:schemeClr val="lt1"/>
+          </a:fontRef>
+        </p:style>
+        <p:txBody>
+          <a:bodyPr rtlCol="0" anchor="ctr"/>
+          <a:lstStyle/>
+          <a:p>
+            <a:pPr algn="ctr"/>
+          </a:p>
+        </p:txBody>
+      </p:sp>
+      <p:sp>
+        <p:nvSpPr>
+          <p:cNvPr id="28" name="Rectangle 27"/>
+          <p:cNvSpPr/>
+          <p:nvPr/>
+        </p:nvSpPr>
+        <p:spPr>
+          <a:xfrm>
+            <a:off x="6263640" y="914400"/>
+            <a:ext cx="2834640" cy="64008"/>
+          </a:xfrm>
+          <a:prstGeom prst="rect">
+            <a:avLst/>
+          </a:prstGeom>
+          <a:solidFill>
+            <a:srgbClr val="DC2626"/>
+          </a:solidFill>
+          <a:ln>
+            <a:noFill/>
+          </a:ln>
+        </p:spPr>
+        <p:style>
+          <a:lnRef idx="1">
+            <a:schemeClr val="accent1"/>
+          </a:lnRef>
+          <a:fillRef idx="3">
+            <a:schemeClr val="accent1"/>
+          </a:fillRef>
+          <a:effectRef idx="2">
+            <a:schemeClr val="accent1"/>
+          </a:effectRef>
+          <a:fontRef idx="minor">
+            <a:schemeClr val="lt1"/>
+          </a:fontRef>
+        </p:style>
+        <p:txBody>
+          <a:bodyPr rtlCol="0" anchor="ctr"/>
+          <a:lstStyle/>
+          <a:p>
+            <a:pPr algn="ctr"/>
+          </a:p>
+        </p:txBody>
+      </p:sp>
+      <p:sp>
+        <p:nvSpPr>
+          <p:cNvPr id="29" name="TextBox 28"/>
+          <p:cNvSpPr txBox="1"/>
+          <p:nvPr/>
+        </p:nvSpPr>
+        <p:spPr>
+          <a:xfrm>
+            <a:off x="6400800" y="1005840"/>
+            <a:ext cx="2560320" cy="548640"/>
+          </a:xfrm>
+          <a:prstGeom prst="rect">
+            <a:avLst/>
+          </a:prstGeom>
+          <a:noFill/>
+        </p:spPr>
+        <p:txBody>
+          <a:bodyPr wrap="square" lIns="0" rIns="0" tIns="0" bIns="0">
+            <a:spAutoFit/>
+          </a:bodyPr>
+          <a:lstStyle/>
+          <a:p>
+            <a:pPr algn="l"/>
+            <a:r>
+              <a:rPr sz="1200" b="1" i="0">
+                <a:solidFill>
+                  <a:srgbClr val="FFFFFF"/>
+                </a:solidFill>
+                <a:latin typeface="Calibri"/>
+              </a:rPr>
+              <a:t>Amazon Ad</a:t>
+            </a:r>
+            <a:br/>
+            <a:r>
+              <a:t>System (AAX)</a:t>
+            </a:r>
+          </a:p>
+        </p:txBody>
+      </p:sp>
+      <p:sp>
+        <p:nvSpPr>
+          <p:cNvPr id="30" name="TextBox 29"/>
+          <p:cNvSpPr txBox="1"/>
+          <p:nvPr/>
+        </p:nvSpPr>
+        <p:spPr>
+          <a:xfrm>
+            <a:off x="6400800" y="1572768"/>
+            <a:ext cx="2560320" cy="228600"/>
+          </a:xfrm>
+          <a:prstGeom prst="rect">
+            <a:avLst/>
+          </a:prstGeom>
+          <a:noFill/>
+        </p:spPr>
+        <p:txBody>
+          <a:bodyPr wrap="square" lIns="0" rIns="0" tIns="0" bIns="0">
+            <a:spAutoFit/>
+          </a:bodyPr>
+          <a:lstStyle/>
+          <a:p>
+            <a:pPr algn="l"/>
+            <a:r>
+              <a:rPr sz="800" b="0" i="1">
+                <a:solidFill>
+                  <a:srgbClr val="64748B"/>
+                </a:solidFill>
+                <a:latin typeface="Calibri"/>
+              </a:rPr>
+              <a:t>amazon-adsystem.com</a:t>
+            </a:r>
+          </a:p>
+        </p:txBody>
+      </p:sp>
+      <p:sp>
+        <p:nvSpPr>
+          <p:cNvPr id="31" name="TextBox 30"/>
+          <p:cNvSpPr txBox="1"/>
+          <p:nvPr/>
+        </p:nvSpPr>
+        <p:spPr>
+          <a:xfrm>
+            <a:off x="6400800" y="1828800"/>
+            <a:ext cx="457200" cy="228600"/>
+          </a:xfrm>
+          <a:prstGeom prst="rect">
+            <a:avLst/>
+          </a:prstGeom>
+          <a:noFill/>
+        </p:spPr>
+        <p:txBody>
+          <a:bodyPr wrap="square" lIns="0" rIns="0" tIns="0" bIns="0">
+            <a:spAutoFit/>
+          </a:bodyPr>
+          <a:lstStyle/>
+          <a:p>
+            <a:pPr algn="l"/>
+            <a:r>
+              <a:rPr sz="800" b="1" i="0">
+                <a:solidFill>
+                  <a:srgbClr val="CADCFC"/>
+                </a:solidFill>
+                <a:latin typeface="Calibri"/>
+              </a:rPr>
+              <a:t>PVs</a:t>
+            </a:r>
+          </a:p>
+        </p:txBody>
+      </p:sp>
+      <p:sp>
+        <p:nvSpPr>
+          <p:cNvPr id="32" name="TextBox 31"/>
+          <p:cNvSpPr txBox="1"/>
+          <p:nvPr/>
+        </p:nvSpPr>
+        <p:spPr>
+          <a:xfrm>
+            <a:off x="6720840" y="1828800"/>
+            <a:ext cx="2286000" cy="228600"/>
+          </a:xfrm>
+          <a:prstGeom prst="rect">
+            <a:avLst/>
+          </a:prstGeom>
+          <a:noFill/>
+        </p:spPr>
+        <p:txBody>
+          <a:bodyPr wrap="square" lIns="0" rIns="0" tIns="0" bIns="0">
+            <a:spAutoFit/>
+          </a:bodyPr>
+          <a:lstStyle/>
+          <a:p>
+            <a:pPr algn="l"/>
+            <a:r>
+              <a:rPr sz="900" b="0" i="0">
+                <a:solidFill>
+                  <a:srgbClr val="CADCFC"/>
+                </a:solidFill>
+                <a:latin typeface="Calibri"/>
+              </a:rPr>
+              <a:t>Jan 595  →  Feb 505</a:t>
+            </a:r>
+          </a:p>
+        </p:txBody>
+      </p:sp>
+      <p:sp>
+        <p:nvSpPr>
+          <p:cNvPr id="33" name="TextBox 32"/>
+          <p:cNvSpPr txBox="1"/>
+          <p:nvPr/>
+        </p:nvSpPr>
+        <p:spPr>
+          <a:xfrm>
+            <a:off x="6400800" y="2103120"/>
+            <a:ext cx="457200" cy="228600"/>
+          </a:xfrm>
+          <a:prstGeom prst="rect">
+            <a:avLst/>
+          </a:prstGeom>
+          <a:noFill/>
+        </p:spPr>
+        <p:txBody>
+          <a:bodyPr wrap="square" lIns="0" rIns="0" tIns="0" bIns="0">
+            <a:spAutoFit/>
+          </a:bodyPr>
+          <a:lstStyle/>
+          <a:p>
+            <a:pPr algn="l"/>
+            <a:r>
+              <a:rPr sz="800" b="1" i="0">
+                <a:solidFill>
+                  <a:srgbClr val="CADCFC"/>
+                </a:solidFill>
+                <a:latin typeface="Calibri"/>
+              </a:rPr>
+              <a:t>BR</a:t>
+            </a:r>
+          </a:p>
+        </p:txBody>
+      </p:sp>
+      <p:sp>
+        <p:nvSpPr>
+          <p:cNvPr id="34" name="TextBox 33"/>
+          <p:cNvSpPr txBox="1"/>
+          <p:nvPr/>
+        </p:nvSpPr>
+        <p:spPr>
+          <a:xfrm>
+            <a:off x="6720840" y="2103120"/>
+            <a:ext cx="2286000" cy="228600"/>
+          </a:xfrm>
+          <a:prstGeom prst="rect">
+            <a:avLst/>
+          </a:prstGeom>
+          <a:noFill/>
+        </p:spPr>
+        <p:txBody>
+          <a:bodyPr wrap="square" lIns="0" rIns="0" tIns="0" bIns="0">
+            <a:spAutoFit/>
+          </a:bodyPr>
+          <a:lstStyle/>
+          <a:p>
+            <a:pPr algn="l"/>
+            <a:r>
+              <a:rPr sz="900" b="0" i="0">
+                <a:solidFill>
+                  <a:srgbClr val="CADCFC"/>
+                </a:solidFill>
+                <a:latin typeface="Calibri"/>
+              </a:rPr>
+              <a:t>Jan 99.3%  →  Feb 99.2%</a:t>
+            </a:r>
+          </a:p>
+        </p:txBody>
+      </p:sp>
+      <p:sp>
+        <p:nvSpPr>
+          <p:cNvPr id="35" name="TextBox 34"/>
+          <p:cNvSpPr txBox="1"/>
+          <p:nvPr/>
+        </p:nvSpPr>
+        <p:spPr>
+          <a:xfrm>
+            <a:off x="6400800" y="2359152"/>
+            <a:ext cx="2560320" cy="228600"/>
+          </a:xfrm>
+          <a:prstGeom prst="rect">
+            <a:avLst/>
+          </a:prstGeom>
+          <a:noFill/>
+        </p:spPr>
+        <p:txBody>
+          <a:bodyPr wrap="square" lIns="0" rIns="0" tIns="0" bIns="0">
+            <a:spAutoFit/>
+          </a:bodyPr>
+          <a:lstStyle/>
+          <a:p>
+            <a:pPr algn="l"/>
+            <a:r>
+              <a:rPr sz="900" b="1" i="0">
+                <a:solidFill>
+                  <a:srgbClr val="DC2626"/>
+                </a:solidFill>
+                <a:latin typeface="Calibri"/>
+              </a:rPr>
+              <a:t>no change — still 99%</a:t>
+            </a:r>
+          </a:p>
+        </p:txBody>
+      </p:sp>
+      <p:sp>
+        <p:nvSpPr>
+          <p:cNvPr id="36" name="Rectangle 35"/>
+          <p:cNvSpPr/>
+          <p:nvPr/>
+        </p:nvSpPr>
+        <p:spPr>
+          <a:xfrm>
+            <a:off x="6263640" y="2999232"/>
+            <a:ext cx="2834640" cy="594360"/>
+          </a:xfrm>
+          <a:prstGeom prst="rect">
+            <a:avLst/>
+          </a:prstGeom>
+          <a:solidFill>
+            <a:srgbClr val="DC2626"/>
+          </a:solidFill>
+          <a:ln>
+            <a:noFill/>
+          </a:ln>
+        </p:spPr>
+        <p:style>
+          <a:lnRef idx="1">
+            <a:schemeClr val="accent1"/>
+          </a:lnRef>
+          <a:fillRef idx="3">
+            <a:schemeClr val="accent1"/>
+          </a:fillRef>
+          <a:effectRef idx="2">
+            <a:schemeClr val="accent1"/>
+          </a:effectRef>
+          <a:fontRef idx="minor">
+            <a:schemeClr val="lt1"/>
+          </a:fontRef>
+        </p:style>
+        <p:txBody>
+          <a:bodyPr rtlCol="0" anchor="ctr"/>
+          <a:lstStyle/>
+          <a:p>
+            <a:pPr algn="ctr"/>
+          </a:p>
+        </p:txBody>
+      </p:sp>
+      <p:sp>
+        <p:nvSpPr>
+          <p:cNvPr id="37" name="TextBox 36"/>
+          <p:cNvSpPr txBox="1"/>
+          <p:nvPr/>
+        </p:nvSpPr>
+        <p:spPr>
+          <a:xfrm>
+            <a:off x="6373368" y="3044952"/>
+            <a:ext cx="2651760" cy="502920"/>
+          </a:xfrm>
+          <a:prstGeom prst="rect">
+            <a:avLst/>
+          </a:prstGeom>
+          <a:noFill/>
+        </p:spPr>
+        <p:txBody>
+          <a:bodyPr wrap="square" lIns="0" rIns="0" tIns="0" bIns="0">
+            <a:spAutoFit/>
+          </a:bodyPr>
+          <a:lstStyle/>
+          <a:p>
+            <a:pPr algn="l"/>
+            <a:r>
+              <a:rPr sz="900" b="1" i="0">
+                <a:solidFill>
+                  <a:srgbClr val="FFFFFF"/>
+                </a:solidFill>
+                <a:latin typeface="Calibri"/>
+              </a:rPr>
+              <a:t>Pause immediately — confirmed waste</a:t>
+            </a:r>
+          </a:p>
+        </p:txBody>
+      </p:sp>
+      <p:sp>
+        <p:nvSpPr>
+          <p:cNvPr id="38" name="Rectangle 37"/>
+          <p:cNvSpPr/>
+          <p:nvPr/>
+        </p:nvSpPr>
+        <p:spPr>
+          <a:xfrm>
+            <a:off x="9235440" y="914400"/>
+            <a:ext cx="2834640" cy="2743200"/>
+          </a:xfrm>
+          <a:prstGeom prst="rect">
+            <a:avLst/>
+          </a:prstGeom>
+          <a:solidFill>
+            <a:srgbClr val="1E354A"/>
+          </a:solidFill>
+          <a:ln>
+            <a:noFill/>
+          </a:ln>
+        </p:spPr>
+        <p:style>
+          <a:lnRef idx="1">
+            <a:schemeClr val="accent1"/>
+          </a:lnRef>
+          <a:fillRef idx="3">
+            <a:schemeClr val="accent1"/>
+          </a:fillRef>
+          <a:effectRef idx="2">
+            <a:schemeClr val="accent1"/>
+          </a:effectRef>
+          <a:fontRef idx="minor">
+            <a:schemeClr val="lt1"/>
+          </a:fontRef>
+        </p:style>
+        <p:txBody>
+          <a:bodyPr rtlCol="0" anchor="ctr"/>
+          <a:lstStyle/>
+          <a:p>
+            <a:pPr algn="ctr"/>
+          </a:p>
+        </p:txBody>
+      </p:sp>
+      <p:sp>
+        <p:nvSpPr>
+          <p:cNvPr id="39" name="Rectangle 38"/>
+          <p:cNvSpPr/>
+          <p:nvPr/>
+        </p:nvSpPr>
+        <p:spPr>
+          <a:xfrm>
+            <a:off x="9235440" y="914400"/>
+            <a:ext cx="2834640" cy="64008"/>
+          </a:xfrm>
+          <a:prstGeom prst="rect">
+            <a:avLst/>
+          </a:prstGeom>
+          <a:solidFill>
+            <a:srgbClr val="DC2626"/>
+          </a:solidFill>
+          <a:ln>
+            <a:noFill/>
+          </a:ln>
+        </p:spPr>
+        <p:style>
+          <a:lnRef idx="1">
+            <a:schemeClr val="accent1"/>
+          </a:lnRef>
+          <a:fillRef idx="3">
+            <a:schemeClr val="accent1"/>
+          </a:fillRef>
+          <a:effectRef idx="2">
+            <a:schemeClr val="accent1"/>
+          </a:effectRef>
+          <a:fontRef idx="minor">
+            <a:schemeClr val="lt1"/>
+          </a:fontRef>
+        </p:style>
+        <p:txBody>
+          <a:bodyPr rtlCol="0" anchor="ctr"/>
+          <a:lstStyle/>
+          <a:p>
+            <a:pPr algn="ctr"/>
+          </a:p>
+        </p:txBody>
+      </p:sp>
+      <p:sp>
+        <p:nvSpPr>
+          <p:cNvPr id="40" name="TextBox 39"/>
+          <p:cNvSpPr txBox="1"/>
+          <p:nvPr/>
+        </p:nvSpPr>
+        <p:spPr>
+          <a:xfrm>
+            <a:off x="9372600" y="1005840"/>
+            <a:ext cx="2560320" cy="548640"/>
+          </a:xfrm>
+          <a:prstGeom prst="rect">
+            <a:avLst/>
+          </a:prstGeom>
+          <a:noFill/>
+        </p:spPr>
+        <p:txBody>
+          <a:bodyPr wrap="square" lIns="0" rIns="0" tIns="0" bIns="0">
+            <a:spAutoFit/>
+          </a:bodyPr>
+          <a:lstStyle/>
+          <a:p>
+            <a:pPr algn="l"/>
+            <a:r>
+              <a:rPr sz="1200" b="1" i="0">
+                <a:solidFill>
+                  <a:srgbClr val="FFFFFF"/>
+                </a:solidFill>
+                <a:latin typeface="Calibri"/>
+              </a:rPr>
+              <a:t>Google</a:t>
+            </a:r>
+            <a:br/>
+            <a:r>
+              <a:t>AdServices</a:t>
+            </a:r>
+          </a:p>
+        </p:txBody>
+      </p:sp>
+      <p:sp>
+        <p:nvSpPr>
+          <p:cNvPr id="41" name="TextBox 40"/>
+          <p:cNvSpPr txBox="1"/>
+          <p:nvPr/>
+        </p:nvSpPr>
+        <p:spPr>
+          <a:xfrm>
+            <a:off x="9372600" y="1572768"/>
+            <a:ext cx="2560320" cy="228600"/>
+          </a:xfrm>
+          <a:prstGeom prst="rect">
+            <a:avLst/>
+          </a:prstGeom>
+          <a:noFill/>
+        </p:spPr>
+        <p:txBody>
+          <a:bodyPr wrap="square" lIns="0" rIns="0" tIns="0" bIns="0">
+            <a:spAutoFit/>
+          </a:bodyPr>
+          <a:lstStyle/>
+          <a:p>
+            <a:pPr algn="l"/>
+            <a:r>
+              <a:rPr sz="800" b="0" i="1">
+                <a:solidFill>
+                  <a:srgbClr val="64748B"/>
+                </a:solidFill>
+                <a:latin typeface="Calibri"/>
+              </a:rPr>
+              <a:t>googleadservices.com</a:t>
+            </a:r>
+          </a:p>
+        </p:txBody>
+      </p:sp>
+      <p:sp>
+        <p:nvSpPr>
+          <p:cNvPr id="42" name="TextBox 41"/>
+          <p:cNvSpPr txBox="1"/>
+          <p:nvPr/>
+        </p:nvSpPr>
+        <p:spPr>
+          <a:xfrm>
+            <a:off x="9372600" y="1828800"/>
+            <a:ext cx="457200" cy="228600"/>
+          </a:xfrm>
+          <a:prstGeom prst="rect">
+            <a:avLst/>
+          </a:prstGeom>
+          <a:noFill/>
+        </p:spPr>
+        <p:txBody>
+          <a:bodyPr wrap="square" lIns="0" rIns="0" tIns="0" bIns="0">
+            <a:spAutoFit/>
+          </a:bodyPr>
+          <a:lstStyle/>
+          <a:p>
+            <a:pPr algn="l"/>
+            <a:r>
+              <a:rPr sz="800" b="1" i="0">
+                <a:solidFill>
+                  <a:srgbClr val="CADCFC"/>
+                </a:solidFill>
+                <a:latin typeface="Calibri"/>
+              </a:rPr>
+              <a:t>PVs</a:t>
+            </a:r>
+          </a:p>
+        </p:txBody>
+      </p:sp>
+      <p:sp>
+        <p:nvSpPr>
+          <p:cNvPr id="43" name="TextBox 42"/>
+          <p:cNvSpPr txBox="1"/>
+          <p:nvPr/>
+        </p:nvSpPr>
+        <p:spPr>
+          <a:xfrm>
+            <a:off x="9692640" y="1828800"/>
+            <a:ext cx="2286000" cy="228600"/>
+          </a:xfrm>
+          <a:prstGeom prst="rect">
+            <a:avLst/>
+          </a:prstGeom>
+          <a:noFill/>
+        </p:spPr>
+        <p:txBody>
+          <a:bodyPr wrap="square" lIns="0" rIns="0" tIns="0" bIns="0">
+            <a:spAutoFit/>
+          </a:bodyPr>
+          <a:lstStyle/>
+          <a:p>
+            <a:pPr algn="l"/>
+            <a:r>
+              <a:rPr sz="900" b="0" i="0">
+                <a:solidFill>
+                  <a:srgbClr val="CADCFC"/>
+                </a:solidFill>
+                <a:latin typeface="Calibri"/>
+              </a:rPr>
+              <a:t>Jan 39  →  Feb 23</a:t>
+            </a:r>
+          </a:p>
+        </p:txBody>
+      </p:sp>
+      <p:sp>
+        <p:nvSpPr>
+          <p:cNvPr id="44" name="TextBox 43"/>
+          <p:cNvSpPr txBox="1"/>
+          <p:nvPr/>
+        </p:nvSpPr>
+        <p:spPr>
+          <a:xfrm>
+            <a:off x="9372600" y="2103120"/>
+            <a:ext cx="457200" cy="228600"/>
+          </a:xfrm>
+          <a:prstGeom prst="rect">
+            <a:avLst/>
+          </a:prstGeom>
+          <a:noFill/>
+        </p:spPr>
+        <p:txBody>
+          <a:bodyPr wrap="square" lIns="0" rIns="0" tIns="0" bIns="0">
+            <a:spAutoFit/>
+          </a:bodyPr>
+          <a:lstStyle/>
+          <a:p>
+            <a:pPr algn="l"/>
+            <a:r>
+              <a:rPr sz="800" b="1" i="0">
+                <a:solidFill>
+                  <a:srgbClr val="CADCFC"/>
+                </a:solidFill>
+                <a:latin typeface="Calibri"/>
+              </a:rPr>
+              <a:t>BR</a:t>
+            </a:r>
+          </a:p>
+        </p:txBody>
+      </p:sp>
+      <p:sp>
+        <p:nvSpPr>
+          <p:cNvPr id="45" name="TextBox 44"/>
+          <p:cNvSpPr txBox="1"/>
+          <p:nvPr/>
+        </p:nvSpPr>
+        <p:spPr>
+          <a:xfrm>
+            <a:off x="9692640" y="2103120"/>
+            <a:ext cx="2286000" cy="228600"/>
+          </a:xfrm>
+          <a:prstGeom prst="rect">
+            <a:avLst/>
+          </a:prstGeom>
+          <a:noFill/>
+        </p:spPr>
+        <p:txBody>
+          <a:bodyPr wrap="square" lIns="0" rIns="0" tIns="0" bIns="0">
+            <a:spAutoFit/>
+          </a:bodyPr>
+          <a:lstStyle/>
+          <a:p>
+            <a:pPr algn="l"/>
+            <a:r>
+              <a:rPr sz="900" b="0" i="0">
+                <a:solidFill>
+                  <a:srgbClr val="CADCFC"/>
+                </a:solidFill>
+                <a:latin typeface="Calibri"/>
+              </a:rPr>
+              <a:t>Jan 94.6%  →  Feb 100.0%</a:t>
+            </a:r>
+          </a:p>
+        </p:txBody>
+      </p:sp>
+      <p:sp>
+        <p:nvSpPr>
+          <p:cNvPr id="46" name="TextBox 45"/>
+          <p:cNvSpPr txBox="1"/>
+          <p:nvPr/>
+        </p:nvSpPr>
+        <p:spPr>
+          <a:xfrm>
+            <a:off x="9372600" y="2359152"/>
+            <a:ext cx="2560320" cy="228600"/>
+          </a:xfrm>
+          <a:prstGeom prst="rect">
+            <a:avLst/>
+          </a:prstGeom>
+          <a:noFill/>
+        </p:spPr>
+        <p:txBody>
+          <a:bodyPr wrap="square" lIns="0" rIns="0" tIns="0" bIns="0">
+            <a:spAutoFit/>
+          </a:bodyPr>
+          <a:lstStyle/>
+          <a:p>
+            <a:pPr algn="l"/>
+            <a:r>
+              <a:rPr sz="900" b="1" i="0">
+                <a:solidFill>
+                  <a:srgbClr val="DC2626"/>
+                </a:solidFill>
+                <a:latin typeface="Calibri"/>
+              </a:rPr>
+              <a:t>worse — 100% in Feb</a:t>
+            </a:r>
+          </a:p>
+        </p:txBody>
+      </p:sp>
+      <p:sp>
+        <p:nvSpPr>
+          <p:cNvPr id="47" name="Rectangle 46"/>
+          <p:cNvSpPr/>
+          <p:nvPr/>
+        </p:nvSpPr>
+        <p:spPr>
+          <a:xfrm>
+            <a:off x="9235440" y="2999232"/>
+            <a:ext cx="2834640" cy="594360"/>
+          </a:xfrm>
+          <a:prstGeom prst="rect">
+            <a:avLst/>
+          </a:prstGeom>
+          <a:solidFill>
+            <a:srgbClr val="DC2626"/>
+          </a:solidFill>
+          <a:ln>
+            <a:noFill/>
+          </a:ln>
+        </p:spPr>
+        <p:style>
+          <a:lnRef idx="1">
+            <a:schemeClr val="accent1"/>
+          </a:lnRef>
+          <a:fillRef idx="3">
+            <a:schemeClr val="accent1"/>
+          </a:fillRef>
+          <a:effectRef idx="2">
+            <a:schemeClr val="accent1"/>
+          </a:effectRef>
+          <a:fontRef idx="minor">
+            <a:schemeClr val="lt1"/>
+          </a:fontRef>
+        </p:style>
+        <p:txBody>
+          <a:bodyPr rtlCol="0" anchor="ctr"/>
+          <a:lstStyle/>
+          <a:p>
+            <a:pPr algn="ctr"/>
+          </a:p>
+        </p:txBody>
+      </p:sp>
+      <p:sp>
+        <p:nvSpPr>
+          <p:cNvPr id="48" name="TextBox 47"/>
+          <p:cNvSpPr txBox="1"/>
+          <p:nvPr/>
+        </p:nvSpPr>
+        <p:spPr>
+          <a:xfrm>
+            <a:off x="9345167" y="3044952"/>
+            <a:ext cx="2651760" cy="502920"/>
+          </a:xfrm>
+          <a:prstGeom prst="rect">
+            <a:avLst/>
+          </a:prstGeom>
+          <a:noFill/>
+        </p:spPr>
+        <p:txBody>
+          <a:bodyPr wrap="square" lIns="0" rIns="0" tIns="0" bIns="0">
+            <a:spAutoFit/>
+          </a:bodyPr>
+          <a:lstStyle/>
+          <a:p>
+            <a:pPr algn="l"/>
+            <a:r>
+              <a:rPr sz="900" b="1" i="0">
+                <a:solidFill>
+                  <a:srgbClr val="FFFFFF"/>
+                </a:solidFill>
+                <a:latin typeface="Calibri"/>
+              </a:rPr>
+              <a:t>Pause — zero engagement both months</a:t>
+            </a:r>
+          </a:p>
+        </p:txBody>
+      </p:sp>
+      <p:sp>
+        <p:nvSpPr>
+          <p:cNvPr id="49" name="Rectangle 48"/>
+          <p:cNvSpPr/>
+          <p:nvPr/>
+        </p:nvSpPr>
+        <p:spPr>
+          <a:xfrm>
+            <a:off x="320040" y="3703320"/>
+            <a:ext cx="5943600" cy="2377440"/>
+          </a:xfrm>
+          <a:prstGeom prst="rect">
+            <a:avLst/>
+          </a:prstGeom>
+          <a:solidFill>
+            <a:srgbClr val="1E354A"/>
+          </a:solidFill>
+          <a:ln>
+            <a:noFill/>
+          </a:ln>
+        </p:spPr>
+        <p:style>
+          <a:lnRef idx="1">
+            <a:schemeClr val="accent1"/>
+          </a:lnRef>
+          <a:fillRef idx="3">
+            <a:schemeClr val="accent1"/>
+          </a:fillRef>
+          <a:effectRef idx="2">
+            <a:schemeClr val="accent1"/>
+          </a:effectRef>
+          <a:fontRef idx="minor">
+            <a:schemeClr val="lt1"/>
+          </a:fontRef>
+        </p:style>
+        <p:txBody>
+          <a:bodyPr rtlCol="0" anchor="ctr"/>
+          <a:lstStyle/>
+          <a:p>
+            <a:pPr algn="ctr"/>
+          </a:p>
+        </p:txBody>
+      </p:sp>
+      <p:sp>
+        <p:nvSpPr>
+          <p:cNvPr id="50" name="Rectangle 49"/>
+          <p:cNvSpPr/>
+          <p:nvPr/>
+        </p:nvSpPr>
+        <p:spPr>
+          <a:xfrm>
+            <a:off x="320040" y="3703320"/>
+            <a:ext cx="5943600" cy="64008"/>
+          </a:xfrm>
+          <a:prstGeom prst="rect">
+            <a:avLst/>
+          </a:prstGeom>
+          <a:solidFill>
+            <a:srgbClr val="D97706"/>
+          </a:solidFill>
+          <a:ln>
+            <a:noFill/>
+          </a:ln>
+        </p:spPr>
+        <p:style>
+          <a:lnRef idx="1">
+            <a:schemeClr val="accent1"/>
+          </a:lnRef>
+          <a:fillRef idx="3">
+            <a:schemeClr val="accent1"/>
+          </a:fillRef>
+          <a:effectRef idx="2">
+            <a:schemeClr val="accent1"/>
+          </a:effectRef>
+          <a:fontRef idx="minor">
+            <a:schemeClr val="lt1"/>
+          </a:fontRef>
+        </p:style>
+        <p:txBody>
+          <a:bodyPr rtlCol="0" anchor="ctr"/>
+          <a:lstStyle/>
+          <a:p>
+            <a:pPr algn="ctr"/>
+          </a:p>
+        </p:txBody>
+      </p:sp>
+      <p:sp>
+        <p:nvSpPr>
+          <p:cNvPr id="51" name="TextBox 50"/>
+          <p:cNvSpPr txBox="1"/>
+          <p:nvPr/>
+        </p:nvSpPr>
+        <p:spPr>
+          <a:xfrm>
+            <a:off x="502920" y="3785615"/>
+            <a:ext cx="5577840" cy="320040"/>
+          </a:xfrm>
+          <a:prstGeom prst="rect">
+            <a:avLst/>
+          </a:prstGeom>
+          <a:noFill/>
+        </p:spPr>
+        <p:txBody>
+          <a:bodyPr wrap="square" lIns="0" rIns="0" tIns="0" bIns="0">
+            <a:spAutoFit/>
+          </a:bodyPr>
+          <a:lstStyle/>
+          <a:p>
+            <a:pPr algn="l"/>
+            <a:r>
+              <a:rPr sz="1200" b="1" i="0">
+                <a:solidFill>
+                  <a:srgbClr val="D97706"/>
+                </a:solidFill>
+                <a:latin typeface="Calibri"/>
+              </a:rPr>
+              <a:t>Paid Traffic Bounce Rate by Landing Page (Feb)</a:t>
+            </a:r>
+          </a:p>
+        </p:txBody>
+      </p:sp>
+      <p:sp>
+        <p:nvSpPr>
+          <p:cNvPr id="52" name="TextBox 51"/>
+          <p:cNvSpPr txBox="1"/>
+          <p:nvPr/>
+        </p:nvSpPr>
+        <p:spPr>
+          <a:xfrm>
+            <a:off x="502920" y="4133087"/>
+            <a:ext cx="1371600" cy="237744"/>
+          </a:xfrm>
+          <a:prstGeom prst="rect">
+            <a:avLst/>
+          </a:prstGeom>
+          <a:noFill/>
+        </p:spPr>
+        <p:txBody>
+          <a:bodyPr wrap="square" lIns="0" rIns="0" tIns="0" bIns="0">
+            <a:spAutoFit/>
+          </a:bodyPr>
+          <a:lstStyle/>
+          <a:p>
+            <a:pPr algn="l"/>
+            <a:r>
+              <a:rPr sz="900" b="1" i="0">
+                <a:solidFill>
+                  <a:srgbClr val="CADCFC"/>
+                </a:solidFill>
+                <a:latin typeface="Calibri"/>
+              </a:rPr>
+              <a:t>Landing Page</a:t>
+            </a:r>
+          </a:p>
+        </p:txBody>
+      </p:sp>
+      <p:sp>
+        <p:nvSpPr>
+          <p:cNvPr id="53" name="TextBox 52"/>
+          <p:cNvSpPr txBox="1"/>
+          <p:nvPr/>
+        </p:nvSpPr>
+        <p:spPr>
+          <a:xfrm>
+            <a:off x="4069080" y="4133087"/>
+            <a:ext cx="1371600" cy="237744"/>
+          </a:xfrm>
+          <a:prstGeom prst="rect">
+            <a:avLst/>
+          </a:prstGeom>
+          <a:noFill/>
+        </p:spPr>
+        <p:txBody>
+          <a:bodyPr wrap="square" lIns="0" rIns="0" tIns="0" bIns="0">
+            <a:spAutoFit/>
+          </a:bodyPr>
+          <a:lstStyle/>
+          <a:p>
+            <a:pPr algn="l"/>
+            <a:r>
+              <a:rPr sz="900" b="1" i="0">
+                <a:solidFill>
+                  <a:srgbClr val="CADCFC"/>
+                </a:solidFill>
+                <a:latin typeface="Calibri"/>
+              </a:rPr>
+              <a:t>Paid PVs</a:t>
+            </a:r>
+          </a:p>
+        </p:txBody>
+      </p:sp>
+      <p:sp>
+        <p:nvSpPr>
+          <p:cNvPr id="54" name="TextBox 53"/>
+          <p:cNvSpPr txBox="1"/>
+          <p:nvPr/>
+        </p:nvSpPr>
+        <p:spPr>
+          <a:xfrm>
+            <a:off x="5029200" y="4133087"/>
+            <a:ext cx="1371600" cy="237744"/>
+          </a:xfrm>
+          <a:prstGeom prst="rect">
+            <a:avLst/>
+          </a:prstGeom>
+          <a:noFill/>
+        </p:spPr>
+        <p:txBody>
+          <a:bodyPr wrap="square" lIns="0" rIns="0" tIns="0" bIns="0">
+            <a:spAutoFit/>
+          </a:bodyPr>
+          <a:lstStyle/>
+          <a:p>
+            <a:pPr algn="l"/>
+            <a:r>
+              <a:rPr sz="900" b="1" i="0">
+                <a:solidFill>
+                  <a:srgbClr val="CADCFC"/>
+                </a:solidFill>
+                <a:latin typeface="Calibri"/>
+              </a:rPr>
+              <a:t>BR</a:t>
+            </a:r>
+          </a:p>
+        </p:txBody>
+      </p:sp>
+      <p:sp>
+        <p:nvSpPr>
+          <p:cNvPr id="55" name="TextBox 54"/>
+          <p:cNvSpPr txBox="1"/>
+          <p:nvPr/>
+        </p:nvSpPr>
+        <p:spPr>
+          <a:xfrm>
+            <a:off x="5806440" y="4133087"/>
+            <a:ext cx="1371600" cy="237744"/>
+          </a:xfrm>
+          <a:prstGeom prst="rect">
+            <a:avLst/>
+          </a:prstGeom>
+          <a:noFill/>
+        </p:spPr>
+        <p:txBody>
+          <a:bodyPr wrap="square" lIns="0" rIns="0" tIns="0" bIns="0">
+            <a:spAutoFit/>
+          </a:bodyPr>
+          <a:lstStyle/>
+          <a:p>
+            <a:pPr algn="l"/>
+            <a:r>
+              <a:rPr sz="900" b="1" i="0">
+                <a:solidFill>
+                  <a:srgbClr val="CADCFC"/>
+                </a:solidFill>
+                <a:latin typeface="Calibri"/>
+              </a:rPr>
+              <a:t>vs Site Avg</a:t>
+            </a:r>
+          </a:p>
+        </p:txBody>
+      </p:sp>
+      <p:sp>
+        <p:nvSpPr>
+          <p:cNvPr id="56" name="Rectangle 55"/>
+          <p:cNvSpPr/>
+          <p:nvPr/>
+        </p:nvSpPr>
+        <p:spPr>
+          <a:xfrm>
+            <a:off x="411480" y="4114800"/>
+            <a:ext cx="5760720" cy="36576"/>
+          </a:xfrm>
+          <a:prstGeom prst="rect">
+            <a:avLst/>
+          </a:prstGeom>
+          <a:solidFill>
+            <a:srgbClr val="64748B"/>
+          </a:solidFill>
+          <a:ln>
+            <a:noFill/>
+          </a:ln>
+        </p:spPr>
+        <p:style>
+          <a:lnRef idx="1">
+            <a:schemeClr val="accent1"/>
+          </a:lnRef>
+          <a:fillRef idx="3">
+            <a:schemeClr val="accent1"/>
+          </a:fillRef>
+          <a:effectRef idx="2">
+            <a:schemeClr val="accent1"/>
+          </a:effectRef>
+          <a:fontRef idx="minor">
+            <a:schemeClr val="lt1"/>
+          </a:fontRef>
+        </p:style>
+        <p:txBody>
+          <a:bodyPr rtlCol="0" anchor="ctr"/>
+          <a:lstStyle/>
+          <a:p>
+            <a:pPr algn="ctr"/>
+          </a:p>
+        </p:txBody>
+      </p:sp>
+      <p:sp>
+        <p:nvSpPr>
+          <p:cNvPr id="57" name="Rectangle 56"/>
+          <p:cNvSpPr/>
+          <p:nvPr/>
+        </p:nvSpPr>
+        <p:spPr>
+          <a:xfrm>
+            <a:off x="411480" y="4187952"/>
+            <a:ext cx="5760720" cy="338328"/>
+          </a:xfrm>
+          <a:prstGeom prst="rect">
+            <a:avLst/>
+          </a:prstGeom>
+          <a:solidFill>
+            <a:srgbClr val="152B3D"/>
+          </a:solidFill>
+          <a:ln>
+            <a:noFill/>
+          </a:ln>
+        </p:spPr>
+        <p:style>
+          <a:lnRef idx="1">
+            <a:schemeClr val="accent1"/>
+          </a:lnRef>
+          <a:fillRef idx="3">
+            <a:schemeClr val="accent1"/>
+          </a:fillRef>
+          <a:effectRef idx="2">
+            <a:schemeClr val="accent1"/>
+          </a:effectRef>
+          <a:fontRef idx="minor">
+            <a:schemeClr val="lt1"/>
+          </a:fontRef>
+        </p:style>
+        <p:txBody>
+          <a:bodyPr rtlCol="0" anchor="ctr"/>
+          <a:lstStyle/>
+          <a:p>
+            <a:pPr algn="ctr"/>
+          </a:p>
+        </p:txBody>
+      </p:sp>
+      <p:sp>
+        <p:nvSpPr>
+          <p:cNvPr id="58" name="TextBox 57"/>
+          <p:cNvSpPr txBox="1"/>
+          <p:nvPr/>
+        </p:nvSpPr>
+        <p:spPr>
+          <a:xfrm>
+            <a:off x="502920" y="4242816"/>
+            <a:ext cx="3520440" cy="256032"/>
+          </a:xfrm>
+          <a:prstGeom prst="rect">
+            <a:avLst/>
+          </a:prstGeom>
+          <a:noFill/>
+        </p:spPr>
+        <p:txBody>
+          <a:bodyPr wrap="square" lIns="0" rIns="0" tIns="0" bIns="0">
+            <a:spAutoFit/>
+          </a:bodyPr>
+          <a:lstStyle/>
+          <a:p>
+            <a:pPr algn="l"/>
+            <a:r>
+              <a:rPr sz="900" b="0" i="0">
+                <a:solidFill>
+                  <a:srgbClr val="CADCFC"/>
+                </a:solidFill>
+                <a:latin typeface="Calibri"/>
+              </a:rPr>
+              <a:t>Solidigm Data Storage Solutions</a:t>
+            </a:r>
+          </a:p>
+        </p:txBody>
+      </p:sp>
+      <p:sp>
+        <p:nvSpPr>
+          <p:cNvPr id="59" name="TextBox 58"/>
+          <p:cNvSpPr txBox="1"/>
+          <p:nvPr/>
+        </p:nvSpPr>
+        <p:spPr>
+          <a:xfrm>
+            <a:off x="4069080" y="4242816"/>
+            <a:ext cx="914400" cy="256032"/>
+          </a:xfrm>
+          <a:prstGeom prst="rect">
+            <a:avLst/>
+          </a:prstGeom>
+          <a:noFill/>
+        </p:spPr>
+        <p:txBody>
+          <a:bodyPr wrap="square" lIns="0" rIns="0" tIns="0" bIns="0">
+            <a:spAutoFit/>
+          </a:bodyPr>
+          <a:lstStyle/>
+          <a:p>
+            <a:pPr algn="ctr"/>
+            <a:r>
+              <a:rPr sz="1000" b="1" i="0">
+                <a:solidFill>
+                  <a:srgbClr val="CADCFC"/>
+                </a:solidFill>
+                <a:latin typeface="Calibri"/>
+              </a:rPr>
+              <a:t>22,510</a:t>
+            </a:r>
+          </a:p>
+        </p:txBody>
+      </p:sp>
+      <p:sp>
+        <p:nvSpPr>
+          <p:cNvPr id="60" name="TextBox 59"/>
+          <p:cNvSpPr txBox="1"/>
+          <p:nvPr/>
+        </p:nvSpPr>
+        <p:spPr>
+          <a:xfrm>
+            <a:off x="5029200" y="4242816"/>
+            <a:ext cx="731520" cy="256032"/>
+          </a:xfrm>
+          <a:prstGeom prst="rect">
+            <a:avLst/>
+          </a:prstGeom>
+          <a:noFill/>
+        </p:spPr>
+        <p:txBody>
+          <a:bodyPr wrap="square" lIns="0" rIns="0" tIns="0" bIns="0">
+            <a:spAutoFit/>
+          </a:bodyPr>
+          <a:lstStyle/>
+          <a:p>
+            <a:pPr algn="ctr"/>
+            <a:r>
+              <a:rPr sz="1000" b="1" i="0">
+                <a:solidFill>
+                  <a:srgbClr val="DC2626"/>
+                </a:solidFill>
+                <a:latin typeface="Calibri"/>
+              </a:rPr>
+              <a:t>76.0%</a:t>
+            </a:r>
+          </a:p>
+        </p:txBody>
+      </p:sp>
+      <p:sp>
+        <p:nvSpPr>
+          <p:cNvPr id="61" name="TextBox 60"/>
+          <p:cNvSpPr txBox="1"/>
+          <p:nvPr/>
+        </p:nvSpPr>
+        <p:spPr>
+          <a:xfrm>
+            <a:off x="5806440" y="4242816"/>
+            <a:ext cx="731520" cy="256032"/>
+          </a:xfrm>
+          <a:prstGeom prst="rect">
+            <a:avLst/>
+          </a:prstGeom>
+          <a:noFill/>
+        </p:spPr>
+        <p:txBody>
+          <a:bodyPr wrap="square" lIns="0" rIns="0" tIns="0" bIns="0">
+            <a:spAutoFit/>
+          </a:bodyPr>
+          <a:lstStyle/>
+          <a:p>
+            <a:pPr algn="ctr"/>
+            <a:r>
+              <a:rPr sz="900" b="1" i="0">
+                <a:solidFill>
+                  <a:srgbClr val="DC2626"/>
+                </a:solidFill>
+                <a:latin typeface="Calibri"/>
+              </a:rPr>
+              <a:t>+11.7pp</a:t>
+            </a:r>
+          </a:p>
+        </p:txBody>
+      </p:sp>
+      <p:sp>
+        <p:nvSpPr>
+          <p:cNvPr id="62" name="Rectangle 61"/>
+          <p:cNvSpPr/>
+          <p:nvPr/>
+        </p:nvSpPr>
+        <p:spPr>
+          <a:xfrm>
+            <a:off x="411480" y="4544568"/>
+            <a:ext cx="5760720" cy="338328"/>
+          </a:xfrm>
+          <a:prstGeom prst="rect">
+            <a:avLst/>
+          </a:prstGeom>
+          <a:solidFill>
+            <a:srgbClr val="1E354A"/>
+          </a:solidFill>
+          <a:ln>
+            <a:noFill/>
+          </a:ln>
+        </p:spPr>
+        <p:style>
+          <a:lnRef idx="1">
+            <a:schemeClr val="accent1"/>
+          </a:lnRef>
+          <a:fillRef idx="3">
+            <a:schemeClr val="accent1"/>
+          </a:fillRef>
+          <a:effectRef idx="2">
+            <a:schemeClr val="accent1"/>
+          </a:effectRef>
+          <a:fontRef idx="minor">
+            <a:schemeClr val="lt1"/>
+          </a:fontRef>
+        </p:style>
+        <p:txBody>
+          <a:bodyPr rtlCol="0" anchor="ctr"/>
+          <a:lstStyle/>
+          <a:p>
+            <a:pPr algn="ctr"/>
+          </a:p>
+        </p:txBody>
+      </p:sp>
+      <p:sp>
+        <p:nvSpPr>
+          <p:cNvPr id="63" name="TextBox 62"/>
+          <p:cNvSpPr txBox="1"/>
+          <p:nvPr/>
+        </p:nvSpPr>
+        <p:spPr>
+          <a:xfrm>
+            <a:off x="502920" y="4599431"/>
+            <a:ext cx="3520440" cy="256032"/>
+          </a:xfrm>
+          <a:prstGeom prst="rect">
+            <a:avLst/>
+          </a:prstGeom>
+          <a:noFill/>
+        </p:spPr>
+        <p:txBody>
+          <a:bodyPr wrap="square" lIns="0" rIns="0" tIns="0" bIns="0">
+            <a:spAutoFit/>
+          </a:bodyPr>
+          <a:lstStyle/>
+          <a:p>
+            <a:pPr algn="l"/>
+            <a:r>
+              <a:rPr sz="900" b="0" i="0">
+                <a:solidFill>
+                  <a:srgbClr val="CADCFC"/>
+                </a:solidFill>
+                <a:latin typeface="Calibri"/>
+              </a:rPr>
+              <a:t>Our Story</a:t>
+            </a:r>
+          </a:p>
+        </p:txBody>
+      </p:sp>
+      <p:sp>
+        <p:nvSpPr>
+          <p:cNvPr id="64" name="TextBox 63"/>
+          <p:cNvSpPr txBox="1"/>
+          <p:nvPr/>
+        </p:nvSpPr>
+        <p:spPr>
+          <a:xfrm>
+            <a:off x="4069080" y="4599431"/>
+            <a:ext cx="914400" cy="256032"/>
+          </a:xfrm>
+          <a:prstGeom prst="rect">
+            <a:avLst/>
+          </a:prstGeom>
+          <a:noFill/>
+        </p:spPr>
+        <p:txBody>
+          <a:bodyPr wrap="square" lIns="0" rIns="0" tIns="0" bIns="0">
+            <a:spAutoFit/>
+          </a:bodyPr>
+          <a:lstStyle/>
+          <a:p>
+            <a:pPr algn="ctr"/>
+            <a:r>
+              <a:rPr sz="1000" b="1" i="0">
+                <a:solidFill>
+                  <a:srgbClr val="CADCFC"/>
+                </a:solidFill>
+                <a:latin typeface="Calibri"/>
+              </a:rPr>
+              <a:t> 3,380</a:t>
+            </a:r>
+          </a:p>
+        </p:txBody>
+      </p:sp>
+      <p:sp>
+        <p:nvSpPr>
+          <p:cNvPr id="65" name="TextBox 64"/>
+          <p:cNvSpPr txBox="1"/>
+          <p:nvPr/>
+        </p:nvSpPr>
+        <p:spPr>
+          <a:xfrm>
+            <a:off x="5029200" y="4599431"/>
+            <a:ext cx="731520" cy="256032"/>
+          </a:xfrm>
+          <a:prstGeom prst="rect">
+            <a:avLst/>
+          </a:prstGeom>
+          <a:noFill/>
+        </p:spPr>
+        <p:txBody>
+          <a:bodyPr wrap="square" lIns="0" rIns="0" tIns="0" bIns="0">
+            <a:spAutoFit/>
+          </a:bodyPr>
+          <a:lstStyle/>
+          <a:p>
+            <a:pPr algn="ctr"/>
+            <a:r>
+              <a:rPr sz="1000" b="1" i="0">
+                <a:solidFill>
+                  <a:srgbClr val="DC2626"/>
+                </a:solidFill>
+                <a:latin typeface="Calibri"/>
+              </a:rPr>
+              <a:t>73.4%</a:t>
+            </a:r>
+          </a:p>
+        </p:txBody>
+      </p:sp>
+      <p:sp>
+        <p:nvSpPr>
+          <p:cNvPr id="66" name="TextBox 65"/>
+          <p:cNvSpPr txBox="1"/>
+          <p:nvPr/>
+        </p:nvSpPr>
+        <p:spPr>
+          <a:xfrm>
+            <a:off x="5806440" y="4599431"/>
+            <a:ext cx="731520" cy="256032"/>
+          </a:xfrm>
+          <a:prstGeom prst="rect">
+            <a:avLst/>
+          </a:prstGeom>
+          <a:noFill/>
+        </p:spPr>
+        <p:txBody>
+          <a:bodyPr wrap="square" lIns="0" rIns="0" tIns="0" bIns="0">
+            <a:spAutoFit/>
+          </a:bodyPr>
+          <a:lstStyle/>
+          <a:p>
+            <a:pPr algn="ctr"/>
+            <a:r>
+              <a:rPr sz="900" b="1" i="0">
+                <a:solidFill>
+                  <a:srgbClr val="DC2626"/>
+                </a:solidFill>
+                <a:latin typeface="Calibri"/>
+              </a:rPr>
+              <a:t> +9.1pp</a:t>
+            </a:r>
+          </a:p>
+        </p:txBody>
+      </p:sp>
+      <p:sp>
+        <p:nvSpPr>
+          <p:cNvPr id="67" name="Rectangle 66"/>
+          <p:cNvSpPr/>
+          <p:nvPr/>
+        </p:nvSpPr>
+        <p:spPr>
+          <a:xfrm>
+            <a:off x="411480" y="4901184"/>
+            <a:ext cx="5760720" cy="338328"/>
+          </a:xfrm>
+          <a:prstGeom prst="rect">
+            <a:avLst/>
+          </a:prstGeom>
+          <a:solidFill>
+            <a:srgbClr val="152B3D"/>
+          </a:solidFill>
+          <a:ln>
+            <a:noFill/>
+          </a:ln>
+        </p:spPr>
+        <p:style>
+          <a:lnRef idx="1">
+            <a:schemeClr val="accent1"/>
+          </a:lnRef>
+          <a:fillRef idx="3">
+            <a:schemeClr val="accent1"/>
+          </a:fillRef>
+          <a:effectRef idx="2">
+            <a:schemeClr val="accent1"/>
+          </a:effectRef>
+          <a:fontRef idx="minor">
+            <a:schemeClr val="lt1"/>
+          </a:fontRef>
+        </p:style>
+        <p:txBody>
+          <a:bodyPr rtlCol="0" anchor="ctr"/>
+          <a:lstStyle/>
+          <a:p>
+            <a:pPr algn="ctr"/>
+          </a:p>
+        </p:txBody>
+      </p:sp>
+      <p:sp>
+        <p:nvSpPr>
+          <p:cNvPr id="68" name="TextBox 67"/>
+          <p:cNvSpPr txBox="1"/>
+          <p:nvPr/>
+        </p:nvSpPr>
+        <p:spPr>
+          <a:xfrm>
+            <a:off x="502920" y="4956048"/>
+            <a:ext cx="3520440" cy="256032"/>
+          </a:xfrm>
+          <a:prstGeom prst="rect">
+            <a:avLst/>
+          </a:prstGeom>
+          <a:noFill/>
+        </p:spPr>
+        <p:txBody>
+          <a:bodyPr wrap="square" lIns="0" rIns="0" tIns="0" bIns="0">
+            <a:spAutoFit/>
+          </a:bodyPr>
+          <a:lstStyle/>
+          <a:p>
+            <a:pPr algn="l"/>
+            <a:r>
+              <a:rPr sz="900" b="0" i="0">
+                <a:solidFill>
+                  <a:srgbClr val="CADCFC"/>
+                </a:solidFill>
+                <a:latin typeface="Calibri"/>
+              </a:rPr>
+              <a:t>AI Storage</a:t>
+            </a:r>
+          </a:p>
+        </p:txBody>
+      </p:sp>
+      <p:sp>
+        <p:nvSpPr>
+          <p:cNvPr id="69" name="TextBox 68"/>
+          <p:cNvSpPr txBox="1"/>
+          <p:nvPr/>
+        </p:nvSpPr>
+        <p:spPr>
+          <a:xfrm>
+            <a:off x="4069080" y="4956048"/>
+            <a:ext cx="914400" cy="256032"/>
+          </a:xfrm>
+          <a:prstGeom prst="rect">
+            <a:avLst/>
+          </a:prstGeom>
+          <a:noFill/>
+        </p:spPr>
+        <p:txBody>
+          <a:bodyPr wrap="square" lIns="0" rIns="0" tIns="0" bIns="0">
+            <a:spAutoFit/>
+          </a:bodyPr>
+          <a:lstStyle/>
+          <a:p>
+            <a:pPr algn="ctr"/>
+            <a:r>
+              <a:rPr sz="1000" b="1" i="0">
+                <a:solidFill>
+                  <a:srgbClr val="CADCFC"/>
+                </a:solidFill>
+                <a:latin typeface="Calibri"/>
+              </a:rPr>
+              <a:t>16,730</a:t>
+            </a:r>
+          </a:p>
+        </p:txBody>
+      </p:sp>
+      <p:sp>
+        <p:nvSpPr>
+          <p:cNvPr id="70" name="TextBox 69"/>
+          <p:cNvSpPr txBox="1"/>
+          <p:nvPr/>
+        </p:nvSpPr>
+        <p:spPr>
+          <a:xfrm>
+            <a:off x="5029200" y="4956048"/>
+            <a:ext cx="731520" cy="256032"/>
+          </a:xfrm>
+          <a:prstGeom prst="rect">
+            <a:avLst/>
+          </a:prstGeom>
+          <a:noFill/>
+        </p:spPr>
+        <p:txBody>
+          <a:bodyPr wrap="square" lIns="0" rIns="0" tIns="0" bIns="0">
+            <a:spAutoFit/>
+          </a:bodyPr>
+          <a:lstStyle/>
+          <a:p>
+            <a:pPr algn="ctr"/>
+            <a:r>
+              <a:rPr sz="1000" b="1" i="0">
+                <a:solidFill>
+                  <a:srgbClr val="DC2626"/>
+                </a:solidFill>
+                <a:latin typeface="Calibri"/>
+              </a:rPr>
+              <a:t>68.9%</a:t>
+            </a:r>
+          </a:p>
+        </p:txBody>
+      </p:sp>
+      <p:sp>
+        <p:nvSpPr>
+          <p:cNvPr id="71" name="TextBox 70"/>
+          <p:cNvSpPr txBox="1"/>
+          <p:nvPr/>
+        </p:nvSpPr>
+        <p:spPr>
+          <a:xfrm>
+            <a:off x="5806440" y="4956048"/>
+            <a:ext cx="731520" cy="256032"/>
+          </a:xfrm>
+          <a:prstGeom prst="rect">
+            <a:avLst/>
+          </a:prstGeom>
+          <a:noFill/>
+        </p:spPr>
+        <p:txBody>
+          <a:bodyPr wrap="square" lIns="0" rIns="0" tIns="0" bIns="0">
+            <a:spAutoFit/>
+          </a:bodyPr>
+          <a:lstStyle/>
+          <a:p>
+            <a:pPr algn="ctr"/>
+            <a:r>
+              <a:rPr sz="900" b="1" i="0">
+                <a:solidFill>
+                  <a:srgbClr val="DC2626"/>
+                </a:solidFill>
+                <a:latin typeface="Calibri"/>
+              </a:rPr>
+              <a:t> +4.6pp</a:t>
+            </a:r>
+          </a:p>
+        </p:txBody>
+      </p:sp>
+      <p:sp>
+        <p:nvSpPr>
+          <p:cNvPr id="72" name="Rectangle 71"/>
+          <p:cNvSpPr/>
+          <p:nvPr/>
+        </p:nvSpPr>
+        <p:spPr>
+          <a:xfrm>
+            <a:off x="411480" y="5257800"/>
+            <a:ext cx="5760720" cy="338328"/>
+          </a:xfrm>
+          <a:prstGeom prst="rect">
+            <a:avLst/>
+          </a:prstGeom>
+          <a:solidFill>
+            <a:srgbClr val="1E354A"/>
+          </a:solidFill>
+          <a:ln>
+            <a:noFill/>
+          </a:ln>
+        </p:spPr>
+        <p:style>
+          <a:lnRef idx="1">
+            <a:schemeClr val="accent1"/>
+          </a:lnRef>
+          <a:fillRef idx="3">
+            <a:schemeClr val="accent1"/>
+          </a:fillRef>
+          <a:effectRef idx="2">
+            <a:schemeClr val="accent1"/>
+          </a:effectRef>
+          <a:fontRef idx="minor">
+            <a:schemeClr val="lt1"/>
+          </a:fontRef>
+        </p:style>
+        <p:txBody>
+          <a:bodyPr rtlCol="0" anchor="ctr"/>
+          <a:lstStyle/>
+          <a:p>
+            <a:pPr algn="ctr"/>
+          </a:p>
+        </p:txBody>
+      </p:sp>
+      <p:sp>
+        <p:nvSpPr>
+          <p:cNvPr id="73" name="TextBox 72"/>
+          <p:cNvSpPr txBox="1"/>
+          <p:nvPr/>
+        </p:nvSpPr>
+        <p:spPr>
+          <a:xfrm>
+            <a:off x="502920" y="5312664"/>
+            <a:ext cx="3520440" cy="256032"/>
+          </a:xfrm>
+          <a:prstGeom prst="rect">
+            <a:avLst/>
+          </a:prstGeom>
+          <a:noFill/>
+        </p:spPr>
+        <p:txBody>
+          <a:bodyPr wrap="square" lIns="0" rIns="0" tIns="0" bIns="0">
+            <a:spAutoFit/>
+          </a:bodyPr>
+          <a:lstStyle/>
+          <a:p>
+            <a:pPr algn="l"/>
+            <a:r>
+              <a:rPr sz="900" b="0" i="0">
+                <a:solidFill>
+                  <a:srgbClr val="CADCFC"/>
+                </a:solidFill>
+                <a:latin typeface="Calibri"/>
+              </a:rPr>
+              <a:t>Edge Storage</a:t>
+            </a:r>
+          </a:p>
+        </p:txBody>
+      </p:sp>
+      <p:sp>
+        <p:nvSpPr>
+          <p:cNvPr id="74" name="TextBox 73"/>
+          <p:cNvSpPr txBox="1"/>
+          <p:nvPr/>
+        </p:nvSpPr>
+        <p:spPr>
+          <a:xfrm>
+            <a:off x="4069080" y="5312664"/>
+            <a:ext cx="914400" cy="256032"/>
+          </a:xfrm>
+          <a:prstGeom prst="rect">
+            <a:avLst/>
+          </a:prstGeom>
+          <a:noFill/>
+        </p:spPr>
+        <p:txBody>
+          <a:bodyPr wrap="square" lIns="0" rIns="0" tIns="0" bIns="0">
+            <a:spAutoFit/>
+          </a:bodyPr>
+          <a:lstStyle/>
+          <a:p>
+            <a:pPr algn="ctr"/>
+            <a:r>
+              <a:rPr sz="1000" b="1" i="0">
+                <a:solidFill>
+                  <a:srgbClr val="CADCFC"/>
+                </a:solidFill>
+                <a:latin typeface="Calibri"/>
+              </a:rPr>
+              <a:t>18,330</a:t>
+            </a:r>
+          </a:p>
+        </p:txBody>
+      </p:sp>
+      <p:sp>
+        <p:nvSpPr>
+          <p:cNvPr id="75" name="TextBox 74"/>
+          <p:cNvSpPr txBox="1"/>
+          <p:nvPr/>
+        </p:nvSpPr>
+        <p:spPr>
+          <a:xfrm>
+            <a:off x="5029200" y="5312664"/>
+            <a:ext cx="731520" cy="256032"/>
+          </a:xfrm>
+          <a:prstGeom prst="rect">
+            <a:avLst/>
+          </a:prstGeom>
+          <a:noFill/>
+        </p:spPr>
+        <p:txBody>
+          <a:bodyPr wrap="square" lIns="0" rIns="0" tIns="0" bIns="0">
+            <a:spAutoFit/>
+          </a:bodyPr>
+          <a:lstStyle/>
+          <a:p>
+            <a:pPr algn="ctr"/>
+            <a:r>
+              <a:rPr sz="1000" b="1" i="0">
+                <a:solidFill>
+                  <a:srgbClr val="D97706"/>
+                </a:solidFill>
+                <a:latin typeface="Calibri"/>
+              </a:rPr>
+              <a:t>65.1%</a:t>
+            </a:r>
+          </a:p>
+        </p:txBody>
+      </p:sp>
+      <p:sp>
+        <p:nvSpPr>
+          <p:cNvPr id="76" name="TextBox 75"/>
+          <p:cNvSpPr txBox="1"/>
+          <p:nvPr/>
+        </p:nvSpPr>
+        <p:spPr>
+          <a:xfrm>
+            <a:off x="5806440" y="5312664"/>
+            <a:ext cx="731520" cy="256032"/>
+          </a:xfrm>
+          <a:prstGeom prst="rect">
+            <a:avLst/>
+          </a:prstGeom>
+          <a:noFill/>
+        </p:spPr>
+        <p:txBody>
+          <a:bodyPr wrap="square" lIns="0" rIns="0" tIns="0" bIns="0">
+            <a:spAutoFit/>
+          </a:bodyPr>
+          <a:lstStyle/>
+          <a:p>
+            <a:pPr algn="ctr"/>
+            <a:r>
+              <a:rPr sz="900" b="1" i="0">
+                <a:solidFill>
+                  <a:srgbClr val="D97706"/>
+                </a:solidFill>
+                <a:latin typeface="Calibri"/>
+              </a:rPr>
+              <a:t> +0.8pp</a:t>
+            </a:r>
+          </a:p>
+        </p:txBody>
+      </p:sp>
+      <p:sp>
+        <p:nvSpPr>
+          <p:cNvPr id="77" name="Rectangle 76"/>
+          <p:cNvSpPr/>
+          <p:nvPr/>
+        </p:nvSpPr>
+        <p:spPr>
+          <a:xfrm>
+            <a:off x="411480" y="5614416"/>
+            <a:ext cx="5760720" cy="338328"/>
+          </a:xfrm>
+          <a:prstGeom prst="rect">
+            <a:avLst/>
+          </a:prstGeom>
+          <a:solidFill>
+            <a:srgbClr val="152B3D"/>
+          </a:solidFill>
+          <a:ln>
+            <a:noFill/>
+          </a:ln>
+        </p:spPr>
+        <p:style>
+          <a:lnRef idx="1">
+            <a:schemeClr val="accent1"/>
+          </a:lnRef>
+          <a:fillRef idx="3">
+            <a:schemeClr val="accent1"/>
+          </a:fillRef>
+          <a:effectRef idx="2">
+            <a:schemeClr val="accent1"/>
+          </a:effectRef>
+          <a:fontRef idx="minor">
+            <a:schemeClr val="lt1"/>
+          </a:fontRef>
+        </p:style>
+        <p:txBody>
+          <a:bodyPr rtlCol="0" anchor="ctr"/>
+          <a:lstStyle/>
+          <a:p>
+            <a:pPr algn="ctr"/>
+          </a:p>
+        </p:txBody>
+      </p:sp>
+      <p:sp>
+        <p:nvSpPr>
+          <p:cNvPr id="78" name="TextBox 77"/>
+          <p:cNvSpPr txBox="1"/>
+          <p:nvPr/>
+        </p:nvSpPr>
+        <p:spPr>
+          <a:xfrm>
+            <a:off x="502920" y="5669280"/>
+            <a:ext cx="3520440" cy="256032"/>
+          </a:xfrm>
+          <a:prstGeom prst="rect">
+            <a:avLst/>
+          </a:prstGeom>
+          <a:noFill/>
+        </p:spPr>
+        <p:txBody>
+          <a:bodyPr wrap="square" lIns="0" rIns="0" tIns="0" bIns="0">
+            <a:spAutoFit/>
+          </a:bodyPr>
+          <a:lstStyle/>
+          <a:p>
+            <a:pPr algn="l"/>
+            <a:r>
+              <a:rPr sz="900" b="0" i="0">
+                <a:solidFill>
+                  <a:srgbClr val="CADCFC"/>
+                </a:solidFill>
+                <a:latin typeface="Calibri"/>
+              </a:rPr>
+              <a:t>Homepage (direct)</a:t>
+            </a:r>
+          </a:p>
+        </p:txBody>
+      </p:sp>
+      <p:sp>
+        <p:nvSpPr>
+          <p:cNvPr id="79" name="TextBox 78"/>
+          <p:cNvSpPr txBox="1"/>
+          <p:nvPr/>
+        </p:nvSpPr>
+        <p:spPr>
+          <a:xfrm>
+            <a:off x="4069080" y="5669280"/>
+            <a:ext cx="914400" cy="256032"/>
+          </a:xfrm>
+          <a:prstGeom prst="rect">
+            <a:avLst/>
+          </a:prstGeom>
+          <a:noFill/>
+        </p:spPr>
+        <p:txBody>
+          <a:bodyPr wrap="square" lIns="0" rIns="0" tIns="0" bIns="0">
+            <a:spAutoFit/>
+          </a:bodyPr>
+          <a:lstStyle/>
+          <a:p>
+            <a:pPr algn="ctr"/>
+            <a:r>
+              <a:rPr sz="1000" b="1" i="0">
+                <a:solidFill>
+                  <a:srgbClr val="CADCFC"/>
+                </a:solidFill>
+                <a:latin typeface="Calibri"/>
+              </a:rPr>
+              <a:t>   577</a:t>
+            </a:r>
+          </a:p>
+        </p:txBody>
+      </p:sp>
+      <p:sp>
+        <p:nvSpPr>
+          <p:cNvPr id="80" name="TextBox 79"/>
+          <p:cNvSpPr txBox="1"/>
+          <p:nvPr/>
+        </p:nvSpPr>
+        <p:spPr>
+          <a:xfrm>
+            <a:off x="5029200" y="5669280"/>
+            <a:ext cx="731520" cy="256032"/>
+          </a:xfrm>
+          <a:prstGeom prst="rect">
+            <a:avLst/>
+          </a:prstGeom>
+          <a:noFill/>
+        </p:spPr>
+        <p:txBody>
+          <a:bodyPr wrap="square" lIns="0" rIns="0" tIns="0" bIns="0">
+            <a:spAutoFit/>
+          </a:bodyPr>
+          <a:lstStyle/>
+          <a:p>
+            <a:pPr algn="ctr"/>
+            <a:r>
+              <a:rPr sz="1000" b="1" i="0">
+                <a:solidFill>
+                  <a:srgbClr val="059669"/>
+                </a:solidFill>
+                <a:latin typeface="Calibri"/>
+              </a:rPr>
+              <a:t>59.1%</a:t>
+            </a:r>
+          </a:p>
+        </p:txBody>
+      </p:sp>
+      <p:sp>
+        <p:nvSpPr>
+          <p:cNvPr id="81" name="TextBox 80"/>
+          <p:cNvSpPr txBox="1"/>
+          <p:nvPr/>
+        </p:nvSpPr>
+        <p:spPr>
+          <a:xfrm>
+            <a:off x="5806440" y="5669280"/>
+            <a:ext cx="731520" cy="256032"/>
+          </a:xfrm>
+          <a:prstGeom prst="rect">
+            <a:avLst/>
+          </a:prstGeom>
+          <a:noFill/>
+        </p:spPr>
+        <p:txBody>
+          <a:bodyPr wrap="square" lIns="0" rIns="0" tIns="0" bIns="0">
+            <a:spAutoFit/>
+          </a:bodyPr>
+          <a:lstStyle/>
+          <a:p>
+            <a:pPr algn="ctr"/>
+            <a:r>
+              <a:rPr sz="900" b="1" i="0">
+                <a:solidFill>
+                  <a:srgbClr val="059669"/>
+                </a:solidFill>
+                <a:latin typeface="Calibri"/>
+              </a:rPr>
+              <a:t> -5.2pp</a:t>
+            </a:r>
+          </a:p>
+        </p:txBody>
+      </p:sp>
+      <p:sp>
+        <p:nvSpPr>
+          <p:cNvPr id="82" name="Rectangle 81"/>
+          <p:cNvSpPr/>
+          <p:nvPr/>
+        </p:nvSpPr>
+        <p:spPr>
+          <a:xfrm>
+            <a:off x="6492240" y="3703320"/>
+            <a:ext cx="5376672" cy="2377440"/>
+          </a:xfrm>
+          <a:prstGeom prst="rect">
+            <a:avLst/>
+          </a:prstGeom>
+          <a:solidFill>
+            <a:srgbClr val="1E354A"/>
+          </a:solidFill>
+          <a:ln>
+            <a:noFill/>
+          </a:ln>
+        </p:spPr>
+        <p:style>
+          <a:lnRef idx="1">
+            <a:schemeClr val="accent1"/>
+          </a:lnRef>
+          <a:fillRef idx="3">
+            <a:schemeClr val="accent1"/>
+          </a:fillRef>
+          <a:effectRef idx="2">
+            <a:schemeClr val="accent1"/>
+          </a:effectRef>
+          <a:fontRef idx="minor">
+            <a:schemeClr val="lt1"/>
+          </a:fontRef>
+        </p:style>
+        <p:txBody>
+          <a:bodyPr rtlCol="0" anchor="ctr"/>
+          <a:lstStyle/>
+          <a:p>
+            <a:pPr algn="ctr"/>
+          </a:p>
+        </p:txBody>
+      </p:sp>
+      <p:sp>
+        <p:nvSpPr>
+          <p:cNvPr id="83" name="Rectangle 82"/>
+          <p:cNvSpPr/>
+          <p:nvPr/>
+        </p:nvSpPr>
+        <p:spPr>
+          <a:xfrm>
+            <a:off x="6492240" y="3703320"/>
+            <a:ext cx="5376672" cy="64008"/>
+          </a:xfrm>
+          <a:prstGeom prst="rect">
+            <a:avLst/>
+          </a:prstGeom>
+          <a:solidFill>
+            <a:srgbClr val="DC2626"/>
+          </a:solidFill>
+          <a:ln>
+            <a:noFill/>
+          </a:ln>
+        </p:spPr>
+        <p:style>
+          <a:lnRef idx="1">
+            <a:schemeClr val="accent1"/>
+          </a:lnRef>
+          <a:fillRef idx="3">
+            <a:schemeClr val="accent1"/>
+          </a:fillRef>
+          <a:effectRef idx="2">
+            <a:schemeClr val="accent1"/>
+          </a:effectRef>
+          <a:fontRef idx="minor">
+            <a:schemeClr val="lt1"/>
+          </a:fontRef>
+        </p:style>
+        <p:txBody>
+          <a:bodyPr rtlCol="0" anchor="ctr"/>
+          <a:lstStyle/>
+          <a:p>
+            <a:pPr algn="ctr"/>
+          </a:p>
+        </p:txBody>
+      </p:sp>
+      <p:sp>
+        <p:nvSpPr>
+          <p:cNvPr id="84" name="TextBox 83"/>
+          <p:cNvSpPr txBox="1"/>
+          <p:nvPr/>
+        </p:nvSpPr>
+        <p:spPr>
+          <a:xfrm>
+            <a:off x="6675120" y="3785615"/>
+            <a:ext cx="5029200" cy="320040"/>
+          </a:xfrm>
+          <a:prstGeom prst="rect">
+            <a:avLst/>
+          </a:prstGeom>
+          <a:noFill/>
+        </p:spPr>
+        <p:txBody>
+          <a:bodyPr wrap="square" lIns="0" rIns="0" tIns="0" bIns="0">
+            <a:spAutoFit/>
+          </a:bodyPr>
+          <a:lstStyle/>
+          <a:p>
+            <a:pPr algn="l"/>
+            <a:r>
+              <a:rPr sz="1200" b="1" i="0">
+                <a:solidFill>
+                  <a:srgbClr val="DC2626"/>
+                </a:solidFill>
+                <a:latin typeface="Calibri"/>
+              </a:rPr>
+              <a:t>Data Evidence &amp; Recommended Actions</a:t>
+            </a:r>
+          </a:p>
+        </p:txBody>
+      </p:sp>
+      <p:sp>
+        <p:nvSpPr>
+          <p:cNvPr id="85" name="TextBox 84"/>
+          <p:cNvSpPr txBox="1"/>
+          <p:nvPr/>
+        </p:nvSpPr>
+        <p:spPr>
+          <a:xfrm>
+            <a:off x="6675120" y="4114800"/>
+            <a:ext cx="5029200" cy="201168"/>
+          </a:xfrm>
+          <a:prstGeom prst="rect">
+            <a:avLst/>
+          </a:prstGeom>
+          <a:noFill/>
+        </p:spPr>
+        <p:txBody>
+          <a:bodyPr wrap="square" lIns="0" rIns="0" tIns="0" bIns="0">
+            <a:spAutoFit/>
+          </a:bodyPr>
+          <a:lstStyle/>
+          <a:p>
+            <a:pPr algn="l"/>
+            <a:r>
+              <a:rPr sz="800" b="1" i="0">
+                <a:solidFill>
+                  <a:srgbClr val="D97706"/>
+                </a:solidFill>
+                <a:latin typeface="Calibri"/>
+              </a:rPr>
+              <a:t>Source in data</a:t>
+            </a:r>
+          </a:p>
+        </p:txBody>
+      </p:sp>
+      <p:sp>
+        <p:nvSpPr>
+          <p:cNvPr id="86" name="TextBox 85"/>
+          <p:cNvSpPr txBox="1"/>
+          <p:nvPr/>
+        </p:nvSpPr>
+        <p:spPr>
+          <a:xfrm>
+            <a:off x="6675120" y="4315968"/>
+            <a:ext cx="5029200" cy="201168"/>
+          </a:xfrm>
+          <a:prstGeom prst="rect">
+            <a:avLst/>
+          </a:prstGeom>
+          <a:noFill/>
+        </p:spPr>
+        <p:txBody>
+          <a:bodyPr wrap="square" lIns="0" rIns="0" tIns="0" bIns="0">
+            <a:spAutoFit/>
+          </a:bodyPr>
+          <a:lstStyle/>
+          <a:p>
+            <a:pPr algn="l"/>
+            <a:r>
+              <a:rPr sz="800" b="0" i="0">
+                <a:solidFill>
+                  <a:srgbClr val="CADCFC"/>
+                </a:solidFill>
+                <a:latin typeface="Calibri"/>
+              </a:rPr>
+              <a:t>referrer_domain = amazon-adsystem.com | referrer_url = aax.amazon-adsystem.com</a:t>
+            </a:r>
+          </a:p>
+        </p:txBody>
+      </p:sp>
+      <p:sp>
+        <p:nvSpPr>
+          <p:cNvPr id="87" name="TextBox 86"/>
+          <p:cNvSpPr txBox="1"/>
+          <p:nvPr/>
+        </p:nvSpPr>
+        <p:spPr>
+          <a:xfrm>
+            <a:off x="6675120" y="4498848"/>
+            <a:ext cx="5029200" cy="201168"/>
+          </a:xfrm>
+          <a:prstGeom prst="rect">
+            <a:avLst/>
+          </a:prstGeom>
+          <a:noFill/>
+        </p:spPr>
+        <p:txBody>
+          <a:bodyPr wrap="square" lIns="0" rIns="0" tIns="0" bIns="0">
+            <a:spAutoFit/>
+          </a:bodyPr>
+          <a:lstStyle/>
+          <a:p>
+            <a:pPr algn="l"/>
+            <a:r>
+              <a:rPr sz="800" b="1" i="0">
+                <a:solidFill>
+                  <a:srgbClr val="D97706"/>
+                </a:solidFill>
+                <a:latin typeface="Calibri"/>
+              </a:rPr>
+              <a:t>Amazon AAX UTM tags on landing URLs confirm paid placement</a:t>
+            </a:r>
+          </a:p>
+        </p:txBody>
+      </p:sp>
+      <p:sp>
+        <p:nvSpPr>
+          <p:cNvPr id="88" name="TextBox 87"/>
+          <p:cNvSpPr txBox="1"/>
+          <p:nvPr/>
+        </p:nvSpPr>
+        <p:spPr>
+          <a:xfrm>
+            <a:off x="6675120" y="4700016"/>
+            <a:ext cx="5029200" cy="201168"/>
+          </a:xfrm>
+          <a:prstGeom prst="rect">
+            <a:avLst/>
+          </a:prstGeom>
+          <a:noFill/>
+        </p:spPr>
+        <p:txBody>
+          <a:bodyPr wrap="square" lIns="0" rIns="0" tIns="0" bIns="0">
+            <a:spAutoFit/>
+          </a:bodyPr>
+          <a:lstStyle/>
+          <a:p>
+            <a:pPr algn="l"/>
+            <a:r>
+              <a:rPr sz="800" b="0" i="0">
+                <a:solidFill>
+                  <a:srgbClr val="CADCFC"/>
+                </a:solidFill>
+                <a:latin typeface="Calibri"/>
+              </a:rPr>
+              <a:t>utm_channel=paidsocial found on Edge Storage &amp; AI Storage URLs</a:t>
+            </a:r>
+          </a:p>
+        </p:txBody>
+      </p:sp>
+      <p:sp>
+        <p:nvSpPr>
+          <p:cNvPr id="89" name="TextBox 88"/>
+          <p:cNvSpPr txBox="1"/>
+          <p:nvPr/>
+        </p:nvSpPr>
+        <p:spPr>
+          <a:xfrm>
+            <a:off x="6675120" y="4882896"/>
+            <a:ext cx="5029200" cy="201168"/>
+          </a:xfrm>
+          <a:prstGeom prst="rect">
+            <a:avLst/>
+          </a:prstGeom>
+          <a:noFill/>
+        </p:spPr>
+        <p:txBody>
+          <a:bodyPr wrap="square" lIns="0" rIns="0" tIns="0" bIns="0">
+            <a:spAutoFit/>
+          </a:bodyPr>
+          <a:lstStyle/>
+          <a:p>
+            <a:pPr algn="l"/>
+            <a:r>
+              <a:rPr sz="800" b="1" i="0">
+                <a:solidFill>
+                  <a:srgbClr val="D97706"/>
+                </a:solidFill>
+                <a:latin typeface="Calibri"/>
+              </a:rPr>
+              <a:t>Immediate actions</a:t>
+            </a:r>
+          </a:p>
+        </p:txBody>
+      </p:sp>
+      <p:sp>
+        <p:nvSpPr>
+          <p:cNvPr id="90" name="TextBox 89"/>
+          <p:cNvSpPr txBox="1"/>
+          <p:nvPr/>
+        </p:nvSpPr>
+        <p:spPr>
+          <a:xfrm>
+            <a:off x="6675120" y="5084064"/>
+            <a:ext cx="5029200" cy="201168"/>
+          </a:xfrm>
+          <a:prstGeom prst="rect">
+            <a:avLst/>
+          </a:prstGeom>
+          <a:noFill/>
+        </p:spPr>
+        <p:txBody>
+          <a:bodyPr wrap="square" lIns="0" rIns="0" tIns="0" bIns="0">
+            <a:spAutoFit/>
+          </a:bodyPr>
+          <a:lstStyle/>
+          <a:p>
+            <a:pPr algn="l"/>
+            <a:r>
+              <a:rPr sz="800" b="0" i="0">
+                <a:solidFill>
+                  <a:srgbClr val="CADCFC"/>
+                </a:solidFill>
+                <a:latin typeface="Calibri"/>
+              </a:rPr>
+              <a:t>1. Pause Amazon AAX + Google AdServices — 99-100% BR, &lt;600 UVs/mo</a:t>
+            </a:r>
+          </a:p>
+        </p:txBody>
+      </p:sp>
+      <p:sp>
+        <p:nvSpPr>
+          <p:cNvPr id="91" name="TextBox 90"/>
+          <p:cNvSpPr txBox="1"/>
+          <p:nvPr/>
+        </p:nvSpPr>
+        <p:spPr>
+          <a:xfrm>
+            <a:off x="6675120" y="5266944"/>
+            <a:ext cx="5029200" cy="201168"/>
+          </a:xfrm>
+          <a:prstGeom prst="rect">
+            <a:avLst/>
+          </a:prstGeom>
+          <a:noFill/>
+        </p:spPr>
+        <p:txBody>
+          <a:bodyPr wrap="square" lIns="0" rIns="0" tIns="0" bIns="0">
+            <a:spAutoFit/>
+          </a:bodyPr>
+          <a:lstStyle/>
+          <a:p>
+            <a:pPr algn="l"/>
+            <a:r>
+              <a:rPr sz="800" b="0" i="0">
+                <a:solidFill>
+                  <a:srgbClr val="CADCFC"/>
+                </a:solidFill>
+                <a:latin typeface="Calibri"/>
+              </a:rPr>
+              <a:t>2. Build paid-specific landing pages for GDN (currently sends to generic hub pages)</a:t>
+            </a:r>
+          </a:p>
+        </p:txBody>
+      </p:sp>
+      <p:sp>
+        <p:nvSpPr>
+          <p:cNvPr id="92" name="TextBox 91"/>
+          <p:cNvSpPr txBox="1"/>
+          <p:nvPr/>
+        </p:nvSpPr>
+        <p:spPr>
+          <a:xfrm>
+            <a:off x="6675120" y="5650992"/>
+            <a:ext cx="5029200" cy="201168"/>
+          </a:xfrm>
+          <a:prstGeom prst="rect">
+            <a:avLst/>
+          </a:prstGeom>
+          <a:noFill/>
+        </p:spPr>
+        <p:txBody>
+          <a:bodyPr wrap="square" lIns="0" rIns="0" tIns="0" bIns="0">
+            <a:spAutoFit/>
+          </a:bodyPr>
+          <a:lstStyle/>
+          <a:p>
+            <a:pPr algn="l"/>
+            <a:r>
+              <a:rPr sz="800" b="0" i="0">
+                <a:solidFill>
+                  <a:srgbClr val="CADCFC"/>
+                </a:solidFill>
+                <a:latin typeface="Calibri"/>
+              </a:rPr>
+              <a:t>3. Study DoubleClick setup — only channel improving BR (-4.4pp)</a:t>
+            </a:r>
+          </a:p>
+        </p:txBody>
+      </p:sp>
+      <p:sp>
+        <p:nvSpPr>
+          <p:cNvPr id="93" name="TextBox 92"/>
+          <p:cNvSpPr txBox="1"/>
+          <p:nvPr/>
+        </p:nvSpPr>
+        <p:spPr>
+          <a:xfrm>
+            <a:off x="320040" y="6236208"/>
+            <a:ext cx="11521440" cy="320040"/>
+          </a:xfrm>
+          <a:prstGeom prst="rect">
+            <a:avLst/>
+          </a:prstGeom>
+          <a:noFill/>
+        </p:spPr>
+        <p:txBody>
+          <a:bodyPr wrap="square" lIns="0" rIns="0" tIns="0" bIns="0">
+            <a:spAutoFit/>
+          </a:bodyPr>
+          <a:lstStyle/>
+          <a:p>
+            <a:pPr algn="l"/>
+            <a:r>
+              <a:rPr sz="900" b="0" i="1">
+                <a:solidFill>
+                  <a:srgbClr val="64748B"/>
+                </a:solidFill>
+                <a:latin typeface="Calibri"/>
+              </a:rPr>
+              <a:t>Source: dotcom_analytics_jan2026.xlsx &amp; feb2026.xlsx  |  referrer_domain column  |  solidigm.com rows only</a:t>
+            </a:r>
+          </a:p>
+        </p:txBody>
+      </p:sp>
+    </p:spTree>
+  </p:cSld>
+  <p:clrMapOvr>
+    <a:masterClrMapping/>
+  </p:clrMapOvr>
+</p:sld>
+</file>
+
+<file path=ppt/slides/slide4.xml><?xml version="1.0" encoding="utf-8"?>
+<p:sld xmlns:a="http://schemas.openxmlformats.org/drawingml/2006/main" xmlns:p="http://schemas.openxmlformats.org/presentationml/2006/main" xmlns:r="http://schemas.openxmlformats.org/officeDocument/2006/relationships">
+  <p:cSld>
+    <p:bg>
+      <p:bgPr>
+        <a:solidFill>
           <a:srgbClr val="F0F4F8"/>
         </a:solidFill>
         <a:effectLst/>
@@ -13656,7 +19734,7 @@
 </p:sld>
 </file>
 
-<file path=ppt/slides/slide4.xml><?xml version="1.0" encoding="utf-8"?>
+<file path=ppt/slides/slide5.xml><?xml version="1.0" encoding="utf-8"?>
 <p:sld xmlns:a="http://schemas.openxmlformats.org/drawingml/2006/main" xmlns:p="http://schemas.openxmlformats.org/presentationml/2006/main" xmlns:r="http://schemas.openxmlformats.org/officeDocument/2006/relationships">
   <p:cSld>
     <p:bg>
@@ -15969,7 +22047,7 @@
 </p:sld>
 </file>
 
-<file path=ppt/slides/slide5.xml><?xml version="1.0" encoding="utf-8"?>
+<file path=ppt/slides/slide6.xml><?xml version="1.0" encoding="utf-8"?>
 <p:sld xmlns:a="http://schemas.openxmlformats.org/drawingml/2006/main" xmlns:p="http://schemas.openxmlformats.org/presentationml/2006/main" xmlns:r="http://schemas.openxmlformats.org/officeDocument/2006/relationships">
   <p:cSld>
     <p:bg>
@@ -20687,7 +26765,7 @@
 </p:sld>
 </file>
 
-<file path=ppt/slides/slide6.xml><?xml version="1.0" encoding="utf-8"?>
+<file path=ppt/slides/slide7.xml><?xml version="1.0" encoding="utf-8"?>
 <p:sld xmlns:a="http://schemas.openxmlformats.org/drawingml/2006/main" xmlns:p="http://schemas.openxmlformats.org/presentationml/2006/main" xmlns:r="http://schemas.openxmlformats.org/officeDocument/2006/relationships">
   <p:cSld>
     <p:bg>
@@ -22540,7 +28618,7 @@
 </p:sld>
 </file>
 
-<file path=ppt/slides/slide7.xml><?xml version="1.0" encoding="utf-8"?>
+<file path=ppt/slides/slide8.xml><?xml version="1.0" encoding="utf-8"?>
 <p:sld xmlns:a="http://schemas.openxmlformats.org/drawingml/2006/main" xmlns:p="http://schemas.openxmlformats.org/presentationml/2006/main" xmlns:r="http://schemas.openxmlformats.org/officeDocument/2006/relationships">
   <p:cSld>
     <p:bg>
@@ -24595,7 +30673,7 @@
 </p:sld>
 </file>
 
-<file path=ppt/slides/slide8.xml><?xml version="1.0" encoding="utf-8"?>
+<file path=ppt/slides/slide9.xml><?xml version="1.0" encoding="utf-8"?>
 <p:sld xmlns:a="http://schemas.openxmlformats.org/drawingml/2006/main" xmlns:p="http://schemas.openxmlformats.org/presentationml/2006/main" xmlns:r="http://schemas.openxmlformats.org/officeDocument/2006/relationships">
   <p:cSld>
     <p:bg>
@@ -25801,2637 +31879,6 @@
                 <a:latin typeface="Calibri"/>
               </a:rPr>
               <a:t>&gt;&gt; Paid visitors: 55% Desktop / 39% Mobile.  Non-Paid visitors: 41% Desktop / 55% Mobile — mobile is the non-paid majority. Align ad targeting and UX accordingly.</a:t>
-            </a:r>
-          </a:p>
-        </p:txBody>
-      </p:sp>
-    </p:spTree>
-  </p:cSld>
-  <p:clrMapOvr>
-    <a:masterClrMapping/>
-  </p:clrMapOvr>
-</p:sld>
-</file>
-
-<file path=ppt/slides/slide9.xml><?xml version="1.0" encoding="utf-8"?>
-<p:sld xmlns:a="http://schemas.openxmlformats.org/drawingml/2006/main" xmlns:p="http://schemas.openxmlformats.org/presentationml/2006/main" xmlns:r="http://schemas.openxmlformats.org/officeDocument/2006/relationships">
-  <p:cSld>
-    <p:bg>
-      <p:bgPr>
-        <a:solidFill>
-          <a:srgbClr val="F0F4F8"/>
-        </a:solidFill>
-        <a:effectLst/>
-      </p:bgPr>
-    </p:bg>
-    <p:spTree>
-      <p:nvGrpSpPr>
-        <p:cNvPr id="1" name=""/>
-        <p:cNvGrpSpPr/>
-        <p:nvPr/>
-      </p:nvGrpSpPr>
-      <p:grpSpPr/>
-      <p:sp>
-        <p:nvSpPr>
-          <p:cNvPr id="2" name="Rectangle 1"/>
-          <p:cNvSpPr/>
-          <p:nvPr/>
-        </p:nvSpPr>
-        <p:spPr>
-          <a:xfrm>
-            <a:off x="0" y="0"/>
-            <a:ext cx="12191695" cy="777240"/>
-          </a:xfrm>
-          <a:prstGeom prst="rect">
-            <a:avLst/>
-          </a:prstGeom>
-          <a:solidFill>
-            <a:srgbClr val="065A82"/>
-          </a:solidFill>
-          <a:ln>
-            <a:noFill/>
-          </a:ln>
-        </p:spPr>
-        <p:style>
-          <a:lnRef idx="1">
-            <a:schemeClr val="accent1"/>
-          </a:lnRef>
-          <a:fillRef idx="3">
-            <a:schemeClr val="accent1"/>
-          </a:fillRef>
-          <a:effectRef idx="2">
-            <a:schemeClr val="accent1"/>
-          </a:effectRef>
-          <a:fontRef idx="minor">
-            <a:schemeClr val="lt1"/>
-          </a:fontRef>
-        </p:style>
-        <p:txBody>
-          <a:bodyPr rtlCol="0" anchor="ctr"/>
-          <a:lstStyle/>
-          <a:p>
-            <a:pPr algn="ctr"/>
-          </a:p>
-        </p:txBody>
-      </p:sp>
-      <p:sp>
-        <p:nvSpPr>
-          <p:cNvPr id="3" name="TextBox 2"/>
-          <p:cNvSpPr txBox="1"/>
-          <p:nvPr/>
-        </p:nvSpPr>
-        <p:spPr>
-          <a:xfrm>
-            <a:off x="457200" y="91440"/>
-            <a:ext cx="11277295" cy="594360"/>
-          </a:xfrm>
-          <a:prstGeom prst="rect">
-            <a:avLst/>
-          </a:prstGeom>
-          <a:noFill/>
-        </p:spPr>
-        <p:txBody>
-          <a:bodyPr wrap="square" lIns="0" rIns="0" tIns="0" bIns="0">
-            <a:spAutoFit/>
-          </a:bodyPr>
-          <a:lstStyle/>
-          <a:p>
-            <a:pPr algn="l"/>
-            <a:r>
-              <a:rPr sz="2400" b="1" i="0">
-                <a:solidFill>
-                  <a:srgbClr val="FFFFFF"/>
-                </a:solidFill>
-                <a:latin typeface="Calibri"/>
-              </a:rPr>
-              <a:t>Geographic Analysis — solidigm.com</a:t>
-            </a:r>
-          </a:p>
-        </p:txBody>
-      </p:sp>
-      <p:sp>
-        <p:nvSpPr>
-          <p:cNvPr id="4" name="TextBox 3"/>
-          <p:cNvSpPr txBox="1"/>
-          <p:nvPr/>
-        </p:nvSpPr>
-        <p:spPr>
-          <a:xfrm>
-            <a:off x="457200" y="502920"/>
-            <a:ext cx="11277295" cy="320040"/>
-          </a:xfrm>
-          <a:prstGeom prst="rect">
-            <a:avLst/>
-          </a:prstGeom>
-          <a:noFill/>
-        </p:spPr>
-        <p:txBody>
-          <a:bodyPr wrap="square" lIns="0" rIns="0" tIns="0" bIns="0">
-            <a:spAutoFit/>
-          </a:bodyPr>
-          <a:lstStyle/>
-          <a:p>
-            <a:pPr algn="l"/>
-            <a:r>
-              <a:rPr sz="1200" b="0" i="0">
-                <a:solidFill>
-                  <a:srgbClr val="CADCFC"/>
-                </a:solidFill>
-                <a:latin typeface="Calibri"/>
-              </a:rPr>
-              <a:t>USA dominates at 84% — but UK traffic collapsed -6.8pp and warrants immediate investigation</a:t>
-            </a:r>
-          </a:p>
-        </p:txBody>
-      </p:sp>
-      <p:sp>
-        <p:nvSpPr>
-          <p:cNvPr id="5" name="Rectangle 4"/>
-          <p:cNvSpPr/>
-          <p:nvPr/>
-        </p:nvSpPr>
-        <p:spPr>
-          <a:xfrm>
-            <a:off x="320040" y="914400"/>
-            <a:ext cx="5669280" cy="5074920"/>
-          </a:xfrm>
-          <a:prstGeom prst="rect">
-            <a:avLst/>
-          </a:prstGeom>
-          <a:solidFill>
-            <a:srgbClr val="FFFFFF"/>
-          </a:solidFill>
-          <a:ln>
-            <a:noFill/>
-          </a:ln>
-        </p:spPr>
-        <p:style>
-          <a:lnRef idx="1">
-            <a:schemeClr val="accent1"/>
-          </a:lnRef>
-          <a:fillRef idx="3">
-            <a:schemeClr val="accent1"/>
-          </a:fillRef>
-          <a:effectRef idx="2">
-            <a:schemeClr val="accent1"/>
-          </a:effectRef>
-          <a:fontRef idx="minor">
-            <a:schemeClr val="lt1"/>
-          </a:fontRef>
-        </p:style>
-        <p:txBody>
-          <a:bodyPr rtlCol="0" anchor="ctr"/>
-          <a:lstStyle/>
-          <a:p>
-            <a:pPr algn="ctr"/>
-          </a:p>
-        </p:txBody>
-      </p:sp>
-      <p:sp>
-        <p:nvSpPr>
-          <p:cNvPr id="6" name="Rectangle 5"/>
-          <p:cNvSpPr/>
-          <p:nvPr/>
-        </p:nvSpPr>
-        <p:spPr>
-          <a:xfrm>
-            <a:off x="320040" y="914400"/>
-            <a:ext cx="54864" cy="5074920"/>
-          </a:xfrm>
-          <a:prstGeom prst="rect">
-            <a:avLst/>
-          </a:prstGeom>
-          <a:solidFill>
-            <a:srgbClr val="1C7293"/>
-          </a:solidFill>
-          <a:ln>
-            <a:noFill/>
-          </a:ln>
-        </p:spPr>
-        <p:style>
-          <a:lnRef idx="1">
-            <a:schemeClr val="accent1"/>
-          </a:lnRef>
-          <a:fillRef idx="3">
-            <a:schemeClr val="accent1"/>
-          </a:fillRef>
-          <a:effectRef idx="2">
-            <a:schemeClr val="accent1"/>
-          </a:effectRef>
-          <a:fontRef idx="minor">
-            <a:schemeClr val="lt1"/>
-          </a:fontRef>
-        </p:style>
-        <p:txBody>
-          <a:bodyPr rtlCol="0" anchor="ctr"/>
-          <a:lstStyle/>
-          <a:p>
-            <a:pPr algn="ctr"/>
-          </a:p>
-        </p:txBody>
-      </p:sp>
-      <p:sp>
-        <p:nvSpPr>
-          <p:cNvPr id="7" name="TextBox 6"/>
-          <p:cNvSpPr txBox="1"/>
-          <p:nvPr/>
-        </p:nvSpPr>
-        <p:spPr>
-          <a:xfrm>
-            <a:off x="548640" y="960120"/>
-            <a:ext cx="5303520" cy="384048"/>
-          </a:xfrm>
-          <a:prstGeom prst="rect">
-            <a:avLst/>
-          </a:prstGeom>
-          <a:noFill/>
-        </p:spPr>
-        <p:txBody>
-          <a:bodyPr wrap="square" lIns="0" rIns="0" tIns="0" bIns="0">
-            <a:spAutoFit/>
-          </a:bodyPr>
-          <a:lstStyle/>
-          <a:p>
-            <a:pPr algn="l"/>
-            <a:r>
-              <a:rPr sz="1300" b="1" i="0">
-                <a:solidFill>
-                  <a:srgbClr val="065A82"/>
-                </a:solidFill>
-                <a:latin typeface="Calibri"/>
-              </a:rPr>
-              <a:t>Top Countries</a:t>
-            </a:r>
-          </a:p>
-        </p:txBody>
-      </p:sp>
-      <p:sp>
-        <p:nvSpPr>
-          <p:cNvPr id="8" name="TextBox 7"/>
-          <p:cNvSpPr txBox="1"/>
-          <p:nvPr/>
-        </p:nvSpPr>
-        <p:spPr>
-          <a:xfrm>
-            <a:off x="594360" y="1417320"/>
-            <a:ext cx="1097280" cy="274320"/>
-          </a:xfrm>
-          <a:prstGeom prst="rect">
-            <a:avLst/>
-          </a:prstGeom>
-          <a:noFill/>
-        </p:spPr>
-        <p:txBody>
-          <a:bodyPr wrap="square" lIns="0" rIns="0" tIns="0" bIns="0">
-            <a:spAutoFit/>
-          </a:bodyPr>
-          <a:lstStyle/>
-          <a:p>
-            <a:pPr algn="l"/>
-            <a:r>
-              <a:rPr sz="1000" b="1" i="0">
-                <a:solidFill>
-                  <a:srgbClr val="64748B"/>
-                </a:solidFill>
-                <a:latin typeface="Calibri"/>
-              </a:rPr>
-              <a:t>Country</a:t>
-            </a:r>
-          </a:p>
-        </p:txBody>
-      </p:sp>
-      <p:sp>
-        <p:nvSpPr>
-          <p:cNvPr id="9" name="TextBox 8"/>
-          <p:cNvSpPr txBox="1"/>
-          <p:nvPr/>
-        </p:nvSpPr>
-        <p:spPr>
-          <a:xfrm>
-            <a:off x="2423160" y="1417320"/>
-            <a:ext cx="1097280" cy="274320"/>
-          </a:xfrm>
-          <a:prstGeom prst="rect">
-            <a:avLst/>
-          </a:prstGeom>
-          <a:noFill/>
-        </p:spPr>
-        <p:txBody>
-          <a:bodyPr wrap="square" lIns="0" rIns="0" tIns="0" bIns="0">
-            <a:spAutoFit/>
-          </a:bodyPr>
-          <a:lstStyle/>
-          <a:p>
-            <a:pPr algn="l"/>
-            <a:r>
-              <a:rPr sz="1000" b="1" i="0">
-                <a:solidFill>
-                  <a:srgbClr val="64748B"/>
-                </a:solidFill>
-                <a:latin typeface="Calibri"/>
-              </a:rPr>
-              <a:t>Jan %</a:t>
-            </a:r>
-          </a:p>
-        </p:txBody>
-      </p:sp>
-      <p:sp>
-        <p:nvSpPr>
-          <p:cNvPr id="10" name="TextBox 9"/>
-          <p:cNvSpPr txBox="1"/>
-          <p:nvPr/>
-        </p:nvSpPr>
-        <p:spPr>
-          <a:xfrm>
-            <a:off x="3520440" y="1417320"/>
-            <a:ext cx="1097280" cy="274320"/>
-          </a:xfrm>
-          <a:prstGeom prst="rect">
-            <a:avLst/>
-          </a:prstGeom>
-          <a:noFill/>
-        </p:spPr>
-        <p:txBody>
-          <a:bodyPr wrap="square" lIns="0" rIns="0" tIns="0" bIns="0">
-            <a:spAutoFit/>
-          </a:bodyPr>
-          <a:lstStyle/>
-          <a:p>
-            <a:pPr algn="l"/>
-            <a:r>
-              <a:rPr sz="1000" b="1" i="0">
-                <a:solidFill>
-                  <a:srgbClr val="64748B"/>
-                </a:solidFill>
-                <a:latin typeface="Calibri"/>
-              </a:rPr>
-              <a:t>Feb %</a:t>
-            </a:r>
-          </a:p>
-        </p:txBody>
-      </p:sp>
-      <p:sp>
-        <p:nvSpPr>
-          <p:cNvPr id="11" name="TextBox 10"/>
-          <p:cNvSpPr txBox="1"/>
-          <p:nvPr/>
-        </p:nvSpPr>
-        <p:spPr>
-          <a:xfrm>
-            <a:off x="4572000" y="1417320"/>
-            <a:ext cx="1097280" cy="274320"/>
-          </a:xfrm>
-          <a:prstGeom prst="rect">
-            <a:avLst/>
-          </a:prstGeom>
-          <a:noFill/>
-        </p:spPr>
-        <p:txBody>
-          <a:bodyPr wrap="square" lIns="0" rIns="0" tIns="0" bIns="0">
-            <a:spAutoFit/>
-          </a:bodyPr>
-          <a:lstStyle/>
-          <a:p>
-            <a:pPr algn="l"/>
-            <a:r>
-              <a:rPr sz="1000" b="1" i="0">
-                <a:solidFill>
-                  <a:srgbClr val="64748B"/>
-                </a:solidFill>
-                <a:latin typeface="Calibri"/>
-              </a:rPr>
-              <a:t>MoM Δ</a:t>
-            </a:r>
-          </a:p>
-        </p:txBody>
-      </p:sp>
-      <p:sp>
-        <p:nvSpPr>
-          <p:cNvPr id="12" name="Rectangle 11"/>
-          <p:cNvSpPr/>
-          <p:nvPr/>
-        </p:nvSpPr>
-        <p:spPr>
-          <a:xfrm>
-            <a:off x="411480" y="1737360"/>
-            <a:ext cx="5486400" cy="475488"/>
-          </a:xfrm>
-          <a:prstGeom prst="rect">
-            <a:avLst/>
-          </a:prstGeom>
-          <a:solidFill>
-            <a:srgbClr val="FFFFFF"/>
-          </a:solidFill>
-          <a:ln>
-            <a:noFill/>
-          </a:ln>
-        </p:spPr>
-        <p:style>
-          <a:lnRef idx="1">
-            <a:schemeClr val="accent1"/>
-          </a:lnRef>
-          <a:fillRef idx="3">
-            <a:schemeClr val="accent1"/>
-          </a:fillRef>
-          <a:effectRef idx="2">
-            <a:schemeClr val="accent1"/>
-          </a:effectRef>
-          <a:fontRef idx="minor">
-            <a:schemeClr val="lt1"/>
-          </a:fontRef>
-        </p:style>
-        <p:txBody>
-          <a:bodyPr rtlCol="0" anchor="ctr"/>
-          <a:lstStyle/>
-          <a:p>
-            <a:pPr algn="ctr"/>
-          </a:p>
-        </p:txBody>
-      </p:sp>
-      <p:sp>
-        <p:nvSpPr>
-          <p:cNvPr id="13" name="TextBox 12"/>
-          <p:cNvSpPr txBox="1"/>
-          <p:nvPr/>
-        </p:nvSpPr>
-        <p:spPr>
-          <a:xfrm>
-            <a:off x="594360" y="1810512"/>
-            <a:ext cx="1691640" cy="347472"/>
-          </a:xfrm>
-          <a:prstGeom prst="rect">
-            <a:avLst/>
-          </a:prstGeom>
-          <a:noFill/>
-        </p:spPr>
-        <p:txBody>
-          <a:bodyPr wrap="square" lIns="0" rIns="0" tIns="0" bIns="0">
-            <a:spAutoFit/>
-          </a:bodyPr>
-          <a:lstStyle/>
-          <a:p>
-            <a:pPr algn="l"/>
-            <a:r>
-              <a:rPr sz="1100" b="0" i="0">
-                <a:solidFill>
-                  <a:srgbClr val="1E293B"/>
-                </a:solidFill>
-                <a:latin typeface="Calibri"/>
-              </a:rPr>
-              <a:t>USA</a:t>
-            </a:r>
-          </a:p>
-        </p:txBody>
-      </p:sp>
-      <p:sp>
-        <p:nvSpPr>
-          <p:cNvPr id="14" name="TextBox 13"/>
-          <p:cNvSpPr txBox="1"/>
-          <p:nvPr/>
-        </p:nvSpPr>
-        <p:spPr>
-          <a:xfrm>
-            <a:off x="2423160" y="1810512"/>
-            <a:ext cx="1005840" cy="347472"/>
-          </a:xfrm>
-          <a:prstGeom prst="rect">
-            <a:avLst/>
-          </a:prstGeom>
-          <a:noFill/>
-        </p:spPr>
-        <p:txBody>
-          <a:bodyPr wrap="square" lIns="0" rIns="0" tIns="0" bIns="0">
-            <a:spAutoFit/>
-          </a:bodyPr>
-          <a:lstStyle/>
-          <a:p>
-            <a:pPr algn="ctr"/>
-            <a:r>
-              <a:rPr sz="1200" b="1" i="0">
-                <a:solidFill>
-                  <a:srgbClr val="065A82"/>
-                </a:solidFill>
-                <a:latin typeface="Calibri"/>
-              </a:rPr>
-              <a:t>73.4%</a:t>
-            </a:r>
-          </a:p>
-        </p:txBody>
-      </p:sp>
-      <p:sp>
-        <p:nvSpPr>
-          <p:cNvPr id="15" name="TextBox 14"/>
-          <p:cNvSpPr txBox="1"/>
-          <p:nvPr/>
-        </p:nvSpPr>
-        <p:spPr>
-          <a:xfrm>
-            <a:off x="3520440" y="1810512"/>
-            <a:ext cx="1005840" cy="347472"/>
-          </a:xfrm>
-          <a:prstGeom prst="rect">
-            <a:avLst/>
-          </a:prstGeom>
-          <a:noFill/>
-        </p:spPr>
-        <p:txBody>
-          <a:bodyPr wrap="square" lIns="0" rIns="0" tIns="0" bIns="0">
-            <a:spAutoFit/>
-          </a:bodyPr>
-          <a:lstStyle/>
-          <a:p>
-            <a:pPr algn="ctr"/>
-            <a:r>
-              <a:rPr sz="1200" b="1" i="0">
-                <a:solidFill>
-                  <a:srgbClr val="1C7293"/>
-                </a:solidFill>
-                <a:latin typeface="Calibri"/>
-              </a:rPr>
-              <a:t>84.4%</a:t>
-            </a:r>
-          </a:p>
-        </p:txBody>
-      </p:sp>
-      <p:sp>
-        <p:nvSpPr>
-          <p:cNvPr id="16" name="TextBox 15"/>
-          <p:cNvSpPr txBox="1"/>
-          <p:nvPr/>
-        </p:nvSpPr>
-        <p:spPr>
-          <a:xfrm>
-            <a:off x="4572000" y="1810512"/>
-            <a:ext cx="1188720" cy="347472"/>
-          </a:xfrm>
-          <a:prstGeom prst="rect">
-            <a:avLst/>
-          </a:prstGeom>
-          <a:noFill/>
-        </p:spPr>
-        <p:txBody>
-          <a:bodyPr wrap="square" lIns="0" rIns="0" tIns="0" bIns="0">
-            <a:spAutoFit/>
-          </a:bodyPr>
-          <a:lstStyle/>
-          <a:p>
-            <a:pPr algn="ctr"/>
-            <a:r>
-              <a:rPr sz="1200" b="1" i="0">
-                <a:solidFill>
-                  <a:srgbClr val="059669"/>
-                </a:solidFill>
-                <a:latin typeface="Calibri"/>
-              </a:rPr>
-              <a:t>+11.0pp</a:t>
-            </a:r>
-          </a:p>
-        </p:txBody>
-      </p:sp>
-      <p:sp>
-        <p:nvSpPr>
-          <p:cNvPr id="17" name="Rectangle 16"/>
-          <p:cNvSpPr/>
-          <p:nvPr/>
-        </p:nvSpPr>
-        <p:spPr>
-          <a:xfrm>
-            <a:off x="411480" y="2240280"/>
-            <a:ext cx="5486400" cy="475488"/>
-          </a:xfrm>
-          <a:prstGeom prst="rect">
-            <a:avLst/>
-          </a:prstGeom>
-          <a:solidFill>
-            <a:srgbClr val="E2E8F0"/>
-          </a:solidFill>
-          <a:ln>
-            <a:noFill/>
-          </a:ln>
-        </p:spPr>
-        <p:style>
-          <a:lnRef idx="1">
-            <a:schemeClr val="accent1"/>
-          </a:lnRef>
-          <a:fillRef idx="3">
-            <a:schemeClr val="accent1"/>
-          </a:fillRef>
-          <a:effectRef idx="2">
-            <a:schemeClr val="accent1"/>
-          </a:effectRef>
-          <a:fontRef idx="minor">
-            <a:schemeClr val="lt1"/>
-          </a:fontRef>
-        </p:style>
-        <p:txBody>
-          <a:bodyPr rtlCol="0" anchor="ctr"/>
-          <a:lstStyle/>
-          <a:p>
-            <a:pPr algn="ctr"/>
-          </a:p>
-        </p:txBody>
-      </p:sp>
-      <p:sp>
-        <p:nvSpPr>
-          <p:cNvPr id="18" name="TextBox 17"/>
-          <p:cNvSpPr txBox="1"/>
-          <p:nvPr/>
-        </p:nvSpPr>
-        <p:spPr>
-          <a:xfrm>
-            <a:off x="594360" y="2313432"/>
-            <a:ext cx="1691640" cy="347472"/>
-          </a:xfrm>
-          <a:prstGeom prst="rect">
-            <a:avLst/>
-          </a:prstGeom>
-          <a:noFill/>
-        </p:spPr>
-        <p:txBody>
-          <a:bodyPr wrap="square" lIns="0" rIns="0" tIns="0" bIns="0">
-            <a:spAutoFit/>
-          </a:bodyPr>
-          <a:lstStyle/>
-          <a:p>
-            <a:pPr algn="l"/>
-            <a:r>
-              <a:rPr sz="1100" b="0" i="0">
-                <a:solidFill>
-                  <a:srgbClr val="1E293B"/>
-                </a:solidFill>
-                <a:latin typeface="Calibri"/>
-              </a:rPr>
-              <a:t>UK</a:t>
-            </a:r>
-          </a:p>
-        </p:txBody>
-      </p:sp>
-      <p:sp>
-        <p:nvSpPr>
-          <p:cNvPr id="19" name="TextBox 18"/>
-          <p:cNvSpPr txBox="1"/>
-          <p:nvPr/>
-        </p:nvSpPr>
-        <p:spPr>
-          <a:xfrm>
-            <a:off x="2423160" y="2313432"/>
-            <a:ext cx="1005840" cy="347472"/>
-          </a:xfrm>
-          <a:prstGeom prst="rect">
-            <a:avLst/>
-          </a:prstGeom>
-          <a:noFill/>
-        </p:spPr>
-        <p:txBody>
-          <a:bodyPr wrap="square" lIns="0" rIns="0" tIns="0" bIns="0">
-            <a:spAutoFit/>
-          </a:bodyPr>
-          <a:lstStyle/>
-          <a:p>
-            <a:pPr algn="ctr"/>
-            <a:r>
-              <a:rPr sz="1200" b="1" i="0">
-                <a:solidFill>
-                  <a:srgbClr val="065A82"/>
-                </a:solidFill>
-                <a:latin typeface="Calibri"/>
-              </a:rPr>
-              <a:t> 9.2%</a:t>
-            </a:r>
-          </a:p>
-        </p:txBody>
-      </p:sp>
-      <p:sp>
-        <p:nvSpPr>
-          <p:cNvPr id="20" name="TextBox 19"/>
-          <p:cNvSpPr txBox="1"/>
-          <p:nvPr/>
-        </p:nvSpPr>
-        <p:spPr>
-          <a:xfrm>
-            <a:off x="3520440" y="2313432"/>
-            <a:ext cx="1005840" cy="347472"/>
-          </a:xfrm>
-          <a:prstGeom prst="rect">
-            <a:avLst/>
-          </a:prstGeom>
-          <a:noFill/>
-        </p:spPr>
-        <p:txBody>
-          <a:bodyPr wrap="square" lIns="0" rIns="0" tIns="0" bIns="0">
-            <a:spAutoFit/>
-          </a:bodyPr>
-          <a:lstStyle/>
-          <a:p>
-            <a:pPr algn="ctr"/>
-            <a:r>
-              <a:rPr sz="1200" b="1" i="0">
-                <a:solidFill>
-                  <a:srgbClr val="1C7293"/>
-                </a:solidFill>
-                <a:latin typeface="Calibri"/>
-              </a:rPr>
-              <a:t> 2.4%</a:t>
-            </a:r>
-          </a:p>
-        </p:txBody>
-      </p:sp>
-      <p:sp>
-        <p:nvSpPr>
-          <p:cNvPr id="21" name="TextBox 20"/>
-          <p:cNvSpPr txBox="1"/>
-          <p:nvPr/>
-        </p:nvSpPr>
-        <p:spPr>
-          <a:xfrm>
-            <a:off x="4572000" y="2313432"/>
-            <a:ext cx="1188720" cy="347472"/>
-          </a:xfrm>
-          <a:prstGeom prst="rect">
-            <a:avLst/>
-          </a:prstGeom>
-          <a:noFill/>
-        </p:spPr>
-        <p:txBody>
-          <a:bodyPr wrap="square" lIns="0" rIns="0" tIns="0" bIns="0">
-            <a:spAutoFit/>
-          </a:bodyPr>
-          <a:lstStyle/>
-          <a:p>
-            <a:pPr algn="ctr"/>
-            <a:r>
-              <a:rPr sz="1200" b="1" i="0">
-                <a:solidFill>
-                  <a:srgbClr val="DC2626"/>
-                </a:solidFill>
-                <a:latin typeface="Calibri"/>
-              </a:rPr>
-              <a:t> -6.8pp</a:t>
-            </a:r>
-          </a:p>
-        </p:txBody>
-      </p:sp>
-      <p:sp>
-        <p:nvSpPr>
-          <p:cNvPr id="22" name="Rectangle 21"/>
-          <p:cNvSpPr/>
-          <p:nvPr/>
-        </p:nvSpPr>
-        <p:spPr>
-          <a:xfrm>
-            <a:off x="411480" y="2743200"/>
-            <a:ext cx="5486400" cy="475488"/>
-          </a:xfrm>
-          <a:prstGeom prst="rect">
-            <a:avLst/>
-          </a:prstGeom>
-          <a:solidFill>
-            <a:srgbClr val="FFFFFF"/>
-          </a:solidFill>
-          <a:ln>
-            <a:noFill/>
-          </a:ln>
-        </p:spPr>
-        <p:style>
-          <a:lnRef idx="1">
-            <a:schemeClr val="accent1"/>
-          </a:lnRef>
-          <a:fillRef idx="3">
-            <a:schemeClr val="accent1"/>
-          </a:fillRef>
-          <a:effectRef idx="2">
-            <a:schemeClr val="accent1"/>
-          </a:effectRef>
-          <a:fontRef idx="minor">
-            <a:schemeClr val="lt1"/>
-          </a:fontRef>
-        </p:style>
-        <p:txBody>
-          <a:bodyPr rtlCol="0" anchor="ctr"/>
-          <a:lstStyle/>
-          <a:p>
-            <a:pPr algn="ctr"/>
-          </a:p>
-        </p:txBody>
-      </p:sp>
-      <p:sp>
-        <p:nvSpPr>
-          <p:cNvPr id="23" name="TextBox 22"/>
-          <p:cNvSpPr txBox="1"/>
-          <p:nvPr/>
-        </p:nvSpPr>
-        <p:spPr>
-          <a:xfrm>
-            <a:off x="594360" y="2816352"/>
-            <a:ext cx="1691640" cy="347472"/>
-          </a:xfrm>
-          <a:prstGeom prst="rect">
-            <a:avLst/>
-          </a:prstGeom>
-          <a:noFill/>
-        </p:spPr>
-        <p:txBody>
-          <a:bodyPr wrap="square" lIns="0" rIns="0" tIns="0" bIns="0">
-            <a:spAutoFit/>
-          </a:bodyPr>
-          <a:lstStyle/>
-          <a:p>
-            <a:pPr algn="l"/>
-            <a:r>
-              <a:rPr sz="1100" b="0" i="0">
-                <a:solidFill>
-                  <a:srgbClr val="1E293B"/>
-                </a:solidFill>
-                <a:latin typeface="Calibri"/>
-              </a:rPr>
-              <a:t>Germany</a:t>
-            </a:r>
-          </a:p>
-        </p:txBody>
-      </p:sp>
-      <p:sp>
-        <p:nvSpPr>
-          <p:cNvPr id="24" name="TextBox 23"/>
-          <p:cNvSpPr txBox="1"/>
-          <p:nvPr/>
-        </p:nvSpPr>
-        <p:spPr>
-          <a:xfrm>
-            <a:off x="2423160" y="2816352"/>
-            <a:ext cx="1005840" cy="347472"/>
-          </a:xfrm>
-          <a:prstGeom prst="rect">
-            <a:avLst/>
-          </a:prstGeom>
-          <a:noFill/>
-        </p:spPr>
-        <p:txBody>
-          <a:bodyPr wrap="square" lIns="0" rIns="0" tIns="0" bIns="0">
-            <a:spAutoFit/>
-          </a:bodyPr>
-          <a:lstStyle/>
-          <a:p>
-            <a:pPr algn="ctr"/>
-            <a:r>
-              <a:rPr sz="1200" b="1" i="0">
-                <a:solidFill>
-                  <a:srgbClr val="065A82"/>
-                </a:solidFill>
-                <a:latin typeface="Calibri"/>
-              </a:rPr>
-              <a:t> 3.7%</a:t>
-            </a:r>
-          </a:p>
-        </p:txBody>
-      </p:sp>
-      <p:sp>
-        <p:nvSpPr>
-          <p:cNvPr id="25" name="TextBox 24"/>
-          <p:cNvSpPr txBox="1"/>
-          <p:nvPr/>
-        </p:nvSpPr>
-        <p:spPr>
-          <a:xfrm>
-            <a:off x="3520440" y="2816352"/>
-            <a:ext cx="1005840" cy="347472"/>
-          </a:xfrm>
-          <a:prstGeom prst="rect">
-            <a:avLst/>
-          </a:prstGeom>
-          <a:noFill/>
-        </p:spPr>
-        <p:txBody>
-          <a:bodyPr wrap="square" lIns="0" rIns="0" tIns="0" bIns="0">
-            <a:spAutoFit/>
-          </a:bodyPr>
-          <a:lstStyle/>
-          <a:p>
-            <a:pPr algn="ctr"/>
-            <a:r>
-              <a:rPr sz="1200" b="1" i="0">
-                <a:solidFill>
-                  <a:srgbClr val="1C7293"/>
-                </a:solidFill>
-                <a:latin typeface="Calibri"/>
-              </a:rPr>
-              <a:t> 1.9%</a:t>
-            </a:r>
-          </a:p>
-        </p:txBody>
-      </p:sp>
-      <p:sp>
-        <p:nvSpPr>
-          <p:cNvPr id="26" name="TextBox 25"/>
-          <p:cNvSpPr txBox="1"/>
-          <p:nvPr/>
-        </p:nvSpPr>
-        <p:spPr>
-          <a:xfrm>
-            <a:off x="4572000" y="2816352"/>
-            <a:ext cx="1188720" cy="347472"/>
-          </a:xfrm>
-          <a:prstGeom prst="rect">
-            <a:avLst/>
-          </a:prstGeom>
-          <a:noFill/>
-        </p:spPr>
-        <p:txBody>
-          <a:bodyPr wrap="square" lIns="0" rIns="0" tIns="0" bIns="0">
-            <a:spAutoFit/>
-          </a:bodyPr>
-          <a:lstStyle/>
-          <a:p>
-            <a:pPr algn="ctr"/>
-            <a:r>
-              <a:rPr sz="1200" b="1" i="0">
-                <a:solidFill>
-                  <a:srgbClr val="DC2626"/>
-                </a:solidFill>
-                <a:latin typeface="Calibri"/>
-              </a:rPr>
-              <a:t> -1.8pp</a:t>
-            </a:r>
-          </a:p>
-        </p:txBody>
-      </p:sp>
-      <p:sp>
-        <p:nvSpPr>
-          <p:cNvPr id="27" name="Rectangle 26"/>
-          <p:cNvSpPr/>
-          <p:nvPr/>
-        </p:nvSpPr>
-        <p:spPr>
-          <a:xfrm>
-            <a:off x="411480" y="3246120"/>
-            <a:ext cx="5486400" cy="475488"/>
-          </a:xfrm>
-          <a:prstGeom prst="rect">
-            <a:avLst/>
-          </a:prstGeom>
-          <a:solidFill>
-            <a:srgbClr val="E2E8F0"/>
-          </a:solidFill>
-          <a:ln>
-            <a:noFill/>
-          </a:ln>
-        </p:spPr>
-        <p:style>
-          <a:lnRef idx="1">
-            <a:schemeClr val="accent1"/>
-          </a:lnRef>
-          <a:fillRef idx="3">
-            <a:schemeClr val="accent1"/>
-          </a:fillRef>
-          <a:effectRef idx="2">
-            <a:schemeClr val="accent1"/>
-          </a:effectRef>
-          <a:fontRef idx="minor">
-            <a:schemeClr val="lt1"/>
-          </a:fontRef>
-        </p:style>
-        <p:txBody>
-          <a:bodyPr rtlCol="0" anchor="ctr"/>
-          <a:lstStyle/>
-          <a:p>
-            <a:pPr algn="ctr"/>
-          </a:p>
-        </p:txBody>
-      </p:sp>
-      <p:sp>
-        <p:nvSpPr>
-          <p:cNvPr id="28" name="TextBox 27"/>
-          <p:cNvSpPr txBox="1"/>
-          <p:nvPr/>
-        </p:nvSpPr>
-        <p:spPr>
-          <a:xfrm>
-            <a:off x="594360" y="3319272"/>
-            <a:ext cx="1691640" cy="347472"/>
-          </a:xfrm>
-          <a:prstGeom prst="rect">
-            <a:avLst/>
-          </a:prstGeom>
-          <a:noFill/>
-        </p:spPr>
-        <p:txBody>
-          <a:bodyPr wrap="square" lIns="0" rIns="0" tIns="0" bIns="0">
-            <a:spAutoFit/>
-          </a:bodyPr>
-          <a:lstStyle/>
-          <a:p>
-            <a:pPr algn="l"/>
-            <a:r>
-              <a:rPr sz="1100" b="0" i="0">
-                <a:solidFill>
-                  <a:srgbClr val="1E293B"/>
-                </a:solidFill>
-                <a:latin typeface="Calibri"/>
-              </a:rPr>
-              <a:t>India</a:t>
-            </a:r>
-          </a:p>
-        </p:txBody>
-      </p:sp>
-      <p:sp>
-        <p:nvSpPr>
-          <p:cNvPr id="29" name="TextBox 28"/>
-          <p:cNvSpPr txBox="1"/>
-          <p:nvPr/>
-        </p:nvSpPr>
-        <p:spPr>
-          <a:xfrm>
-            <a:off x="2423160" y="3319272"/>
-            <a:ext cx="1005840" cy="347472"/>
-          </a:xfrm>
-          <a:prstGeom prst="rect">
-            <a:avLst/>
-          </a:prstGeom>
-          <a:noFill/>
-        </p:spPr>
-        <p:txBody>
-          <a:bodyPr wrap="square" lIns="0" rIns="0" tIns="0" bIns="0">
-            <a:spAutoFit/>
-          </a:bodyPr>
-          <a:lstStyle/>
-          <a:p>
-            <a:pPr algn="ctr"/>
-            <a:r>
-              <a:rPr sz="1200" b="1" i="0">
-                <a:solidFill>
-                  <a:srgbClr val="065A82"/>
-                </a:solidFill>
-                <a:latin typeface="Calibri"/>
-              </a:rPr>
-              <a:t> 1.3%</a:t>
-            </a:r>
-          </a:p>
-        </p:txBody>
-      </p:sp>
-      <p:sp>
-        <p:nvSpPr>
-          <p:cNvPr id="30" name="TextBox 29"/>
-          <p:cNvSpPr txBox="1"/>
-          <p:nvPr/>
-        </p:nvSpPr>
-        <p:spPr>
-          <a:xfrm>
-            <a:off x="3520440" y="3319272"/>
-            <a:ext cx="1005840" cy="347472"/>
-          </a:xfrm>
-          <a:prstGeom prst="rect">
-            <a:avLst/>
-          </a:prstGeom>
-          <a:noFill/>
-        </p:spPr>
-        <p:txBody>
-          <a:bodyPr wrap="square" lIns="0" rIns="0" tIns="0" bIns="0">
-            <a:spAutoFit/>
-          </a:bodyPr>
-          <a:lstStyle/>
-          <a:p>
-            <a:pPr algn="ctr"/>
-            <a:r>
-              <a:rPr sz="1200" b="1" i="0">
-                <a:solidFill>
-                  <a:srgbClr val="1C7293"/>
-                </a:solidFill>
-                <a:latin typeface="Calibri"/>
-              </a:rPr>
-              <a:t> 1.5%</a:t>
-            </a:r>
-          </a:p>
-        </p:txBody>
-      </p:sp>
-      <p:sp>
-        <p:nvSpPr>
-          <p:cNvPr id="31" name="TextBox 30"/>
-          <p:cNvSpPr txBox="1"/>
-          <p:nvPr/>
-        </p:nvSpPr>
-        <p:spPr>
-          <a:xfrm>
-            <a:off x="4572000" y="3319272"/>
-            <a:ext cx="1188720" cy="347472"/>
-          </a:xfrm>
-          <a:prstGeom prst="rect">
-            <a:avLst/>
-          </a:prstGeom>
-          <a:noFill/>
-        </p:spPr>
-        <p:txBody>
-          <a:bodyPr wrap="square" lIns="0" rIns="0" tIns="0" bIns="0">
-            <a:spAutoFit/>
-          </a:bodyPr>
-          <a:lstStyle/>
-          <a:p>
-            <a:pPr algn="ctr"/>
-            <a:r>
-              <a:rPr sz="1200" b="1" i="0">
-                <a:solidFill>
-                  <a:srgbClr val="059669"/>
-                </a:solidFill>
-                <a:latin typeface="Calibri"/>
-              </a:rPr>
-              <a:t> +0.2pp</a:t>
-            </a:r>
-          </a:p>
-        </p:txBody>
-      </p:sp>
-      <p:sp>
-        <p:nvSpPr>
-          <p:cNvPr id="32" name="Rectangle 31"/>
-          <p:cNvSpPr/>
-          <p:nvPr/>
-        </p:nvSpPr>
-        <p:spPr>
-          <a:xfrm>
-            <a:off x="411480" y="3749039"/>
-            <a:ext cx="5486400" cy="475488"/>
-          </a:xfrm>
-          <a:prstGeom prst="rect">
-            <a:avLst/>
-          </a:prstGeom>
-          <a:solidFill>
-            <a:srgbClr val="FFFFFF"/>
-          </a:solidFill>
-          <a:ln>
-            <a:noFill/>
-          </a:ln>
-        </p:spPr>
-        <p:style>
-          <a:lnRef idx="1">
-            <a:schemeClr val="accent1"/>
-          </a:lnRef>
-          <a:fillRef idx="3">
-            <a:schemeClr val="accent1"/>
-          </a:fillRef>
-          <a:effectRef idx="2">
-            <a:schemeClr val="accent1"/>
-          </a:effectRef>
-          <a:fontRef idx="minor">
-            <a:schemeClr val="lt1"/>
-          </a:fontRef>
-        </p:style>
-        <p:txBody>
-          <a:bodyPr rtlCol="0" anchor="ctr"/>
-          <a:lstStyle/>
-          <a:p>
-            <a:pPr algn="ctr"/>
-          </a:p>
-        </p:txBody>
-      </p:sp>
-      <p:sp>
-        <p:nvSpPr>
-          <p:cNvPr id="33" name="TextBox 32"/>
-          <p:cNvSpPr txBox="1"/>
-          <p:nvPr/>
-        </p:nvSpPr>
-        <p:spPr>
-          <a:xfrm>
-            <a:off x="594360" y="3822191"/>
-            <a:ext cx="1691640" cy="347472"/>
-          </a:xfrm>
-          <a:prstGeom prst="rect">
-            <a:avLst/>
-          </a:prstGeom>
-          <a:noFill/>
-        </p:spPr>
-        <p:txBody>
-          <a:bodyPr wrap="square" lIns="0" rIns="0" tIns="0" bIns="0">
-            <a:spAutoFit/>
-          </a:bodyPr>
-          <a:lstStyle/>
-          <a:p>
-            <a:pPr algn="l"/>
-            <a:r>
-              <a:rPr sz="1100" b="0" i="0">
-                <a:solidFill>
-                  <a:srgbClr val="1E293B"/>
-                </a:solidFill>
-                <a:latin typeface="Calibri"/>
-              </a:rPr>
-              <a:t>Canada</a:t>
-            </a:r>
-          </a:p>
-        </p:txBody>
-      </p:sp>
-      <p:sp>
-        <p:nvSpPr>
-          <p:cNvPr id="34" name="TextBox 33"/>
-          <p:cNvSpPr txBox="1"/>
-          <p:nvPr/>
-        </p:nvSpPr>
-        <p:spPr>
-          <a:xfrm>
-            <a:off x="2423160" y="3822191"/>
-            <a:ext cx="1005840" cy="347472"/>
-          </a:xfrm>
-          <a:prstGeom prst="rect">
-            <a:avLst/>
-          </a:prstGeom>
-          <a:noFill/>
-        </p:spPr>
-        <p:txBody>
-          <a:bodyPr wrap="square" lIns="0" rIns="0" tIns="0" bIns="0">
-            <a:spAutoFit/>
-          </a:bodyPr>
-          <a:lstStyle/>
-          <a:p>
-            <a:pPr algn="ctr"/>
-            <a:r>
-              <a:rPr sz="1200" b="1" i="0">
-                <a:solidFill>
-                  <a:srgbClr val="065A82"/>
-                </a:solidFill>
-                <a:latin typeface="Calibri"/>
-              </a:rPr>
-              <a:t> 1.2%</a:t>
-            </a:r>
-          </a:p>
-        </p:txBody>
-      </p:sp>
-      <p:sp>
-        <p:nvSpPr>
-          <p:cNvPr id="35" name="TextBox 34"/>
-          <p:cNvSpPr txBox="1"/>
-          <p:nvPr/>
-        </p:nvSpPr>
-        <p:spPr>
-          <a:xfrm>
-            <a:off x="3520440" y="3822191"/>
-            <a:ext cx="1005840" cy="347472"/>
-          </a:xfrm>
-          <a:prstGeom prst="rect">
-            <a:avLst/>
-          </a:prstGeom>
-          <a:noFill/>
-        </p:spPr>
-        <p:txBody>
-          <a:bodyPr wrap="square" lIns="0" rIns="0" tIns="0" bIns="0">
-            <a:spAutoFit/>
-          </a:bodyPr>
-          <a:lstStyle/>
-          <a:p>
-            <a:pPr algn="ctr"/>
-            <a:r>
-              <a:rPr sz="1200" b="1" i="0">
-                <a:solidFill>
-                  <a:srgbClr val="1C7293"/>
-                </a:solidFill>
-                <a:latin typeface="Calibri"/>
-              </a:rPr>
-              <a:t> 1.4%</a:t>
-            </a:r>
-          </a:p>
-        </p:txBody>
-      </p:sp>
-      <p:sp>
-        <p:nvSpPr>
-          <p:cNvPr id="36" name="TextBox 35"/>
-          <p:cNvSpPr txBox="1"/>
-          <p:nvPr/>
-        </p:nvSpPr>
-        <p:spPr>
-          <a:xfrm>
-            <a:off x="4572000" y="3822191"/>
-            <a:ext cx="1188720" cy="347472"/>
-          </a:xfrm>
-          <a:prstGeom prst="rect">
-            <a:avLst/>
-          </a:prstGeom>
-          <a:noFill/>
-        </p:spPr>
-        <p:txBody>
-          <a:bodyPr wrap="square" lIns="0" rIns="0" tIns="0" bIns="0">
-            <a:spAutoFit/>
-          </a:bodyPr>
-          <a:lstStyle/>
-          <a:p>
-            <a:pPr algn="ctr"/>
-            <a:r>
-              <a:rPr sz="1200" b="1" i="0">
-                <a:solidFill>
-                  <a:srgbClr val="059669"/>
-                </a:solidFill>
-                <a:latin typeface="Calibri"/>
-              </a:rPr>
-              <a:t> +0.2pp</a:t>
-            </a:r>
-          </a:p>
-        </p:txBody>
-      </p:sp>
-      <p:sp>
-        <p:nvSpPr>
-          <p:cNvPr id="37" name="Rectangle 36"/>
-          <p:cNvSpPr/>
-          <p:nvPr/>
-        </p:nvSpPr>
-        <p:spPr>
-          <a:xfrm>
-            <a:off x="411480" y="4251960"/>
-            <a:ext cx="5486400" cy="475488"/>
-          </a:xfrm>
-          <a:prstGeom prst="rect">
-            <a:avLst/>
-          </a:prstGeom>
-          <a:solidFill>
-            <a:srgbClr val="E2E8F0"/>
-          </a:solidFill>
-          <a:ln>
-            <a:noFill/>
-          </a:ln>
-        </p:spPr>
-        <p:style>
-          <a:lnRef idx="1">
-            <a:schemeClr val="accent1"/>
-          </a:lnRef>
-          <a:fillRef idx="3">
-            <a:schemeClr val="accent1"/>
-          </a:fillRef>
-          <a:effectRef idx="2">
-            <a:schemeClr val="accent1"/>
-          </a:effectRef>
-          <a:fontRef idx="minor">
-            <a:schemeClr val="lt1"/>
-          </a:fontRef>
-        </p:style>
-        <p:txBody>
-          <a:bodyPr rtlCol="0" anchor="ctr"/>
-          <a:lstStyle/>
-          <a:p>
-            <a:pPr algn="ctr"/>
-          </a:p>
-        </p:txBody>
-      </p:sp>
-      <p:sp>
-        <p:nvSpPr>
-          <p:cNvPr id="38" name="TextBox 37"/>
-          <p:cNvSpPr txBox="1"/>
-          <p:nvPr/>
-        </p:nvSpPr>
-        <p:spPr>
-          <a:xfrm>
-            <a:off x="594360" y="4325112"/>
-            <a:ext cx="1691640" cy="347472"/>
-          </a:xfrm>
-          <a:prstGeom prst="rect">
-            <a:avLst/>
-          </a:prstGeom>
-          <a:noFill/>
-        </p:spPr>
-        <p:txBody>
-          <a:bodyPr wrap="square" lIns="0" rIns="0" tIns="0" bIns="0">
-            <a:spAutoFit/>
-          </a:bodyPr>
-          <a:lstStyle/>
-          <a:p>
-            <a:pPr algn="l"/>
-            <a:r>
-              <a:rPr sz="1100" b="0" i="0">
-                <a:solidFill>
-                  <a:srgbClr val="1E293B"/>
-                </a:solidFill>
-                <a:latin typeface="Calibri"/>
-              </a:rPr>
-              <a:t>China</a:t>
-            </a:r>
-          </a:p>
-        </p:txBody>
-      </p:sp>
-      <p:sp>
-        <p:nvSpPr>
-          <p:cNvPr id="39" name="TextBox 38"/>
-          <p:cNvSpPr txBox="1"/>
-          <p:nvPr/>
-        </p:nvSpPr>
-        <p:spPr>
-          <a:xfrm>
-            <a:off x="2423160" y="4325112"/>
-            <a:ext cx="1005840" cy="347472"/>
-          </a:xfrm>
-          <a:prstGeom prst="rect">
-            <a:avLst/>
-          </a:prstGeom>
-          <a:noFill/>
-        </p:spPr>
-        <p:txBody>
-          <a:bodyPr wrap="square" lIns="0" rIns="0" tIns="0" bIns="0">
-            <a:spAutoFit/>
-          </a:bodyPr>
-          <a:lstStyle/>
-          <a:p>
-            <a:pPr algn="ctr"/>
-            <a:r>
-              <a:rPr sz="1200" b="1" i="0">
-                <a:solidFill>
-                  <a:srgbClr val="065A82"/>
-                </a:solidFill>
-                <a:latin typeface="Calibri"/>
-              </a:rPr>
-              <a:t> 1.1%</a:t>
-            </a:r>
-          </a:p>
-        </p:txBody>
-      </p:sp>
-      <p:sp>
-        <p:nvSpPr>
-          <p:cNvPr id="40" name="TextBox 39"/>
-          <p:cNvSpPr txBox="1"/>
-          <p:nvPr/>
-        </p:nvSpPr>
-        <p:spPr>
-          <a:xfrm>
-            <a:off x="3520440" y="4325112"/>
-            <a:ext cx="1005840" cy="347472"/>
-          </a:xfrm>
-          <a:prstGeom prst="rect">
-            <a:avLst/>
-          </a:prstGeom>
-          <a:noFill/>
-        </p:spPr>
-        <p:txBody>
-          <a:bodyPr wrap="square" lIns="0" rIns="0" tIns="0" bIns="0">
-            <a:spAutoFit/>
-          </a:bodyPr>
-          <a:lstStyle/>
-          <a:p>
-            <a:pPr algn="ctr"/>
-            <a:r>
-              <a:rPr sz="1200" b="1" i="0">
-                <a:solidFill>
-                  <a:srgbClr val="1C7293"/>
-                </a:solidFill>
-                <a:latin typeface="Calibri"/>
-              </a:rPr>
-              <a:t> 0.7%</a:t>
-            </a:r>
-          </a:p>
-        </p:txBody>
-      </p:sp>
-      <p:sp>
-        <p:nvSpPr>
-          <p:cNvPr id="41" name="TextBox 40"/>
-          <p:cNvSpPr txBox="1"/>
-          <p:nvPr/>
-        </p:nvSpPr>
-        <p:spPr>
-          <a:xfrm>
-            <a:off x="4572000" y="4325112"/>
-            <a:ext cx="1188720" cy="347472"/>
-          </a:xfrm>
-          <a:prstGeom prst="rect">
-            <a:avLst/>
-          </a:prstGeom>
-          <a:noFill/>
-        </p:spPr>
-        <p:txBody>
-          <a:bodyPr wrap="square" lIns="0" rIns="0" tIns="0" bIns="0">
-            <a:spAutoFit/>
-          </a:bodyPr>
-          <a:lstStyle/>
-          <a:p>
-            <a:pPr algn="ctr"/>
-            <a:r>
-              <a:rPr sz="1200" b="1" i="0">
-                <a:solidFill>
-                  <a:srgbClr val="D97706"/>
-                </a:solidFill>
-                <a:latin typeface="Calibri"/>
-              </a:rPr>
-              <a:t> -0.4pp</a:t>
-            </a:r>
-          </a:p>
-        </p:txBody>
-      </p:sp>
-      <p:sp>
-        <p:nvSpPr>
-          <p:cNvPr id="42" name="Rectangle 41"/>
-          <p:cNvSpPr/>
-          <p:nvPr/>
-        </p:nvSpPr>
-        <p:spPr>
-          <a:xfrm>
-            <a:off x="411480" y="4754880"/>
-            <a:ext cx="5486400" cy="475488"/>
-          </a:xfrm>
-          <a:prstGeom prst="rect">
-            <a:avLst/>
-          </a:prstGeom>
-          <a:solidFill>
-            <a:srgbClr val="FFFFFF"/>
-          </a:solidFill>
-          <a:ln>
-            <a:noFill/>
-          </a:ln>
-        </p:spPr>
-        <p:style>
-          <a:lnRef idx="1">
-            <a:schemeClr val="accent1"/>
-          </a:lnRef>
-          <a:fillRef idx="3">
-            <a:schemeClr val="accent1"/>
-          </a:fillRef>
-          <a:effectRef idx="2">
-            <a:schemeClr val="accent1"/>
-          </a:effectRef>
-          <a:fontRef idx="minor">
-            <a:schemeClr val="lt1"/>
-          </a:fontRef>
-        </p:style>
-        <p:txBody>
-          <a:bodyPr rtlCol="0" anchor="ctr"/>
-          <a:lstStyle/>
-          <a:p>
-            <a:pPr algn="ctr"/>
-          </a:p>
-        </p:txBody>
-      </p:sp>
-      <p:sp>
-        <p:nvSpPr>
-          <p:cNvPr id="43" name="TextBox 42"/>
-          <p:cNvSpPr txBox="1"/>
-          <p:nvPr/>
-        </p:nvSpPr>
-        <p:spPr>
-          <a:xfrm>
-            <a:off x="594360" y="4828032"/>
-            <a:ext cx="1691640" cy="347472"/>
-          </a:xfrm>
-          <a:prstGeom prst="rect">
-            <a:avLst/>
-          </a:prstGeom>
-          <a:noFill/>
-        </p:spPr>
-        <p:txBody>
-          <a:bodyPr wrap="square" lIns="0" rIns="0" tIns="0" bIns="0">
-            <a:spAutoFit/>
-          </a:bodyPr>
-          <a:lstStyle/>
-          <a:p>
-            <a:pPr algn="l"/>
-            <a:r>
-              <a:rPr sz="1100" b="0" i="0">
-                <a:solidFill>
-                  <a:srgbClr val="1E293B"/>
-                </a:solidFill>
-                <a:latin typeface="Calibri"/>
-              </a:rPr>
-              <a:t>Taiwan</a:t>
-            </a:r>
-          </a:p>
-        </p:txBody>
-      </p:sp>
-      <p:sp>
-        <p:nvSpPr>
-          <p:cNvPr id="44" name="TextBox 43"/>
-          <p:cNvSpPr txBox="1"/>
-          <p:nvPr/>
-        </p:nvSpPr>
-        <p:spPr>
-          <a:xfrm>
-            <a:off x="2423160" y="4828032"/>
-            <a:ext cx="1005840" cy="347472"/>
-          </a:xfrm>
-          <a:prstGeom prst="rect">
-            <a:avLst/>
-          </a:prstGeom>
-          <a:noFill/>
-        </p:spPr>
-        <p:txBody>
-          <a:bodyPr wrap="square" lIns="0" rIns="0" tIns="0" bIns="0">
-            <a:spAutoFit/>
-          </a:bodyPr>
-          <a:lstStyle/>
-          <a:p>
-            <a:pPr algn="ctr"/>
-            <a:r>
-              <a:rPr sz="1200" b="1" i="0">
-                <a:solidFill>
-                  <a:srgbClr val="065A82"/>
-                </a:solidFill>
-                <a:latin typeface="Calibri"/>
-              </a:rPr>
-              <a:t> 0.9%</a:t>
-            </a:r>
-          </a:p>
-        </p:txBody>
-      </p:sp>
-      <p:sp>
-        <p:nvSpPr>
-          <p:cNvPr id="45" name="TextBox 44"/>
-          <p:cNvSpPr txBox="1"/>
-          <p:nvPr/>
-        </p:nvSpPr>
-        <p:spPr>
-          <a:xfrm>
-            <a:off x="3520440" y="4828032"/>
-            <a:ext cx="1005840" cy="347472"/>
-          </a:xfrm>
-          <a:prstGeom prst="rect">
-            <a:avLst/>
-          </a:prstGeom>
-          <a:noFill/>
-        </p:spPr>
-        <p:txBody>
-          <a:bodyPr wrap="square" lIns="0" rIns="0" tIns="0" bIns="0">
-            <a:spAutoFit/>
-          </a:bodyPr>
-          <a:lstStyle/>
-          <a:p>
-            <a:pPr algn="ctr"/>
-            <a:r>
-              <a:rPr sz="1200" b="1" i="0">
-                <a:solidFill>
-                  <a:srgbClr val="1C7293"/>
-                </a:solidFill>
-                <a:latin typeface="Calibri"/>
-              </a:rPr>
-              <a:t> 0.7%</a:t>
-            </a:r>
-          </a:p>
-        </p:txBody>
-      </p:sp>
-      <p:sp>
-        <p:nvSpPr>
-          <p:cNvPr id="46" name="TextBox 45"/>
-          <p:cNvSpPr txBox="1"/>
-          <p:nvPr/>
-        </p:nvSpPr>
-        <p:spPr>
-          <a:xfrm>
-            <a:off x="4572000" y="4828032"/>
-            <a:ext cx="1188720" cy="347472"/>
-          </a:xfrm>
-          <a:prstGeom prst="rect">
-            <a:avLst/>
-          </a:prstGeom>
-          <a:noFill/>
-        </p:spPr>
-        <p:txBody>
-          <a:bodyPr wrap="square" lIns="0" rIns="0" tIns="0" bIns="0">
-            <a:spAutoFit/>
-          </a:bodyPr>
-          <a:lstStyle/>
-          <a:p>
-            <a:pPr algn="ctr"/>
-            <a:r>
-              <a:rPr sz="1200" b="1" i="0">
-                <a:solidFill>
-                  <a:srgbClr val="64748B"/>
-                </a:solidFill>
-                <a:latin typeface="Calibri"/>
-              </a:rPr>
-              <a:t> -0.2pp</a:t>
-            </a:r>
-          </a:p>
-        </p:txBody>
-      </p:sp>
-      <p:sp>
-        <p:nvSpPr>
-          <p:cNvPr id="47" name="Rectangle 46"/>
-          <p:cNvSpPr/>
-          <p:nvPr/>
-        </p:nvSpPr>
-        <p:spPr>
-          <a:xfrm>
-            <a:off x="411480" y="5257800"/>
-            <a:ext cx="5486400" cy="475488"/>
-          </a:xfrm>
-          <a:prstGeom prst="rect">
-            <a:avLst/>
-          </a:prstGeom>
-          <a:solidFill>
-            <a:srgbClr val="E2E8F0"/>
-          </a:solidFill>
-          <a:ln>
-            <a:noFill/>
-          </a:ln>
-        </p:spPr>
-        <p:style>
-          <a:lnRef idx="1">
-            <a:schemeClr val="accent1"/>
-          </a:lnRef>
-          <a:fillRef idx="3">
-            <a:schemeClr val="accent1"/>
-          </a:fillRef>
-          <a:effectRef idx="2">
-            <a:schemeClr val="accent1"/>
-          </a:effectRef>
-          <a:fontRef idx="minor">
-            <a:schemeClr val="lt1"/>
-          </a:fontRef>
-        </p:style>
-        <p:txBody>
-          <a:bodyPr rtlCol="0" anchor="ctr"/>
-          <a:lstStyle/>
-          <a:p>
-            <a:pPr algn="ctr"/>
-          </a:p>
-        </p:txBody>
-      </p:sp>
-      <p:sp>
-        <p:nvSpPr>
-          <p:cNvPr id="48" name="TextBox 47"/>
-          <p:cNvSpPr txBox="1"/>
-          <p:nvPr/>
-        </p:nvSpPr>
-        <p:spPr>
-          <a:xfrm>
-            <a:off x="594360" y="5330952"/>
-            <a:ext cx="1691640" cy="347472"/>
-          </a:xfrm>
-          <a:prstGeom prst="rect">
-            <a:avLst/>
-          </a:prstGeom>
-          <a:noFill/>
-        </p:spPr>
-        <p:txBody>
-          <a:bodyPr wrap="square" lIns="0" rIns="0" tIns="0" bIns="0">
-            <a:spAutoFit/>
-          </a:bodyPr>
-          <a:lstStyle/>
-          <a:p>
-            <a:pPr algn="l"/>
-            <a:r>
-              <a:rPr sz="1100" b="0" i="0">
-                <a:solidFill>
-                  <a:srgbClr val="1E293B"/>
-                </a:solidFill>
-                <a:latin typeface="Calibri"/>
-              </a:rPr>
-              <a:t>Mexico</a:t>
-            </a:r>
-          </a:p>
-        </p:txBody>
-      </p:sp>
-      <p:sp>
-        <p:nvSpPr>
-          <p:cNvPr id="49" name="TextBox 48"/>
-          <p:cNvSpPr txBox="1"/>
-          <p:nvPr/>
-        </p:nvSpPr>
-        <p:spPr>
-          <a:xfrm>
-            <a:off x="2423160" y="5330952"/>
-            <a:ext cx="1005840" cy="347472"/>
-          </a:xfrm>
-          <a:prstGeom prst="rect">
-            <a:avLst/>
-          </a:prstGeom>
-          <a:noFill/>
-        </p:spPr>
-        <p:txBody>
-          <a:bodyPr wrap="square" lIns="0" rIns="0" tIns="0" bIns="0">
-            <a:spAutoFit/>
-          </a:bodyPr>
-          <a:lstStyle/>
-          <a:p>
-            <a:pPr algn="ctr"/>
-            <a:r>
-              <a:rPr sz="1200" b="1" i="0">
-                <a:solidFill>
-                  <a:srgbClr val="065A82"/>
-                </a:solidFill>
-                <a:latin typeface="Calibri"/>
-              </a:rPr>
-              <a:t> 0.6%</a:t>
-            </a:r>
-          </a:p>
-        </p:txBody>
-      </p:sp>
-      <p:sp>
-        <p:nvSpPr>
-          <p:cNvPr id="50" name="TextBox 49"/>
-          <p:cNvSpPr txBox="1"/>
-          <p:nvPr/>
-        </p:nvSpPr>
-        <p:spPr>
-          <a:xfrm>
-            <a:off x="3520440" y="5330952"/>
-            <a:ext cx="1005840" cy="347472"/>
-          </a:xfrm>
-          <a:prstGeom prst="rect">
-            <a:avLst/>
-          </a:prstGeom>
-          <a:noFill/>
-        </p:spPr>
-        <p:txBody>
-          <a:bodyPr wrap="square" lIns="0" rIns="0" tIns="0" bIns="0">
-            <a:spAutoFit/>
-          </a:bodyPr>
-          <a:lstStyle/>
-          <a:p>
-            <a:pPr algn="ctr"/>
-            <a:r>
-              <a:rPr sz="1200" b="1" i="0">
-                <a:solidFill>
-                  <a:srgbClr val="1C7293"/>
-                </a:solidFill>
-                <a:latin typeface="Calibri"/>
-              </a:rPr>
-              <a:t> 0.7%</a:t>
-            </a:r>
-          </a:p>
-        </p:txBody>
-      </p:sp>
-      <p:sp>
-        <p:nvSpPr>
-          <p:cNvPr id="51" name="TextBox 50"/>
-          <p:cNvSpPr txBox="1"/>
-          <p:nvPr/>
-        </p:nvSpPr>
-        <p:spPr>
-          <a:xfrm>
-            <a:off x="4572000" y="5330952"/>
-            <a:ext cx="1188720" cy="347472"/>
-          </a:xfrm>
-          <a:prstGeom prst="rect">
-            <a:avLst/>
-          </a:prstGeom>
-          <a:noFill/>
-        </p:spPr>
-        <p:txBody>
-          <a:bodyPr wrap="square" lIns="0" rIns="0" tIns="0" bIns="0">
-            <a:spAutoFit/>
-          </a:bodyPr>
-          <a:lstStyle/>
-          <a:p>
-            <a:pPr algn="ctr"/>
-            <a:r>
-              <a:rPr sz="1200" b="1" i="0">
-                <a:solidFill>
-                  <a:srgbClr val="64748B"/>
-                </a:solidFill>
-                <a:latin typeface="Calibri"/>
-              </a:rPr>
-              <a:t> +0.1pp</a:t>
-            </a:r>
-          </a:p>
-        </p:txBody>
-      </p:sp>
-      <p:sp>
-        <p:nvSpPr>
-          <p:cNvPr id="52" name="Rectangle 51"/>
-          <p:cNvSpPr/>
-          <p:nvPr/>
-        </p:nvSpPr>
-        <p:spPr>
-          <a:xfrm>
-            <a:off x="6263640" y="914400"/>
-            <a:ext cx="5577840" cy="2377440"/>
-          </a:xfrm>
-          <a:prstGeom prst="rect">
-            <a:avLst/>
-          </a:prstGeom>
-          <a:solidFill>
-            <a:srgbClr val="FFFFFF"/>
-          </a:solidFill>
-          <a:ln>
-            <a:noFill/>
-          </a:ln>
-        </p:spPr>
-        <p:style>
-          <a:lnRef idx="1">
-            <a:schemeClr val="accent1"/>
-          </a:lnRef>
-          <a:fillRef idx="3">
-            <a:schemeClr val="accent1"/>
-          </a:fillRef>
-          <a:effectRef idx="2">
-            <a:schemeClr val="accent1"/>
-          </a:effectRef>
-          <a:fontRef idx="minor">
-            <a:schemeClr val="lt1"/>
-          </a:fontRef>
-        </p:style>
-        <p:txBody>
-          <a:bodyPr rtlCol="0" anchor="ctr"/>
-          <a:lstStyle/>
-          <a:p>
-            <a:pPr algn="ctr"/>
-          </a:p>
-        </p:txBody>
-      </p:sp>
-      <p:sp>
-        <p:nvSpPr>
-          <p:cNvPr id="53" name="Rectangle 52"/>
-          <p:cNvSpPr/>
-          <p:nvPr/>
-        </p:nvSpPr>
-        <p:spPr>
-          <a:xfrm>
-            <a:off x="6263640" y="914400"/>
-            <a:ext cx="54864" cy="2377440"/>
-          </a:xfrm>
-          <a:prstGeom prst="rect">
-            <a:avLst/>
-          </a:prstGeom>
-          <a:solidFill>
-            <a:srgbClr val="065A82"/>
-          </a:solidFill>
-          <a:ln>
-            <a:noFill/>
-          </a:ln>
-        </p:spPr>
-        <p:style>
-          <a:lnRef idx="1">
-            <a:schemeClr val="accent1"/>
-          </a:lnRef>
-          <a:fillRef idx="3">
-            <a:schemeClr val="accent1"/>
-          </a:fillRef>
-          <a:effectRef idx="2">
-            <a:schemeClr val="accent1"/>
-          </a:effectRef>
-          <a:fontRef idx="minor">
-            <a:schemeClr val="lt1"/>
-          </a:fontRef>
-        </p:style>
-        <p:txBody>
-          <a:bodyPr rtlCol="0" anchor="ctr"/>
-          <a:lstStyle/>
-          <a:p>
-            <a:pPr algn="ctr"/>
-          </a:p>
-        </p:txBody>
-      </p:sp>
-      <p:sp>
-        <p:nvSpPr>
-          <p:cNvPr id="54" name="TextBox 53"/>
-          <p:cNvSpPr txBox="1"/>
-          <p:nvPr/>
-        </p:nvSpPr>
-        <p:spPr>
-          <a:xfrm>
-            <a:off x="6492240" y="960120"/>
-            <a:ext cx="5120640" cy="384048"/>
-          </a:xfrm>
-          <a:prstGeom prst="rect">
-            <a:avLst/>
-          </a:prstGeom>
-          <a:noFill/>
-        </p:spPr>
-        <p:txBody>
-          <a:bodyPr wrap="square" lIns="0" rIns="0" tIns="0" bIns="0">
-            <a:spAutoFit/>
-          </a:bodyPr>
-          <a:lstStyle/>
-          <a:p>
-            <a:pPr algn="l"/>
-            <a:r>
-              <a:rPr sz="1300" b="1" i="0">
-                <a:solidFill>
-                  <a:srgbClr val="065A82"/>
-                </a:solidFill>
-                <a:latin typeface="Calibri"/>
-              </a:rPr>
-              <a:t>US Market Concentration</a:t>
-            </a:r>
-          </a:p>
-        </p:txBody>
-      </p:sp>
-      <p:sp>
-        <p:nvSpPr>
-          <p:cNvPr id="55" name="TextBox 54"/>
-          <p:cNvSpPr txBox="1"/>
-          <p:nvPr/>
-        </p:nvSpPr>
-        <p:spPr>
-          <a:xfrm>
-            <a:off x="6492240" y="1417320"/>
-            <a:ext cx="2011680" cy="347472"/>
-          </a:xfrm>
-          <a:prstGeom prst="rect">
-            <a:avLst/>
-          </a:prstGeom>
-          <a:noFill/>
-        </p:spPr>
-        <p:txBody>
-          <a:bodyPr wrap="square" lIns="0" rIns="0" tIns="0" bIns="0">
-            <a:spAutoFit/>
-          </a:bodyPr>
-          <a:lstStyle/>
-          <a:p>
-            <a:pPr algn="l"/>
-            <a:r>
-              <a:rPr sz="1100" b="1" i="0">
-                <a:solidFill>
-                  <a:srgbClr val="1E293B"/>
-                </a:solidFill>
-                <a:latin typeface="Calibri"/>
-              </a:rPr>
-              <a:t>Jan US share</a:t>
-            </a:r>
-          </a:p>
-        </p:txBody>
-      </p:sp>
-      <p:sp>
-        <p:nvSpPr>
-          <p:cNvPr id="56" name="TextBox 55"/>
-          <p:cNvSpPr txBox="1"/>
-          <p:nvPr/>
-        </p:nvSpPr>
-        <p:spPr>
-          <a:xfrm>
-            <a:off x="8549640" y="1417320"/>
-            <a:ext cx="1005840" cy="347472"/>
-          </a:xfrm>
-          <a:prstGeom prst="rect">
-            <a:avLst/>
-          </a:prstGeom>
-          <a:noFill/>
-        </p:spPr>
-        <p:txBody>
-          <a:bodyPr wrap="square" lIns="0" rIns="0" tIns="0" bIns="0">
-            <a:spAutoFit/>
-          </a:bodyPr>
-          <a:lstStyle/>
-          <a:p>
-            <a:pPr algn="ctr"/>
-            <a:r>
-              <a:rPr sz="1400" b="1" i="0">
-                <a:solidFill>
-                  <a:srgbClr val="065A82"/>
-                </a:solidFill>
-                <a:latin typeface="Calibri"/>
-              </a:rPr>
-              <a:t>73.4%</a:t>
-            </a:r>
-          </a:p>
-        </p:txBody>
-      </p:sp>
-      <p:sp>
-        <p:nvSpPr>
-          <p:cNvPr id="57" name="TextBox 56"/>
-          <p:cNvSpPr txBox="1"/>
-          <p:nvPr/>
-        </p:nvSpPr>
-        <p:spPr>
-          <a:xfrm>
-            <a:off x="6492240" y="1737360"/>
-            <a:ext cx="5120640" cy="292608"/>
-          </a:xfrm>
-          <a:prstGeom prst="rect">
-            <a:avLst/>
-          </a:prstGeom>
-          <a:noFill/>
-        </p:spPr>
-        <p:txBody>
-          <a:bodyPr wrap="square" lIns="0" rIns="0" tIns="0" bIns="0">
-            <a:spAutoFit/>
-          </a:bodyPr>
-          <a:lstStyle/>
-          <a:p>
-            <a:pPr algn="l"/>
-            <a:r>
-              <a:rPr sz="900" b="0" i="0">
-                <a:solidFill>
-                  <a:srgbClr val="64748B"/>
-                </a:solidFill>
-                <a:latin typeface="Calibri"/>
-              </a:rPr>
-              <a:t>Consistent home-market baseline</a:t>
-            </a:r>
-          </a:p>
-        </p:txBody>
-      </p:sp>
-      <p:sp>
-        <p:nvSpPr>
-          <p:cNvPr id="58" name="TextBox 57"/>
-          <p:cNvSpPr txBox="1"/>
-          <p:nvPr/>
-        </p:nvSpPr>
-        <p:spPr>
-          <a:xfrm>
-            <a:off x="6492240" y="2075688"/>
-            <a:ext cx="2011680" cy="347472"/>
-          </a:xfrm>
-          <a:prstGeom prst="rect">
-            <a:avLst/>
-          </a:prstGeom>
-          <a:noFill/>
-        </p:spPr>
-        <p:txBody>
-          <a:bodyPr wrap="square" lIns="0" rIns="0" tIns="0" bIns="0">
-            <a:spAutoFit/>
-          </a:bodyPr>
-          <a:lstStyle/>
-          <a:p>
-            <a:pPr algn="l"/>
-            <a:r>
-              <a:rPr sz="1100" b="1" i="0">
-                <a:solidFill>
-                  <a:srgbClr val="1E293B"/>
-                </a:solidFill>
-                <a:latin typeface="Calibri"/>
-              </a:rPr>
-              <a:t>Feb US share</a:t>
-            </a:r>
-          </a:p>
-        </p:txBody>
-      </p:sp>
-      <p:sp>
-        <p:nvSpPr>
-          <p:cNvPr id="59" name="TextBox 58"/>
-          <p:cNvSpPr txBox="1"/>
-          <p:nvPr/>
-        </p:nvSpPr>
-        <p:spPr>
-          <a:xfrm>
-            <a:off x="8549640" y="2075688"/>
-            <a:ext cx="1005840" cy="347472"/>
-          </a:xfrm>
-          <a:prstGeom prst="rect">
-            <a:avLst/>
-          </a:prstGeom>
-          <a:noFill/>
-        </p:spPr>
-        <p:txBody>
-          <a:bodyPr wrap="square" lIns="0" rIns="0" tIns="0" bIns="0">
-            <a:spAutoFit/>
-          </a:bodyPr>
-          <a:lstStyle/>
-          <a:p>
-            <a:pPr algn="ctr"/>
-            <a:r>
-              <a:rPr sz="1400" b="1" i="0">
-                <a:solidFill>
-                  <a:srgbClr val="065A82"/>
-                </a:solidFill>
-                <a:latin typeface="Calibri"/>
-              </a:rPr>
-              <a:t>84.4%</a:t>
-            </a:r>
-          </a:p>
-        </p:txBody>
-      </p:sp>
-      <p:sp>
-        <p:nvSpPr>
-          <p:cNvPr id="60" name="TextBox 59"/>
-          <p:cNvSpPr txBox="1"/>
-          <p:nvPr/>
-        </p:nvSpPr>
-        <p:spPr>
-          <a:xfrm>
-            <a:off x="6492240" y="2395728"/>
-            <a:ext cx="5120640" cy="292608"/>
-          </a:xfrm>
-          <a:prstGeom prst="rect">
-            <a:avLst/>
-          </a:prstGeom>
-          <a:noFill/>
-        </p:spPr>
-        <p:txBody>
-          <a:bodyPr wrap="square" lIns="0" rIns="0" tIns="0" bIns="0">
-            <a:spAutoFit/>
-          </a:bodyPr>
-          <a:lstStyle/>
-          <a:p>
-            <a:pPr algn="l"/>
-            <a:r>
-              <a:rPr sz="900" b="0" i="0">
-                <a:solidFill>
-                  <a:srgbClr val="64748B"/>
-                </a:solidFill>
-                <a:latin typeface="Calibri"/>
-              </a:rPr>
-              <a:t>+11pp jump — other markets shrank</a:t>
-            </a:r>
-          </a:p>
-        </p:txBody>
-      </p:sp>
-      <p:sp>
-        <p:nvSpPr>
-          <p:cNvPr id="61" name="TextBox 60"/>
-          <p:cNvSpPr txBox="1"/>
-          <p:nvPr/>
-        </p:nvSpPr>
-        <p:spPr>
-          <a:xfrm>
-            <a:off x="6492240" y="2734056"/>
-            <a:ext cx="2011680" cy="347472"/>
-          </a:xfrm>
-          <a:prstGeom prst="rect">
-            <a:avLst/>
-          </a:prstGeom>
-          <a:noFill/>
-        </p:spPr>
-        <p:txBody>
-          <a:bodyPr wrap="square" lIns="0" rIns="0" tIns="0" bIns="0">
-            <a:spAutoFit/>
-          </a:bodyPr>
-          <a:lstStyle/>
-          <a:p>
-            <a:pPr algn="l"/>
-            <a:r>
-              <a:rPr sz="1100" b="1" i="0">
-                <a:solidFill>
-                  <a:srgbClr val="1E293B"/>
-                </a:solidFill>
-                <a:latin typeface="Calibri"/>
-              </a:rPr>
-              <a:t>US PPV</a:t>
-            </a:r>
-          </a:p>
-        </p:txBody>
-      </p:sp>
-      <p:sp>
-        <p:nvSpPr>
-          <p:cNvPr id="62" name="TextBox 61"/>
-          <p:cNvSpPr txBox="1"/>
-          <p:nvPr/>
-        </p:nvSpPr>
-        <p:spPr>
-          <a:xfrm>
-            <a:off x="8549640" y="2734056"/>
-            <a:ext cx="1005840" cy="347472"/>
-          </a:xfrm>
-          <a:prstGeom prst="rect">
-            <a:avLst/>
-          </a:prstGeom>
-          <a:noFill/>
-        </p:spPr>
-        <p:txBody>
-          <a:bodyPr wrap="square" lIns="0" rIns="0" tIns="0" bIns="0">
-            <a:spAutoFit/>
-          </a:bodyPr>
-          <a:lstStyle/>
-          <a:p>
-            <a:pPr algn="ctr"/>
-            <a:r>
-              <a:rPr sz="1400" b="1" i="0">
-                <a:solidFill>
-                  <a:srgbClr val="065A82"/>
-                </a:solidFill>
-                <a:latin typeface="Calibri"/>
-              </a:rPr>
-              <a:t>2.15</a:t>
-            </a:r>
-          </a:p>
-        </p:txBody>
-      </p:sp>
-      <p:sp>
-        <p:nvSpPr>
-          <p:cNvPr id="63" name="TextBox 62"/>
-          <p:cNvSpPr txBox="1"/>
-          <p:nvPr/>
-        </p:nvSpPr>
-        <p:spPr>
-          <a:xfrm>
-            <a:off x="6492240" y="3054096"/>
-            <a:ext cx="5120640" cy="292608"/>
-          </a:xfrm>
-          <a:prstGeom prst="rect">
-            <a:avLst/>
-          </a:prstGeom>
-          <a:noFill/>
-        </p:spPr>
-        <p:txBody>
-          <a:bodyPr wrap="square" lIns="0" rIns="0" tIns="0" bIns="0">
-            <a:spAutoFit/>
-          </a:bodyPr>
-          <a:lstStyle/>
-          <a:p>
-            <a:pPr algn="l"/>
-            <a:r>
-              <a:rPr sz="900" b="0" i="0">
-                <a:solidFill>
-                  <a:srgbClr val="64748B"/>
-                </a:solidFill>
-                <a:latin typeface="Calibri"/>
-              </a:rPr>
-              <a:t>Slightly below site average (2.03)</a:t>
-            </a:r>
-          </a:p>
-        </p:txBody>
-      </p:sp>
-      <p:sp>
-        <p:nvSpPr>
-          <p:cNvPr id="64" name="Rectangle 63"/>
-          <p:cNvSpPr/>
-          <p:nvPr/>
-        </p:nvSpPr>
-        <p:spPr>
-          <a:xfrm>
-            <a:off x="6263640" y="3520440"/>
-            <a:ext cx="5577840" cy="2423160"/>
-          </a:xfrm>
-          <a:prstGeom prst="rect">
-            <a:avLst/>
-          </a:prstGeom>
-          <a:solidFill>
-            <a:srgbClr val="065A82"/>
-          </a:solidFill>
-          <a:ln>
-            <a:noFill/>
-          </a:ln>
-        </p:spPr>
-        <p:style>
-          <a:lnRef idx="1">
-            <a:schemeClr val="accent1"/>
-          </a:lnRef>
-          <a:fillRef idx="3">
-            <a:schemeClr val="accent1"/>
-          </a:fillRef>
-          <a:effectRef idx="2">
-            <a:schemeClr val="accent1"/>
-          </a:effectRef>
-          <a:fontRef idx="minor">
-            <a:schemeClr val="lt1"/>
-          </a:fontRef>
-        </p:style>
-        <p:txBody>
-          <a:bodyPr rtlCol="0" anchor="ctr"/>
-          <a:lstStyle/>
-          <a:p>
-            <a:pPr algn="ctr"/>
-          </a:p>
-        </p:txBody>
-      </p:sp>
-      <p:sp>
-        <p:nvSpPr>
-          <p:cNvPr id="65" name="Rectangle 64"/>
-          <p:cNvSpPr/>
-          <p:nvPr/>
-        </p:nvSpPr>
-        <p:spPr>
-          <a:xfrm>
-            <a:off x="6263640" y="3520440"/>
-            <a:ext cx="5577840" cy="64008"/>
-          </a:xfrm>
-          <a:prstGeom prst="rect">
-            <a:avLst/>
-          </a:prstGeom>
-          <a:solidFill>
-            <a:srgbClr val="DC2626"/>
-          </a:solidFill>
-          <a:ln>
-            <a:noFill/>
-          </a:ln>
-        </p:spPr>
-        <p:style>
-          <a:lnRef idx="1">
-            <a:schemeClr val="accent1"/>
-          </a:lnRef>
-          <a:fillRef idx="3">
-            <a:schemeClr val="accent1"/>
-          </a:fillRef>
-          <a:effectRef idx="2">
-            <a:schemeClr val="accent1"/>
-          </a:effectRef>
-          <a:fontRef idx="minor">
-            <a:schemeClr val="lt1"/>
-          </a:fontRef>
-        </p:style>
-        <p:txBody>
-          <a:bodyPr rtlCol="0" anchor="ctr"/>
-          <a:lstStyle/>
-          <a:p>
-            <a:pPr algn="ctr"/>
-          </a:p>
-        </p:txBody>
-      </p:sp>
-      <p:sp>
-        <p:nvSpPr>
-          <p:cNvPr id="66" name="TextBox 65"/>
-          <p:cNvSpPr txBox="1"/>
-          <p:nvPr/>
-        </p:nvSpPr>
-        <p:spPr>
-          <a:xfrm>
-            <a:off x="6446520" y="3611880"/>
-            <a:ext cx="5212080" cy="384048"/>
-          </a:xfrm>
-          <a:prstGeom prst="rect">
-            <a:avLst/>
-          </a:prstGeom>
-          <a:noFill/>
-        </p:spPr>
-        <p:txBody>
-          <a:bodyPr wrap="square" lIns="0" rIns="0" tIns="0" bIns="0">
-            <a:spAutoFit/>
-          </a:bodyPr>
-          <a:lstStyle/>
-          <a:p>
-            <a:pPr algn="l"/>
-            <a:r>
-              <a:rPr sz="1300" b="1" i="0">
-                <a:solidFill>
-                  <a:srgbClr val="DC2626"/>
-                </a:solidFill>
-                <a:latin typeface="Calibri"/>
-              </a:rPr>
-              <a:t>UK / EMEA Alert</a:t>
-            </a:r>
-          </a:p>
-        </p:txBody>
-      </p:sp>
-      <p:sp>
-        <p:nvSpPr>
-          <p:cNvPr id="67" name="TextBox 66"/>
-          <p:cNvSpPr txBox="1"/>
-          <p:nvPr/>
-        </p:nvSpPr>
-        <p:spPr>
-          <a:xfrm>
-            <a:off x="6446520" y="4069080"/>
-            <a:ext cx="5212080" cy="429768"/>
-          </a:xfrm>
-          <a:prstGeom prst="rect">
-            <a:avLst/>
-          </a:prstGeom>
-          <a:noFill/>
-        </p:spPr>
-        <p:txBody>
-          <a:bodyPr wrap="square" lIns="0" rIns="0" tIns="0" bIns="0">
-            <a:spAutoFit/>
-          </a:bodyPr>
-          <a:lstStyle/>
-          <a:p>
-            <a:pPr algn="l"/>
-            <a:r>
-              <a:rPr sz="1100" b="0" i="0">
-                <a:solidFill>
-                  <a:srgbClr val="CADCFC"/>
-                </a:solidFill>
-                <a:latin typeface="Calibri"/>
-              </a:rPr>
-              <a:t>•  UK: 9.2% → 2.4% traffic share (-6.8pp) in one month</a:t>
-            </a:r>
-          </a:p>
-        </p:txBody>
-      </p:sp>
-      <p:sp>
-        <p:nvSpPr>
-          <p:cNvPr id="68" name="TextBox 67"/>
-          <p:cNvSpPr txBox="1"/>
-          <p:nvPr/>
-        </p:nvSpPr>
-        <p:spPr>
-          <a:xfrm>
-            <a:off x="6446520" y="4453128"/>
-            <a:ext cx="5212080" cy="429768"/>
-          </a:xfrm>
-          <a:prstGeom prst="rect">
-            <a:avLst/>
-          </a:prstGeom>
-          <a:noFill/>
-        </p:spPr>
-        <p:txBody>
-          <a:bodyPr wrap="square" lIns="0" rIns="0" tIns="0" bIns="0">
-            <a:spAutoFit/>
-          </a:bodyPr>
-          <a:lstStyle/>
-          <a:p>
-            <a:pPr algn="l"/>
-            <a:r>
-              <a:rPr sz="1100" b="0" i="0">
-                <a:solidFill>
-                  <a:srgbClr val="CADCFC"/>
-                </a:solidFill>
-                <a:latin typeface="Calibri"/>
-              </a:rPr>
-              <a:t>•  Germany: 3.7% → 1.9% (-1.8pp) — similar pattern</a:t>
-            </a:r>
-          </a:p>
-        </p:txBody>
-      </p:sp>
-      <p:sp>
-        <p:nvSpPr>
-          <p:cNvPr id="69" name="TextBox 68"/>
-          <p:cNvSpPr txBox="1"/>
-          <p:nvPr/>
-        </p:nvSpPr>
-        <p:spPr>
-          <a:xfrm>
-            <a:off x="6446520" y="4837176"/>
-            <a:ext cx="5212080" cy="429768"/>
-          </a:xfrm>
-          <a:prstGeom prst="rect">
-            <a:avLst/>
-          </a:prstGeom>
-          <a:noFill/>
-        </p:spPr>
-        <p:txBody>
-          <a:bodyPr wrap="square" lIns="0" rIns="0" tIns="0" bIns="0">
-            <a:spAutoFit/>
-          </a:bodyPr>
-          <a:lstStyle/>
-          <a:p>
-            <a:pPr algn="l"/>
-            <a:r>
-              <a:rPr sz="1100" b="0" i="0">
-                <a:solidFill>
-                  <a:srgbClr val="CADCFC"/>
-                </a:solidFill>
-                <a:latin typeface="Calibri"/>
-              </a:rPr>
-              <a:t>•  Combined EMEA drop: ~10pp of total site traffic</a:t>
-            </a:r>
-          </a:p>
-        </p:txBody>
-      </p:sp>
-      <p:sp>
-        <p:nvSpPr>
-          <p:cNvPr id="70" name="TextBox 69"/>
-          <p:cNvSpPr txBox="1"/>
-          <p:nvPr/>
-        </p:nvSpPr>
-        <p:spPr>
-          <a:xfrm>
-            <a:off x="6446520" y="5221224"/>
-            <a:ext cx="5212080" cy="429768"/>
-          </a:xfrm>
-          <a:prstGeom prst="rect">
-            <a:avLst/>
-          </a:prstGeom>
-          <a:noFill/>
-        </p:spPr>
-        <p:txBody>
-          <a:bodyPr wrap="square" lIns="0" rIns="0" tIns="0" bIns="0">
-            <a:spAutoFit/>
-          </a:bodyPr>
-          <a:lstStyle/>
-          <a:p>
-            <a:pPr algn="l"/>
-            <a:r>
-              <a:rPr sz="1100" b="0" i="0">
-                <a:solidFill>
-                  <a:srgbClr val="CADCFC"/>
-                </a:solidFill>
-                <a:latin typeface="Calibri"/>
-              </a:rPr>
-              <a:t>•  Possible causes: campaign ended, referral removed</a:t>
-            </a:r>
-          </a:p>
-        </p:txBody>
-      </p:sp>
-      <p:sp>
-        <p:nvSpPr>
-          <p:cNvPr id="71" name="TextBox 70"/>
-          <p:cNvSpPr txBox="1"/>
-          <p:nvPr/>
-        </p:nvSpPr>
-        <p:spPr>
-          <a:xfrm>
-            <a:off x="6446520" y="5605272"/>
-            <a:ext cx="5212080" cy="429768"/>
-          </a:xfrm>
-          <a:prstGeom prst="rect">
-            <a:avLst/>
-          </a:prstGeom>
-          <a:noFill/>
-        </p:spPr>
-        <p:txBody>
-          <a:bodyPr wrap="square" lIns="0" rIns="0" tIns="0" bIns="0">
-            <a:spAutoFit/>
-          </a:bodyPr>
-          <a:lstStyle/>
-          <a:p>
-            <a:pPr algn="l"/>
-            <a:r>
-              <a:rPr sz="1100" b="0" i="0">
-                <a:solidFill>
-                  <a:srgbClr val="CADCFC"/>
-                </a:solidFill>
-                <a:latin typeface="Calibri"/>
-              </a:rPr>
-              <a:t>•  → Audit EMEA campaign activity &amp; referral links NOW</a:t>
-            </a:r>
-          </a:p>
-        </p:txBody>
-      </p:sp>
-      <p:sp>
-        <p:nvSpPr>
-          <p:cNvPr id="72" name="TextBox 71"/>
-          <p:cNvSpPr txBox="1"/>
-          <p:nvPr/>
-        </p:nvSpPr>
-        <p:spPr>
-          <a:xfrm>
-            <a:off x="320040" y="6199632"/>
-            <a:ext cx="11430000" cy="384048"/>
-          </a:xfrm>
-          <a:prstGeom prst="rect">
-            <a:avLst/>
-          </a:prstGeom>
-          <a:noFill/>
-        </p:spPr>
-        <p:txBody>
-          <a:bodyPr wrap="square" lIns="0" rIns="0" tIns="0" bIns="0">
-            <a:spAutoFit/>
-          </a:bodyPr>
-          <a:lstStyle/>
-          <a:p>
-            <a:pPr algn="l"/>
-            <a:r>
-              <a:rPr sz="1100" b="0" i="1">
-                <a:solidFill>
-                  <a:srgbClr val="DC2626"/>
-                </a:solidFill>
-                <a:latin typeface="Calibri"/>
-              </a:rPr>
-              <a:t>UK + Germany combined dropped ~8.5pp in one month — EMEA traffic investigation is a top priority.</a:t>
             </a:r>
           </a:p>
         </p:txBody>

--- a/webanalytics/Solidigm_Analytics_Report_JanFeb_FY26.pptx
+++ b/webanalytics/Solidigm_Analytics_Report_JanFeb_FY26.pptx
@@ -3329,7 +3329,7 @@
                 </a:solidFill>
                 <a:latin typeface="Calibri"/>
               </a:rPr>
-              <a:t>818K+</a:t>
+              <a:t>774K+</a:t>
             </a:r>
           </a:p>
         </p:txBody>
@@ -3364,7 +3364,7 @@
                 </a:solidFill>
                 <a:latin typeface="Calibri"/>
               </a:rPr>
-              <a:t>Page Views Analyzed</a:t>
+              <a:t>Clean Page Views (spam removed)</a:t>
             </a:r>
           </a:p>
         </p:txBody>
@@ -3399,7 +3399,7 @@
                 </a:solidFill>
                 <a:latin typeface="Calibri"/>
               </a:rPr>
-              <a:t>~388K</a:t>
+              <a:t>~376K</a:t>
             </a:r>
           </a:p>
         </p:txBody>
@@ -3469,7 +3469,11 @@
                 </a:solidFill>
                 <a:latin typeface="Calibri"/>
               </a:rPr>
-              <a:t>11%</a:t>
+              <a:t>Spam</a:t>
+            </a:r>
+            <a:br/>
+            <a:r>
+              <a:t>Removed</a:t>
             </a:r>
           </a:p>
         </p:txBody>
@@ -3504,7 +3508,7 @@
                 </a:solidFill>
                 <a:latin typeface="Calibri"/>
               </a:rPr>
-              <a:t>Bot Traffic Removed</a:t>
+              <a:t>Bots &amp; Referrer Spam Filtered</a:t>
             </a:r>
           </a:p>
         </p:txBody>
@@ -3678,7 +3682,7 @@
                 </a:solidFill>
                 <a:latin typeface="Calibri"/>
               </a:rPr>
-              <a:t>USA dominates at 84% — but UK traffic collapsed -6.8pp and warrants immediate investigation</a:t>
+              <a:t>USA dominates at 83% — but UK traffic collapsed -6.9pp and warrants immediate investigation</a:t>
             </a:r>
           </a:p>
         </p:txBody>
@@ -4052,7 +4056,7 @@
                 </a:solidFill>
                 <a:latin typeface="Calibri"/>
               </a:rPr>
-              <a:t>73.4%</a:t>
+              <a:t>72.6%</a:t>
             </a:r>
           </a:p>
         </p:txBody>
@@ -4087,7 +4091,7 @@
                 </a:solidFill>
                 <a:latin typeface="Calibri"/>
               </a:rPr>
-              <a:t>84.4%</a:t>
+              <a:t>83.1%</a:t>
             </a:r>
           </a:p>
         </p:txBody>
@@ -4122,7 +4126,7 @@
                 </a:solidFill>
                 <a:latin typeface="Calibri"/>
               </a:rPr>
-              <a:t>+11.0pp</a:t>
+              <a:t>+10.5pp</a:t>
             </a:r>
           </a:p>
         </p:txBody>
@@ -4235,7 +4239,7 @@
                 </a:solidFill>
                 <a:latin typeface="Calibri"/>
               </a:rPr>
-              <a:t> 9.2%</a:t>
+              <a:t> 9.4%</a:t>
             </a:r>
           </a:p>
         </p:txBody>
@@ -4270,7 +4274,7 @@
                 </a:solidFill>
                 <a:latin typeface="Calibri"/>
               </a:rPr>
-              <a:t> 2.4%</a:t>
+              <a:t> 2.5%</a:t>
             </a:r>
           </a:p>
         </p:txBody>
@@ -4305,7 +4309,7 @@
                 </a:solidFill>
                 <a:latin typeface="Calibri"/>
               </a:rPr>
-              <a:t> -6.8pp</a:t>
+              <a:t> -6.9pp</a:t>
             </a:r>
           </a:p>
         </p:txBody>
@@ -4418,7 +4422,7 @@
                 </a:solidFill>
                 <a:latin typeface="Calibri"/>
               </a:rPr>
-              <a:t> 3.7%</a:t>
+              <a:t> 3.9%</a:t>
             </a:r>
           </a:p>
         </p:txBody>
@@ -4453,7 +4457,7 @@
                 </a:solidFill>
                 <a:latin typeface="Calibri"/>
               </a:rPr>
-              <a:t> 1.9%</a:t>
+              <a:t> 2.0%</a:t>
             </a:r>
           </a:p>
         </p:txBody>
@@ -4488,7 +4492,7 @@
                 </a:solidFill>
                 <a:latin typeface="Calibri"/>
               </a:rPr>
-              <a:t> -1.8pp</a:t>
+              <a:t> -1.9pp</a:t>
             </a:r>
           </a:p>
         </p:txBody>
@@ -4601,7 +4605,7 @@
                 </a:solidFill>
                 <a:latin typeface="Calibri"/>
               </a:rPr>
-              <a:t> 1.3%</a:t>
+              <a:t> 1.4%</a:t>
             </a:r>
           </a:p>
         </p:txBody>
@@ -4636,7 +4640,7 @@
                 </a:solidFill>
                 <a:latin typeface="Calibri"/>
               </a:rPr>
-              <a:t> 1.5%</a:t>
+              <a:t> 1.7%</a:t>
             </a:r>
           </a:p>
         </p:txBody>
@@ -4671,7 +4675,7 @@
                 </a:solidFill>
                 <a:latin typeface="Calibri"/>
               </a:rPr>
-              <a:t> +0.2pp</a:t>
+              <a:t> +0.3pp</a:t>
             </a:r>
           </a:p>
         </p:txBody>
@@ -5002,7 +5006,7 @@
                 </a:solidFill>
                 <a:latin typeface="Calibri"/>
               </a:rPr>
-              <a:t> 0.7%</a:t>
+              <a:t> 0.8%</a:t>
             </a:r>
           </a:p>
         </p:txBody>
@@ -5037,7 +5041,7 @@
                 </a:solidFill>
                 <a:latin typeface="Calibri"/>
               </a:rPr>
-              <a:t> -0.4pp</a:t>
+              <a:t> -0.3pp</a:t>
             </a:r>
           </a:p>
         </p:txBody>
@@ -5150,7 +5154,7 @@
                 </a:solidFill>
                 <a:latin typeface="Calibri"/>
               </a:rPr>
-              <a:t> 0.9%</a:t>
+              <a:t> 1.0%</a:t>
             </a:r>
           </a:p>
         </p:txBody>
@@ -5185,7 +5189,7 @@
                 </a:solidFill>
                 <a:latin typeface="Calibri"/>
               </a:rPr>
-              <a:t> 0.7%</a:t>
+              <a:t> 0.8%</a:t>
             </a:r>
           </a:p>
         </p:txBody>
@@ -5594,7 +5598,7 @@
                 </a:solidFill>
                 <a:latin typeface="Calibri"/>
               </a:rPr>
-              <a:t>73.4%</a:t>
+              <a:t>72.6%</a:t>
             </a:r>
           </a:p>
         </p:txBody>
@@ -5699,7 +5703,7 @@
                 </a:solidFill>
                 <a:latin typeface="Calibri"/>
               </a:rPr>
-              <a:t>84.4%</a:t>
+              <a:t>83.1%</a:t>
             </a:r>
           </a:p>
         </p:txBody>
@@ -5734,7 +5738,7 @@
                 </a:solidFill>
                 <a:latin typeface="Calibri"/>
               </a:rPr>
-              <a:t>+11pp jump — other markets shrank</a:t>
+              <a:t>+10.5pp jump — other markets shrank</a:t>
             </a:r>
           </a:p>
         </p:txBody>
@@ -5769,7 +5773,7 @@
                 </a:solidFill>
                 <a:latin typeface="Calibri"/>
               </a:rPr>
-              <a:t>US PPV</a:t>
+              <a:t>US PPV (Feb)</a:t>
             </a:r>
           </a:p>
         </p:txBody>
@@ -5804,7 +5808,7 @@
                 </a:solidFill>
                 <a:latin typeface="Calibri"/>
               </a:rPr>
-              <a:t>2.15</a:t>
+              <a:t>1.85</a:t>
             </a:r>
           </a:p>
         </p:txBody>
@@ -5839,7 +5843,7 @@
                 </a:solidFill>
                 <a:latin typeface="Calibri"/>
               </a:rPr>
-              <a:t>Slightly below site average (2.03)</a:t>
+              <a:t>Slightly below site average (1.95)</a:t>
             </a:r>
           </a:p>
         </p:txBody>
@@ -5995,7 +5999,7 @@
                 </a:solidFill>
                 <a:latin typeface="Calibri"/>
               </a:rPr>
-              <a:t>•  UK: 9.2% → 2.4% traffic share (-6.8pp) in one month</a:t>
+              <a:t>•  UK: 9.4% → 2.5% traffic share (-6.9pp) in one month</a:t>
             </a:r>
           </a:p>
         </p:txBody>
@@ -6030,7 +6034,7 @@
                 </a:solidFill>
                 <a:latin typeface="Calibri"/>
               </a:rPr>
-              <a:t>•  Germany: 3.7% → 1.9% (-1.8pp) — similar pattern</a:t>
+              <a:t>•  Germany: 3.9% → 2.0% (-1.9pp) — similar pattern</a:t>
             </a:r>
           </a:p>
         </p:txBody>
@@ -6170,7 +6174,7 @@
                 </a:solidFill>
                 <a:latin typeface="Calibri"/>
               </a:rPr>
-              <a:t>UK + Germany combined dropped ~8.5pp in one month — EMEA traffic investigation is a top priority.</a:t>
+              <a:t>UK + Germany combined dropped ~8.8pp in one month — EMEA traffic investigation is a top priority.</a:t>
             </a:r>
           </a:p>
         </p:txBody>
@@ -6465,7 +6469,7 @@
                 </a:solidFill>
                 <a:latin typeface="Calibri"/>
               </a:rPr>
-              <a:t>64.3%   bounce on 1st page</a:t>
+              <a:t>65.6%   bounce on 1st page</a:t>
             </a:r>
           </a:p>
         </p:txBody>
@@ -6500,7 +6504,7 @@
                 </a:solidFill>
                 <a:latin typeface="Calibri"/>
               </a:rPr>
-              <a:t>18.5%   read 2 pages</a:t>
+              <a:t>18.4%   read 2 pages</a:t>
             </a:r>
           </a:p>
         </p:txBody>
@@ -6535,7 +6539,7 @@
                 </a:solidFill>
                 <a:latin typeface="Calibri"/>
               </a:rPr>
-              <a:t> 6.9%   read 3 pages</a:t>
+              <a:t> 6.7%   read 3 pages</a:t>
             </a:r>
           </a:p>
         </p:txBody>
@@ -6570,7 +6574,7 @@
                 </a:solidFill>
                 <a:latin typeface="Calibri"/>
               </a:rPr>
-              <a:t> 5.4%   read 4-5 pages</a:t>
+              <a:t> 5.1%   read 4-5 pages</a:t>
             </a:r>
           </a:p>
         </p:txBody>
@@ -6605,7 +6609,7 @@
                 </a:solidFill>
                 <a:latin typeface="Calibri"/>
               </a:rPr>
-              <a:t> 3.3%   read 6-10 pages</a:t>
+              <a:t> 2.9%   read 6-10 pages</a:t>
             </a:r>
           </a:p>
         </p:txBody>
@@ -6640,7 +6644,7 @@
                 </a:solidFill>
                 <a:latin typeface="Calibri"/>
               </a:rPr>
-              <a:t> 1.5%   read 11+ pages</a:t>
+              <a:t> 1.2%   read 11+ pages</a:t>
             </a:r>
           </a:p>
         </p:txBody>
@@ -6675,7 +6679,7 @@
                 </a:solidFill>
                 <a:latin typeface="Calibri"/>
               </a:rPr>
-              <a:t>→ 35.7% of visitors genuinely engaged</a:t>
+              <a:t>→ 34.4% of visitors genuinely engaged</a:t>
             </a:r>
           </a:p>
         </p:txBody>
@@ -8485,7 +8489,7 @@
                 </a:solidFill>
                 <a:latin typeface="Calibri"/>
               </a:rPr>
-              <a:t>Mobile is now 52.6% of traffic (majority!) but lags desktop in PPV (1.79 vs 2.17). Speed test + CTA audit.</a:t>
+              <a:t>Non-Paid visitors are 52.8% Mobile (majority!) but Mobile BR jumped to 72.1% in Feb. Speed test + CTA audit needed.</a:t>
             </a:r>
           </a:p>
         </p:txBody>
@@ -8711,7 +8715,7 @@
                 </a:solidFill>
                 <a:latin typeface="Calibri"/>
               </a:rPr>
-              <a:t>Feb surged +414% on solidigm.com — but engagement rate dropped to 39.5%. Add video, social proof, and CTAs.</a:t>
+              <a:t>our-story.html surged to 23K PVs (+4,458%) — but multi-page rate dropped to 33.3%. Add video, social proof, and CTAs.</a:t>
             </a:r>
           </a:p>
         </p:txBody>
@@ -8937,7 +8941,7 @@
                 </a:solidFill>
                 <a:latin typeface="Calibri"/>
               </a:rPr>
-              <a:t>UK dropped from 9.2% to 2.4%, Germany 3.7% to 1.9% — combined -8.5pp in one month. Audit campaigns &amp; referrals.</a:t>
+              <a:t>UK dropped from 9.4% to 2.5%, Germany 3.9% to 2.0% — combined -8.8pp in one month. Audit campaigns &amp; referrals.</a:t>
             </a:r>
           </a:p>
         </p:txBody>
@@ -9163,7 +9167,7 @@
                 </a:solidFill>
                 <a:latin typeface="Calibri"/>
               </a:rPr>
-              <a:t>Direct dropped -13.3pp in Feb (60.8% → 47.5%). Add UTM tags to all campaigns to reduce dark social blindspots.</a:t>
+              <a:t>Direct dropped -11.3pp in Feb (62.8% → 51.5%). Add UTM tags to all campaigns to reduce dark social blindspots.</a:t>
             </a:r>
           </a:p>
         </p:txBody>
@@ -9575,7 +9579,7 @@
                 </a:solidFill>
                 <a:latin typeface="Calibri"/>
               </a:rPr>
-              <a:t>→  Audit EMEA campaigns — UK dropped -6.8pp in Feb</a:t>
+              <a:t>→  Audit EMEA campaigns — UK dropped -6.9pp in Feb</a:t>
             </a:r>
           </a:p>
         </p:txBody>
@@ -9610,7 +9614,7 @@
                 </a:solidFill>
                 <a:latin typeface="Calibri"/>
               </a:rPr>
-              <a:t>→  Filter bot traffic in your analytics dashboard</a:t>
+              <a:t>→  Block spam referrers in analytics (30K+ junk PVs removed)</a:t>
             </a:r>
           </a:p>
         </p:txBody>
@@ -10591,7 +10595,7 @@
                 </a:solidFill>
                 <a:latin typeface="Calibri"/>
               </a:rPr>
-              <a:t>Traffic stayed flat — by design</a:t>
+              <a:t>Traffic dipped after removing referrer spam</a:t>
             </a:r>
           </a:p>
         </p:txBody>
@@ -10626,7 +10630,7 @@
                 </a:solidFill>
                 <a:latin typeface="Calibri"/>
               </a:rPr>
-              <a:t>Total PVs dipped -6.6% (423K→395K) but avg daily PVs actually grew +3.4% after adjusting for Feb's 3 fewer days. Non-Paid traffic held at 84% share; Paid nearly doubled its share 9.9%→15.8%.</a:t>
+              <a:t>After removing bots and spam referrers, total PVs are 409K (Jan) → 365K (Feb), -10.9%. Avg daily PVs declined just -1.4% once Feb's shorter month is adjusted. Paid share jumped 10.2% → 17.1%.</a:t>
             </a:r>
           </a:p>
         </p:txBody>
@@ -10747,7 +10751,7 @@
                 </a:solidFill>
                 <a:latin typeface="Calibri"/>
               </a:rPr>
-              <a:t>Our Story page broke out — massively</a:t>
+              <a:t>Our Story page broke out — organically</a:t>
             </a:r>
           </a:p>
         </p:txBody>
@@ -10782,7 +10786,7 @@
                 </a:solidFill>
                 <a:latin typeface="Calibri"/>
               </a:rPr>
-              <a:t>our-story.html surged from 514 to 31,990 PVs (+6,122%) in Feb — now the #4 page on the site. 89% of visits were Non-Paid, confirming organic brand curiosity. Visitors flow directly into product pages.</a:t>
+              <a:t>our-story.html surged from 505 to 23,017 PVs (+4,458%) in Feb — now the #4 page on the site. 85% of visits were Non-Paid (82.8% Direct), confirming organic brand curiosity, not campaign-driven.</a:t>
             </a:r>
           </a:p>
         </p:txBody>
@@ -10938,7 +10942,7 @@
                 </a:solidFill>
                 <a:latin typeface="Calibri"/>
               </a:rPr>
-              <a:t>Overall bounce rose +3.3pp to 64.3%. Paid-Display BR is stuck at ~70% with no improvement. Non-Paid BR climbed +3.8pp. UK traffic collapsed from 9.2%→2.4% — an EMEA issue requiring urgent investigation.</a:t>
+              <a:t>Overall bounce rose +3.9pp to 65.6%. Paid-Display BR is stuck at ~70% with no improvement. Non-Paid BR climbed +4.5pp. UK traffic collapsed from 9.4%→2.5% — an EMEA issue requiring urgent investigation.</a:t>
             </a:r>
           </a:p>
         </p:txBody>
@@ -11823,7 +11827,7 @@
                 </a:solidFill>
                 <a:latin typeface="Calibri"/>
               </a:rPr>
-              <a:t>39.5% multi-page rate — add video + CTAs</a:t>
+              <a:t>33.3% multi-page rate — add video + CTAs</a:t>
             </a:r>
           </a:p>
         </p:txBody>
@@ -12014,7 +12018,7 @@
                 </a:solidFill>
                 <a:latin typeface="Calibri"/>
               </a:rPr>
-              <a:t>UK -6.8pp + Germany -1.8pp in one month</a:t>
+              <a:t>UK -6.9pp + Germany -1.9pp in one month</a:t>
             </a:r>
           </a:p>
         </p:txBody>
@@ -12205,7 +12209,7 @@
                 </a:solidFill>
                 <a:latin typeface="Calibri"/>
               </a:rPr>
-              <a:t>Direct dropped -13.3pp — dark social blindspot</a:t>
+              <a:t>Direct dropped -11.3pp — dark social blindspot</a:t>
             </a:r>
           </a:p>
         </p:txBody>
@@ -12240,7 +12244,7 @@
                 </a:solidFill>
                 <a:latin typeface="Calibri"/>
               </a:rPr>
-              <a:t>Data filtered to www.solidigm.com only  |  Bots removed  |  Paid = Paid-Display channel</a:t>
+              <a:t>Data filtered to www.solidigm.com only  |  Bots &amp; referrer spam removed  |  Paid = Paid-Display channel</a:t>
             </a:r>
           </a:p>
         </p:txBody>
@@ -12379,7 +12383,7 @@
                 </a:solidFill>
                 <a:latin typeface="Calibri"/>
               </a:rPr>
-              <a:t>Paid-Display spend grew +49% MoM — but Bounce Rate did not improve. Root-cause diagnosis across 4 sub-channels.</a:t>
+              <a:t>Paid-Display spend grew +67% MoM (10.2%→17.1% share) — but Bounce Rate did not improve. Root-cause diagnosis across 4 sub-channels. Paid numbers unaffected by spam removal.</a:t>
             </a:r>
           </a:p>
         </p:txBody>
@@ -15825,7 +15829,7 @@
                 </a:solidFill>
                 <a:latin typeface="Calibri"/>
               </a:rPr>
-              <a:t>Jan FY26  vs  Feb FY26 — cleaned data (bots &amp; junk referrers removed)</a:t>
+              <a:t>Jan FY26  vs  Feb FY26 — cleaned data (bots, junk &amp; spam referrers removed)</a:t>
             </a:r>
           </a:p>
         </p:txBody>
@@ -16137,7 +16141,7 @@
                 </a:solidFill>
                 <a:latin typeface="Calibri"/>
               </a:rPr>
-              <a:t> 9.9%</a:t>
+              <a:t>10.2%</a:t>
             </a:r>
           </a:p>
         </p:txBody>
@@ -16172,7 +16176,7 @@
                 </a:solidFill>
                 <a:latin typeface="Calibri"/>
               </a:rPr>
-              <a:t>15.8%</a:t>
+              <a:t>17.1%</a:t>
             </a:r>
           </a:p>
         </p:txBody>
@@ -16207,7 +16211,7 @@
                 </a:solidFill>
                 <a:latin typeface="Calibri"/>
               </a:rPr>
-              <a:t>+5.9pp</a:t>
+              <a:t>+6.9pp</a:t>
             </a:r>
           </a:p>
         </p:txBody>
@@ -17041,7 +17045,7 @@
                 </a:solidFill>
                 <a:latin typeface="Calibri"/>
               </a:rPr>
-              <a:t>90.1%</a:t>
+              <a:t>89.8%</a:t>
             </a:r>
           </a:p>
         </p:txBody>
@@ -17076,7 +17080,7 @@
                 </a:solidFill>
                 <a:latin typeface="Calibri"/>
               </a:rPr>
-              <a:t>84.2%</a:t>
+              <a:t>82.9%</a:t>
             </a:r>
           </a:p>
         </p:txBody>
@@ -17111,7 +17115,7 @@
                 </a:solidFill>
                 <a:latin typeface="Calibri"/>
               </a:rPr>
-              <a:t>-5.9pp</a:t>
+              <a:t>-6.9pp</a:t>
             </a:r>
           </a:p>
         </p:txBody>
@@ -17267,7 +17271,7 @@
                 </a:solidFill>
                 <a:latin typeface="Calibri"/>
               </a:rPr>
-              <a:t>172,118</a:t>
+              <a:t>167,753</a:t>
             </a:r>
           </a:p>
         </p:txBody>
@@ -17302,7 +17306,7 @@
                 </a:solidFill>
                 <a:latin typeface="Calibri"/>
               </a:rPr>
-              <a:t>164,380</a:t>
+              <a:t>156,531</a:t>
             </a:r>
           </a:p>
         </p:txBody>
@@ -17337,7 +17341,7 @@
                 </a:solidFill>
                 <a:latin typeface="Calibri"/>
               </a:rPr>
-              <a:t>-4.5%</a:t>
+              <a:t>-6.7%</a:t>
             </a:r>
           </a:p>
         </p:txBody>
@@ -17493,7 +17497,7 @@
                 </a:solidFill>
                 <a:latin typeface="Calibri"/>
               </a:rPr>
-              <a:t>60.8%</a:t>
+              <a:t>61.6%</a:t>
             </a:r>
           </a:p>
         </p:txBody>
@@ -17528,7 +17532,7 @@
                 </a:solidFill>
                 <a:latin typeface="Calibri"/>
               </a:rPr>
-              <a:t>64.6%</a:t>
+              <a:t>66.1%</a:t>
             </a:r>
           </a:p>
         </p:txBody>
@@ -17563,7 +17567,7 @@
                 </a:solidFill>
                 <a:latin typeface="Calibri"/>
               </a:rPr>
-              <a:t>+3.8pp</a:t>
+              <a:t>+4.5pp</a:t>
             </a:r>
           </a:p>
         </p:txBody>
@@ -17719,7 +17723,7 @@
                 </a:solidFill>
                 <a:latin typeface="Calibri"/>
               </a:rPr>
-              <a:t>2.21</a:t>
+              <a:t>2.19</a:t>
             </a:r>
           </a:p>
         </p:txBody>
@@ -17754,7 +17758,7 @@
                 </a:solidFill>
                 <a:latin typeface="Calibri"/>
               </a:rPr>
-              <a:t>2.02</a:t>
+              <a:t>1.93</a:t>
             </a:r>
           </a:p>
         </p:txBody>
@@ -17789,7 +17793,7 @@
                 </a:solidFill>
                 <a:latin typeface="Calibri"/>
               </a:rPr>
-              <a:t>-0.19</a:t>
+              <a:t>-0.26</a:t>
             </a:r>
           </a:p>
         </p:txBody>
@@ -18104,7 +18108,7 @@
                 </a:solidFill>
                 <a:latin typeface="Calibri"/>
               </a:rPr>
-              <a:t>★ Avg daily PVs: Paid Jan 1,353 → Feb 2,230 (+64.8%) |  Non-Paid Jan 12,293 → Feb 11,884 (-3.3%)  |  solidigm.com only</a:t>
+              <a:t>★ Avg daily PVs: Paid Jan 1,353 → Feb 2,230 (+64.8%) |  Non-Paid Jan 11,856 → Feb 10,796 (-8.9%)  |  solidigm.com only — spam removed</a:t>
             </a:r>
           </a:p>
         </p:txBody>
@@ -18521,7 +18525,7 @@
                 </a:solidFill>
                 <a:latin typeface="Calibri"/>
               </a:rPr>
-              <a:t>423,020</a:t>
+              <a:t>409,461</a:t>
             </a:r>
           </a:p>
         </p:txBody>
@@ -18556,7 +18560,7 @@
                 </a:solidFill>
                 <a:latin typeface="Calibri"/>
               </a:rPr>
-              <a:t>395,182</a:t>
+              <a:t>364,705</a:t>
             </a:r>
           </a:p>
         </p:txBody>
@@ -18591,7 +18595,7 @@
                 </a:solidFill>
                 <a:latin typeface="Calibri"/>
               </a:rPr>
-              <a:t>-6.6%</a:t>
+              <a:t>-10.9%</a:t>
             </a:r>
           </a:p>
         </p:txBody>
@@ -18747,7 +18751,7 @@
                 </a:solidFill>
                 <a:latin typeface="Calibri"/>
               </a:rPr>
-              <a:t>193,070</a:t>
+              <a:t>188,781</a:t>
             </a:r>
           </a:p>
         </p:txBody>
@@ -18782,7 +18786,7 @@
                 </a:solidFill>
                 <a:latin typeface="Calibri"/>
               </a:rPr>
-              <a:t>194,667</a:t>
+              <a:t>187,005</a:t>
             </a:r>
           </a:p>
         </p:txBody>
@@ -18813,11 +18817,11 @@
             <a:r>
               <a:rPr sz="1400" b="1" i="0">
                 <a:solidFill>
-                  <a:srgbClr val="059669"/>
-                </a:solidFill>
-                <a:latin typeface="Calibri"/>
-              </a:rPr>
-              <a:t>+0.8%</a:t>
+                  <a:srgbClr val="DC2626"/>
+                </a:solidFill>
+                <a:latin typeface="Calibri"/>
+              </a:rPr>
+              <a:t>-0.9%</a:t>
             </a:r>
           </a:p>
         </p:txBody>
@@ -18973,7 +18977,7 @@
                 </a:solidFill>
                 <a:latin typeface="Calibri"/>
               </a:rPr>
-              <a:t>2.19</a:t>
+              <a:t>2.17</a:t>
             </a:r>
           </a:p>
         </p:txBody>
@@ -19008,7 +19012,7 @@
                 </a:solidFill>
                 <a:latin typeface="Calibri"/>
               </a:rPr>
-              <a:t>2.03</a:t>
+              <a:t>1.95</a:t>
             </a:r>
           </a:p>
         </p:txBody>
@@ -19039,11 +19043,11 @@
             <a:r>
               <a:rPr sz="1400" b="1" i="0">
                 <a:solidFill>
-                  <a:srgbClr val="D97706"/>
-                </a:solidFill>
-                <a:latin typeface="Calibri"/>
-              </a:rPr>
-              <a:t>-0.16</a:t>
+                  <a:srgbClr val="DC2626"/>
+                </a:solidFill>
+                <a:latin typeface="Calibri"/>
+              </a:rPr>
+              <a:t>-0.22</a:t>
             </a:r>
           </a:p>
         </p:txBody>
@@ -19199,7 +19203,7 @@
                 </a:solidFill>
                 <a:latin typeface="Calibri"/>
               </a:rPr>
-              <a:t>61.0%</a:t>
+              <a:t>61.7%</a:t>
             </a:r>
           </a:p>
         </p:txBody>
@@ -19234,7 +19238,7 @@
                 </a:solidFill>
                 <a:latin typeface="Calibri"/>
               </a:rPr>
-              <a:t>64.3%</a:t>
+              <a:t>65.6%</a:t>
             </a:r>
           </a:p>
         </p:txBody>
@@ -19269,7 +19273,7 @@
                 </a:solidFill>
                 <a:latin typeface="Calibri"/>
               </a:rPr>
-              <a:t>+3.3pp</a:t>
+              <a:t>+3.9pp</a:t>
             </a:r>
           </a:p>
         </p:txBody>
@@ -19425,7 +19429,7 @@
                 </a:solidFill>
                 <a:latin typeface="Calibri"/>
               </a:rPr>
-              <a:t>14,666</a:t>
+              <a:t>13,821</a:t>
             </a:r>
           </a:p>
         </p:txBody>
@@ -19460,7 +19464,7 @@
                 </a:solidFill>
                 <a:latin typeface="Calibri"/>
               </a:rPr>
-              <a:t>13,222</a:t>
+              <a:t>11,246</a:t>
             </a:r>
           </a:p>
         </p:txBody>
@@ -19495,7 +19499,7 @@
                 </a:solidFill>
                 <a:latin typeface="Calibri"/>
               </a:rPr>
-              <a:t>-9.8%</a:t>
+              <a:t>-18.6%</a:t>
             </a:r>
           </a:p>
         </p:txBody>
@@ -19651,7 +19655,7 @@
                 </a:solidFill>
                 <a:latin typeface="Calibri"/>
               </a:rPr>
-              <a:t>7.6%</a:t>
+              <a:t>7.3%</a:t>
             </a:r>
           </a:p>
         </p:txBody>
@@ -19686,7 +19690,7 @@
                 </a:solidFill>
                 <a:latin typeface="Calibri"/>
               </a:rPr>
-              <a:t>6.8%</a:t>
+              <a:t>6.0%</a:t>
             </a:r>
           </a:p>
         </p:txBody>
@@ -19721,7 +19725,7 @@
                 </a:solidFill>
                 <a:latin typeface="Calibri"/>
               </a:rPr>
-              <a:t>-0.8pp</a:t>
+              <a:t>-1.3pp</a:t>
             </a:r>
           </a:p>
         </p:txBody>
@@ -19860,7 +19864,7 @@
                 </a:solidFill>
                 <a:latin typeface="Calibri"/>
               </a:rPr>
-              <a:t>Normalized daily averages show +3.4% growth despite Feb having 3 fewer calendar days</a:t>
+              <a:t>Spam-clean: avg daily PVs -1.4% MoM  |  Referral growth was spam-inflated; real Non-Paid share 82.9%</a:t>
             </a:r>
           </a:p>
         </p:txBody>
@@ -20191,7 +20195,7 @@
                 </a:solidFill>
                 <a:latin typeface="Calibri"/>
               </a:rPr>
-              <a:t>90.1%</a:t>
+              <a:t>89.8%</a:t>
             </a:r>
           </a:p>
         </p:txBody>
@@ -20226,7 +20230,7 @@
                 </a:solidFill>
                 <a:latin typeface="Calibri"/>
               </a:rPr>
-              <a:t>84.2%</a:t>
+              <a:t>82.9%</a:t>
             </a:r>
           </a:p>
         </p:txBody>
@@ -20261,7 +20265,7 @@
                 </a:solidFill>
                 <a:latin typeface="Calibri"/>
               </a:rPr>
-              <a:t>-5.9</a:t>
+              <a:t>-6.9</a:t>
             </a:r>
           </a:p>
         </p:txBody>
@@ -20374,7 +20378,7 @@
                 </a:solidFill>
                 <a:latin typeface="Calibri"/>
               </a:rPr>
-              <a:t>60.8%</a:t>
+              <a:t>62.8%</a:t>
             </a:r>
           </a:p>
         </p:txBody>
@@ -20409,7 +20413,7 @@
                 </a:solidFill>
                 <a:latin typeface="Calibri"/>
               </a:rPr>
-              <a:t>47.5%</a:t>
+              <a:t>51.5%</a:t>
             </a:r>
           </a:p>
         </p:txBody>
@@ -20444,7 +20448,7 @@
                 </a:solidFill>
                 <a:latin typeface="Calibri"/>
               </a:rPr>
-              <a:t>-13.3</a:t>
+              <a:t>-11.3</a:t>
             </a:r>
           </a:p>
         </p:txBody>
@@ -20557,7 +20561,7 @@
                 </a:solidFill>
                 <a:latin typeface="Calibri"/>
               </a:rPr>
-              <a:t>13.9%</a:t>
+              <a:t>14.4%</a:t>
             </a:r>
           </a:p>
         </p:txBody>
@@ -20592,7 +20596,7 @@
                 </a:solidFill>
                 <a:latin typeface="Calibri"/>
               </a:rPr>
-              <a:t>13.1%</a:t>
+              <a:t>14.2%</a:t>
             </a:r>
           </a:p>
         </p:txBody>
@@ -20627,7 +20631,7 @@
                 </a:solidFill>
                 <a:latin typeface="Calibri"/>
               </a:rPr>
-              <a:t>-0.8</a:t>
+              <a:t>-0.2</a:t>
             </a:r>
           </a:p>
         </p:txBody>
@@ -20740,7 +20744,7 @@
                 </a:solidFill>
                 <a:latin typeface="Calibri"/>
               </a:rPr>
-              <a:t>11.7%</a:t>
+              <a:t> 8.8%</a:t>
             </a:r>
           </a:p>
         </p:txBody>
@@ -20775,7 +20779,7 @@
                 </a:solidFill>
                 <a:latin typeface="Calibri"/>
               </a:rPr>
-              <a:t>21.3%</a:t>
+              <a:t>14.7%</a:t>
             </a:r>
           </a:p>
         </p:txBody>
@@ -20810,7 +20814,7 @@
                 </a:solidFill>
                 <a:latin typeface="Calibri"/>
               </a:rPr>
-              <a:t>+9.6</a:t>
+              <a:t>+5.9</a:t>
             </a:r>
           </a:p>
         </p:txBody>
@@ -20923,7 +20927,7 @@
                 </a:solidFill>
                 <a:latin typeface="Calibri"/>
               </a:rPr>
-              <a:t> 3.7%</a:t>
+              <a:t> 3.8%</a:t>
             </a:r>
           </a:p>
         </p:txBody>
@@ -20958,7 +20962,7 @@
                 </a:solidFill>
                 <a:latin typeface="Calibri"/>
               </a:rPr>
-              <a:t> 2.3%</a:t>
+              <a:t> 2.5%</a:t>
             </a:r>
           </a:p>
         </p:txBody>
@@ -20993,7 +20997,7 @@
                 </a:solidFill>
                 <a:latin typeface="Calibri"/>
               </a:rPr>
-              <a:t>-1.4</a:t>
+              <a:t>-1.3</a:t>
             </a:r>
           </a:p>
         </p:txBody>
@@ -21106,7 +21110,7 @@
                 </a:solidFill>
                 <a:latin typeface="Calibri"/>
               </a:rPr>
-              <a:t> 9.9%</a:t>
+              <a:t>10.2%</a:t>
             </a:r>
           </a:p>
         </p:txBody>
@@ -21141,7 +21145,7 @@
                 </a:solidFill>
                 <a:latin typeface="Calibri"/>
               </a:rPr>
-              <a:t>15.8%</a:t>
+              <a:t>17.1%</a:t>
             </a:r>
           </a:p>
         </p:txBody>
@@ -21176,7 +21180,7 @@
                 </a:solidFill>
                 <a:latin typeface="Calibri"/>
               </a:rPr>
-              <a:t>+5.9</a:t>
+              <a:t>+6.9</a:t>
             </a:r>
           </a:p>
         </p:txBody>
@@ -21289,7 +21293,7 @@
                 </a:solidFill>
                 <a:latin typeface="Calibri"/>
               </a:rPr>
-              <a:t> 9.9%</a:t>
+              <a:t>10.2%</a:t>
             </a:r>
           </a:p>
         </p:txBody>
@@ -21324,7 +21328,7 @@
                 </a:solidFill>
                 <a:latin typeface="Calibri"/>
               </a:rPr>
-              <a:t>15.8%</a:t>
+              <a:t>17.1%</a:t>
             </a:r>
           </a:p>
         </p:txBody>
@@ -21359,7 +21363,7 @@
                 </a:solidFill>
                 <a:latin typeface="Calibri"/>
               </a:rPr>
-              <a:t>+5.9</a:t>
+              <a:t>+6.9</a:t>
             </a:r>
           </a:p>
         </p:txBody>
@@ -21640,7 +21644,7 @@
                 </a:solidFill>
                 <a:latin typeface="Calibri"/>
               </a:rPr>
-              <a:t>-3.3%</a:t>
+              <a:t>-8.9%</a:t>
             </a:r>
           </a:p>
         </p:txBody>
@@ -21679,7 +21683,7 @@
             </a:r>
             <a:br/>
             <a:r>
-              <a:t>declined MoM</a:t>
+              <a:t>declined MoM (spam removed)</a:t>
             </a:r>
           </a:p>
         </p:txBody>
@@ -21800,7 +21804,7 @@
                 </a:solidFill>
                 <a:latin typeface="Calibri"/>
               </a:rPr>
-              <a:t>+9.6pp</a:t>
+              <a:t>+5.9pp</a:t>
             </a:r>
           </a:p>
         </p:txBody>
@@ -21839,7 +21843,7 @@
             </a:r>
             <a:br/>
             <a:r>
-              <a:t>(non-paid: new partners)</a:t>
+              <a:t>(non-paid, spam-cleaned)</a:t>
             </a:r>
           </a:p>
         </p:txBody>
@@ -21902,7 +21906,7 @@
             <a:avLst/>
           </a:prstGeom>
           <a:solidFill>
-            <a:srgbClr val="059669"/>
+            <a:srgbClr val="D97706"/>
           </a:solidFill>
           <a:ln>
             <a:noFill/>
@@ -21956,11 +21960,11 @@
             <a:r>
               <a:rPr sz="3600" b="1" i="0">
                 <a:solidFill>
-                  <a:srgbClr val="059669"/>
-                </a:solidFill>
-                <a:latin typeface="Calibri"/>
-              </a:rPr>
-              <a:t>+3.4%</a:t>
+                  <a:srgbClr val="D97706"/>
+                </a:solidFill>
+                <a:latin typeface="Calibri"/>
+              </a:rPr>
+              <a:t>-1.4%</a:t>
             </a:r>
           </a:p>
         </p:txBody>
@@ -21999,7 +22003,7 @@
             </a:r>
             <a:br/>
             <a:r>
-              <a:t>grew MoM (day-normalized)</a:t>
+              <a:t>declined MoM (spam-clean)</a:t>
             </a:r>
           </a:p>
         </p:txBody>
@@ -22824,7 +22828,7 @@
                 </a:solidFill>
                 <a:latin typeface="Calibri"/>
               </a:rPr>
-              <a:t>179,592</a:t>
+              <a:t>166,389</a:t>
             </a:r>
           </a:p>
         </p:txBody>
@@ -22894,7 +22898,7 @@
                 </a:solidFill>
                 <a:latin typeface="Calibri"/>
               </a:rPr>
-              <a:t>134,273</a:t>
+              <a:t>102,146</a:t>
             </a:r>
           </a:p>
         </p:txBody>
@@ -22929,7 +22933,7 @@
                 </a:solidFill>
                 <a:latin typeface="Calibri"/>
               </a:rPr>
-              <a:t>-12.7%</a:t>
+              <a:t>-25.1%</a:t>
             </a:r>
           </a:p>
         </p:txBody>
@@ -23241,7 +23245,7 @@
                 </a:solidFill>
                 <a:latin typeface="Calibri"/>
               </a:rPr>
-              <a:t> 86,742</a:t>
+              <a:t> 86,510</a:t>
             </a:r>
           </a:p>
         </p:txBody>
@@ -23311,7 +23315,7 @@
                 </a:solidFill>
                 <a:latin typeface="Calibri"/>
               </a:rPr>
-              <a:t> 78,252</a:t>
+              <a:t> 67,179</a:t>
             </a:r>
           </a:p>
         </p:txBody>
@@ -23342,11 +23346,11 @@
             <a:r>
               <a:rPr sz="1000" b="1" i="0">
                 <a:solidFill>
-                  <a:srgbClr val="059669"/>
-                </a:solidFill>
-                <a:latin typeface="Calibri"/>
-              </a:rPr>
-              <a:t> +9.5%</a:t>
+                  <a:srgbClr val="DC2626"/>
+                </a:solidFill>
+                <a:latin typeface="Calibri"/>
+              </a:rPr>
+              <a:t> -3.0%</a:t>
             </a:r>
           </a:p>
         </p:txBody>
@@ -23658,7 +23662,7 @@
                 </a:solidFill>
                 <a:latin typeface="Calibri"/>
               </a:rPr>
-              <a:t> 49,393</a:t>
+              <a:t> 49,383</a:t>
             </a:r>
           </a:p>
         </p:txBody>
@@ -23728,7 +23732,7 @@
                 </a:solidFill>
                 <a:latin typeface="Calibri"/>
               </a:rPr>
-              <a:t> 31,046</a:t>
+              <a:t> 31,001</a:t>
             </a:r>
           </a:p>
         </p:txBody>
@@ -23759,11 +23763,11 @@
             <a:r>
               <a:rPr sz="1000" b="1" i="0">
                 <a:solidFill>
-                  <a:srgbClr val="D97706"/>
-                </a:solidFill>
-                <a:latin typeface="Calibri"/>
-              </a:rPr>
-              <a:t>  0.0%</a:t>
+                  <a:srgbClr val="DC2626"/>
+                </a:solidFill>
+                <a:latin typeface="Calibri"/>
+              </a:rPr>
+              <a:t> -0.1%</a:t>
             </a:r>
           </a:p>
         </p:txBody>
@@ -24075,7 +24079,7 @@
                 </a:solidFill>
                 <a:latin typeface="Calibri"/>
               </a:rPr>
-              <a:t>    514</a:t>
+              <a:t>    505</a:t>
             </a:r>
           </a:p>
         </p:txBody>
@@ -24145,7 +24149,7 @@
                 </a:solidFill>
                 <a:latin typeface="Calibri"/>
               </a:rPr>
-              <a:t> 28,610</a:t>
+              <a:t> 19,637</a:t>
             </a:r>
           </a:p>
         </p:txBody>
@@ -24180,7 +24184,7 @@
                 </a:solidFill>
                 <a:latin typeface="Calibri"/>
               </a:rPr>
-              <a:t>+6,122%</a:t>
+              <a:t>+4,458%</a:t>
             </a:r>
           </a:p>
         </p:txBody>
@@ -24215,7 +24219,7 @@
                 </a:solidFill>
                 <a:latin typeface="Calibri"/>
               </a:rPr>
-              <a:t>&gt;&gt; Breakout — mostly Non-Paid</a:t>
+              <a:t>&gt;&gt; Breakout — 85% Non-Paid</a:t>
             </a:r>
           </a:p>
         </p:txBody>
@@ -24909,7 +24913,7 @@
                 </a:solidFill>
                 <a:latin typeface="Calibri"/>
               </a:rPr>
-              <a:t>  7,159</a:t>
+              <a:t>  7,158</a:t>
             </a:r>
           </a:p>
         </p:txBody>
@@ -24979,7 +24983,7 @@
                 </a:solidFill>
                 <a:latin typeface="Calibri"/>
               </a:rPr>
-              <a:t>  6,463</a:t>
+              <a:t>  6,462</a:t>
             </a:r>
           </a:p>
         </p:txBody>
@@ -25743,7 +25747,7 @@
                 </a:solidFill>
                 <a:latin typeface="Calibri"/>
               </a:rPr>
-              <a:t> 10,803</a:t>
+              <a:t> 10,700</a:t>
             </a:r>
           </a:p>
         </p:txBody>
@@ -25813,7 +25817,7 @@
                 </a:solidFill>
                 <a:latin typeface="Calibri"/>
               </a:rPr>
-              <a:t>  3,599</a:t>
+              <a:t>  3,054</a:t>
             </a:r>
           </a:p>
         </p:txBody>
@@ -25848,7 +25852,7 @@
                 </a:solidFill>
                 <a:latin typeface="Calibri"/>
               </a:rPr>
-              <a:t>-61.3%</a:t>
+              <a:t>-66.1%</a:t>
             </a:r>
           </a:p>
         </p:txBody>
@@ -26752,7 +26756,7 @@
                 </a:solidFill>
                 <a:latin typeface="Calibri"/>
               </a:rPr>
-              <a:t>&gt;&gt; Our Story surged to #4 — 89% Non-Paid (organic/direct). Edge Storage has the highest Paid share at 37% — review campaign ROI.</a:t>
+              <a:t>&gt;&gt; Our Story surged to #4 — 85% Non-Paid (82% Direct). Edge Storage has the highest Paid share at 37% — review campaign ROI. Data Storage Solutions Jan PVs adjusted down after spam removal.</a:t>
             </a:r>
           </a:p>
         </p:txBody>
@@ -26891,7 +26895,7 @@
                 </a:solidFill>
                 <a:latin typeface="Calibri"/>
               </a:rPr>
-              <a:t>Overall: Jan 61.0%  →  Feb 64.3%  (+3.3 pp)  |  A bounce = visitor who viewed only 1 page</a:t>
+              <a:t>Overall: Jan 61.7%  →  Feb 65.6%  (+3.9 pp)  |  A bounce = visitor who viewed only 1 page</a:t>
             </a:r>
           </a:p>
         </p:txBody>
@@ -27351,7 +27355,7 @@
                 </a:solidFill>
                 <a:latin typeface="Calibri"/>
               </a:rPr>
-              <a:t>60.8%</a:t>
+              <a:t>61.6%</a:t>
             </a:r>
           </a:p>
         </p:txBody>
@@ -27421,7 +27425,7 @@
                 </a:solidFill>
                 <a:latin typeface="Calibri"/>
               </a:rPr>
-              <a:t>64.6%</a:t>
+              <a:t>66.1%</a:t>
             </a:r>
           </a:p>
         </p:txBody>
@@ -27943,7 +27947,7 @@
                 </a:solidFill>
                 <a:latin typeface="Calibri"/>
               </a:rPr>
-              <a:t>65.5%</a:t>
+              <a:t>70.7%</a:t>
             </a:r>
           </a:p>
         </p:txBody>
@@ -27974,11 +27978,11 @@
             <a:r>
               <a:rPr sz="1300" b="1" i="0">
                 <a:solidFill>
-                  <a:srgbClr val="059669"/>
-                </a:solidFill>
-                <a:latin typeface="Calibri"/>
-              </a:rPr>
-              <a:t>65.4%</a:t>
+                  <a:srgbClr val="DC2626"/>
+                </a:solidFill>
+                <a:latin typeface="Calibri"/>
+              </a:rPr>
+              <a:t>72.0%</a:t>
             </a:r>
           </a:p>
         </p:txBody>
@@ -28500,7 +28504,7 @@
                 </a:solidFill>
                 <a:latin typeface="Calibri"/>
               </a:rPr>
-              <a:t>→  Non-Paid BR rising +3.8pp → audit Direct traffic UTMs &amp; SEO landing page quality</a:t>
+              <a:t>→  Non-Paid BR rising +4.5pp → audit Direct traffic UTMs &amp; SEO landing page quality</a:t>
             </a:r>
           </a:p>
         </p:txBody>
@@ -28570,7 +28574,7 @@
                 </a:solidFill>
                 <a:latin typeface="Calibri"/>
               </a:rPr>
-              <a:t>→  Paid Desktop-heavy (55%); Non-Paid Mobile-majority (55%) → tailor ad creatives by device</a:t>
+              <a:t>→  Paid Desktop-heavy (54.5%); Non-Paid Mobile-majority (52.8%) → tailor ad creatives by device</a:t>
             </a:r>
           </a:p>
         </p:txBody>
@@ -28822,7 +28826,7 @@
                 </a:solidFill>
                 <a:latin typeface="Calibri"/>
               </a:rPr>
-              <a:t>514</a:t>
+              <a:t>505</a:t>
             </a:r>
           </a:p>
         </p:txBody>
@@ -28935,7 +28939,7 @@
                 </a:solidFill>
                 <a:latin typeface="Calibri"/>
               </a:rPr>
-              <a:t>31,990</a:t>
+              <a:t>23,017</a:t>
             </a:r>
           </a:p>
         </p:txBody>
@@ -29048,7 +29052,7 @@
                 </a:solidFill>
                 <a:latin typeface="Calibri"/>
               </a:rPr>
-              <a:t>+6,122%</a:t>
+              <a:t>+4,458%</a:t>
             </a:r>
           </a:p>
         </p:txBody>
@@ -29161,7 +29165,7 @@
                 </a:solidFill>
                 <a:latin typeface="Calibri"/>
               </a:rPr>
-              <a:t>104</a:t>
+              <a:t>102</a:t>
             </a:r>
           </a:p>
         </p:txBody>
@@ -29274,7 +29278,7 @@
                 </a:solidFill>
                 <a:latin typeface="Calibri"/>
               </a:rPr>
-              <a:t>17,908</a:t>
+              <a:t>14,509</a:t>
             </a:r>
           </a:p>
         </p:txBody>
@@ -29387,7 +29391,7 @@
                 </a:solidFill>
                 <a:latin typeface="Calibri"/>
               </a:rPr>
-              <a:t>89% NP</a:t>
+              <a:t>85% NP</a:t>
             </a:r>
           </a:p>
         </p:txBody>
@@ -29543,7 +29547,7 @@
                 </a:solidFill>
                 <a:latin typeface="Calibri"/>
               </a:rPr>
-              <a:t>Feb Paid: 3,380 PVs  (10.6%)   |   Feb Non-Paid: 28,610 PVs  (89.4%)</a:t>
+              <a:t>Feb Paid: 3,380 PVs  (14.7%)   |   Feb Non-Paid: 19,637 PVs  (85.3%)   |   Non-Paid = 82.8% Direct  +  15.1% Referral  +  2.1% Organic</a:t>
             </a:r>
           </a:p>
         </p:txBody>
@@ -29734,7 +29738,7 @@
                 </a:solidFill>
                 <a:latin typeface="Calibri"/>
               </a:rPr>
-              <a:t>47.1%</a:t>
+              <a:t>45.1%</a:t>
             </a:r>
           </a:p>
         </p:txBody>
@@ -29769,7 +29773,7 @@
                 </a:solidFill>
                 <a:latin typeface="Calibri"/>
               </a:rPr>
-              <a:t>49 / 104 continued</a:t>
+              <a:t>46 / 102 continued</a:t>
             </a:r>
           </a:p>
         </p:txBody>
@@ -29839,7 +29843,7 @@
                 </a:solidFill>
                 <a:latin typeface="Calibri"/>
               </a:rPr>
-              <a:t>38.3%</a:t>
+              <a:t>33.3%</a:t>
             </a:r>
           </a:p>
         </p:txBody>
@@ -29874,7 +29878,7 @@
                 </a:solidFill>
                 <a:latin typeface="Calibri"/>
               </a:rPr>
-              <a:t>6,853 / 17,908 continued</a:t>
+              <a:t>4,828 / 14,509 continued</a:t>
             </a:r>
           </a:p>
         </p:txBody>
@@ -29944,7 +29948,7 @@
                 </a:solidFill>
                 <a:latin typeface="Calibri"/>
               </a:rPr>
-              <a:t>52.9%</a:t>
+              <a:t>54.9%</a:t>
             </a:r>
           </a:p>
         </p:txBody>
@@ -29979,7 +29983,7 @@
                 </a:solidFill>
                 <a:latin typeface="Calibri"/>
               </a:rPr>
-              <a:t>Beats site-wide 61.0%</a:t>
+              <a:t>Beats site-wide 61.7%</a:t>
             </a:r>
           </a:p>
         </p:txBody>
@@ -30049,7 +30053,7 @@
                 </a:solidFill>
                 <a:latin typeface="Calibri"/>
               </a:rPr>
-              <a:t>61.7%</a:t>
+              <a:t>66.7%</a:t>
             </a:r>
           </a:p>
         </p:txBody>
@@ -30084,7 +30088,7 @@
                 </a:solidFill>
                 <a:latin typeface="Calibri"/>
               </a:rPr>
-              <a:t>Matches site-wide 64.3%</a:t>
+              <a:t>Slightly above site-wide 65.6%</a:t>
             </a:r>
           </a:p>
         </p:txBody>
@@ -30275,7 +30279,7 @@
                 </a:solidFill>
                 <a:latin typeface="Calibri"/>
               </a:rPr>
-              <a:t>1,221</a:t>
+              <a:t>  883</a:t>
             </a:r>
           </a:p>
         </p:txBody>
@@ -30345,7 +30349,7 @@
                 </a:solidFill>
                 <a:latin typeface="Calibri"/>
               </a:rPr>
-              <a:t>  787</a:t>
+              <a:t>  566</a:t>
             </a:r>
           </a:p>
         </p:txBody>
@@ -30415,7 +30419,7 @@
                 </a:solidFill>
                 <a:latin typeface="Calibri"/>
               </a:rPr>
-              <a:t>  456</a:t>
+              <a:t>  385</a:t>
             </a:r>
           </a:p>
         </p:txBody>
@@ -30485,7 +30489,7 @@
                 </a:solidFill>
                 <a:latin typeface="Calibri"/>
               </a:rPr>
-              <a:t>   91</a:t>
+              <a:t>   77</a:t>
             </a:r>
           </a:p>
         </p:txBody>
@@ -30520,7 +30524,7 @@
                 </a:solidFill>
                 <a:latin typeface="Calibri"/>
               </a:rPr>
-              <a:t>Incredible Power / Unlocking AI</a:t>
+              <a:t>Data Center / D3-S4520</a:t>
             </a:r>
           </a:p>
         </p:txBody>
@@ -30555,7 +30559,7 @@
                 </a:solidFill>
                 <a:latin typeface="Calibri"/>
               </a:rPr>
-              <a:t>   34</a:t>
+              <a:t>   28</a:t>
             </a:r>
           </a:p>
         </p:txBody>
@@ -30590,7 +30594,7 @@
                 </a:solidFill>
                 <a:latin typeface="Calibri"/>
               </a:rPr>
-              <a:t>D3-S4520 / Data Center</a:t>
+              <a:t>Unlocking AI Scale (SSD)</a:t>
             </a:r>
           </a:p>
         </p:txBody>
@@ -30625,7 +30629,7 @@
                 </a:solidFill>
                 <a:latin typeface="Calibri"/>
               </a:rPr>
-              <a:t>   31</a:t>
+              <a:t>   22</a:t>
             </a:r>
           </a:p>
         </p:txBody>
@@ -30660,7 +30664,7 @@
                 </a:solidFill>
                 <a:latin typeface="Calibri"/>
               </a:rPr>
-              <a:t>&gt;&gt; our-story.html surged from 514 to 31,990 PVs (+6,122%) — 89% Non-Paid shows organic brand curiosity driving the visit; paid display brought 10%. Brand trust → product pages funnel confirmed.</a:t>
+              <a:t>&gt;&gt; our-story.html surged from 505 to 23,017 PVs (+4,458%) — 85% Non-Paid (82.8% Direct) confirms organic brand curiosity; paid display brought 15%. Spam removal cut Feb non-paid from 28,610 → 19,637. Brand trust → product pages funnel confirmed.</a:t>
             </a:r>
           </a:p>
         </p:txBody>
@@ -30764,7 +30768,7 @@
                 </a:solidFill>
                 <a:latin typeface="Calibri"/>
               </a:rPr>
-              <a:t>Device Performance: Mobile vs Desktop</a:t>
+              <a:t>Device Performance: Desktop vs Mobile</a:t>
             </a:r>
           </a:p>
         </p:txBody>
@@ -30799,7 +30803,7 @@
                 </a:solidFill>
                 <a:latin typeface="Calibri"/>
               </a:rPr>
-              <a:t>Mobile traffic share grew from 48.7% → 52.6% MoM — now the majority device on solidigm.com</a:t>
+              <a:t>Desktop leads overall: Jan 60.4% → Feb 50.4%  |  Non-Paid visitors are 52.8% Mobile  |  Paid visitors 54.5% Desktop</a:t>
             </a:r>
           </a:p>
         </p:txBody>
@@ -30990,7 +30994,7 @@
                 </a:solidFill>
                 <a:latin typeface="Calibri"/>
               </a:rPr>
-              <a:t>50.3%</a:t>
+              <a:t>60.4%</a:t>
             </a:r>
           </a:p>
         </p:txBody>
@@ -31025,7 +31029,7 @@
                 </a:solidFill>
                 <a:latin typeface="Calibri"/>
               </a:rPr>
-              <a:t> 97,048 UVs  |  BR 58.1%  |  PPV 2.55</a:t>
+              <a:t> 96,976 UVs  |  BR 58.1%  |  PPV 2.55</a:t>
             </a:r>
           </a:p>
         </p:txBody>
@@ -31138,7 +31142,7 @@
                 </a:solidFill>
                 <a:latin typeface="Calibri"/>
               </a:rPr>
-              <a:t>48.7%</a:t>
+              <a:t>36.8%</a:t>
             </a:r>
           </a:p>
         </p:txBody>
@@ -31173,7 +31177,7 @@
                 </a:solidFill>
                 <a:latin typeface="Calibri"/>
               </a:rPr>
-              <a:t> 93,959 UVs  |  BR 67.5%  |  PPV 1.73</a:t>
+              <a:t> 89,947 UVs  |  BR 68.9%  |  PPV 1.67</a:t>
             </a:r>
           </a:p>
         </p:txBody>
@@ -31286,7 +31290,7 @@
                 </a:solidFill>
                 <a:latin typeface="Calibri"/>
               </a:rPr>
-              <a:t> 4.3%</a:t>
+              <a:t> 2.8%</a:t>
             </a:r>
           </a:p>
         </p:txBody>
@@ -31321,7 +31325,7 @@
                 </a:solidFill>
                 <a:latin typeface="Calibri"/>
               </a:rPr>
-              <a:t>  8,388 UVs  |  BR 74.3%  |  PPV 1.54</a:t>
+              <a:t>  7,921 UVs  |  BR 76.8%  |  PPV 1.46</a:t>
             </a:r>
           </a:p>
         </p:txBody>
@@ -31512,7 +31516,7 @@
                 </a:solidFill>
                 <a:latin typeface="Calibri"/>
               </a:rPr>
-              <a:t>43.4%</a:t>
+              <a:t>50.4%</a:t>
             </a:r>
           </a:p>
         </p:txBody>
@@ -31547,7 +31551,7 @@
                 </a:solidFill>
                 <a:latin typeface="Calibri"/>
               </a:rPr>
-              <a:t> 84,572 UVs  |  BR 61.8%  |  PPV 2.17</a:t>
+              <a:t> 84,476 UVs  |  BR 61.8%  |  PPV 2.17</a:t>
             </a:r>
           </a:p>
         </p:txBody>
@@ -31660,7 +31664,7 @@
                 </a:solidFill>
                 <a:latin typeface="Calibri"/>
               </a:rPr>
-              <a:t>52.6%</a:t>
+              <a:t>42.8%</a:t>
             </a:r>
           </a:p>
         </p:txBody>
@@ -31695,7 +31699,7 @@
                 </a:solidFill>
                 <a:latin typeface="Calibri"/>
               </a:rPr>
-              <a:t>102,321 UVs  |  BR 69.6%  |  PPV 1.79</a:t>
+              <a:t> 94,926 UVs  |  BR 72.1%  |  PPV 1.64</a:t>
             </a:r>
           </a:p>
         </p:txBody>
@@ -31808,7 +31812,7 @@
                 </a:solidFill>
                 <a:latin typeface="Calibri"/>
               </a:rPr>
-              <a:t> 7.0%</a:t>
+              <a:t> 6.8%</a:t>
             </a:r>
           </a:p>
         </p:txBody>
@@ -31843,7 +31847,7 @@
                 </a:solidFill>
                 <a:latin typeface="Calibri"/>
               </a:rPr>
-              <a:t> 13,657 UVs  |  BR 70.1%  |  PPV 2.04</a:t>
+              <a:t> 13,082 UVs  |  BR 72.5%  |  PPV 1.91</a:t>
             </a:r>
           </a:p>
         </p:txBody>
@@ -31878,7 +31882,7 @@
                 </a:solidFill>
                 <a:latin typeface="Calibri"/>
               </a:rPr>
-              <a:t>&gt;&gt; Paid visitors: 55% Desktop / 39% Mobile.  Non-Paid visitors: 41% Desktop / 55% Mobile — mobile is the non-paid majority. Align ad targeting and UX accordingly.</a:t>
+              <a:t>&gt;&gt; Paid visitors: 54.5% Desktop / 38.9% Mobile.  Non-Paid visitors: 42.8% Desktop / 52.8% Mobile — mobile is the non-paid majority. Desktop leads overall (50%+). Spam removal revealed true device split.</a:t>
             </a:r>
           </a:p>
         </p:txBody>

--- a/webanalytics/Solidigm_Analytics_Report_JanFeb_FY26.pptx
+++ b/webanalytics/Solidigm_Analytics_Report_JanFeb_FY26.pptx
@@ -3364,7 +3364,7 @@
                 </a:solidFill>
                 <a:latin typeface="Calibri"/>
               </a:rPr>
-              <a:t>Clean Page Views (spam removed)</a:t>
+              <a:t>Clean Page Views (Jan + Feb)</a:t>
             </a:r>
           </a:p>
         </p:txBody>
@@ -3399,7 +3399,7 @@
                 </a:solidFill>
                 <a:latin typeface="Calibri"/>
               </a:rPr>
-              <a:t>~376K</a:t>
+              <a:t>~44K</a:t>
             </a:r>
           </a:p>
         </p:txBody>
@@ -3434,7 +3434,7 @@
                 </a:solidFill>
                 <a:latin typeface="Calibri"/>
               </a:rPr>
-              <a:t>Unique Visitors</a:t>
+              <a:t>Spam Referrer PVs Removed</a:t>
             </a:r>
           </a:p>
         </p:txBody>
@@ -3469,11 +3469,7 @@
                 </a:solidFill>
                 <a:latin typeface="Calibri"/>
               </a:rPr>
-              <a:t>Spam</a:t>
-            </a:r>
-            <a:br/>
-            <a:r>
-              <a:t>Removed</a:t>
+              <a:t>~11%</a:t>
             </a:r>
           </a:p>
         </p:txBody>
@@ -3508,7 +3504,7 @@
                 </a:solidFill>
                 <a:latin typeface="Calibri"/>
               </a:rPr>
-              <a:t>Bots &amp; Referrer Spam Filtered</a:t>
+              <a:t>Bot Rows Also Filtered</a:t>
             </a:r>
           </a:p>
         </p:txBody>
@@ -3516,6 +3512,41 @@
       <p:sp>
         <p:nvSpPr>
           <p:cNvPr id="13" name="TextBox 12"/>
+          <p:cNvSpPr txBox="1"/>
+          <p:nvPr/>
+        </p:nvSpPr>
+        <p:spPr>
+          <a:xfrm>
+            <a:off x="731520" y="4069080"/>
+            <a:ext cx="10789920" cy="347472"/>
+          </a:xfrm>
+          <a:prstGeom prst="rect">
+            <a:avLst/>
+          </a:prstGeom>
+          <a:noFill/>
+        </p:spPr>
+        <p:txBody>
+          <a:bodyPr wrap="square" lIns="0" rIns="0" tIns="0" bIns="0">
+            <a:spAutoFit/>
+          </a:bodyPr>
+          <a:lstStyle/>
+          <a:p>
+            <a:pPr algn="l"/>
+            <a:r>
+              <a:rPr sz="1000" b="0" i="0">
+                <a:solidFill>
+                  <a:srgbClr val="9AB0CC"/>
+                </a:solidFill>
+                <a:latin typeface="Calibri"/>
+              </a:rPr>
+              <a:t>Spam breakdown: Jan 13,559 PVs removed  |  Feb 30,477 PVs removed  |  Top domains: relaxincentralpark.site · visitgalapagos.site · sunstones.site · glimmergems.site</a:t>
+            </a:r>
+          </a:p>
+        </p:txBody>
+      </p:sp>
+      <p:sp>
+        <p:nvSpPr>
+          <p:cNvPr id="14" name="TextBox 13"/>
           <p:cNvSpPr txBox="1"/>
           <p:nvPr/>
         </p:nvSpPr>
